--- a/PPTs/04_AI Workflow_n8n.pptx
+++ b/PPTs/04_AI Workflow_n8n.pptx
@@ -5,23 +5,37 @@
     <p:sldMasterId id="2147483660" r:id="rId1"/>
   </p:sldMasterIdLst>
   <p:notesMasterIdLst>
-    <p:notesMasterId r:id="rId13"/>
+    <p:notesMasterId r:id="rId27"/>
   </p:notesMasterIdLst>
   <p:handoutMasterIdLst>
-    <p:handoutMasterId r:id="rId14"/>
+    <p:handoutMasterId r:id="rId28"/>
   </p:handoutMasterIdLst>
   <p:sldIdLst>
     <p:sldId id="256" r:id="rId2"/>
     <p:sldId id="1136" r:id="rId3"/>
     <p:sldId id="1140" r:id="rId4"/>
     <p:sldId id="1137" r:id="rId5"/>
-    <p:sldId id="1142" r:id="rId6"/>
-    <p:sldId id="1141" r:id="rId7"/>
-    <p:sldId id="1144" r:id="rId8"/>
-    <p:sldId id="1145" r:id="rId9"/>
-    <p:sldId id="1138" r:id="rId10"/>
-    <p:sldId id="1143" r:id="rId11"/>
-    <p:sldId id="1139" r:id="rId12"/>
+    <p:sldId id="1224" r:id="rId6"/>
+    <p:sldId id="1153" r:id="rId7"/>
+    <p:sldId id="1230" r:id="rId8"/>
+    <p:sldId id="1142" r:id="rId9"/>
+    <p:sldId id="1141" r:id="rId10"/>
+    <p:sldId id="1228" r:id="rId11"/>
+    <p:sldId id="1229" r:id="rId12"/>
+    <p:sldId id="1232" r:id="rId13"/>
+    <p:sldId id="1233" r:id="rId14"/>
+    <p:sldId id="1234" r:id="rId15"/>
+    <p:sldId id="1235" r:id="rId16"/>
+    <p:sldId id="1239" r:id="rId17"/>
+    <p:sldId id="1236" r:id="rId18"/>
+    <p:sldId id="1237" r:id="rId19"/>
+    <p:sldId id="1238" r:id="rId20"/>
+    <p:sldId id="1231" r:id="rId21"/>
+    <p:sldId id="1144" r:id="rId22"/>
+    <p:sldId id="1145" r:id="rId23"/>
+    <p:sldId id="1138" r:id="rId24"/>
+    <p:sldId id="1143" r:id="rId25"/>
+    <p:sldId id="1139" r:id="rId26"/>
   </p:sldIdLst>
   <p:sldSz cx="12192000" cy="6858000"/>
   <p:notesSz cx="6858000" cy="9144000"/>
@@ -133,8 +147,22 @@
             <p14:sldId id="1136"/>
             <p14:sldId id="1140"/>
             <p14:sldId id="1137"/>
+            <p14:sldId id="1224"/>
+            <p14:sldId id="1153"/>
+            <p14:sldId id="1230"/>
             <p14:sldId id="1142"/>
             <p14:sldId id="1141"/>
+            <p14:sldId id="1228"/>
+            <p14:sldId id="1229"/>
+            <p14:sldId id="1232"/>
+            <p14:sldId id="1233"/>
+            <p14:sldId id="1234"/>
+            <p14:sldId id="1235"/>
+            <p14:sldId id="1239"/>
+            <p14:sldId id="1236"/>
+            <p14:sldId id="1237"/>
+            <p14:sldId id="1238"/>
+            <p14:sldId id="1231"/>
             <p14:sldId id="1144"/>
             <p14:sldId id="1145"/>
             <p14:sldId id="1138"/>
@@ -264,7 +292,7 @@
                 <a:latin typeface="맑은 고딕" panose="020B0503020000020004" pitchFamily="50" charset="-127"/>
                 <a:ea typeface="맑은 고딕" panose="020B0503020000020004" pitchFamily="50" charset="-127"/>
               </a:rPr>
-              <a:t>2026-07-31</a:t>
+              <a:t>2026-08-05</a:t>
             </a:fld>
             <a:endParaRPr lang="ko-KR" altLang="en-US">
               <a:latin typeface="맑은 고딕" panose="020B0503020000020004" pitchFamily="50" charset="-127"/>
@@ -450,7 +478,7 @@
           <a:p>
             <a:fld id="{43E1C3DD-4A19-441D-907C-380838DB51C4}" type="datetime1">
               <a:rPr lang="ko-KR" altLang="en-US" noProof="0" smtClean="0"/>
-              <a:t>2026-07-31</a:t>
+              <a:t>2026-08-05</a:t>
             </a:fld>
             <a:endParaRPr lang="ko-KR" altLang="en-US" noProof="0"/>
           </a:p>
@@ -830,6 +858,254 @@
 </p:notes>
 </file>
 
+<file path=ppt/notesSlides/notesSlide2.xml><?xml version="1.0" encoding="utf-8"?>
+<p:notes xmlns:a="http://schemas.openxmlformats.org/drawingml/2006/main" xmlns:r="http://schemas.openxmlformats.org/officeDocument/2006/relationships" xmlns:p="http://schemas.openxmlformats.org/presentationml/2006/main">
+  <p:cSld>
+    <p:spTree>
+      <p:nvGrpSpPr>
+        <p:cNvPr id="1" name="">
+          <a:extLst>
+            <a:ext uri="{FF2B5EF4-FFF2-40B4-BE49-F238E27FC236}">
+              <a16:creationId xmlns:a16="http://schemas.microsoft.com/office/drawing/2014/main" id="{5AA6D464-31C2-C029-A5BF-92F2325227EC}"/>
+            </a:ext>
+          </a:extLst>
+        </p:cNvPr>
+        <p:cNvGrpSpPr/>
+        <p:nvPr/>
+      </p:nvGrpSpPr>
+      <p:grpSpPr>
+        <a:xfrm>
+          <a:off x="0" y="0"/>
+          <a:ext cx="0" cy="0"/>
+          <a:chOff x="0" y="0"/>
+          <a:chExt cx="0" cy="0"/>
+        </a:xfrm>
+      </p:grpSpPr>
+      <p:sp>
+        <p:nvSpPr>
+          <p:cNvPr id="2" name="슬라이드 이미지 개체 틀 1">
+            <a:extLst>
+              <a:ext uri="{FF2B5EF4-FFF2-40B4-BE49-F238E27FC236}">
+                <a16:creationId xmlns:a16="http://schemas.microsoft.com/office/drawing/2014/main" id="{F9FA5761-B988-BCCC-7BC5-C84AABE060B4}"/>
+              </a:ext>
+            </a:extLst>
+          </p:cNvPr>
+          <p:cNvSpPr>
+            <a:spLocks noGrp="1" noRot="1" noChangeAspect="1"/>
+          </p:cNvSpPr>
+          <p:nvPr>
+            <p:ph type="sldImg"/>
+          </p:nvPr>
+        </p:nvSpPr>
+        <p:spPr>
+          <a:xfrm>
+            <a:off x="685800" y="1143000"/>
+            <a:ext cx="5486400" cy="3086100"/>
+          </a:xfrm>
+        </p:spPr>
+      </p:sp>
+      <p:sp>
+        <p:nvSpPr>
+          <p:cNvPr id="3" name="슬라이드 노트 개체 틀 2">
+            <a:extLst>
+              <a:ext uri="{FF2B5EF4-FFF2-40B4-BE49-F238E27FC236}">
+                <a16:creationId xmlns:a16="http://schemas.microsoft.com/office/drawing/2014/main" id="{BA49240A-4FFF-8D87-9DC9-6B6681071557}"/>
+              </a:ext>
+            </a:extLst>
+          </p:cNvPr>
+          <p:cNvSpPr>
+            <a:spLocks noGrp="1"/>
+          </p:cNvSpPr>
+          <p:nvPr>
+            <p:ph type="body" idx="1"/>
+          </p:nvPr>
+        </p:nvSpPr>
+        <p:spPr/>
+        <p:txBody>
+          <a:bodyPr rtlCol="0"/>
+          <a:lstStyle/>
+          <a:p>
+            <a:pPr rtl="0"/>
+            <a:endParaRPr lang="ko-KR" altLang="en-US">
+              <a:latin typeface="맑은 고딕" panose="020B0503020000020004" pitchFamily="50" charset="-127"/>
+              <a:ea typeface="맑은 고딕" panose="020B0503020000020004" pitchFamily="50" charset="-127"/>
+            </a:endParaRPr>
+          </a:p>
+        </p:txBody>
+      </p:sp>
+      <p:sp>
+        <p:nvSpPr>
+          <p:cNvPr id="4" name="슬라이드 번호 개체 틀 3">
+            <a:extLst>
+              <a:ext uri="{FF2B5EF4-FFF2-40B4-BE49-F238E27FC236}">
+                <a16:creationId xmlns:a16="http://schemas.microsoft.com/office/drawing/2014/main" id="{0FB0160F-F34B-A542-2107-6F57352A40E7}"/>
+              </a:ext>
+            </a:extLst>
+          </p:cNvPr>
+          <p:cNvSpPr>
+            <a:spLocks noGrp="1"/>
+          </p:cNvSpPr>
+          <p:nvPr>
+            <p:ph type="sldNum" sz="quarter" idx="10"/>
+          </p:nvPr>
+        </p:nvSpPr>
+        <p:spPr/>
+        <p:txBody>
+          <a:bodyPr rtlCol="0"/>
+          <a:lstStyle/>
+          <a:p>
+            <a:pPr rtl="0"/>
+            <a:fld id="{DF61EA0F-A667-4B49-8422-0062BC55E249}" type="slidenum">
+              <a:rPr lang="en-US" altLang="ko-KR" smtClean="0">
+                <a:latin typeface="맑은 고딕" panose="020B0503020000020004" pitchFamily="50" charset="-127"/>
+                <a:ea typeface="맑은 고딕" panose="020B0503020000020004" pitchFamily="50" charset="-127"/>
+              </a:rPr>
+              <a:t>7</a:t>
+            </a:fld>
+            <a:endParaRPr lang="ko-KR" altLang="en-US">
+              <a:latin typeface="맑은 고딕" panose="020B0503020000020004" pitchFamily="50" charset="-127"/>
+              <a:ea typeface="맑은 고딕" panose="020B0503020000020004" pitchFamily="50" charset="-127"/>
+            </a:endParaRPr>
+          </a:p>
+        </p:txBody>
+      </p:sp>
+    </p:spTree>
+    <p:extLst>
+      <p:ext uri="{BB962C8B-B14F-4D97-AF65-F5344CB8AC3E}">
+        <p14:creationId xmlns:p14="http://schemas.microsoft.com/office/powerpoint/2010/main" val="4011361475"/>
+      </p:ext>
+    </p:extLst>
+  </p:cSld>
+  <p:clrMapOvr>
+    <a:masterClrMapping/>
+  </p:clrMapOvr>
+</p:notes>
+</file>
+
+<file path=ppt/notesSlides/notesSlide3.xml><?xml version="1.0" encoding="utf-8"?>
+<p:notes xmlns:a="http://schemas.openxmlformats.org/drawingml/2006/main" xmlns:r="http://schemas.openxmlformats.org/officeDocument/2006/relationships" xmlns:p="http://schemas.openxmlformats.org/presentationml/2006/main">
+  <p:cSld>
+    <p:spTree>
+      <p:nvGrpSpPr>
+        <p:cNvPr id="1" name="">
+          <a:extLst>
+            <a:ext uri="{FF2B5EF4-FFF2-40B4-BE49-F238E27FC236}">
+              <a16:creationId xmlns:a16="http://schemas.microsoft.com/office/drawing/2014/main" id="{B823068F-4B08-142C-1EB5-1D8DA9F68BD3}"/>
+            </a:ext>
+          </a:extLst>
+        </p:cNvPr>
+        <p:cNvGrpSpPr/>
+        <p:nvPr/>
+      </p:nvGrpSpPr>
+      <p:grpSpPr>
+        <a:xfrm>
+          <a:off x="0" y="0"/>
+          <a:ext cx="0" cy="0"/>
+          <a:chOff x="0" y="0"/>
+          <a:chExt cx="0" cy="0"/>
+        </a:xfrm>
+      </p:grpSpPr>
+      <p:sp>
+        <p:nvSpPr>
+          <p:cNvPr id="2" name="슬라이드 이미지 개체 틀 1">
+            <a:extLst>
+              <a:ext uri="{FF2B5EF4-FFF2-40B4-BE49-F238E27FC236}">
+                <a16:creationId xmlns:a16="http://schemas.microsoft.com/office/drawing/2014/main" id="{C79132AC-EB19-D648-6B32-3D5EB194B28D}"/>
+              </a:ext>
+            </a:extLst>
+          </p:cNvPr>
+          <p:cNvSpPr>
+            <a:spLocks noGrp="1" noRot="1" noChangeAspect="1"/>
+          </p:cNvSpPr>
+          <p:nvPr>
+            <p:ph type="sldImg"/>
+          </p:nvPr>
+        </p:nvSpPr>
+        <p:spPr>
+          <a:xfrm>
+            <a:off x="685800" y="1143000"/>
+            <a:ext cx="5486400" cy="3086100"/>
+          </a:xfrm>
+        </p:spPr>
+      </p:sp>
+      <p:sp>
+        <p:nvSpPr>
+          <p:cNvPr id="3" name="슬라이드 노트 개체 틀 2">
+            <a:extLst>
+              <a:ext uri="{FF2B5EF4-FFF2-40B4-BE49-F238E27FC236}">
+                <a16:creationId xmlns:a16="http://schemas.microsoft.com/office/drawing/2014/main" id="{2BE2CB05-3A96-52D9-758B-A2281566DC4D}"/>
+              </a:ext>
+            </a:extLst>
+          </p:cNvPr>
+          <p:cNvSpPr>
+            <a:spLocks noGrp="1"/>
+          </p:cNvSpPr>
+          <p:nvPr>
+            <p:ph type="body" idx="1"/>
+          </p:nvPr>
+        </p:nvSpPr>
+        <p:spPr/>
+        <p:txBody>
+          <a:bodyPr rtlCol="0"/>
+          <a:lstStyle/>
+          <a:p>
+            <a:pPr rtl="0"/>
+            <a:endParaRPr lang="ko-KR" altLang="en-US">
+              <a:latin typeface="맑은 고딕" panose="020B0503020000020004" pitchFamily="50" charset="-127"/>
+              <a:ea typeface="맑은 고딕" panose="020B0503020000020004" pitchFamily="50" charset="-127"/>
+            </a:endParaRPr>
+          </a:p>
+        </p:txBody>
+      </p:sp>
+      <p:sp>
+        <p:nvSpPr>
+          <p:cNvPr id="4" name="슬라이드 번호 개체 틀 3">
+            <a:extLst>
+              <a:ext uri="{FF2B5EF4-FFF2-40B4-BE49-F238E27FC236}">
+                <a16:creationId xmlns:a16="http://schemas.microsoft.com/office/drawing/2014/main" id="{C984B633-4D5D-2A75-A02C-A7217356BE5E}"/>
+              </a:ext>
+            </a:extLst>
+          </p:cNvPr>
+          <p:cNvSpPr>
+            <a:spLocks noGrp="1"/>
+          </p:cNvSpPr>
+          <p:nvPr>
+            <p:ph type="sldNum" sz="quarter" idx="10"/>
+          </p:nvPr>
+        </p:nvSpPr>
+        <p:spPr/>
+        <p:txBody>
+          <a:bodyPr rtlCol="0"/>
+          <a:lstStyle/>
+          <a:p>
+            <a:pPr rtl="0"/>
+            <a:fld id="{DF61EA0F-A667-4B49-8422-0062BC55E249}" type="slidenum">
+              <a:rPr lang="en-US" altLang="ko-KR" smtClean="0">
+                <a:latin typeface="맑은 고딕" panose="020B0503020000020004" pitchFamily="50" charset="-127"/>
+                <a:ea typeface="맑은 고딕" panose="020B0503020000020004" pitchFamily="50" charset="-127"/>
+              </a:rPr>
+              <a:t>20</a:t>
+            </a:fld>
+            <a:endParaRPr lang="ko-KR" altLang="en-US">
+              <a:latin typeface="맑은 고딕" panose="020B0503020000020004" pitchFamily="50" charset="-127"/>
+              <a:ea typeface="맑은 고딕" panose="020B0503020000020004" pitchFamily="50" charset="-127"/>
+            </a:endParaRPr>
+          </a:p>
+        </p:txBody>
+      </p:sp>
+    </p:spTree>
+    <p:extLst>
+      <p:ext uri="{BB962C8B-B14F-4D97-AF65-F5344CB8AC3E}">
+        <p14:creationId xmlns:p14="http://schemas.microsoft.com/office/powerpoint/2010/main" val="1331595286"/>
+      </p:ext>
+    </p:extLst>
+  </p:cSld>
+  <p:clrMapOvr>
+    <a:masterClrMapping/>
+  </p:clrMapOvr>
+</p:notes>
+</file>
+
 <file path=ppt/slideLayouts/slideLayout1.xml><?xml version="1.0" encoding="utf-8"?>
 <p:sldLayout xmlns:a="http://schemas.openxmlformats.org/drawingml/2006/main" xmlns:r="http://schemas.openxmlformats.org/officeDocument/2006/relationships" xmlns:p="http://schemas.openxmlformats.org/presentationml/2006/main" preserve="1" userDrawn="1">
   <p:cSld name="제목 슬라이드">
@@ -1298,7 +1574,7 @@
           <a:p>
             <a:fld id="{990475B5-67CA-4281-BDCA-DA943C3C8EB3}" type="datetime1">
               <a:rPr lang="ko-KR" altLang="en-US" noProof="0" smtClean="0"/>
-              <a:t>2026-07-31</a:t>
+              <a:t>2026-08-05</a:t>
             </a:fld>
             <a:endParaRPr lang="ko-KR" altLang="en-US" noProof="0"/>
           </a:p>
@@ -1952,7 +2228,7 @@
           <a:p>
             <a:fld id="{48A87A34-81AB-432B-8DAE-1953F412C126}" type="datetimeFigureOut">
               <a:rPr lang="en-US" smtClean="0"/>
-              <a:t>7/31/2026</a:t>
+              <a:t>8/5/2026</a:t>
             </a:fld>
             <a:endParaRPr lang="en-US" dirty="0"/>
           </a:p>
@@ -2248,7 +2524,7 @@
           <a:p>
             <a:fld id="{C655C81E-72E7-4D05-94B5-F45B321A525D}" type="datetime1">
               <a:rPr lang="ko-KR" altLang="en-US" noProof="0" smtClean="0"/>
-              <a:t>2026-07-31</a:t>
+              <a:t>2026-08-05</a:t>
             </a:fld>
             <a:endParaRPr lang="ko-KR" altLang="en-US" noProof="0" dirty="0">
               <a:latin typeface="맑은 고딕" panose="020B0503020000020004" pitchFamily="50" charset="-127"/>
@@ -3049,7 +3325,7 @@
         <p:cNvPr id="1" name="">
           <a:extLst>
             <a:ext uri="{FF2B5EF4-FFF2-40B4-BE49-F238E27FC236}">
-              <a16:creationId xmlns:a16="http://schemas.microsoft.com/office/drawing/2014/main" id="{CDFE7401-AD49-931E-5629-866E258F732A}"/>
+              <a16:creationId xmlns:a16="http://schemas.microsoft.com/office/drawing/2014/main" id="{7CB4D1AC-C48D-A42C-9FB0-5AD27899E779}"/>
             </a:ext>
           </a:extLst>
         </p:cNvPr>
@@ -3069,7 +3345,7 @@
           <p:cNvPr id="4" name="슬라이드 번호 개체 틀 3">
             <a:extLst>
               <a:ext uri="{FF2B5EF4-FFF2-40B4-BE49-F238E27FC236}">
-                <a16:creationId xmlns:a16="http://schemas.microsoft.com/office/drawing/2014/main" id="{D22E6590-F5A2-3419-2996-7FAFE33D489D}"/>
+                <a16:creationId xmlns:a16="http://schemas.microsoft.com/office/drawing/2014/main" id="{B2A385A8-50F6-51BA-8D1C-11A66B4DF225}"/>
               </a:ext>
             </a:extLst>
           </p:cNvPr>
@@ -3104,7 +3380,7 @@
           <p:cNvPr id="3" name="제목 1">
             <a:extLst>
               <a:ext uri="{FF2B5EF4-FFF2-40B4-BE49-F238E27FC236}">
-                <a16:creationId xmlns:a16="http://schemas.microsoft.com/office/drawing/2014/main" id="{41DF8B59-661E-605A-CFC9-9B1A7684FEE6}"/>
+                <a16:creationId xmlns:a16="http://schemas.microsoft.com/office/drawing/2014/main" id="{C22965B5-A81A-2008-5062-EB1615BEF700}"/>
               </a:ext>
             </a:extLst>
           </p:cNvPr>
@@ -3149,37 +3425,20 @@
           <a:p>
             <a:pPr algn="l"/>
             <a:r>
-              <a:rPr lang="en-US" altLang="ko-KR" sz="2800" cap="none" dirty="0">
-                <a:solidFill>
-                  <a:schemeClr val="bg2">
-                    <a:lumMod val="25000"/>
-                  </a:schemeClr>
-                </a:solidFill>
-                <a:latin typeface="D2Coding" panose="020B0609020101020101" pitchFamily="49" charset="-127"/>
-                <a:ea typeface="D2Coding" panose="020B0609020101020101" pitchFamily="49" charset="-127"/>
-                <a:cs typeface="Segoe UI Light" panose="020B0502040204020203" pitchFamily="34" charset="0"/>
-              </a:rPr>
-              <a:t>n8n dances with LLM</a:t>
-            </a:r>
-            <a:endParaRPr lang="ko-KR" altLang="en-US" sz="2800" cap="none" dirty="0">
-              <a:solidFill>
-                <a:schemeClr val="bg2">
-                  <a:lumMod val="25000"/>
-                </a:schemeClr>
-              </a:solidFill>
-              <a:latin typeface="D2Coding" panose="020B0609020101020101" pitchFamily="49" charset="-127"/>
-              <a:ea typeface="D2Coding" panose="020B0609020101020101" pitchFamily="49" charset="-127"/>
-              <a:cs typeface="Segoe UI Light" panose="020B0502040204020203" pitchFamily="34" charset="0"/>
-            </a:endParaRPr>
+              <a:rPr lang="en-US" altLang="ko-KR" sz="2800" b="1" cap="none" dirty="0">
+                <a:latin typeface="Lora" pitchFamily="2" charset="0"/>
+              </a:rPr>
+              <a:t>API</a:t>
+            </a:r>
           </a:p>
         </p:txBody>
       </p:sp>
       <p:sp>
         <p:nvSpPr>
-          <p:cNvPr id="2" name="TextBox 1">
+          <p:cNvPr id="6" name="TextBox 5">
             <a:extLst>
               <a:ext uri="{FF2B5EF4-FFF2-40B4-BE49-F238E27FC236}">
-                <a16:creationId xmlns:a16="http://schemas.microsoft.com/office/drawing/2014/main" id="{645F3050-E51F-C7FB-58C2-E1F5336796F0}"/>
+                <a16:creationId xmlns:a16="http://schemas.microsoft.com/office/drawing/2014/main" id="{22195BCE-20D1-BBC0-F7A6-829398008ADF}"/>
               </a:ext>
             </a:extLst>
           </p:cNvPr>
@@ -3188,8 +3447,8 @@
         </p:nvSpPr>
         <p:spPr>
           <a:xfrm>
-            <a:off x="524410" y="1281868"/>
-            <a:ext cx="11143180" cy="2533707"/>
+            <a:off x="581024" y="1978410"/>
+            <a:ext cx="11229975" cy="2912849"/>
           </a:xfrm>
           <a:prstGeom prst="rect">
             <a:avLst/>
@@ -3197,396 +3456,54 @@
           <a:noFill/>
         </p:spPr>
         <p:txBody>
-          <a:bodyPr wrap="square" rtlCol="0">
+          <a:bodyPr wrap="square">
             <a:spAutoFit/>
           </a:bodyPr>
           <a:lstStyle/>
           <a:p>
             <a:pPr>
               <a:lnSpc>
-                <a:spcPct val="150000"/>
+                <a:spcPct val="200000"/>
               </a:lnSpc>
+              <a:buNone/>
             </a:pPr>
             <a:r>
-              <a:rPr lang="en-US" altLang="ko-KR" dirty="0">
-                <a:latin typeface="D2Coding" panose="020B0609020101020101" pitchFamily="49" charset="-127"/>
-                <a:ea typeface="D2Coding" panose="020B0609020101020101" pitchFamily="49" charset="-127"/>
-              </a:rPr>
-              <a:t>LLM</a:t>
-            </a:r>
-            <a:r>
-              <a:rPr lang="ko-KR" altLang="en-US" dirty="0">
-                <a:latin typeface="D2Coding" panose="020B0609020101020101" pitchFamily="49" charset="-127"/>
-                <a:ea typeface="D2Coding" panose="020B0609020101020101" pitchFamily="49" charset="-127"/>
-              </a:rPr>
-              <a:t>에게 </a:t>
-            </a:r>
-            <a:r>
-              <a:rPr lang="en-US" altLang="ko-KR" dirty="0">
-                <a:latin typeface="D2Coding" panose="020B0609020101020101" pitchFamily="49" charset="-127"/>
-                <a:ea typeface="D2Coding" panose="020B0609020101020101" pitchFamily="49" charset="-127"/>
-              </a:rPr>
-              <a:t>n8n </a:t>
-            </a:r>
-            <a:r>
-              <a:rPr lang="ko-KR" altLang="en-US" dirty="0">
-                <a:latin typeface="D2Coding" panose="020B0609020101020101" pitchFamily="49" charset="-127"/>
-                <a:ea typeface="D2Coding" panose="020B0609020101020101" pitchFamily="49" charset="-127"/>
-              </a:rPr>
-              <a:t>코드를 요청해서 복사하고 </a:t>
-            </a:r>
-            <a:r>
-              <a:rPr lang="en-US" altLang="ko-KR" dirty="0">
-                <a:latin typeface="D2Coding" panose="020B0609020101020101" pitchFamily="49" charset="-127"/>
-                <a:ea typeface="D2Coding" panose="020B0609020101020101" pitchFamily="49" charset="-127"/>
-              </a:rPr>
-              <a:t>n8n</a:t>
-            </a:r>
-            <a:r>
-              <a:rPr lang="ko-KR" altLang="en-US" dirty="0">
-                <a:latin typeface="D2Coding" panose="020B0609020101020101" pitchFamily="49" charset="-127"/>
-                <a:ea typeface="D2Coding" panose="020B0609020101020101" pitchFamily="49" charset="-127"/>
-              </a:rPr>
-              <a:t>에 붙여넣기 </a:t>
-            </a:r>
-            <a:r>
-              <a:rPr lang="en-US" altLang="ko-KR" dirty="0">
-                <a:latin typeface="D2Coding" panose="020B0609020101020101" pitchFamily="49" charset="-127"/>
-                <a:ea typeface="D2Coding" panose="020B0609020101020101" pitchFamily="49" charset="-127"/>
-                <a:sym typeface="Wingdings" panose="05000000000000000000" pitchFamily="2" charset="2"/>
-              </a:rPr>
-              <a:t> LLM</a:t>
-            </a:r>
-            <a:r>
-              <a:rPr lang="ko-KR" altLang="en-US" dirty="0">
-                <a:latin typeface="D2Coding" panose="020B0609020101020101" pitchFamily="49" charset="-127"/>
-                <a:ea typeface="D2Coding" panose="020B0609020101020101" pitchFamily="49" charset="-127"/>
-                <a:sym typeface="Wingdings" panose="05000000000000000000" pitchFamily="2" charset="2"/>
-              </a:rPr>
-              <a:t>에게 </a:t>
-            </a:r>
-            <a:r>
-              <a:rPr lang="en-US" altLang="ko-KR" dirty="0">
-                <a:latin typeface="D2Coding" panose="020B0609020101020101" pitchFamily="49" charset="-127"/>
-                <a:ea typeface="D2Coding" panose="020B0609020101020101" pitchFamily="49" charset="-127"/>
-                <a:sym typeface="Wingdings" panose="05000000000000000000" pitchFamily="2" charset="2"/>
-              </a:rPr>
-              <a:t>MCP serve</a:t>
-            </a:r>
-            <a:r>
-              <a:rPr lang="ko-KR" altLang="en-US" dirty="0">
-                <a:latin typeface="D2Coding" panose="020B0609020101020101" pitchFamily="49" charset="-127"/>
-                <a:ea typeface="D2Coding" panose="020B0609020101020101" pitchFamily="49" charset="-127"/>
-                <a:sym typeface="Wingdings" panose="05000000000000000000" pitchFamily="2" charset="2"/>
-              </a:rPr>
-              <a:t>를 붙여 </a:t>
-            </a:r>
-            <a:r>
-              <a:rPr lang="en-US" altLang="ko-KR" dirty="0">
-                <a:latin typeface="D2Coding" panose="020B0609020101020101" pitchFamily="49" charset="-127"/>
-                <a:ea typeface="D2Coding" panose="020B0609020101020101" pitchFamily="49" charset="-127"/>
-                <a:sym typeface="Wingdings" panose="05000000000000000000" pitchFamily="2" charset="2"/>
-              </a:rPr>
-              <a:t>n8n </a:t>
-            </a:r>
-            <a:r>
-              <a:rPr lang="ko-KR" altLang="en-US" dirty="0">
-                <a:latin typeface="D2Coding" panose="020B0609020101020101" pitchFamily="49" charset="-127"/>
-                <a:ea typeface="D2Coding" panose="020B0609020101020101" pitchFamily="49" charset="-127"/>
-                <a:sym typeface="Wingdings" panose="05000000000000000000" pitchFamily="2" charset="2"/>
-              </a:rPr>
-              <a:t>코드를 요청하고 나의 로컬 </a:t>
-            </a:r>
-            <a:r>
-              <a:rPr lang="en-US" altLang="ko-KR" dirty="0">
-                <a:latin typeface="D2Coding" panose="020B0609020101020101" pitchFamily="49" charset="-127"/>
-                <a:ea typeface="D2Coding" panose="020B0609020101020101" pitchFamily="49" charset="-127"/>
-                <a:sym typeface="Wingdings" panose="05000000000000000000" pitchFamily="2" charset="2"/>
-              </a:rPr>
-              <a:t>n8n</a:t>
-            </a:r>
-            <a:r>
-              <a:rPr lang="ko-KR" altLang="en-US" dirty="0">
-                <a:latin typeface="D2Coding" panose="020B0609020101020101" pitchFamily="49" charset="-127"/>
-                <a:ea typeface="D2Coding" panose="020B0609020101020101" pitchFamily="49" charset="-127"/>
-                <a:sym typeface="Wingdings" panose="05000000000000000000" pitchFamily="2" charset="2"/>
-              </a:rPr>
-              <a:t>에서 직접 작동시키기 </a:t>
-            </a:r>
-            <a:r>
-              <a:rPr lang="en-US" altLang="ko-KR" dirty="0">
-                <a:latin typeface="D2Coding" panose="020B0609020101020101" pitchFamily="49" charset="-127"/>
-                <a:ea typeface="D2Coding" panose="020B0609020101020101" pitchFamily="49" charset="-127"/>
-                <a:sym typeface="Wingdings" panose="05000000000000000000" pitchFamily="2" charset="2"/>
-              </a:rPr>
-              <a:t>(</a:t>
-            </a:r>
-            <a:r>
-              <a:rPr lang="en-US" altLang="ko-KR" dirty="0" err="1">
-                <a:latin typeface="D2Coding" panose="020B0609020101020101" pitchFamily="49" charset="-127"/>
-                <a:ea typeface="D2Coding" panose="020B0609020101020101" pitchFamily="49" charset="-127"/>
-                <a:sym typeface="Wingdings" panose="05000000000000000000" pitchFamily="2" charset="2"/>
-              </a:rPr>
-              <a:t>json</a:t>
-            </a:r>
-            <a:r>
-              <a:rPr lang="ko-KR" altLang="en-US" dirty="0">
-                <a:latin typeface="D2Coding" panose="020B0609020101020101" pitchFamily="49" charset="-127"/>
-                <a:ea typeface="D2Coding" panose="020B0609020101020101" pitchFamily="49" charset="-127"/>
-                <a:sym typeface="Wingdings" panose="05000000000000000000" pitchFamily="2" charset="2"/>
-              </a:rPr>
-              <a:t>으로 소통</a:t>
-            </a:r>
-            <a:r>
-              <a:rPr lang="en-US" altLang="ko-KR" dirty="0">
-                <a:latin typeface="D2Coding" panose="020B0609020101020101" pitchFamily="49" charset="-127"/>
-                <a:ea typeface="D2Coding" panose="020B0609020101020101" pitchFamily="49" charset="-127"/>
-                <a:sym typeface="Wingdings" panose="05000000000000000000" pitchFamily="2" charset="2"/>
-              </a:rPr>
-              <a:t>)</a:t>
-            </a:r>
-          </a:p>
-          <a:p>
-            <a:pPr marL="342900" indent="-342900">
+              <a:rPr lang="en-US" altLang="ko-KR" sz="2800" dirty="0"/>
+              <a:t>→ What is an API? </a:t>
+            </a:r>
+          </a:p>
+          <a:p>
+            <a:pPr>
               <a:lnSpc>
-                <a:spcPct val="150000"/>
+                <a:spcPct val="200000"/>
               </a:lnSpc>
-              <a:buFont typeface="+mj-lt"/>
-              <a:buAutoNum type="arabicPeriod"/>
+              <a:buNone/>
             </a:pPr>
             <a:r>
-              <a:rPr lang="en-US" altLang="ko-KR" dirty="0">
-                <a:latin typeface="D2Coding" panose="020B0609020101020101" pitchFamily="49" charset="-127"/>
-                <a:ea typeface="D2Coding" panose="020B0609020101020101" pitchFamily="49" charset="-127"/>
-                <a:sym typeface="Wingdings" panose="05000000000000000000" pitchFamily="2" charset="2"/>
-              </a:rPr>
-              <a:t>VS Code</a:t>
-            </a:r>
-            <a:r>
-              <a:rPr lang="ko-KR" altLang="en-US" dirty="0">
-                <a:latin typeface="D2Coding" panose="020B0609020101020101" pitchFamily="49" charset="-127"/>
-                <a:ea typeface="D2Coding" panose="020B0609020101020101" pitchFamily="49" charset="-127"/>
-                <a:sym typeface="Wingdings" panose="05000000000000000000" pitchFamily="2" charset="2"/>
-              </a:rPr>
-              <a:t>에서 </a:t>
-            </a:r>
-            <a:r>
-              <a:rPr lang="en-US" altLang="ko-KR" dirty="0">
-                <a:latin typeface="D2Coding" panose="020B0609020101020101" pitchFamily="49" charset="-127"/>
-                <a:ea typeface="D2Coding" panose="020B0609020101020101" pitchFamily="49" charset="-127"/>
-                <a:sym typeface="Wingdings" panose="05000000000000000000" pitchFamily="2" charset="2"/>
-              </a:rPr>
-              <a:t>cline </a:t>
-            </a:r>
-            <a:r>
-              <a:rPr lang="ko-KR" altLang="en-US" dirty="0">
-                <a:latin typeface="D2Coding" panose="020B0609020101020101" pitchFamily="49" charset="-127"/>
-                <a:ea typeface="D2Coding" panose="020B0609020101020101" pitchFamily="49" charset="-127"/>
-                <a:sym typeface="Wingdings" panose="05000000000000000000" pitchFamily="2" charset="2"/>
-              </a:rPr>
-              <a:t>설치</a:t>
-            </a:r>
-            <a:endParaRPr lang="en-US" altLang="ko-KR" dirty="0">
-              <a:latin typeface="D2Coding" panose="020B0609020101020101" pitchFamily="49" charset="-127"/>
-              <a:ea typeface="D2Coding" panose="020B0609020101020101" pitchFamily="49" charset="-127"/>
-              <a:sym typeface="Wingdings" panose="05000000000000000000" pitchFamily="2" charset="2"/>
-            </a:endParaRPr>
-          </a:p>
-          <a:p>
-            <a:pPr marL="342900" indent="-342900">
+              <a:rPr lang="en-US" altLang="ko-KR" sz="2000" dirty="0"/>
+              <a:t>An API (Application Programming interface) exposes a service. Developers write programs to consume it.</a:t>
+            </a:r>
+          </a:p>
+          <a:p>
+            <a:pPr>
               <a:lnSpc>
-                <a:spcPct val="150000"/>
+                <a:spcPct val="200000"/>
               </a:lnSpc>
-              <a:buFont typeface="+mj-lt"/>
-              <a:buAutoNum type="arabicPeriod"/>
+              <a:buNone/>
             </a:pPr>
             <a:r>
-              <a:rPr lang="en-US" altLang="ko-KR" dirty="0">
-                <a:latin typeface="D2Coding" panose="020B0609020101020101" pitchFamily="49" charset="-127"/>
-                <a:ea typeface="D2Coding" panose="020B0609020101020101" pitchFamily="49" charset="-127"/>
-                <a:sym typeface="Wingdings" panose="05000000000000000000" pitchFamily="2" charset="2"/>
-              </a:rPr>
-              <a:t>Local</a:t>
-            </a:r>
-            <a:r>
-              <a:rPr lang="ko-KR" altLang="en-US" dirty="0">
-                <a:latin typeface="D2Coding" panose="020B0609020101020101" pitchFamily="49" charset="-127"/>
-                <a:ea typeface="D2Coding" panose="020B0609020101020101" pitchFamily="49" charset="-127"/>
-                <a:sym typeface="Wingdings" panose="05000000000000000000" pitchFamily="2" charset="2"/>
-              </a:rPr>
-              <a:t> </a:t>
-            </a:r>
-            <a:r>
-              <a:rPr lang="en-US" altLang="ko-KR" dirty="0">
-                <a:latin typeface="D2Coding" panose="020B0609020101020101" pitchFamily="49" charset="-127"/>
-                <a:ea typeface="D2Coding" panose="020B0609020101020101" pitchFamily="49" charset="-127"/>
-                <a:sym typeface="Wingdings" panose="05000000000000000000" pitchFamily="2" charset="2"/>
-              </a:rPr>
-              <a:t>n8n</a:t>
-            </a:r>
-            <a:r>
-              <a:rPr lang="ko-KR" altLang="en-US" dirty="0">
-                <a:latin typeface="D2Coding" panose="020B0609020101020101" pitchFamily="49" charset="-127"/>
-                <a:ea typeface="D2Coding" panose="020B0609020101020101" pitchFamily="49" charset="-127"/>
-                <a:sym typeface="Wingdings" panose="05000000000000000000" pitchFamily="2" charset="2"/>
-              </a:rPr>
-              <a:t> 에서 </a:t>
-            </a:r>
-            <a:r>
-              <a:rPr lang="en-US" altLang="ko-KR" dirty="0">
-                <a:latin typeface="D2Coding" panose="020B0609020101020101" pitchFamily="49" charset="-127"/>
-                <a:ea typeface="D2Coding" panose="020B0609020101020101" pitchFamily="49" charset="-127"/>
-                <a:sym typeface="Wingdings" panose="05000000000000000000" pitchFamily="2" charset="2"/>
-              </a:rPr>
-              <a:t>URL </a:t>
-            </a:r>
-            <a:r>
-              <a:rPr lang="ko-KR" altLang="en-US" dirty="0">
-                <a:latin typeface="D2Coding" panose="020B0609020101020101" pitchFamily="49" charset="-127"/>
-                <a:ea typeface="D2Coding" panose="020B0609020101020101" pitchFamily="49" charset="-127"/>
-                <a:sym typeface="Wingdings" panose="05000000000000000000" pitchFamily="2" charset="2"/>
-              </a:rPr>
-              <a:t>주소와 </a:t>
-            </a:r>
-            <a:r>
-              <a:rPr lang="en-US" altLang="ko-KR" dirty="0">
-                <a:latin typeface="D2Coding" panose="020B0609020101020101" pitchFamily="49" charset="-127"/>
-                <a:ea typeface="D2Coding" panose="020B0609020101020101" pitchFamily="49" charset="-127"/>
-                <a:sym typeface="Wingdings" panose="05000000000000000000" pitchFamily="2" charset="2"/>
-              </a:rPr>
-              <a:t>API </a:t>
-            </a:r>
-            <a:r>
-              <a:rPr lang="ko-KR" altLang="en-US" dirty="0">
-                <a:latin typeface="D2Coding" panose="020B0609020101020101" pitchFamily="49" charset="-127"/>
-                <a:ea typeface="D2Coding" panose="020B0609020101020101" pitchFamily="49" charset="-127"/>
-                <a:sym typeface="Wingdings" panose="05000000000000000000" pitchFamily="2" charset="2"/>
-              </a:rPr>
-              <a:t>키를 복사하기</a:t>
-            </a:r>
-            <a:endParaRPr lang="en-US" altLang="ko-KR" dirty="0">
-              <a:latin typeface="D2Coding" panose="020B0609020101020101" pitchFamily="49" charset="-127"/>
-              <a:ea typeface="D2Coding" panose="020B0609020101020101" pitchFamily="49" charset="-127"/>
-              <a:sym typeface="Wingdings" panose="05000000000000000000" pitchFamily="2" charset="2"/>
-            </a:endParaRPr>
-          </a:p>
-          <a:p>
-            <a:pPr marL="342900" indent="-342900">
-              <a:lnSpc>
-                <a:spcPct val="150000"/>
-              </a:lnSpc>
-              <a:buFont typeface="+mj-lt"/>
-              <a:buAutoNum type="arabicPeriod"/>
-            </a:pPr>
-            <a:r>
-              <a:rPr lang="en-US" altLang="ko-KR" dirty="0">
-                <a:latin typeface="D2Coding" panose="020B0609020101020101" pitchFamily="49" charset="-127"/>
-                <a:ea typeface="D2Coding" panose="020B0609020101020101" pitchFamily="49" charset="-127"/>
-              </a:rPr>
-              <a:t>Cline</a:t>
-            </a:r>
-            <a:r>
-              <a:rPr lang="ko-KR" altLang="en-US" dirty="0">
-                <a:latin typeface="D2Coding" panose="020B0609020101020101" pitchFamily="49" charset="-127"/>
-                <a:ea typeface="D2Coding" panose="020B0609020101020101" pitchFamily="49" charset="-127"/>
-              </a:rPr>
-              <a:t>에서 </a:t>
-            </a:r>
-            <a:r>
-              <a:rPr lang="en-US" altLang="ko-KR" dirty="0">
-                <a:latin typeface="D2Coding" panose="020B0609020101020101" pitchFamily="49" charset="-127"/>
-                <a:ea typeface="D2Coding" panose="020B0609020101020101" pitchFamily="49" charset="-127"/>
-              </a:rPr>
-              <a:t>n8n</a:t>
-            </a:r>
-            <a:r>
-              <a:rPr lang="ko-KR" altLang="en-US" dirty="0">
-                <a:latin typeface="D2Coding" panose="020B0609020101020101" pitchFamily="49" charset="-127"/>
-                <a:ea typeface="D2Coding" panose="020B0609020101020101" pitchFamily="49" charset="-127"/>
-              </a:rPr>
-              <a:t> </a:t>
-            </a:r>
-            <a:r>
-              <a:rPr lang="en-US" altLang="ko-KR" dirty="0">
-                <a:latin typeface="D2Coding" panose="020B0609020101020101" pitchFamily="49" charset="-127"/>
-                <a:ea typeface="D2Coding" panose="020B0609020101020101" pitchFamily="49" charset="-127"/>
-              </a:rPr>
-              <a:t>MCP</a:t>
-            </a:r>
-            <a:r>
-              <a:rPr lang="ko-KR" altLang="en-US" dirty="0">
-                <a:latin typeface="D2Coding" panose="020B0609020101020101" pitchFamily="49" charset="-127"/>
-                <a:ea typeface="D2Coding" panose="020B0609020101020101" pitchFamily="49" charset="-127"/>
-              </a:rPr>
-              <a:t> 서버 연결</a:t>
-            </a:r>
-            <a:r>
-              <a:rPr lang="en-US" altLang="ko-KR" dirty="0">
-                <a:latin typeface="D2Coding" panose="020B0609020101020101" pitchFamily="49" charset="-127"/>
-                <a:ea typeface="D2Coding" panose="020B0609020101020101" pitchFamily="49" charset="-127"/>
-              </a:rPr>
-              <a:t>(</a:t>
-            </a:r>
-            <a:r>
-              <a:rPr lang="en-US" altLang="ko-KR" dirty="0" err="1"/>
-              <a:t>cline_mcp_settings.json</a:t>
-            </a:r>
-            <a:r>
-              <a:rPr lang="en-US" altLang="ko-KR" dirty="0"/>
-              <a:t>)</a:t>
-            </a:r>
-          </a:p>
-          <a:p>
-            <a:pPr marL="342900" indent="-342900">
-              <a:lnSpc>
-                <a:spcPct val="150000"/>
-              </a:lnSpc>
-              <a:buFont typeface="+mj-lt"/>
-              <a:buAutoNum type="arabicPeriod"/>
-            </a:pPr>
-            <a:r>
-              <a:rPr lang="en-US" altLang="ko-KR" dirty="0"/>
-              <a:t>Prompt : </a:t>
+              <a:rPr lang="en-US" altLang="ko-KR" sz="2800" dirty="0"/>
+              <a:t>→ Definition &amp; Components</a:t>
             </a:r>
           </a:p>
         </p:txBody>
       </p:sp>
-      <p:pic>
-        <p:nvPicPr>
-          <p:cNvPr id="11" name="그림 10">
+      <p:sp>
+        <p:nvSpPr>
+          <p:cNvPr id="7" name="TextBox 6">
             <a:extLst>
               <a:ext uri="{FF2B5EF4-FFF2-40B4-BE49-F238E27FC236}">
-                <a16:creationId xmlns:a16="http://schemas.microsoft.com/office/drawing/2014/main" id="{E10C70F6-E1E3-8AB0-49C2-177A8137DC93}"/>
-              </a:ext>
-            </a:extLst>
-          </p:cNvPr>
-          <p:cNvPicPr>
-            <a:picLocks noChangeAspect="1"/>
-          </p:cNvPicPr>
-          <p:nvPr/>
-        </p:nvPicPr>
-        <p:blipFill>
-          <a:blip r:embed="rId2"/>
-          <a:stretch>
-            <a:fillRect/>
-          </a:stretch>
-        </p:blipFill>
-        <p:spPr>
-          <a:xfrm>
-            <a:off x="6725241" y="2339439"/>
-            <a:ext cx="5208630" cy="3611410"/>
-          </a:xfrm>
-          <a:prstGeom prst="rect">
-            <a:avLst/>
-          </a:prstGeom>
-        </p:spPr>
-      </p:pic>
-      <p:sp>
-        <p:nvSpPr>
-          <p:cNvPr id="13" name="TextBox 12">
-            <a:extLst>
-              <a:ext uri="{FF2B5EF4-FFF2-40B4-BE49-F238E27FC236}">
-                <a16:creationId xmlns:a16="http://schemas.microsoft.com/office/drawing/2014/main" id="{C1E72FFB-4C0B-0F25-E1B2-125863277F75}"/>
+                <a16:creationId xmlns:a16="http://schemas.microsoft.com/office/drawing/2014/main" id="{53256DEA-739D-5B5A-1209-54B0F5E8F1D6}"/>
               </a:ext>
             </a:extLst>
           </p:cNvPr>
@@ -3595,8 +3512,8 @@
         </p:nvSpPr>
         <p:spPr>
           <a:xfrm>
-            <a:off x="1796026" y="3706146"/>
-            <a:ext cx="4490474" cy="1077218"/>
+            <a:off x="3048000" y="3148955"/>
+            <a:ext cx="6096000" cy="560090"/>
           </a:xfrm>
           <a:prstGeom prst="rect">
             <a:avLst/>
@@ -3609,129 +3526,23 @@
           </a:bodyPr>
           <a:lstStyle/>
           <a:p>
-            <a:r>
-              <a:rPr lang="ko-KR" altLang="en-US" sz="1600" dirty="0">
-                <a:latin typeface="D2Coding" panose="020B0609020101020101" pitchFamily="49" charset="-127"/>
-                <a:ea typeface="D2Coding" panose="020B0609020101020101" pitchFamily="49" charset="-127"/>
-              </a:rPr>
-              <a:t>매일 아침 </a:t>
-            </a:r>
-            <a:r>
-              <a:rPr lang="en-US" altLang="ko-KR" sz="1600" dirty="0">
-                <a:latin typeface="D2Coding" panose="020B0609020101020101" pitchFamily="49" charset="-127"/>
-                <a:ea typeface="D2Coding" panose="020B0609020101020101" pitchFamily="49" charset="-127"/>
-              </a:rPr>
-              <a:t>9</a:t>
-            </a:r>
-            <a:r>
-              <a:rPr lang="ko-KR" altLang="en-US" sz="1600" dirty="0">
-                <a:latin typeface="D2Coding" panose="020B0609020101020101" pitchFamily="49" charset="-127"/>
-                <a:ea typeface="D2Coding" panose="020B0609020101020101" pitchFamily="49" charset="-127"/>
-              </a:rPr>
-              <a:t>시에 특정 </a:t>
-            </a:r>
-            <a:r>
-              <a:rPr lang="ko-KR" altLang="en-US" sz="1600" dirty="0" err="1">
-                <a:latin typeface="D2Coding" panose="020B0609020101020101" pitchFamily="49" charset="-127"/>
-                <a:ea typeface="D2Coding" panose="020B0609020101020101" pitchFamily="49" charset="-127"/>
-              </a:rPr>
-              <a:t>웹훅으로</a:t>
-            </a:r>
-            <a:r>
-              <a:rPr lang="ko-KR" altLang="en-US" sz="1600" dirty="0">
-                <a:latin typeface="D2Coding" panose="020B0609020101020101" pitchFamily="49" charset="-127"/>
-                <a:ea typeface="D2Coding" panose="020B0609020101020101" pitchFamily="49" charset="-127"/>
-              </a:rPr>
-              <a:t> 요청을 보내는 워크플로우를 만들고</a:t>
-            </a:r>
-            <a:r>
-              <a:rPr lang="en-US" altLang="ko-KR" sz="1600" dirty="0">
-                <a:latin typeface="D2Coding" panose="020B0609020101020101" pitchFamily="49" charset="-127"/>
-                <a:ea typeface="D2Coding" panose="020B0609020101020101" pitchFamily="49" charset="-127"/>
-              </a:rPr>
-              <a:t>, </a:t>
-            </a:r>
-            <a:r>
-              <a:rPr lang="ko-KR" altLang="en-US" sz="1600" dirty="0">
-                <a:latin typeface="D2Coding" panose="020B0609020101020101" pitchFamily="49" charset="-127"/>
-                <a:ea typeface="D2Coding" panose="020B0609020101020101" pitchFamily="49" charset="-127"/>
-              </a:rPr>
-              <a:t>내 로컬 </a:t>
-            </a:r>
-            <a:r>
-              <a:rPr lang="en-US" altLang="ko-KR" sz="1600" dirty="0">
-                <a:latin typeface="D2Coding" panose="020B0609020101020101" pitchFamily="49" charset="-127"/>
-                <a:ea typeface="D2Coding" panose="020B0609020101020101" pitchFamily="49" charset="-127"/>
-              </a:rPr>
-              <a:t>n8n</a:t>
-            </a:r>
-            <a:r>
-              <a:rPr lang="ko-KR" altLang="en-US" sz="1600" dirty="0">
-                <a:latin typeface="D2Coding" panose="020B0609020101020101" pitchFamily="49" charset="-127"/>
-                <a:ea typeface="D2Coding" panose="020B0609020101020101" pitchFamily="49" charset="-127"/>
-              </a:rPr>
-              <a:t>에 생성해 줘</a:t>
-            </a:r>
-            <a:r>
-              <a:rPr lang="en-US" altLang="ko-KR" sz="1600" dirty="0">
-                <a:latin typeface="D2Coding" panose="020B0609020101020101" pitchFamily="49" charset="-127"/>
-                <a:ea typeface="D2Coding" panose="020B0609020101020101" pitchFamily="49" charset="-127"/>
-              </a:rPr>
-              <a:t>." "</a:t>
-            </a:r>
-            <a:r>
-              <a:rPr lang="ko-KR" altLang="en-US" sz="1600" dirty="0">
-                <a:latin typeface="D2Coding" panose="020B0609020101020101" pitchFamily="49" charset="-127"/>
-                <a:ea typeface="D2Coding" panose="020B0609020101020101" pitchFamily="49" charset="-127"/>
-              </a:rPr>
-              <a:t>이 </a:t>
-            </a:r>
-            <a:r>
-              <a:rPr lang="en-US" altLang="ko-KR" sz="1600" dirty="0">
-                <a:latin typeface="D2Coding" panose="020B0609020101020101" pitchFamily="49" charset="-127"/>
-                <a:ea typeface="D2Coding" panose="020B0609020101020101" pitchFamily="49" charset="-127"/>
-              </a:rPr>
-              <a:t>JSON </a:t>
-            </a:r>
-            <a:r>
-              <a:rPr lang="ko-KR" altLang="en-US" sz="1600" dirty="0">
-                <a:latin typeface="D2Coding" panose="020B0609020101020101" pitchFamily="49" charset="-127"/>
-                <a:ea typeface="D2Coding" panose="020B0609020101020101" pitchFamily="49" charset="-127"/>
-              </a:rPr>
-              <a:t>워크플로우를 내 로컬 </a:t>
-            </a:r>
-            <a:r>
-              <a:rPr lang="en-US" altLang="ko-KR" sz="1600" dirty="0">
-                <a:latin typeface="D2Coding" panose="020B0609020101020101" pitchFamily="49" charset="-127"/>
-                <a:ea typeface="D2Coding" panose="020B0609020101020101" pitchFamily="49" charset="-127"/>
-              </a:rPr>
-              <a:t>n8n</a:t>
-            </a:r>
-            <a:r>
-              <a:rPr lang="ko-KR" altLang="en-US" sz="1600" dirty="0">
-                <a:latin typeface="D2Coding" panose="020B0609020101020101" pitchFamily="49" charset="-127"/>
-                <a:ea typeface="D2Coding" panose="020B0609020101020101" pitchFamily="49" charset="-127"/>
-              </a:rPr>
-              <a:t>에 임포트하고 실행해 줘</a:t>
-            </a:r>
-            <a:r>
-              <a:rPr lang="en-US" altLang="ko-KR" sz="1600" dirty="0">
-                <a:latin typeface="D2Coding" panose="020B0609020101020101" pitchFamily="49" charset="-127"/>
-                <a:ea typeface="D2Coding" panose="020B0609020101020101" pitchFamily="49" charset="-127"/>
-              </a:rPr>
-              <a:t>."</a:t>
-            </a:r>
-            <a:endParaRPr lang="ko-KR" altLang="en-US" sz="1600" dirty="0">
-              <a:latin typeface="D2Coding" panose="020B0609020101020101" pitchFamily="49" charset="-127"/>
-              <a:ea typeface="D2Coding" panose="020B0609020101020101" pitchFamily="49" charset="-127"/>
-            </a:endParaRPr>
+            <a:pPr>
+              <a:lnSpc>
+                <a:spcPct val="200000"/>
+              </a:lnSpc>
+              <a:buNone/>
+            </a:pPr>
+            <a:r>
+              <a:rPr lang="en-US" altLang="ko-KR" sz="1800" dirty="0"/>
+              <a:t>→ Webhooks</a:t>
+            </a:r>
           </a:p>
         </p:txBody>
       </p:sp>
     </p:spTree>
     <p:extLst>
       <p:ext uri="{BB962C8B-B14F-4D97-AF65-F5344CB8AC3E}">
-        <p14:creationId xmlns:p14="http://schemas.microsoft.com/office/powerpoint/2010/main" val="1830209201"/>
+        <p14:creationId xmlns:p14="http://schemas.microsoft.com/office/powerpoint/2010/main" val="1723268834"/>
       </p:ext>
     </p:extLst>
   </p:cSld>
@@ -3749,7 +3560,7 @@
         <p:cNvPr id="1" name="">
           <a:extLst>
             <a:ext uri="{FF2B5EF4-FFF2-40B4-BE49-F238E27FC236}">
-              <a16:creationId xmlns:a16="http://schemas.microsoft.com/office/drawing/2014/main" id="{0C490780-D962-F205-381A-9EC36E3B81A6}"/>
+              <a16:creationId xmlns:a16="http://schemas.microsoft.com/office/drawing/2014/main" id="{463E1567-E565-83D2-55B9-C0AC16CFC923}"/>
             </a:ext>
           </a:extLst>
         </p:cNvPr>
@@ -3769,7 +3580,7 @@
           <p:cNvPr id="4" name="슬라이드 번호 개체 틀 3">
             <a:extLst>
               <a:ext uri="{FF2B5EF4-FFF2-40B4-BE49-F238E27FC236}">
-                <a16:creationId xmlns:a16="http://schemas.microsoft.com/office/drawing/2014/main" id="{1D69506E-9BEB-DD86-9FF9-9D81D3E824E7}"/>
+                <a16:creationId xmlns:a16="http://schemas.microsoft.com/office/drawing/2014/main" id="{7B58FB2B-9FB4-8243-EA7E-519801251C9B}"/>
               </a:ext>
             </a:extLst>
           </p:cNvPr>
@@ -3799,12 +3610,622 @@
           </a:p>
         </p:txBody>
       </p:sp>
+      <mc:AlternateContent xmlns:mc="http://schemas.openxmlformats.org/markup-compatibility/2006">
+        <mc:Choice xmlns:a14="http://schemas.microsoft.com/office/drawing/2010/main" Requires="a14">
+          <p:sp>
+            <p:nvSpPr>
+              <p:cNvPr id="3" name="제목 1">
+                <a:extLst>
+                  <a:ext uri="{FF2B5EF4-FFF2-40B4-BE49-F238E27FC236}">
+                    <a16:creationId xmlns:a16="http://schemas.microsoft.com/office/drawing/2014/main" id="{5C1CD59F-A5F7-D540-0D28-AB7ACE6997CF}"/>
+                  </a:ext>
+                </a:extLst>
+              </p:cNvPr>
+              <p:cNvSpPr txBox="1">
+                <a:spLocks/>
+              </p:cNvSpPr>
+              <p:nvPr/>
+            </p:nvSpPr>
+            <p:spPr>
+              <a:xfrm>
+                <a:off x="475645" y="481983"/>
+                <a:ext cx="10353762" cy="766439"/>
+              </a:xfrm>
+              <a:prstGeom prst="rect">
+                <a:avLst/>
+              </a:prstGeom>
+            </p:spPr>
+            <p:txBody>
+              <a:bodyPr vert="horz" lIns="91440" tIns="45720" rIns="91440" bIns="45720" rtlCol="0" anchor="ctr">
+                <a:normAutofit/>
+              </a:bodyPr>
+              <a:lstStyle>
+                <a:lvl1pPr algn="ctr" defTabSz="914400" rtl="0" eaLnBrk="1" latinLnBrk="1" hangingPunct="1">
+                  <a:lnSpc>
+                    <a:spcPct val="90000"/>
+                  </a:lnSpc>
+                  <a:spcBef>
+                    <a:spcPct val="0"/>
+                  </a:spcBef>
+                  <a:buNone/>
+                  <a:defRPr sz="3200" kern="1200" cap="all" baseline="0">
+                    <a:solidFill>
+                      <a:schemeClr val="tx1"/>
+                    </a:solidFill>
+                    <a:effectLst/>
+                    <a:latin typeface="Batang" panose="02030600000101010101" pitchFamily="18" charset="-127"/>
+                    <a:ea typeface="Batang" panose="02030600000101010101" pitchFamily="18" charset="-127"/>
+                    <a:cs typeface="+mj-cs"/>
+                  </a:defRPr>
+                </a:lvl1pPr>
+              </a:lstStyle>
+              <a:p>
+                <a:pPr algn="l"/>
+                <a:r>
+                  <a:rPr lang="en-US" altLang="ko-KR" sz="2800" b="1" cap="none" dirty="0">
+                    <a:latin typeface="Lora" pitchFamily="2" charset="0"/>
+                  </a:rPr>
+                  <a:t>Webhooks (</a:t>
+                </a:r>
+                <a14:m>
+                  <m:oMath xmlns:m="http://schemas.openxmlformats.org/officeDocument/2006/math">
+                    <m:sSup>
+                      <m:sSupPr>
+                        <m:ctrlPr>
+                          <a:rPr lang="en-US" altLang="ko-KR" b="1" i="1" cap="none" smtClean="0">
+                            <a:latin typeface="Cambria Math" panose="02040503050406030204" pitchFamily="18" charset="0"/>
+                          </a:rPr>
+                        </m:ctrlPr>
+                      </m:sSupPr>
+                      <m:e>
+                        <m:r>
+                          <m:rPr>
+                            <m:sty m:val="p"/>
+                          </m:rPr>
+                          <a:rPr lang="en-US" altLang="ko-KR" b="1" i="1" cap="none" smtClean="0">
+                            <a:latin typeface="Cambria Math" panose="02040503050406030204" pitchFamily="18" charset="0"/>
+                          </a:rPr>
+                          <m:t>API</m:t>
+                        </m:r>
+                      </m:e>
+                      <m:sup>
+                        <m:r>
+                          <a:rPr lang="en-US" altLang="ko-KR" b="1" i="1" cap="none" smtClean="0">
+                            <a:latin typeface="Cambria Math" panose="02040503050406030204" pitchFamily="18" charset="0"/>
+                          </a:rPr>
+                          <m:t>-1</m:t>
+                        </m:r>
+                      </m:sup>
+                    </m:sSup>
+                  </m:oMath>
+                </a14:m>
+                <a:r>
+                  <a:rPr lang="en-US" altLang="ko-KR" sz="2800" b="1" cap="none" dirty="0">
+                    <a:latin typeface="Lora" pitchFamily="2" charset="0"/>
+                  </a:rPr>
+                  <a:t>)</a:t>
+                </a:r>
+              </a:p>
+            </p:txBody>
+          </p:sp>
+        </mc:Choice>
+        <mc:Fallback>
+          <p:sp>
+            <p:nvSpPr>
+              <p:cNvPr id="3" name="제목 1">
+                <a:extLst>
+                  <a:ext uri="{FF2B5EF4-FFF2-40B4-BE49-F238E27FC236}">
+                    <a16:creationId xmlns:a16="http://schemas.microsoft.com/office/drawing/2014/main" id="{5C1CD59F-A5F7-D540-0D28-AB7ACE6997CF}"/>
+                  </a:ext>
+                </a:extLst>
+              </p:cNvPr>
+              <p:cNvSpPr txBox="1">
+                <a:spLocks noRot="1" noChangeAspect="1" noMove="1" noResize="1" noEditPoints="1" noAdjustHandles="1" noChangeArrowheads="1" noChangeShapeType="1" noTextEdit="1"/>
+              </p:cNvSpPr>
+              <p:nvPr/>
+            </p:nvSpPr>
+            <p:spPr>
+              <a:xfrm>
+                <a:off x="475645" y="481983"/>
+                <a:ext cx="10353762" cy="766439"/>
+              </a:xfrm>
+              <a:prstGeom prst="rect">
+                <a:avLst/>
+              </a:prstGeom>
+              <a:blipFill>
+                <a:blip r:embed="rId2"/>
+                <a:stretch>
+                  <a:fillRect l="-1178" b="-7143"/>
+                </a:stretch>
+              </a:blipFill>
+            </p:spPr>
+            <p:txBody>
+              <a:bodyPr/>
+              <a:lstStyle/>
+              <a:p>
+                <a:r>
+                  <a:rPr lang="ko-KR" altLang="en-US">
+                    <a:noFill/>
+                  </a:rPr>
+                  <a:t> </a:t>
+                </a:r>
+              </a:p>
+            </p:txBody>
+          </p:sp>
+        </mc:Fallback>
+      </mc:AlternateContent>
+      <p:sp>
+        <p:nvSpPr>
+          <p:cNvPr id="6" name="TextBox 5">
+            <a:extLst>
+              <a:ext uri="{FF2B5EF4-FFF2-40B4-BE49-F238E27FC236}">
+                <a16:creationId xmlns:a16="http://schemas.microsoft.com/office/drawing/2014/main" id="{7A293E56-7678-9DC4-C8B7-0A1EABCC4A95}"/>
+              </a:ext>
+            </a:extLst>
+          </p:cNvPr>
+          <p:cNvSpPr txBox="1"/>
+          <p:nvPr/>
+        </p:nvSpPr>
+        <p:spPr>
+          <a:xfrm>
+            <a:off x="581024" y="1978410"/>
+            <a:ext cx="11229975" cy="2912849"/>
+          </a:xfrm>
+          <a:prstGeom prst="rect">
+            <a:avLst/>
+          </a:prstGeom>
+          <a:noFill/>
+        </p:spPr>
+        <p:txBody>
+          <a:bodyPr wrap="square">
+            <a:spAutoFit/>
+          </a:bodyPr>
+          <a:lstStyle/>
+          <a:p>
+            <a:pPr>
+              <a:lnSpc>
+                <a:spcPct val="200000"/>
+              </a:lnSpc>
+              <a:buNone/>
+            </a:pPr>
+            <a:r>
+              <a:rPr lang="en-US" altLang="ko-KR" sz="2800" dirty="0"/>
+              <a:t>→ What is an API? </a:t>
+            </a:r>
+          </a:p>
+          <a:p>
+            <a:pPr>
+              <a:lnSpc>
+                <a:spcPct val="200000"/>
+              </a:lnSpc>
+              <a:buNone/>
+            </a:pPr>
+            <a:r>
+              <a:rPr lang="en-US" altLang="ko-KR" sz="2000" dirty="0"/>
+              <a:t>An API (Application Programming interface) exposes a service. Developers write programs to consume it.</a:t>
+            </a:r>
+          </a:p>
+          <a:p>
+            <a:pPr>
+              <a:lnSpc>
+                <a:spcPct val="200000"/>
+              </a:lnSpc>
+              <a:buNone/>
+            </a:pPr>
+            <a:r>
+              <a:rPr lang="en-US" altLang="ko-KR" sz="2800" dirty="0"/>
+              <a:t>→ Definition &amp; Components</a:t>
+            </a:r>
+          </a:p>
+        </p:txBody>
+      </p:sp>
+    </p:spTree>
+    <p:extLst>
+      <p:ext uri="{BB962C8B-B14F-4D97-AF65-F5344CB8AC3E}">
+        <p14:creationId xmlns:p14="http://schemas.microsoft.com/office/powerpoint/2010/main" val="1901961302"/>
+      </p:ext>
+    </p:extLst>
+  </p:cSld>
+  <p:clrMapOvr>
+    <a:masterClrMapping/>
+  </p:clrMapOvr>
+</p:sld>
+</file>
+
+<file path=ppt/slides/slide12.xml><?xml version="1.0" encoding="utf-8"?>
+<p:sld xmlns:a="http://schemas.openxmlformats.org/drawingml/2006/main" xmlns:r="http://schemas.openxmlformats.org/officeDocument/2006/relationships" xmlns:p="http://schemas.openxmlformats.org/presentationml/2006/main">
+  <p:cSld>
+    <p:spTree>
+      <p:nvGrpSpPr>
+        <p:cNvPr id="1" name="">
+          <a:extLst>
+            <a:ext uri="{FF2B5EF4-FFF2-40B4-BE49-F238E27FC236}">
+              <a16:creationId xmlns:a16="http://schemas.microsoft.com/office/drawing/2014/main" id="{1448683D-DB6F-9B13-BAEB-3F0B68724FDB}"/>
+            </a:ext>
+          </a:extLst>
+        </p:cNvPr>
+        <p:cNvGrpSpPr/>
+        <p:nvPr/>
+      </p:nvGrpSpPr>
+      <p:grpSpPr>
+        <a:xfrm>
+          <a:off x="0" y="0"/>
+          <a:ext cx="0" cy="0"/>
+          <a:chOff x="0" y="0"/>
+          <a:chExt cx="0" cy="0"/>
+        </a:xfrm>
+      </p:grpSpPr>
+      <p:sp>
+        <p:nvSpPr>
+          <p:cNvPr id="4" name="슬라이드 번호 개체 틀 3">
+            <a:extLst>
+              <a:ext uri="{FF2B5EF4-FFF2-40B4-BE49-F238E27FC236}">
+                <a16:creationId xmlns:a16="http://schemas.microsoft.com/office/drawing/2014/main" id="{8C97D773-8A93-CD5B-3653-C36BA299245C}"/>
+              </a:ext>
+            </a:extLst>
+          </p:cNvPr>
+          <p:cNvSpPr>
+            <a:spLocks noGrp="1"/>
+          </p:cNvSpPr>
+          <p:nvPr>
+            <p:ph type="sldNum" sz="quarter" idx="12"/>
+          </p:nvPr>
+        </p:nvSpPr>
+        <p:spPr>
+          <a:xfrm>
+            <a:off x="10514011" y="6036261"/>
+            <a:ext cx="753545" cy="365125"/>
+          </a:xfrm>
+        </p:spPr>
+        <p:txBody>
+          <a:bodyPr/>
+          <a:lstStyle/>
+          <a:p>
+            <a:fld id="{D57F1E4F-1CFF-5643-939E-217C01CDF565}" type="slidenum">
+              <a:rPr lang="en-US" smtClean="0"/>
+              <a:pPr/>
+              <a:t>12</a:t>
+            </a:fld>
+            <a:endParaRPr lang="en-US" dirty="0"/>
+          </a:p>
+        </p:txBody>
+      </p:sp>
+      <p:sp>
+        <p:nvSpPr>
+          <p:cNvPr id="3" name="제목 1">
+            <a:extLst>
+              <a:ext uri="{FF2B5EF4-FFF2-40B4-BE49-F238E27FC236}">
+                <a16:creationId xmlns:a16="http://schemas.microsoft.com/office/drawing/2014/main" id="{851FE1F8-8A38-3806-6D00-4D1461838556}"/>
+              </a:ext>
+            </a:extLst>
+          </p:cNvPr>
+          <p:cNvSpPr txBox="1">
+            <a:spLocks/>
+          </p:cNvSpPr>
+          <p:nvPr/>
+        </p:nvSpPr>
+        <p:spPr>
+          <a:xfrm>
+            <a:off x="475645" y="481983"/>
+            <a:ext cx="10353762" cy="766439"/>
+          </a:xfrm>
+          <a:prstGeom prst="rect">
+            <a:avLst/>
+          </a:prstGeom>
+        </p:spPr>
+        <p:txBody>
+          <a:bodyPr vert="horz" lIns="91440" tIns="45720" rIns="91440" bIns="45720" rtlCol="0" anchor="ctr">
+            <a:normAutofit/>
+          </a:bodyPr>
+          <a:lstStyle>
+            <a:lvl1pPr algn="ctr" defTabSz="914400" rtl="0" eaLnBrk="1" latinLnBrk="1" hangingPunct="1">
+              <a:lnSpc>
+                <a:spcPct val="90000"/>
+              </a:lnSpc>
+              <a:spcBef>
+                <a:spcPct val="0"/>
+              </a:spcBef>
+              <a:buNone/>
+              <a:defRPr sz="3200" kern="1200" cap="all" baseline="0">
+                <a:solidFill>
+                  <a:schemeClr val="tx1"/>
+                </a:solidFill>
+                <a:effectLst/>
+                <a:latin typeface="Batang" panose="02030600000101010101" pitchFamily="18" charset="-127"/>
+                <a:ea typeface="Batang" panose="02030600000101010101" pitchFamily="18" charset="-127"/>
+                <a:cs typeface="+mj-cs"/>
+              </a:defRPr>
+            </a:lvl1pPr>
+          </a:lstStyle>
+          <a:p>
+            <a:pPr algn="l"/>
+            <a:r>
+              <a:rPr lang="en-US" altLang="ko-KR" sz="2800" b="1" cap="none" dirty="0">
+                <a:latin typeface="Lora" pitchFamily="2" charset="0"/>
+              </a:rPr>
+              <a:t>Node</a:t>
+            </a:r>
+          </a:p>
+        </p:txBody>
+      </p:sp>
+      <p:sp>
+        <p:nvSpPr>
+          <p:cNvPr id="5" name="TextBox 4">
+            <a:extLst>
+              <a:ext uri="{FF2B5EF4-FFF2-40B4-BE49-F238E27FC236}">
+                <a16:creationId xmlns:a16="http://schemas.microsoft.com/office/drawing/2014/main" id="{F6DBDAE2-63D5-A41E-712E-47ADF300EA34}"/>
+              </a:ext>
+            </a:extLst>
+          </p:cNvPr>
+          <p:cNvSpPr txBox="1"/>
+          <p:nvPr/>
+        </p:nvSpPr>
+        <p:spPr>
+          <a:xfrm>
+            <a:off x="924443" y="1580746"/>
+            <a:ext cx="10515081" cy="3901517"/>
+          </a:xfrm>
+          <a:prstGeom prst="rect">
+            <a:avLst/>
+          </a:prstGeom>
+          <a:noFill/>
+        </p:spPr>
+        <p:txBody>
+          <a:bodyPr wrap="square">
+            <a:spAutoFit/>
+          </a:bodyPr>
+          <a:lstStyle/>
+          <a:p>
+            <a:pPr>
+              <a:lnSpc>
+                <a:spcPct val="150000"/>
+              </a:lnSpc>
+              <a:buNone/>
+            </a:pPr>
+            <a:r>
+              <a:rPr lang="en-US" altLang="ko-KR" sz="2400" dirty="0"/>
+              <a:t>• </a:t>
+            </a:r>
+            <a:r>
+              <a:rPr lang="en-US" altLang="ko-KR" sz="2400" b="1" dirty="0"/>
+              <a:t>The building block (atom) of n8n</a:t>
+            </a:r>
+            <a:endParaRPr lang="en-US" altLang="ko-KR" sz="2400" dirty="0"/>
+          </a:p>
+          <a:p>
+            <a:pPr>
+              <a:lnSpc>
+                <a:spcPct val="150000"/>
+              </a:lnSpc>
+              <a:buNone/>
+            </a:pPr>
+            <a:r>
+              <a:rPr lang="en-US" altLang="ko-KR" sz="2400" dirty="0"/>
+              <a:t>• </a:t>
+            </a:r>
+            <a:r>
+              <a:rPr lang="en-US" altLang="ko-KR" sz="2400" b="1" dirty="0"/>
+              <a:t>3 categories of nodes:</a:t>
+            </a:r>
+            <a:r>
+              <a:rPr lang="en-US" altLang="ko-KR" sz="2400" dirty="0"/>
+              <a:t> </a:t>
+            </a:r>
+          </a:p>
+          <a:p>
+            <a:pPr lvl="1">
+              <a:lnSpc>
+                <a:spcPct val="150000"/>
+              </a:lnSpc>
+            </a:pPr>
+            <a:r>
+              <a:rPr lang="en-US" altLang="ko-KR" sz="2400" dirty="0"/>
+              <a:t>→ Entry point : </a:t>
+            </a:r>
+            <a:r>
+              <a:rPr lang="ko-KR" altLang="en-US" sz="2000" dirty="0"/>
+              <a:t>워크플로우 실행을 시작시키는 트리거 노드</a:t>
+            </a:r>
+            <a:endParaRPr lang="en-US" altLang="ko-KR" sz="2400" dirty="0"/>
+          </a:p>
+          <a:p>
+            <a:pPr lvl="1">
+              <a:lnSpc>
+                <a:spcPct val="150000"/>
+              </a:lnSpc>
+            </a:pPr>
+            <a:r>
+              <a:rPr lang="en-US" altLang="ko-KR" sz="2400" dirty="0"/>
+              <a:t>→ Function : </a:t>
+            </a:r>
+            <a:r>
+              <a:rPr lang="ko-KR" altLang="en-US" sz="2000" dirty="0"/>
+              <a:t>전달받은 데이터를 가공하고 제어하는 중간 처리 노드</a:t>
+            </a:r>
+            <a:endParaRPr lang="en-US" altLang="ko-KR" sz="2400" dirty="0"/>
+          </a:p>
+          <a:p>
+            <a:pPr lvl="1">
+              <a:lnSpc>
+                <a:spcPct val="150000"/>
+              </a:lnSpc>
+            </a:pPr>
+            <a:r>
+              <a:rPr lang="en-US" altLang="ko-KR" sz="2400" dirty="0"/>
+              <a:t>→ Exit point : </a:t>
+            </a:r>
+            <a:r>
+              <a:rPr lang="ko-KR" altLang="en-US" sz="2000" dirty="0"/>
+              <a:t>처리 완료된 데이터를 가지고 최종 결과를 만들어내는 액션 노드</a:t>
+            </a:r>
+            <a:endParaRPr lang="en-US" altLang="ko-KR" sz="2400" dirty="0"/>
+          </a:p>
+          <a:p>
+            <a:pPr>
+              <a:lnSpc>
+                <a:spcPct val="150000"/>
+              </a:lnSpc>
+              <a:buNone/>
+            </a:pPr>
+            <a:r>
+              <a:rPr lang="en-US" altLang="ko-KR" sz="2400" dirty="0"/>
+              <a:t>• </a:t>
+            </a:r>
+            <a:r>
+              <a:rPr lang="en-US" altLang="ko-KR" sz="2400" b="1" dirty="0"/>
+              <a:t>Different types of nodes</a:t>
+            </a:r>
+            <a:endParaRPr lang="en-US" altLang="ko-KR" sz="2400" dirty="0"/>
+          </a:p>
+          <a:p>
+            <a:pPr>
+              <a:lnSpc>
+                <a:spcPct val="150000"/>
+              </a:lnSpc>
+              <a:buNone/>
+            </a:pPr>
+            <a:r>
+              <a:rPr lang="en-US" altLang="ko-KR" sz="2400" dirty="0"/>
+              <a:t>Triggers, Actions in app, Data transformation, Flow, Files, and Advanced.</a:t>
+            </a:r>
+          </a:p>
+        </p:txBody>
+      </p:sp>
+    </p:spTree>
+    <p:extLst>
+      <p:ext uri="{BB962C8B-B14F-4D97-AF65-F5344CB8AC3E}">
+        <p14:creationId xmlns:p14="http://schemas.microsoft.com/office/powerpoint/2010/main" val="3167262991"/>
+      </p:ext>
+    </p:extLst>
+  </p:cSld>
+  <p:clrMapOvr>
+    <a:masterClrMapping/>
+  </p:clrMapOvr>
+</p:sld>
+</file>
+
+<file path=ppt/slides/slide13.xml><?xml version="1.0" encoding="utf-8"?>
+<p:sld xmlns:a="http://schemas.openxmlformats.org/drawingml/2006/main" xmlns:r="http://schemas.openxmlformats.org/officeDocument/2006/relationships" xmlns:p="http://schemas.openxmlformats.org/presentationml/2006/main">
+  <p:cSld>
+    <p:spTree>
+      <p:nvGrpSpPr>
+        <p:cNvPr id="1" name="">
+          <a:extLst>
+            <a:ext uri="{FF2B5EF4-FFF2-40B4-BE49-F238E27FC236}">
+              <a16:creationId xmlns:a16="http://schemas.microsoft.com/office/drawing/2014/main" id="{B6299AED-97C8-C045-2D67-A774BAD01DA8}"/>
+            </a:ext>
+          </a:extLst>
+        </p:cNvPr>
+        <p:cNvGrpSpPr/>
+        <p:nvPr/>
+      </p:nvGrpSpPr>
+      <p:grpSpPr>
+        <a:xfrm>
+          <a:off x="0" y="0"/>
+          <a:ext cx="0" cy="0"/>
+          <a:chOff x="0" y="0"/>
+          <a:chExt cx="0" cy="0"/>
+        </a:xfrm>
+      </p:grpSpPr>
+      <p:sp>
+        <p:nvSpPr>
+          <p:cNvPr id="4" name="슬라이드 번호 개체 틀 3">
+            <a:extLst>
+              <a:ext uri="{FF2B5EF4-FFF2-40B4-BE49-F238E27FC236}">
+                <a16:creationId xmlns:a16="http://schemas.microsoft.com/office/drawing/2014/main" id="{1EAD8483-31A6-B916-4F43-BF76E5177548}"/>
+              </a:ext>
+            </a:extLst>
+          </p:cNvPr>
+          <p:cNvSpPr>
+            <a:spLocks noGrp="1"/>
+          </p:cNvSpPr>
+          <p:nvPr>
+            <p:ph type="sldNum" sz="quarter" idx="12"/>
+          </p:nvPr>
+        </p:nvSpPr>
+        <p:spPr>
+          <a:xfrm>
+            <a:off x="10514011" y="6036261"/>
+            <a:ext cx="753545" cy="365125"/>
+          </a:xfrm>
+        </p:spPr>
+        <p:txBody>
+          <a:bodyPr/>
+          <a:lstStyle/>
+          <a:p>
+            <a:fld id="{D57F1E4F-1CFF-5643-939E-217C01CDF565}" type="slidenum">
+              <a:rPr lang="en-US" smtClean="0"/>
+              <a:pPr/>
+              <a:t>13</a:t>
+            </a:fld>
+            <a:endParaRPr lang="en-US" dirty="0"/>
+          </a:p>
+        </p:txBody>
+      </p:sp>
+      <p:sp>
+        <p:nvSpPr>
+          <p:cNvPr id="3" name="제목 1">
+            <a:extLst>
+              <a:ext uri="{FF2B5EF4-FFF2-40B4-BE49-F238E27FC236}">
+                <a16:creationId xmlns:a16="http://schemas.microsoft.com/office/drawing/2014/main" id="{0DC5727F-AC68-2BE3-C9CC-D78EB53C6A49}"/>
+              </a:ext>
+            </a:extLst>
+          </p:cNvPr>
+          <p:cNvSpPr txBox="1">
+            <a:spLocks/>
+          </p:cNvSpPr>
+          <p:nvPr/>
+        </p:nvSpPr>
+        <p:spPr>
+          <a:xfrm>
+            <a:off x="475645" y="481983"/>
+            <a:ext cx="10353762" cy="766439"/>
+          </a:xfrm>
+          <a:prstGeom prst="rect">
+            <a:avLst/>
+          </a:prstGeom>
+        </p:spPr>
+        <p:txBody>
+          <a:bodyPr vert="horz" lIns="91440" tIns="45720" rIns="91440" bIns="45720" rtlCol="0" anchor="ctr">
+            <a:normAutofit/>
+          </a:bodyPr>
+          <a:lstStyle>
+            <a:lvl1pPr algn="ctr" defTabSz="914400" rtl="0" eaLnBrk="1" latinLnBrk="1" hangingPunct="1">
+              <a:lnSpc>
+                <a:spcPct val="90000"/>
+              </a:lnSpc>
+              <a:spcBef>
+                <a:spcPct val="0"/>
+              </a:spcBef>
+              <a:buNone/>
+              <a:defRPr sz="3200" kern="1200" cap="all" baseline="0">
+                <a:solidFill>
+                  <a:schemeClr val="tx1"/>
+                </a:solidFill>
+                <a:effectLst/>
+                <a:latin typeface="Batang" panose="02030600000101010101" pitchFamily="18" charset="-127"/>
+                <a:ea typeface="Batang" panose="02030600000101010101" pitchFamily="18" charset="-127"/>
+                <a:cs typeface="+mj-cs"/>
+              </a:defRPr>
+            </a:lvl1pPr>
+          </a:lstStyle>
+          <a:p>
+            <a:pPr algn="l"/>
+            <a:r>
+              <a:rPr lang="en-US" altLang="ko-KR" sz="2800" b="1" cap="none" dirty="0">
+                <a:latin typeface="Lora" pitchFamily="2" charset="0"/>
+              </a:rPr>
+              <a:t>Add a Node to canvas</a:t>
+            </a:r>
+          </a:p>
+        </p:txBody>
+      </p:sp>
       <p:pic>
         <p:nvPicPr>
-          <p:cNvPr id="7" name="그림 6">
+          <p:cNvPr id="14" name="그림 13">
             <a:extLst>
               <a:ext uri="{FF2B5EF4-FFF2-40B4-BE49-F238E27FC236}">
-                <a16:creationId xmlns:a16="http://schemas.microsoft.com/office/drawing/2014/main" id="{7C785D48-E001-C56F-D44C-7E2D938F8C7F}"/>
+                <a16:creationId xmlns:a16="http://schemas.microsoft.com/office/drawing/2014/main" id="{E33184EA-0D43-CF4A-10BE-338B2157F5A7}"/>
               </a:ext>
             </a:extLst>
           </p:cNvPr>
@@ -3821,20 +4242,97 @@
         </p:blipFill>
         <p:spPr>
           <a:xfrm>
-            <a:off x="2395035" y="1419811"/>
-            <a:ext cx="3965233" cy="4981575"/>
+            <a:off x="2461855" y="1390360"/>
+            <a:ext cx="7556953" cy="4985657"/>
           </a:xfrm>
           <a:prstGeom prst="rect">
             <a:avLst/>
           </a:prstGeom>
         </p:spPr>
       </p:pic>
+    </p:spTree>
+    <p:extLst>
+      <p:ext uri="{BB962C8B-B14F-4D97-AF65-F5344CB8AC3E}">
+        <p14:creationId xmlns:p14="http://schemas.microsoft.com/office/powerpoint/2010/main" val="566132026"/>
+      </p:ext>
+    </p:extLst>
+  </p:cSld>
+  <p:clrMapOvr>
+    <a:masterClrMapping/>
+  </p:clrMapOvr>
+</p:sld>
+</file>
+
+<file path=ppt/slides/slide14.xml><?xml version="1.0" encoding="utf-8"?>
+<p:sld xmlns:a="http://schemas.openxmlformats.org/drawingml/2006/main" xmlns:r="http://schemas.openxmlformats.org/officeDocument/2006/relationships" xmlns:p="http://schemas.openxmlformats.org/presentationml/2006/main">
+  <p:cSld>
+    <p:spTree>
+      <p:nvGrpSpPr>
+        <p:cNvPr id="1" name="">
+          <a:extLst>
+            <a:ext uri="{FF2B5EF4-FFF2-40B4-BE49-F238E27FC236}">
+              <a16:creationId xmlns:a16="http://schemas.microsoft.com/office/drawing/2014/main" id="{052CD37E-5F8C-C4BF-14FA-F9112DB9FCD6}"/>
+            </a:ext>
+          </a:extLst>
+        </p:cNvPr>
+        <p:cNvGrpSpPr/>
+        <p:nvPr/>
+      </p:nvGrpSpPr>
+      <p:grpSpPr>
+        <a:xfrm>
+          <a:off x="0" y="0"/>
+          <a:ext cx="0" cy="0"/>
+          <a:chOff x="0" y="0"/>
+          <a:chExt cx="0" cy="0"/>
+        </a:xfrm>
+      </p:grpSpPr>
       <p:sp>
         <p:nvSpPr>
-          <p:cNvPr id="9" name="제목 1">
+          <p:cNvPr id="4" name="슬라이드 번호 개체 틀 3">
             <a:extLst>
               <a:ext uri="{FF2B5EF4-FFF2-40B4-BE49-F238E27FC236}">
-                <a16:creationId xmlns:a16="http://schemas.microsoft.com/office/drawing/2014/main" id="{260178FD-69B6-47EA-0380-87D02BE4066A}"/>
+                <a16:creationId xmlns:a16="http://schemas.microsoft.com/office/drawing/2014/main" id="{BCE3520C-CAED-3E97-804E-9D1E0C8C102D}"/>
+              </a:ext>
+            </a:extLst>
+          </p:cNvPr>
+          <p:cNvSpPr>
+            <a:spLocks noGrp="1"/>
+          </p:cNvSpPr>
+          <p:nvPr>
+            <p:ph type="sldNum" sz="quarter" idx="12"/>
+          </p:nvPr>
+        </p:nvSpPr>
+        <p:spPr>
+          <a:xfrm>
+            <a:off x="11180761" y="299420"/>
+            <a:ext cx="753545" cy="365125"/>
+          </a:xfrm>
+        </p:spPr>
+        <p:txBody>
+          <a:bodyPr/>
+          <a:lstStyle/>
+          <a:p>
+            <a:fld id="{D57F1E4F-1CFF-5643-939E-217C01CDF565}" type="slidenum">
+              <a:rPr lang="en-US" b="1" smtClean="0">
+                <a:latin typeface="Segoe UI Emoji" panose="020B0502040204020203" pitchFamily="34" charset="0"/>
+                <a:ea typeface="Segoe UI Emoji" panose="020B0502040204020203" pitchFamily="34" charset="0"/>
+              </a:rPr>
+              <a:pPr/>
+              <a:t>14</a:t>
+            </a:fld>
+            <a:endParaRPr lang="en-US" b="1" dirty="0">
+              <a:latin typeface="Segoe UI Emoji" panose="020B0502040204020203" pitchFamily="34" charset="0"/>
+              <a:ea typeface="Segoe UI Emoji" panose="020B0502040204020203" pitchFamily="34" charset="0"/>
+            </a:endParaRPr>
+          </a:p>
+        </p:txBody>
+      </p:sp>
+      <p:sp>
+        <p:nvSpPr>
+          <p:cNvPr id="3" name="제목 1">
+            <a:extLst>
+              <a:ext uri="{FF2B5EF4-FFF2-40B4-BE49-F238E27FC236}">
+                <a16:creationId xmlns:a16="http://schemas.microsoft.com/office/drawing/2014/main" id="{F07DA05A-650F-D33E-2E90-FBDCEC9B2872}"/>
               </a:ext>
             </a:extLst>
           </p:cNvPr>
@@ -3879,35 +4377,1816 @@
           <a:p>
             <a:pPr algn="l"/>
             <a:r>
-              <a:rPr lang="en-US" altLang="ko-KR" sz="2800" cap="none" dirty="0">
-                <a:solidFill>
-                  <a:schemeClr val="bg2">
-                    <a:lumMod val="25000"/>
-                  </a:schemeClr>
-                </a:solidFill>
-                <a:latin typeface="D2Coding" panose="020B0609020101020101" pitchFamily="49" charset="-127"/>
-                <a:ea typeface="D2Coding" panose="020B0609020101020101" pitchFamily="49" charset="-127"/>
-                <a:cs typeface="Segoe UI Light" panose="020B0502040204020203" pitchFamily="34" charset="0"/>
-              </a:rPr>
-              <a:t>n8n dances with cline</a:t>
-            </a:r>
-            <a:endParaRPr lang="ko-KR" altLang="en-US" sz="2800" cap="none" dirty="0">
-              <a:solidFill>
-                <a:schemeClr val="bg2">
-                  <a:lumMod val="25000"/>
-                </a:schemeClr>
-              </a:solidFill>
-              <a:latin typeface="D2Coding" panose="020B0609020101020101" pitchFamily="49" charset="-127"/>
-              <a:ea typeface="D2Coding" panose="020B0609020101020101" pitchFamily="49" charset="-127"/>
-              <a:cs typeface="Segoe UI Light" panose="020B0502040204020203" pitchFamily="34" charset="0"/>
-            </a:endParaRPr>
+              <a:rPr lang="en-US" altLang="ko-KR" sz="2800" b="1" cap="none" dirty="0">
+                <a:latin typeface="Lora" pitchFamily="2" charset="0"/>
+              </a:rPr>
+              <a:t>Node actions</a:t>
+            </a:r>
+          </a:p>
+        </p:txBody>
+      </p:sp>
+      <p:pic>
+        <p:nvPicPr>
+          <p:cNvPr id="5" name="그림 4">
+            <a:extLst>
+              <a:ext uri="{FF2B5EF4-FFF2-40B4-BE49-F238E27FC236}">
+                <a16:creationId xmlns:a16="http://schemas.microsoft.com/office/drawing/2014/main" id="{5C5E1C3E-E172-DF41-A9B4-688F0ED0ACEA}"/>
+              </a:ext>
+            </a:extLst>
+          </p:cNvPr>
+          <p:cNvPicPr>
+            <a:picLocks noChangeAspect="1"/>
+          </p:cNvPicPr>
+          <p:nvPr/>
+        </p:nvPicPr>
+        <p:blipFill>
+          <a:blip r:embed="rId2"/>
+          <a:stretch>
+            <a:fillRect/>
+          </a:stretch>
+        </p:blipFill>
+        <p:spPr>
+          <a:xfrm>
+            <a:off x="4752553" y="1767101"/>
+            <a:ext cx="6305454" cy="4269160"/>
+          </a:xfrm>
+          <a:prstGeom prst="rect">
+            <a:avLst/>
+          </a:prstGeom>
+        </p:spPr>
+      </p:pic>
+      <p:sp>
+        <p:nvSpPr>
+          <p:cNvPr id="9" name="TextBox 8">
+            <a:extLst>
+              <a:ext uri="{FF2B5EF4-FFF2-40B4-BE49-F238E27FC236}">
+                <a16:creationId xmlns:a16="http://schemas.microsoft.com/office/drawing/2014/main" id="{92F6B9F0-1E03-4F63-A688-E1EFB24C943F}"/>
+              </a:ext>
+            </a:extLst>
+          </p:cNvPr>
+          <p:cNvSpPr txBox="1"/>
+          <p:nvPr/>
+        </p:nvSpPr>
+        <p:spPr>
+          <a:xfrm>
+            <a:off x="790575" y="1767101"/>
+            <a:ext cx="3685754" cy="4195700"/>
+          </a:xfrm>
+          <a:prstGeom prst="rect">
+            <a:avLst/>
+          </a:prstGeom>
+          <a:noFill/>
+        </p:spPr>
+        <p:txBody>
+          <a:bodyPr wrap="square">
+            <a:spAutoFit/>
+          </a:bodyPr>
+          <a:lstStyle/>
+          <a:p>
+            <a:pPr>
+              <a:lnSpc>
+                <a:spcPct val="150000"/>
+              </a:lnSpc>
+              <a:buNone/>
+            </a:pPr>
+            <a:r>
+              <a:rPr lang="en-US" altLang="ko-KR" dirty="0"/>
+              <a:t>• </a:t>
+            </a:r>
+            <a:r>
+              <a:rPr lang="en-US" altLang="ko-KR" b="1" dirty="0"/>
+              <a:t>Execute the node (Play)</a:t>
+            </a:r>
+            <a:endParaRPr lang="en-US" altLang="ko-KR" dirty="0"/>
+          </a:p>
+          <a:p>
+            <a:pPr>
+              <a:lnSpc>
+                <a:spcPct val="150000"/>
+              </a:lnSpc>
+              <a:buNone/>
+            </a:pPr>
+            <a:r>
+              <a:rPr lang="en-US" altLang="ko-KR" dirty="0"/>
+              <a:t>• </a:t>
+            </a:r>
+            <a:r>
+              <a:rPr lang="en-US" altLang="ko-KR" b="1" dirty="0"/>
+              <a:t>Additional actions</a:t>
+            </a:r>
+            <a:r>
+              <a:rPr lang="en-US" altLang="ko-KR" dirty="0"/>
+              <a:t> </a:t>
+            </a:r>
+          </a:p>
+          <a:p>
+            <a:pPr lvl="1">
+              <a:lnSpc>
+                <a:spcPct val="150000"/>
+              </a:lnSpc>
+            </a:pPr>
+            <a:r>
+              <a:rPr lang="en-US" altLang="ko-KR" dirty="0"/>
+              <a:t>• Open node... (settings) </a:t>
+            </a:r>
+          </a:p>
+          <a:p>
+            <a:pPr lvl="1">
+              <a:lnSpc>
+                <a:spcPct val="150000"/>
+              </a:lnSpc>
+            </a:pPr>
+            <a:r>
+              <a:rPr lang="en-US" altLang="ko-KR" dirty="0"/>
+              <a:t>• Execute node </a:t>
+            </a:r>
+          </a:p>
+          <a:p>
+            <a:pPr lvl="1">
+              <a:lnSpc>
+                <a:spcPct val="150000"/>
+              </a:lnSpc>
+            </a:pPr>
+            <a:r>
+              <a:rPr lang="en-US" altLang="ko-KR" dirty="0"/>
+              <a:t>• Rename node </a:t>
+            </a:r>
+          </a:p>
+          <a:p>
+            <a:pPr lvl="1">
+              <a:lnSpc>
+                <a:spcPct val="150000"/>
+              </a:lnSpc>
+            </a:pPr>
+            <a:r>
+              <a:rPr lang="en-US" altLang="ko-KR" dirty="0"/>
+              <a:t>• Deactivate node (Pause) </a:t>
+            </a:r>
+          </a:p>
+          <a:p>
+            <a:pPr lvl="1">
+              <a:lnSpc>
+                <a:spcPct val="150000"/>
+              </a:lnSpc>
+            </a:pPr>
+            <a:r>
+              <a:rPr lang="en-US" altLang="ko-KR" dirty="0"/>
+              <a:t>• Pin node</a:t>
+            </a:r>
+          </a:p>
+          <a:p>
+            <a:pPr lvl="1">
+              <a:lnSpc>
+                <a:spcPct val="150000"/>
+              </a:lnSpc>
+            </a:pPr>
+            <a:r>
+              <a:rPr lang="en-US" altLang="ko-KR" dirty="0"/>
+              <a:t>• Copy node </a:t>
+            </a:r>
+          </a:p>
+          <a:p>
+            <a:pPr lvl="1">
+              <a:lnSpc>
+                <a:spcPct val="150000"/>
+              </a:lnSpc>
+            </a:pPr>
+            <a:r>
+              <a:rPr lang="en-US" altLang="ko-KR" dirty="0"/>
+              <a:t>• Duplicate node </a:t>
+            </a:r>
+          </a:p>
+          <a:p>
+            <a:pPr lvl="1">
+              <a:lnSpc>
+                <a:spcPct val="150000"/>
+              </a:lnSpc>
+            </a:pPr>
+            <a:r>
+              <a:rPr lang="en-US" altLang="ko-KR" dirty="0"/>
+              <a:t>• Delete node</a:t>
+            </a:r>
           </a:p>
         </p:txBody>
       </p:sp>
     </p:spTree>
     <p:extLst>
       <p:ext uri="{BB962C8B-B14F-4D97-AF65-F5344CB8AC3E}">
-        <p14:creationId xmlns:p14="http://schemas.microsoft.com/office/powerpoint/2010/main" val="2376038903"/>
+        <p14:creationId xmlns:p14="http://schemas.microsoft.com/office/powerpoint/2010/main" val="2004226125"/>
+      </p:ext>
+    </p:extLst>
+  </p:cSld>
+  <p:clrMapOvr>
+    <a:masterClrMapping/>
+  </p:clrMapOvr>
+</p:sld>
+</file>
+
+<file path=ppt/slides/slide15.xml><?xml version="1.0" encoding="utf-8"?>
+<p:sld xmlns:a="http://schemas.openxmlformats.org/drawingml/2006/main" xmlns:r="http://schemas.openxmlformats.org/officeDocument/2006/relationships" xmlns:p="http://schemas.openxmlformats.org/presentationml/2006/main">
+  <p:cSld>
+    <p:spTree>
+      <p:nvGrpSpPr>
+        <p:cNvPr id="1" name="">
+          <a:extLst>
+            <a:ext uri="{FF2B5EF4-FFF2-40B4-BE49-F238E27FC236}">
+              <a16:creationId xmlns:a16="http://schemas.microsoft.com/office/drawing/2014/main" id="{B507DB83-72FD-D163-0AD6-6C19A7CA85C1}"/>
+            </a:ext>
+          </a:extLst>
+        </p:cNvPr>
+        <p:cNvGrpSpPr/>
+        <p:nvPr/>
+      </p:nvGrpSpPr>
+      <p:grpSpPr>
+        <a:xfrm>
+          <a:off x="0" y="0"/>
+          <a:ext cx="0" cy="0"/>
+          <a:chOff x="0" y="0"/>
+          <a:chExt cx="0" cy="0"/>
+        </a:xfrm>
+      </p:grpSpPr>
+      <p:sp>
+        <p:nvSpPr>
+          <p:cNvPr id="3" name="제목 1">
+            <a:extLst>
+              <a:ext uri="{FF2B5EF4-FFF2-40B4-BE49-F238E27FC236}">
+                <a16:creationId xmlns:a16="http://schemas.microsoft.com/office/drawing/2014/main" id="{D276BEC1-2B75-D23D-F13F-B9DBB6619E02}"/>
+              </a:ext>
+            </a:extLst>
+          </p:cNvPr>
+          <p:cNvSpPr txBox="1">
+            <a:spLocks/>
+          </p:cNvSpPr>
+          <p:nvPr/>
+        </p:nvSpPr>
+        <p:spPr>
+          <a:xfrm>
+            <a:off x="475645" y="481983"/>
+            <a:ext cx="10353762" cy="766439"/>
+          </a:xfrm>
+          <a:prstGeom prst="rect">
+            <a:avLst/>
+          </a:prstGeom>
+        </p:spPr>
+        <p:txBody>
+          <a:bodyPr vert="horz" lIns="91440" tIns="45720" rIns="91440" bIns="45720" rtlCol="0" anchor="ctr">
+            <a:normAutofit/>
+          </a:bodyPr>
+          <a:lstStyle>
+            <a:lvl1pPr algn="ctr" defTabSz="914400" rtl="0" eaLnBrk="1" latinLnBrk="1" hangingPunct="1">
+              <a:lnSpc>
+                <a:spcPct val="90000"/>
+              </a:lnSpc>
+              <a:spcBef>
+                <a:spcPct val="0"/>
+              </a:spcBef>
+              <a:buNone/>
+              <a:defRPr sz="3200" kern="1200" cap="all" baseline="0">
+                <a:solidFill>
+                  <a:schemeClr val="tx1"/>
+                </a:solidFill>
+                <a:effectLst/>
+                <a:latin typeface="Batang" panose="02030600000101010101" pitchFamily="18" charset="-127"/>
+                <a:ea typeface="Batang" panose="02030600000101010101" pitchFamily="18" charset="-127"/>
+                <a:cs typeface="+mj-cs"/>
+              </a:defRPr>
+            </a:lvl1pPr>
+          </a:lstStyle>
+          <a:p>
+            <a:pPr algn="l"/>
+            <a:r>
+              <a:rPr lang="en-US" altLang="ko-KR" sz="2800" b="1" cap="none" dirty="0">
+                <a:latin typeface="Lora" pitchFamily="2" charset="0"/>
+              </a:rPr>
+              <a:t>Parameters &amp; Settings</a:t>
+            </a:r>
+          </a:p>
+        </p:txBody>
+      </p:sp>
+      <p:pic>
+        <p:nvPicPr>
+          <p:cNvPr id="8" name="그림 7">
+            <a:extLst>
+              <a:ext uri="{FF2B5EF4-FFF2-40B4-BE49-F238E27FC236}">
+                <a16:creationId xmlns:a16="http://schemas.microsoft.com/office/drawing/2014/main" id="{75491333-EBA7-81A8-C365-C6A1F2760653}"/>
+              </a:ext>
+            </a:extLst>
+          </p:cNvPr>
+          <p:cNvPicPr>
+            <a:picLocks noChangeAspect="1"/>
+          </p:cNvPicPr>
+          <p:nvPr/>
+        </p:nvPicPr>
+        <p:blipFill>
+          <a:blip r:embed="rId2"/>
+          <a:stretch>
+            <a:fillRect/>
+          </a:stretch>
+        </p:blipFill>
+        <p:spPr>
+          <a:xfrm>
+            <a:off x="4970172" y="1656598"/>
+            <a:ext cx="6867622" cy="4611199"/>
+          </a:xfrm>
+          <a:prstGeom prst="rect">
+            <a:avLst/>
+          </a:prstGeom>
+        </p:spPr>
+      </p:pic>
+      <p:sp>
+        <p:nvSpPr>
+          <p:cNvPr id="5" name="TextBox 4">
+            <a:extLst>
+              <a:ext uri="{FF2B5EF4-FFF2-40B4-BE49-F238E27FC236}">
+                <a16:creationId xmlns:a16="http://schemas.microsoft.com/office/drawing/2014/main" id="{16A1306F-B8AB-9607-E9C8-FCBA93A4E165}"/>
+              </a:ext>
+            </a:extLst>
+          </p:cNvPr>
+          <p:cNvSpPr txBox="1"/>
+          <p:nvPr/>
+        </p:nvSpPr>
+        <p:spPr>
+          <a:xfrm>
+            <a:off x="1285875" y="1656598"/>
+            <a:ext cx="3171825" cy="4611199"/>
+          </a:xfrm>
+          <a:prstGeom prst="rect">
+            <a:avLst/>
+          </a:prstGeom>
+          <a:noFill/>
+        </p:spPr>
+        <p:txBody>
+          <a:bodyPr wrap="square">
+            <a:spAutoFit/>
+          </a:bodyPr>
+          <a:lstStyle/>
+          <a:p>
+            <a:pPr>
+              <a:lnSpc>
+                <a:spcPct val="150000"/>
+              </a:lnSpc>
+              <a:buNone/>
+            </a:pPr>
+            <a:r>
+              <a:rPr lang="en-US" altLang="ko-KR" dirty="0"/>
+              <a:t>• </a:t>
+            </a:r>
+            <a:r>
+              <a:rPr lang="en-US" altLang="ko-KR" b="1" dirty="0"/>
+              <a:t>Parameters:</a:t>
+            </a:r>
+            <a:r>
+              <a:rPr lang="en-US" altLang="ko-KR" dirty="0"/>
+              <a:t> </a:t>
+            </a:r>
+          </a:p>
+          <a:p>
+            <a:pPr lvl="1">
+              <a:lnSpc>
+                <a:spcPct val="150000"/>
+              </a:lnSpc>
+            </a:pPr>
+            <a:r>
+              <a:rPr lang="en-US" altLang="ko-KR" dirty="0"/>
+              <a:t>• Credentials </a:t>
+            </a:r>
+          </a:p>
+          <a:p>
+            <a:pPr lvl="1">
+              <a:lnSpc>
+                <a:spcPct val="150000"/>
+              </a:lnSpc>
+            </a:pPr>
+            <a:r>
+              <a:rPr lang="en-US" altLang="ko-KR" dirty="0"/>
+              <a:t>• Resource </a:t>
+            </a:r>
+          </a:p>
+          <a:p>
+            <a:pPr lvl="1">
+              <a:lnSpc>
+                <a:spcPct val="150000"/>
+              </a:lnSpc>
+            </a:pPr>
+            <a:r>
+              <a:rPr lang="en-US" altLang="ko-KR" dirty="0"/>
+              <a:t>• Operation </a:t>
+            </a:r>
+          </a:p>
+          <a:p>
+            <a:pPr lvl="1">
+              <a:lnSpc>
+                <a:spcPct val="150000"/>
+              </a:lnSpc>
+            </a:pPr>
+            <a:r>
+              <a:rPr lang="en-US" altLang="ko-KR" dirty="0"/>
+              <a:t>• Action settings</a:t>
+            </a:r>
+          </a:p>
+          <a:p>
+            <a:pPr>
+              <a:lnSpc>
+                <a:spcPct val="150000"/>
+              </a:lnSpc>
+              <a:buNone/>
+            </a:pPr>
+            <a:endParaRPr lang="en-US" altLang="ko-KR" dirty="0"/>
+          </a:p>
+          <a:p>
+            <a:pPr>
+              <a:lnSpc>
+                <a:spcPct val="150000"/>
+              </a:lnSpc>
+              <a:buNone/>
+            </a:pPr>
+            <a:endParaRPr lang="en-US" altLang="ko-KR" dirty="0"/>
+          </a:p>
+          <a:p>
+            <a:pPr>
+              <a:lnSpc>
+                <a:spcPct val="150000"/>
+              </a:lnSpc>
+              <a:buNone/>
+            </a:pPr>
+            <a:r>
+              <a:rPr lang="en-US" altLang="ko-KR" dirty="0"/>
+              <a:t>• </a:t>
+            </a:r>
+            <a:r>
+              <a:rPr lang="en-US" altLang="ko-KR" b="1" dirty="0"/>
+              <a:t>Settings</a:t>
+            </a:r>
+            <a:r>
+              <a:rPr lang="en-US" altLang="ko-KR" dirty="0"/>
+              <a:t> </a:t>
+            </a:r>
+          </a:p>
+          <a:p>
+            <a:pPr lvl="1">
+              <a:lnSpc>
+                <a:spcPct val="150000"/>
+              </a:lnSpc>
+            </a:pPr>
+            <a:r>
+              <a:rPr lang="en-US" altLang="ko-KR" dirty="0"/>
+              <a:t>• Notes </a:t>
+            </a:r>
+          </a:p>
+          <a:p>
+            <a:pPr lvl="1">
+              <a:lnSpc>
+                <a:spcPct val="150000"/>
+              </a:lnSpc>
+            </a:pPr>
+            <a:r>
+              <a:rPr lang="en-US" altLang="ko-KR" dirty="0"/>
+              <a:t>• Visual settings </a:t>
+            </a:r>
+          </a:p>
+          <a:p>
+            <a:pPr lvl="1">
+              <a:lnSpc>
+                <a:spcPct val="150000"/>
+              </a:lnSpc>
+            </a:pPr>
+            <a:r>
+              <a:rPr lang="en-US" altLang="ko-KR" dirty="0"/>
+              <a:t>• Execution settings</a:t>
+            </a:r>
+          </a:p>
+        </p:txBody>
+      </p:sp>
+      <p:sp>
+        <p:nvSpPr>
+          <p:cNvPr id="6" name="슬라이드 번호 개체 틀 3">
+            <a:extLst>
+              <a:ext uri="{FF2B5EF4-FFF2-40B4-BE49-F238E27FC236}">
+                <a16:creationId xmlns:a16="http://schemas.microsoft.com/office/drawing/2014/main" id="{FDD92D36-1C24-E290-AB1A-A87FFB0B3C76}"/>
+              </a:ext>
+            </a:extLst>
+          </p:cNvPr>
+          <p:cNvSpPr txBox="1">
+            <a:spLocks/>
+          </p:cNvSpPr>
+          <p:nvPr/>
+        </p:nvSpPr>
+        <p:spPr>
+          <a:xfrm>
+            <a:off x="11180761" y="299420"/>
+            <a:ext cx="753545" cy="365125"/>
+          </a:xfrm>
+          <a:prstGeom prst="rect">
+            <a:avLst/>
+          </a:prstGeom>
+        </p:spPr>
+        <p:txBody>
+          <a:bodyPr vert="horz" lIns="91440" tIns="45720" rIns="91440" bIns="45720" rtlCol="0" anchor="ctr"/>
+          <a:lstStyle>
+            <a:defPPr rtl="0">
+              <a:defRPr lang="ko-KR"/>
+            </a:defPPr>
+            <a:lvl1pPr marL="0" algn="r" defTabSz="914400" rtl="0" eaLnBrk="1" latinLnBrk="0" hangingPunct="1">
+              <a:defRPr sz="1200" kern="1200" baseline="0">
+                <a:solidFill>
+                  <a:schemeClr val="tx1">
+                    <a:lumMod val="65000"/>
+                    <a:lumOff val="35000"/>
+                  </a:schemeClr>
+                </a:solidFill>
+                <a:latin typeface="맑은 고딕" panose="020B0503020000020004" pitchFamily="50" charset="-127"/>
+                <a:ea typeface="맑은 고딕" panose="020B0503020000020004" pitchFamily="50" charset="-127"/>
+                <a:cs typeface="+mn-cs"/>
+              </a:defRPr>
+            </a:lvl1pPr>
+            <a:lvl2pPr marL="457200" algn="l" defTabSz="914400" rtl="0" eaLnBrk="1" latinLnBrk="0" hangingPunct="1">
+              <a:defRPr sz="1800" kern="1200">
+                <a:solidFill>
+                  <a:schemeClr val="tx1"/>
+                </a:solidFill>
+                <a:latin typeface="+mn-lt"/>
+                <a:ea typeface="+mn-ea"/>
+                <a:cs typeface="+mn-cs"/>
+              </a:defRPr>
+            </a:lvl2pPr>
+            <a:lvl3pPr marL="914400" algn="l" defTabSz="914400" rtl="0" eaLnBrk="1" latinLnBrk="0" hangingPunct="1">
+              <a:defRPr sz="1800" kern="1200">
+                <a:solidFill>
+                  <a:schemeClr val="tx1"/>
+                </a:solidFill>
+                <a:latin typeface="+mn-lt"/>
+                <a:ea typeface="+mn-ea"/>
+                <a:cs typeface="+mn-cs"/>
+              </a:defRPr>
+            </a:lvl3pPr>
+            <a:lvl4pPr marL="1371600" algn="l" defTabSz="914400" rtl="0" eaLnBrk="1" latinLnBrk="0" hangingPunct="1">
+              <a:defRPr sz="1800" kern="1200">
+                <a:solidFill>
+                  <a:schemeClr val="tx1"/>
+                </a:solidFill>
+                <a:latin typeface="+mn-lt"/>
+                <a:ea typeface="+mn-ea"/>
+                <a:cs typeface="+mn-cs"/>
+              </a:defRPr>
+            </a:lvl4pPr>
+            <a:lvl5pPr marL="1828800" algn="l" defTabSz="914400" rtl="0" eaLnBrk="1" latinLnBrk="0" hangingPunct="1">
+              <a:defRPr sz="1800" kern="1200">
+                <a:solidFill>
+                  <a:schemeClr val="tx1"/>
+                </a:solidFill>
+                <a:latin typeface="+mn-lt"/>
+                <a:ea typeface="+mn-ea"/>
+                <a:cs typeface="+mn-cs"/>
+              </a:defRPr>
+            </a:lvl5pPr>
+            <a:lvl6pPr marL="2286000" algn="l" defTabSz="914400" rtl="0" eaLnBrk="1" latinLnBrk="0" hangingPunct="1">
+              <a:defRPr sz="1800" kern="1200">
+                <a:solidFill>
+                  <a:schemeClr val="tx1"/>
+                </a:solidFill>
+                <a:latin typeface="+mn-lt"/>
+                <a:ea typeface="+mn-ea"/>
+                <a:cs typeface="+mn-cs"/>
+              </a:defRPr>
+            </a:lvl6pPr>
+            <a:lvl7pPr marL="2743200" algn="l" defTabSz="914400" rtl="0" eaLnBrk="1" latinLnBrk="0" hangingPunct="1">
+              <a:defRPr sz="1800" kern="1200">
+                <a:solidFill>
+                  <a:schemeClr val="tx1"/>
+                </a:solidFill>
+                <a:latin typeface="+mn-lt"/>
+                <a:ea typeface="+mn-ea"/>
+                <a:cs typeface="+mn-cs"/>
+              </a:defRPr>
+            </a:lvl7pPr>
+            <a:lvl8pPr marL="3200400" algn="l" defTabSz="914400" rtl="0" eaLnBrk="1" latinLnBrk="0" hangingPunct="1">
+              <a:defRPr sz="1800" kern="1200">
+                <a:solidFill>
+                  <a:schemeClr val="tx1"/>
+                </a:solidFill>
+                <a:latin typeface="+mn-lt"/>
+                <a:ea typeface="+mn-ea"/>
+                <a:cs typeface="+mn-cs"/>
+              </a:defRPr>
+            </a:lvl8pPr>
+            <a:lvl9pPr marL="3657600" algn="l" defTabSz="914400" rtl="0" eaLnBrk="1" latinLnBrk="0" hangingPunct="1">
+              <a:defRPr sz="1800" kern="1200">
+                <a:solidFill>
+                  <a:schemeClr val="tx1"/>
+                </a:solidFill>
+                <a:latin typeface="+mn-lt"/>
+                <a:ea typeface="+mn-ea"/>
+                <a:cs typeface="+mn-cs"/>
+              </a:defRPr>
+            </a:lvl9pPr>
+          </a:lstStyle>
+          <a:p>
+            <a:fld id="{D57F1E4F-1CFF-5643-939E-217C01CDF565}" type="slidenum">
+              <a:rPr lang="en-US" b="1" smtClean="0">
+                <a:latin typeface="Segoe UI Emoji" panose="020B0502040204020203" pitchFamily="34" charset="0"/>
+                <a:ea typeface="Segoe UI Emoji" panose="020B0502040204020203" pitchFamily="34" charset="0"/>
+              </a:rPr>
+              <a:pPr/>
+              <a:t>15</a:t>
+            </a:fld>
+            <a:endParaRPr lang="en-US" b="1" dirty="0">
+              <a:latin typeface="Segoe UI Emoji" panose="020B0502040204020203" pitchFamily="34" charset="0"/>
+              <a:ea typeface="Segoe UI Emoji" panose="020B0502040204020203" pitchFamily="34" charset="0"/>
+            </a:endParaRPr>
+          </a:p>
+        </p:txBody>
+      </p:sp>
+    </p:spTree>
+    <p:extLst>
+      <p:ext uri="{BB962C8B-B14F-4D97-AF65-F5344CB8AC3E}">
+        <p14:creationId xmlns:p14="http://schemas.microsoft.com/office/powerpoint/2010/main" val="3085906595"/>
+      </p:ext>
+    </p:extLst>
+  </p:cSld>
+  <p:clrMapOvr>
+    <a:masterClrMapping/>
+  </p:clrMapOvr>
+</p:sld>
+</file>
+
+<file path=ppt/slides/slide16.xml><?xml version="1.0" encoding="utf-8"?>
+<p:sld xmlns:a="http://schemas.openxmlformats.org/drawingml/2006/main" xmlns:r="http://schemas.openxmlformats.org/officeDocument/2006/relationships" xmlns:p="http://schemas.openxmlformats.org/presentationml/2006/main">
+  <p:cSld>
+    <p:spTree>
+      <p:nvGrpSpPr>
+        <p:cNvPr id="1" name="">
+          <a:extLst>
+            <a:ext uri="{FF2B5EF4-FFF2-40B4-BE49-F238E27FC236}">
+              <a16:creationId xmlns:a16="http://schemas.microsoft.com/office/drawing/2014/main" id="{163A2CA6-6D61-59E3-16F8-854C6205FECC}"/>
+            </a:ext>
+          </a:extLst>
+        </p:cNvPr>
+        <p:cNvGrpSpPr/>
+        <p:nvPr/>
+      </p:nvGrpSpPr>
+      <p:grpSpPr>
+        <a:xfrm>
+          <a:off x="0" y="0"/>
+          <a:ext cx="0" cy="0"/>
+          <a:chOff x="0" y="0"/>
+          <a:chExt cx="0" cy="0"/>
+        </a:xfrm>
+      </p:grpSpPr>
+      <p:sp>
+        <p:nvSpPr>
+          <p:cNvPr id="3" name="제목 1">
+            <a:extLst>
+              <a:ext uri="{FF2B5EF4-FFF2-40B4-BE49-F238E27FC236}">
+                <a16:creationId xmlns:a16="http://schemas.microsoft.com/office/drawing/2014/main" id="{C4B02F26-4A4A-13DB-C9B4-CF6A301DD11A}"/>
+              </a:ext>
+            </a:extLst>
+          </p:cNvPr>
+          <p:cNvSpPr txBox="1">
+            <a:spLocks/>
+          </p:cNvSpPr>
+          <p:nvPr/>
+        </p:nvSpPr>
+        <p:spPr>
+          <a:xfrm>
+            <a:off x="475645" y="481983"/>
+            <a:ext cx="10353762" cy="766439"/>
+          </a:xfrm>
+          <a:prstGeom prst="rect">
+            <a:avLst/>
+          </a:prstGeom>
+        </p:spPr>
+        <p:txBody>
+          <a:bodyPr vert="horz" lIns="91440" tIns="45720" rIns="91440" bIns="45720" rtlCol="0" anchor="ctr">
+            <a:normAutofit/>
+          </a:bodyPr>
+          <a:lstStyle>
+            <a:lvl1pPr algn="ctr" defTabSz="914400" rtl="0" eaLnBrk="1" latinLnBrk="1" hangingPunct="1">
+              <a:lnSpc>
+                <a:spcPct val="90000"/>
+              </a:lnSpc>
+              <a:spcBef>
+                <a:spcPct val="0"/>
+              </a:spcBef>
+              <a:buNone/>
+              <a:defRPr sz="3200" kern="1200" cap="all" baseline="0">
+                <a:solidFill>
+                  <a:schemeClr val="tx1"/>
+                </a:solidFill>
+                <a:effectLst/>
+                <a:latin typeface="Batang" panose="02030600000101010101" pitchFamily="18" charset="-127"/>
+                <a:ea typeface="Batang" panose="02030600000101010101" pitchFamily="18" charset="-127"/>
+                <a:cs typeface="+mj-cs"/>
+              </a:defRPr>
+            </a:lvl1pPr>
+          </a:lstStyle>
+          <a:p>
+            <a:pPr algn="l"/>
+            <a:r>
+              <a:rPr lang="en-US" altLang="ko-KR" sz="2800" b="1" cap="none" dirty="0">
+                <a:latin typeface="Lora" pitchFamily="2" charset="0"/>
+              </a:rPr>
+              <a:t>Credential</a:t>
+            </a:r>
+          </a:p>
+        </p:txBody>
+      </p:sp>
+      <p:sp>
+        <p:nvSpPr>
+          <p:cNvPr id="6" name="슬라이드 번호 개체 틀 3">
+            <a:extLst>
+              <a:ext uri="{FF2B5EF4-FFF2-40B4-BE49-F238E27FC236}">
+                <a16:creationId xmlns:a16="http://schemas.microsoft.com/office/drawing/2014/main" id="{0FFC24A4-D63F-2833-1432-DA2AFE3A0047}"/>
+              </a:ext>
+            </a:extLst>
+          </p:cNvPr>
+          <p:cNvSpPr txBox="1">
+            <a:spLocks/>
+          </p:cNvSpPr>
+          <p:nvPr/>
+        </p:nvSpPr>
+        <p:spPr>
+          <a:xfrm>
+            <a:off x="11180761" y="299420"/>
+            <a:ext cx="753545" cy="365125"/>
+          </a:xfrm>
+          <a:prstGeom prst="rect">
+            <a:avLst/>
+          </a:prstGeom>
+        </p:spPr>
+        <p:txBody>
+          <a:bodyPr vert="horz" lIns="91440" tIns="45720" rIns="91440" bIns="45720" rtlCol="0" anchor="ctr"/>
+          <a:lstStyle>
+            <a:defPPr rtl="0">
+              <a:defRPr lang="ko-KR"/>
+            </a:defPPr>
+            <a:lvl1pPr marL="0" algn="r" defTabSz="914400" rtl="0" eaLnBrk="1" latinLnBrk="0" hangingPunct="1">
+              <a:defRPr sz="1200" kern="1200" baseline="0">
+                <a:solidFill>
+                  <a:schemeClr val="tx1">
+                    <a:lumMod val="65000"/>
+                    <a:lumOff val="35000"/>
+                  </a:schemeClr>
+                </a:solidFill>
+                <a:latin typeface="맑은 고딕" panose="020B0503020000020004" pitchFamily="50" charset="-127"/>
+                <a:ea typeface="맑은 고딕" panose="020B0503020000020004" pitchFamily="50" charset="-127"/>
+                <a:cs typeface="+mn-cs"/>
+              </a:defRPr>
+            </a:lvl1pPr>
+            <a:lvl2pPr marL="457200" algn="l" defTabSz="914400" rtl="0" eaLnBrk="1" latinLnBrk="0" hangingPunct="1">
+              <a:defRPr sz="1800" kern="1200">
+                <a:solidFill>
+                  <a:schemeClr val="tx1"/>
+                </a:solidFill>
+                <a:latin typeface="+mn-lt"/>
+                <a:ea typeface="+mn-ea"/>
+                <a:cs typeface="+mn-cs"/>
+              </a:defRPr>
+            </a:lvl2pPr>
+            <a:lvl3pPr marL="914400" algn="l" defTabSz="914400" rtl="0" eaLnBrk="1" latinLnBrk="0" hangingPunct="1">
+              <a:defRPr sz="1800" kern="1200">
+                <a:solidFill>
+                  <a:schemeClr val="tx1"/>
+                </a:solidFill>
+                <a:latin typeface="+mn-lt"/>
+                <a:ea typeface="+mn-ea"/>
+                <a:cs typeface="+mn-cs"/>
+              </a:defRPr>
+            </a:lvl3pPr>
+            <a:lvl4pPr marL="1371600" algn="l" defTabSz="914400" rtl="0" eaLnBrk="1" latinLnBrk="0" hangingPunct="1">
+              <a:defRPr sz="1800" kern="1200">
+                <a:solidFill>
+                  <a:schemeClr val="tx1"/>
+                </a:solidFill>
+                <a:latin typeface="+mn-lt"/>
+                <a:ea typeface="+mn-ea"/>
+                <a:cs typeface="+mn-cs"/>
+              </a:defRPr>
+            </a:lvl4pPr>
+            <a:lvl5pPr marL="1828800" algn="l" defTabSz="914400" rtl="0" eaLnBrk="1" latinLnBrk="0" hangingPunct="1">
+              <a:defRPr sz="1800" kern="1200">
+                <a:solidFill>
+                  <a:schemeClr val="tx1"/>
+                </a:solidFill>
+                <a:latin typeface="+mn-lt"/>
+                <a:ea typeface="+mn-ea"/>
+                <a:cs typeface="+mn-cs"/>
+              </a:defRPr>
+            </a:lvl5pPr>
+            <a:lvl6pPr marL="2286000" algn="l" defTabSz="914400" rtl="0" eaLnBrk="1" latinLnBrk="0" hangingPunct="1">
+              <a:defRPr sz="1800" kern="1200">
+                <a:solidFill>
+                  <a:schemeClr val="tx1"/>
+                </a:solidFill>
+                <a:latin typeface="+mn-lt"/>
+                <a:ea typeface="+mn-ea"/>
+                <a:cs typeface="+mn-cs"/>
+              </a:defRPr>
+            </a:lvl6pPr>
+            <a:lvl7pPr marL="2743200" algn="l" defTabSz="914400" rtl="0" eaLnBrk="1" latinLnBrk="0" hangingPunct="1">
+              <a:defRPr sz="1800" kern="1200">
+                <a:solidFill>
+                  <a:schemeClr val="tx1"/>
+                </a:solidFill>
+                <a:latin typeface="+mn-lt"/>
+                <a:ea typeface="+mn-ea"/>
+                <a:cs typeface="+mn-cs"/>
+              </a:defRPr>
+            </a:lvl7pPr>
+            <a:lvl8pPr marL="3200400" algn="l" defTabSz="914400" rtl="0" eaLnBrk="1" latinLnBrk="0" hangingPunct="1">
+              <a:defRPr sz="1800" kern="1200">
+                <a:solidFill>
+                  <a:schemeClr val="tx1"/>
+                </a:solidFill>
+                <a:latin typeface="+mn-lt"/>
+                <a:ea typeface="+mn-ea"/>
+                <a:cs typeface="+mn-cs"/>
+              </a:defRPr>
+            </a:lvl8pPr>
+            <a:lvl9pPr marL="3657600" algn="l" defTabSz="914400" rtl="0" eaLnBrk="1" latinLnBrk="0" hangingPunct="1">
+              <a:defRPr sz="1800" kern="1200">
+                <a:solidFill>
+                  <a:schemeClr val="tx1"/>
+                </a:solidFill>
+                <a:latin typeface="+mn-lt"/>
+                <a:ea typeface="+mn-ea"/>
+                <a:cs typeface="+mn-cs"/>
+              </a:defRPr>
+            </a:lvl9pPr>
+          </a:lstStyle>
+          <a:p>
+            <a:fld id="{D57F1E4F-1CFF-5643-939E-217C01CDF565}" type="slidenum">
+              <a:rPr lang="en-US" b="1" smtClean="0">
+                <a:latin typeface="Segoe UI Emoji" panose="020B0502040204020203" pitchFamily="34" charset="0"/>
+                <a:ea typeface="Segoe UI Emoji" panose="020B0502040204020203" pitchFamily="34" charset="0"/>
+              </a:rPr>
+              <a:pPr/>
+              <a:t>16</a:t>
+            </a:fld>
+            <a:endParaRPr lang="en-US" b="1" dirty="0">
+              <a:latin typeface="Segoe UI Emoji" panose="020B0502040204020203" pitchFamily="34" charset="0"/>
+              <a:ea typeface="Segoe UI Emoji" panose="020B0502040204020203" pitchFamily="34" charset="0"/>
+            </a:endParaRPr>
+          </a:p>
+        </p:txBody>
+      </p:sp>
+      <p:sp>
+        <p:nvSpPr>
+          <p:cNvPr id="4" name="TextBox 3">
+            <a:extLst>
+              <a:ext uri="{FF2B5EF4-FFF2-40B4-BE49-F238E27FC236}">
+                <a16:creationId xmlns:a16="http://schemas.microsoft.com/office/drawing/2014/main" id="{8B76C17C-BD76-A2CC-C7E2-ACB31FC9BB47}"/>
+              </a:ext>
+            </a:extLst>
+          </p:cNvPr>
+          <p:cNvSpPr txBox="1"/>
+          <p:nvPr/>
+        </p:nvSpPr>
+        <p:spPr>
+          <a:xfrm>
+            <a:off x="634467" y="1414760"/>
+            <a:ext cx="3994683" cy="4807406"/>
+          </a:xfrm>
+          <a:prstGeom prst="rect">
+            <a:avLst/>
+          </a:prstGeom>
+          <a:noFill/>
+        </p:spPr>
+        <p:txBody>
+          <a:bodyPr wrap="square">
+            <a:spAutoFit/>
+          </a:bodyPr>
+          <a:lstStyle/>
+          <a:p>
+            <a:pPr marL="285750" indent="-285750">
+              <a:lnSpc>
+                <a:spcPct val="200000"/>
+              </a:lnSpc>
+              <a:buFont typeface="Arial" panose="020B0604020202020204" pitchFamily="34" charset="0"/>
+              <a:buChar char="•"/>
+            </a:pPr>
+            <a:r>
+              <a:rPr lang="en-US" altLang="ko-KR" dirty="0"/>
+              <a:t>Accessible from nodes needing to authenticate to services </a:t>
+            </a:r>
+            <a:r>
+              <a:rPr lang="en-US" altLang="ko-KR" sz="1400" dirty="0"/>
+              <a:t>(Google, Slack, Notion </a:t>
+            </a:r>
+            <a:r>
+              <a:rPr lang="ko-KR" altLang="en-US" sz="1400" dirty="0"/>
+              <a:t>등 외부 서비스 연동이 필요한 모든 노드에서 미리 등록해 둔 계정</a:t>
+            </a:r>
+            <a:r>
+              <a:rPr lang="en-US" altLang="ko-KR" sz="1400" dirty="0"/>
+              <a:t>/API </a:t>
+            </a:r>
+            <a:r>
+              <a:rPr lang="ko-KR" altLang="en-US" sz="1400" dirty="0"/>
+              <a:t>키를 불러와 재사용</a:t>
+            </a:r>
+            <a:r>
+              <a:rPr lang="en-US" altLang="ko-KR" sz="1400" dirty="0"/>
+              <a:t>)</a:t>
+            </a:r>
+          </a:p>
+          <a:p>
+            <a:pPr marL="285750" indent="-285750">
+              <a:lnSpc>
+                <a:spcPct val="200000"/>
+              </a:lnSpc>
+              <a:buFont typeface="Arial" panose="020B0604020202020204" pitchFamily="34" charset="0"/>
+              <a:buChar char="•"/>
+            </a:pPr>
+            <a:endParaRPr lang="en-US" altLang="ko-KR" sz="1400" dirty="0"/>
+          </a:p>
+          <a:p>
+            <a:pPr marL="285750" indent="-285750">
+              <a:lnSpc>
+                <a:spcPct val="200000"/>
+              </a:lnSpc>
+              <a:buFont typeface="Arial" panose="020B0604020202020204" pitchFamily="34" charset="0"/>
+              <a:buChar char="•"/>
+            </a:pPr>
+            <a:r>
+              <a:rPr lang="en-US" altLang="ko-KR" dirty="0"/>
+              <a:t>Saved at an instance-level </a:t>
+            </a:r>
+            <a:r>
+              <a:rPr lang="en-US" altLang="ko-KR" sz="1400" dirty="0"/>
+              <a:t>(</a:t>
+            </a:r>
+            <a:r>
+              <a:rPr lang="ko-KR" altLang="en-US" sz="1400" dirty="0"/>
+              <a:t>인증 정보가 특정 워크플로우 하나에만 얽매이지 않고</a:t>
+            </a:r>
+            <a:r>
+              <a:rPr lang="en-US" altLang="ko-KR" sz="1400" dirty="0"/>
+              <a:t>, n8n </a:t>
+            </a:r>
+            <a:r>
+              <a:rPr lang="ko-KR" altLang="en-US" sz="1400" dirty="0"/>
+              <a:t>서버</a:t>
+            </a:r>
+            <a:r>
+              <a:rPr lang="en-US" altLang="ko-KR" sz="1400" dirty="0"/>
+              <a:t>(</a:t>
+            </a:r>
+            <a:r>
+              <a:rPr lang="ko-KR" altLang="en-US" sz="1400" dirty="0"/>
+              <a:t>인스턴스</a:t>
+            </a:r>
+            <a:r>
+              <a:rPr lang="en-US" altLang="ko-KR" sz="1400" dirty="0"/>
+              <a:t>) </a:t>
+            </a:r>
+            <a:r>
+              <a:rPr lang="ko-KR" altLang="en-US" sz="1400" dirty="0"/>
+              <a:t>전체에 저장</a:t>
+            </a:r>
+            <a:r>
+              <a:rPr lang="en-US" altLang="ko-KR" sz="1400" dirty="0"/>
+              <a:t>)</a:t>
+            </a:r>
+          </a:p>
+          <a:p>
+            <a:pPr marL="285750" indent="-285750">
+              <a:lnSpc>
+                <a:spcPct val="200000"/>
+              </a:lnSpc>
+              <a:buFont typeface="Arial" panose="020B0604020202020204" pitchFamily="34" charset="0"/>
+              <a:buChar char="•"/>
+            </a:pPr>
+            <a:r>
+              <a:rPr lang="en-US" altLang="ko-KR" dirty="0"/>
+              <a:t>Different sharing options</a:t>
+            </a:r>
+            <a:endParaRPr lang="ko-KR" altLang="en-US" dirty="0"/>
+          </a:p>
+        </p:txBody>
+      </p:sp>
+      <p:pic>
+        <p:nvPicPr>
+          <p:cNvPr id="13" name="그림 12">
+            <a:extLst>
+              <a:ext uri="{FF2B5EF4-FFF2-40B4-BE49-F238E27FC236}">
+                <a16:creationId xmlns:a16="http://schemas.microsoft.com/office/drawing/2014/main" id="{4B4989C1-7F5F-2F6C-A210-0AF553E633C4}"/>
+              </a:ext>
+            </a:extLst>
+          </p:cNvPr>
+          <p:cNvPicPr>
+            <a:picLocks noChangeAspect="1"/>
+          </p:cNvPicPr>
+          <p:nvPr/>
+        </p:nvPicPr>
+        <p:blipFill>
+          <a:blip r:embed="rId2"/>
+          <a:stretch>
+            <a:fillRect/>
+          </a:stretch>
+        </p:blipFill>
+        <p:spPr>
+          <a:xfrm>
+            <a:off x="4726437" y="1667776"/>
+            <a:ext cx="6831096" cy="4237723"/>
+          </a:xfrm>
+          <a:prstGeom prst="rect">
+            <a:avLst/>
+          </a:prstGeom>
+        </p:spPr>
+      </p:pic>
+    </p:spTree>
+    <p:extLst>
+      <p:ext uri="{BB962C8B-B14F-4D97-AF65-F5344CB8AC3E}">
+        <p14:creationId xmlns:p14="http://schemas.microsoft.com/office/powerpoint/2010/main" val="4087757542"/>
+      </p:ext>
+    </p:extLst>
+  </p:cSld>
+  <p:clrMapOvr>
+    <a:masterClrMapping/>
+  </p:clrMapOvr>
+</p:sld>
+</file>
+
+<file path=ppt/slides/slide17.xml><?xml version="1.0" encoding="utf-8"?>
+<p:sld xmlns:a="http://schemas.openxmlformats.org/drawingml/2006/main" xmlns:r="http://schemas.openxmlformats.org/officeDocument/2006/relationships" xmlns:p="http://schemas.openxmlformats.org/presentationml/2006/main">
+  <p:cSld>
+    <p:spTree>
+      <p:nvGrpSpPr>
+        <p:cNvPr id="1" name="">
+          <a:extLst>
+            <a:ext uri="{FF2B5EF4-FFF2-40B4-BE49-F238E27FC236}">
+              <a16:creationId xmlns:a16="http://schemas.microsoft.com/office/drawing/2014/main" id="{FA35FB32-EFFC-3661-DAF3-AC0312F77099}"/>
+            </a:ext>
+          </a:extLst>
+        </p:cNvPr>
+        <p:cNvGrpSpPr/>
+        <p:nvPr/>
+      </p:nvGrpSpPr>
+      <p:grpSpPr>
+        <a:xfrm>
+          <a:off x="0" y="0"/>
+          <a:ext cx="0" cy="0"/>
+          <a:chOff x="0" y="0"/>
+          <a:chExt cx="0" cy="0"/>
+        </a:xfrm>
+      </p:grpSpPr>
+      <p:sp>
+        <p:nvSpPr>
+          <p:cNvPr id="3" name="제목 1">
+            <a:extLst>
+              <a:ext uri="{FF2B5EF4-FFF2-40B4-BE49-F238E27FC236}">
+                <a16:creationId xmlns:a16="http://schemas.microsoft.com/office/drawing/2014/main" id="{D2AB8855-87FD-D5E1-F80B-E83A4B3F8338}"/>
+              </a:ext>
+            </a:extLst>
+          </p:cNvPr>
+          <p:cNvSpPr txBox="1">
+            <a:spLocks/>
+          </p:cNvSpPr>
+          <p:nvPr/>
+        </p:nvSpPr>
+        <p:spPr>
+          <a:xfrm>
+            <a:off x="475645" y="481983"/>
+            <a:ext cx="10353762" cy="766439"/>
+          </a:xfrm>
+          <a:prstGeom prst="rect">
+            <a:avLst/>
+          </a:prstGeom>
+        </p:spPr>
+        <p:txBody>
+          <a:bodyPr vert="horz" lIns="91440" tIns="45720" rIns="91440" bIns="45720" rtlCol="0" anchor="ctr">
+            <a:normAutofit/>
+          </a:bodyPr>
+          <a:lstStyle>
+            <a:lvl1pPr algn="ctr" defTabSz="914400" rtl="0" eaLnBrk="1" latinLnBrk="1" hangingPunct="1">
+              <a:lnSpc>
+                <a:spcPct val="90000"/>
+              </a:lnSpc>
+              <a:spcBef>
+                <a:spcPct val="0"/>
+              </a:spcBef>
+              <a:buNone/>
+              <a:defRPr sz="3200" kern="1200" cap="all" baseline="0">
+                <a:solidFill>
+                  <a:schemeClr val="tx1"/>
+                </a:solidFill>
+                <a:effectLst/>
+                <a:latin typeface="Batang" panose="02030600000101010101" pitchFamily="18" charset="-127"/>
+                <a:ea typeface="Batang" panose="02030600000101010101" pitchFamily="18" charset="-127"/>
+                <a:cs typeface="+mj-cs"/>
+              </a:defRPr>
+            </a:lvl1pPr>
+          </a:lstStyle>
+          <a:p>
+            <a:pPr algn="l"/>
+            <a:r>
+              <a:rPr lang="en-US" altLang="ko-KR" sz="2800" b="1" cap="none" dirty="0">
+                <a:latin typeface="Lora" pitchFamily="2" charset="0"/>
+              </a:rPr>
+              <a:t>Data (Schema)</a:t>
+            </a:r>
+          </a:p>
+        </p:txBody>
+      </p:sp>
+      <p:sp>
+        <p:nvSpPr>
+          <p:cNvPr id="6" name="슬라이드 번호 개체 틀 3">
+            <a:extLst>
+              <a:ext uri="{FF2B5EF4-FFF2-40B4-BE49-F238E27FC236}">
+                <a16:creationId xmlns:a16="http://schemas.microsoft.com/office/drawing/2014/main" id="{B67DCA29-CD2B-DD36-3A78-E834B8927FBA}"/>
+              </a:ext>
+            </a:extLst>
+          </p:cNvPr>
+          <p:cNvSpPr txBox="1">
+            <a:spLocks/>
+          </p:cNvSpPr>
+          <p:nvPr/>
+        </p:nvSpPr>
+        <p:spPr>
+          <a:xfrm>
+            <a:off x="11180761" y="299420"/>
+            <a:ext cx="753545" cy="365125"/>
+          </a:xfrm>
+          <a:prstGeom prst="rect">
+            <a:avLst/>
+          </a:prstGeom>
+        </p:spPr>
+        <p:txBody>
+          <a:bodyPr vert="horz" lIns="91440" tIns="45720" rIns="91440" bIns="45720" rtlCol="0" anchor="ctr"/>
+          <a:lstStyle>
+            <a:defPPr rtl="0">
+              <a:defRPr lang="ko-KR"/>
+            </a:defPPr>
+            <a:lvl1pPr marL="0" algn="r" defTabSz="914400" rtl="0" eaLnBrk="1" latinLnBrk="0" hangingPunct="1">
+              <a:defRPr sz="1200" kern="1200" baseline="0">
+                <a:solidFill>
+                  <a:schemeClr val="tx1">
+                    <a:lumMod val="65000"/>
+                    <a:lumOff val="35000"/>
+                  </a:schemeClr>
+                </a:solidFill>
+                <a:latin typeface="맑은 고딕" panose="020B0503020000020004" pitchFamily="50" charset="-127"/>
+                <a:ea typeface="맑은 고딕" panose="020B0503020000020004" pitchFamily="50" charset="-127"/>
+                <a:cs typeface="+mn-cs"/>
+              </a:defRPr>
+            </a:lvl1pPr>
+            <a:lvl2pPr marL="457200" algn="l" defTabSz="914400" rtl="0" eaLnBrk="1" latinLnBrk="0" hangingPunct="1">
+              <a:defRPr sz="1800" kern="1200">
+                <a:solidFill>
+                  <a:schemeClr val="tx1"/>
+                </a:solidFill>
+                <a:latin typeface="+mn-lt"/>
+                <a:ea typeface="+mn-ea"/>
+                <a:cs typeface="+mn-cs"/>
+              </a:defRPr>
+            </a:lvl2pPr>
+            <a:lvl3pPr marL="914400" algn="l" defTabSz="914400" rtl="0" eaLnBrk="1" latinLnBrk="0" hangingPunct="1">
+              <a:defRPr sz="1800" kern="1200">
+                <a:solidFill>
+                  <a:schemeClr val="tx1"/>
+                </a:solidFill>
+                <a:latin typeface="+mn-lt"/>
+                <a:ea typeface="+mn-ea"/>
+                <a:cs typeface="+mn-cs"/>
+              </a:defRPr>
+            </a:lvl3pPr>
+            <a:lvl4pPr marL="1371600" algn="l" defTabSz="914400" rtl="0" eaLnBrk="1" latinLnBrk="0" hangingPunct="1">
+              <a:defRPr sz="1800" kern="1200">
+                <a:solidFill>
+                  <a:schemeClr val="tx1"/>
+                </a:solidFill>
+                <a:latin typeface="+mn-lt"/>
+                <a:ea typeface="+mn-ea"/>
+                <a:cs typeface="+mn-cs"/>
+              </a:defRPr>
+            </a:lvl4pPr>
+            <a:lvl5pPr marL="1828800" algn="l" defTabSz="914400" rtl="0" eaLnBrk="1" latinLnBrk="0" hangingPunct="1">
+              <a:defRPr sz="1800" kern="1200">
+                <a:solidFill>
+                  <a:schemeClr val="tx1"/>
+                </a:solidFill>
+                <a:latin typeface="+mn-lt"/>
+                <a:ea typeface="+mn-ea"/>
+                <a:cs typeface="+mn-cs"/>
+              </a:defRPr>
+            </a:lvl5pPr>
+            <a:lvl6pPr marL="2286000" algn="l" defTabSz="914400" rtl="0" eaLnBrk="1" latinLnBrk="0" hangingPunct="1">
+              <a:defRPr sz="1800" kern="1200">
+                <a:solidFill>
+                  <a:schemeClr val="tx1"/>
+                </a:solidFill>
+                <a:latin typeface="+mn-lt"/>
+                <a:ea typeface="+mn-ea"/>
+                <a:cs typeface="+mn-cs"/>
+              </a:defRPr>
+            </a:lvl6pPr>
+            <a:lvl7pPr marL="2743200" algn="l" defTabSz="914400" rtl="0" eaLnBrk="1" latinLnBrk="0" hangingPunct="1">
+              <a:defRPr sz="1800" kern="1200">
+                <a:solidFill>
+                  <a:schemeClr val="tx1"/>
+                </a:solidFill>
+                <a:latin typeface="+mn-lt"/>
+                <a:ea typeface="+mn-ea"/>
+                <a:cs typeface="+mn-cs"/>
+              </a:defRPr>
+            </a:lvl7pPr>
+            <a:lvl8pPr marL="3200400" algn="l" defTabSz="914400" rtl="0" eaLnBrk="1" latinLnBrk="0" hangingPunct="1">
+              <a:defRPr sz="1800" kern="1200">
+                <a:solidFill>
+                  <a:schemeClr val="tx1"/>
+                </a:solidFill>
+                <a:latin typeface="+mn-lt"/>
+                <a:ea typeface="+mn-ea"/>
+                <a:cs typeface="+mn-cs"/>
+              </a:defRPr>
+            </a:lvl8pPr>
+            <a:lvl9pPr marL="3657600" algn="l" defTabSz="914400" rtl="0" eaLnBrk="1" latinLnBrk="0" hangingPunct="1">
+              <a:defRPr sz="1800" kern="1200">
+                <a:solidFill>
+                  <a:schemeClr val="tx1"/>
+                </a:solidFill>
+                <a:latin typeface="+mn-lt"/>
+                <a:ea typeface="+mn-ea"/>
+                <a:cs typeface="+mn-cs"/>
+              </a:defRPr>
+            </a:lvl9pPr>
+          </a:lstStyle>
+          <a:p>
+            <a:fld id="{D57F1E4F-1CFF-5643-939E-217C01CDF565}" type="slidenum">
+              <a:rPr lang="en-US" b="1" smtClean="0">
+                <a:latin typeface="Segoe UI Emoji" panose="020B0502040204020203" pitchFamily="34" charset="0"/>
+                <a:ea typeface="Segoe UI Emoji" panose="020B0502040204020203" pitchFamily="34" charset="0"/>
+              </a:rPr>
+              <a:pPr/>
+              <a:t>17</a:t>
+            </a:fld>
+            <a:endParaRPr lang="en-US" b="1" dirty="0">
+              <a:latin typeface="Segoe UI Emoji" panose="020B0502040204020203" pitchFamily="34" charset="0"/>
+              <a:ea typeface="Segoe UI Emoji" panose="020B0502040204020203" pitchFamily="34" charset="0"/>
+            </a:endParaRPr>
+          </a:p>
+        </p:txBody>
+      </p:sp>
+      <p:pic>
+        <p:nvPicPr>
+          <p:cNvPr id="4" name="그림 3">
+            <a:extLst>
+              <a:ext uri="{FF2B5EF4-FFF2-40B4-BE49-F238E27FC236}">
+                <a16:creationId xmlns:a16="http://schemas.microsoft.com/office/drawing/2014/main" id="{F0F8BEE5-1BF8-797E-CBDD-0A4DFA2F8D4C}"/>
+              </a:ext>
+            </a:extLst>
+          </p:cNvPr>
+          <p:cNvPicPr>
+            <a:picLocks noChangeAspect="1"/>
+          </p:cNvPicPr>
+          <p:nvPr/>
+        </p:nvPicPr>
+        <p:blipFill>
+          <a:blip r:embed="rId2"/>
+          <a:stretch>
+            <a:fillRect/>
+          </a:stretch>
+        </p:blipFill>
+        <p:spPr>
+          <a:xfrm>
+            <a:off x="1266824" y="1470879"/>
+            <a:ext cx="9110191" cy="5080683"/>
+          </a:xfrm>
+          <a:prstGeom prst="rect">
+            <a:avLst/>
+          </a:prstGeom>
+        </p:spPr>
+      </p:pic>
+    </p:spTree>
+    <p:extLst>
+      <p:ext uri="{BB962C8B-B14F-4D97-AF65-F5344CB8AC3E}">
+        <p14:creationId xmlns:p14="http://schemas.microsoft.com/office/powerpoint/2010/main" val="1779993962"/>
+      </p:ext>
+    </p:extLst>
+  </p:cSld>
+  <p:clrMapOvr>
+    <a:masterClrMapping/>
+  </p:clrMapOvr>
+</p:sld>
+</file>
+
+<file path=ppt/slides/slide18.xml><?xml version="1.0" encoding="utf-8"?>
+<p:sld xmlns:a="http://schemas.openxmlformats.org/drawingml/2006/main" xmlns:r="http://schemas.openxmlformats.org/officeDocument/2006/relationships" xmlns:p="http://schemas.openxmlformats.org/presentationml/2006/main">
+  <p:cSld>
+    <p:spTree>
+      <p:nvGrpSpPr>
+        <p:cNvPr id="1" name="">
+          <a:extLst>
+            <a:ext uri="{FF2B5EF4-FFF2-40B4-BE49-F238E27FC236}">
+              <a16:creationId xmlns:a16="http://schemas.microsoft.com/office/drawing/2014/main" id="{0AA94C88-F55E-E347-89EB-211D632F4CDE}"/>
+            </a:ext>
+          </a:extLst>
+        </p:cNvPr>
+        <p:cNvGrpSpPr/>
+        <p:nvPr/>
+      </p:nvGrpSpPr>
+      <p:grpSpPr>
+        <a:xfrm>
+          <a:off x="0" y="0"/>
+          <a:ext cx="0" cy="0"/>
+          <a:chOff x="0" y="0"/>
+          <a:chExt cx="0" cy="0"/>
+        </a:xfrm>
+      </p:grpSpPr>
+      <p:sp>
+        <p:nvSpPr>
+          <p:cNvPr id="3" name="제목 1">
+            <a:extLst>
+              <a:ext uri="{FF2B5EF4-FFF2-40B4-BE49-F238E27FC236}">
+                <a16:creationId xmlns:a16="http://schemas.microsoft.com/office/drawing/2014/main" id="{B75F3E95-1F73-D684-AC63-BB81F2C1A6B0}"/>
+              </a:ext>
+            </a:extLst>
+          </p:cNvPr>
+          <p:cNvSpPr txBox="1">
+            <a:spLocks/>
+          </p:cNvSpPr>
+          <p:nvPr/>
+        </p:nvSpPr>
+        <p:spPr>
+          <a:xfrm>
+            <a:off x="475645" y="481983"/>
+            <a:ext cx="10353762" cy="766439"/>
+          </a:xfrm>
+          <a:prstGeom prst="rect">
+            <a:avLst/>
+          </a:prstGeom>
+        </p:spPr>
+        <p:txBody>
+          <a:bodyPr vert="horz" lIns="91440" tIns="45720" rIns="91440" bIns="45720" rtlCol="0" anchor="ctr">
+            <a:normAutofit/>
+          </a:bodyPr>
+          <a:lstStyle>
+            <a:lvl1pPr algn="ctr" defTabSz="914400" rtl="0" eaLnBrk="1" latinLnBrk="1" hangingPunct="1">
+              <a:lnSpc>
+                <a:spcPct val="90000"/>
+              </a:lnSpc>
+              <a:spcBef>
+                <a:spcPct val="0"/>
+              </a:spcBef>
+              <a:buNone/>
+              <a:defRPr sz="3200" kern="1200" cap="all" baseline="0">
+                <a:solidFill>
+                  <a:schemeClr val="tx1"/>
+                </a:solidFill>
+                <a:effectLst/>
+                <a:latin typeface="Batang" panose="02030600000101010101" pitchFamily="18" charset="-127"/>
+                <a:ea typeface="Batang" panose="02030600000101010101" pitchFamily="18" charset="-127"/>
+                <a:cs typeface="+mj-cs"/>
+              </a:defRPr>
+            </a:lvl1pPr>
+          </a:lstStyle>
+          <a:p>
+            <a:pPr algn="l"/>
+            <a:r>
+              <a:rPr lang="en-US" altLang="ko-KR" sz="2800" b="1" cap="none" dirty="0">
+                <a:latin typeface="Lora" pitchFamily="2" charset="0"/>
+              </a:rPr>
+              <a:t>Data (Table)</a:t>
+            </a:r>
+          </a:p>
+        </p:txBody>
+      </p:sp>
+      <p:sp>
+        <p:nvSpPr>
+          <p:cNvPr id="6" name="슬라이드 번호 개체 틀 3">
+            <a:extLst>
+              <a:ext uri="{FF2B5EF4-FFF2-40B4-BE49-F238E27FC236}">
+                <a16:creationId xmlns:a16="http://schemas.microsoft.com/office/drawing/2014/main" id="{121E9F83-125B-8318-514B-628F439C8995}"/>
+              </a:ext>
+            </a:extLst>
+          </p:cNvPr>
+          <p:cNvSpPr txBox="1">
+            <a:spLocks/>
+          </p:cNvSpPr>
+          <p:nvPr/>
+        </p:nvSpPr>
+        <p:spPr>
+          <a:xfrm>
+            <a:off x="11180761" y="299420"/>
+            <a:ext cx="753545" cy="365125"/>
+          </a:xfrm>
+          <a:prstGeom prst="rect">
+            <a:avLst/>
+          </a:prstGeom>
+        </p:spPr>
+        <p:txBody>
+          <a:bodyPr vert="horz" lIns="91440" tIns="45720" rIns="91440" bIns="45720" rtlCol="0" anchor="ctr"/>
+          <a:lstStyle>
+            <a:defPPr rtl="0">
+              <a:defRPr lang="ko-KR"/>
+            </a:defPPr>
+            <a:lvl1pPr marL="0" algn="r" defTabSz="914400" rtl="0" eaLnBrk="1" latinLnBrk="0" hangingPunct="1">
+              <a:defRPr sz="1200" kern="1200" baseline="0">
+                <a:solidFill>
+                  <a:schemeClr val="tx1">
+                    <a:lumMod val="65000"/>
+                    <a:lumOff val="35000"/>
+                  </a:schemeClr>
+                </a:solidFill>
+                <a:latin typeface="맑은 고딕" panose="020B0503020000020004" pitchFamily="50" charset="-127"/>
+                <a:ea typeface="맑은 고딕" panose="020B0503020000020004" pitchFamily="50" charset="-127"/>
+                <a:cs typeface="+mn-cs"/>
+              </a:defRPr>
+            </a:lvl1pPr>
+            <a:lvl2pPr marL="457200" algn="l" defTabSz="914400" rtl="0" eaLnBrk="1" latinLnBrk="0" hangingPunct="1">
+              <a:defRPr sz="1800" kern="1200">
+                <a:solidFill>
+                  <a:schemeClr val="tx1"/>
+                </a:solidFill>
+                <a:latin typeface="+mn-lt"/>
+                <a:ea typeface="+mn-ea"/>
+                <a:cs typeface="+mn-cs"/>
+              </a:defRPr>
+            </a:lvl2pPr>
+            <a:lvl3pPr marL="914400" algn="l" defTabSz="914400" rtl="0" eaLnBrk="1" latinLnBrk="0" hangingPunct="1">
+              <a:defRPr sz="1800" kern="1200">
+                <a:solidFill>
+                  <a:schemeClr val="tx1"/>
+                </a:solidFill>
+                <a:latin typeface="+mn-lt"/>
+                <a:ea typeface="+mn-ea"/>
+                <a:cs typeface="+mn-cs"/>
+              </a:defRPr>
+            </a:lvl3pPr>
+            <a:lvl4pPr marL="1371600" algn="l" defTabSz="914400" rtl="0" eaLnBrk="1" latinLnBrk="0" hangingPunct="1">
+              <a:defRPr sz="1800" kern="1200">
+                <a:solidFill>
+                  <a:schemeClr val="tx1"/>
+                </a:solidFill>
+                <a:latin typeface="+mn-lt"/>
+                <a:ea typeface="+mn-ea"/>
+                <a:cs typeface="+mn-cs"/>
+              </a:defRPr>
+            </a:lvl4pPr>
+            <a:lvl5pPr marL="1828800" algn="l" defTabSz="914400" rtl="0" eaLnBrk="1" latinLnBrk="0" hangingPunct="1">
+              <a:defRPr sz="1800" kern="1200">
+                <a:solidFill>
+                  <a:schemeClr val="tx1"/>
+                </a:solidFill>
+                <a:latin typeface="+mn-lt"/>
+                <a:ea typeface="+mn-ea"/>
+                <a:cs typeface="+mn-cs"/>
+              </a:defRPr>
+            </a:lvl5pPr>
+            <a:lvl6pPr marL="2286000" algn="l" defTabSz="914400" rtl="0" eaLnBrk="1" latinLnBrk="0" hangingPunct="1">
+              <a:defRPr sz="1800" kern="1200">
+                <a:solidFill>
+                  <a:schemeClr val="tx1"/>
+                </a:solidFill>
+                <a:latin typeface="+mn-lt"/>
+                <a:ea typeface="+mn-ea"/>
+                <a:cs typeface="+mn-cs"/>
+              </a:defRPr>
+            </a:lvl6pPr>
+            <a:lvl7pPr marL="2743200" algn="l" defTabSz="914400" rtl="0" eaLnBrk="1" latinLnBrk="0" hangingPunct="1">
+              <a:defRPr sz="1800" kern="1200">
+                <a:solidFill>
+                  <a:schemeClr val="tx1"/>
+                </a:solidFill>
+                <a:latin typeface="+mn-lt"/>
+                <a:ea typeface="+mn-ea"/>
+                <a:cs typeface="+mn-cs"/>
+              </a:defRPr>
+            </a:lvl7pPr>
+            <a:lvl8pPr marL="3200400" algn="l" defTabSz="914400" rtl="0" eaLnBrk="1" latinLnBrk="0" hangingPunct="1">
+              <a:defRPr sz="1800" kern="1200">
+                <a:solidFill>
+                  <a:schemeClr val="tx1"/>
+                </a:solidFill>
+                <a:latin typeface="+mn-lt"/>
+                <a:ea typeface="+mn-ea"/>
+                <a:cs typeface="+mn-cs"/>
+              </a:defRPr>
+            </a:lvl8pPr>
+            <a:lvl9pPr marL="3657600" algn="l" defTabSz="914400" rtl="0" eaLnBrk="1" latinLnBrk="0" hangingPunct="1">
+              <a:defRPr sz="1800" kern="1200">
+                <a:solidFill>
+                  <a:schemeClr val="tx1"/>
+                </a:solidFill>
+                <a:latin typeface="+mn-lt"/>
+                <a:ea typeface="+mn-ea"/>
+                <a:cs typeface="+mn-cs"/>
+              </a:defRPr>
+            </a:lvl9pPr>
+          </a:lstStyle>
+          <a:p>
+            <a:fld id="{D57F1E4F-1CFF-5643-939E-217C01CDF565}" type="slidenum">
+              <a:rPr lang="en-US" b="1" smtClean="0">
+                <a:latin typeface="Segoe UI Emoji" panose="020B0502040204020203" pitchFamily="34" charset="0"/>
+                <a:ea typeface="Segoe UI Emoji" panose="020B0502040204020203" pitchFamily="34" charset="0"/>
+              </a:rPr>
+              <a:pPr/>
+              <a:t>18</a:t>
+            </a:fld>
+            <a:endParaRPr lang="en-US" b="1" dirty="0">
+              <a:latin typeface="Segoe UI Emoji" panose="020B0502040204020203" pitchFamily="34" charset="0"/>
+              <a:ea typeface="Segoe UI Emoji" panose="020B0502040204020203" pitchFamily="34" charset="0"/>
+            </a:endParaRPr>
+          </a:p>
+        </p:txBody>
+      </p:sp>
+      <p:pic>
+        <p:nvPicPr>
+          <p:cNvPr id="9" name="그림 8">
+            <a:extLst>
+              <a:ext uri="{FF2B5EF4-FFF2-40B4-BE49-F238E27FC236}">
+                <a16:creationId xmlns:a16="http://schemas.microsoft.com/office/drawing/2014/main" id="{15C9C8C5-C56E-BA46-00F6-29DF80464B50}"/>
+              </a:ext>
+            </a:extLst>
+          </p:cNvPr>
+          <p:cNvPicPr>
+            <a:picLocks noChangeAspect="1"/>
+          </p:cNvPicPr>
+          <p:nvPr/>
+        </p:nvPicPr>
+        <p:blipFill>
+          <a:blip r:embed="rId2"/>
+          <a:stretch>
+            <a:fillRect/>
+          </a:stretch>
+        </p:blipFill>
+        <p:spPr>
+          <a:xfrm>
+            <a:off x="1074279" y="1465982"/>
+            <a:ext cx="9156494" cy="5071579"/>
+          </a:xfrm>
+          <a:prstGeom prst="rect">
+            <a:avLst/>
+          </a:prstGeom>
+        </p:spPr>
+      </p:pic>
+    </p:spTree>
+    <p:extLst>
+      <p:ext uri="{BB962C8B-B14F-4D97-AF65-F5344CB8AC3E}">
+        <p14:creationId xmlns:p14="http://schemas.microsoft.com/office/powerpoint/2010/main" val="2406152815"/>
+      </p:ext>
+    </p:extLst>
+  </p:cSld>
+  <p:clrMapOvr>
+    <a:masterClrMapping/>
+  </p:clrMapOvr>
+</p:sld>
+</file>
+
+<file path=ppt/slides/slide19.xml><?xml version="1.0" encoding="utf-8"?>
+<p:sld xmlns:a="http://schemas.openxmlformats.org/drawingml/2006/main" xmlns:r="http://schemas.openxmlformats.org/officeDocument/2006/relationships" xmlns:p="http://schemas.openxmlformats.org/presentationml/2006/main">
+  <p:cSld>
+    <p:spTree>
+      <p:nvGrpSpPr>
+        <p:cNvPr id="1" name="">
+          <a:extLst>
+            <a:ext uri="{FF2B5EF4-FFF2-40B4-BE49-F238E27FC236}">
+              <a16:creationId xmlns:a16="http://schemas.microsoft.com/office/drawing/2014/main" id="{8F1EDEF3-3406-31D4-8808-1D9CCC4F257F}"/>
+            </a:ext>
+          </a:extLst>
+        </p:cNvPr>
+        <p:cNvGrpSpPr/>
+        <p:nvPr/>
+      </p:nvGrpSpPr>
+      <p:grpSpPr>
+        <a:xfrm>
+          <a:off x="0" y="0"/>
+          <a:ext cx="0" cy="0"/>
+          <a:chOff x="0" y="0"/>
+          <a:chExt cx="0" cy="0"/>
+        </a:xfrm>
+      </p:grpSpPr>
+      <p:sp>
+        <p:nvSpPr>
+          <p:cNvPr id="3" name="제목 1">
+            <a:extLst>
+              <a:ext uri="{FF2B5EF4-FFF2-40B4-BE49-F238E27FC236}">
+                <a16:creationId xmlns:a16="http://schemas.microsoft.com/office/drawing/2014/main" id="{63CA923E-F38A-FCA4-C73E-433FBDC97360}"/>
+              </a:ext>
+            </a:extLst>
+          </p:cNvPr>
+          <p:cNvSpPr txBox="1">
+            <a:spLocks/>
+          </p:cNvSpPr>
+          <p:nvPr/>
+        </p:nvSpPr>
+        <p:spPr>
+          <a:xfrm>
+            <a:off x="475645" y="481983"/>
+            <a:ext cx="10353762" cy="766439"/>
+          </a:xfrm>
+          <a:prstGeom prst="rect">
+            <a:avLst/>
+          </a:prstGeom>
+        </p:spPr>
+        <p:txBody>
+          <a:bodyPr vert="horz" lIns="91440" tIns="45720" rIns="91440" bIns="45720" rtlCol="0" anchor="ctr">
+            <a:normAutofit/>
+          </a:bodyPr>
+          <a:lstStyle>
+            <a:lvl1pPr algn="ctr" defTabSz="914400" rtl="0" eaLnBrk="1" latinLnBrk="1" hangingPunct="1">
+              <a:lnSpc>
+                <a:spcPct val="90000"/>
+              </a:lnSpc>
+              <a:spcBef>
+                <a:spcPct val="0"/>
+              </a:spcBef>
+              <a:buNone/>
+              <a:defRPr sz="3200" kern="1200" cap="all" baseline="0">
+                <a:solidFill>
+                  <a:schemeClr val="tx1"/>
+                </a:solidFill>
+                <a:effectLst/>
+                <a:latin typeface="Batang" panose="02030600000101010101" pitchFamily="18" charset="-127"/>
+                <a:ea typeface="Batang" panose="02030600000101010101" pitchFamily="18" charset="-127"/>
+                <a:cs typeface="+mj-cs"/>
+              </a:defRPr>
+            </a:lvl1pPr>
+          </a:lstStyle>
+          <a:p>
+            <a:pPr algn="l"/>
+            <a:r>
+              <a:rPr lang="en-US" altLang="ko-KR" sz="2800" b="1" cap="none" dirty="0">
+                <a:latin typeface="Lora" pitchFamily="2" charset="0"/>
+              </a:rPr>
+              <a:t>Data (JSON)</a:t>
+            </a:r>
+          </a:p>
+        </p:txBody>
+      </p:sp>
+      <p:sp>
+        <p:nvSpPr>
+          <p:cNvPr id="6" name="슬라이드 번호 개체 틀 3">
+            <a:extLst>
+              <a:ext uri="{FF2B5EF4-FFF2-40B4-BE49-F238E27FC236}">
+                <a16:creationId xmlns:a16="http://schemas.microsoft.com/office/drawing/2014/main" id="{2E664C8D-3F7B-FE2E-0113-EA701A2F4136}"/>
+              </a:ext>
+            </a:extLst>
+          </p:cNvPr>
+          <p:cNvSpPr txBox="1">
+            <a:spLocks/>
+          </p:cNvSpPr>
+          <p:nvPr/>
+        </p:nvSpPr>
+        <p:spPr>
+          <a:xfrm>
+            <a:off x="11180761" y="299420"/>
+            <a:ext cx="753545" cy="365125"/>
+          </a:xfrm>
+          <a:prstGeom prst="rect">
+            <a:avLst/>
+          </a:prstGeom>
+        </p:spPr>
+        <p:txBody>
+          <a:bodyPr vert="horz" lIns="91440" tIns="45720" rIns="91440" bIns="45720" rtlCol="0" anchor="ctr"/>
+          <a:lstStyle>
+            <a:defPPr rtl="0">
+              <a:defRPr lang="ko-KR"/>
+            </a:defPPr>
+            <a:lvl1pPr marL="0" algn="r" defTabSz="914400" rtl="0" eaLnBrk="1" latinLnBrk="0" hangingPunct="1">
+              <a:defRPr sz="1200" kern="1200" baseline="0">
+                <a:solidFill>
+                  <a:schemeClr val="tx1">
+                    <a:lumMod val="65000"/>
+                    <a:lumOff val="35000"/>
+                  </a:schemeClr>
+                </a:solidFill>
+                <a:latin typeface="맑은 고딕" panose="020B0503020000020004" pitchFamily="50" charset="-127"/>
+                <a:ea typeface="맑은 고딕" panose="020B0503020000020004" pitchFamily="50" charset="-127"/>
+                <a:cs typeface="+mn-cs"/>
+              </a:defRPr>
+            </a:lvl1pPr>
+            <a:lvl2pPr marL="457200" algn="l" defTabSz="914400" rtl="0" eaLnBrk="1" latinLnBrk="0" hangingPunct="1">
+              <a:defRPr sz="1800" kern="1200">
+                <a:solidFill>
+                  <a:schemeClr val="tx1"/>
+                </a:solidFill>
+                <a:latin typeface="+mn-lt"/>
+                <a:ea typeface="+mn-ea"/>
+                <a:cs typeface="+mn-cs"/>
+              </a:defRPr>
+            </a:lvl2pPr>
+            <a:lvl3pPr marL="914400" algn="l" defTabSz="914400" rtl="0" eaLnBrk="1" latinLnBrk="0" hangingPunct="1">
+              <a:defRPr sz="1800" kern="1200">
+                <a:solidFill>
+                  <a:schemeClr val="tx1"/>
+                </a:solidFill>
+                <a:latin typeface="+mn-lt"/>
+                <a:ea typeface="+mn-ea"/>
+                <a:cs typeface="+mn-cs"/>
+              </a:defRPr>
+            </a:lvl3pPr>
+            <a:lvl4pPr marL="1371600" algn="l" defTabSz="914400" rtl="0" eaLnBrk="1" latinLnBrk="0" hangingPunct="1">
+              <a:defRPr sz="1800" kern="1200">
+                <a:solidFill>
+                  <a:schemeClr val="tx1"/>
+                </a:solidFill>
+                <a:latin typeface="+mn-lt"/>
+                <a:ea typeface="+mn-ea"/>
+                <a:cs typeface="+mn-cs"/>
+              </a:defRPr>
+            </a:lvl4pPr>
+            <a:lvl5pPr marL="1828800" algn="l" defTabSz="914400" rtl="0" eaLnBrk="1" latinLnBrk="0" hangingPunct="1">
+              <a:defRPr sz="1800" kern="1200">
+                <a:solidFill>
+                  <a:schemeClr val="tx1"/>
+                </a:solidFill>
+                <a:latin typeface="+mn-lt"/>
+                <a:ea typeface="+mn-ea"/>
+                <a:cs typeface="+mn-cs"/>
+              </a:defRPr>
+            </a:lvl5pPr>
+            <a:lvl6pPr marL="2286000" algn="l" defTabSz="914400" rtl="0" eaLnBrk="1" latinLnBrk="0" hangingPunct="1">
+              <a:defRPr sz="1800" kern="1200">
+                <a:solidFill>
+                  <a:schemeClr val="tx1"/>
+                </a:solidFill>
+                <a:latin typeface="+mn-lt"/>
+                <a:ea typeface="+mn-ea"/>
+                <a:cs typeface="+mn-cs"/>
+              </a:defRPr>
+            </a:lvl6pPr>
+            <a:lvl7pPr marL="2743200" algn="l" defTabSz="914400" rtl="0" eaLnBrk="1" latinLnBrk="0" hangingPunct="1">
+              <a:defRPr sz="1800" kern="1200">
+                <a:solidFill>
+                  <a:schemeClr val="tx1"/>
+                </a:solidFill>
+                <a:latin typeface="+mn-lt"/>
+                <a:ea typeface="+mn-ea"/>
+                <a:cs typeface="+mn-cs"/>
+              </a:defRPr>
+            </a:lvl7pPr>
+            <a:lvl8pPr marL="3200400" algn="l" defTabSz="914400" rtl="0" eaLnBrk="1" latinLnBrk="0" hangingPunct="1">
+              <a:defRPr sz="1800" kern="1200">
+                <a:solidFill>
+                  <a:schemeClr val="tx1"/>
+                </a:solidFill>
+                <a:latin typeface="+mn-lt"/>
+                <a:ea typeface="+mn-ea"/>
+                <a:cs typeface="+mn-cs"/>
+              </a:defRPr>
+            </a:lvl8pPr>
+            <a:lvl9pPr marL="3657600" algn="l" defTabSz="914400" rtl="0" eaLnBrk="1" latinLnBrk="0" hangingPunct="1">
+              <a:defRPr sz="1800" kern="1200">
+                <a:solidFill>
+                  <a:schemeClr val="tx1"/>
+                </a:solidFill>
+                <a:latin typeface="+mn-lt"/>
+                <a:ea typeface="+mn-ea"/>
+                <a:cs typeface="+mn-cs"/>
+              </a:defRPr>
+            </a:lvl9pPr>
+          </a:lstStyle>
+          <a:p>
+            <a:fld id="{D57F1E4F-1CFF-5643-939E-217C01CDF565}" type="slidenum">
+              <a:rPr lang="en-US" b="1" smtClean="0">
+                <a:latin typeface="Segoe UI Emoji" panose="020B0502040204020203" pitchFamily="34" charset="0"/>
+                <a:ea typeface="Segoe UI Emoji" panose="020B0502040204020203" pitchFamily="34" charset="0"/>
+              </a:rPr>
+              <a:pPr/>
+              <a:t>19</a:t>
+            </a:fld>
+            <a:endParaRPr lang="en-US" b="1" dirty="0">
+              <a:latin typeface="Segoe UI Emoji" panose="020B0502040204020203" pitchFamily="34" charset="0"/>
+              <a:ea typeface="Segoe UI Emoji" panose="020B0502040204020203" pitchFamily="34" charset="0"/>
+            </a:endParaRPr>
+          </a:p>
+        </p:txBody>
+      </p:sp>
+      <p:pic>
+        <p:nvPicPr>
+          <p:cNvPr id="4" name="그림 3">
+            <a:extLst>
+              <a:ext uri="{FF2B5EF4-FFF2-40B4-BE49-F238E27FC236}">
+                <a16:creationId xmlns:a16="http://schemas.microsoft.com/office/drawing/2014/main" id="{62749E49-1645-608A-9423-80040F392734}"/>
+              </a:ext>
+            </a:extLst>
+          </p:cNvPr>
+          <p:cNvPicPr>
+            <a:picLocks noChangeAspect="1"/>
+          </p:cNvPicPr>
+          <p:nvPr/>
+        </p:nvPicPr>
+        <p:blipFill>
+          <a:blip r:embed="rId2"/>
+          <a:stretch>
+            <a:fillRect/>
+          </a:stretch>
+        </p:blipFill>
+        <p:spPr>
+          <a:xfrm>
+            <a:off x="1365176" y="1438274"/>
+            <a:ext cx="9025172" cy="5033389"/>
+          </a:xfrm>
+          <a:prstGeom prst="rect">
+            <a:avLst/>
+          </a:prstGeom>
+        </p:spPr>
+      </p:pic>
+    </p:spTree>
+    <p:extLst>
+      <p:ext uri="{BB962C8B-B14F-4D97-AF65-F5344CB8AC3E}">
+        <p14:creationId xmlns:p14="http://schemas.microsoft.com/office/powerpoint/2010/main" val="3067329419"/>
       </p:ext>
     </p:extLst>
   </p:cSld>
@@ -4350,6 +6629,2955 @@
     <p:extLst>
       <p:ext uri="{BB962C8B-B14F-4D97-AF65-F5344CB8AC3E}">
         <p14:creationId xmlns:p14="http://schemas.microsoft.com/office/powerpoint/2010/main" val="2827070286"/>
+      </p:ext>
+    </p:extLst>
+  </p:cSld>
+  <p:clrMapOvr>
+    <a:masterClrMapping/>
+  </p:clrMapOvr>
+</p:sld>
+</file>
+
+<file path=ppt/slides/slide20.xml><?xml version="1.0" encoding="utf-8"?>
+<p:sld xmlns:a="http://schemas.openxmlformats.org/drawingml/2006/main" xmlns:r="http://schemas.openxmlformats.org/officeDocument/2006/relationships" xmlns:p="http://schemas.openxmlformats.org/presentationml/2006/main">
+  <p:cSld>
+    <p:spTree>
+      <p:nvGrpSpPr>
+        <p:cNvPr id="1" name="">
+          <a:extLst>
+            <a:ext uri="{FF2B5EF4-FFF2-40B4-BE49-F238E27FC236}">
+              <a16:creationId xmlns:a16="http://schemas.microsoft.com/office/drawing/2014/main" id="{FF838E00-8707-B57A-7C2A-5C829C28BB69}"/>
+            </a:ext>
+          </a:extLst>
+        </p:cNvPr>
+        <p:cNvGrpSpPr/>
+        <p:nvPr/>
+      </p:nvGrpSpPr>
+      <p:grpSpPr>
+        <a:xfrm>
+          <a:off x="0" y="0"/>
+          <a:ext cx="0" cy="0"/>
+          <a:chOff x="0" y="0"/>
+          <a:chExt cx="0" cy="0"/>
+        </a:xfrm>
+      </p:grpSpPr>
+      <p:sp>
+        <p:nvSpPr>
+          <p:cNvPr id="2" name="제목 1">
+            <a:extLst>
+              <a:ext uri="{FF2B5EF4-FFF2-40B4-BE49-F238E27FC236}">
+                <a16:creationId xmlns:a16="http://schemas.microsoft.com/office/drawing/2014/main" id="{1EA697E9-7A97-D2B1-1707-442913F93315}"/>
+              </a:ext>
+            </a:extLst>
+          </p:cNvPr>
+          <p:cNvSpPr>
+            <a:spLocks noGrp="1"/>
+          </p:cNvSpPr>
+          <p:nvPr>
+            <p:ph type="ctrTitle"/>
+          </p:nvPr>
+        </p:nvSpPr>
+        <p:spPr>
+          <a:xfrm>
+            <a:off x="838199" y="1164324"/>
+            <a:ext cx="10934701" cy="2387600"/>
+          </a:xfrm>
+        </p:spPr>
+        <p:txBody>
+          <a:bodyPr rtlCol="0" anchor="ctr" anchorCtr="0">
+            <a:normAutofit/>
+          </a:bodyPr>
+          <a:lstStyle/>
+          <a:p>
+            <a:r>
+              <a:rPr lang="en-US" altLang="ko-KR" sz="5400" dirty="0">
+                <a:solidFill>
+                  <a:schemeClr val="bg1"/>
+                </a:solidFill>
+                <a:latin typeface="D2Coding" panose="020B0609020101020101" pitchFamily="49" charset="-127"/>
+                <a:ea typeface="D2Coding" panose="020B0609020101020101" pitchFamily="49" charset="-127"/>
+              </a:rPr>
+              <a:t>n8n</a:t>
+            </a:r>
+            <a:br>
+              <a:rPr lang="en-US" altLang="ko-KR" sz="4400" dirty="0">
+                <a:solidFill>
+                  <a:schemeClr val="bg1"/>
+                </a:solidFill>
+                <a:latin typeface="D2Coding" panose="020B0609020101020101" pitchFamily="49" charset="-127"/>
+                <a:ea typeface="D2Coding" panose="020B0609020101020101" pitchFamily="49" charset="-127"/>
+              </a:rPr>
+            </a:br>
+            <a:r>
+              <a:rPr lang="en-US" altLang="ko-KR" sz="4000" dirty="0">
+                <a:solidFill>
+                  <a:schemeClr val="bg1"/>
+                </a:solidFill>
+                <a:latin typeface="D2Coding" panose="020B0609020101020101" pitchFamily="49" charset="-127"/>
+                <a:ea typeface="D2Coding" panose="020B0609020101020101" pitchFamily="49" charset="-127"/>
+              </a:rPr>
+              <a:t>Homework</a:t>
+            </a:r>
+            <a:endParaRPr lang="ko-KR" altLang="en-US" sz="4400" dirty="0">
+              <a:solidFill>
+                <a:schemeClr val="bg1"/>
+              </a:solidFill>
+              <a:latin typeface="D2Coding" panose="020B0609020101020101" pitchFamily="49" charset="-127"/>
+              <a:ea typeface="D2Coding" panose="020B0609020101020101" pitchFamily="49" charset="-127"/>
+            </a:endParaRPr>
+          </a:p>
+        </p:txBody>
+      </p:sp>
+      <p:sp>
+        <p:nvSpPr>
+          <p:cNvPr id="5" name="부제목 2">
+            <a:extLst>
+              <a:ext uri="{FF2B5EF4-FFF2-40B4-BE49-F238E27FC236}">
+                <a16:creationId xmlns:a16="http://schemas.microsoft.com/office/drawing/2014/main" id="{BE5E0F2A-30DE-3D86-612A-26C87202C5BB}"/>
+              </a:ext>
+            </a:extLst>
+          </p:cNvPr>
+          <p:cNvSpPr txBox="1">
+            <a:spLocks/>
+          </p:cNvSpPr>
+          <p:nvPr/>
+        </p:nvSpPr>
+        <p:spPr>
+          <a:xfrm>
+            <a:off x="855620" y="4555883"/>
+            <a:ext cx="9582736" cy="1137793"/>
+          </a:xfrm>
+          <a:prstGeom prst="rect">
+            <a:avLst/>
+          </a:prstGeom>
+        </p:spPr>
+        <p:txBody>
+          <a:bodyPr vert="horz" lIns="91440" tIns="45720" rIns="91440" bIns="45720" rtlCol="0">
+            <a:normAutofit fontScale="85000" lnSpcReduction="20000"/>
+          </a:bodyPr>
+          <a:lstStyle>
+            <a:lvl1pPr marL="0" indent="0" algn="l" defTabSz="914400" rtl="0" eaLnBrk="1" latinLnBrk="1" hangingPunct="1">
+              <a:lnSpc>
+                <a:spcPct val="150000"/>
+              </a:lnSpc>
+              <a:spcBef>
+                <a:spcPts val="1000"/>
+              </a:spcBef>
+              <a:spcAft>
+                <a:spcPts val="1200"/>
+              </a:spcAft>
+              <a:buFontTx/>
+              <a:buNone/>
+              <a:defRPr lang="en-US" sz="1200" kern="1200" dirty="0">
+                <a:solidFill>
+                  <a:schemeClr val="tx1"/>
+                </a:solidFill>
+                <a:latin typeface="맑은 고딕" panose="020B0503020000020004" pitchFamily="50" charset="-127"/>
+                <a:ea typeface="맑은 고딕" panose="020B0503020000020004" pitchFamily="50" charset="-127"/>
+                <a:cs typeface="+mn-cs"/>
+              </a:defRPr>
+            </a:lvl1pPr>
+            <a:lvl2pPr marL="228600" indent="-228600" algn="l" defTabSz="914400" rtl="0" eaLnBrk="1" latinLnBrk="1" hangingPunct="1">
+              <a:lnSpc>
+                <a:spcPct val="150000"/>
+              </a:lnSpc>
+              <a:spcBef>
+                <a:spcPts val="1000"/>
+              </a:spcBef>
+              <a:spcAft>
+                <a:spcPts val="1200"/>
+              </a:spcAft>
+              <a:buFont typeface="Arial" panose="020B0604020202020204" pitchFamily="34" charset="0"/>
+              <a:buChar char="•"/>
+              <a:defRPr lang="en-US" sz="1200" kern="1200" dirty="0">
+                <a:solidFill>
+                  <a:schemeClr val="tx1"/>
+                </a:solidFill>
+                <a:latin typeface="맑은 고딕" panose="020B0503020000020004" pitchFamily="50" charset="-127"/>
+                <a:ea typeface="맑은 고딕" panose="020B0503020000020004" pitchFamily="50" charset="-127"/>
+                <a:cs typeface="+mn-cs"/>
+              </a:defRPr>
+            </a:lvl2pPr>
+            <a:lvl3pPr marL="685800" indent="-228600" algn="l" defTabSz="914400" rtl="0" eaLnBrk="1" latinLnBrk="1" hangingPunct="1">
+              <a:lnSpc>
+                <a:spcPct val="150000"/>
+              </a:lnSpc>
+              <a:spcBef>
+                <a:spcPts val="1000"/>
+              </a:spcBef>
+              <a:spcAft>
+                <a:spcPts val="1200"/>
+              </a:spcAft>
+              <a:buFont typeface="Arial" panose="020B0604020202020204" pitchFamily="34" charset="0"/>
+              <a:buChar char="•"/>
+              <a:defRPr lang="en-US" sz="1200" kern="1200" dirty="0">
+                <a:solidFill>
+                  <a:schemeClr val="tx1"/>
+                </a:solidFill>
+                <a:latin typeface="맑은 고딕" panose="020B0503020000020004" pitchFamily="50" charset="-127"/>
+                <a:ea typeface="맑은 고딕" panose="020B0503020000020004" pitchFamily="50" charset="-127"/>
+                <a:cs typeface="+mn-cs"/>
+              </a:defRPr>
+            </a:lvl3pPr>
+            <a:lvl4pPr marL="1143000" indent="-228600" algn="l" defTabSz="914400" rtl="0" eaLnBrk="1" latinLnBrk="1" hangingPunct="1">
+              <a:lnSpc>
+                <a:spcPct val="150000"/>
+              </a:lnSpc>
+              <a:spcBef>
+                <a:spcPts val="1000"/>
+              </a:spcBef>
+              <a:spcAft>
+                <a:spcPts val="1200"/>
+              </a:spcAft>
+              <a:buFont typeface="Arial" panose="020B0604020202020204" pitchFamily="34" charset="0"/>
+              <a:buChar char="•"/>
+              <a:defRPr lang="en-US" sz="1200" kern="1200" dirty="0" smtClean="0">
+                <a:solidFill>
+                  <a:schemeClr val="tx1"/>
+                </a:solidFill>
+                <a:latin typeface="맑은 고딕" panose="020B0503020000020004" pitchFamily="50" charset="-127"/>
+                <a:ea typeface="맑은 고딕" panose="020B0503020000020004" pitchFamily="50" charset="-127"/>
+                <a:cs typeface="+mn-cs"/>
+              </a:defRPr>
+            </a:lvl4pPr>
+            <a:lvl5pPr marL="1600200" indent="-228600" algn="l" defTabSz="914400" rtl="0" eaLnBrk="1" latinLnBrk="1" hangingPunct="1">
+              <a:lnSpc>
+                <a:spcPct val="150000"/>
+              </a:lnSpc>
+              <a:spcBef>
+                <a:spcPts val="1000"/>
+              </a:spcBef>
+              <a:spcAft>
+                <a:spcPts val="1200"/>
+              </a:spcAft>
+              <a:buFont typeface="Arial" panose="020B0604020202020204" pitchFamily="34" charset="0"/>
+              <a:buChar char="•"/>
+              <a:defRPr lang="en-US" sz="1200" kern="1200" dirty="0" smtClean="0">
+                <a:solidFill>
+                  <a:schemeClr val="tx1"/>
+                </a:solidFill>
+                <a:latin typeface="맑은 고딕" panose="020B0503020000020004" pitchFamily="50" charset="-127"/>
+                <a:ea typeface="맑은 고딕" panose="020B0503020000020004" pitchFamily="50" charset="-127"/>
+                <a:cs typeface="+mn-cs"/>
+              </a:defRPr>
+            </a:lvl5pPr>
+            <a:lvl6pPr marL="2057400" indent="-228600" algn="l" defTabSz="914400" rtl="0" eaLnBrk="1" latinLnBrk="1" hangingPunct="1">
+              <a:lnSpc>
+                <a:spcPct val="150000"/>
+              </a:lnSpc>
+              <a:spcBef>
+                <a:spcPts val="1000"/>
+              </a:spcBef>
+              <a:spcAft>
+                <a:spcPts val="1200"/>
+              </a:spcAft>
+              <a:buFont typeface="Arial" panose="020B0604020202020204" pitchFamily="34" charset="0"/>
+              <a:buChar char="•"/>
+              <a:defRPr lang="en-US" sz="1200" kern="1200" dirty="0" smtClean="0">
+                <a:solidFill>
+                  <a:schemeClr val="tx1"/>
+                </a:solidFill>
+                <a:latin typeface="+mn-lt"/>
+                <a:ea typeface="+mn-ea"/>
+                <a:cs typeface="+mn-cs"/>
+              </a:defRPr>
+            </a:lvl6pPr>
+            <a:lvl7pPr marL="2514600" indent="-228600" algn="l" defTabSz="914400" rtl="0" eaLnBrk="1" latinLnBrk="1" hangingPunct="1">
+              <a:lnSpc>
+                <a:spcPct val="150000"/>
+              </a:lnSpc>
+              <a:spcBef>
+                <a:spcPts val="1000"/>
+              </a:spcBef>
+              <a:spcAft>
+                <a:spcPts val="1200"/>
+              </a:spcAft>
+              <a:buFont typeface="Arial" panose="020B0604020202020204" pitchFamily="34" charset="0"/>
+              <a:buChar char="•"/>
+              <a:defRPr lang="en-US" sz="1200" kern="1200" dirty="0" smtClean="0">
+                <a:solidFill>
+                  <a:schemeClr val="tx1"/>
+                </a:solidFill>
+                <a:latin typeface="+mn-lt"/>
+                <a:ea typeface="+mn-ea"/>
+                <a:cs typeface="+mn-cs"/>
+              </a:defRPr>
+            </a:lvl7pPr>
+            <a:lvl8pPr marL="2971800" indent="-228600" algn="l" defTabSz="914400" rtl="0" eaLnBrk="1" latinLnBrk="1" hangingPunct="1">
+              <a:lnSpc>
+                <a:spcPct val="150000"/>
+              </a:lnSpc>
+              <a:spcBef>
+                <a:spcPts val="1000"/>
+              </a:spcBef>
+              <a:spcAft>
+                <a:spcPts val="1200"/>
+              </a:spcAft>
+              <a:buFont typeface="Arial" panose="020B0604020202020204" pitchFamily="34" charset="0"/>
+              <a:buChar char="•"/>
+              <a:defRPr lang="en-US" sz="1200" kern="1200" dirty="0" smtClean="0">
+                <a:solidFill>
+                  <a:schemeClr val="tx1"/>
+                </a:solidFill>
+                <a:latin typeface="+mn-lt"/>
+                <a:ea typeface="+mn-ea"/>
+                <a:cs typeface="+mn-cs"/>
+              </a:defRPr>
+            </a:lvl8pPr>
+            <a:lvl9pPr marL="3429000" indent="-228600" algn="l" defTabSz="914400" rtl="0" eaLnBrk="1" latinLnBrk="1" hangingPunct="1">
+              <a:lnSpc>
+                <a:spcPct val="90000"/>
+              </a:lnSpc>
+              <a:spcBef>
+                <a:spcPct val="30000"/>
+              </a:spcBef>
+              <a:buFont typeface="Arial" panose="020B0604020202020204" pitchFamily="34" charset="0"/>
+              <a:buNone/>
+              <a:defRPr sz="1200" kern="1200">
+                <a:solidFill>
+                  <a:schemeClr val="tx1"/>
+                </a:solidFill>
+                <a:latin typeface="+mn-lt"/>
+                <a:ea typeface="+mn-ea"/>
+                <a:cs typeface="+mn-cs"/>
+              </a:defRPr>
+            </a:lvl9pPr>
+          </a:lstStyle>
+          <a:p>
+            <a:r>
+              <a:rPr lang="en-US" altLang="ko-KR" sz="2400" dirty="0">
+                <a:solidFill>
+                  <a:schemeClr val="bg1"/>
+                </a:solidFill>
+                <a:latin typeface="D2Coding" panose="020B0609020101020101" pitchFamily="49" charset="-127"/>
+                <a:ea typeface="D2Coding" panose="020B0609020101020101" pitchFamily="49" charset="-127"/>
+              </a:rPr>
+              <a:t>2026 Fall</a:t>
+            </a:r>
+          </a:p>
+          <a:p>
+            <a:r>
+              <a:rPr lang="ko-KR" altLang="en-US" sz="2400" dirty="0" err="1">
+                <a:solidFill>
+                  <a:schemeClr val="bg1"/>
+                </a:solidFill>
+                <a:latin typeface="D2Coding" panose="020B0609020101020101" pitchFamily="49" charset="-127"/>
+                <a:ea typeface="D2Coding" panose="020B0609020101020101" pitchFamily="49" charset="-127"/>
+              </a:rPr>
+              <a:t>조상구교수</a:t>
+            </a:r>
+            <a:endParaRPr lang="en-US" altLang="ko-KR" sz="2400" dirty="0">
+              <a:solidFill>
+                <a:schemeClr val="bg1"/>
+              </a:solidFill>
+              <a:latin typeface="D2Coding" panose="020B0609020101020101" pitchFamily="49" charset="-127"/>
+              <a:ea typeface="D2Coding" panose="020B0609020101020101" pitchFamily="49" charset="-127"/>
+            </a:endParaRPr>
+          </a:p>
+        </p:txBody>
+      </p:sp>
+    </p:spTree>
+    <p:extLst>
+      <p:ext uri="{BB962C8B-B14F-4D97-AF65-F5344CB8AC3E}">
+        <p14:creationId xmlns:p14="http://schemas.microsoft.com/office/powerpoint/2010/main" val="3761262290"/>
+      </p:ext>
+    </p:extLst>
+  </p:cSld>
+  <p:clrMapOvr>
+    <a:masterClrMapping/>
+  </p:clrMapOvr>
+</p:sld>
+</file>
+
+<file path=ppt/slides/slide21.xml><?xml version="1.0" encoding="utf-8"?>
+<p:sld xmlns:a="http://schemas.openxmlformats.org/drawingml/2006/main" xmlns:r="http://schemas.openxmlformats.org/officeDocument/2006/relationships" xmlns:p="http://schemas.openxmlformats.org/presentationml/2006/main">
+  <p:cSld>
+    <p:spTree>
+      <p:nvGrpSpPr>
+        <p:cNvPr id="1" name="">
+          <a:extLst>
+            <a:ext uri="{FF2B5EF4-FFF2-40B4-BE49-F238E27FC236}">
+              <a16:creationId xmlns:a16="http://schemas.microsoft.com/office/drawing/2014/main" id="{37DEA6DC-7AD1-A11C-7700-7106DCD13B3C}"/>
+            </a:ext>
+          </a:extLst>
+        </p:cNvPr>
+        <p:cNvGrpSpPr/>
+        <p:nvPr/>
+      </p:nvGrpSpPr>
+      <p:grpSpPr>
+        <a:xfrm>
+          <a:off x="0" y="0"/>
+          <a:ext cx="0" cy="0"/>
+          <a:chOff x="0" y="0"/>
+          <a:chExt cx="0" cy="0"/>
+        </a:xfrm>
+      </p:grpSpPr>
+      <p:sp>
+        <p:nvSpPr>
+          <p:cNvPr id="4" name="슬라이드 번호 개체 틀 3">
+            <a:extLst>
+              <a:ext uri="{FF2B5EF4-FFF2-40B4-BE49-F238E27FC236}">
+                <a16:creationId xmlns:a16="http://schemas.microsoft.com/office/drawing/2014/main" id="{EE1FD36A-3A9F-1F2D-FC71-809C6A133955}"/>
+              </a:ext>
+            </a:extLst>
+          </p:cNvPr>
+          <p:cNvSpPr>
+            <a:spLocks noGrp="1"/>
+          </p:cNvSpPr>
+          <p:nvPr>
+            <p:ph type="sldNum" sz="quarter" idx="12"/>
+          </p:nvPr>
+        </p:nvSpPr>
+        <p:spPr>
+          <a:xfrm>
+            <a:off x="10514011" y="6036261"/>
+            <a:ext cx="753545" cy="365125"/>
+          </a:xfrm>
+        </p:spPr>
+        <p:txBody>
+          <a:bodyPr/>
+          <a:lstStyle/>
+          <a:p>
+            <a:fld id="{D57F1E4F-1CFF-5643-939E-217C01CDF565}" type="slidenum">
+              <a:rPr lang="en-US" smtClean="0"/>
+              <a:pPr/>
+              <a:t>21</a:t>
+            </a:fld>
+            <a:endParaRPr lang="en-US" dirty="0"/>
+          </a:p>
+        </p:txBody>
+      </p:sp>
+      <p:sp>
+        <p:nvSpPr>
+          <p:cNvPr id="3" name="제목 1">
+            <a:extLst>
+              <a:ext uri="{FF2B5EF4-FFF2-40B4-BE49-F238E27FC236}">
+                <a16:creationId xmlns:a16="http://schemas.microsoft.com/office/drawing/2014/main" id="{FB3301EA-E0D6-FABD-9A4A-C14F3FA402A3}"/>
+              </a:ext>
+            </a:extLst>
+          </p:cNvPr>
+          <p:cNvSpPr txBox="1">
+            <a:spLocks/>
+          </p:cNvSpPr>
+          <p:nvPr/>
+        </p:nvSpPr>
+        <p:spPr>
+          <a:xfrm>
+            <a:off x="475645" y="481983"/>
+            <a:ext cx="10353762" cy="766439"/>
+          </a:xfrm>
+          <a:prstGeom prst="rect">
+            <a:avLst/>
+          </a:prstGeom>
+        </p:spPr>
+        <p:txBody>
+          <a:bodyPr vert="horz" lIns="91440" tIns="45720" rIns="91440" bIns="45720" rtlCol="0" anchor="ctr">
+            <a:normAutofit/>
+          </a:bodyPr>
+          <a:lstStyle>
+            <a:lvl1pPr algn="ctr" defTabSz="914400" rtl="0" eaLnBrk="1" latinLnBrk="1" hangingPunct="1">
+              <a:lnSpc>
+                <a:spcPct val="90000"/>
+              </a:lnSpc>
+              <a:spcBef>
+                <a:spcPct val="0"/>
+              </a:spcBef>
+              <a:buNone/>
+              <a:defRPr sz="3200" kern="1200" cap="all" baseline="0">
+                <a:solidFill>
+                  <a:schemeClr val="tx1"/>
+                </a:solidFill>
+                <a:effectLst/>
+                <a:latin typeface="Batang" panose="02030600000101010101" pitchFamily="18" charset="-127"/>
+                <a:ea typeface="Batang" panose="02030600000101010101" pitchFamily="18" charset="-127"/>
+                <a:cs typeface="+mj-cs"/>
+              </a:defRPr>
+            </a:lvl1pPr>
+          </a:lstStyle>
+          <a:p>
+            <a:pPr algn="l"/>
+            <a:r>
+              <a:rPr lang="en-US" altLang="ko-KR" sz="2800" cap="none" dirty="0">
+                <a:solidFill>
+                  <a:schemeClr val="bg2">
+                    <a:lumMod val="25000"/>
+                  </a:schemeClr>
+                </a:solidFill>
+                <a:latin typeface="D2Coding" panose="020B0609020101020101" pitchFamily="49" charset="-127"/>
+                <a:ea typeface="D2Coding" panose="020B0609020101020101" pitchFamily="49" charset="-127"/>
+                <a:cs typeface="Segoe UI Light" panose="020B0502040204020203" pitchFamily="34" charset="0"/>
+              </a:rPr>
+              <a:t>n8n</a:t>
+            </a:r>
+            <a:r>
+              <a:rPr lang="ko-KR" altLang="en-US" sz="2800" cap="none" dirty="0">
+                <a:solidFill>
+                  <a:schemeClr val="bg2">
+                    <a:lumMod val="25000"/>
+                  </a:schemeClr>
+                </a:solidFill>
+                <a:latin typeface="D2Coding" panose="020B0609020101020101" pitchFamily="49" charset="-127"/>
+                <a:ea typeface="D2Coding" panose="020B0609020101020101" pitchFamily="49" charset="-127"/>
+                <a:cs typeface="Segoe UI Light" panose="020B0502040204020203" pitchFamily="34" charset="0"/>
+              </a:rPr>
+              <a:t> </a:t>
+            </a:r>
+            <a:r>
+              <a:rPr lang="en-US" altLang="ko-KR" sz="2800" cap="none" dirty="0">
+                <a:solidFill>
+                  <a:schemeClr val="bg2">
+                    <a:lumMod val="25000"/>
+                  </a:schemeClr>
+                </a:solidFill>
+                <a:latin typeface="D2Coding" panose="020B0609020101020101" pitchFamily="49" charset="-127"/>
+                <a:ea typeface="D2Coding" panose="020B0609020101020101" pitchFamily="49" charset="-127"/>
+                <a:cs typeface="Segoe UI Light" panose="020B0502040204020203" pitchFamily="34" charset="0"/>
+              </a:rPr>
+              <a:t>Homework</a:t>
+            </a:r>
+            <a:r>
+              <a:rPr lang="ko-KR" altLang="en-US" sz="2800" cap="none" dirty="0">
+                <a:solidFill>
+                  <a:schemeClr val="bg2">
+                    <a:lumMod val="25000"/>
+                  </a:schemeClr>
+                </a:solidFill>
+                <a:latin typeface="D2Coding" panose="020B0609020101020101" pitchFamily="49" charset="-127"/>
+                <a:ea typeface="D2Coding" panose="020B0609020101020101" pitchFamily="49" charset="-127"/>
+                <a:cs typeface="Segoe UI Light" panose="020B0502040204020203" pitchFamily="34" charset="0"/>
+              </a:rPr>
+              <a:t> </a:t>
+            </a:r>
+          </a:p>
+        </p:txBody>
+      </p:sp>
+      <p:sp>
+        <p:nvSpPr>
+          <p:cNvPr id="8" name="TextBox 7">
+            <a:extLst>
+              <a:ext uri="{FF2B5EF4-FFF2-40B4-BE49-F238E27FC236}">
+                <a16:creationId xmlns:a16="http://schemas.microsoft.com/office/drawing/2014/main" id="{3A2F66EF-8EF4-7B39-893B-8B6410415820}"/>
+              </a:ext>
+            </a:extLst>
+          </p:cNvPr>
+          <p:cNvSpPr txBox="1"/>
+          <p:nvPr/>
+        </p:nvSpPr>
+        <p:spPr>
+          <a:xfrm>
+            <a:off x="744020" y="3244334"/>
+            <a:ext cx="184731" cy="369332"/>
+          </a:xfrm>
+          <a:prstGeom prst="rect">
+            <a:avLst/>
+          </a:prstGeom>
+          <a:noFill/>
+        </p:spPr>
+        <p:txBody>
+          <a:bodyPr wrap="none" rtlCol="0">
+            <a:spAutoFit/>
+          </a:bodyPr>
+          <a:lstStyle/>
+          <a:p>
+            <a:endParaRPr lang="ko-KR" altLang="en-US" dirty="0">
+              <a:solidFill>
+                <a:schemeClr val="accent5"/>
+              </a:solidFill>
+              <a:latin typeface="D2Coding" panose="020B0609020101020101" pitchFamily="49" charset="-127"/>
+              <a:ea typeface="D2Coding" panose="020B0609020101020101" pitchFamily="49" charset="-127"/>
+            </a:endParaRPr>
+          </a:p>
+        </p:txBody>
+      </p:sp>
+      <p:pic>
+        <p:nvPicPr>
+          <p:cNvPr id="5" name="그림 4">
+            <a:extLst>
+              <a:ext uri="{FF2B5EF4-FFF2-40B4-BE49-F238E27FC236}">
+                <a16:creationId xmlns:a16="http://schemas.microsoft.com/office/drawing/2014/main" id="{C400C220-995E-801F-9295-A720521466C2}"/>
+              </a:ext>
+            </a:extLst>
+          </p:cNvPr>
+          <p:cNvPicPr>
+            <a:picLocks noChangeAspect="1"/>
+          </p:cNvPicPr>
+          <p:nvPr/>
+        </p:nvPicPr>
+        <p:blipFill>
+          <a:blip r:embed="rId2"/>
+          <a:stretch>
+            <a:fillRect/>
+          </a:stretch>
+        </p:blipFill>
+        <p:spPr>
+          <a:xfrm>
+            <a:off x="647095" y="2516363"/>
+            <a:ext cx="7318240" cy="3646311"/>
+          </a:xfrm>
+          <a:prstGeom prst="rect">
+            <a:avLst/>
+          </a:prstGeom>
+        </p:spPr>
+      </p:pic>
+      <p:sp>
+        <p:nvSpPr>
+          <p:cNvPr id="7" name="TextBox 6">
+            <a:extLst>
+              <a:ext uri="{FF2B5EF4-FFF2-40B4-BE49-F238E27FC236}">
+                <a16:creationId xmlns:a16="http://schemas.microsoft.com/office/drawing/2014/main" id="{E3CAC736-EE8B-1E71-9E07-5E7D5B0EEC4B}"/>
+              </a:ext>
+            </a:extLst>
+          </p:cNvPr>
+          <p:cNvSpPr txBox="1"/>
+          <p:nvPr/>
+        </p:nvSpPr>
+        <p:spPr>
+          <a:xfrm>
+            <a:off x="542320" y="1248422"/>
+            <a:ext cx="10916255" cy="793166"/>
+          </a:xfrm>
+          <a:prstGeom prst="rect">
+            <a:avLst/>
+          </a:prstGeom>
+          <a:noFill/>
+        </p:spPr>
+        <p:txBody>
+          <a:bodyPr wrap="square" rtlCol="0">
+            <a:spAutoFit/>
+          </a:bodyPr>
+          <a:lstStyle/>
+          <a:p>
+            <a:pPr>
+              <a:lnSpc>
+                <a:spcPct val="150000"/>
+              </a:lnSpc>
+            </a:pPr>
+            <a:r>
+              <a:rPr lang="ko-KR" altLang="en-US" sz="1600" dirty="0">
+                <a:latin typeface="D2Coding" panose="020B0609020101020101" pitchFamily="49" charset="-127"/>
+                <a:ea typeface="D2Coding" panose="020B0609020101020101" pitchFamily="49" charset="-127"/>
+              </a:rPr>
+              <a:t>학생 </a:t>
+            </a:r>
+            <a:r>
+              <a:rPr lang="en-US" altLang="ko-KR" sz="1600" dirty="0">
+                <a:latin typeface="D2Coding" panose="020B0609020101020101" pitchFamily="49" charset="-127"/>
+                <a:ea typeface="D2Coding" panose="020B0609020101020101" pitchFamily="49" charset="-127"/>
+              </a:rPr>
+              <a:t>:</a:t>
+            </a:r>
+            <a:r>
+              <a:rPr lang="ko-KR" altLang="en-US" sz="1600" dirty="0">
+                <a:latin typeface="D2Coding" panose="020B0609020101020101" pitchFamily="49" charset="-127"/>
+                <a:ea typeface="D2Coding" panose="020B0609020101020101" pitchFamily="49" charset="-127"/>
+              </a:rPr>
+              <a:t> 과제를 </a:t>
+            </a:r>
+            <a:r>
+              <a:rPr lang="ko-KR" altLang="en-US" sz="1600" dirty="0" err="1">
+                <a:latin typeface="D2Coding" panose="020B0609020101020101" pitchFamily="49" charset="-127"/>
+                <a:ea typeface="D2Coding" panose="020B0609020101020101" pitchFamily="49" charset="-127"/>
+              </a:rPr>
+              <a:t>깃허브의</a:t>
+            </a:r>
+            <a:r>
+              <a:rPr lang="ko-KR" altLang="en-US" sz="1600" dirty="0">
+                <a:latin typeface="D2Coding" panose="020B0609020101020101" pitchFamily="49" charset="-127"/>
+                <a:ea typeface="D2Coding" panose="020B0609020101020101" pitchFamily="49" charset="-127"/>
+              </a:rPr>
+              <a:t> </a:t>
+            </a:r>
+            <a:r>
+              <a:rPr lang="ko-KR" altLang="en-US" sz="1600" dirty="0" err="1">
+                <a:latin typeface="D2Coding" panose="020B0609020101020101" pitchFamily="49" charset="-127"/>
+                <a:ea typeface="D2Coding" panose="020B0609020101020101" pitchFamily="49" charset="-127"/>
+              </a:rPr>
+              <a:t>파이썬코드로</a:t>
+            </a:r>
+            <a:r>
+              <a:rPr lang="en-US" altLang="ko-KR" sz="1600" dirty="0">
+                <a:latin typeface="D2Coding" panose="020B0609020101020101" pitchFamily="49" charset="-127"/>
+                <a:ea typeface="D2Coding" panose="020B0609020101020101" pitchFamily="49" charset="-127"/>
+              </a:rPr>
+              <a:t> upload</a:t>
+            </a:r>
+            <a:r>
+              <a:rPr lang="ko-KR" altLang="en-US" sz="1600" dirty="0">
+                <a:latin typeface="D2Coding" panose="020B0609020101020101" pitchFamily="49" charset="-127"/>
+                <a:ea typeface="D2Coding" panose="020B0609020101020101" pitchFamily="49" charset="-127"/>
+              </a:rPr>
+              <a:t>하면 구글시트에 이름</a:t>
+            </a:r>
+            <a:r>
+              <a:rPr lang="en-US" altLang="ko-KR" sz="1600" dirty="0">
+                <a:latin typeface="D2Coding" panose="020B0609020101020101" pitchFamily="49" charset="-127"/>
+                <a:ea typeface="D2Coding" panose="020B0609020101020101" pitchFamily="49" charset="-127"/>
+              </a:rPr>
+              <a:t>(name)</a:t>
+            </a:r>
+            <a:r>
+              <a:rPr lang="ko-KR" altLang="en-US" sz="1600" dirty="0">
+                <a:latin typeface="D2Coding" panose="020B0609020101020101" pitchFamily="49" charset="-127"/>
+                <a:ea typeface="D2Coding" panose="020B0609020101020101" pitchFamily="49" charset="-127"/>
+              </a:rPr>
+              <a:t>과 </a:t>
+            </a:r>
+            <a:r>
+              <a:rPr lang="en-US" altLang="ko-KR" sz="1600" dirty="0" err="1">
+                <a:latin typeface="D2Coding" panose="020B0609020101020101" pitchFamily="49" charset="-127"/>
+                <a:ea typeface="D2Coding" panose="020B0609020101020101" pitchFamily="49" charset="-127"/>
+              </a:rPr>
+              <a:t>github_url</a:t>
+            </a:r>
+            <a:r>
+              <a:rPr lang="ko-KR" altLang="en-US" sz="1600" dirty="0">
+                <a:latin typeface="D2Coding" panose="020B0609020101020101" pitchFamily="49" charset="-127"/>
+                <a:ea typeface="D2Coding" panose="020B0609020101020101" pitchFamily="49" charset="-127"/>
+              </a:rPr>
+              <a:t>을 입력</a:t>
+            </a:r>
+            <a:endParaRPr lang="en-US" altLang="ko-KR" sz="1600" dirty="0">
+              <a:latin typeface="D2Coding" panose="020B0609020101020101" pitchFamily="49" charset="-127"/>
+              <a:ea typeface="D2Coding" panose="020B0609020101020101" pitchFamily="49" charset="-127"/>
+            </a:endParaRPr>
+          </a:p>
+          <a:p>
+            <a:pPr>
+              <a:lnSpc>
+                <a:spcPct val="150000"/>
+              </a:lnSpc>
+            </a:pPr>
+            <a:r>
+              <a:rPr lang="en-US" altLang="ko-KR" sz="1600" dirty="0">
+                <a:latin typeface="D2Coding" panose="020B0609020101020101" pitchFamily="49" charset="-127"/>
+                <a:ea typeface="D2Coding" panose="020B0609020101020101" pitchFamily="49" charset="-127"/>
+              </a:rPr>
+              <a:t>n8n : </a:t>
+            </a:r>
+            <a:r>
+              <a:rPr lang="ko-KR" altLang="en-US" sz="1600" dirty="0">
+                <a:latin typeface="D2Coding" panose="020B0609020101020101" pitchFamily="49" charset="-127"/>
+                <a:ea typeface="D2Coding" panose="020B0609020101020101" pitchFamily="49" charset="-127"/>
+              </a:rPr>
+              <a:t>학생들의 코드를 몇 가지 기준에 따라 점수</a:t>
+            </a:r>
+            <a:r>
+              <a:rPr lang="en-US" altLang="ko-KR" sz="1600" dirty="0">
+                <a:latin typeface="D2Coding" panose="020B0609020101020101" pitchFamily="49" charset="-127"/>
+                <a:ea typeface="D2Coding" panose="020B0609020101020101" pitchFamily="49" charset="-127"/>
+              </a:rPr>
+              <a:t>(grade)</a:t>
+            </a:r>
+            <a:r>
+              <a:rPr lang="ko-KR" altLang="en-US" sz="1600" dirty="0">
+                <a:latin typeface="D2Coding" panose="020B0609020101020101" pitchFamily="49" charset="-127"/>
+                <a:ea typeface="D2Coding" panose="020B0609020101020101" pitchFamily="49" charset="-127"/>
+              </a:rPr>
+              <a:t>와 평가내용</a:t>
+            </a:r>
+            <a:r>
+              <a:rPr lang="en-US" altLang="ko-KR" sz="1600" dirty="0">
+                <a:latin typeface="D2Coding" panose="020B0609020101020101" pitchFamily="49" charset="-127"/>
+                <a:ea typeface="D2Coding" panose="020B0609020101020101" pitchFamily="49" charset="-127"/>
+              </a:rPr>
+              <a:t>(comments)</a:t>
+            </a:r>
+            <a:r>
+              <a:rPr lang="ko-KR" altLang="en-US" sz="1600" dirty="0">
+                <a:latin typeface="D2Coding" panose="020B0609020101020101" pitchFamily="49" charset="-127"/>
+                <a:ea typeface="D2Coding" panose="020B0609020101020101" pitchFamily="49" charset="-127"/>
+              </a:rPr>
+              <a:t>을 자동입력</a:t>
+            </a:r>
+          </a:p>
+        </p:txBody>
+      </p:sp>
+    </p:spTree>
+    <p:extLst>
+      <p:ext uri="{BB962C8B-B14F-4D97-AF65-F5344CB8AC3E}">
+        <p14:creationId xmlns:p14="http://schemas.microsoft.com/office/powerpoint/2010/main" val="2300754530"/>
+      </p:ext>
+    </p:extLst>
+  </p:cSld>
+  <p:clrMapOvr>
+    <a:masterClrMapping/>
+  </p:clrMapOvr>
+</p:sld>
+</file>
+
+<file path=ppt/slides/slide22.xml><?xml version="1.0" encoding="utf-8"?>
+<p:sld xmlns:a="http://schemas.openxmlformats.org/drawingml/2006/main" xmlns:r="http://schemas.openxmlformats.org/officeDocument/2006/relationships" xmlns:p="http://schemas.openxmlformats.org/presentationml/2006/main">
+  <p:cSld>
+    <p:spTree>
+      <p:nvGrpSpPr>
+        <p:cNvPr id="1" name="">
+          <a:extLst>
+            <a:ext uri="{FF2B5EF4-FFF2-40B4-BE49-F238E27FC236}">
+              <a16:creationId xmlns:a16="http://schemas.microsoft.com/office/drawing/2014/main" id="{D12824F6-E5EB-EF43-685C-2DDB88C3031A}"/>
+            </a:ext>
+          </a:extLst>
+        </p:cNvPr>
+        <p:cNvGrpSpPr/>
+        <p:nvPr/>
+      </p:nvGrpSpPr>
+      <p:grpSpPr>
+        <a:xfrm>
+          <a:off x="0" y="0"/>
+          <a:ext cx="0" cy="0"/>
+          <a:chOff x="0" y="0"/>
+          <a:chExt cx="0" cy="0"/>
+        </a:xfrm>
+      </p:grpSpPr>
+      <p:sp>
+        <p:nvSpPr>
+          <p:cNvPr id="4" name="슬라이드 번호 개체 틀 3">
+            <a:extLst>
+              <a:ext uri="{FF2B5EF4-FFF2-40B4-BE49-F238E27FC236}">
+                <a16:creationId xmlns:a16="http://schemas.microsoft.com/office/drawing/2014/main" id="{E8EC48A8-371D-CC01-0334-1A056DD8A34D}"/>
+              </a:ext>
+            </a:extLst>
+          </p:cNvPr>
+          <p:cNvSpPr>
+            <a:spLocks noGrp="1"/>
+          </p:cNvSpPr>
+          <p:nvPr>
+            <p:ph type="sldNum" sz="quarter" idx="12"/>
+          </p:nvPr>
+        </p:nvSpPr>
+        <p:spPr>
+          <a:xfrm>
+            <a:off x="10514011" y="6036261"/>
+            <a:ext cx="753545" cy="365125"/>
+          </a:xfrm>
+        </p:spPr>
+        <p:txBody>
+          <a:bodyPr/>
+          <a:lstStyle/>
+          <a:p>
+            <a:fld id="{D57F1E4F-1CFF-5643-939E-217C01CDF565}" type="slidenum">
+              <a:rPr lang="en-US" smtClean="0"/>
+              <a:pPr/>
+              <a:t>22</a:t>
+            </a:fld>
+            <a:endParaRPr lang="en-US" dirty="0"/>
+          </a:p>
+        </p:txBody>
+      </p:sp>
+      <p:sp>
+        <p:nvSpPr>
+          <p:cNvPr id="3" name="제목 1">
+            <a:extLst>
+              <a:ext uri="{FF2B5EF4-FFF2-40B4-BE49-F238E27FC236}">
+                <a16:creationId xmlns:a16="http://schemas.microsoft.com/office/drawing/2014/main" id="{925962D8-E163-A2E1-AA4F-0380E0BF809C}"/>
+              </a:ext>
+            </a:extLst>
+          </p:cNvPr>
+          <p:cNvSpPr txBox="1">
+            <a:spLocks/>
+          </p:cNvSpPr>
+          <p:nvPr/>
+        </p:nvSpPr>
+        <p:spPr>
+          <a:xfrm>
+            <a:off x="475645" y="481983"/>
+            <a:ext cx="10353762" cy="766439"/>
+          </a:xfrm>
+          <a:prstGeom prst="rect">
+            <a:avLst/>
+          </a:prstGeom>
+        </p:spPr>
+        <p:txBody>
+          <a:bodyPr vert="horz" lIns="91440" tIns="45720" rIns="91440" bIns="45720" rtlCol="0" anchor="ctr">
+            <a:normAutofit/>
+          </a:bodyPr>
+          <a:lstStyle>
+            <a:lvl1pPr algn="ctr" defTabSz="914400" rtl="0" eaLnBrk="1" latinLnBrk="1" hangingPunct="1">
+              <a:lnSpc>
+                <a:spcPct val="90000"/>
+              </a:lnSpc>
+              <a:spcBef>
+                <a:spcPct val="0"/>
+              </a:spcBef>
+              <a:buNone/>
+              <a:defRPr sz="3200" kern="1200" cap="all" baseline="0">
+                <a:solidFill>
+                  <a:schemeClr val="tx1"/>
+                </a:solidFill>
+                <a:effectLst/>
+                <a:latin typeface="Batang" panose="02030600000101010101" pitchFamily="18" charset="-127"/>
+                <a:ea typeface="Batang" panose="02030600000101010101" pitchFamily="18" charset="-127"/>
+                <a:cs typeface="+mj-cs"/>
+              </a:defRPr>
+            </a:lvl1pPr>
+          </a:lstStyle>
+          <a:p>
+            <a:pPr algn="l"/>
+            <a:r>
+              <a:rPr lang="en-US" altLang="ko-KR" sz="2800" cap="none" dirty="0">
+                <a:solidFill>
+                  <a:schemeClr val="bg2">
+                    <a:lumMod val="25000"/>
+                  </a:schemeClr>
+                </a:solidFill>
+                <a:latin typeface="D2Coding" panose="020B0609020101020101" pitchFamily="49" charset="-127"/>
+                <a:ea typeface="D2Coding" panose="020B0609020101020101" pitchFamily="49" charset="-127"/>
+                <a:cs typeface="Segoe UI Light" panose="020B0502040204020203" pitchFamily="34" charset="0"/>
+              </a:rPr>
+              <a:t>n8n</a:t>
+            </a:r>
+            <a:r>
+              <a:rPr lang="ko-KR" altLang="en-US" sz="2800" cap="none" dirty="0">
+                <a:solidFill>
+                  <a:schemeClr val="bg2">
+                    <a:lumMod val="25000"/>
+                  </a:schemeClr>
+                </a:solidFill>
+                <a:latin typeface="D2Coding" panose="020B0609020101020101" pitchFamily="49" charset="-127"/>
+                <a:ea typeface="D2Coding" panose="020B0609020101020101" pitchFamily="49" charset="-127"/>
+                <a:cs typeface="Segoe UI Light" panose="020B0502040204020203" pitchFamily="34" charset="0"/>
+              </a:rPr>
+              <a:t> </a:t>
+            </a:r>
+            <a:r>
+              <a:rPr lang="en-US" altLang="ko-KR" sz="2800" cap="none" dirty="0">
+                <a:solidFill>
+                  <a:schemeClr val="bg2">
+                    <a:lumMod val="25000"/>
+                  </a:schemeClr>
+                </a:solidFill>
+                <a:latin typeface="D2Coding" panose="020B0609020101020101" pitchFamily="49" charset="-127"/>
+                <a:ea typeface="D2Coding" panose="020B0609020101020101" pitchFamily="49" charset="-127"/>
+                <a:cs typeface="Segoe UI Light" panose="020B0502040204020203" pitchFamily="34" charset="0"/>
+              </a:rPr>
+              <a:t>Homework</a:t>
+            </a:r>
+            <a:r>
+              <a:rPr lang="ko-KR" altLang="en-US" sz="2800" cap="none" dirty="0">
+                <a:solidFill>
+                  <a:schemeClr val="bg2">
+                    <a:lumMod val="25000"/>
+                  </a:schemeClr>
+                </a:solidFill>
+                <a:latin typeface="D2Coding" panose="020B0609020101020101" pitchFamily="49" charset="-127"/>
+                <a:ea typeface="D2Coding" panose="020B0609020101020101" pitchFamily="49" charset="-127"/>
+                <a:cs typeface="Segoe UI Light" panose="020B0502040204020203" pitchFamily="34" charset="0"/>
+              </a:rPr>
+              <a:t> </a:t>
+            </a:r>
+          </a:p>
+        </p:txBody>
+      </p:sp>
+      <p:sp>
+        <p:nvSpPr>
+          <p:cNvPr id="8" name="TextBox 7">
+            <a:extLst>
+              <a:ext uri="{FF2B5EF4-FFF2-40B4-BE49-F238E27FC236}">
+                <a16:creationId xmlns:a16="http://schemas.microsoft.com/office/drawing/2014/main" id="{4349BDF9-74B9-B0E3-5E88-CCFABA2E20B5}"/>
+              </a:ext>
+            </a:extLst>
+          </p:cNvPr>
+          <p:cNvSpPr txBox="1"/>
+          <p:nvPr/>
+        </p:nvSpPr>
+        <p:spPr>
+          <a:xfrm>
+            <a:off x="744020" y="3244334"/>
+            <a:ext cx="184731" cy="369332"/>
+          </a:xfrm>
+          <a:prstGeom prst="rect">
+            <a:avLst/>
+          </a:prstGeom>
+          <a:noFill/>
+        </p:spPr>
+        <p:txBody>
+          <a:bodyPr wrap="none" rtlCol="0">
+            <a:spAutoFit/>
+          </a:bodyPr>
+          <a:lstStyle/>
+          <a:p>
+            <a:endParaRPr lang="ko-KR" altLang="en-US" dirty="0">
+              <a:solidFill>
+                <a:schemeClr val="accent5"/>
+              </a:solidFill>
+              <a:latin typeface="D2Coding" panose="020B0609020101020101" pitchFamily="49" charset="-127"/>
+              <a:ea typeface="D2Coding" panose="020B0609020101020101" pitchFamily="49" charset="-127"/>
+            </a:endParaRPr>
+          </a:p>
+        </p:txBody>
+      </p:sp>
+      <p:pic>
+        <p:nvPicPr>
+          <p:cNvPr id="2" name="그림 1">
+            <a:extLst>
+              <a:ext uri="{FF2B5EF4-FFF2-40B4-BE49-F238E27FC236}">
+                <a16:creationId xmlns:a16="http://schemas.microsoft.com/office/drawing/2014/main" id="{88B5EEFA-6922-97B2-24CE-991B6A744A12}"/>
+              </a:ext>
+            </a:extLst>
+          </p:cNvPr>
+          <p:cNvPicPr>
+            <a:picLocks noChangeAspect="1"/>
+          </p:cNvPicPr>
+          <p:nvPr/>
+        </p:nvPicPr>
+        <p:blipFill>
+          <a:blip r:embed="rId2"/>
+          <a:stretch>
+            <a:fillRect/>
+          </a:stretch>
+        </p:blipFill>
+        <p:spPr>
+          <a:xfrm>
+            <a:off x="671480" y="2044210"/>
+            <a:ext cx="10849040" cy="3317945"/>
+          </a:xfrm>
+          <a:prstGeom prst="rect">
+            <a:avLst/>
+          </a:prstGeom>
+        </p:spPr>
+      </p:pic>
+    </p:spTree>
+    <p:extLst>
+      <p:ext uri="{BB962C8B-B14F-4D97-AF65-F5344CB8AC3E}">
+        <p14:creationId xmlns:p14="http://schemas.microsoft.com/office/powerpoint/2010/main" val="377774142"/>
+      </p:ext>
+    </p:extLst>
+  </p:cSld>
+  <p:clrMapOvr>
+    <a:masterClrMapping/>
+  </p:clrMapOvr>
+</p:sld>
+</file>
+
+<file path=ppt/slides/slide23.xml><?xml version="1.0" encoding="utf-8"?>
+<p:sld xmlns:a="http://schemas.openxmlformats.org/drawingml/2006/main" xmlns:r="http://schemas.openxmlformats.org/officeDocument/2006/relationships" xmlns:p="http://schemas.openxmlformats.org/presentationml/2006/main">
+  <p:cSld>
+    <p:spTree>
+      <p:nvGrpSpPr>
+        <p:cNvPr id="1" name="">
+          <a:extLst>
+            <a:ext uri="{FF2B5EF4-FFF2-40B4-BE49-F238E27FC236}">
+              <a16:creationId xmlns:a16="http://schemas.microsoft.com/office/drawing/2014/main" id="{89BF34D7-3C96-6A8C-1F23-24373A19EBF2}"/>
+            </a:ext>
+          </a:extLst>
+        </p:cNvPr>
+        <p:cNvGrpSpPr/>
+        <p:nvPr/>
+      </p:nvGrpSpPr>
+      <p:grpSpPr>
+        <a:xfrm>
+          <a:off x="0" y="0"/>
+          <a:ext cx="0" cy="0"/>
+          <a:chOff x="0" y="0"/>
+          <a:chExt cx="0" cy="0"/>
+        </a:xfrm>
+      </p:grpSpPr>
+      <p:sp>
+        <p:nvSpPr>
+          <p:cNvPr id="4" name="슬라이드 번호 개체 틀 3">
+            <a:extLst>
+              <a:ext uri="{FF2B5EF4-FFF2-40B4-BE49-F238E27FC236}">
+                <a16:creationId xmlns:a16="http://schemas.microsoft.com/office/drawing/2014/main" id="{F7CFF113-047A-7626-5701-FFB708606523}"/>
+              </a:ext>
+            </a:extLst>
+          </p:cNvPr>
+          <p:cNvSpPr>
+            <a:spLocks noGrp="1"/>
+          </p:cNvSpPr>
+          <p:nvPr>
+            <p:ph type="sldNum" sz="quarter" idx="12"/>
+          </p:nvPr>
+        </p:nvSpPr>
+        <p:spPr>
+          <a:xfrm>
+            <a:off x="10514011" y="6036261"/>
+            <a:ext cx="753545" cy="365125"/>
+          </a:xfrm>
+        </p:spPr>
+        <p:txBody>
+          <a:bodyPr/>
+          <a:lstStyle/>
+          <a:p>
+            <a:fld id="{D57F1E4F-1CFF-5643-939E-217C01CDF565}" type="slidenum">
+              <a:rPr lang="en-US" smtClean="0"/>
+              <a:pPr/>
+              <a:t>23</a:t>
+            </a:fld>
+            <a:endParaRPr lang="en-US" dirty="0"/>
+          </a:p>
+        </p:txBody>
+      </p:sp>
+      <p:sp>
+        <p:nvSpPr>
+          <p:cNvPr id="3" name="제목 1">
+            <a:extLst>
+              <a:ext uri="{FF2B5EF4-FFF2-40B4-BE49-F238E27FC236}">
+                <a16:creationId xmlns:a16="http://schemas.microsoft.com/office/drawing/2014/main" id="{5EAD5ABA-B1EE-AE18-52A7-D72CEB07C16C}"/>
+              </a:ext>
+            </a:extLst>
+          </p:cNvPr>
+          <p:cNvSpPr txBox="1">
+            <a:spLocks/>
+          </p:cNvSpPr>
+          <p:nvPr/>
+        </p:nvSpPr>
+        <p:spPr>
+          <a:xfrm>
+            <a:off x="475645" y="481983"/>
+            <a:ext cx="10353762" cy="766439"/>
+          </a:xfrm>
+          <a:prstGeom prst="rect">
+            <a:avLst/>
+          </a:prstGeom>
+        </p:spPr>
+        <p:txBody>
+          <a:bodyPr vert="horz" lIns="91440" tIns="45720" rIns="91440" bIns="45720" rtlCol="0" anchor="ctr">
+            <a:normAutofit/>
+          </a:bodyPr>
+          <a:lstStyle>
+            <a:lvl1pPr algn="ctr" defTabSz="914400" rtl="0" eaLnBrk="1" latinLnBrk="1" hangingPunct="1">
+              <a:lnSpc>
+                <a:spcPct val="90000"/>
+              </a:lnSpc>
+              <a:spcBef>
+                <a:spcPct val="0"/>
+              </a:spcBef>
+              <a:buNone/>
+              <a:defRPr sz="3200" kern="1200" cap="all" baseline="0">
+                <a:solidFill>
+                  <a:schemeClr val="tx1"/>
+                </a:solidFill>
+                <a:effectLst/>
+                <a:latin typeface="Batang" panose="02030600000101010101" pitchFamily="18" charset="-127"/>
+                <a:ea typeface="Batang" panose="02030600000101010101" pitchFamily="18" charset="-127"/>
+                <a:cs typeface="+mj-cs"/>
+              </a:defRPr>
+            </a:lvl1pPr>
+          </a:lstStyle>
+          <a:p>
+            <a:pPr algn="l"/>
+            <a:r>
+              <a:rPr lang="en-US" altLang="ko-KR" sz="2800" cap="none" dirty="0">
+                <a:solidFill>
+                  <a:schemeClr val="bg2">
+                    <a:lumMod val="25000"/>
+                  </a:schemeClr>
+                </a:solidFill>
+                <a:latin typeface="D2Coding" panose="020B0609020101020101" pitchFamily="49" charset="-127"/>
+                <a:ea typeface="D2Coding" panose="020B0609020101020101" pitchFamily="49" charset="-127"/>
+                <a:cs typeface="Segoe UI Light" panose="020B0502040204020203" pitchFamily="34" charset="0"/>
+              </a:rPr>
+              <a:t>n8n dances with LLM</a:t>
+            </a:r>
+            <a:endParaRPr lang="ko-KR" altLang="en-US" sz="2800" cap="none" dirty="0">
+              <a:solidFill>
+                <a:schemeClr val="bg2">
+                  <a:lumMod val="25000"/>
+                </a:schemeClr>
+              </a:solidFill>
+              <a:latin typeface="D2Coding" panose="020B0609020101020101" pitchFamily="49" charset="-127"/>
+              <a:ea typeface="D2Coding" panose="020B0609020101020101" pitchFamily="49" charset="-127"/>
+              <a:cs typeface="Segoe UI Light" panose="020B0502040204020203" pitchFamily="34" charset="0"/>
+            </a:endParaRPr>
+          </a:p>
+        </p:txBody>
+      </p:sp>
+      <p:sp>
+        <p:nvSpPr>
+          <p:cNvPr id="9" name="TextBox 8">
+            <a:extLst>
+              <a:ext uri="{FF2B5EF4-FFF2-40B4-BE49-F238E27FC236}">
+                <a16:creationId xmlns:a16="http://schemas.microsoft.com/office/drawing/2014/main" id="{261EFB21-72BA-1B62-A292-BC6F2B1B35ED}"/>
+              </a:ext>
+            </a:extLst>
+          </p:cNvPr>
+          <p:cNvSpPr txBox="1"/>
+          <p:nvPr/>
+        </p:nvSpPr>
+        <p:spPr>
+          <a:xfrm>
+            <a:off x="582095" y="2684810"/>
+            <a:ext cx="11066980" cy="3345981"/>
+          </a:xfrm>
+          <a:prstGeom prst="rect">
+            <a:avLst/>
+          </a:prstGeom>
+          <a:noFill/>
+        </p:spPr>
+        <p:txBody>
+          <a:bodyPr wrap="square">
+            <a:spAutoFit/>
+          </a:bodyPr>
+          <a:lstStyle/>
+          <a:p>
+            <a:pPr marL="285750" indent="-285750">
+              <a:lnSpc>
+                <a:spcPct val="200000"/>
+              </a:lnSpc>
+              <a:buFont typeface="Wingdings" panose="05000000000000000000" pitchFamily="2" charset="2"/>
+              <a:buChar char="v"/>
+            </a:pPr>
+            <a:r>
+              <a:rPr lang="en-US" altLang="ko-KR" sz="1600" dirty="0">
+                <a:latin typeface="D2Coding" panose="020B0609020101020101" pitchFamily="49" charset="-127"/>
+                <a:ea typeface="D2Coding" panose="020B0609020101020101" pitchFamily="49" charset="-127"/>
+              </a:rPr>
+              <a:t>LLM(Gemini, </a:t>
+            </a:r>
+            <a:r>
+              <a:rPr lang="en-US" altLang="ko-KR" sz="1600" dirty="0" err="1">
+                <a:latin typeface="D2Coding" panose="020B0609020101020101" pitchFamily="49" charset="-127"/>
+                <a:ea typeface="D2Coding" panose="020B0609020101020101" pitchFamily="49" charset="-127"/>
+              </a:rPr>
+              <a:t>Chatgpt</a:t>
+            </a:r>
+            <a:r>
+              <a:rPr lang="en-US" altLang="ko-KR" sz="1600" dirty="0">
+                <a:latin typeface="D2Coding" panose="020B0609020101020101" pitchFamily="49" charset="-127"/>
+                <a:ea typeface="D2Coding" panose="020B0609020101020101" pitchFamily="49" charset="-127"/>
+              </a:rPr>
+              <a:t>, Claude </a:t>
+            </a:r>
+            <a:r>
+              <a:rPr lang="ko-KR" altLang="en-US" sz="1600" dirty="0">
+                <a:latin typeface="D2Coding" panose="020B0609020101020101" pitchFamily="49" charset="-127"/>
+                <a:ea typeface="D2Coding" panose="020B0609020101020101" pitchFamily="49" charset="-127"/>
+              </a:rPr>
+              <a:t>등</a:t>
+            </a:r>
+            <a:r>
+              <a:rPr lang="en-US" altLang="ko-KR" sz="1600" dirty="0">
+                <a:latin typeface="D2Coding" panose="020B0609020101020101" pitchFamily="49" charset="-127"/>
+                <a:ea typeface="D2Coding" panose="020B0609020101020101" pitchFamily="49" charset="-127"/>
+              </a:rPr>
+              <a:t>)</a:t>
+            </a:r>
+            <a:r>
+              <a:rPr lang="ko-KR" altLang="en-US" sz="1600" dirty="0">
+                <a:latin typeface="D2Coding" panose="020B0609020101020101" pitchFamily="49" charset="-127"/>
+                <a:ea typeface="D2Coding" panose="020B0609020101020101" pitchFamily="49" charset="-127"/>
+              </a:rPr>
+              <a:t>에게 원하는 </a:t>
+            </a:r>
+            <a:r>
+              <a:rPr lang="en-US" altLang="ko-KR" sz="1600" dirty="0">
+                <a:latin typeface="D2Coding" panose="020B0609020101020101" pitchFamily="49" charset="-127"/>
+                <a:ea typeface="D2Coding" panose="020B0609020101020101" pitchFamily="49" charset="-127"/>
+              </a:rPr>
+              <a:t>workflow</a:t>
+            </a:r>
+            <a:r>
+              <a:rPr lang="ko-KR" altLang="en-US" sz="1600" dirty="0">
+                <a:latin typeface="D2Coding" panose="020B0609020101020101" pitchFamily="49" charset="-127"/>
+                <a:ea typeface="D2Coding" panose="020B0609020101020101" pitchFamily="49" charset="-127"/>
+              </a:rPr>
+              <a:t>를 정의하여 </a:t>
+            </a:r>
+            <a:r>
+              <a:rPr lang="en-US" altLang="ko-KR" sz="1600" dirty="0">
+                <a:latin typeface="D2Coding" panose="020B0609020101020101" pitchFamily="49" charset="-127"/>
+                <a:ea typeface="D2Coding" panose="020B0609020101020101" pitchFamily="49" charset="-127"/>
+              </a:rPr>
+              <a:t>n8n </a:t>
+            </a:r>
+            <a:r>
+              <a:rPr lang="ko-KR" altLang="en-US" sz="1600" dirty="0">
+                <a:latin typeface="D2Coding" panose="020B0609020101020101" pitchFamily="49" charset="-127"/>
+                <a:ea typeface="D2Coding" panose="020B0609020101020101" pitchFamily="49" charset="-127"/>
+              </a:rPr>
+              <a:t>코드로 생성하라고 한 후 복사</a:t>
+            </a:r>
+            <a:r>
+              <a:rPr lang="en-US" altLang="ko-KR" sz="1600" dirty="0">
+                <a:latin typeface="D2Coding" panose="020B0609020101020101" pitchFamily="49" charset="-127"/>
+                <a:ea typeface="D2Coding" panose="020B0609020101020101" pitchFamily="49" charset="-127"/>
+              </a:rPr>
+              <a:t>-</a:t>
+            </a:r>
+            <a:r>
+              <a:rPr lang="ko-KR" altLang="en-US" sz="1600" dirty="0">
+                <a:latin typeface="D2Coding" panose="020B0609020101020101" pitchFamily="49" charset="-127"/>
+                <a:ea typeface="D2Coding" panose="020B0609020101020101" pitchFamily="49" charset="-127"/>
+              </a:rPr>
+              <a:t>붙이기</a:t>
+            </a:r>
+            <a:endParaRPr lang="en-US" altLang="ko-KR" sz="1600" dirty="0">
+              <a:latin typeface="D2Coding" panose="020B0609020101020101" pitchFamily="49" charset="-127"/>
+              <a:ea typeface="D2Coding" panose="020B0609020101020101" pitchFamily="49" charset="-127"/>
+            </a:endParaRPr>
+          </a:p>
+          <a:p>
+            <a:pPr marL="285750" indent="-285750">
+              <a:lnSpc>
+                <a:spcPct val="200000"/>
+              </a:lnSpc>
+              <a:buFont typeface="Wingdings" panose="05000000000000000000" pitchFamily="2" charset="2"/>
+              <a:buChar char="v"/>
+            </a:pPr>
+            <a:r>
+              <a:rPr lang="ko-KR" altLang="en-US" sz="1600" dirty="0">
+                <a:latin typeface="D2Coding" panose="020B0609020101020101" pitchFamily="49" charset="-127"/>
+                <a:ea typeface="D2Coding" panose="020B0609020101020101" pitchFamily="49" charset="-127"/>
+              </a:rPr>
+              <a:t>유튜브</a:t>
+            </a:r>
+            <a:r>
+              <a:rPr lang="en-US" altLang="ko-KR" sz="1600" dirty="0">
+                <a:latin typeface="D2Coding" panose="020B0609020101020101" pitchFamily="49" charset="-127"/>
+                <a:ea typeface="D2Coding" panose="020B0609020101020101" pitchFamily="49" charset="-127"/>
+              </a:rPr>
+              <a:t> </a:t>
+            </a:r>
+            <a:r>
+              <a:rPr lang="ko-KR" altLang="en-US" sz="1600" dirty="0">
+                <a:latin typeface="D2Coding" panose="020B0609020101020101" pitchFamily="49" charset="-127"/>
+                <a:ea typeface="D2Coding" panose="020B0609020101020101" pitchFamily="49" charset="-127"/>
+              </a:rPr>
+              <a:t>동영상의 </a:t>
+            </a:r>
+            <a:r>
+              <a:rPr lang="en-US" altLang="ko-KR" sz="1600" dirty="0">
+                <a:latin typeface="D2Coding" panose="020B0609020101020101" pitchFamily="49" charset="-127"/>
+                <a:ea typeface="D2Coding" panose="020B0609020101020101" pitchFamily="49" charset="-127"/>
+              </a:rPr>
+              <a:t>n8n workflow</a:t>
+            </a:r>
+            <a:r>
+              <a:rPr lang="ko-KR" altLang="en-US" sz="1600" dirty="0">
+                <a:latin typeface="D2Coding" panose="020B0609020101020101" pitchFamily="49" charset="-127"/>
+                <a:ea typeface="D2Coding" panose="020B0609020101020101" pitchFamily="49" charset="-127"/>
+              </a:rPr>
+              <a:t>를 </a:t>
+            </a:r>
+            <a:r>
+              <a:rPr lang="ko-KR" altLang="en-US" sz="1600" dirty="0" err="1">
+                <a:latin typeface="D2Coding" panose="020B0609020101020101" pitchFamily="49" charset="-127"/>
+                <a:ea typeface="D2Coding" panose="020B0609020101020101" pitchFamily="49" charset="-127"/>
+              </a:rPr>
+              <a:t>화면캡쳐하여</a:t>
+            </a:r>
+            <a:r>
+              <a:rPr lang="ko-KR" altLang="en-US" sz="1600" dirty="0">
+                <a:latin typeface="D2Coding" panose="020B0609020101020101" pitchFamily="49" charset="-127"/>
+                <a:ea typeface="D2Coding" panose="020B0609020101020101" pitchFamily="49" charset="-127"/>
+              </a:rPr>
+              <a:t> </a:t>
+            </a:r>
+            <a:r>
+              <a:rPr lang="en-US" altLang="ko-KR" sz="1600" dirty="0">
+                <a:latin typeface="D2Coding" panose="020B0609020101020101" pitchFamily="49" charset="-127"/>
+                <a:ea typeface="D2Coding" panose="020B0609020101020101" pitchFamily="49" charset="-127"/>
+              </a:rPr>
+              <a:t>LLM</a:t>
+            </a:r>
+            <a:r>
+              <a:rPr lang="ko-KR" altLang="en-US" sz="1600" dirty="0">
+                <a:latin typeface="D2Coding" panose="020B0609020101020101" pitchFamily="49" charset="-127"/>
+                <a:ea typeface="D2Coding" panose="020B0609020101020101" pitchFamily="49" charset="-127"/>
+              </a:rPr>
+              <a:t>에서 </a:t>
+            </a:r>
+            <a:r>
+              <a:rPr lang="en-US" altLang="ko-KR" sz="1600" dirty="0">
+                <a:latin typeface="D2Coding" panose="020B0609020101020101" pitchFamily="49" charset="-127"/>
+                <a:ea typeface="D2Coding" panose="020B0609020101020101" pitchFamily="49" charset="-127"/>
+              </a:rPr>
+              <a:t>n8n </a:t>
+            </a:r>
+            <a:r>
+              <a:rPr lang="ko-KR" altLang="en-US" sz="1600" dirty="0">
+                <a:latin typeface="D2Coding" panose="020B0609020101020101" pitchFamily="49" charset="-127"/>
+                <a:ea typeface="D2Coding" panose="020B0609020101020101" pitchFamily="49" charset="-127"/>
+              </a:rPr>
+              <a:t>코드 생성 요청한 후 복사</a:t>
+            </a:r>
+            <a:r>
+              <a:rPr lang="en-US" altLang="ko-KR" sz="1600" dirty="0">
+                <a:latin typeface="D2Coding" panose="020B0609020101020101" pitchFamily="49" charset="-127"/>
+                <a:ea typeface="D2Coding" panose="020B0609020101020101" pitchFamily="49" charset="-127"/>
+              </a:rPr>
+              <a:t>-</a:t>
+            </a:r>
+            <a:r>
+              <a:rPr lang="ko-KR" altLang="en-US" sz="1600" dirty="0">
+                <a:latin typeface="D2Coding" panose="020B0609020101020101" pitchFamily="49" charset="-127"/>
+                <a:ea typeface="D2Coding" panose="020B0609020101020101" pitchFamily="49" charset="-127"/>
+              </a:rPr>
+              <a:t>붙이기</a:t>
+            </a:r>
+            <a:endParaRPr lang="en-US" altLang="ko-KR" sz="1600" dirty="0">
+              <a:latin typeface="D2Coding" panose="020B0609020101020101" pitchFamily="49" charset="-127"/>
+              <a:ea typeface="D2Coding" panose="020B0609020101020101" pitchFamily="49" charset="-127"/>
+            </a:endParaRPr>
+          </a:p>
+          <a:p>
+            <a:pPr marL="285750" indent="-285750">
+              <a:lnSpc>
+                <a:spcPct val="200000"/>
+              </a:lnSpc>
+              <a:buFont typeface="Wingdings" panose="05000000000000000000" pitchFamily="2" charset="2"/>
+              <a:buChar char="v"/>
+            </a:pPr>
+            <a:r>
+              <a:rPr lang="en-US" altLang="ko-KR" sz="1600" dirty="0" err="1">
+                <a:latin typeface="D2Coding" panose="020B0609020101020101" pitchFamily="49" charset="-127"/>
+                <a:ea typeface="D2Coding" panose="020B0609020101020101" pitchFamily="49" charset="-127"/>
+              </a:rPr>
+              <a:t>claude</a:t>
+            </a:r>
+            <a:r>
+              <a:rPr lang="en-US" altLang="ko-KR" sz="1600" dirty="0">
+                <a:latin typeface="D2Coding" panose="020B0609020101020101" pitchFamily="49" charset="-127"/>
+                <a:ea typeface="D2Coding" panose="020B0609020101020101" pitchFamily="49" charset="-127"/>
+              </a:rPr>
+              <a:t> desktop </a:t>
+            </a:r>
+            <a:r>
+              <a:rPr lang="en-US" altLang="ko-KR" sz="1600" dirty="0">
+                <a:latin typeface="D2Coding" panose="020B0609020101020101" pitchFamily="49" charset="-127"/>
+                <a:ea typeface="D2Coding" panose="020B0609020101020101" pitchFamily="49" charset="-127"/>
+                <a:sym typeface="Wingdings" panose="05000000000000000000" pitchFamily="2" charset="2"/>
+              </a:rPr>
+              <a:t> context7  n8n</a:t>
+            </a:r>
+            <a:r>
+              <a:rPr lang="ko-KR" altLang="en-US" sz="1600" dirty="0">
+                <a:latin typeface="D2Coding" panose="020B0609020101020101" pitchFamily="49" charset="-127"/>
+                <a:ea typeface="D2Coding" panose="020B0609020101020101" pitchFamily="49" charset="-127"/>
+                <a:sym typeface="Wingdings" panose="05000000000000000000" pitchFamily="2" charset="2"/>
+              </a:rPr>
+              <a:t> </a:t>
+            </a:r>
+            <a:r>
+              <a:rPr lang="en-US" altLang="ko-KR" sz="1600" dirty="0">
+                <a:latin typeface="D2Coding" panose="020B0609020101020101" pitchFamily="49" charset="-127"/>
+                <a:ea typeface="D2Coding" panose="020B0609020101020101" pitchFamily="49" charset="-127"/>
+                <a:sym typeface="Wingdings" panose="05000000000000000000" pitchFamily="2" charset="2"/>
+              </a:rPr>
+              <a:t>MCP</a:t>
+            </a:r>
+            <a:r>
+              <a:rPr lang="ko-KR" altLang="en-US" sz="1600" dirty="0">
+                <a:latin typeface="D2Coding" panose="020B0609020101020101" pitchFamily="49" charset="-127"/>
+                <a:ea typeface="D2Coding" panose="020B0609020101020101" pitchFamily="49" charset="-127"/>
+                <a:sym typeface="Wingdings" panose="05000000000000000000" pitchFamily="2" charset="2"/>
+              </a:rPr>
+              <a:t> </a:t>
+            </a:r>
+            <a:r>
+              <a:rPr lang="en-US" altLang="ko-KR" sz="1600" dirty="0">
+                <a:latin typeface="D2Coding" panose="020B0609020101020101" pitchFamily="49" charset="-127"/>
+                <a:ea typeface="D2Coding" panose="020B0609020101020101" pitchFamily="49" charset="-127"/>
+                <a:sym typeface="Wingdings" panose="05000000000000000000" pitchFamily="2" charset="2"/>
+              </a:rPr>
+              <a:t>server</a:t>
+            </a:r>
+            <a:r>
+              <a:rPr lang="ko-KR" altLang="en-US" sz="1600" dirty="0">
+                <a:latin typeface="D2Coding" panose="020B0609020101020101" pitchFamily="49" charset="-127"/>
+                <a:ea typeface="D2Coding" panose="020B0609020101020101" pitchFamily="49" charset="-127"/>
+                <a:sym typeface="Wingdings" panose="05000000000000000000" pitchFamily="2" charset="2"/>
+              </a:rPr>
+              <a:t> 연결</a:t>
+            </a:r>
+            <a:endParaRPr lang="en-US" altLang="ko-KR" sz="1600" dirty="0">
+              <a:latin typeface="D2Coding" panose="020B0609020101020101" pitchFamily="49" charset="-127"/>
+              <a:ea typeface="D2Coding" panose="020B0609020101020101" pitchFamily="49" charset="-127"/>
+              <a:sym typeface="Wingdings" panose="05000000000000000000" pitchFamily="2" charset="2"/>
+            </a:endParaRPr>
+          </a:p>
+          <a:p>
+            <a:pPr marL="742950" lvl="1" indent="-285750">
+              <a:lnSpc>
+                <a:spcPct val="200000"/>
+              </a:lnSpc>
+              <a:buFont typeface="Wingdings" panose="05000000000000000000" pitchFamily="2" charset="2"/>
+              <a:buChar char="v"/>
+            </a:pPr>
+            <a:r>
+              <a:rPr lang="en-US" altLang="ko-KR" sz="1400" dirty="0">
+                <a:solidFill>
+                  <a:schemeClr val="accent5"/>
+                </a:solidFill>
+                <a:latin typeface="D2Coding" panose="020B0609020101020101" pitchFamily="49" charset="-127"/>
+                <a:ea typeface="D2Coding" panose="020B0609020101020101" pitchFamily="49" charset="-127"/>
+                <a:hlinkClick r:id="rId2"/>
+              </a:rPr>
+              <a:t>AI "</a:t>
+            </a:r>
+            <a:r>
+              <a:rPr lang="ko-KR" altLang="en-US" sz="1400" dirty="0">
+                <a:solidFill>
+                  <a:schemeClr val="accent5"/>
+                </a:solidFill>
+                <a:latin typeface="D2Coding" panose="020B0609020101020101" pitchFamily="49" charset="-127"/>
+                <a:ea typeface="D2Coding" panose="020B0609020101020101" pitchFamily="49" charset="-127"/>
+                <a:hlinkClick r:id="rId2"/>
+              </a:rPr>
+              <a:t>딸깍</a:t>
+            </a:r>
+            <a:r>
+              <a:rPr lang="en-US" altLang="ko-KR" sz="1400" dirty="0">
+                <a:solidFill>
+                  <a:schemeClr val="accent5"/>
+                </a:solidFill>
+                <a:latin typeface="D2Coding" panose="020B0609020101020101" pitchFamily="49" charset="-127"/>
+                <a:ea typeface="D2Coding" panose="020B0609020101020101" pitchFamily="49" charset="-127"/>
+                <a:hlinkClick r:id="rId2"/>
+              </a:rPr>
+              <a:t>" </a:t>
+            </a:r>
+            <a:r>
+              <a:rPr lang="ko-KR" altLang="en-US" sz="1400" dirty="0">
+                <a:solidFill>
+                  <a:schemeClr val="accent5"/>
+                </a:solidFill>
+                <a:latin typeface="D2Coding" panose="020B0609020101020101" pitchFamily="49" charset="-127"/>
+                <a:ea typeface="D2Coding" panose="020B0609020101020101" pitchFamily="49" charset="-127"/>
+                <a:hlinkClick r:id="rId2"/>
+              </a:rPr>
+              <a:t>으로 만드는 슈퍼자동화 시나리오</a:t>
+            </a:r>
+            <a:r>
+              <a:rPr lang="en-US" altLang="ko-KR" sz="1400" dirty="0">
+                <a:solidFill>
+                  <a:schemeClr val="accent5"/>
+                </a:solidFill>
+                <a:latin typeface="D2Coding" panose="020B0609020101020101" pitchFamily="49" charset="-127"/>
+                <a:ea typeface="D2Coding" panose="020B0609020101020101" pitchFamily="49" charset="-127"/>
+                <a:hlinkClick r:id="rId2"/>
+              </a:rPr>
+              <a:t>! </a:t>
+            </a:r>
+            <a:r>
+              <a:rPr lang="ko-KR" altLang="en-US" sz="1400" dirty="0" err="1">
+                <a:solidFill>
+                  <a:schemeClr val="accent5"/>
+                </a:solidFill>
+                <a:latin typeface="D2Coding" panose="020B0609020101020101" pitchFamily="49" charset="-127"/>
+                <a:ea typeface="D2Coding" panose="020B0609020101020101" pitchFamily="49" charset="-127"/>
+                <a:hlinkClick r:id="rId2"/>
+              </a:rPr>
+              <a:t>클로드</a:t>
+            </a:r>
+            <a:r>
+              <a:rPr lang="en-US" altLang="ko-KR" sz="1400" dirty="0">
+                <a:solidFill>
+                  <a:schemeClr val="accent5"/>
+                </a:solidFill>
+                <a:latin typeface="D2Coding" panose="020B0609020101020101" pitchFamily="49" charset="-127"/>
+                <a:ea typeface="D2Coding" panose="020B0609020101020101" pitchFamily="49" charset="-127"/>
+                <a:hlinkClick r:id="rId2"/>
+              </a:rPr>
+              <a:t>4+MCP </a:t>
+            </a:r>
+            <a:r>
+              <a:rPr lang="ko-KR" altLang="en-US" sz="1400" dirty="0">
+                <a:solidFill>
+                  <a:schemeClr val="accent5"/>
+                </a:solidFill>
+                <a:latin typeface="D2Coding" panose="020B0609020101020101" pitchFamily="49" charset="-127"/>
+                <a:ea typeface="D2Coding" panose="020B0609020101020101" pitchFamily="49" charset="-127"/>
+                <a:hlinkClick r:id="rId2"/>
+              </a:rPr>
+              <a:t>가 미쳤습니다</a:t>
+            </a:r>
+            <a:endParaRPr lang="en-US" altLang="ko-KR" sz="1400" dirty="0">
+              <a:solidFill>
+                <a:schemeClr val="accent5"/>
+              </a:solidFill>
+              <a:latin typeface="D2Coding" panose="020B0609020101020101" pitchFamily="49" charset="-127"/>
+              <a:ea typeface="D2Coding" panose="020B0609020101020101" pitchFamily="49" charset="-127"/>
+            </a:endParaRPr>
+          </a:p>
+          <a:p>
+            <a:pPr marL="742950" lvl="1" indent="-285750">
+              <a:lnSpc>
+                <a:spcPct val="200000"/>
+              </a:lnSpc>
+              <a:buFont typeface="Wingdings" panose="05000000000000000000" pitchFamily="2" charset="2"/>
+              <a:buChar char="v"/>
+            </a:pPr>
+            <a:r>
+              <a:rPr lang="en-US" altLang="ko-KR" sz="1400" dirty="0">
+                <a:latin typeface="D2Coding" panose="020B0609020101020101" pitchFamily="49" charset="-127"/>
+                <a:ea typeface="D2Coding" panose="020B0609020101020101" pitchFamily="49" charset="-127"/>
+                <a:sym typeface="Wingdings" panose="05000000000000000000" pitchFamily="2" charset="2"/>
+                <a:hlinkClick r:id="rId3"/>
+              </a:rPr>
+              <a:t>n8n </a:t>
+            </a:r>
+            <a:r>
+              <a:rPr lang="ko-KR" altLang="en-US" sz="1400" dirty="0">
+                <a:latin typeface="D2Coding" panose="020B0609020101020101" pitchFamily="49" charset="-127"/>
+                <a:ea typeface="D2Coding" panose="020B0609020101020101" pitchFamily="49" charset="-127"/>
+                <a:sym typeface="Wingdings" panose="05000000000000000000" pitchFamily="2" charset="2"/>
+                <a:hlinkClick r:id="rId3"/>
+              </a:rPr>
+              <a:t>노가다 끝</a:t>
+            </a:r>
+            <a:r>
+              <a:rPr lang="en-US" altLang="ko-KR" sz="1400" dirty="0">
+                <a:latin typeface="D2Coding" panose="020B0609020101020101" pitchFamily="49" charset="-127"/>
+                <a:ea typeface="D2Coding" panose="020B0609020101020101" pitchFamily="49" charset="-127"/>
+                <a:sym typeface="Wingdings" panose="05000000000000000000" pitchFamily="2" charset="2"/>
+                <a:hlinkClick r:id="rId3"/>
+              </a:rPr>
+              <a:t>: </a:t>
+            </a:r>
+            <a:r>
+              <a:rPr lang="ko-KR" altLang="en-US" sz="1400" dirty="0" err="1">
+                <a:latin typeface="D2Coding" panose="020B0609020101020101" pitchFamily="49" charset="-127"/>
+                <a:ea typeface="D2Coding" panose="020B0609020101020101" pitchFamily="49" charset="-127"/>
+                <a:sym typeface="Wingdings" panose="05000000000000000000" pitchFamily="2" charset="2"/>
+                <a:hlinkClick r:id="rId3"/>
+              </a:rPr>
+              <a:t>클로드로</a:t>
+            </a:r>
+            <a:r>
+              <a:rPr lang="ko-KR" altLang="en-US" sz="1400" dirty="0">
+                <a:latin typeface="D2Coding" panose="020B0609020101020101" pitchFamily="49" charset="-127"/>
+                <a:ea typeface="D2Coding" panose="020B0609020101020101" pitchFamily="49" charset="-127"/>
+                <a:sym typeface="Wingdings" panose="05000000000000000000" pitchFamily="2" charset="2"/>
+                <a:hlinkClick r:id="rId3"/>
+              </a:rPr>
+              <a:t> 워크플로우 자동 생성하는 </a:t>
+            </a:r>
+            <a:r>
+              <a:rPr lang="en-US" altLang="ko-KR" sz="1400" dirty="0">
+                <a:latin typeface="D2Coding" panose="020B0609020101020101" pitchFamily="49" charset="-127"/>
+                <a:ea typeface="D2Coding" panose="020B0609020101020101" pitchFamily="49" charset="-127"/>
+                <a:sym typeface="Wingdings" panose="05000000000000000000" pitchFamily="2" charset="2"/>
+                <a:hlinkClick r:id="rId3"/>
+              </a:rPr>
+              <a:t>'8</a:t>
+            </a:r>
+            <a:r>
+              <a:rPr lang="ko-KR" altLang="en-US" sz="1400" dirty="0">
+                <a:latin typeface="D2Coding" panose="020B0609020101020101" pitchFamily="49" charset="-127"/>
+                <a:ea typeface="D2Coding" panose="020B0609020101020101" pitchFamily="49" charset="-127"/>
+                <a:sym typeface="Wingdings" panose="05000000000000000000" pitchFamily="2" charset="2"/>
+                <a:hlinkClick r:id="rId3"/>
+              </a:rPr>
+              <a:t>단계 프롬프트 </a:t>
+            </a:r>
+            <a:r>
+              <a:rPr lang="en-US" altLang="ko-KR" sz="1400" dirty="0">
+                <a:latin typeface="D2Coding" panose="020B0609020101020101" pitchFamily="49" charset="-127"/>
+                <a:ea typeface="D2Coding" panose="020B0609020101020101" pitchFamily="49" charset="-127"/>
+                <a:sym typeface="Wingdings" panose="05000000000000000000" pitchFamily="2" charset="2"/>
+                <a:hlinkClick r:id="rId3"/>
+              </a:rPr>
+              <a:t>+ MCP </a:t>
+            </a:r>
+            <a:r>
+              <a:rPr lang="ko-KR" altLang="en-US" sz="1400" dirty="0">
+                <a:latin typeface="D2Coding" panose="020B0609020101020101" pitchFamily="49" charset="-127"/>
+                <a:ea typeface="D2Coding" panose="020B0609020101020101" pitchFamily="49" charset="-127"/>
+                <a:sym typeface="Wingdings" panose="05000000000000000000" pitchFamily="2" charset="2"/>
+                <a:hlinkClick r:id="rId3"/>
+              </a:rPr>
+              <a:t>세팅</a:t>
+            </a:r>
+            <a:r>
+              <a:rPr lang="en-US" altLang="ko-KR" sz="1400" dirty="0">
+                <a:latin typeface="D2Coding" panose="020B0609020101020101" pitchFamily="49" charset="-127"/>
+                <a:ea typeface="D2Coding" panose="020B0609020101020101" pitchFamily="49" charset="-127"/>
+                <a:sym typeface="Wingdings" panose="05000000000000000000" pitchFamily="2" charset="2"/>
+                <a:hlinkClick r:id="rId3"/>
+              </a:rPr>
+              <a:t>' (</a:t>
+            </a:r>
+            <a:r>
+              <a:rPr lang="ko-KR" altLang="en-US" sz="1400" dirty="0">
+                <a:latin typeface="D2Coding" panose="020B0609020101020101" pitchFamily="49" charset="-127"/>
+                <a:ea typeface="D2Coding" panose="020B0609020101020101" pitchFamily="49" charset="-127"/>
+                <a:sym typeface="Wingdings" panose="05000000000000000000" pitchFamily="2" charset="2"/>
+                <a:hlinkClick r:id="rId3"/>
+              </a:rPr>
+              <a:t>성공률 </a:t>
+            </a:r>
+            <a:r>
+              <a:rPr lang="en-US" altLang="ko-KR" sz="1400" dirty="0">
+                <a:latin typeface="D2Coding" panose="020B0609020101020101" pitchFamily="49" charset="-127"/>
+                <a:ea typeface="D2Coding" panose="020B0609020101020101" pitchFamily="49" charset="-127"/>
+                <a:sym typeface="Wingdings" panose="05000000000000000000" pitchFamily="2" charset="2"/>
+                <a:hlinkClick r:id="rId3"/>
+              </a:rPr>
+              <a:t>10</a:t>
+            </a:r>
+            <a:r>
+              <a:rPr lang="ko-KR" altLang="en-US" sz="1400" dirty="0">
+                <a:latin typeface="D2Coding" panose="020B0609020101020101" pitchFamily="49" charset="-127"/>
+                <a:ea typeface="D2Coding" panose="020B0609020101020101" pitchFamily="49" charset="-127"/>
+                <a:sym typeface="Wingdings" panose="05000000000000000000" pitchFamily="2" charset="2"/>
+                <a:hlinkClick r:id="rId3"/>
+              </a:rPr>
+              <a:t>배</a:t>
+            </a:r>
+            <a:r>
+              <a:rPr lang="en-US" altLang="ko-KR" sz="1400" dirty="0">
+                <a:latin typeface="D2Coding" panose="020B0609020101020101" pitchFamily="49" charset="-127"/>
+                <a:ea typeface="D2Coding" panose="020B0609020101020101" pitchFamily="49" charset="-127"/>
+                <a:sym typeface="Wingdings" panose="05000000000000000000" pitchFamily="2" charset="2"/>
+                <a:hlinkClick r:id="rId3"/>
+              </a:rPr>
+              <a:t>)</a:t>
+            </a:r>
+            <a:endParaRPr lang="en-US" altLang="ko-KR" sz="1400" dirty="0">
+              <a:latin typeface="D2Coding" panose="020B0609020101020101" pitchFamily="49" charset="-127"/>
+              <a:ea typeface="D2Coding" panose="020B0609020101020101" pitchFamily="49" charset="-127"/>
+              <a:sym typeface="Wingdings" panose="05000000000000000000" pitchFamily="2" charset="2"/>
+            </a:endParaRPr>
+          </a:p>
+          <a:p>
+            <a:pPr marL="285750" indent="-285750">
+              <a:lnSpc>
+                <a:spcPct val="200000"/>
+              </a:lnSpc>
+              <a:buFont typeface="Wingdings" panose="05000000000000000000" pitchFamily="2" charset="2"/>
+              <a:buChar char="v"/>
+            </a:pPr>
+            <a:r>
+              <a:rPr lang="en-US" altLang="ko-KR" sz="1600" dirty="0">
+                <a:latin typeface="D2Coding" panose="020B0609020101020101" pitchFamily="49" charset="-127"/>
+                <a:ea typeface="D2Coding" panose="020B0609020101020101" pitchFamily="49" charset="-127"/>
+                <a:sym typeface="Wingdings" panose="05000000000000000000" pitchFamily="2" charset="2"/>
+              </a:rPr>
+              <a:t>Antigravity  context7  n8n</a:t>
+            </a:r>
+            <a:r>
+              <a:rPr lang="ko-KR" altLang="en-US" sz="1600" dirty="0">
+                <a:latin typeface="D2Coding" panose="020B0609020101020101" pitchFamily="49" charset="-127"/>
+                <a:ea typeface="D2Coding" panose="020B0609020101020101" pitchFamily="49" charset="-127"/>
+                <a:sym typeface="Wingdings" panose="05000000000000000000" pitchFamily="2" charset="2"/>
+              </a:rPr>
+              <a:t> </a:t>
+            </a:r>
+            <a:r>
+              <a:rPr lang="en-US" altLang="ko-KR" sz="1600" dirty="0">
+                <a:latin typeface="D2Coding" panose="020B0609020101020101" pitchFamily="49" charset="-127"/>
+                <a:ea typeface="D2Coding" panose="020B0609020101020101" pitchFamily="49" charset="-127"/>
+                <a:sym typeface="Wingdings" panose="05000000000000000000" pitchFamily="2" charset="2"/>
+              </a:rPr>
+              <a:t>MCP</a:t>
+            </a:r>
+            <a:r>
+              <a:rPr lang="ko-KR" altLang="en-US" sz="1600" dirty="0">
+                <a:latin typeface="D2Coding" panose="020B0609020101020101" pitchFamily="49" charset="-127"/>
+                <a:ea typeface="D2Coding" panose="020B0609020101020101" pitchFamily="49" charset="-127"/>
+                <a:sym typeface="Wingdings" panose="05000000000000000000" pitchFamily="2" charset="2"/>
+              </a:rPr>
+              <a:t> </a:t>
+            </a:r>
+            <a:r>
+              <a:rPr lang="en-US" altLang="ko-KR" sz="1600" dirty="0">
+                <a:latin typeface="D2Coding" panose="020B0609020101020101" pitchFamily="49" charset="-127"/>
+                <a:ea typeface="D2Coding" panose="020B0609020101020101" pitchFamily="49" charset="-127"/>
+                <a:sym typeface="Wingdings" panose="05000000000000000000" pitchFamily="2" charset="2"/>
+              </a:rPr>
+              <a:t>server</a:t>
+            </a:r>
+            <a:r>
+              <a:rPr lang="ko-KR" altLang="en-US" sz="1600" dirty="0">
+                <a:latin typeface="D2Coding" panose="020B0609020101020101" pitchFamily="49" charset="-127"/>
+                <a:ea typeface="D2Coding" panose="020B0609020101020101" pitchFamily="49" charset="-127"/>
+                <a:sym typeface="Wingdings" panose="05000000000000000000" pitchFamily="2" charset="2"/>
+              </a:rPr>
+              <a:t> 연결하는 것도 귀찮다면</a:t>
+            </a:r>
+            <a:r>
+              <a:rPr lang="en-US" altLang="ko-KR" sz="1600" dirty="0">
+                <a:latin typeface="D2Coding" panose="020B0609020101020101" pitchFamily="49" charset="-127"/>
+                <a:ea typeface="D2Coding" panose="020B0609020101020101" pitchFamily="49" charset="-127"/>
+                <a:sym typeface="Wingdings" panose="05000000000000000000" pitchFamily="2" charset="2"/>
+              </a:rPr>
+              <a:t>,</a:t>
+            </a:r>
+          </a:p>
+          <a:p>
+            <a:pPr marL="285750" indent="-285750">
+              <a:lnSpc>
+                <a:spcPct val="200000"/>
+              </a:lnSpc>
+              <a:buFont typeface="Wingdings" panose="05000000000000000000" pitchFamily="2" charset="2"/>
+              <a:buChar char="v"/>
+            </a:pPr>
+            <a:r>
+              <a:rPr lang="en-US" altLang="ko-KR" sz="1600" dirty="0">
+                <a:latin typeface="D2Coding" panose="020B0609020101020101" pitchFamily="49" charset="-127"/>
+                <a:ea typeface="D2Coding" panose="020B0609020101020101" pitchFamily="49" charset="-127"/>
+                <a:sym typeface="Wingdings" panose="05000000000000000000" pitchFamily="2" charset="2"/>
+              </a:rPr>
+              <a:t>Antigravity</a:t>
+            </a:r>
+            <a:r>
+              <a:rPr lang="ko-KR" altLang="en-US" sz="1600" dirty="0">
+                <a:latin typeface="D2Coding" panose="020B0609020101020101" pitchFamily="49" charset="-127"/>
+                <a:ea typeface="D2Coding" panose="020B0609020101020101" pitchFamily="49" charset="-127"/>
+                <a:sym typeface="Wingdings" panose="05000000000000000000" pitchFamily="2" charset="2"/>
+              </a:rPr>
+              <a:t>에서 </a:t>
+            </a:r>
+            <a:r>
+              <a:rPr lang="en-US" altLang="ko-KR" sz="1600" dirty="0">
+                <a:latin typeface="D2Coding" panose="020B0609020101020101" pitchFamily="49" charset="-127"/>
+                <a:ea typeface="D2Coding" panose="020B0609020101020101" pitchFamily="49" charset="-127"/>
+                <a:sym typeface="Wingdings" panose="05000000000000000000" pitchFamily="2" charset="2"/>
+              </a:rPr>
+              <a:t>Workflow </a:t>
+            </a:r>
+            <a:r>
+              <a:rPr lang="ko-KR" altLang="en-US" sz="1600" dirty="0">
+                <a:latin typeface="D2Coding" panose="020B0609020101020101" pitchFamily="49" charset="-127"/>
+                <a:ea typeface="D2Coding" panose="020B0609020101020101" pitchFamily="49" charset="-127"/>
+                <a:sym typeface="Wingdings" panose="05000000000000000000" pitchFamily="2" charset="2"/>
+              </a:rPr>
+              <a:t>직접 만들기 </a:t>
+            </a:r>
+            <a:r>
+              <a:rPr lang="en-US" altLang="ko-KR" sz="1600" dirty="0">
+                <a:latin typeface="D2Coding" panose="020B0609020101020101" pitchFamily="49" charset="-127"/>
+                <a:ea typeface="D2Coding" panose="020B0609020101020101" pitchFamily="49" charset="-127"/>
+                <a:sym typeface="Wingdings" panose="05000000000000000000" pitchFamily="2" charset="2"/>
+              </a:rPr>
+              <a:t> </a:t>
+            </a:r>
+            <a:r>
+              <a:rPr lang="en-US" altLang="ko-KR" sz="1600" dirty="0">
+                <a:latin typeface="D2Coding" panose="020B0609020101020101" pitchFamily="49" charset="-127"/>
+                <a:ea typeface="D2Coding" panose="020B0609020101020101" pitchFamily="49" charset="-127"/>
+                <a:sym typeface="Wingdings" panose="05000000000000000000" pitchFamily="2" charset="2"/>
+                <a:hlinkClick r:id="rId4"/>
+              </a:rPr>
+              <a:t>~~</a:t>
+            </a:r>
+            <a:r>
+              <a:rPr lang="ko-KR" altLang="en-US" sz="1600" dirty="0">
+                <a:latin typeface="D2Coding" panose="020B0609020101020101" pitchFamily="49" charset="-127"/>
+                <a:ea typeface="D2Coding" panose="020B0609020101020101" pitchFamily="49" charset="-127"/>
+                <a:sym typeface="Wingdings" panose="05000000000000000000" pitchFamily="2" charset="2"/>
+                <a:hlinkClick r:id="rId4"/>
+              </a:rPr>
+              <a:t> </a:t>
+            </a:r>
+            <a:r>
+              <a:rPr lang="en-US" altLang="ko-KR" sz="1600" dirty="0">
+                <a:latin typeface="D2Coding" panose="020B0609020101020101" pitchFamily="49" charset="-127"/>
+                <a:ea typeface="D2Coding" panose="020B0609020101020101" pitchFamily="49" charset="-127"/>
+                <a:sym typeface="Wingdings" panose="05000000000000000000" pitchFamily="2" charset="2"/>
+                <a:hlinkClick r:id="rId4"/>
+              </a:rPr>
+              <a:t>"</a:t>
+            </a:r>
+            <a:r>
+              <a:rPr lang="ko-KR" altLang="en-US" sz="1600" dirty="0">
+                <a:latin typeface="D2Coding" panose="020B0609020101020101" pitchFamily="49" charset="-127"/>
+                <a:ea typeface="D2Coding" panose="020B0609020101020101" pitchFamily="49" charset="-127"/>
+                <a:sym typeface="Wingdings" panose="05000000000000000000" pitchFamily="2" charset="2"/>
+                <a:hlinkClick r:id="rId4"/>
+              </a:rPr>
+              <a:t>이걸로</a:t>
+            </a:r>
+            <a:r>
+              <a:rPr lang="en-US" altLang="ko-KR" sz="1600" dirty="0">
+                <a:latin typeface="D2Coding" panose="020B0609020101020101" pitchFamily="49" charset="-127"/>
+                <a:ea typeface="D2Coding" panose="020B0609020101020101" pitchFamily="49" charset="-127"/>
+                <a:sym typeface="Wingdings" panose="05000000000000000000" pitchFamily="2" charset="2"/>
+                <a:hlinkClick r:id="rId4"/>
+              </a:rPr>
+              <a:t>" </a:t>
+            </a:r>
+            <a:r>
+              <a:rPr lang="ko-KR" altLang="en-US" sz="1600" dirty="0">
+                <a:latin typeface="D2Coding" panose="020B0609020101020101" pitchFamily="49" charset="-127"/>
+                <a:ea typeface="D2Coding" panose="020B0609020101020101" pitchFamily="49" charset="-127"/>
+                <a:sym typeface="Wingdings" panose="05000000000000000000" pitchFamily="2" charset="2"/>
+                <a:hlinkClick r:id="rId4"/>
+              </a:rPr>
+              <a:t>자동화의 판도가 </a:t>
+            </a:r>
+            <a:r>
+              <a:rPr lang="en-US" altLang="ko-KR" sz="1600" dirty="0">
+                <a:latin typeface="D2Coding" panose="020B0609020101020101" pitchFamily="49" charset="-127"/>
+                <a:ea typeface="D2Coding" panose="020B0609020101020101" pitchFamily="49" charset="-127"/>
+                <a:sym typeface="Wingdings" panose="05000000000000000000" pitchFamily="2" charset="2"/>
+                <a:hlinkClick r:id="rId4"/>
+              </a:rPr>
+              <a:t>(</a:t>
+            </a:r>
+            <a:r>
+              <a:rPr lang="ko-KR" altLang="en-US" sz="1600" dirty="0">
+                <a:latin typeface="D2Coding" panose="020B0609020101020101" pitchFamily="49" charset="-127"/>
+                <a:ea typeface="D2Coding" panose="020B0609020101020101" pitchFamily="49" charset="-127"/>
+                <a:sym typeface="Wingdings" panose="05000000000000000000" pitchFamily="2" charset="2"/>
+                <a:hlinkClick r:id="rId4"/>
+              </a:rPr>
+              <a:t>구글 </a:t>
+            </a:r>
+            <a:r>
+              <a:rPr lang="ko-KR" altLang="en-US" sz="1600" dirty="0" err="1">
+                <a:latin typeface="D2Coding" panose="020B0609020101020101" pitchFamily="49" charset="-127"/>
+                <a:ea typeface="D2Coding" panose="020B0609020101020101" pitchFamily="49" charset="-127"/>
+                <a:sym typeface="Wingdings" panose="05000000000000000000" pitchFamily="2" charset="2"/>
+                <a:hlinkClick r:id="rId4"/>
+              </a:rPr>
+              <a:t>안티그래비티</a:t>
+            </a:r>
+            <a:r>
+              <a:rPr lang="en-US" altLang="ko-KR" sz="1600" dirty="0">
+                <a:latin typeface="D2Coding" panose="020B0609020101020101" pitchFamily="49" charset="-127"/>
+                <a:ea typeface="D2Coding" panose="020B0609020101020101" pitchFamily="49" charset="-127"/>
+                <a:sym typeface="Wingdings" panose="05000000000000000000" pitchFamily="2" charset="2"/>
+                <a:hlinkClick r:id="rId4"/>
+              </a:rPr>
+              <a:t>)</a:t>
+            </a:r>
+            <a:endParaRPr lang="ko-KR" altLang="en-US" sz="1600" dirty="0"/>
+          </a:p>
+        </p:txBody>
+      </p:sp>
+      <p:sp>
+        <p:nvSpPr>
+          <p:cNvPr id="2" name="TextBox 1">
+            <a:extLst>
+              <a:ext uri="{FF2B5EF4-FFF2-40B4-BE49-F238E27FC236}">
+                <a16:creationId xmlns:a16="http://schemas.microsoft.com/office/drawing/2014/main" id="{EC80D5E0-C6FF-6BBF-600F-FAA66AF19197}"/>
+              </a:ext>
+            </a:extLst>
+          </p:cNvPr>
+          <p:cNvSpPr txBox="1"/>
+          <p:nvPr/>
+        </p:nvSpPr>
+        <p:spPr>
+          <a:xfrm>
+            <a:off x="582095" y="1400175"/>
+            <a:ext cx="11143180" cy="880819"/>
+          </a:xfrm>
+          <a:prstGeom prst="rect">
+            <a:avLst/>
+          </a:prstGeom>
+          <a:noFill/>
+        </p:spPr>
+        <p:txBody>
+          <a:bodyPr wrap="square" rtlCol="0">
+            <a:spAutoFit/>
+          </a:bodyPr>
+          <a:lstStyle/>
+          <a:p>
+            <a:pPr>
+              <a:lnSpc>
+                <a:spcPct val="150000"/>
+              </a:lnSpc>
+            </a:pPr>
+            <a:r>
+              <a:rPr lang="en-US" altLang="ko-KR" dirty="0">
+                <a:latin typeface="D2Coding" panose="020B0609020101020101" pitchFamily="49" charset="-127"/>
+                <a:ea typeface="D2Coding" panose="020B0609020101020101" pitchFamily="49" charset="-127"/>
+              </a:rPr>
+              <a:t>LLM</a:t>
+            </a:r>
+            <a:r>
+              <a:rPr lang="ko-KR" altLang="en-US" dirty="0">
+                <a:latin typeface="D2Coding" panose="020B0609020101020101" pitchFamily="49" charset="-127"/>
+                <a:ea typeface="D2Coding" panose="020B0609020101020101" pitchFamily="49" charset="-127"/>
+              </a:rPr>
+              <a:t>에게 </a:t>
+            </a:r>
+            <a:r>
+              <a:rPr lang="en-US" altLang="ko-KR" dirty="0">
+                <a:latin typeface="D2Coding" panose="020B0609020101020101" pitchFamily="49" charset="-127"/>
+                <a:ea typeface="D2Coding" panose="020B0609020101020101" pitchFamily="49" charset="-127"/>
+              </a:rPr>
+              <a:t>n8n </a:t>
+            </a:r>
+            <a:r>
+              <a:rPr lang="ko-KR" altLang="en-US" dirty="0">
+                <a:latin typeface="D2Coding" panose="020B0609020101020101" pitchFamily="49" charset="-127"/>
+                <a:ea typeface="D2Coding" panose="020B0609020101020101" pitchFamily="49" charset="-127"/>
+              </a:rPr>
+              <a:t>코드를 부탁해서 복사하고 </a:t>
+            </a:r>
+            <a:r>
+              <a:rPr lang="en-US" altLang="ko-KR" dirty="0">
+                <a:latin typeface="D2Coding" panose="020B0609020101020101" pitchFamily="49" charset="-127"/>
+                <a:ea typeface="D2Coding" panose="020B0609020101020101" pitchFamily="49" charset="-127"/>
+              </a:rPr>
+              <a:t>n8n</a:t>
+            </a:r>
+            <a:r>
+              <a:rPr lang="ko-KR" altLang="en-US" dirty="0">
+                <a:latin typeface="D2Coding" panose="020B0609020101020101" pitchFamily="49" charset="-127"/>
+                <a:ea typeface="D2Coding" panose="020B0609020101020101" pitchFamily="49" charset="-127"/>
+              </a:rPr>
+              <a:t>에 붙여넣기 </a:t>
+            </a:r>
+            <a:r>
+              <a:rPr lang="en-US" altLang="ko-KR" dirty="0">
+                <a:latin typeface="D2Coding" panose="020B0609020101020101" pitchFamily="49" charset="-127"/>
+                <a:ea typeface="D2Coding" panose="020B0609020101020101" pitchFamily="49" charset="-127"/>
+                <a:sym typeface="Wingdings" panose="05000000000000000000" pitchFamily="2" charset="2"/>
+              </a:rPr>
+              <a:t> LLM</a:t>
+            </a:r>
+            <a:r>
+              <a:rPr lang="ko-KR" altLang="en-US" dirty="0">
+                <a:latin typeface="D2Coding" panose="020B0609020101020101" pitchFamily="49" charset="-127"/>
+                <a:ea typeface="D2Coding" panose="020B0609020101020101" pitchFamily="49" charset="-127"/>
+                <a:sym typeface="Wingdings" panose="05000000000000000000" pitchFamily="2" charset="2"/>
+              </a:rPr>
+              <a:t>에게 </a:t>
+            </a:r>
+            <a:r>
+              <a:rPr lang="en-US" altLang="ko-KR" dirty="0">
+                <a:latin typeface="D2Coding" panose="020B0609020101020101" pitchFamily="49" charset="-127"/>
+                <a:ea typeface="D2Coding" panose="020B0609020101020101" pitchFamily="49" charset="-127"/>
+                <a:sym typeface="Wingdings" panose="05000000000000000000" pitchFamily="2" charset="2"/>
+              </a:rPr>
+              <a:t>MCP serve</a:t>
+            </a:r>
+            <a:r>
+              <a:rPr lang="ko-KR" altLang="en-US" dirty="0">
+                <a:latin typeface="D2Coding" panose="020B0609020101020101" pitchFamily="49" charset="-127"/>
+                <a:ea typeface="D2Coding" panose="020B0609020101020101" pitchFamily="49" charset="-127"/>
+                <a:sym typeface="Wingdings" panose="05000000000000000000" pitchFamily="2" charset="2"/>
+              </a:rPr>
+              <a:t>를 붙여 </a:t>
+            </a:r>
+            <a:r>
+              <a:rPr lang="en-US" altLang="ko-KR" dirty="0">
+                <a:latin typeface="D2Coding" panose="020B0609020101020101" pitchFamily="49" charset="-127"/>
+                <a:ea typeface="D2Coding" panose="020B0609020101020101" pitchFamily="49" charset="-127"/>
+                <a:sym typeface="Wingdings" panose="05000000000000000000" pitchFamily="2" charset="2"/>
+              </a:rPr>
+              <a:t>n8n </a:t>
+            </a:r>
+            <a:r>
+              <a:rPr lang="ko-KR" altLang="en-US" dirty="0">
+                <a:latin typeface="D2Coding" panose="020B0609020101020101" pitchFamily="49" charset="-127"/>
+                <a:ea typeface="D2Coding" panose="020B0609020101020101" pitchFamily="49" charset="-127"/>
+                <a:sym typeface="Wingdings" panose="05000000000000000000" pitchFamily="2" charset="2"/>
+              </a:rPr>
+              <a:t>코드를 부탁하면 </a:t>
+            </a:r>
+            <a:r>
+              <a:rPr lang="en-US" altLang="ko-KR" dirty="0">
+                <a:latin typeface="D2Coding" panose="020B0609020101020101" pitchFamily="49" charset="-127"/>
+                <a:ea typeface="D2Coding" panose="020B0609020101020101" pitchFamily="49" charset="-127"/>
+                <a:sym typeface="Wingdings" panose="05000000000000000000" pitchFamily="2" charset="2"/>
+              </a:rPr>
+              <a:t>(</a:t>
+            </a:r>
+            <a:r>
+              <a:rPr lang="en-US" altLang="ko-KR" dirty="0" err="1">
+                <a:latin typeface="D2Coding" panose="020B0609020101020101" pitchFamily="49" charset="-127"/>
+                <a:ea typeface="D2Coding" panose="020B0609020101020101" pitchFamily="49" charset="-127"/>
+                <a:sym typeface="Wingdings" panose="05000000000000000000" pitchFamily="2" charset="2"/>
+              </a:rPr>
+              <a:t>json</a:t>
+            </a:r>
+            <a:r>
+              <a:rPr lang="ko-KR" altLang="en-US" dirty="0">
+                <a:latin typeface="D2Coding" panose="020B0609020101020101" pitchFamily="49" charset="-127"/>
+                <a:ea typeface="D2Coding" panose="020B0609020101020101" pitchFamily="49" charset="-127"/>
+                <a:sym typeface="Wingdings" panose="05000000000000000000" pitchFamily="2" charset="2"/>
+              </a:rPr>
+              <a:t>으로 소통</a:t>
+            </a:r>
+            <a:r>
+              <a:rPr lang="en-US" altLang="ko-KR" dirty="0">
+                <a:latin typeface="D2Coding" panose="020B0609020101020101" pitchFamily="49" charset="-127"/>
+                <a:ea typeface="D2Coding" panose="020B0609020101020101" pitchFamily="49" charset="-127"/>
+                <a:sym typeface="Wingdings" panose="05000000000000000000" pitchFamily="2" charset="2"/>
+              </a:rPr>
+              <a:t>)</a:t>
+            </a:r>
+            <a:endParaRPr lang="ko-KR" altLang="en-US" dirty="0">
+              <a:latin typeface="D2Coding" panose="020B0609020101020101" pitchFamily="49" charset="-127"/>
+              <a:ea typeface="D2Coding" panose="020B0609020101020101" pitchFamily="49" charset="-127"/>
+            </a:endParaRPr>
+          </a:p>
+        </p:txBody>
+      </p:sp>
+    </p:spTree>
+    <p:extLst>
+      <p:ext uri="{BB962C8B-B14F-4D97-AF65-F5344CB8AC3E}">
+        <p14:creationId xmlns:p14="http://schemas.microsoft.com/office/powerpoint/2010/main" val="635947809"/>
+      </p:ext>
+    </p:extLst>
+  </p:cSld>
+  <p:clrMapOvr>
+    <a:masterClrMapping/>
+  </p:clrMapOvr>
+</p:sld>
+</file>
+
+<file path=ppt/slides/slide24.xml><?xml version="1.0" encoding="utf-8"?>
+<p:sld xmlns:a="http://schemas.openxmlformats.org/drawingml/2006/main" xmlns:r="http://schemas.openxmlformats.org/officeDocument/2006/relationships" xmlns:p="http://schemas.openxmlformats.org/presentationml/2006/main">
+  <p:cSld>
+    <p:spTree>
+      <p:nvGrpSpPr>
+        <p:cNvPr id="1" name="">
+          <a:extLst>
+            <a:ext uri="{FF2B5EF4-FFF2-40B4-BE49-F238E27FC236}">
+              <a16:creationId xmlns:a16="http://schemas.microsoft.com/office/drawing/2014/main" id="{CDFE7401-AD49-931E-5629-866E258F732A}"/>
+            </a:ext>
+          </a:extLst>
+        </p:cNvPr>
+        <p:cNvGrpSpPr/>
+        <p:nvPr/>
+      </p:nvGrpSpPr>
+      <p:grpSpPr>
+        <a:xfrm>
+          <a:off x="0" y="0"/>
+          <a:ext cx="0" cy="0"/>
+          <a:chOff x="0" y="0"/>
+          <a:chExt cx="0" cy="0"/>
+        </a:xfrm>
+      </p:grpSpPr>
+      <p:sp>
+        <p:nvSpPr>
+          <p:cNvPr id="4" name="슬라이드 번호 개체 틀 3">
+            <a:extLst>
+              <a:ext uri="{FF2B5EF4-FFF2-40B4-BE49-F238E27FC236}">
+                <a16:creationId xmlns:a16="http://schemas.microsoft.com/office/drawing/2014/main" id="{D22E6590-F5A2-3419-2996-7FAFE33D489D}"/>
+              </a:ext>
+            </a:extLst>
+          </p:cNvPr>
+          <p:cNvSpPr>
+            <a:spLocks noGrp="1"/>
+          </p:cNvSpPr>
+          <p:nvPr>
+            <p:ph type="sldNum" sz="quarter" idx="12"/>
+          </p:nvPr>
+        </p:nvSpPr>
+        <p:spPr>
+          <a:xfrm>
+            <a:off x="10514011" y="6036261"/>
+            <a:ext cx="753545" cy="365125"/>
+          </a:xfrm>
+        </p:spPr>
+        <p:txBody>
+          <a:bodyPr/>
+          <a:lstStyle/>
+          <a:p>
+            <a:fld id="{D57F1E4F-1CFF-5643-939E-217C01CDF565}" type="slidenum">
+              <a:rPr lang="en-US" smtClean="0"/>
+              <a:pPr/>
+              <a:t>24</a:t>
+            </a:fld>
+            <a:endParaRPr lang="en-US" dirty="0"/>
+          </a:p>
+        </p:txBody>
+      </p:sp>
+      <p:sp>
+        <p:nvSpPr>
+          <p:cNvPr id="3" name="제목 1">
+            <a:extLst>
+              <a:ext uri="{FF2B5EF4-FFF2-40B4-BE49-F238E27FC236}">
+                <a16:creationId xmlns:a16="http://schemas.microsoft.com/office/drawing/2014/main" id="{41DF8B59-661E-605A-CFC9-9B1A7684FEE6}"/>
+              </a:ext>
+            </a:extLst>
+          </p:cNvPr>
+          <p:cNvSpPr txBox="1">
+            <a:spLocks/>
+          </p:cNvSpPr>
+          <p:nvPr/>
+        </p:nvSpPr>
+        <p:spPr>
+          <a:xfrm>
+            <a:off x="475645" y="481983"/>
+            <a:ext cx="10353762" cy="766439"/>
+          </a:xfrm>
+          <a:prstGeom prst="rect">
+            <a:avLst/>
+          </a:prstGeom>
+        </p:spPr>
+        <p:txBody>
+          <a:bodyPr vert="horz" lIns="91440" tIns="45720" rIns="91440" bIns="45720" rtlCol="0" anchor="ctr">
+            <a:normAutofit/>
+          </a:bodyPr>
+          <a:lstStyle>
+            <a:lvl1pPr algn="ctr" defTabSz="914400" rtl="0" eaLnBrk="1" latinLnBrk="1" hangingPunct="1">
+              <a:lnSpc>
+                <a:spcPct val="90000"/>
+              </a:lnSpc>
+              <a:spcBef>
+                <a:spcPct val="0"/>
+              </a:spcBef>
+              <a:buNone/>
+              <a:defRPr sz="3200" kern="1200" cap="all" baseline="0">
+                <a:solidFill>
+                  <a:schemeClr val="tx1"/>
+                </a:solidFill>
+                <a:effectLst/>
+                <a:latin typeface="Batang" panose="02030600000101010101" pitchFamily="18" charset="-127"/>
+                <a:ea typeface="Batang" panose="02030600000101010101" pitchFamily="18" charset="-127"/>
+                <a:cs typeface="+mj-cs"/>
+              </a:defRPr>
+            </a:lvl1pPr>
+          </a:lstStyle>
+          <a:p>
+            <a:pPr algn="l"/>
+            <a:r>
+              <a:rPr lang="en-US" altLang="ko-KR" sz="2800" cap="none" dirty="0">
+                <a:solidFill>
+                  <a:schemeClr val="bg2">
+                    <a:lumMod val="25000"/>
+                  </a:schemeClr>
+                </a:solidFill>
+                <a:latin typeface="D2Coding" panose="020B0609020101020101" pitchFamily="49" charset="-127"/>
+                <a:ea typeface="D2Coding" panose="020B0609020101020101" pitchFamily="49" charset="-127"/>
+                <a:cs typeface="Segoe UI Light" panose="020B0502040204020203" pitchFamily="34" charset="0"/>
+              </a:rPr>
+              <a:t>n8n dances with LLM</a:t>
+            </a:r>
+            <a:endParaRPr lang="ko-KR" altLang="en-US" sz="2800" cap="none" dirty="0">
+              <a:solidFill>
+                <a:schemeClr val="bg2">
+                  <a:lumMod val="25000"/>
+                </a:schemeClr>
+              </a:solidFill>
+              <a:latin typeface="D2Coding" panose="020B0609020101020101" pitchFamily="49" charset="-127"/>
+              <a:ea typeface="D2Coding" panose="020B0609020101020101" pitchFamily="49" charset="-127"/>
+              <a:cs typeface="Segoe UI Light" panose="020B0502040204020203" pitchFamily="34" charset="0"/>
+            </a:endParaRPr>
+          </a:p>
+        </p:txBody>
+      </p:sp>
+      <p:sp>
+        <p:nvSpPr>
+          <p:cNvPr id="2" name="TextBox 1">
+            <a:extLst>
+              <a:ext uri="{FF2B5EF4-FFF2-40B4-BE49-F238E27FC236}">
+                <a16:creationId xmlns:a16="http://schemas.microsoft.com/office/drawing/2014/main" id="{645F3050-E51F-C7FB-58C2-E1F5336796F0}"/>
+              </a:ext>
+            </a:extLst>
+          </p:cNvPr>
+          <p:cNvSpPr txBox="1"/>
+          <p:nvPr/>
+        </p:nvSpPr>
+        <p:spPr>
+          <a:xfrm>
+            <a:off x="524410" y="1281868"/>
+            <a:ext cx="11143180" cy="2533707"/>
+          </a:xfrm>
+          <a:prstGeom prst="rect">
+            <a:avLst/>
+          </a:prstGeom>
+          <a:noFill/>
+        </p:spPr>
+        <p:txBody>
+          <a:bodyPr wrap="square" rtlCol="0">
+            <a:spAutoFit/>
+          </a:bodyPr>
+          <a:lstStyle/>
+          <a:p>
+            <a:pPr>
+              <a:lnSpc>
+                <a:spcPct val="150000"/>
+              </a:lnSpc>
+            </a:pPr>
+            <a:r>
+              <a:rPr lang="en-US" altLang="ko-KR" dirty="0">
+                <a:latin typeface="D2Coding" panose="020B0609020101020101" pitchFamily="49" charset="-127"/>
+                <a:ea typeface="D2Coding" panose="020B0609020101020101" pitchFamily="49" charset="-127"/>
+              </a:rPr>
+              <a:t>LLM</a:t>
+            </a:r>
+            <a:r>
+              <a:rPr lang="ko-KR" altLang="en-US" dirty="0">
+                <a:latin typeface="D2Coding" panose="020B0609020101020101" pitchFamily="49" charset="-127"/>
+                <a:ea typeface="D2Coding" panose="020B0609020101020101" pitchFamily="49" charset="-127"/>
+              </a:rPr>
+              <a:t>에게 </a:t>
+            </a:r>
+            <a:r>
+              <a:rPr lang="en-US" altLang="ko-KR" dirty="0">
+                <a:latin typeface="D2Coding" panose="020B0609020101020101" pitchFamily="49" charset="-127"/>
+                <a:ea typeface="D2Coding" panose="020B0609020101020101" pitchFamily="49" charset="-127"/>
+              </a:rPr>
+              <a:t>n8n </a:t>
+            </a:r>
+            <a:r>
+              <a:rPr lang="ko-KR" altLang="en-US" dirty="0">
+                <a:latin typeface="D2Coding" panose="020B0609020101020101" pitchFamily="49" charset="-127"/>
+                <a:ea typeface="D2Coding" panose="020B0609020101020101" pitchFamily="49" charset="-127"/>
+              </a:rPr>
+              <a:t>코드를 요청해서 복사하고 </a:t>
+            </a:r>
+            <a:r>
+              <a:rPr lang="en-US" altLang="ko-KR" dirty="0">
+                <a:latin typeface="D2Coding" panose="020B0609020101020101" pitchFamily="49" charset="-127"/>
+                <a:ea typeface="D2Coding" panose="020B0609020101020101" pitchFamily="49" charset="-127"/>
+              </a:rPr>
+              <a:t>n8n</a:t>
+            </a:r>
+            <a:r>
+              <a:rPr lang="ko-KR" altLang="en-US" dirty="0">
+                <a:latin typeface="D2Coding" panose="020B0609020101020101" pitchFamily="49" charset="-127"/>
+                <a:ea typeface="D2Coding" panose="020B0609020101020101" pitchFamily="49" charset="-127"/>
+              </a:rPr>
+              <a:t>에 붙여넣기 </a:t>
+            </a:r>
+            <a:r>
+              <a:rPr lang="en-US" altLang="ko-KR" dirty="0">
+                <a:latin typeface="D2Coding" panose="020B0609020101020101" pitchFamily="49" charset="-127"/>
+                <a:ea typeface="D2Coding" panose="020B0609020101020101" pitchFamily="49" charset="-127"/>
+                <a:sym typeface="Wingdings" panose="05000000000000000000" pitchFamily="2" charset="2"/>
+              </a:rPr>
+              <a:t> LLM</a:t>
+            </a:r>
+            <a:r>
+              <a:rPr lang="ko-KR" altLang="en-US" dirty="0">
+                <a:latin typeface="D2Coding" panose="020B0609020101020101" pitchFamily="49" charset="-127"/>
+                <a:ea typeface="D2Coding" panose="020B0609020101020101" pitchFamily="49" charset="-127"/>
+                <a:sym typeface="Wingdings" panose="05000000000000000000" pitchFamily="2" charset="2"/>
+              </a:rPr>
+              <a:t>에게 </a:t>
+            </a:r>
+            <a:r>
+              <a:rPr lang="en-US" altLang="ko-KR" dirty="0">
+                <a:latin typeface="D2Coding" panose="020B0609020101020101" pitchFamily="49" charset="-127"/>
+                <a:ea typeface="D2Coding" panose="020B0609020101020101" pitchFamily="49" charset="-127"/>
+                <a:sym typeface="Wingdings" panose="05000000000000000000" pitchFamily="2" charset="2"/>
+              </a:rPr>
+              <a:t>MCP serve</a:t>
+            </a:r>
+            <a:r>
+              <a:rPr lang="ko-KR" altLang="en-US" dirty="0">
+                <a:latin typeface="D2Coding" panose="020B0609020101020101" pitchFamily="49" charset="-127"/>
+                <a:ea typeface="D2Coding" panose="020B0609020101020101" pitchFamily="49" charset="-127"/>
+                <a:sym typeface="Wingdings" panose="05000000000000000000" pitchFamily="2" charset="2"/>
+              </a:rPr>
+              <a:t>를 붙여 </a:t>
+            </a:r>
+            <a:r>
+              <a:rPr lang="en-US" altLang="ko-KR" dirty="0">
+                <a:latin typeface="D2Coding" panose="020B0609020101020101" pitchFamily="49" charset="-127"/>
+                <a:ea typeface="D2Coding" panose="020B0609020101020101" pitchFamily="49" charset="-127"/>
+                <a:sym typeface="Wingdings" panose="05000000000000000000" pitchFamily="2" charset="2"/>
+              </a:rPr>
+              <a:t>n8n </a:t>
+            </a:r>
+            <a:r>
+              <a:rPr lang="ko-KR" altLang="en-US" dirty="0">
+                <a:latin typeface="D2Coding" panose="020B0609020101020101" pitchFamily="49" charset="-127"/>
+                <a:ea typeface="D2Coding" panose="020B0609020101020101" pitchFamily="49" charset="-127"/>
+                <a:sym typeface="Wingdings" panose="05000000000000000000" pitchFamily="2" charset="2"/>
+              </a:rPr>
+              <a:t>코드를 요청하고 나의 로컬 </a:t>
+            </a:r>
+            <a:r>
+              <a:rPr lang="en-US" altLang="ko-KR" dirty="0">
+                <a:latin typeface="D2Coding" panose="020B0609020101020101" pitchFamily="49" charset="-127"/>
+                <a:ea typeface="D2Coding" panose="020B0609020101020101" pitchFamily="49" charset="-127"/>
+                <a:sym typeface="Wingdings" panose="05000000000000000000" pitchFamily="2" charset="2"/>
+              </a:rPr>
+              <a:t>n8n</a:t>
+            </a:r>
+            <a:r>
+              <a:rPr lang="ko-KR" altLang="en-US" dirty="0">
+                <a:latin typeface="D2Coding" panose="020B0609020101020101" pitchFamily="49" charset="-127"/>
+                <a:ea typeface="D2Coding" panose="020B0609020101020101" pitchFamily="49" charset="-127"/>
+                <a:sym typeface="Wingdings" panose="05000000000000000000" pitchFamily="2" charset="2"/>
+              </a:rPr>
+              <a:t>에서 직접 작동시키기 </a:t>
+            </a:r>
+            <a:r>
+              <a:rPr lang="en-US" altLang="ko-KR" dirty="0">
+                <a:latin typeface="D2Coding" panose="020B0609020101020101" pitchFamily="49" charset="-127"/>
+                <a:ea typeface="D2Coding" panose="020B0609020101020101" pitchFamily="49" charset="-127"/>
+                <a:sym typeface="Wingdings" panose="05000000000000000000" pitchFamily="2" charset="2"/>
+              </a:rPr>
+              <a:t>(</a:t>
+            </a:r>
+            <a:r>
+              <a:rPr lang="en-US" altLang="ko-KR" dirty="0" err="1">
+                <a:latin typeface="D2Coding" panose="020B0609020101020101" pitchFamily="49" charset="-127"/>
+                <a:ea typeface="D2Coding" panose="020B0609020101020101" pitchFamily="49" charset="-127"/>
+                <a:sym typeface="Wingdings" panose="05000000000000000000" pitchFamily="2" charset="2"/>
+              </a:rPr>
+              <a:t>json</a:t>
+            </a:r>
+            <a:r>
+              <a:rPr lang="ko-KR" altLang="en-US" dirty="0">
+                <a:latin typeface="D2Coding" panose="020B0609020101020101" pitchFamily="49" charset="-127"/>
+                <a:ea typeface="D2Coding" panose="020B0609020101020101" pitchFamily="49" charset="-127"/>
+                <a:sym typeface="Wingdings" panose="05000000000000000000" pitchFamily="2" charset="2"/>
+              </a:rPr>
+              <a:t>으로 소통</a:t>
+            </a:r>
+            <a:r>
+              <a:rPr lang="en-US" altLang="ko-KR" dirty="0">
+                <a:latin typeface="D2Coding" panose="020B0609020101020101" pitchFamily="49" charset="-127"/>
+                <a:ea typeface="D2Coding" panose="020B0609020101020101" pitchFamily="49" charset="-127"/>
+                <a:sym typeface="Wingdings" panose="05000000000000000000" pitchFamily="2" charset="2"/>
+              </a:rPr>
+              <a:t>)</a:t>
+            </a:r>
+          </a:p>
+          <a:p>
+            <a:pPr marL="342900" indent="-342900">
+              <a:lnSpc>
+                <a:spcPct val="150000"/>
+              </a:lnSpc>
+              <a:buFont typeface="+mj-lt"/>
+              <a:buAutoNum type="arabicPeriod"/>
+            </a:pPr>
+            <a:r>
+              <a:rPr lang="en-US" altLang="ko-KR" dirty="0">
+                <a:latin typeface="D2Coding" panose="020B0609020101020101" pitchFamily="49" charset="-127"/>
+                <a:ea typeface="D2Coding" panose="020B0609020101020101" pitchFamily="49" charset="-127"/>
+                <a:sym typeface="Wingdings" panose="05000000000000000000" pitchFamily="2" charset="2"/>
+              </a:rPr>
+              <a:t>VS Code</a:t>
+            </a:r>
+            <a:r>
+              <a:rPr lang="ko-KR" altLang="en-US" dirty="0">
+                <a:latin typeface="D2Coding" panose="020B0609020101020101" pitchFamily="49" charset="-127"/>
+                <a:ea typeface="D2Coding" panose="020B0609020101020101" pitchFamily="49" charset="-127"/>
+                <a:sym typeface="Wingdings" panose="05000000000000000000" pitchFamily="2" charset="2"/>
+              </a:rPr>
+              <a:t>에서 </a:t>
+            </a:r>
+            <a:r>
+              <a:rPr lang="en-US" altLang="ko-KR" dirty="0">
+                <a:latin typeface="D2Coding" panose="020B0609020101020101" pitchFamily="49" charset="-127"/>
+                <a:ea typeface="D2Coding" panose="020B0609020101020101" pitchFamily="49" charset="-127"/>
+                <a:sym typeface="Wingdings" panose="05000000000000000000" pitchFamily="2" charset="2"/>
+              </a:rPr>
+              <a:t>cline </a:t>
+            </a:r>
+            <a:r>
+              <a:rPr lang="ko-KR" altLang="en-US" dirty="0">
+                <a:latin typeface="D2Coding" panose="020B0609020101020101" pitchFamily="49" charset="-127"/>
+                <a:ea typeface="D2Coding" panose="020B0609020101020101" pitchFamily="49" charset="-127"/>
+                <a:sym typeface="Wingdings" panose="05000000000000000000" pitchFamily="2" charset="2"/>
+              </a:rPr>
+              <a:t>설치</a:t>
+            </a:r>
+            <a:endParaRPr lang="en-US" altLang="ko-KR" dirty="0">
+              <a:latin typeface="D2Coding" panose="020B0609020101020101" pitchFamily="49" charset="-127"/>
+              <a:ea typeface="D2Coding" panose="020B0609020101020101" pitchFamily="49" charset="-127"/>
+              <a:sym typeface="Wingdings" panose="05000000000000000000" pitchFamily="2" charset="2"/>
+            </a:endParaRPr>
+          </a:p>
+          <a:p>
+            <a:pPr marL="342900" indent="-342900">
+              <a:lnSpc>
+                <a:spcPct val="150000"/>
+              </a:lnSpc>
+              <a:buFont typeface="+mj-lt"/>
+              <a:buAutoNum type="arabicPeriod"/>
+            </a:pPr>
+            <a:r>
+              <a:rPr lang="en-US" altLang="ko-KR" dirty="0">
+                <a:latin typeface="D2Coding" panose="020B0609020101020101" pitchFamily="49" charset="-127"/>
+                <a:ea typeface="D2Coding" panose="020B0609020101020101" pitchFamily="49" charset="-127"/>
+                <a:sym typeface="Wingdings" panose="05000000000000000000" pitchFamily="2" charset="2"/>
+              </a:rPr>
+              <a:t>Local</a:t>
+            </a:r>
+            <a:r>
+              <a:rPr lang="ko-KR" altLang="en-US" dirty="0">
+                <a:latin typeface="D2Coding" panose="020B0609020101020101" pitchFamily="49" charset="-127"/>
+                <a:ea typeface="D2Coding" panose="020B0609020101020101" pitchFamily="49" charset="-127"/>
+                <a:sym typeface="Wingdings" panose="05000000000000000000" pitchFamily="2" charset="2"/>
+              </a:rPr>
+              <a:t> </a:t>
+            </a:r>
+            <a:r>
+              <a:rPr lang="en-US" altLang="ko-KR" dirty="0">
+                <a:latin typeface="D2Coding" panose="020B0609020101020101" pitchFamily="49" charset="-127"/>
+                <a:ea typeface="D2Coding" panose="020B0609020101020101" pitchFamily="49" charset="-127"/>
+                <a:sym typeface="Wingdings" panose="05000000000000000000" pitchFamily="2" charset="2"/>
+              </a:rPr>
+              <a:t>n8n</a:t>
+            </a:r>
+            <a:r>
+              <a:rPr lang="ko-KR" altLang="en-US" dirty="0">
+                <a:latin typeface="D2Coding" panose="020B0609020101020101" pitchFamily="49" charset="-127"/>
+                <a:ea typeface="D2Coding" panose="020B0609020101020101" pitchFamily="49" charset="-127"/>
+                <a:sym typeface="Wingdings" panose="05000000000000000000" pitchFamily="2" charset="2"/>
+              </a:rPr>
+              <a:t> 에서 </a:t>
+            </a:r>
+            <a:r>
+              <a:rPr lang="en-US" altLang="ko-KR" dirty="0">
+                <a:latin typeface="D2Coding" panose="020B0609020101020101" pitchFamily="49" charset="-127"/>
+                <a:ea typeface="D2Coding" panose="020B0609020101020101" pitchFamily="49" charset="-127"/>
+                <a:sym typeface="Wingdings" panose="05000000000000000000" pitchFamily="2" charset="2"/>
+              </a:rPr>
+              <a:t>URL </a:t>
+            </a:r>
+            <a:r>
+              <a:rPr lang="ko-KR" altLang="en-US" dirty="0">
+                <a:latin typeface="D2Coding" panose="020B0609020101020101" pitchFamily="49" charset="-127"/>
+                <a:ea typeface="D2Coding" panose="020B0609020101020101" pitchFamily="49" charset="-127"/>
+                <a:sym typeface="Wingdings" panose="05000000000000000000" pitchFamily="2" charset="2"/>
+              </a:rPr>
+              <a:t>주소와 </a:t>
+            </a:r>
+            <a:r>
+              <a:rPr lang="en-US" altLang="ko-KR" dirty="0">
+                <a:latin typeface="D2Coding" panose="020B0609020101020101" pitchFamily="49" charset="-127"/>
+                <a:ea typeface="D2Coding" panose="020B0609020101020101" pitchFamily="49" charset="-127"/>
+                <a:sym typeface="Wingdings" panose="05000000000000000000" pitchFamily="2" charset="2"/>
+              </a:rPr>
+              <a:t>API </a:t>
+            </a:r>
+            <a:r>
+              <a:rPr lang="ko-KR" altLang="en-US" dirty="0">
+                <a:latin typeface="D2Coding" panose="020B0609020101020101" pitchFamily="49" charset="-127"/>
+                <a:ea typeface="D2Coding" panose="020B0609020101020101" pitchFamily="49" charset="-127"/>
+                <a:sym typeface="Wingdings" panose="05000000000000000000" pitchFamily="2" charset="2"/>
+              </a:rPr>
+              <a:t>키를 복사하기</a:t>
+            </a:r>
+            <a:endParaRPr lang="en-US" altLang="ko-KR" dirty="0">
+              <a:latin typeface="D2Coding" panose="020B0609020101020101" pitchFamily="49" charset="-127"/>
+              <a:ea typeface="D2Coding" panose="020B0609020101020101" pitchFamily="49" charset="-127"/>
+              <a:sym typeface="Wingdings" panose="05000000000000000000" pitchFamily="2" charset="2"/>
+            </a:endParaRPr>
+          </a:p>
+          <a:p>
+            <a:pPr marL="342900" indent="-342900">
+              <a:lnSpc>
+                <a:spcPct val="150000"/>
+              </a:lnSpc>
+              <a:buFont typeface="+mj-lt"/>
+              <a:buAutoNum type="arabicPeriod"/>
+            </a:pPr>
+            <a:r>
+              <a:rPr lang="en-US" altLang="ko-KR" dirty="0">
+                <a:latin typeface="D2Coding" panose="020B0609020101020101" pitchFamily="49" charset="-127"/>
+                <a:ea typeface="D2Coding" panose="020B0609020101020101" pitchFamily="49" charset="-127"/>
+              </a:rPr>
+              <a:t>Cline</a:t>
+            </a:r>
+            <a:r>
+              <a:rPr lang="ko-KR" altLang="en-US" dirty="0">
+                <a:latin typeface="D2Coding" panose="020B0609020101020101" pitchFamily="49" charset="-127"/>
+                <a:ea typeface="D2Coding" panose="020B0609020101020101" pitchFamily="49" charset="-127"/>
+              </a:rPr>
+              <a:t>에서 </a:t>
+            </a:r>
+            <a:r>
+              <a:rPr lang="en-US" altLang="ko-KR" dirty="0">
+                <a:latin typeface="D2Coding" panose="020B0609020101020101" pitchFamily="49" charset="-127"/>
+                <a:ea typeface="D2Coding" panose="020B0609020101020101" pitchFamily="49" charset="-127"/>
+              </a:rPr>
+              <a:t>n8n</a:t>
+            </a:r>
+            <a:r>
+              <a:rPr lang="ko-KR" altLang="en-US" dirty="0">
+                <a:latin typeface="D2Coding" panose="020B0609020101020101" pitchFamily="49" charset="-127"/>
+                <a:ea typeface="D2Coding" panose="020B0609020101020101" pitchFamily="49" charset="-127"/>
+              </a:rPr>
+              <a:t> </a:t>
+            </a:r>
+            <a:r>
+              <a:rPr lang="en-US" altLang="ko-KR" dirty="0">
+                <a:latin typeface="D2Coding" panose="020B0609020101020101" pitchFamily="49" charset="-127"/>
+                <a:ea typeface="D2Coding" panose="020B0609020101020101" pitchFamily="49" charset="-127"/>
+              </a:rPr>
+              <a:t>MCP</a:t>
+            </a:r>
+            <a:r>
+              <a:rPr lang="ko-KR" altLang="en-US" dirty="0">
+                <a:latin typeface="D2Coding" panose="020B0609020101020101" pitchFamily="49" charset="-127"/>
+                <a:ea typeface="D2Coding" panose="020B0609020101020101" pitchFamily="49" charset="-127"/>
+              </a:rPr>
+              <a:t> 서버 연결</a:t>
+            </a:r>
+            <a:r>
+              <a:rPr lang="en-US" altLang="ko-KR" dirty="0">
+                <a:latin typeface="D2Coding" panose="020B0609020101020101" pitchFamily="49" charset="-127"/>
+                <a:ea typeface="D2Coding" panose="020B0609020101020101" pitchFamily="49" charset="-127"/>
+              </a:rPr>
+              <a:t>(</a:t>
+            </a:r>
+            <a:r>
+              <a:rPr lang="en-US" altLang="ko-KR" dirty="0" err="1"/>
+              <a:t>cline_mcp_settings.json</a:t>
+            </a:r>
+            <a:r>
+              <a:rPr lang="en-US" altLang="ko-KR" dirty="0"/>
+              <a:t>)</a:t>
+            </a:r>
+          </a:p>
+          <a:p>
+            <a:pPr marL="342900" indent="-342900">
+              <a:lnSpc>
+                <a:spcPct val="150000"/>
+              </a:lnSpc>
+              <a:buFont typeface="+mj-lt"/>
+              <a:buAutoNum type="arabicPeriod"/>
+            </a:pPr>
+            <a:r>
+              <a:rPr lang="en-US" altLang="ko-KR" dirty="0"/>
+              <a:t>Prompt : </a:t>
+            </a:r>
+          </a:p>
+        </p:txBody>
+      </p:sp>
+      <p:pic>
+        <p:nvPicPr>
+          <p:cNvPr id="11" name="그림 10">
+            <a:extLst>
+              <a:ext uri="{FF2B5EF4-FFF2-40B4-BE49-F238E27FC236}">
+                <a16:creationId xmlns:a16="http://schemas.microsoft.com/office/drawing/2014/main" id="{E10C70F6-E1E3-8AB0-49C2-177A8137DC93}"/>
+              </a:ext>
+            </a:extLst>
+          </p:cNvPr>
+          <p:cNvPicPr>
+            <a:picLocks noChangeAspect="1"/>
+          </p:cNvPicPr>
+          <p:nvPr/>
+        </p:nvPicPr>
+        <p:blipFill>
+          <a:blip r:embed="rId2"/>
+          <a:stretch>
+            <a:fillRect/>
+          </a:stretch>
+        </p:blipFill>
+        <p:spPr>
+          <a:xfrm>
+            <a:off x="6725241" y="2339439"/>
+            <a:ext cx="5208630" cy="3611410"/>
+          </a:xfrm>
+          <a:prstGeom prst="rect">
+            <a:avLst/>
+          </a:prstGeom>
+        </p:spPr>
+      </p:pic>
+      <p:sp>
+        <p:nvSpPr>
+          <p:cNvPr id="13" name="TextBox 12">
+            <a:extLst>
+              <a:ext uri="{FF2B5EF4-FFF2-40B4-BE49-F238E27FC236}">
+                <a16:creationId xmlns:a16="http://schemas.microsoft.com/office/drawing/2014/main" id="{C1E72FFB-4C0B-0F25-E1B2-125863277F75}"/>
+              </a:ext>
+            </a:extLst>
+          </p:cNvPr>
+          <p:cNvSpPr txBox="1"/>
+          <p:nvPr/>
+        </p:nvSpPr>
+        <p:spPr>
+          <a:xfrm>
+            <a:off x="1796026" y="3706146"/>
+            <a:ext cx="4490474" cy="1077218"/>
+          </a:xfrm>
+          <a:prstGeom prst="rect">
+            <a:avLst/>
+          </a:prstGeom>
+          <a:noFill/>
+        </p:spPr>
+        <p:txBody>
+          <a:bodyPr wrap="square">
+            <a:spAutoFit/>
+          </a:bodyPr>
+          <a:lstStyle/>
+          <a:p>
+            <a:r>
+              <a:rPr lang="ko-KR" altLang="en-US" sz="1600" dirty="0">
+                <a:latin typeface="D2Coding" panose="020B0609020101020101" pitchFamily="49" charset="-127"/>
+                <a:ea typeface="D2Coding" panose="020B0609020101020101" pitchFamily="49" charset="-127"/>
+              </a:rPr>
+              <a:t>매일 아침 </a:t>
+            </a:r>
+            <a:r>
+              <a:rPr lang="en-US" altLang="ko-KR" sz="1600" dirty="0">
+                <a:latin typeface="D2Coding" panose="020B0609020101020101" pitchFamily="49" charset="-127"/>
+                <a:ea typeface="D2Coding" panose="020B0609020101020101" pitchFamily="49" charset="-127"/>
+              </a:rPr>
+              <a:t>9</a:t>
+            </a:r>
+            <a:r>
+              <a:rPr lang="ko-KR" altLang="en-US" sz="1600" dirty="0">
+                <a:latin typeface="D2Coding" panose="020B0609020101020101" pitchFamily="49" charset="-127"/>
+                <a:ea typeface="D2Coding" panose="020B0609020101020101" pitchFamily="49" charset="-127"/>
+              </a:rPr>
+              <a:t>시에 특정 </a:t>
+            </a:r>
+            <a:r>
+              <a:rPr lang="ko-KR" altLang="en-US" sz="1600" dirty="0" err="1">
+                <a:latin typeface="D2Coding" panose="020B0609020101020101" pitchFamily="49" charset="-127"/>
+                <a:ea typeface="D2Coding" panose="020B0609020101020101" pitchFamily="49" charset="-127"/>
+              </a:rPr>
+              <a:t>웹훅으로</a:t>
+            </a:r>
+            <a:r>
+              <a:rPr lang="ko-KR" altLang="en-US" sz="1600" dirty="0">
+                <a:latin typeface="D2Coding" panose="020B0609020101020101" pitchFamily="49" charset="-127"/>
+                <a:ea typeface="D2Coding" panose="020B0609020101020101" pitchFamily="49" charset="-127"/>
+              </a:rPr>
+              <a:t> 요청을 보내는 워크플로우를 만들고</a:t>
+            </a:r>
+            <a:r>
+              <a:rPr lang="en-US" altLang="ko-KR" sz="1600" dirty="0">
+                <a:latin typeface="D2Coding" panose="020B0609020101020101" pitchFamily="49" charset="-127"/>
+                <a:ea typeface="D2Coding" panose="020B0609020101020101" pitchFamily="49" charset="-127"/>
+              </a:rPr>
+              <a:t>, </a:t>
+            </a:r>
+            <a:r>
+              <a:rPr lang="ko-KR" altLang="en-US" sz="1600" dirty="0">
+                <a:latin typeface="D2Coding" panose="020B0609020101020101" pitchFamily="49" charset="-127"/>
+                <a:ea typeface="D2Coding" panose="020B0609020101020101" pitchFamily="49" charset="-127"/>
+              </a:rPr>
+              <a:t>내 로컬 </a:t>
+            </a:r>
+            <a:r>
+              <a:rPr lang="en-US" altLang="ko-KR" sz="1600" dirty="0">
+                <a:latin typeface="D2Coding" panose="020B0609020101020101" pitchFamily="49" charset="-127"/>
+                <a:ea typeface="D2Coding" panose="020B0609020101020101" pitchFamily="49" charset="-127"/>
+              </a:rPr>
+              <a:t>n8n</a:t>
+            </a:r>
+            <a:r>
+              <a:rPr lang="ko-KR" altLang="en-US" sz="1600" dirty="0">
+                <a:latin typeface="D2Coding" panose="020B0609020101020101" pitchFamily="49" charset="-127"/>
+                <a:ea typeface="D2Coding" panose="020B0609020101020101" pitchFamily="49" charset="-127"/>
+              </a:rPr>
+              <a:t>에 생성해 줘</a:t>
+            </a:r>
+            <a:r>
+              <a:rPr lang="en-US" altLang="ko-KR" sz="1600" dirty="0">
+                <a:latin typeface="D2Coding" panose="020B0609020101020101" pitchFamily="49" charset="-127"/>
+                <a:ea typeface="D2Coding" panose="020B0609020101020101" pitchFamily="49" charset="-127"/>
+              </a:rPr>
+              <a:t>." "</a:t>
+            </a:r>
+            <a:r>
+              <a:rPr lang="ko-KR" altLang="en-US" sz="1600" dirty="0">
+                <a:latin typeface="D2Coding" panose="020B0609020101020101" pitchFamily="49" charset="-127"/>
+                <a:ea typeface="D2Coding" panose="020B0609020101020101" pitchFamily="49" charset="-127"/>
+              </a:rPr>
+              <a:t>이 </a:t>
+            </a:r>
+            <a:r>
+              <a:rPr lang="en-US" altLang="ko-KR" sz="1600" dirty="0">
+                <a:latin typeface="D2Coding" panose="020B0609020101020101" pitchFamily="49" charset="-127"/>
+                <a:ea typeface="D2Coding" panose="020B0609020101020101" pitchFamily="49" charset="-127"/>
+              </a:rPr>
+              <a:t>JSON </a:t>
+            </a:r>
+            <a:r>
+              <a:rPr lang="ko-KR" altLang="en-US" sz="1600" dirty="0">
+                <a:latin typeface="D2Coding" panose="020B0609020101020101" pitchFamily="49" charset="-127"/>
+                <a:ea typeface="D2Coding" panose="020B0609020101020101" pitchFamily="49" charset="-127"/>
+              </a:rPr>
+              <a:t>워크플로우를 내 로컬 </a:t>
+            </a:r>
+            <a:r>
+              <a:rPr lang="en-US" altLang="ko-KR" sz="1600" dirty="0">
+                <a:latin typeface="D2Coding" panose="020B0609020101020101" pitchFamily="49" charset="-127"/>
+                <a:ea typeface="D2Coding" panose="020B0609020101020101" pitchFamily="49" charset="-127"/>
+              </a:rPr>
+              <a:t>n8n</a:t>
+            </a:r>
+            <a:r>
+              <a:rPr lang="ko-KR" altLang="en-US" sz="1600" dirty="0">
+                <a:latin typeface="D2Coding" panose="020B0609020101020101" pitchFamily="49" charset="-127"/>
+                <a:ea typeface="D2Coding" panose="020B0609020101020101" pitchFamily="49" charset="-127"/>
+              </a:rPr>
+              <a:t>에 임포트하고 실행해 줘</a:t>
+            </a:r>
+            <a:r>
+              <a:rPr lang="en-US" altLang="ko-KR" sz="1600" dirty="0">
+                <a:latin typeface="D2Coding" panose="020B0609020101020101" pitchFamily="49" charset="-127"/>
+                <a:ea typeface="D2Coding" panose="020B0609020101020101" pitchFamily="49" charset="-127"/>
+              </a:rPr>
+              <a:t>."</a:t>
+            </a:r>
+            <a:endParaRPr lang="ko-KR" altLang="en-US" sz="1600" dirty="0">
+              <a:latin typeface="D2Coding" panose="020B0609020101020101" pitchFamily="49" charset="-127"/>
+              <a:ea typeface="D2Coding" panose="020B0609020101020101" pitchFamily="49" charset="-127"/>
+            </a:endParaRPr>
+          </a:p>
+        </p:txBody>
+      </p:sp>
+    </p:spTree>
+    <p:extLst>
+      <p:ext uri="{BB962C8B-B14F-4D97-AF65-F5344CB8AC3E}">
+        <p14:creationId xmlns:p14="http://schemas.microsoft.com/office/powerpoint/2010/main" val="1830209201"/>
+      </p:ext>
+    </p:extLst>
+  </p:cSld>
+  <p:clrMapOvr>
+    <a:masterClrMapping/>
+  </p:clrMapOvr>
+</p:sld>
+</file>
+
+<file path=ppt/slides/slide25.xml><?xml version="1.0" encoding="utf-8"?>
+<p:sld xmlns:a="http://schemas.openxmlformats.org/drawingml/2006/main" xmlns:r="http://schemas.openxmlformats.org/officeDocument/2006/relationships" xmlns:p="http://schemas.openxmlformats.org/presentationml/2006/main">
+  <p:cSld>
+    <p:spTree>
+      <p:nvGrpSpPr>
+        <p:cNvPr id="1" name="">
+          <a:extLst>
+            <a:ext uri="{FF2B5EF4-FFF2-40B4-BE49-F238E27FC236}">
+              <a16:creationId xmlns:a16="http://schemas.microsoft.com/office/drawing/2014/main" id="{0C490780-D962-F205-381A-9EC36E3B81A6}"/>
+            </a:ext>
+          </a:extLst>
+        </p:cNvPr>
+        <p:cNvGrpSpPr/>
+        <p:nvPr/>
+      </p:nvGrpSpPr>
+      <p:grpSpPr>
+        <a:xfrm>
+          <a:off x="0" y="0"/>
+          <a:ext cx="0" cy="0"/>
+          <a:chOff x="0" y="0"/>
+          <a:chExt cx="0" cy="0"/>
+        </a:xfrm>
+      </p:grpSpPr>
+      <p:sp>
+        <p:nvSpPr>
+          <p:cNvPr id="4" name="슬라이드 번호 개체 틀 3">
+            <a:extLst>
+              <a:ext uri="{FF2B5EF4-FFF2-40B4-BE49-F238E27FC236}">
+                <a16:creationId xmlns:a16="http://schemas.microsoft.com/office/drawing/2014/main" id="{1D69506E-9BEB-DD86-9FF9-9D81D3E824E7}"/>
+              </a:ext>
+            </a:extLst>
+          </p:cNvPr>
+          <p:cNvSpPr>
+            <a:spLocks noGrp="1"/>
+          </p:cNvSpPr>
+          <p:nvPr>
+            <p:ph type="sldNum" sz="quarter" idx="12"/>
+          </p:nvPr>
+        </p:nvSpPr>
+        <p:spPr>
+          <a:xfrm>
+            <a:off x="10514011" y="6036261"/>
+            <a:ext cx="753545" cy="365125"/>
+          </a:xfrm>
+        </p:spPr>
+        <p:txBody>
+          <a:bodyPr/>
+          <a:lstStyle/>
+          <a:p>
+            <a:fld id="{D57F1E4F-1CFF-5643-939E-217C01CDF565}" type="slidenum">
+              <a:rPr lang="en-US" smtClean="0"/>
+              <a:pPr/>
+              <a:t>25</a:t>
+            </a:fld>
+            <a:endParaRPr lang="en-US" dirty="0"/>
+          </a:p>
+        </p:txBody>
+      </p:sp>
+      <p:pic>
+        <p:nvPicPr>
+          <p:cNvPr id="7" name="그림 6">
+            <a:extLst>
+              <a:ext uri="{FF2B5EF4-FFF2-40B4-BE49-F238E27FC236}">
+                <a16:creationId xmlns:a16="http://schemas.microsoft.com/office/drawing/2014/main" id="{7C785D48-E001-C56F-D44C-7E2D938F8C7F}"/>
+              </a:ext>
+            </a:extLst>
+          </p:cNvPr>
+          <p:cNvPicPr>
+            <a:picLocks noChangeAspect="1"/>
+          </p:cNvPicPr>
+          <p:nvPr/>
+        </p:nvPicPr>
+        <p:blipFill>
+          <a:blip r:embed="rId2"/>
+          <a:stretch>
+            <a:fillRect/>
+          </a:stretch>
+        </p:blipFill>
+        <p:spPr>
+          <a:xfrm>
+            <a:off x="2395035" y="1419811"/>
+            <a:ext cx="3965233" cy="4981575"/>
+          </a:xfrm>
+          <a:prstGeom prst="rect">
+            <a:avLst/>
+          </a:prstGeom>
+        </p:spPr>
+      </p:pic>
+      <p:sp>
+        <p:nvSpPr>
+          <p:cNvPr id="9" name="제목 1">
+            <a:extLst>
+              <a:ext uri="{FF2B5EF4-FFF2-40B4-BE49-F238E27FC236}">
+                <a16:creationId xmlns:a16="http://schemas.microsoft.com/office/drawing/2014/main" id="{260178FD-69B6-47EA-0380-87D02BE4066A}"/>
+              </a:ext>
+            </a:extLst>
+          </p:cNvPr>
+          <p:cNvSpPr txBox="1">
+            <a:spLocks/>
+          </p:cNvSpPr>
+          <p:nvPr/>
+        </p:nvSpPr>
+        <p:spPr>
+          <a:xfrm>
+            <a:off x="475645" y="481983"/>
+            <a:ext cx="10353762" cy="766439"/>
+          </a:xfrm>
+          <a:prstGeom prst="rect">
+            <a:avLst/>
+          </a:prstGeom>
+        </p:spPr>
+        <p:txBody>
+          <a:bodyPr vert="horz" lIns="91440" tIns="45720" rIns="91440" bIns="45720" rtlCol="0" anchor="ctr">
+            <a:normAutofit/>
+          </a:bodyPr>
+          <a:lstStyle>
+            <a:lvl1pPr algn="ctr" defTabSz="914400" rtl="0" eaLnBrk="1" latinLnBrk="1" hangingPunct="1">
+              <a:lnSpc>
+                <a:spcPct val="90000"/>
+              </a:lnSpc>
+              <a:spcBef>
+                <a:spcPct val="0"/>
+              </a:spcBef>
+              <a:buNone/>
+              <a:defRPr sz="3200" kern="1200" cap="all" baseline="0">
+                <a:solidFill>
+                  <a:schemeClr val="tx1"/>
+                </a:solidFill>
+                <a:effectLst/>
+                <a:latin typeface="Batang" panose="02030600000101010101" pitchFamily="18" charset="-127"/>
+                <a:ea typeface="Batang" panose="02030600000101010101" pitchFamily="18" charset="-127"/>
+                <a:cs typeface="+mj-cs"/>
+              </a:defRPr>
+            </a:lvl1pPr>
+          </a:lstStyle>
+          <a:p>
+            <a:pPr algn="l"/>
+            <a:r>
+              <a:rPr lang="en-US" altLang="ko-KR" sz="2800" cap="none" dirty="0">
+                <a:solidFill>
+                  <a:schemeClr val="bg2">
+                    <a:lumMod val="25000"/>
+                  </a:schemeClr>
+                </a:solidFill>
+                <a:latin typeface="D2Coding" panose="020B0609020101020101" pitchFamily="49" charset="-127"/>
+                <a:ea typeface="D2Coding" panose="020B0609020101020101" pitchFamily="49" charset="-127"/>
+                <a:cs typeface="Segoe UI Light" panose="020B0502040204020203" pitchFamily="34" charset="0"/>
+              </a:rPr>
+              <a:t>n8n dances with cline</a:t>
+            </a:r>
+            <a:endParaRPr lang="ko-KR" altLang="en-US" sz="2800" cap="none" dirty="0">
+              <a:solidFill>
+                <a:schemeClr val="bg2">
+                  <a:lumMod val="25000"/>
+                </a:schemeClr>
+              </a:solidFill>
+              <a:latin typeface="D2Coding" panose="020B0609020101020101" pitchFamily="49" charset="-127"/>
+              <a:ea typeface="D2Coding" panose="020B0609020101020101" pitchFamily="49" charset="-127"/>
+              <a:cs typeface="Segoe UI Light" panose="020B0502040204020203" pitchFamily="34" charset="0"/>
+            </a:endParaRPr>
+          </a:p>
+        </p:txBody>
+      </p:sp>
+    </p:spTree>
+    <p:extLst>
+      <p:ext uri="{BB962C8B-B14F-4D97-AF65-F5344CB8AC3E}">
+        <p14:creationId xmlns:p14="http://schemas.microsoft.com/office/powerpoint/2010/main" val="2376038903"/>
       </p:ext>
     </p:extLst>
   </p:cSld>
@@ -5273,6 +10501,1231 @@
         <p:cNvPr id="1" name="">
           <a:extLst>
             <a:ext uri="{FF2B5EF4-FFF2-40B4-BE49-F238E27FC236}">
+              <a16:creationId xmlns:a16="http://schemas.microsoft.com/office/drawing/2014/main" id="{08BA7906-8422-75FB-B686-8A4918F17B1E}"/>
+            </a:ext>
+          </a:extLst>
+        </p:cNvPr>
+        <p:cNvGrpSpPr/>
+        <p:nvPr/>
+      </p:nvGrpSpPr>
+      <p:grpSpPr>
+        <a:xfrm>
+          <a:off x="0" y="0"/>
+          <a:ext cx="0" cy="0"/>
+          <a:chOff x="0" y="0"/>
+          <a:chExt cx="0" cy="0"/>
+        </a:xfrm>
+      </p:grpSpPr>
+      <p:sp>
+        <p:nvSpPr>
+          <p:cNvPr id="4" name="슬라이드 번호 개체 틀 3">
+            <a:extLst>
+              <a:ext uri="{FF2B5EF4-FFF2-40B4-BE49-F238E27FC236}">
+                <a16:creationId xmlns:a16="http://schemas.microsoft.com/office/drawing/2014/main" id="{BBD60E6B-F2EC-3E3D-8197-E2F168C36222}"/>
+              </a:ext>
+            </a:extLst>
+          </p:cNvPr>
+          <p:cNvSpPr>
+            <a:spLocks noGrp="1"/>
+          </p:cNvSpPr>
+          <p:nvPr>
+            <p:ph type="sldNum" sz="quarter" idx="12"/>
+          </p:nvPr>
+        </p:nvSpPr>
+        <p:spPr>
+          <a:xfrm>
+            <a:off x="10514011" y="6036261"/>
+            <a:ext cx="753545" cy="365125"/>
+          </a:xfrm>
+        </p:spPr>
+        <p:txBody>
+          <a:bodyPr/>
+          <a:lstStyle/>
+          <a:p>
+            <a:fld id="{D57F1E4F-1CFF-5643-939E-217C01CDF565}" type="slidenum">
+              <a:rPr lang="en-US" smtClean="0"/>
+              <a:pPr/>
+              <a:t>5</a:t>
+            </a:fld>
+            <a:endParaRPr lang="en-US" dirty="0"/>
+          </a:p>
+        </p:txBody>
+      </p:sp>
+      <p:sp>
+        <p:nvSpPr>
+          <p:cNvPr id="3" name="제목 1">
+            <a:extLst>
+              <a:ext uri="{FF2B5EF4-FFF2-40B4-BE49-F238E27FC236}">
+                <a16:creationId xmlns:a16="http://schemas.microsoft.com/office/drawing/2014/main" id="{37114697-0109-DBB2-4517-DF6A82EC7BFA}"/>
+              </a:ext>
+            </a:extLst>
+          </p:cNvPr>
+          <p:cNvSpPr txBox="1">
+            <a:spLocks/>
+          </p:cNvSpPr>
+          <p:nvPr/>
+        </p:nvSpPr>
+        <p:spPr>
+          <a:xfrm>
+            <a:off x="475645" y="481983"/>
+            <a:ext cx="10353762" cy="766439"/>
+          </a:xfrm>
+          <a:prstGeom prst="rect">
+            <a:avLst/>
+          </a:prstGeom>
+        </p:spPr>
+        <p:txBody>
+          <a:bodyPr vert="horz" lIns="91440" tIns="45720" rIns="91440" bIns="45720" rtlCol="0" anchor="ctr">
+            <a:normAutofit/>
+          </a:bodyPr>
+          <a:lstStyle>
+            <a:lvl1pPr algn="ctr" defTabSz="914400" rtl="0" eaLnBrk="1" latinLnBrk="1" hangingPunct="1">
+              <a:lnSpc>
+                <a:spcPct val="90000"/>
+              </a:lnSpc>
+              <a:spcBef>
+                <a:spcPct val="0"/>
+              </a:spcBef>
+              <a:buNone/>
+              <a:defRPr sz="3200" kern="1200" cap="all" baseline="0">
+                <a:solidFill>
+                  <a:schemeClr val="tx1"/>
+                </a:solidFill>
+                <a:effectLst/>
+                <a:latin typeface="Batang" panose="02030600000101010101" pitchFamily="18" charset="-127"/>
+                <a:ea typeface="Batang" panose="02030600000101010101" pitchFamily="18" charset="-127"/>
+                <a:cs typeface="+mj-cs"/>
+              </a:defRPr>
+            </a:lvl1pPr>
+          </a:lstStyle>
+          <a:p>
+            <a:pPr algn="l"/>
+            <a:r>
+              <a:rPr lang="en-US" altLang="ko-KR" sz="2800" b="1" cap="none" dirty="0">
+                <a:latin typeface="Lora" pitchFamily="2" charset="0"/>
+              </a:rPr>
+              <a:t>Core concept of Automation</a:t>
+            </a:r>
+            <a:endParaRPr lang="ko-KR" altLang="ko-KR" sz="2800" b="1" cap="none" dirty="0">
+              <a:latin typeface="Lora" pitchFamily="2" charset="0"/>
+            </a:endParaRPr>
+          </a:p>
+        </p:txBody>
+      </p:sp>
+      <p:sp>
+        <p:nvSpPr>
+          <p:cNvPr id="5" name="TextBox 4">
+            <a:extLst>
+              <a:ext uri="{FF2B5EF4-FFF2-40B4-BE49-F238E27FC236}">
+                <a16:creationId xmlns:a16="http://schemas.microsoft.com/office/drawing/2014/main" id="{A211F340-3B1E-6BAA-8FFB-064B9D23B4CE}"/>
+              </a:ext>
+            </a:extLst>
+          </p:cNvPr>
+          <p:cNvSpPr txBox="1"/>
+          <p:nvPr/>
+        </p:nvSpPr>
+        <p:spPr>
+          <a:xfrm>
+            <a:off x="751955" y="1718786"/>
+            <a:ext cx="10515601" cy="2790187"/>
+          </a:xfrm>
+          <a:prstGeom prst="rect">
+            <a:avLst/>
+          </a:prstGeom>
+          <a:noFill/>
+        </p:spPr>
+        <p:txBody>
+          <a:bodyPr wrap="square">
+            <a:spAutoFit/>
+          </a:bodyPr>
+          <a:lstStyle/>
+          <a:p>
+            <a:pPr marL="342900" indent="-342900">
+              <a:lnSpc>
+                <a:spcPct val="150000"/>
+              </a:lnSpc>
+              <a:buFont typeface="Wingdings" panose="05000000000000000000" pitchFamily="2" charset="2"/>
+              <a:buChar char="v"/>
+            </a:pPr>
+            <a:r>
+              <a:rPr lang="en-US" altLang="ko-KR" sz="2000" dirty="0">
+                <a:latin typeface="MS Gothic" panose="020B0609070205080204" pitchFamily="49" charset="-128"/>
+                <a:ea typeface="D2Coding" panose="020B0609020101020101" pitchFamily="49" charset="-127"/>
+              </a:rPr>
+              <a:t>Trigger : what starts an automation</a:t>
+            </a:r>
+          </a:p>
+          <a:p>
+            <a:pPr marL="342900" indent="-342900">
+              <a:lnSpc>
+                <a:spcPct val="150000"/>
+              </a:lnSpc>
+              <a:buFont typeface="Wingdings" panose="05000000000000000000" pitchFamily="2" charset="2"/>
+              <a:buChar char="v"/>
+            </a:pPr>
+            <a:r>
+              <a:rPr lang="en-US" altLang="ko-KR" sz="2000" dirty="0">
+                <a:latin typeface="MS Gothic" panose="020B0609070205080204" pitchFamily="49" charset="-128"/>
+                <a:ea typeface="D2Coding" panose="020B0609020101020101" pitchFamily="49" charset="-127"/>
+              </a:rPr>
+              <a:t>Filter : to allow or block certain types of data from following a path based on certain conditions. </a:t>
+            </a:r>
+          </a:p>
+          <a:p>
+            <a:pPr marL="342900" indent="-342900">
+              <a:lnSpc>
+                <a:spcPct val="150000"/>
+              </a:lnSpc>
+              <a:buFont typeface="Wingdings" panose="05000000000000000000" pitchFamily="2" charset="2"/>
+              <a:buChar char="v"/>
+            </a:pPr>
+            <a:r>
+              <a:rPr lang="en-US" altLang="ko-KR" sz="2000" dirty="0">
+                <a:latin typeface="MS Gothic" panose="020B0609070205080204" pitchFamily="49" charset="-128"/>
+                <a:ea typeface="D2Coding" panose="020B0609020101020101" pitchFamily="49" charset="-127"/>
+              </a:rPr>
+              <a:t>Actions (App) : allow you to interact with internal or external applications.</a:t>
+            </a:r>
+          </a:p>
+          <a:p>
+            <a:pPr marL="342900" indent="-342900">
+              <a:lnSpc>
+                <a:spcPct val="150000"/>
+              </a:lnSpc>
+              <a:buFont typeface="Wingdings" panose="05000000000000000000" pitchFamily="2" charset="2"/>
+              <a:buChar char="v"/>
+            </a:pPr>
+            <a:endParaRPr lang="ko-KR" altLang="en-US" sz="2000" dirty="0">
+              <a:latin typeface="MS Gothic" panose="020B0609070205080204" pitchFamily="49" charset="-128"/>
+              <a:ea typeface="D2Coding" panose="020B0609020101020101" pitchFamily="49" charset="-127"/>
+            </a:endParaRPr>
+          </a:p>
+          <a:p>
+            <a:pPr marL="342900" indent="-342900">
+              <a:lnSpc>
+                <a:spcPct val="150000"/>
+              </a:lnSpc>
+              <a:buFont typeface="Wingdings" panose="05000000000000000000" pitchFamily="2" charset="2"/>
+              <a:buChar char="v"/>
+            </a:pPr>
+            <a:endParaRPr lang="ko-KR" altLang="en-US" sz="2000" dirty="0">
+              <a:latin typeface="MS Gothic" panose="020B0609070205080204" pitchFamily="49" charset="-128"/>
+              <a:ea typeface="D2Coding" panose="020B0609020101020101" pitchFamily="49" charset="-127"/>
+            </a:endParaRPr>
+          </a:p>
+        </p:txBody>
+      </p:sp>
+    </p:spTree>
+    <p:extLst>
+      <p:ext uri="{BB962C8B-B14F-4D97-AF65-F5344CB8AC3E}">
+        <p14:creationId xmlns:p14="http://schemas.microsoft.com/office/powerpoint/2010/main" val="4178908082"/>
+      </p:ext>
+    </p:extLst>
+  </p:cSld>
+  <p:clrMapOvr>
+    <a:masterClrMapping/>
+  </p:clrMapOvr>
+</p:sld>
+</file>
+
+<file path=ppt/slides/slide6.xml><?xml version="1.0" encoding="utf-8"?>
+<p:sld xmlns:a="http://schemas.openxmlformats.org/drawingml/2006/main" xmlns:r="http://schemas.openxmlformats.org/officeDocument/2006/relationships" xmlns:p="http://schemas.openxmlformats.org/presentationml/2006/main">
+  <p:cSld>
+    <p:spTree>
+      <p:nvGrpSpPr>
+        <p:cNvPr id="1" name="">
+          <a:extLst>
+            <a:ext uri="{FF2B5EF4-FFF2-40B4-BE49-F238E27FC236}">
+              <a16:creationId xmlns:a16="http://schemas.microsoft.com/office/drawing/2014/main" id="{8FAF90BD-0B46-D0D6-7007-8D2D1A9A3223}"/>
+            </a:ext>
+          </a:extLst>
+        </p:cNvPr>
+        <p:cNvGrpSpPr/>
+        <p:nvPr/>
+      </p:nvGrpSpPr>
+      <p:grpSpPr>
+        <a:xfrm>
+          <a:off x="0" y="0"/>
+          <a:ext cx="0" cy="0"/>
+          <a:chOff x="0" y="0"/>
+          <a:chExt cx="0" cy="0"/>
+        </a:xfrm>
+      </p:grpSpPr>
+      <p:sp>
+        <p:nvSpPr>
+          <p:cNvPr id="4" name="슬라이드 번호 개체 틀 3">
+            <a:extLst>
+              <a:ext uri="{FF2B5EF4-FFF2-40B4-BE49-F238E27FC236}">
+                <a16:creationId xmlns:a16="http://schemas.microsoft.com/office/drawing/2014/main" id="{CEEC3FF6-2F84-C946-93A5-E51AE4A97676}"/>
+              </a:ext>
+            </a:extLst>
+          </p:cNvPr>
+          <p:cNvSpPr>
+            <a:spLocks noGrp="1"/>
+          </p:cNvSpPr>
+          <p:nvPr>
+            <p:ph type="sldNum" sz="quarter" idx="12"/>
+          </p:nvPr>
+        </p:nvSpPr>
+        <p:spPr>
+          <a:xfrm>
+            <a:off x="10514011" y="6036261"/>
+            <a:ext cx="753545" cy="365125"/>
+          </a:xfrm>
+        </p:spPr>
+        <p:txBody>
+          <a:bodyPr/>
+          <a:lstStyle/>
+          <a:p>
+            <a:fld id="{D57F1E4F-1CFF-5643-939E-217C01CDF565}" type="slidenum">
+              <a:rPr lang="en-US" smtClean="0"/>
+              <a:pPr/>
+              <a:t>6</a:t>
+            </a:fld>
+            <a:endParaRPr lang="en-US" dirty="0"/>
+          </a:p>
+        </p:txBody>
+      </p:sp>
+      <p:sp>
+        <p:nvSpPr>
+          <p:cNvPr id="3" name="제목 1">
+            <a:extLst>
+              <a:ext uri="{FF2B5EF4-FFF2-40B4-BE49-F238E27FC236}">
+                <a16:creationId xmlns:a16="http://schemas.microsoft.com/office/drawing/2014/main" id="{0CB5E933-0C3E-C5BC-19F6-59B973129D4D}"/>
+              </a:ext>
+            </a:extLst>
+          </p:cNvPr>
+          <p:cNvSpPr txBox="1">
+            <a:spLocks/>
+          </p:cNvSpPr>
+          <p:nvPr/>
+        </p:nvSpPr>
+        <p:spPr>
+          <a:xfrm>
+            <a:off x="475645" y="481983"/>
+            <a:ext cx="10353762" cy="766439"/>
+          </a:xfrm>
+          <a:prstGeom prst="rect">
+            <a:avLst/>
+          </a:prstGeom>
+        </p:spPr>
+        <p:txBody>
+          <a:bodyPr vert="horz" lIns="91440" tIns="45720" rIns="91440" bIns="45720" rtlCol="0" anchor="ctr">
+            <a:normAutofit/>
+          </a:bodyPr>
+          <a:lstStyle>
+            <a:lvl1pPr algn="ctr" defTabSz="914400" rtl="0" eaLnBrk="1" latinLnBrk="1" hangingPunct="1">
+              <a:lnSpc>
+                <a:spcPct val="90000"/>
+              </a:lnSpc>
+              <a:spcBef>
+                <a:spcPct val="0"/>
+              </a:spcBef>
+              <a:buNone/>
+              <a:defRPr sz="3200" kern="1200" cap="all" baseline="0">
+                <a:solidFill>
+                  <a:schemeClr val="tx1"/>
+                </a:solidFill>
+                <a:effectLst/>
+                <a:latin typeface="Batang" panose="02030600000101010101" pitchFamily="18" charset="-127"/>
+                <a:ea typeface="Batang" panose="02030600000101010101" pitchFamily="18" charset="-127"/>
+                <a:cs typeface="+mj-cs"/>
+              </a:defRPr>
+            </a:lvl1pPr>
+          </a:lstStyle>
+          <a:p>
+            <a:pPr algn="l"/>
+            <a:r>
+              <a:rPr lang="en-US" altLang="ko-KR" sz="2800" b="1" cap="none" dirty="0">
+                <a:latin typeface="Lora" pitchFamily="2" charset="0"/>
+              </a:rPr>
+              <a:t>What is a workflow</a:t>
+            </a:r>
+            <a:endParaRPr lang="ko-KR" altLang="ko-KR" sz="2800" b="1" cap="none" dirty="0">
+              <a:latin typeface="Lora" pitchFamily="2" charset="0"/>
+            </a:endParaRPr>
+          </a:p>
+        </p:txBody>
+      </p:sp>
+      <p:sp>
+        <p:nvSpPr>
+          <p:cNvPr id="15" name="사각형: 둥근 모서리 14">
+            <a:extLst>
+              <a:ext uri="{FF2B5EF4-FFF2-40B4-BE49-F238E27FC236}">
+                <a16:creationId xmlns:a16="http://schemas.microsoft.com/office/drawing/2014/main" id="{DEBD1361-E6D8-F37F-7847-3596F9C8C1CB}"/>
+              </a:ext>
+            </a:extLst>
+          </p:cNvPr>
+          <p:cNvSpPr/>
+          <p:nvPr/>
+        </p:nvSpPr>
+        <p:spPr>
+          <a:xfrm>
+            <a:off x="1181100" y="3045780"/>
+            <a:ext cx="1943100" cy="766439"/>
+          </a:xfrm>
+          <a:prstGeom prst="roundRect">
+            <a:avLst/>
+          </a:prstGeom>
+          <a:solidFill>
+            <a:schemeClr val="accent6"/>
+          </a:solidFill>
+        </p:spPr>
+        <p:style>
+          <a:lnRef idx="2">
+            <a:schemeClr val="accent1">
+              <a:shade val="15000"/>
+            </a:schemeClr>
+          </a:lnRef>
+          <a:fillRef idx="1">
+            <a:schemeClr val="accent1"/>
+          </a:fillRef>
+          <a:effectRef idx="0">
+            <a:schemeClr val="accent1"/>
+          </a:effectRef>
+          <a:fontRef idx="minor">
+            <a:schemeClr val="lt1"/>
+          </a:fontRef>
+        </p:style>
+        <p:txBody>
+          <a:bodyPr rtlCol="0" anchor="ctr"/>
+          <a:lstStyle/>
+          <a:p>
+            <a:pPr algn="ctr"/>
+            <a:endParaRPr lang="ko-KR" altLang="en-US"/>
+          </a:p>
+        </p:txBody>
+      </p:sp>
+      <p:sp>
+        <p:nvSpPr>
+          <p:cNvPr id="16" name="사각형: 둥근 모서리 15">
+            <a:extLst>
+              <a:ext uri="{FF2B5EF4-FFF2-40B4-BE49-F238E27FC236}">
+                <a16:creationId xmlns:a16="http://schemas.microsoft.com/office/drawing/2014/main" id="{F476719A-2740-60E0-0EE8-A30122FF98CE}"/>
+              </a:ext>
+            </a:extLst>
+          </p:cNvPr>
+          <p:cNvSpPr/>
+          <p:nvPr/>
+        </p:nvSpPr>
+        <p:spPr>
+          <a:xfrm>
+            <a:off x="4418408" y="2496659"/>
+            <a:ext cx="2858295" cy="1864681"/>
+          </a:xfrm>
+          <a:prstGeom prst="roundRect">
+            <a:avLst/>
+          </a:prstGeom>
+          <a:solidFill>
+            <a:srgbClr val="FFC000"/>
+          </a:solidFill>
+        </p:spPr>
+        <p:style>
+          <a:lnRef idx="2">
+            <a:schemeClr val="accent1">
+              <a:shade val="15000"/>
+            </a:schemeClr>
+          </a:lnRef>
+          <a:fillRef idx="1">
+            <a:schemeClr val="accent1"/>
+          </a:fillRef>
+          <a:effectRef idx="0">
+            <a:schemeClr val="accent1"/>
+          </a:effectRef>
+          <a:fontRef idx="minor">
+            <a:schemeClr val="lt1"/>
+          </a:fontRef>
+        </p:style>
+        <p:txBody>
+          <a:bodyPr rtlCol="0" anchor="ctr"/>
+          <a:lstStyle/>
+          <a:p>
+            <a:pPr algn="ctr"/>
+            <a:endParaRPr lang="ko-KR" altLang="en-US"/>
+          </a:p>
+        </p:txBody>
+      </p:sp>
+      <p:sp>
+        <p:nvSpPr>
+          <p:cNvPr id="17" name="사각형: 둥근 모서리 16">
+            <a:extLst>
+              <a:ext uri="{FF2B5EF4-FFF2-40B4-BE49-F238E27FC236}">
+                <a16:creationId xmlns:a16="http://schemas.microsoft.com/office/drawing/2014/main" id="{181950A9-9B8E-CA1C-5F23-6339A6DBBE98}"/>
+              </a:ext>
+            </a:extLst>
+          </p:cNvPr>
+          <p:cNvSpPr/>
+          <p:nvPr/>
+        </p:nvSpPr>
+        <p:spPr>
+          <a:xfrm>
+            <a:off x="8570911" y="3045780"/>
+            <a:ext cx="1943100" cy="766439"/>
+          </a:xfrm>
+          <a:prstGeom prst="roundRect">
+            <a:avLst/>
+          </a:prstGeom>
+        </p:spPr>
+        <p:style>
+          <a:lnRef idx="2">
+            <a:schemeClr val="accent1">
+              <a:shade val="15000"/>
+            </a:schemeClr>
+          </a:lnRef>
+          <a:fillRef idx="1">
+            <a:schemeClr val="accent1"/>
+          </a:fillRef>
+          <a:effectRef idx="0">
+            <a:schemeClr val="accent1"/>
+          </a:effectRef>
+          <a:fontRef idx="minor">
+            <a:schemeClr val="lt1"/>
+          </a:fontRef>
+        </p:style>
+        <p:txBody>
+          <a:bodyPr rtlCol="0" anchor="ctr"/>
+          <a:lstStyle/>
+          <a:p>
+            <a:pPr algn="ctr"/>
+            <a:endParaRPr lang="ko-KR" altLang="en-US" dirty="0"/>
+          </a:p>
+        </p:txBody>
+      </p:sp>
+      <p:cxnSp>
+        <p:nvCxnSpPr>
+          <p:cNvPr id="19" name="직선 화살표 연결선 18">
+            <a:extLst>
+              <a:ext uri="{FF2B5EF4-FFF2-40B4-BE49-F238E27FC236}">
+                <a16:creationId xmlns:a16="http://schemas.microsoft.com/office/drawing/2014/main" id="{1085A7EF-645D-1462-E30A-334FF6445118}"/>
+              </a:ext>
+            </a:extLst>
+          </p:cNvPr>
+          <p:cNvCxnSpPr>
+            <a:cxnSpLocks/>
+          </p:cNvCxnSpPr>
+          <p:nvPr/>
+        </p:nvCxnSpPr>
+        <p:spPr>
+          <a:xfrm>
+            <a:off x="3124200" y="3415822"/>
+            <a:ext cx="1294208" cy="0"/>
+          </a:xfrm>
+          <a:prstGeom prst="straightConnector1">
+            <a:avLst/>
+          </a:prstGeom>
+          <a:ln>
+            <a:tailEnd type="triangle"/>
+          </a:ln>
+        </p:spPr>
+        <p:style>
+          <a:lnRef idx="1">
+            <a:schemeClr val="accent1"/>
+          </a:lnRef>
+          <a:fillRef idx="0">
+            <a:schemeClr val="accent1"/>
+          </a:fillRef>
+          <a:effectRef idx="0">
+            <a:schemeClr val="accent1"/>
+          </a:effectRef>
+          <a:fontRef idx="minor">
+            <a:schemeClr val="tx1"/>
+          </a:fontRef>
+        </p:style>
+      </p:cxnSp>
+      <p:cxnSp>
+        <p:nvCxnSpPr>
+          <p:cNvPr id="20" name="직선 화살표 연결선 19">
+            <a:extLst>
+              <a:ext uri="{FF2B5EF4-FFF2-40B4-BE49-F238E27FC236}">
+                <a16:creationId xmlns:a16="http://schemas.microsoft.com/office/drawing/2014/main" id="{6F26E8E8-3AE7-E2B2-8810-782ECCD6FFC8}"/>
+              </a:ext>
+            </a:extLst>
+          </p:cNvPr>
+          <p:cNvCxnSpPr>
+            <a:cxnSpLocks/>
+          </p:cNvCxnSpPr>
+          <p:nvPr/>
+        </p:nvCxnSpPr>
+        <p:spPr>
+          <a:xfrm>
+            <a:off x="7276703" y="3415822"/>
+            <a:ext cx="1294208" cy="0"/>
+          </a:xfrm>
+          <a:prstGeom prst="straightConnector1">
+            <a:avLst/>
+          </a:prstGeom>
+          <a:ln>
+            <a:tailEnd type="triangle"/>
+          </a:ln>
+        </p:spPr>
+        <p:style>
+          <a:lnRef idx="1">
+            <a:schemeClr val="accent1"/>
+          </a:lnRef>
+          <a:fillRef idx="0">
+            <a:schemeClr val="accent1"/>
+          </a:fillRef>
+          <a:effectRef idx="0">
+            <a:schemeClr val="accent1"/>
+          </a:effectRef>
+          <a:fontRef idx="minor">
+            <a:schemeClr val="tx1"/>
+          </a:fontRef>
+        </p:style>
+      </p:cxnSp>
+      <p:sp>
+        <p:nvSpPr>
+          <p:cNvPr id="24" name="TextBox 23">
+            <a:extLst>
+              <a:ext uri="{FF2B5EF4-FFF2-40B4-BE49-F238E27FC236}">
+                <a16:creationId xmlns:a16="http://schemas.microsoft.com/office/drawing/2014/main" id="{8EE6FB3E-90CB-9372-4351-1825A3EF9036}"/>
+              </a:ext>
+            </a:extLst>
+          </p:cNvPr>
+          <p:cNvSpPr txBox="1"/>
+          <p:nvPr/>
+        </p:nvSpPr>
+        <p:spPr>
+          <a:xfrm>
+            <a:off x="1560113" y="3253085"/>
+            <a:ext cx="2743200" cy="1754326"/>
+          </a:xfrm>
+          <a:prstGeom prst="rect">
+            <a:avLst/>
+          </a:prstGeom>
+          <a:noFill/>
+        </p:spPr>
+        <p:txBody>
+          <a:bodyPr wrap="square">
+            <a:spAutoFit/>
+          </a:bodyPr>
+          <a:lstStyle/>
+          <a:p>
+            <a:pPr>
+              <a:buNone/>
+            </a:pPr>
+            <a:r>
+              <a:rPr lang="en-US" altLang="ko-KR" b="1" dirty="0"/>
+              <a:t>Trigger</a:t>
+            </a:r>
+          </a:p>
+          <a:p>
+            <a:pPr>
+              <a:buNone/>
+            </a:pPr>
+            <a:endParaRPr lang="en-US" altLang="ko-KR" b="1" dirty="0"/>
+          </a:p>
+          <a:p>
+            <a:pPr>
+              <a:buNone/>
+            </a:pPr>
+            <a:endParaRPr lang="en-US" altLang="ko-KR" b="1" dirty="0"/>
+          </a:p>
+          <a:p>
+            <a:pPr>
+              <a:buNone/>
+            </a:pPr>
+            <a:r>
+              <a:rPr lang="en-US" altLang="ko-KR" dirty="0"/>
+              <a:t>Every day at 8am</a:t>
+            </a:r>
+          </a:p>
+          <a:p>
+            <a:pPr>
+              <a:buNone/>
+            </a:pPr>
+            <a:r>
+              <a:rPr lang="en-US" altLang="ko-KR" dirty="0"/>
+              <a:t>When “this” happens</a:t>
+            </a:r>
+          </a:p>
+          <a:p>
+            <a:pPr>
+              <a:buNone/>
+            </a:pPr>
+            <a:r>
+              <a:rPr lang="en-US" altLang="ko-KR" dirty="0"/>
+              <a:t>When launched</a:t>
+            </a:r>
+          </a:p>
+        </p:txBody>
+      </p:sp>
+      <p:sp>
+        <p:nvSpPr>
+          <p:cNvPr id="26" name="TextBox 25">
+            <a:extLst>
+              <a:ext uri="{FF2B5EF4-FFF2-40B4-BE49-F238E27FC236}">
+                <a16:creationId xmlns:a16="http://schemas.microsoft.com/office/drawing/2014/main" id="{4EACD8E9-87A8-78CA-D496-56A7CC739BD2}"/>
+              </a:ext>
+            </a:extLst>
+          </p:cNvPr>
+          <p:cNvSpPr txBox="1"/>
+          <p:nvPr/>
+        </p:nvSpPr>
+        <p:spPr>
+          <a:xfrm>
+            <a:off x="5065512" y="2669739"/>
+            <a:ext cx="2858295" cy="3139321"/>
+          </a:xfrm>
+          <a:prstGeom prst="rect">
+            <a:avLst/>
+          </a:prstGeom>
+          <a:noFill/>
+        </p:spPr>
+        <p:txBody>
+          <a:bodyPr wrap="square">
+            <a:spAutoFit/>
+          </a:bodyPr>
+          <a:lstStyle/>
+          <a:p>
+            <a:pPr>
+              <a:buNone/>
+            </a:pPr>
+            <a:r>
+              <a:rPr lang="en-US" altLang="ko-KR" b="1" dirty="0"/>
+              <a:t>Sorting</a:t>
+            </a:r>
+            <a:endParaRPr lang="en-US" altLang="ko-KR" dirty="0"/>
+          </a:p>
+          <a:p>
+            <a:pPr>
+              <a:buNone/>
+            </a:pPr>
+            <a:r>
+              <a:rPr lang="en-US" altLang="ko-KR" b="1" dirty="0"/>
+              <a:t>Filtering</a:t>
+            </a:r>
+            <a:endParaRPr lang="en-US" altLang="ko-KR" dirty="0"/>
+          </a:p>
+          <a:p>
+            <a:pPr>
+              <a:buNone/>
+            </a:pPr>
+            <a:r>
+              <a:rPr lang="en-US" altLang="ko-KR" b="1" dirty="0"/>
+              <a:t>Formatting</a:t>
+            </a:r>
+            <a:endParaRPr lang="en-US" altLang="ko-KR" dirty="0"/>
+          </a:p>
+          <a:p>
+            <a:pPr>
+              <a:buNone/>
+            </a:pPr>
+            <a:r>
+              <a:rPr lang="en-US" altLang="ko-KR" b="1" dirty="0"/>
+              <a:t>Transforming</a:t>
+            </a:r>
+            <a:endParaRPr lang="en-US" altLang="ko-KR" dirty="0"/>
+          </a:p>
+          <a:p>
+            <a:pPr>
+              <a:buNone/>
+            </a:pPr>
+            <a:r>
+              <a:rPr lang="en-US" altLang="ko-KR" b="1" dirty="0"/>
+              <a:t>Segmenting</a:t>
+            </a:r>
+          </a:p>
+          <a:p>
+            <a:pPr>
+              <a:buNone/>
+            </a:pPr>
+            <a:endParaRPr lang="en-US" altLang="ko-KR" b="1" dirty="0"/>
+          </a:p>
+          <a:p>
+            <a:pPr>
+              <a:buNone/>
+            </a:pPr>
+            <a:endParaRPr lang="en-US" altLang="ko-KR" dirty="0"/>
+          </a:p>
+          <a:p>
+            <a:pPr>
+              <a:buNone/>
+            </a:pPr>
+            <a:r>
+              <a:rPr lang="en-US" altLang="ko-KR" i="1" dirty="0"/>
+              <a:t>(based on different criteria)</a:t>
+            </a:r>
+            <a:endParaRPr lang="en-US" altLang="ko-KR" dirty="0"/>
+          </a:p>
+          <a:p>
+            <a:pPr>
+              <a:buNone/>
+            </a:pPr>
+            <a:r>
+              <a:rPr lang="en-US" altLang="ko-KR" dirty="0"/>
+              <a:t>If this then</a:t>
+            </a:r>
+          </a:p>
+          <a:p>
+            <a:pPr>
+              <a:buNone/>
+            </a:pPr>
+            <a:r>
+              <a:rPr lang="en-US" altLang="ko-KR" dirty="0"/>
+              <a:t>Only if this</a:t>
+            </a:r>
+          </a:p>
+          <a:p>
+            <a:pPr>
+              <a:buNone/>
+            </a:pPr>
+            <a:r>
+              <a:rPr lang="en-US" altLang="ko-KR" dirty="0"/>
+              <a:t>Change x to y</a:t>
+            </a:r>
+          </a:p>
+        </p:txBody>
+      </p:sp>
+      <p:sp>
+        <p:nvSpPr>
+          <p:cNvPr id="28" name="TextBox 27">
+            <a:extLst>
+              <a:ext uri="{FF2B5EF4-FFF2-40B4-BE49-F238E27FC236}">
+                <a16:creationId xmlns:a16="http://schemas.microsoft.com/office/drawing/2014/main" id="{C2B4A2D4-5284-212A-27F5-69F48B7D85F6}"/>
+              </a:ext>
+            </a:extLst>
+          </p:cNvPr>
+          <p:cNvSpPr txBox="1"/>
+          <p:nvPr/>
+        </p:nvSpPr>
+        <p:spPr>
+          <a:xfrm>
+            <a:off x="8953500" y="3253085"/>
+            <a:ext cx="2743200" cy="1754326"/>
+          </a:xfrm>
+          <a:prstGeom prst="rect">
+            <a:avLst/>
+          </a:prstGeom>
+          <a:noFill/>
+        </p:spPr>
+        <p:txBody>
+          <a:bodyPr wrap="square">
+            <a:spAutoFit/>
+          </a:bodyPr>
+          <a:lstStyle/>
+          <a:p>
+            <a:pPr>
+              <a:buNone/>
+            </a:pPr>
+            <a:r>
+              <a:rPr lang="en-US" altLang="ko-KR" b="1" dirty="0"/>
+              <a:t>Actions</a:t>
+            </a:r>
+          </a:p>
+          <a:p>
+            <a:pPr>
+              <a:buNone/>
+            </a:pPr>
+            <a:endParaRPr lang="en-US" altLang="ko-KR" b="1" dirty="0"/>
+          </a:p>
+          <a:p>
+            <a:pPr>
+              <a:buNone/>
+            </a:pPr>
+            <a:endParaRPr lang="en-US" altLang="ko-KR" dirty="0"/>
+          </a:p>
+          <a:p>
+            <a:pPr>
+              <a:buNone/>
+            </a:pPr>
+            <a:r>
+              <a:rPr lang="en-US" altLang="ko-KR" dirty="0"/>
+              <a:t>Update a Google Sheet</a:t>
+            </a:r>
+          </a:p>
+          <a:p>
+            <a:pPr>
+              <a:buNone/>
+            </a:pPr>
+            <a:r>
+              <a:rPr lang="en-US" altLang="ko-KR" dirty="0"/>
+              <a:t>Send an email</a:t>
+            </a:r>
+          </a:p>
+          <a:p>
+            <a:pPr>
+              <a:buNone/>
+            </a:pPr>
+            <a:r>
+              <a:rPr lang="en-US" altLang="ko-KR" dirty="0"/>
+              <a:t>Notify person</a:t>
+            </a:r>
+          </a:p>
+        </p:txBody>
+      </p:sp>
+    </p:spTree>
+    <p:extLst>
+      <p:ext uri="{BB962C8B-B14F-4D97-AF65-F5344CB8AC3E}">
+        <p14:creationId xmlns:p14="http://schemas.microsoft.com/office/powerpoint/2010/main" val="3913412000"/>
+      </p:ext>
+    </p:extLst>
+  </p:cSld>
+  <p:clrMapOvr>
+    <a:masterClrMapping/>
+  </p:clrMapOvr>
+</p:sld>
+</file>
+
+<file path=ppt/slides/slide7.xml><?xml version="1.0" encoding="utf-8"?>
+<p:sld xmlns:a="http://schemas.openxmlformats.org/drawingml/2006/main" xmlns:r="http://schemas.openxmlformats.org/officeDocument/2006/relationships" xmlns:p="http://schemas.openxmlformats.org/presentationml/2006/main">
+  <p:cSld>
+    <p:spTree>
+      <p:nvGrpSpPr>
+        <p:cNvPr id="1" name="">
+          <a:extLst>
+            <a:ext uri="{FF2B5EF4-FFF2-40B4-BE49-F238E27FC236}">
+              <a16:creationId xmlns:a16="http://schemas.microsoft.com/office/drawing/2014/main" id="{05F45886-F3EB-5C97-035B-53584DA5F236}"/>
+            </a:ext>
+          </a:extLst>
+        </p:cNvPr>
+        <p:cNvGrpSpPr/>
+        <p:nvPr/>
+      </p:nvGrpSpPr>
+      <p:grpSpPr>
+        <a:xfrm>
+          <a:off x="0" y="0"/>
+          <a:ext cx="0" cy="0"/>
+          <a:chOff x="0" y="0"/>
+          <a:chExt cx="0" cy="0"/>
+        </a:xfrm>
+      </p:grpSpPr>
+      <p:sp>
+        <p:nvSpPr>
+          <p:cNvPr id="2" name="제목 1">
+            <a:extLst>
+              <a:ext uri="{FF2B5EF4-FFF2-40B4-BE49-F238E27FC236}">
+                <a16:creationId xmlns:a16="http://schemas.microsoft.com/office/drawing/2014/main" id="{535E7764-79DF-14BB-4042-F31E9B152F89}"/>
+              </a:ext>
+            </a:extLst>
+          </p:cNvPr>
+          <p:cNvSpPr>
+            <a:spLocks noGrp="1"/>
+          </p:cNvSpPr>
+          <p:nvPr>
+            <p:ph type="ctrTitle"/>
+          </p:nvPr>
+        </p:nvSpPr>
+        <p:spPr>
+          <a:xfrm>
+            <a:off x="838199" y="1164324"/>
+            <a:ext cx="10934701" cy="2387600"/>
+          </a:xfrm>
+        </p:spPr>
+        <p:txBody>
+          <a:bodyPr rtlCol="0" anchor="ctr" anchorCtr="0">
+            <a:normAutofit/>
+          </a:bodyPr>
+          <a:lstStyle/>
+          <a:p>
+            <a:r>
+              <a:rPr lang="en-US" altLang="ko-KR" sz="5400" dirty="0">
+                <a:solidFill>
+                  <a:schemeClr val="bg1"/>
+                </a:solidFill>
+                <a:latin typeface="D2Coding" panose="020B0609020101020101" pitchFamily="49" charset="-127"/>
+                <a:ea typeface="D2Coding" panose="020B0609020101020101" pitchFamily="49" charset="-127"/>
+              </a:rPr>
+              <a:t>n8n</a:t>
+            </a:r>
+            <a:br>
+              <a:rPr lang="en-US" altLang="ko-KR" sz="4400" dirty="0">
+                <a:solidFill>
+                  <a:schemeClr val="bg1"/>
+                </a:solidFill>
+                <a:latin typeface="D2Coding" panose="020B0609020101020101" pitchFamily="49" charset="-127"/>
+                <a:ea typeface="D2Coding" panose="020B0609020101020101" pitchFamily="49" charset="-127"/>
+              </a:rPr>
+            </a:br>
+            <a:r>
+              <a:rPr lang="en-US" altLang="ko-KR" sz="4000" dirty="0">
+                <a:solidFill>
+                  <a:schemeClr val="bg1"/>
+                </a:solidFill>
+                <a:latin typeface="D2Coding" panose="020B0609020101020101" pitchFamily="49" charset="-127"/>
+                <a:ea typeface="D2Coding" panose="020B0609020101020101" pitchFamily="49" charset="-127"/>
+              </a:rPr>
+              <a:t>Tutorials</a:t>
+            </a:r>
+            <a:endParaRPr lang="ko-KR" altLang="en-US" sz="4400" dirty="0">
+              <a:solidFill>
+                <a:schemeClr val="bg1"/>
+              </a:solidFill>
+              <a:latin typeface="D2Coding" panose="020B0609020101020101" pitchFamily="49" charset="-127"/>
+              <a:ea typeface="D2Coding" panose="020B0609020101020101" pitchFamily="49" charset="-127"/>
+            </a:endParaRPr>
+          </a:p>
+        </p:txBody>
+      </p:sp>
+      <p:sp>
+        <p:nvSpPr>
+          <p:cNvPr id="5" name="부제목 2">
+            <a:extLst>
+              <a:ext uri="{FF2B5EF4-FFF2-40B4-BE49-F238E27FC236}">
+                <a16:creationId xmlns:a16="http://schemas.microsoft.com/office/drawing/2014/main" id="{1D1BBEDA-D7B7-3132-2A50-ECC452568AFC}"/>
+              </a:ext>
+            </a:extLst>
+          </p:cNvPr>
+          <p:cNvSpPr txBox="1">
+            <a:spLocks/>
+          </p:cNvSpPr>
+          <p:nvPr/>
+        </p:nvSpPr>
+        <p:spPr>
+          <a:xfrm>
+            <a:off x="855620" y="4555883"/>
+            <a:ext cx="9582736" cy="1137793"/>
+          </a:xfrm>
+          <a:prstGeom prst="rect">
+            <a:avLst/>
+          </a:prstGeom>
+        </p:spPr>
+        <p:txBody>
+          <a:bodyPr vert="horz" lIns="91440" tIns="45720" rIns="91440" bIns="45720" rtlCol="0">
+            <a:normAutofit fontScale="85000" lnSpcReduction="20000"/>
+          </a:bodyPr>
+          <a:lstStyle>
+            <a:lvl1pPr marL="0" indent="0" algn="l" defTabSz="914400" rtl="0" eaLnBrk="1" latinLnBrk="1" hangingPunct="1">
+              <a:lnSpc>
+                <a:spcPct val="150000"/>
+              </a:lnSpc>
+              <a:spcBef>
+                <a:spcPts val="1000"/>
+              </a:spcBef>
+              <a:spcAft>
+                <a:spcPts val="1200"/>
+              </a:spcAft>
+              <a:buFontTx/>
+              <a:buNone/>
+              <a:defRPr lang="en-US" sz="1200" kern="1200" dirty="0">
+                <a:solidFill>
+                  <a:schemeClr val="tx1"/>
+                </a:solidFill>
+                <a:latin typeface="맑은 고딕" panose="020B0503020000020004" pitchFamily="50" charset="-127"/>
+                <a:ea typeface="맑은 고딕" panose="020B0503020000020004" pitchFamily="50" charset="-127"/>
+                <a:cs typeface="+mn-cs"/>
+              </a:defRPr>
+            </a:lvl1pPr>
+            <a:lvl2pPr marL="228600" indent="-228600" algn="l" defTabSz="914400" rtl="0" eaLnBrk="1" latinLnBrk="1" hangingPunct="1">
+              <a:lnSpc>
+                <a:spcPct val="150000"/>
+              </a:lnSpc>
+              <a:spcBef>
+                <a:spcPts val="1000"/>
+              </a:spcBef>
+              <a:spcAft>
+                <a:spcPts val="1200"/>
+              </a:spcAft>
+              <a:buFont typeface="Arial" panose="020B0604020202020204" pitchFamily="34" charset="0"/>
+              <a:buChar char="•"/>
+              <a:defRPr lang="en-US" sz="1200" kern="1200" dirty="0">
+                <a:solidFill>
+                  <a:schemeClr val="tx1"/>
+                </a:solidFill>
+                <a:latin typeface="맑은 고딕" panose="020B0503020000020004" pitchFamily="50" charset="-127"/>
+                <a:ea typeface="맑은 고딕" panose="020B0503020000020004" pitchFamily="50" charset="-127"/>
+                <a:cs typeface="+mn-cs"/>
+              </a:defRPr>
+            </a:lvl2pPr>
+            <a:lvl3pPr marL="685800" indent="-228600" algn="l" defTabSz="914400" rtl="0" eaLnBrk="1" latinLnBrk="1" hangingPunct="1">
+              <a:lnSpc>
+                <a:spcPct val="150000"/>
+              </a:lnSpc>
+              <a:spcBef>
+                <a:spcPts val="1000"/>
+              </a:spcBef>
+              <a:spcAft>
+                <a:spcPts val="1200"/>
+              </a:spcAft>
+              <a:buFont typeface="Arial" panose="020B0604020202020204" pitchFamily="34" charset="0"/>
+              <a:buChar char="•"/>
+              <a:defRPr lang="en-US" sz="1200" kern="1200" dirty="0">
+                <a:solidFill>
+                  <a:schemeClr val="tx1"/>
+                </a:solidFill>
+                <a:latin typeface="맑은 고딕" panose="020B0503020000020004" pitchFamily="50" charset="-127"/>
+                <a:ea typeface="맑은 고딕" panose="020B0503020000020004" pitchFamily="50" charset="-127"/>
+                <a:cs typeface="+mn-cs"/>
+              </a:defRPr>
+            </a:lvl3pPr>
+            <a:lvl4pPr marL="1143000" indent="-228600" algn="l" defTabSz="914400" rtl="0" eaLnBrk="1" latinLnBrk="1" hangingPunct="1">
+              <a:lnSpc>
+                <a:spcPct val="150000"/>
+              </a:lnSpc>
+              <a:spcBef>
+                <a:spcPts val="1000"/>
+              </a:spcBef>
+              <a:spcAft>
+                <a:spcPts val="1200"/>
+              </a:spcAft>
+              <a:buFont typeface="Arial" panose="020B0604020202020204" pitchFamily="34" charset="0"/>
+              <a:buChar char="•"/>
+              <a:defRPr lang="en-US" sz="1200" kern="1200" dirty="0" smtClean="0">
+                <a:solidFill>
+                  <a:schemeClr val="tx1"/>
+                </a:solidFill>
+                <a:latin typeface="맑은 고딕" panose="020B0503020000020004" pitchFamily="50" charset="-127"/>
+                <a:ea typeface="맑은 고딕" panose="020B0503020000020004" pitchFamily="50" charset="-127"/>
+                <a:cs typeface="+mn-cs"/>
+              </a:defRPr>
+            </a:lvl4pPr>
+            <a:lvl5pPr marL="1600200" indent="-228600" algn="l" defTabSz="914400" rtl="0" eaLnBrk="1" latinLnBrk="1" hangingPunct="1">
+              <a:lnSpc>
+                <a:spcPct val="150000"/>
+              </a:lnSpc>
+              <a:spcBef>
+                <a:spcPts val="1000"/>
+              </a:spcBef>
+              <a:spcAft>
+                <a:spcPts val="1200"/>
+              </a:spcAft>
+              <a:buFont typeface="Arial" panose="020B0604020202020204" pitchFamily="34" charset="0"/>
+              <a:buChar char="•"/>
+              <a:defRPr lang="en-US" sz="1200" kern="1200" dirty="0" smtClean="0">
+                <a:solidFill>
+                  <a:schemeClr val="tx1"/>
+                </a:solidFill>
+                <a:latin typeface="맑은 고딕" panose="020B0503020000020004" pitchFamily="50" charset="-127"/>
+                <a:ea typeface="맑은 고딕" panose="020B0503020000020004" pitchFamily="50" charset="-127"/>
+                <a:cs typeface="+mn-cs"/>
+              </a:defRPr>
+            </a:lvl5pPr>
+            <a:lvl6pPr marL="2057400" indent="-228600" algn="l" defTabSz="914400" rtl="0" eaLnBrk="1" latinLnBrk="1" hangingPunct="1">
+              <a:lnSpc>
+                <a:spcPct val="150000"/>
+              </a:lnSpc>
+              <a:spcBef>
+                <a:spcPts val="1000"/>
+              </a:spcBef>
+              <a:spcAft>
+                <a:spcPts val="1200"/>
+              </a:spcAft>
+              <a:buFont typeface="Arial" panose="020B0604020202020204" pitchFamily="34" charset="0"/>
+              <a:buChar char="•"/>
+              <a:defRPr lang="en-US" sz="1200" kern="1200" dirty="0" smtClean="0">
+                <a:solidFill>
+                  <a:schemeClr val="tx1"/>
+                </a:solidFill>
+                <a:latin typeface="+mn-lt"/>
+                <a:ea typeface="+mn-ea"/>
+                <a:cs typeface="+mn-cs"/>
+              </a:defRPr>
+            </a:lvl6pPr>
+            <a:lvl7pPr marL="2514600" indent="-228600" algn="l" defTabSz="914400" rtl="0" eaLnBrk="1" latinLnBrk="1" hangingPunct="1">
+              <a:lnSpc>
+                <a:spcPct val="150000"/>
+              </a:lnSpc>
+              <a:spcBef>
+                <a:spcPts val="1000"/>
+              </a:spcBef>
+              <a:spcAft>
+                <a:spcPts val="1200"/>
+              </a:spcAft>
+              <a:buFont typeface="Arial" panose="020B0604020202020204" pitchFamily="34" charset="0"/>
+              <a:buChar char="•"/>
+              <a:defRPr lang="en-US" sz="1200" kern="1200" dirty="0" smtClean="0">
+                <a:solidFill>
+                  <a:schemeClr val="tx1"/>
+                </a:solidFill>
+                <a:latin typeface="+mn-lt"/>
+                <a:ea typeface="+mn-ea"/>
+                <a:cs typeface="+mn-cs"/>
+              </a:defRPr>
+            </a:lvl7pPr>
+            <a:lvl8pPr marL="2971800" indent="-228600" algn="l" defTabSz="914400" rtl="0" eaLnBrk="1" latinLnBrk="1" hangingPunct="1">
+              <a:lnSpc>
+                <a:spcPct val="150000"/>
+              </a:lnSpc>
+              <a:spcBef>
+                <a:spcPts val="1000"/>
+              </a:spcBef>
+              <a:spcAft>
+                <a:spcPts val="1200"/>
+              </a:spcAft>
+              <a:buFont typeface="Arial" panose="020B0604020202020204" pitchFamily="34" charset="0"/>
+              <a:buChar char="•"/>
+              <a:defRPr lang="en-US" sz="1200" kern="1200" dirty="0" smtClean="0">
+                <a:solidFill>
+                  <a:schemeClr val="tx1"/>
+                </a:solidFill>
+                <a:latin typeface="+mn-lt"/>
+                <a:ea typeface="+mn-ea"/>
+                <a:cs typeface="+mn-cs"/>
+              </a:defRPr>
+            </a:lvl8pPr>
+            <a:lvl9pPr marL="3429000" indent="-228600" algn="l" defTabSz="914400" rtl="0" eaLnBrk="1" latinLnBrk="1" hangingPunct="1">
+              <a:lnSpc>
+                <a:spcPct val="90000"/>
+              </a:lnSpc>
+              <a:spcBef>
+                <a:spcPct val="30000"/>
+              </a:spcBef>
+              <a:buFont typeface="Arial" panose="020B0604020202020204" pitchFamily="34" charset="0"/>
+              <a:buNone/>
+              <a:defRPr sz="1200" kern="1200">
+                <a:solidFill>
+                  <a:schemeClr val="tx1"/>
+                </a:solidFill>
+                <a:latin typeface="+mn-lt"/>
+                <a:ea typeface="+mn-ea"/>
+                <a:cs typeface="+mn-cs"/>
+              </a:defRPr>
+            </a:lvl9pPr>
+          </a:lstStyle>
+          <a:p>
+            <a:r>
+              <a:rPr lang="en-US" altLang="ko-KR" sz="2400" dirty="0">
+                <a:solidFill>
+                  <a:schemeClr val="bg1"/>
+                </a:solidFill>
+                <a:latin typeface="D2Coding" panose="020B0609020101020101" pitchFamily="49" charset="-127"/>
+                <a:ea typeface="D2Coding" panose="020B0609020101020101" pitchFamily="49" charset="-127"/>
+              </a:rPr>
+              <a:t>2026 Fall</a:t>
+            </a:r>
+          </a:p>
+          <a:p>
+            <a:r>
+              <a:rPr lang="ko-KR" altLang="en-US" sz="2400" dirty="0" err="1">
+                <a:solidFill>
+                  <a:schemeClr val="bg1"/>
+                </a:solidFill>
+                <a:latin typeface="D2Coding" panose="020B0609020101020101" pitchFamily="49" charset="-127"/>
+                <a:ea typeface="D2Coding" panose="020B0609020101020101" pitchFamily="49" charset="-127"/>
+              </a:rPr>
+              <a:t>조상구교수</a:t>
+            </a:r>
+            <a:endParaRPr lang="en-US" altLang="ko-KR" sz="2400" dirty="0">
+              <a:solidFill>
+                <a:schemeClr val="bg1"/>
+              </a:solidFill>
+              <a:latin typeface="D2Coding" panose="020B0609020101020101" pitchFamily="49" charset="-127"/>
+              <a:ea typeface="D2Coding" panose="020B0609020101020101" pitchFamily="49" charset="-127"/>
+            </a:endParaRPr>
+          </a:p>
+        </p:txBody>
+      </p:sp>
+    </p:spTree>
+    <p:extLst>
+      <p:ext uri="{BB962C8B-B14F-4D97-AF65-F5344CB8AC3E}">
+        <p14:creationId xmlns:p14="http://schemas.microsoft.com/office/powerpoint/2010/main" val="522556859"/>
+      </p:ext>
+    </p:extLst>
+  </p:cSld>
+  <p:clrMapOvr>
+    <a:masterClrMapping/>
+  </p:clrMapOvr>
+</p:sld>
+</file>
+
+<file path=ppt/slides/slide8.xml><?xml version="1.0" encoding="utf-8"?>
+<p:sld xmlns:a="http://schemas.openxmlformats.org/drawingml/2006/main" xmlns:r="http://schemas.openxmlformats.org/officeDocument/2006/relationships" xmlns:p="http://schemas.openxmlformats.org/presentationml/2006/main">
+  <p:cSld>
+    <p:spTree>
+      <p:nvGrpSpPr>
+        <p:cNvPr id="1" name="">
+          <a:extLst>
+            <a:ext uri="{FF2B5EF4-FFF2-40B4-BE49-F238E27FC236}">
               <a16:creationId xmlns:a16="http://schemas.microsoft.com/office/drawing/2014/main" id="{6691BD86-BE7B-EA6F-92A5-E2F7C6372054}"/>
             </a:ext>
           </a:extLst>
@@ -5317,7 +11770,7 @@
             <a:fld id="{D57F1E4F-1CFF-5643-939E-217C01CDF565}" type="slidenum">
               <a:rPr lang="en-US" smtClean="0"/>
               <a:pPr/>
-              <a:t>5</a:t>
+              <a:t>8</a:t>
             </a:fld>
             <a:endParaRPr lang="en-US" dirty="0"/>
           </a:p>
@@ -5643,7 +12096,7 @@
 </p:sld>
 </file>
 
-<file path=ppt/slides/slide6.xml><?xml version="1.0" encoding="utf-8"?>
+<file path=ppt/slides/slide9.xml><?xml version="1.0" encoding="utf-8"?>
 <p:sld xmlns:a="http://schemas.openxmlformats.org/drawingml/2006/main" xmlns:r="http://schemas.openxmlformats.org/officeDocument/2006/relationships" xmlns:p="http://schemas.openxmlformats.org/presentationml/2006/main">
   <p:cSld>
     <p:spTree>
@@ -5695,7 +12148,7 @@
             <a:fld id="{D57F1E4F-1CFF-5643-939E-217C01CDF565}" type="slidenum">
               <a:rPr lang="en-US" smtClean="0"/>
               <a:pPr/>
-              <a:t>6</a:t>
+              <a:t>9</a:t>
             </a:fld>
             <a:endParaRPr lang="en-US" dirty="0"/>
           </a:p>
@@ -5995,1728 +12448,6 @@
     <p:extLst>
       <p:ext uri="{BB962C8B-B14F-4D97-AF65-F5344CB8AC3E}">
         <p14:creationId xmlns:p14="http://schemas.microsoft.com/office/powerpoint/2010/main" val="154723281"/>
-      </p:ext>
-    </p:extLst>
-  </p:cSld>
-  <p:clrMapOvr>
-    <a:masterClrMapping/>
-  </p:clrMapOvr>
-</p:sld>
-</file>
-
-<file path=ppt/slides/slide7.xml><?xml version="1.0" encoding="utf-8"?>
-<p:sld xmlns:a="http://schemas.openxmlformats.org/drawingml/2006/main" xmlns:r="http://schemas.openxmlformats.org/officeDocument/2006/relationships" xmlns:p="http://schemas.openxmlformats.org/presentationml/2006/main">
-  <p:cSld>
-    <p:spTree>
-      <p:nvGrpSpPr>
-        <p:cNvPr id="1" name="">
-          <a:extLst>
-            <a:ext uri="{FF2B5EF4-FFF2-40B4-BE49-F238E27FC236}">
-              <a16:creationId xmlns:a16="http://schemas.microsoft.com/office/drawing/2014/main" id="{37DEA6DC-7AD1-A11C-7700-7106DCD13B3C}"/>
-            </a:ext>
-          </a:extLst>
-        </p:cNvPr>
-        <p:cNvGrpSpPr/>
-        <p:nvPr/>
-      </p:nvGrpSpPr>
-      <p:grpSpPr>
-        <a:xfrm>
-          <a:off x="0" y="0"/>
-          <a:ext cx="0" cy="0"/>
-          <a:chOff x="0" y="0"/>
-          <a:chExt cx="0" cy="0"/>
-        </a:xfrm>
-      </p:grpSpPr>
-      <p:sp>
-        <p:nvSpPr>
-          <p:cNvPr id="4" name="슬라이드 번호 개체 틀 3">
-            <a:extLst>
-              <a:ext uri="{FF2B5EF4-FFF2-40B4-BE49-F238E27FC236}">
-                <a16:creationId xmlns:a16="http://schemas.microsoft.com/office/drawing/2014/main" id="{EE1FD36A-3A9F-1F2D-FC71-809C6A133955}"/>
-              </a:ext>
-            </a:extLst>
-          </p:cNvPr>
-          <p:cNvSpPr>
-            <a:spLocks noGrp="1"/>
-          </p:cNvSpPr>
-          <p:nvPr>
-            <p:ph type="sldNum" sz="quarter" idx="12"/>
-          </p:nvPr>
-        </p:nvSpPr>
-        <p:spPr>
-          <a:xfrm>
-            <a:off x="10514011" y="6036261"/>
-            <a:ext cx="753545" cy="365125"/>
-          </a:xfrm>
-        </p:spPr>
-        <p:txBody>
-          <a:bodyPr/>
-          <a:lstStyle/>
-          <a:p>
-            <a:fld id="{D57F1E4F-1CFF-5643-939E-217C01CDF565}" type="slidenum">
-              <a:rPr lang="en-US" smtClean="0"/>
-              <a:pPr/>
-              <a:t>7</a:t>
-            </a:fld>
-            <a:endParaRPr lang="en-US" dirty="0"/>
-          </a:p>
-        </p:txBody>
-      </p:sp>
-      <p:sp>
-        <p:nvSpPr>
-          <p:cNvPr id="3" name="제목 1">
-            <a:extLst>
-              <a:ext uri="{FF2B5EF4-FFF2-40B4-BE49-F238E27FC236}">
-                <a16:creationId xmlns:a16="http://schemas.microsoft.com/office/drawing/2014/main" id="{FB3301EA-E0D6-FABD-9A4A-C14F3FA402A3}"/>
-              </a:ext>
-            </a:extLst>
-          </p:cNvPr>
-          <p:cNvSpPr txBox="1">
-            <a:spLocks/>
-          </p:cNvSpPr>
-          <p:nvPr/>
-        </p:nvSpPr>
-        <p:spPr>
-          <a:xfrm>
-            <a:off x="475645" y="481983"/>
-            <a:ext cx="10353762" cy="766439"/>
-          </a:xfrm>
-          <a:prstGeom prst="rect">
-            <a:avLst/>
-          </a:prstGeom>
-        </p:spPr>
-        <p:txBody>
-          <a:bodyPr vert="horz" lIns="91440" tIns="45720" rIns="91440" bIns="45720" rtlCol="0" anchor="ctr">
-            <a:normAutofit/>
-          </a:bodyPr>
-          <a:lstStyle>
-            <a:lvl1pPr algn="ctr" defTabSz="914400" rtl="0" eaLnBrk="1" latinLnBrk="1" hangingPunct="1">
-              <a:lnSpc>
-                <a:spcPct val="90000"/>
-              </a:lnSpc>
-              <a:spcBef>
-                <a:spcPct val="0"/>
-              </a:spcBef>
-              <a:buNone/>
-              <a:defRPr sz="3200" kern="1200" cap="all" baseline="0">
-                <a:solidFill>
-                  <a:schemeClr val="tx1"/>
-                </a:solidFill>
-                <a:effectLst/>
-                <a:latin typeface="Batang" panose="02030600000101010101" pitchFamily="18" charset="-127"/>
-                <a:ea typeface="Batang" panose="02030600000101010101" pitchFamily="18" charset="-127"/>
-                <a:cs typeface="+mj-cs"/>
-              </a:defRPr>
-            </a:lvl1pPr>
-          </a:lstStyle>
-          <a:p>
-            <a:pPr algn="l"/>
-            <a:r>
-              <a:rPr lang="en-US" altLang="ko-KR" sz="2800" cap="none" dirty="0">
-                <a:solidFill>
-                  <a:schemeClr val="bg2">
-                    <a:lumMod val="25000"/>
-                  </a:schemeClr>
-                </a:solidFill>
-                <a:latin typeface="D2Coding" panose="020B0609020101020101" pitchFamily="49" charset="-127"/>
-                <a:ea typeface="D2Coding" panose="020B0609020101020101" pitchFamily="49" charset="-127"/>
-                <a:cs typeface="Segoe UI Light" panose="020B0502040204020203" pitchFamily="34" charset="0"/>
-              </a:rPr>
-              <a:t>n8n</a:t>
-            </a:r>
-            <a:r>
-              <a:rPr lang="ko-KR" altLang="en-US" sz="2800" cap="none" dirty="0">
-                <a:solidFill>
-                  <a:schemeClr val="bg2">
-                    <a:lumMod val="25000"/>
-                  </a:schemeClr>
-                </a:solidFill>
-                <a:latin typeface="D2Coding" panose="020B0609020101020101" pitchFamily="49" charset="-127"/>
-                <a:ea typeface="D2Coding" panose="020B0609020101020101" pitchFamily="49" charset="-127"/>
-                <a:cs typeface="Segoe UI Light" panose="020B0502040204020203" pitchFamily="34" charset="0"/>
-              </a:rPr>
-              <a:t> </a:t>
-            </a:r>
-            <a:r>
-              <a:rPr lang="en-US" altLang="ko-KR" sz="2800" cap="none" dirty="0">
-                <a:solidFill>
-                  <a:schemeClr val="bg2">
-                    <a:lumMod val="25000"/>
-                  </a:schemeClr>
-                </a:solidFill>
-                <a:latin typeface="D2Coding" panose="020B0609020101020101" pitchFamily="49" charset="-127"/>
-                <a:ea typeface="D2Coding" panose="020B0609020101020101" pitchFamily="49" charset="-127"/>
-                <a:cs typeface="Segoe UI Light" panose="020B0502040204020203" pitchFamily="34" charset="0"/>
-              </a:rPr>
-              <a:t>Homework</a:t>
-            </a:r>
-            <a:r>
-              <a:rPr lang="ko-KR" altLang="en-US" sz="2800" cap="none" dirty="0">
-                <a:solidFill>
-                  <a:schemeClr val="bg2">
-                    <a:lumMod val="25000"/>
-                  </a:schemeClr>
-                </a:solidFill>
-                <a:latin typeface="D2Coding" panose="020B0609020101020101" pitchFamily="49" charset="-127"/>
-                <a:ea typeface="D2Coding" panose="020B0609020101020101" pitchFamily="49" charset="-127"/>
-                <a:cs typeface="Segoe UI Light" panose="020B0502040204020203" pitchFamily="34" charset="0"/>
-              </a:rPr>
-              <a:t> </a:t>
-            </a:r>
-          </a:p>
-        </p:txBody>
-      </p:sp>
-      <p:sp>
-        <p:nvSpPr>
-          <p:cNvPr id="8" name="TextBox 7">
-            <a:extLst>
-              <a:ext uri="{FF2B5EF4-FFF2-40B4-BE49-F238E27FC236}">
-                <a16:creationId xmlns:a16="http://schemas.microsoft.com/office/drawing/2014/main" id="{3A2F66EF-8EF4-7B39-893B-8B6410415820}"/>
-              </a:ext>
-            </a:extLst>
-          </p:cNvPr>
-          <p:cNvSpPr txBox="1"/>
-          <p:nvPr/>
-        </p:nvSpPr>
-        <p:spPr>
-          <a:xfrm>
-            <a:off x="744020" y="3244334"/>
-            <a:ext cx="184731" cy="369332"/>
-          </a:xfrm>
-          <a:prstGeom prst="rect">
-            <a:avLst/>
-          </a:prstGeom>
-          <a:noFill/>
-        </p:spPr>
-        <p:txBody>
-          <a:bodyPr wrap="none" rtlCol="0">
-            <a:spAutoFit/>
-          </a:bodyPr>
-          <a:lstStyle/>
-          <a:p>
-            <a:endParaRPr lang="ko-KR" altLang="en-US" dirty="0">
-              <a:solidFill>
-                <a:schemeClr val="accent5"/>
-              </a:solidFill>
-              <a:latin typeface="D2Coding" panose="020B0609020101020101" pitchFamily="49" charset="-127"/>
-              <a:ea typeface="D2Coding" panose="020B0609020101020101" pitchFamily="49" charset="-127"/>
-            </a:endParaRPr>
-          </a:p>
-        </p:txBody>
-      </p:sp>
-      <p:pic>
-        <p:nvPicPr>
-          <p:cNvPr id="5" name="그림 4">
-            <a:extLst>
-              <a:ext uri="{FF2B5EF4-FFF2-40B4-BE49-F238E27FC236}">
-                <a16:creationId xmlns:a16="http://schemas.microsoft.com/office/drawing/2014/main" id="{C400C220-995E-801F-9295-A720521466C2}"/>
-              </a:ext>
-            </a:extLst>
-          </p:cNvPr>
-          <p:cNvPicPr>
-            <a:picLocks noChangeAspect="1"/>
-          </p:cNvPicPr>
-          <p:nvPr/>
-        </p:nvPicPr>
-        <p:blipFill>
-          <a:blip r:embed="rId2"/>
-          <a:stretch>
-            <a:fillRect/>
-          </a:stretch>
-        </p:blipFill>
-        <p:spPr>
-          <a:xfrm>
-            <a:off x="647095" y="2516363"/>
-            <a:ext cx="7318240" cy="3646311"/>
-          </a:xfrm>
-          <a:prstGeom prst="rect">
-            <a:avLst/>
-          </a:prstGeom>
-        </p:spPr>
-      </p:pic>
-      <p:sp>
-        <p:nvSpPr>
-          <p:cNvPr id="7" name="TextBox 6">
-            <a:extLst>
-              <a:ext uri="{FF2B5EF4-FFF2-40B4-BE49-F238E27FC236}">
-                <a16:creationId xmlns:a16="http://schemas.microsoft.com/office/drawing/2014/main" id="{E3CAC736-EE8B-1E71-9E07-5E7D5B0EEC4B}"/>
-              </a:ext>
-            </a:extLst>
-          </p:cNvPr>
-          <p:cNvSpPr txBox="1"/>
-          <p:nvPr/>
-        </p:nvSpPr>
-        <p:spPr>
-          <a:xfrm>
-            <a:off x="542320" y="1248422"/>
-            <a:ext cx="10916255" cy="793166"/>
-          </a:xfrm>
-          <a:prstGeom prst="rect">
-            <a:avLst/>
-          </a:prstGeom>
-          <a:noFill/>
-        </p:spPr>
-        <p:txBody>
-          <a:bodyPr wrap="square" rtlCol="0">
-            <a:spAutoFit/>
-          </a:bodyPr>
-          <a:lstStyle/>
-          <a:p>
-            <a:pPr>
-              <a:lnSpc>
-                <a:spcPct val="150000"/>
-              </a:lnSpc>
-            </a:pPr>
-            <a:r>
-              <a:rPr lang="ko-KR" altLang="en-US" sz="1600" dirty="0">
-                <a:latin typeface="D2Coding" panose="020B0609020101020101" pitchFamily="49" charset="-127"/>
-                <a:ea typeface="D2Coding" panose="020B0609020101020101" pitchFamily="49" charset="-127"/>
-              </a:rPr>
-              <a:t>학생 </a:t>
-            </a:r>
-            <a:r>
-              <a:rPr lang="en-US" altLang="ko-KR" sz="1600" dirty="0">
-                <a:latin typeface="D2Coding" panose="020B0609020101020101" pitchFamily="49" charset="-127"/>
-                <a:ea typeface="D2Coding" panose="020B0609020101020101" pitchFamily="49" charset="-127"/>
-              </a:rPr>
-              <a:t>:</a:t>
-            </a:r>
-            <a:r>
-              <a:rPr lang="ko-KR" altLang="en-US" sz="1600" dirty="0">
-                <a:latin typeface="D2Coding" panose="020B0609020101020101" pitchFamily="49" charset="-127"/>
-                <a:ea typeface="D2Coding" panose="020B0609020101020101" pitchFamily="49" charset="-127"/>
-              </a:rPr>
-              <a:t> 과제를 </a:t>
-            </a:r>
-            <a:r>
-              <a:rPr lang="ko-KR" altLang="en-US" sz="1600" dirty="0" err="1">
-                <a:latin typeface="D2Coding" panose="020B0609020101020101" pitchFamily="49" charset="-127"/>
-                <a:ea typeface="D2Coding" panose="020B0609020101020101" pitchFamily="49" charset="-127"/>
-              </a:rPr>
-              <a:t>깃허브의</a:t>
-            </a:r>
-            <a:r>
-              <a:rPr lang="ko-KR" altLang="en-US" sz="1600" dirty="0">
-                <a:latin typeface="D2Coding" panose="020B0609020101020101" pitchFamily="49" charset="-127"/>
-                <a:ea typeface="D2Coding" panose="020B0609020101020101" pitchFamily="49" charset="-127"/>
-              </a:rPr>
-              <a:t> </a:t>
-            </a:r>
-            <a:r>
-              <a:rPr lang="ko-KR" altLang="en-US" sz="1600" dirty="0" err="1">
-                <a:latin typeface="D2Coding" panose="020B0609020101020101" pitchFamily="49" charset="-127"/>
-                <a:ea typeface="D2Coding" panose="020B0609020101020101" pitchFamily="49" charset="-127"/>
-              </a:rPr>
-              <a:t>파이썬코드로</a:t>
-            </a:r>
-            <a:r>
-              <a:rPr lang="en-US" altLang="ko-KR" sz="1600" dirty="0">
-                <a:latin typeface="D2Coding" panose="020B0609020101020101" pitchFamily="49" charset="-127"/>
-                <a:ea typeface="D2Coding" panose="020B0609020101020101" pitchFamily="49" charset="-127"/>
-              </a:rPr>
-              <a:t> upload</a:t>
-            </a:r>
-            <a:r>
-              <a:rPr lang="ko-KR" altLang="en-US" sz="1600" dirty="0">
-                <a:latin typeface="D2Coding" panose="020B0609020101020101" pitchFamily="49" charset="-127"/>
-                <a:ea typeface="D2Coding" panose="020B0609020101020101" pitchFamily="49" charset="-127"/>
-              </a:rPr>
-              <a:t>하면 구글시트에 이름</a:t>
-            </a:r>
-            <a:r>
-              <a:rPr lang="en-US" altLang="ko-KR" sz="1600" dirty="0">
-                <a:latin typeface="D2Coding" panose="020B0609020101020101" pitchFamily="49" charset="-127"/>
-                <a:ea typeface="D2Coding" panose="020B0609020101020101" pitchFamily="49" charset="-127"/>
-              </a:rPr>
-              <a:t>(name)</a:t>
-            </a:r>
-            <a:r>
-              <a:rPr lang="ko-KR" altLang="en-US" sz="1600" dirty="0">
-                <a:latin typeface="D2Coding" panose="020B0609020101020101" pitchFamily="49" charset="-127"/>
-                <a:ea typeface="D2Coding" panose="020B0609020101020101" pitchFamily="49" charset="-127"/>
-              </a:rPr>
-              <a:t>과 </a:t>
-            </a:r>
-            <a:r>
-              <a:rPr lang="en-US" altLang="ko-KR" sz="1600" dirty="0" err="1">
-                <a:latin typeface="D2Coding" panose="020B0609020101020101" pitchFamily="49" charset="-127"/>
-                <a:ea typeface="D2Coding" panose="020B0609020101020101" pitchFamily="49" charset="-127"/>
-              </a:rPr>
-              <a:t>github_url</a:t>
-            </a:r>
-            <a:r>
-              <a:rPr lang="ko-KR" altLang="en-US" sz="1600" dirty="0">
-                <a:latin typeface="D2Coding" panose="020B0609020101020101" pitchFamily="49" charset="-127"/>
-                <a:ea typeface="D2Coding" panose="020B0609020101020101" pitchFamily="49" charset="-127"/>
-              </a:rPr>
-              <a:t>을 입력</a:t>
-            </a:r>
-            <a:endParaRPr lang="en-US" altLang="ko-KR" sz="1600" dirty="0">
-              <a:latin typeface="D2Coding" panose="020B0609020101020101" pitchFamily="49" charset="-127"/>
-              <a:ea typeface="D2Coding" panose="020B0609020101020101" pitchFamily="49" charset="-127"/>
-            </a:endParaRPr>
-          </a:p>
-          <a:p>
-            <a:pPr>
-              <a:lnSpc>
-                <a:spcPct val="150000"/>
-              </a:lnSpc>
-            </a:pPr>
-            <a:r>
-              <a:rPr lang="en-US" altLang="ko-KR" sz="1600" dirty="0">
-                <a:latin typeface="D2Coding" panose="020B0609020101020101" pitchFamily="49" charset="-127"/>
-                <a:ea typeface="D2Coding" panose="020B0609020101020101" pitchFamily="49" charset="-127"/>
-              </a:rPr>
-              <a:t>n8n : </a:t>
-            </a:r>
-            <a:r>
-              <a:rPr lang="ko-KR" altLang="en-US" sz="1600" dirty="0">
-                <a:latin typeface="D2Coding" panose="020B0609020101020101" pitchFamily="49" charset="-127"/>
-                <a:ea typeface="D2Coding" panose="020B0609020101020101" pitchFamily="49" charset="-127"/>
-              </a:rPr>
-              <a:t>학생들의 코드를 몇 가지 기준에 따라 점수</a:t>
-            </a:r>
-            <a:r>
-              <a:rPr lang="en-US" altLang="ko-KR" sz="1600" dirty="0">
-                <a:latin typeface="D2Coding" panose="020B0609020101020101" pitchFamily="49" charset="-127"/>
-                <a:ea typeface="D2Coding" panose="020B0609020101020101" pitchFamily="49" charset="-127"/>
-              </a:rPr>
-              <a:t>(grade)</a:t>
-            </a:r>
-            <a:r>
-              <a:rPr lang="ko-KR" altLang="en-US" sz="1600" dirty="0">
-                <a:latin typeface="D2Coding" panose="020B0609020101020101" pitchFamily="49" charset="-127"/>
-                <a:ea typeface="D2Coding" panose="020B0609020101020101" pitchFamily="49" charset="-127"/>
-              </a:rPr>
-              <a:t>와 평가내용</a:t>
-            </a:r>
-            <a:r>
-              <a:rPr lang="en-US" altLang="ko-KR" sz="1600" dirty="0">
-                <a:latin typeface="D2Coding" panose="020B0609020101020101" pitchFamily="49" charset="-127"/>
-                <a:ea typeface="D2Coding" panose="020B0609020101020101" pitchFamily="49" charset="-127"/>
-              </a:rPr>
-              <a:t>(comments)</a:t>
-            </a:r>
-            <a:r>
-              <a:rPr lang="ko-KR" altLang="en-US" sz="1600" dirty="0">
-                <a:latin typeface="D2Coding" panose="020B0609020101020101" pitchFamily="49" charset="-127"/>
-                <a:ea typeface="D2Coding" panose="020B0609020101020101" pitchFamily="49" charset="-127"/>
-              </a:rPr>
-              <a:t>을 자동입력</a:t>
-            </a:r>
-          </a:p>
-        </p:txBody>
-      </p:sp>
-    </p:spTree>
-    <p:extLst>
-      <p:ext uri="{BB962C8B-B14F-4D97-AF65-F5344CB8AC3E}">
-        <p14:creationId xmlns:p14="http://schemas.microsoft.com/office/powerpoint/2010/main" val="2300754530"/>
-      </p:ext>
-    </p:extLst>
-  </p:cSld>
-  <p:clrMapOvr>
-    <a:masterClrMapping/>
-  </p:clrMapOvr>
-</p:sld>
-</file>
-
-<file path=ppt/slides/slide8.xml><?xml version="1.0" encoding="utf-8"?>
-<p:sld xmlns:a="http://schemas.openxmlformats.org/drawingml/2006/main" xmlns:r="http://schemas.openxmlformats.org/officeDocument/2006/relationships" xmlns:p="http://schemas.openxmlformats.org/presentationml/2006/main">
-  <p:cSld>
-    <p:spTree>
-      <p:nvGrpSpPr>
-        <p:cNvPr id="1" name="">
-          <a:extLst>
-            <a:ext uri="{FF2B5EF4-FFF2-40B4-BE49-F238E27FC236}">
-              <a16:creationId xmlns:a16="http://schemas.microsoft.com/office/drawing/2014/main" id="{D12824F6-E5EB-EF43-685C-2DDB88C3031A}"/>
-            </a:ext>
-          </a:extLst>
-        </p:cNvPr>
-        <p:cNvGrpSpPr/>
-        <p:nvPr/>
-      </p:nvGrpSpPr>
-      <p:grpSpPr>
-        <a:xfrm>
-          <a:off x="0" y="0"/>
-          <a:ext cx="0" cy="0"/>
-          <a:chOff x="0" y="0"/>
-          <a:chExt cx="0" cy="0"/>
-        </a:xfrm>
-      </p:grpSpPr>
-      <p:sp>
-        <p:nvSpPr>
-          <p:cNvPr id="4" name="슬라이드 번호 개체 틀 3">
-            <a:extLst>
-              <a:ext uri="{FF2B5EF4-FFF2-40B4-BE49-F238E27FC236}">
-                <a16:creationId xmlns:a16="http://schemas.microsoft.com/office/drawing/2014/main" id="{E8EC48A8-371D-CC01-0334-1A056DD8A34D}"/>
-              </a:ext>
-            </a:extLst>
-          </p:cNvPr>
-          <p:cNvSpPr>
-            <a:spLocks noGrp="1"/>
-          </p:cNvSpPr>
-          <p:nvPr>
-            <p:ph type="sldNum" sz="quarter" idx="12"/>
-          </p:nvPr>
-        </p:nvSpPr>
-        <p:spPr>
-          <a:xfrm>
-            <a:off x="10514011" y="6036261"/>
-            <a:ext cx="753545" cy="365125"/>
-          </a:xfrm>
-        </p:spPr>
-        <p:txBody>
-          <a:bodyPr/>
-          <a:lstStyle/>
-          <a:p>
-            <a:fld id="{D57F1E4F-1CFF-5643-939E-217C01CDF565}" type="slidenum">
-              <a:rPr lang="en-US" smtClean="0"/>
-              <a:pPr/>
-              <a:t>8</a:t>
-            </a:fld>
-            <a:endParaRPr lang="en-US" dirty="0"/>
-          </a:p>
-        </p:txBody>
-      </p:sp>
-      <p:sp>
-        <p:nvSpPr>
-          <p:cNvPr id="3" name="제목 1">
-            <a:extLst>
-              <a:ext uri="{FF2B5EF4-FFF2-40B4-BE49-F238E27FC236}">
-                <a16:creationId xmlns:a16="http://schemas.microsoft.com/office/drawing/2014/main" id="{925962D8-E163-A2E1-AA4F-0380E0BF809C}"/>
-              </a:ext>
-            </a:extLst>
-          </p:cNvPr>
-          <p:cNvSpPr txBox="1">
-            <a:spLocks/>
-          </p:cNvSpPr>
-          <p:nvPr/>
-        </p:nvSpPr>
-        <p:spPr>
-          <a:xfrm>
-            <a:off x="475645" y="481983"/>
-            <a:ext cx="10353762" cy="766439"/>
-          </a:xfrm>
-          <a:prstGeom prst="rect">
-            <a:avLst/>
-          </a:prstGeom>
-        </p:spPr>
-        <p:txBody>
-          <a:bodyPr vert="horz" lIns="91440" tIns="45720" rIns="91440" bIns="45720" rtlCol="0" anchor="ctr">
-            <a:normAutofit/>
-          </a:bodyPr>
-          <a:lstStyle>
-            <a:lvl1pPr algn="ctr" defTabSz="914400" rtl="0" eaLnBrk="1" latinLnBrk="1" hangingPunct="1">
-              <a:lnSpc>
-                <a:spcPct val="90000"/>
-              </a:lnSpc>
-              <a:spcBef>
-                <a:spcPct val="0"/>
-              </a:spcBef>
-              <a:buNone/>
-              <a:defRPr sz="3200" kern="1200" cap="all" baseline="0">
-                <a:solidFill>
-                  <a:schemeClr val="tx1"/>
-                </a:solidFill>
-                <a:effectLst/>
-                <a:latin typeface="Batang" panose="02030600000101010101" pitchFamily="18" charset="-127"/>
-                <a:ea typeface="Batang" panose="02030600000101010101" pitchFamily="18" charset="-127"/>
-                <a:cs typeface="+mj-cs"/>
-              </a:defRPr>
-            </a:lvl1pPr>
-          </a:lstStyle>
-          <a:p>
-            <a:pPr algn="l"/>
-            <a:r>
-              <a:rPr lang="en-US" altLang="ko-KR" sz="2800" cap="none" dirty="0">
-                <a:solidFill>
-                  <a:schemeClr val="bg2">
-                    <a:lumMod val="25000"/>
-                  </a:schemeClr>
-                </a:solidFill>
-                <a:latin typeface="D2Coding" panose="020B0609020101020101" pitchFamily="49" charset="-127"/>
-                <a:ea typeface="D2Coding" panose="020B0609020101020101" pitchFamily="49" charset="-127"/>
-                <a:cs typeface="Segoe UI Light" panose="020B0502040204020203" pitchFamily="34" charset="0"/>
-              </a:rPr>
-              <a:t>n8n</a:t>
-            </a:r>
-            <a:r>
-              <a:rPr lang="ko-KR" altLang="en-US" sz="2800" cap="none" dirty="0">
-                <a:solidFill>
-                  <a:schemeClr val="bg2">
-                    <a:lumMod val="25000"/>
-                  </a:schemeClr>
-                </a:solidFill>
-                <a:latin typeface="D2Coding" panose="020B0609020101020101" pitchFamily="49" charset="-127"/>
-                <a:ea typeface="D2Coding" panose="020B0609020101020101" pitchFamily="49" charset="-127"/>
-                <a:cs typeface="Segoe UI Light" panose="020B0502040204020203" pitchFamily="34" charset="0"/>
-              </a:rPr>
-              <a:t> </a:t>
-            </a:r>
-            <a:r>
-              <a:rPr lang="en-US" altLang="ko-KR" sz="2800" cap="none" dirty="0">
-                <a:solidFill>
-                  <a:schemeClr val="bg2">
-                    <a:lumMod val="25000"/>
-                  </a:schemeClr>
-                </a:solidFill>
-                <a:latin typeface="D2Coding" panose="020B0609020101020101" pitchFamily="49" charset="-127"/>
-                <a:ea typeface="D2Coding" panose="020B0609020101020101" pitchFamily="49" charset="-127"/>
-                <a:cs typeface="Segoe UI Light" panose="020B0502040204020203" pitchFamily="34" charset="0"/>
-              </a:rPr>
-              <a:t>Homework</a:t>
-            </a:r>
-            <a:r>
-              <a:rPr lang="ko-KR" altLang="en-US" sz="2800" cap="none" dirty="0">
-                <a:solidFill>
-                  <a:schemeClr val="bg2">
-                    <a:lumMod val="25000"/>
-                  </a:schemeClr>
-                </a:solidFill>
-                <a:latin typeface="D2Coding" panose="020B0609020101020101" pitchFamily="49" charset="-127"/>
-                <a:ea typeface="D2Coding" panose="020B0609020101020101" pitchFamily="49" charset="-127"/>
-                <a:cs typeface="Segoe UI Light" panose="020B0502040204020203" pitchFamily="34" charset="0"/>
-              </a:rPr>
-              <a:t> </a:t>
-            </a:r>
-          </a:p>
-        </p:txBody>
-      </p:sp>
-      <p:sp>
-        <p:nvSpPr>
-          <p:cNvPr id="8" name="TextBox 7">
-            <a:extLst>
-              <a:ext uri="{FF2B5EF4-FFF2-40B4-BE49-F238E27FC236}">
-                <a16:creationId xmlns:a16="http://schemas.microsoft.com/office/drawing/2014/main" id="{4349BDF9-74B9-B0E3-5E88-CCFABA2E20B5}"/>
-              </a:ext>
-            </a:extLst>
-          </p:cNvPr>
-          <p:cNvSpPr txBox="1"/>
-          <p:nvPr/>
-        </p:nvSpPr>
-        <p:spPr>
-          <a:xfrm>
-            <a:off x="744020" y="3244334"/>
-            <a:ext cx="184731" cy="369332"/>
-          </a:xfrm>
-          <a:prstGeom prst="rect">
-            <a:avLst/>
-          </a:prstGeom>
-          <a:noFill/>
-        </p:spPr>
-        <p:txBody>
-          <a:bodyPr wrap="none" rtlCol="0">
-            <a:spAutoFit/>
-          </a:bodyPr>
-          <a:lstStyle/>
-          <a:p>
-            <a:endParaRPr lang="ko-KR" altLang="en-US" dirty="0">
-              <a:solidFill>
-                <a:schemeClr val="accent5"/>
-              </a:solidFill>
-              <a:latin typeface="D2Coding" panose="020B0609020101020101" pitchFamily="49" charset="-127"/>
-              <a:ea typeface="D2Coding" panose="020B0609020101020101" pitchFamily="49" charset="-127"/>
-            </a:endParaRPr>
-          </a:p>
-        </p:txBody>
-      </p:sp>
-      <p:pic>
-        <p:nvPicPr>
-          <p:cNvPr id="2" name="그림 1">
-            <a:extLst>
-              <a:ext uri="{FF2B5EF4-FFF2-40B4-BE49-F238E27FC236}">
-                <a16:creationId xmlns:a16="http://schemas.microsoft.com/office/drawing/2014/main" id="{88B5EEFA-6922-97B2-24CE-991B6A744A12}"/>
-              </a:ext>
-            </a:extLst>
-          </p:cNvPr>
-          <p:cNvPicPr>
-            <a:picLocks noChangeAspect="1"/>
-          </p:cNvPicPr>
-          <p:nvPr/>
-        </p:nvPicPr>
-        <p:blipFill>
-          <a:blip r:embed="rId2"/>
-          <a:stretch>
-            <a:fillRect/>
-          </a:stretch>
-        </p:blipFill>
-        <p:spPr>
-          <a:xfrm>
-            <a:off x="671480" y="2044210"/>
-            <a:ext cx="10849040" cy="3317945"/>
-          </a:xfrm>
-          <a:prstGeom prst="rect">
-            <a:avLst/>
-          </a:prstGeom>
-        </p:spPr>
-      </p:pic>
-    </p:spTree>
-    <p:extLst>
-      <p:ext uri="{BB962C8B-B14F-4D97-AF65-F5344CB8AC3E}">
-        <p14:creationId xmlns:p14="http://schemas.microsoft.com/office/powerpoint/2010/main" val="377774142"/>
-      </p:ext>
-    </p:extLst>
-  </p:cSld>
-  <p:clrMapOvr>
-    <a:masterClrMapping/>
-  </p:clrMapOvr>
-</p:sld>
-</file>
-
-<file path=ppt/slides/slide9.xml><?xml version="1.0" encoding="utf-8"?>
-<p:sld xmlns:a="http://schemas.openxmlformats.org/drawingml/2006/main" xmlns:r="http://schemas.openxmlformats.org/officeDocument/2006/relationships" xmlns:p="http://schemas.openxmlformats.org/presentationml/2006/main">
-  <p:cSld>
-    <p:spTree>
-      <p:nvGrpSpPr>
-        <p:cNvPr id="1" name="">
-          <a:extLst>
-            <a:ext uri="{FF2B5EF4-FFF2-40B4-BE49-F238E27FC236}">
-              <a16:creationId xmlns:a16="http://schemas.microsoft.com/office/drawing/2014/main" id="{89BF34D7-3C96-6A8C-1F23-24373A19EBF2}"/>
-            </a:ext>
-          </a:extLst>
-        </p:cNvPr>
-        <p:cNvGrpSpPr/>
-        <p:nvPr/>
-      </p:nvGrpSpPr>
-      <p:grpSpPr>
-        <a:xfrm>
-          <a:off x="0" y="0"/>
-          <a:ext cx="0" cy="0"/>
-          <a:chOff x="0" y="0"/>
-          <a:chExt cx="0" cy="0"/>
-        </a:xfrm>
-      </p:grpSpPr>
-      <p:sp>
-        <p:nvSpPr>
-          <p:cNvPr id="4" name="슬라이드 번호 개체 틀 3">
-            <a:extLst>
-              <a:ext uri="{FF2B5EF4-FFF2-40B4-BE49-F238E27FC236}">
-                <a16:creationId xmlns:a16="http://schemas.microsoft.com/office/drawing/2014/main" id="{F7CFF113-047A-7626-5701-FFB708606523}"/>
-              </a:ext>
-            </a:extLst>
-          </p:cNvPr>
-          <p:cNvSpPr>
-            <a:spLocks noGrp="1"/>
-          </p:cNvSpPr>
-          <p:nvPr>
-            <p:ph type="sldNum" sz="quarter" idx="12"/>
-          </p:nvPr>
-        </p:nvSpPr>
-        <p:spPr>
-          <a:xfrm>
-            <a:off x="10514011" y="6036261"/>
-            <a:ext cx="753545" cy="365125"/>
-          </a:xfrm>
-        </p:spPr>
-        <p:txBody>
-          <a:bodyPr/>
-          <a:lstStyle/>
-          <a:p>
-            <a:fld id="{D57F1E4F-1CFF-5643-939E-217C01CDF565}" type="slidenum">
-              <a:rPr lang="en-US" smtClean="0"/>
-              <a:pPr/>
-              <a:t>9</a:t>
-            </a:fld>
-            <a:endParaRPr lang="en-US" dirty="0"/>
-          </a:p>
-        </p:txBody>
-      </p:sp>
-      <p:sp>
-        <p:nvSpPr>
-          <p:cNvPr id="3" name="제목 1">
-            <a:extLst>
-              <a:ext uri="{FF2B5EF4-FFF2-40B4-BE49-F238E27FC236}">
-                <a16:creationId xmlns:a16="http://schemas.microsoft.com/office/drawing/2014/main" id="{5EAD5ABA-B1EE-AE18-52A7-D72CEB07C16C}"/>
-              </a:ext>
-            </a:extLst>
-          </p:cNvPr>
-          <p:cNvSpPr txBox="1">
-            <a:spLocks/>
-          </p:cNvSpPr>
-          <p:nvPr/>
-        </p:nvSpPr>
-        <p:spPr>
-          <a:xfrm>
-            <a:off x="475645" y="481983"/>
-            <a:ext cx="10353762" cy="766439"/>
-          </a:xfrm>
-          <a:prstGeom prst="rect">
-            <a:avLst/>
-          </a:prstGeom>
-        </p:spPr>
-        <p:txBody>
-          <a:bodyPr vert="horz" lIns="91440" tIns="45720" rIns="91440" bIns="45720" rtlCol="0" anchor="ctr">
-            <a:normAutofit/>
-          </a:bodyPr>
-          <a:lstStyle>
-            <a:lvl1pPr algn="ctr" defTabSz="914400" rtl="0" eaLnBrk="1" latinLnBrk="1" hangingPunct="1">
-              <a:lnSpc>
-                <a:spcPct val="90000"/>
-              </a:lnSpc>
-              <a:spcBef>
-                <a:spcPct val="0"/>
-              </a:spcBef>
-              <a:buNone/>
-              <a:defRPr sz="3200" kern="1200" cap="all" baseline="0">
-                <a:solidFill>
-                  <a:schemeClr val="tx1"/>
-                </a:solidFill>
-                <a:effectLst/>
-                <a:latin typeface="Batang" panose="02030600000101010101" pitchFamily="18" charset="-127"/>
-                <a:ea typeface="Batang" panose="02030600000101010101" pitchFamily="18" charset="-127"/>
-                <a:cs typeface="+mj-cs"/>
-              </a:defRPr>
-            </a:lvl1pPr>
-          </a:lstStyle>
-          <a:p>
-            <a:pPr algn="l"/>
-            <a:r>
-              <a:rPr lang="en-US" altLang="ko-KR" sz="2800" cap="none" dirty="0">
-                <a:solidFill>
-                  <a:schemeClr val="bg2">
-                    <a:lumMod val="25000"/>
-                  </a:schemeClr>
-                </a:solidFill>
-                <a:latin typeface="D2Coding" panose="020B0609020101020101" pitchFamily="49" charset="-127"/>
-                <a:ea typeface="D2Coding" panose="020B0609020101020101" pitchFamily="49" charset="-127"/>
-                <a:cs typeface="Segoe UI Light" panose="020B0502040204020203" pitchFamily="34" charset="0"/>
-              </a:rPr>
-              <a:t>n8n dances with LLM</a:t>
-            </a:r>
-            <a:endParaRPr lang="ko-KR" altLang="en-US" sz="2800" cap="none" dirty="0">
-              <a:solidFill>
-                <a:schemeClr val="bg2">
-                  <a:lumMod val="25000"/>
-                </a:schemeClr>
-              </a:solidFill>
-              <a:latin typeface="D2Coding" panose="020B0609020101020101" pitchFamily="49" charset="-127"/>
-              <a:ea typeface="D2Coding" panose="020B0609020101020101" pitchFamily="49" charset="-127"/>
-              <a:cs typeface="Segoe UI Light" panose="020B0502040204020203" pitchFamily="34" charset="0"/>
-            </a:endParaRPr>
-          </a:p>
-        </p:txBody>
-      </p:sp>
-      <p:sp>
-        <p:nvSpPr>
-          <p:cNvPr id="9" name="TextBox 8">
-            <a:extLst>
-              <a:ext uri="{FF2B5EF4-FFF2-40B4-BE49-F238E27FC236}">
-                <a16:creationId xmlns:a16="http://schemas.microsoft.com/office/drawing/2014/main" id="{261EFB21-72BA-1B62-A292-BC6F2B1B35ED}"/>
-              </a:ext>
-            </a:extLst>
-          </p:cNvPr>
-          <p:cNvSpPr txBox="1"/>
-          <p:nvPr/>
-        </p:nvSpPr>
-        <p:spPr>
-          <a:xfrm>
-            <a:off x="582095" y="2684810"/>
-            <a:ext cx="11066980" cy="3345981"/>
-          </a:xfrm>
-          <a:prstGeom prst="rect">
-            <a:avLst/>
-          </a:prstGeom>
-          <a:noFill/>
-        </p:spPr>
-        <p:txBody>
-          <a:bodyPr wrap="square">
-            <a:spAutoFit/>
-          </a:bodyPr>
-          <a:lstStyle/>
-          <a:p>
-            <a:pPr marL="285750" indent="-285750">
-              <a:lnSpc>
-                <a:spcPct val="200000"/>
-              </a:lnSpc>
-              <a:buFont typeface="Wingdings" panose="05000000000000000000" pitchFamily="2" charset="2"/>
-              <a:buChar char="v"/>
-            </a:pPr>
-            <a:r>
-              <a:rPr lang="en-US" altLang="ko-KR" sz="1600" dirty="0">
-                <a:latin typeface="D2Coding" panose="020B0609020101020101" pitchFamily="49" charset="-127"/>
-                <a:ea typeface="D2Coding" panose="020B0609020101020101" pitchFamily="49" charset="-127"/>
-              </a:rPr>
-              <a:t>LLM(Gemini, </a:t>
-            </a:r>
-            <a:r>
-              <a:rPr lang="en-US" altLang="ko-KR" sz="1600" dirty="0" err="1">
-                <a:latin typeface="D2Coding" panose="020B0609020101020101" pitchFamily="49" charset="-127"/>
-                <a:ea typeface="D2Coding" panose="020B0609020101020101" pitchFamily="49" charset="-127"/>
-              </a:rPr>
-              <a:t>Chatgpt</a:t>
-            </a:r>
-            <a:r>
-              <a:rPr lang="en-US" altLang="ko-KR" sz="1600" dirty="0">
-                <a:latin typeface="D2Coding" panose="020B0609020101020101" pitchFamily="49" charset="-127"/>
-                <a:ea typeface="D2Coding" panose="020B0609020101020101" pitchFamily="49" charset="-127"/>
-              </a:rPr>
-              <a:t>, Claude </a:t>
-            </a:r>
-            <a:r>
-              <a:rPr lang="ko-KR" altLang="en-US" sz="1600" dirty="0">
-                <a:latin typeface="D2Coding" panose="020B0609020101020101" pitchFamily="49" charset="-127"/>
-                <a:ea typeface="D2Coding" panose="020B0609020101020101" pitchFamily="49" charset="-127"/>
-              </a:rPr>
-              <a:t>등</a:t>
-            </a:r>
-            <a:r>
-              <a:rPr lang="en-US" altLang="ko-KR" sz="1600" dirty="0">
-                <a:latin typeface="D2Coding" panose="020B0609020101020101" pitchFamily="49" charset="-127"/>
-                <a:ea typeface="D2Coding" panose="020B0609020101020101" pitchFamily="49" charset="-127"/>
-              </a:rPr>
-              <a:t>)</a:t>
-            </a:r>
-            <a:r>
-              <a:rPr lang="ko-KR" altLang="en-US" sz="1600" dirty="0">
-                <a:latin typeface="D2Coding" panose="020B0609020101020101" pitchFamily="49" charset="-127"/>
-                <a:ea typeface="D2Coding" panose="020B0609020101020101" pitchFamily="49" charset="-127"/>
-              </a:rPr>
-              <a:t>에게 원하는 </a:t>
-            </a:r>
-            <a:r>
-              <a:rPr lang="en-US" altLang="ko-KR" sz="1600" dirty="0">
-                <a:latin typeface="D2Coding" panose="020B0609020101020101" pitchFamily="49" charset="-127"/>
-                <a:ea typeface="D2Coding" panose="020B0609020101020101" pitchFamily="49" charset="-127"/>
-              </a:rPr>
-              <a:t>workflow</a:t>
-            </a:r>
-            <a:r>
-              <a:rPr lang="ko-KR" altLang="en-US" sz="1600" dirty="0">
-                <a:latin typeface="D2Coding" panose="020B0609020101020101" pitchFamily="49" charset="-127"/>
-                <a:ea typeface="D2Coding" panose="020B0609020101020101" pitchFamily="49" charset="-127"/>
-              </a:rPr>
-              <a:t>를 정의하여 </a:t>
-            </a:r>
-            <a:r>
-              <a:rPr lang="en-US" altLang="ko-KR" sz="1600" dirty="0">
-                <a:latin typeface="D2Coding" panose="020B0609020101020101" pitchFamily="49" charset="-127"/>
-                <a:ea typeface="D2Coding" panose="020B0609020101020101" pitchFamily="49" charset="-127"/>
-              </a:rPr>
-              <a:t>n8n </a:t>
-            </a:r>
-            <a:r>
-              <a:rPr lang="ko-KR" altLang="en-US" sz="1600" dirty="0">
-                <a:latin typeface="D2Coding" panose="020B0609020101020101" pitchFamily="49" charset="-127"/>
-                <a:ea typeface="D2Coding" panose="020B0609020101020101" pitchFamily="49" charset="-127"/>
-              </a:rPr>
-              <a:t>코드로 생성하라고 한 후 복사</a:t>
-            </a:r>
-            <a:r>
-              <a:rPr lang="en-US" altLang="ko-KR" sz="1600" dirty="0">
-                <a:latin typeface="D2Coding" panose="020B0609020101020101" pitchFamily="49" charset="-127"/>
-                <a:ea typeface="D2Coding" panose="020B0609020101020101" pitchFamily="49" charset="-127"/>
-              </a:rPr>
-              <a:t>-</a:t>
-            </a:r>
-            <a:r>
-              <a:rPr lang="ko-KR" altLang="en-US" sz="1600" dirty="0">
-                <a:latin typeface="D2Coding" panose="020B0609020101020101" pitchFamily="49" charset="-127"/>
-                <a:ea typeface="D2Coding" panose="020B0609020101020101" pitchFamily="49" charset="-127"/>
-              </a:rPr>
-              <a:t>붙이기</a:t>
-            </a:r>
-            <a:endParaRPr lang="en-US" altLang="ko-KR" sz="1600" dirty="0">
-              <a:latin typeface="D2Coding" panose="020B0609020101020101" pitchFamily="49" charset="-127"/>
-              <a:ea typeface="D2Coding" panose="020B0609020101020101" pitchFamily="49" charset="-127"/>
-            </a:endParaRPr>
-          </a:p>
-          <a:p>
-            <a:pPr marL="285750" indent="-285750">
-              <a:lnSpc>
-                <a:spcPct val="200000"/>
-              </a:lnSpc>
-              <a:buFont typeface="Wingdings" panose="05000000000000000000" pitchFamily="2" charset="2"/>
-              <a:buChar char="v"/>
-            </a:pPr>
-            <a:r>
-              <a:rPr lang="ko-KR" altLang="en-US" sz="1600" dirty="0">
-                <a:latin typeface="D2Coding" panose="020B0609020101020101" pitchFamily="49" charset="-127"/>
-                <a:ea typeface="D2Coding" panose="020B0609020101020101" pitchFamily="49" charset="-127"/>
-              </a:rPr>
-              <a:t>유튜브</a:t>
-            </a:r>
-            <a:r>
-              <a:rPr lang="en-US" altLang="ko-KR" sz="1600" dirty="0">
-                <a:latin typeface="D2Coding" panose="020B0609020101020101" pitchFamily="49" charset="-127"/>
-                <a:ea typeface="D2Coding" panose="020B0609020101020101" pitchFamily="49" charset="-127"/>
-              </a:rPr>
-              <a:t> </a:t>
-            </a:r>
-            <a:r>
-              <a:rPr lang="ko-KR" altLang="en-US" sz="1600" dirty="0">
-                <a:latin typeface="D2Coding" panose="020B0609020101020101" pitchFamily="49" charset="-127"/>
-                <a:ea typeface="D2Coding" panose="020B0609020101020101" pitchFamily="49" charset="-127"/>
-              </a:rPr>
-              <a:t>동영상의 </a:t>
-            </a:r>
-            <a:r>
-              <a:rPr lang="en-US" altLang="ko-KR" sz="1600" dirty="0">
-                <a:latin typeface="D2Coding" panose="020B0609020101020101" pitchFamily="49" charset="-127"/>
-                <a:ea typeface="D2Coding" panose="020B0609020101020101" pitchFamily="49" charset="-127"/>
-              </a:rPr>
-              <a:t>n8n workflow</a:t>
-            </a:r>
-            <a:r>
-              <a:rPr lang="ko-KR" altLang="en-US" sz="1600" dirty="0">
-                <a:latin typeface="D2Coding" panose="020B0609020101020101" pitchFamily="49" charset="-127"/>
-                <a:ea typeface="D2Coding" panose="020B0609020101020101" pitchFamily="49" charset="-127"/>
-              </a:rPr>
-              <a:t>를 </a:t>
-            </a:r>
-            <a:r>
-              <a:rPr lang="ko-KR" altLang="en-US" sz="1600" dirty="0" err="1">
-                <a:latin typeface="D2Coding" panose="020B0609020101020101" pitchFamily="49" charset="-127"/>
-                <a:ea typeface="D2Coding" panose="020B0609020101020101" pitchFamily="49" charset="-127"/>
-              </a:rPr>
-              <a:t>화면캡쳐하여</a:t>
-            </a:r>
-            <a:r>
-              <a:rPr lang="ko-KR" altLang="en-US" sz="1600" dirty="0">
-                <a:latin typeface="D2Coding" panose="020B0609020101020101" pitchFamily="49" charset="-127"/>
-                <a:ea typeface="D2Coding" panose="020B0609020101020101" pitchFamily="49" charset="-127"/>
-              </a:rPr>
-              <a:t> </a:t>
-            </a:r>
-            <a:r>
-              <a:rPr lang="en-US" altLang="ko-KR" sz="1600" dirty="0">
-                <a:latin typeface="D2Coding" panose="020B0609020101020101" pitchFamily="49" charset="-127"/>
-                <a:ea typeface="D2Coding" panose="020B0609020101020101" pitchFamily="49" charset="-127"/>
-              </a:rPr>
-              <a:t>LLM</a:t>
-            </a:r>
-            <a:r>
-              <a:rPr lang="ko-KR" altLang="en-US" sz="1600" dirty="0">
-                <a:latin typeface="D2Coding" panose="020B0609020101020101" pitchFamily="49" charset="-127"/>
-                <a:ea typeface="D2Coding" panose="020B0609020101020101" pitchFamily="49" charset="-127"/>
-              </a:rPr>
-              <a:t>에서 </a:t>
-            </a:r>
-            <a:r>
-              <a:rPr lang="en-US" altLang="ko-KR" sz="1600" dirty="0">
-                <a:latin typeface="D2Coding" panose="020B0609020101020101" pitchFamily="49" charset="-127"/>
-                <a:ea typeface="D2Coding" panose="020B0609020101020101" pitchFamily="49" charset="-127"/>
-              </a:rPr>
-              <a:t>n8n </a:t>
-            </a:r>
-            <a:r>
-              <a:rPr lang="ko-KR" altLang="en-US" sz="1600" dirty="0">
-                <a:latin typeface="D2Coding" panose="020B0609020101020101" pitchFamily="49" charset="-127"/>
-                <a:ea typeface="D2Coding" panose="020B0609020101020101" pitchFamily="49" charset="-127"/>
-              </a:rPr>
-              <a:t>코드 생성 요청한 후 복사</a:t>
-            </a:r>
-            <a:r>
-              <a:rPr lang="en-US" altLang="ko-KR" sz="1600" dirty="0">
-                <a:latin typeface="D2Coding" panose="020B0609020101020101" pitchFamily="49" charset="-127"/>
-                <a:ea typeface="D2Coding" panose="020B0609020101020101" pitchFamily="49" charset="-127"/>
-              </a:rPr>
-              <a:t>-</a:t>
-            </a:r>
-            <a:r>
-              <a:rPr lang="ko-KR" altLang="en-US" sz="1600" dirty="0">
-                <a:latin typeface="D2Coding" panose="020B0609020101020101" pitchFamily="49" charset="-127"/>
-                <a:ea typeface="D2Coding" panose="020B0609020101020101" pitchFamily="49" charset="-127"/>
-              </a:rPr>
-              <a:t>붙이기</a:t>
-            </a:r>
-            <a:endParaRPr lang="en-US" altLang="ko-KR" sz="1600" dirty="0">
-              <a:latin typeface="D2Coding" panose="020B0609020101020101" pitchFamily="49" charset="-127"/>
-              <a:ea typeface="D2Coding" panose="020B0609020101020101" pitchFamily="49" charset="-127"/>
-            </a:endParaRPr>
-          </a:p>
-          <a:p>
-            <a:pPr marL="285750" indent="-285750">
-              <a:lnSpc>
-                <a:spcPct val="200000"/>
-              </a:lnSpc>
-              <a:buFont typeface="Wingdings" panose="05000000000000000000" pitchFamily="2" charset="2"/>
-              <a:buChar char="v"/>
-            </a:pPr>
-            <a:r>
-              <a:rPr lang="en-US" altLang="ko-KR" sz="1600" dirty="0" err="1">
-                <a:latin typeface="D2Coding" panose="020B0609020101020101" pitchFamily="49" charset="-127"/>
-                <a:ea typeface="D2Coding" panose="020B0609020101020101" pitchFamily="49" charset="-127"/>
-              </a:rPr>
-              <a:t>claude</a:t>
-            </a:r>
-            <a:r>
-              <a:rPr lang="en-US" altLang="ko-KR" sz="1600" dirty="0">
-                <a:latin typeface="D2Coding" panose="020B0609020101020101" pitchFamily="49" charset="-127"/>
-                <a:ea typeface="D2Coding" panose="020B0609020101020101" pitchFamily="49" charset="-127"/>
-              </a:rPr>
-              <a:t> desktop </a:t>
-            </a:r>
-            <a:r>
-              <a:rPr lang="en-US" altLang="ko-KR" sz="1600" dirty="0">
-                <a:latin typeface="D2Coding" panose="020B0609020101020101" pitchFamily="49" charset="-127"/>
-                <a:ea typeface="D2Coding" panose="020B0609020101020101" pitchFamily="49" charset="-127"/>
-                <a:sym typeface="Wingdings" panose="05000000000000000000" pitchFamily="2" charset="2"/>
-              </a:rPr>
-              <a:t> context7  n8n</a:t>
-            </a:r>
-            <a:r>
-              <a:rPr lang="ko-KR" altLang="en-US" sz="1600" dirty="0">
-                <a:latin typeface="D2Coding" panose="020B0609020101020101" pitchFamily="49" charset="-127"/>
-                <a:ea typeface="D2Coding" panose="020B0609020101020101" pitchFamily="49" charset="-127"/>
-                <a:sym typeface="Wingdings" panose="05000000000000000000" pitchFamily="2" charset="2"/>
-              </a:rPr>
-              <a:t> </a:t>
-            </a:r>
-            <a:r>
-              <a:rPr lang="en-US" altLang="ko-KR" sz="1600" dirty="0">
-                <a:latin typeface="D2Coding" panose="020B0609020101020101" pitchFamily="49" charset="-127"/>
-                <a:ea typeface="D2Coding" panose="020B0609020101020101" pitchFamily="49" charset="-127"/>
-                <a:sym typeface="Wingdings" panose="05000000000000000000" pitchFamily="2" charset="2"/>
-              </a:rPr>
-              <a:t>MCP</a:t>
-            </a:r>
-            <a:r>
-              <a:rPr lang="ko-KR" altLang="en-US" sz="1600" dirty="0">
-                <a:latin typeface="D2Coding" panose="020B0609020101020101" pitchFamily="49" charset="-127"/>
-                <a:ea typeface="D2Coding" panose="020B0609020101020101" pitchFamily="49" charset="-127"/>
-                <a:sym typeface="Wingdings" panose="05000000000000000000" pitchFamily="2" charset="2"/>
-              </a:rPr>
-              <a:t> </a:t>
-            </a:r>
-            <a:r>
-              <a:rPr lang="en-US" altLang="ko-KR" sz="1600" dirty="0">
-                <a:latin typeface="D2Coding" panose="020B0609020101020101" pitchFamily="49" charset="-127"/>
-                <a:ea typeface="D2Coding" panose="020B0609020101020101" pitchFamily="49" charset="-127"/>
-                <a:sym typeface="Wingdings" panose="05000000000000000000" pitchFamily="2" charset="2"/>
-              </a:rPr>
-              <a:t>server</a:t>
-            </a:r>
-            <a:r>
-              <a:rPr lang="ko-KR" altLang="en-US" sz="1600" dirty="0">
-                <a:latin typeface="D2Coding" panose="020B0609020101020101" pitchFamily="49" charset="-127"/>
-                <a:ea typeface="D2Coding" panose="020B0609020101020101" pitchFamily="49" charset="-127"/>
-                <a:sym typeface="Wingdings" panose="05000000000000000000" pitchFamily="2" charset="2"/>
-              </a:rPr>
-              <a:t> 연결</a:t>
-            </a:r>
-            <a:endParaRPr lang="en-US" altLang="ko-KR" sz="1600" dirty="0">
-              <a:latin typeface="D2Coding" panose="020B0609020101020101" pitchFamily="49" charset="-127"/>
-              <a:ea typeface="D2Coding" panose="020B0609020101020101" pitchFamily="49" charset="-127"/>
-              <a:sym typeface="Wingdings" panose="05000000000000000000" pitchFamily="2" charset="2"/>
-            </a:endParaRPr>
-          </a:p>
-          <a:p>
-            <a:pPr marL="742950" lvl="1" indent="-285750">
-              <a:lnSpc>
-                <a:spcPct val="200000"/>
-              </a:lnSpc>
-              <a:buFont typeface="Wingdings" panose="05000000000000000000" pitchFamily="2" charset="2"/>
-              <a:buChar char="v"/>
-            </a:pPr>
-            <a:r>
-              <a:rPr lang="en-US" altLang="ko-KR" sz="1400" dirty="0">
-                <a:solidFill>
-                  <a:schemeClr val="accent5"/>
-                </a:solidFill>
-                <a:latin typeface="D2Coding" panose="020B0609020101020101" pitchFamily="49" charset="-127"/>
-                <a:ea typeface="D2Coding" panose="020B0609020101020101" pitchFamily="49" charset="-127"/>
-                <a:hlinkClick r:id="rId2"/>
-              </a:rPr>
-              <a:t>AI "</a:t>
-            </a:r>
-            <a:r>
-              <a:rPr lang="ko-KR" altLang="en-US" sz="1400" dirty="0">
-                <a:solidFill>
-                  <a:schemeClr val="accent5"/>
-                </a:solidFill>
-                <a:latin typeface="D2Coding" panose="020B0609020101020101" pitchFamily="49" charset="-127"/>
-                <a:ea typeface="D2Coding" panose="020B0609020101020101" pitchFamily="49" charset="-127"/>
-                <a:hlinkClick r:id="rId2"/>
-              </a:rPr>
-              <a:t>딸깍</a:t>
-            </a:r>
-            <a:r>
-              <a:rPr lang="en-US" altLang="ko-KR" sz="1400" dirty="0">
-                <a:solidFill>
-                  <a:schemeClr val="accent5"/>
-                </a:solidFill>
-                <a:latin typeface="D2Coding" panose="020B0609020101020101" pitchFamily="49" charset="-127"/>
-                <a:ea typeface="D2Coding" panose="020B0609020101020101" pitchFamily="49" charset="-127"/>
-                <a:hlinkClick r:id="rId2"/>
-              </a:rPr>
-              <a:t>" </a:t>
-            </a:r>
-            <a:r>
-              <a:rPr lang="ko-KR" altLang="en-US" sz="1400" dirty="0">
-                <a:solidFill>
-                  <a:schemeClr val="accent5"/>
-                </a:solidFill>
-                <a:latin typeface="D2Coding" panose="020B0609020101020101" pitchFamily="49" charset="-127"/>
-                <a:ea typeface="D2Coding" panose="020B0609020101020101" pitchFamily="49" charset="-127"/>
-                <a:hlinkClick r:id="rId2"/>
-              </a:rPr>
-              <a:t>으로 만드는 슈퍼자동화 시나리오</a:t>
-            </a:r>
-            <a:r>
-              <a:rPr lang="en-US" altLang="ko-KR" sz="1400" dirty="0">
-                <a:solidFill>
-                  <a:schemeClr val="accent5"/>
-                </a:solidFill>
-                <a:latin typeface="D2Coding" panose="020B0609020101020101" pitchFamily="49" charset="-127"/>
-                <a:ea typeface="D2Coding" panose="020B0609020101020101" pitchFamily="49" charset="-127"/>
-                <a:hlinkClick r:id="rId2"/>
-              </a:rPr>
-              <a:t>! </a:t>
-            </a:r>
-            <a:r>
-              <a:rPr lang="ko-KR" altLang="en-US" sz="1400" dirty="0" err="1">
-                <a:solidFill>
-                  <a:schemeClr val="accent5"/>
-                </a:solidFill>
-                <a:latin typeface="D2Coding" panose="020B0609020101020101" pitchFamily="49" charset="-127"/>
-                <a:ea typeface="D2Coding" panose="020B0609020101020101" pitchFamily="49" charset="-127"/>
-                <a:hlinkClick r:id="rId2"/>
-              </a:rPr>
-              <a:t>클로드</a:t>
-            </a:r>
-            <a:r>
-              <a:rPr lang="en-US" altLang="ko-KR" sz="1400" dirty="0">
-                <a:solidFill>
-                  <a:schemeClr val="accent5"/>
-                </a:solidFill>
-                <a:latin typeface="D2Coding" panose="020B0609020101020101" pitchFamily="49" charset="-127"/>
-                <a:ea typeface="D2Coding" panose="020B0609020101020101" pitchFamily="49" charset="-127"/>
-                <a:hlinkClick r:id="rId2"/>
-              </a:rPr>
-              <a:t>4+MCP </a:t>
-            </a:r>
-            <a:r>
-              <a:rPr lang="ko-KR" altLang="en-US" sz="1400" dirty="0">
-                <a:solidFill>
-                  <a:schemeClr val="accent5"/>
-                </a:solidFill>
-                <a:latin typeface="D2Coding" panose="020B0609020101020101" pitchFamily="49" charset="-127"/>
-                <a:ea typeface="D2Coding" panose="020B0609020101020101" pitchFamily="49" charset="-127"/>
-                <a:hlinkClick r:id="rId2"/>
-              </a:rPr>
-              <a:t>가 미쳤습니다</a:t>
-            </a:r>
-            <a:endParaRPr lang="en-US" altLang="ko-KR" sz="1400" dirty="0">
-              <a:solidFill>
-                <a:schemeClr val="accent5"/>
-              </a:solidFill>
-              <a:latin typeface="D2Coding" panose="020B0609020101020101" pitchFamily="49" charset="-127"/>
-              <a:ea typeface="D2Coding" panose="020B0609020101020101" pitchFamily="49" charset="-127"/>
-            </a:endParaRPr>
-          </a:p>
-          <a:p>
-            <a:pPr marL="742950" lvl="1" indent="-285750">
-              <a:lnSpc>
-                <a:spcPct val="200000"/>
-              </a:lnSpc>
-              <a:buFont typeface="Wingdings" panose="05000000000000000000" pitchFamily="2" charset="2"/>
-              <a:buChar char="v"/>
-            </a:pPr>
-            <a:r>
-              <a:rPr lang="en-US" altLang="ko-KR" sz="1400" dirty="0">
-                <a:latin typeface="D2Coding" panose="020B0609020101020101" pitchFamily="49" charset="-127"/>
-                <a:ea typeface="D2Coding" panose="020B0609020101020101" pitchFamily="49" charset="-127"/>
-                <a:sym typeface="Wingdings" panose="05000000000000000000" pitchFamily="2" charset="2"/>
-                <a:hlinkClick r:id="rId3"/>
-              </a:rPr>
-              <a:t>n8n </a:t>
-            </a:r>
-            <a:r>
-              <a:rPr lang="ko-KR" altLang="en-US" sz="1400" dirty="0">
-                <a:latin typeface="D2Coding" panose="020B0609020101020101" pitchFamily="49" charset="-127"/>
-                <a:ea typeface="D2Coding" panose="020B0609020101020101" pitchFamily="49" charset="-127"/>
-                <a:sym typeface="Wingdings" panose="05000000000000000000" pitchFamily="2" charset="2"/>
-                <a:hlinkClick r:id="rId3"/>
-              </a:rPr>
-              <a:t>노가다 끝</a:t>
-            </a:r>
-            <a:r>
-              <a:rPr lang="en-US" altLang="ko-KR" sz="1400" dirty="0">
-                <a:latin typeface="D2Coding" panose="020B0609020101020101" pitchFamily="49" charset="-127"/>
-                <a:ea typeface="D2Coding" panose="020B0609020101020101" pitchFamily="49" charset="-127"/>
-                <a:sym typeface="Wingdings" panose="05000000000000000000" pitchFamily="2" charset="2"/>
-                <a:hlinkClick r:id="rId3"/>
-              </a:rPr>
-              <a:t>: </a:t>
-            </a:r>
-            <a:r>
-              <a:rPr lang="ko-KR" altLang="en-US" sz="1400" dirty="0" err="1">
-                <a:latin typeface="D2Coding" panose="020B0609020101020101" pitchFamily="49" charset="-127"/>
-                <a:ea typeface="D2Coding" panose="020B0609020101020101" pitchFamily="49" charset="-127"/>
-                <a:sym typeface="Wingdings" panose="05000000000000000000" pitchFamily="2" charset="2"/>
-                <a:hlinkClick r:id="rId3"/>
-              </a:rPr>
-              <a:t>클로드로</a:t>
-            </a:r>
-            <a:r>
-              <a:rPr lang="ko-KR" altLang="en-US" sz="1400" dirty="0">
-                <a:latin typeface="D2Coding" panose="020B0609020101020101" pitchFamily="49" charset="-127"/>
-                <a:ea typeface="D2Coding" panose="020B0609020101020101" pitchFamily="49" charset="-127"/>
-                <a:sym typeface="Wingdings" panose="05000000000000000000" pitchFamily="2" charset="2"/>
-                <a:hlinkClick r:id="rId3"/>
-              </a:rPr>
-              <a:t> 워크플로우 자동 생성하는 </a:t>
-            </a:r>
-            <a:r>
-              <a:rPr lang="en-US" altLang="ko-KR" sz="1400" dirty="0">
-                <a:latin typeface="D2Coding" panose="020B0609020101020101" pitchFamily="49" charset="-127"/>
-                <a:ea typeface="D2Coding" panose="020B0609020101020101" pitchFamily="49" charset="-127"/>
-                <a:sym typeface="Wingdings" panose="05000000000000000000" pitchFamily="2" charset="2"/>
-                <a:hlinkClick r:id="rId3"/>
-              </a:rPr>
-              <a:t>'8</a:t>
-            </a:r>
-            <a:r>
-              <a:rPr lang="ko-KR" altLang="en-US" sz="1400" dirty="0">
-                <a:latin typeface="D2Coding" panose="020B0609020101020101" pitchFamily="49" charset="-127"/>
-                <a:ea typeface="D2Coding" panose="020B0609020101020101" pitchFamily="49" charset="-127"/>
-                <a:sym typeface="Wingdings" panose="05000000000000000000" pitchFamily="2" charset="2"/>
-                <a:hlinkClick r:id="rId3"/>
-              </a:rPr>
-              <a:t>단계 프롬프트 </a:t>
-            </a:r>
-            <a:r>
-              <a:rPr lang="en-US" altLang="ko-KR" sz="1400" dirty="0">
-                <a:latin typeface="D2Coding" panose="020B0609020101020101" pitchFamily="49" charset="-127"/>
-                <a:ea typeface="D2Coding" panose="020B0609020101020101" pitchFamily="49" charset="-127"/>
-                <a:sym typeface="Wingdings" panose="05000000000000000000" pitchFamily="2" charset="2"/>
-                <a:hlinkClick r:id="rId3"/>
-              </a:rPr>
-              <a:t>+ MCP </a:t>
-            </a:r>
-            <a:r>
-              <a:rPr lang="ko-KR" altLang="en-US" sz="1400" dirty="0">
-                <a:latin typeface="D2Coding" panose="020B0609020101020101" pitchFamily="49" charset="-127"/>
-                <a:ea typeface="D2Coding" panose="020B0609020101020101" pitchFamily="49" charset="-127"/>
-                <a:sym typeface="Wingdings" panose="05000000000000000000" pitchFamily="2" charset="2"/>
-                <a:hlinkClick r:id="rId3"/>
-              </a:rPr>
-              <a:t>세팅</a:t>
-            </a:r>
-            <a:r>
-              <a:rPr lang="en-US" altLang="ko-KR" sz="1400" dirty="0">
-                <a:latin typeface="D2Coding" panose="020B0609020101020101" pitchFamily="49" charset="-127"/>
-                <a:ea typeface="D2Coding" panose="020B0609020101020101" pitchFamily="49" charset="-127"/>
-                <a:sym typeface="Wingdings" panose="05000000000000000000" pitchFamily="2" charset="2"/>
-                <a:hlinkClick r:id="rId3"/>
-              </a:rPr>
-              <a:t>' (</a:t>
-            </a:r>
-            <a:r>
-              <a:rPr lang="ko-KR" altLang="en-US" sz="1400" dirty="0">
-                <a:latin typeface="D2Coding" panose="020B0609020101020101" pitchFamily="49" charset="-127"/>
-                <a:ea typeface="D2Coding" panose="020B0609020101020101" pitchFamily="49" charset="-127"/>
-                <a:sym typeface="Wingdings" panose="05000000000000000000" pitchFamily="2" charset="2"/>
-                <a:hlinkClick r:id="rId3"/>
-              </a:rPr>
-              <a:t>성공률 </a:t>
-            </a:r>
-            <a:r>
-              <a:rPr lang="en-US" altLang="ko-KR" sz="1400" dirty="0">
-                <a:latin typeface="D2Coding" panose="020B0609020101020101" pitchFamily="49" charset="-127"/>
-                <a:ea typeface="D2Coding" panose="020B0609020101020101" pitchFamily="49" charset="-127"/>
-                <a:sym typeface="Wingdings" panose="05000000000000000000" pitchFamily="2" charset="2"/>
-                <a:hlinkClick r:id="rId3"/>
-              </a:rPr>
-              <a:t>10</a:t>
-            </a:r>
-            <a:r>
-              <a:rPr lang="ko-KR" altLang="en-US" sz="1400" dirty="0">
-                <a:latin typeface="D2Coding" panose="020B0609020101020101" pitchFamily="49" charset="-127"/>
-                <a:ea typeface="D2Coding" panose="020B0609020101020101" pitchFamily="49" charset="-127"/>
-                <a:sym typeface="Wingdings" panose="05000000000000000000" pitchFamily="2" charset="2"/>
-                <a:hlinkClick r:id="rId3"/>
-              </a:rPr>
-              <a:t>배</a:t>
-            </a:r>
-            <a:r>
-              <a:rPr lang="en-US" altLang="ko-KR" sz="1400" dirty="0">
-                <a:latin typeface="D2Coding" panose="020B0609020101020101" pitchFamily="49" charset="-127"/>
-                <a:ea typeface="D2Coding" panose="020B0609020101020101" pitchFamily="49" charset="-127"/>
-                <a:sym typeface="Wingdings" panose="05000000000000000000" pitchFamily="2" charset="2"/>
-                <a:hlinkClick r:id="rId3"/>
-              </a:rPr>
-              <a:t>)</a:t>
-            </a:r>
-            <a:endParaRPr lang="en-US" altLang="ko-KR" sz="1400" dirty="0">
-              <a:latin typeface="D2Coding" panose="020B0609020101020101" pitchFamily="49" charset="-127"/>
-              <a:ea typeface="D2Coding" panose="020B0609020101020101" pitchFamily="49" charset="-127"/>
-              <a:sym typeface="Wingdings" panose="05000000000000000000" pitchFamily="2" charset="2"/>
-            </a:endParaRPr>
-          </a:p>
-          <a:p>
-            <a:pPr marL="285750" indent="-285750">
-              <a:lnSpc>
-                <a:spcPct val="200000"/>
-              </a:lnSpc>
-              <a:buFont typeface="Wingdings" panose="05000000000000000000" pitchFamily="2" charset="2"/>
-              <a:buChar char="v"/>
-            </a:pPr>
-            <a:r>
-              <a:rPr lang="en-US" altLang="ko-KR" sz="1600" dirty="0">
-                <a:latin typeface="D2Coding" panose="020B0609020101020101" pitchFamily="49" charset="-127"/>
-                <a:ea typeface="D2Coding" panose="020B0609020101020101" pitchFamily="49" charset="-127"/>
-                <a:sym typeface="Wingdings" panose="05000000000000000000" pitchFamily="2" charset="2"/>
-              </a:rPr>
-              <a:t>Antigravity  context7  n8n</a:t>
-            </a:r>
-            <a:r>
-              <a:rPr lang="ko-KR" altLang="en-US" sz="1600" dirty="0">
-                <a:latin typeface="D2Coding" panose="020B0609020101020101" pitchFamily="49" charset="-127"/>
-                <a:ea typeface="D2Coding" panose="020B0609020101020101" pitchFamily="49" charset="-127"/>
-                <a:sym typeface="Wingdings" panose="05000000000000000000" pitchFamily="2" charset="2"/>
-              </a:rPr>
-              <a:t> </a:t>
-            </a:r>
-            <a:r>
-              <a:rPr lang="en-US" altLang="ko-KR" sz="1600" dirty="0">
-                <a:latin typeface="D2Coding" panose="020B0609020101020101" pitchFamily="49" charset="-127"/>
-                <a:ea typeface="D2Coding" panose="020B0609020101020101" pitchFamily="49" charset="-127"/>
-                <a:sym typeface="Wingdings" panose="05000000000000000000" pitchFamily="2" charset="2"/>
-              </a:rPr>
-              <a:t>MCP</a:t>
-            </a:r>
-            <a:r>
-              <a:rPr lang="ko-KR" altLang="en-US" sz="1600" dirty="0">
-                <a:latin typeface="D2Coding" panose="020B0609020101020101" pitchFamily="49" charset="-127"/>
-                <a:ea typeface="D2Coding" panose="020B0609020101020101" pitchFamily="49" charset="-127"/>
-                <a:sym typeface="Wingdings" panose="05000000000000000000" pitchFamily="2" charset="2"/>
-              </a:rPr>
-              <a:t> </a:t>
-            </a:r>
-            <a:r>
-              <a:rPr lang="en-US" altLang="ko-KR" sz="1600" dirty="0">
-                <a:latin typeface="D2Coding" panose="020B0609020101020101" pitchFamily="49" charset="-127"/>
-                <a:ea typeface="D2Coding" panose="020B0609020101020101" pitchFamily="49" charset="-127"/>
-                <a:sym typeface="Wingdings" panose="05000000000000000000" pitchFamily="2" charset="2"/>
-              </a:rPr>
-              <a:t>server</a:t>
-            </a:r>
-            <a:r>
-              <a:rPr lang="ko-KR" altLang="en-US" sz="1600" dirty="0">
-                <a:latin typeface="D2Coding" panose="020B0609020101020101" pitchFamily="49" charset="-127"/>
-                <a:ea typeface="D2Coding" panose="020B0609020101020101" pitchFamily="49" charset="-127"/>
-                <a:sym typeface="Wingdings" panose="05000000000000000000" pitchFamily="2" charset="2"/>
-              </a:rPr>
-              <a:t> 연결하는 것도 귀찮다면</a:t>
-            </a:r>
-            <a:r>
-              <a:rPr lang="en-US" altLang="ko-KR" sz="1600" dirty="0">
-                <a:latin typeface="D2Coding" panose="020B0609020101020101" pitchFamily="49" charset="-127"/>
-                <a:ea typeface="D2Coding" panose="020B0609020101020101" pitchFamily="49" charset="-127"/>
-                <a:sym typeface="Wingdings" panose="05000000000000000000" pitchFamily="2" charset="2"/>
-              </a:rPr>
-              <a:t>,</a:t>
-            </a:r>
-          </a:p>
-          <a:p>
-            <a:pPr marL="285750" indent="-285750">
-              <a:lnSpc>
-                <a:spcPct val="200000"/>
-              </a:lnSpc>
-              <a:buFont typeface="Wingdings" panose="05000000000000000000" pitchFamily="2" charset="2"/>
-              <a:buChar char="v"/>
-            </a:pPr>
-            <a:r>
-              <a:rPr lang="en-US" altLang="ko-KR" sz="1600" dirty="0">
-                <a:latin typeface="D2Coding" panose="020B0609020101020101" pitchFamily="49" charset="-127"/>
-                <a:ea typeface="D2Coding" panose="020B0609020101020101" pitchFamily="49" charset="-127"/>
-                <a:sym typeface="Wingdings" panose="05000000000000000000" pitchFamily="2" charset="2"/>
-              </a:rPr>
-              <a:t>Antigravity</a:t>
-            </a:r>
-            <a:r>
-              <a:rPr lang="ko-KR" altLang="en-US" sz="1600" dirty="0">
-                <a:latin typeface="D2Coding" panose="020B0609020101020101" pitchFamily="49" charset="-127"/>
-                <a:ea typeface="D2Coding" panose="020B0609020101020101" pitchFamily="49" charset="-127"/>
-                <a:sym typeface="Wingdings" panose="05000000000000000000" pitchFamily="2" charset="2"/>
-              </a:rPr>
-              <a:t>에서 </a:t>
-            </a:r>
-            <a:r>
-              <a:rPr lang="en-US" altLang="ko-KR" sz="1600" dirty="0">
-                <a:latin typeface="D2Coding" panose="020B0609020101020101" pitchFamily="49" charset="-127"/>
-                <a:ea typeface="D2Coding" panose="020B0609020101020101" pitchFamily="49" charset="-127"/>
-                <a:sym typeface="Wingdings" panose="05000000000000000000" pitchFamily="2" charset="2"/>
-              </a:rPr>
-              <a:t>Workflow </a:t>
-            </a:r>
-            <a:r>
-              <a:rPr lang="ko-KR" altLang="en-US" sz="1600" dirty="0">
-                <a:latin typeface="D2Coding" panose="020B0609020101020101" pitchFamily="49" charset="-127"/>
-                <a:ea typeface="D2Coding" panose="020B0609020101020101" pitchFamily="49" charset="-127"/>
-                <a:sym typeface="Wingdings" panose="05000000000000000000" pitchFamily="2" charset="2"/>
-              </a:rPr>
-              <a:t>직접 만들기 </a:t>
-            </a:r>
-            <a:r>
-              <a:rPr lang="en-US" altLang="ko-KR" sz="1600" dirty="0">
-                <a:latin typeface="D2Coding" panose="020B0609020101020101" pitchFamily="49" charset="-127"/>
-                <a:ea typeface="D2Coding" panose="020B0609020101020101" pitchFamily="49" charset="-127"/>
-                <a:sym typeface="Wingdings" panose="05000000000000000000" pitchFamily="2" charset="2"/>
-              </a:rPr>
-              <a:t> </a:t>
-            </a:r>
-            <a:r>
-              <a:rPr lang="en-US" altLang="ko-KR" sz="1600" dirty="0">
-                <a:latin typeface="D2Coding" panose="020B0609020101020101" pitchFamily="49" charset="-127"/>
-                <a:ea typeface="D2Coding" panose="020B0609020101020101" pitchFamily="49" charset="-127"/>
-                <a:sym typeface="Wingdings" panose="05000000000000000000" pitchFamily="2" charset="2"/>
-                <a:hlinkClick r:id="rId4"/>
-              </a:rPr>
-              <a:t>~~</a:t>
-            </a:r>
-            <a:r>
-              <a:rPr lang="ko-KR" altLang="en-US" sz="1600" dirty="0">
-                <a:latin typeface="D2Coding" panose="020B0609020101020101" pitchFamily="49" charset="-127"/>
-                <a:ea typeface="D2Coding" panose="020B0609020101020101" pitchFamily="49" charset="-127"/>
-                <a:sym typeface="Wingdings" panose="05000000000000000000" pitchFamily="2" charset="2"/>
-                <a:hlinkClick r:id="rId4"/>
-              </a:rPr>
-              <a:t> </a:t>
-            </a:r>
-            <a:r>
-              <a:rPr lang="en-US" altLang="ko-KR" sz="1600" dirty="0">
-                <a:latin typeface="D2Coding" panose="020B0609020101020101" pitchFamily="49" charset="-127"/>
-                <a:ea typeface="D2Coding" panose="020B0609020101020101" pitchFamily="49" charset="-127"/>
-                <a:sym typeface="Wingdings" panose="05000000000000000000" pitchFamily="2" charset="2"/>
-                <a:hlinkClick r:id="rId4"/>
-              </a:rPr>
-              <a:t>"</a:t>
-            </a:r>
-            <a:r>
-              <a:rPr lang="ko-KR" altLang="en-US" sz="1600" dirty="0">
-                <a:latin typeface="D2Coding" panose="020B0609020101020101" pitchFamily="49" charset="-127"/>
-                <a:ea typeface="D2Coding" panose="020B0609020101020101" pitchFamily="49" charset="-127"/>
-                <a:sym typeface="Wingdings" panose="05000000000000000000" pitchFamily="2" charset="2"/>
-                <a:hlinkClick r:id="rId4"/>
-              </a:rPr>
-              <a:t>이걸로</a:t>
-            </a:r>
-            <a:r>
-              <a:rPr lang="en-US" altLang="ko-KR" sz="1600" dirty="0">
-                <a:latin typeface="D2Coding" panose="020B0609020101020101" pitchFamily="49" charset="-127"/>
-                <a:ea typeface="D2Coding" panose="020B0609020101020101" pitchFamily="49" charset="-127"/>
-                <a:sym typeface="Wingdings" panose="05000000000000000000" pitchFamily="2" charset="2"/>
-                <a:hlinkClick r:id="rId4"/>
-              </a:rPr>
-              <a:t>" </a:t>
-            </a:r>
-            <a:r>
-              <a:rPr lang="ko-KR" altLang="en-US" sz="1600" dirty="0">
-                <a:latin typeface="D2Coding" panose="020B0609020101020101" pitchFamily="49" charset="-127"/>
-                <a:ea typeface="D2Coding" panose="020B0609020101020101" pitchFamily="49" charset="-127"/>
-                <a:sym typeface="Wingdings" panose="05000000000000000000" pitchFamily="2" charset="2"/>
-                <a:hlinkClick r:id="rId4"/>
-              </a:rPr>
-              <a:t>자동화의 판도가 </a:t>
-            </a:r>
-            <a:r>
-              <a:rPr lang="en-US" altLang="ko-KR" sz="1600" dirty="0">
-                <a:latin typeface="D2Coding" panose="020B0609020101020101" pitchFamily="49" charset="-127"/>
-                <a:ea typeface="D2Coding" panose="020B0609020101020101" pitchFamily="49" charset="-127"/>
-                <a:sym typeface="Wingdings" panose="05000000000000000000" pitchFamily="2" charset="2"/>
-                <a:hlinkClick r:id="rId4"/>
-              </a:rPr>
-              <a:t>(</a:t>
-            </a:r>
-            <a:r>
-              <a:rPr lang="ko-KR" altLang="en-US" sz="1600" dirty="0">
-                <a:latin typeface="D2Coding" panose="020B0609020101020101" pitchFamily="49" charset="-127"/>
-                <a:ea typeface="D2Coding" panose="020B0609020101020101" pitchFamily="49" charset="-127"/>
-                <a:sym typeface="Wingdings" panose="05000000000000000000" pitchFamily="2" charset="2"/>
-                <a:hlinkClick r:id="rId4"/>
-              </a:rPr>
-              <a:t>구글 </a:t>
-            </a:r>
-            <a:r>
-              <a:rPr lang="ko-KR" altLang="en-US" sz="1600" dirty="0" err="1">
-                <a:latin typeface="D2Coding" panose="020B0609020101020101" pitchFamily="49" charset="-127"/>
-                <a:ea typeface="D2Coding" panose="020B0609020101020101" pitchFamily="49" charset="-127"/>
-                <a:sym typeface="Wingdings" panose="05000000000000000000" pitchFamily="2" charset="2"/>
-                <a:hlinkClick r:id="rId4"/>
-              </a:rPr>
-              <a:t>안티그래비티</a:t>
-            </a:r>
-            <a:r>
-              <a:rPr lang="en-US" altLang="ko-KR" sz="1600" dirty="0">
-                <a:latin typeface="D2Coding" panose="020B0609020101020101" pitchFamily="49" charset="-127"/>
-                <a:ea typeface="D2Coding" panose="020B0609020101020101" pitchFamily="49" charset="-127"/>
-                <a:sym typeface="Wingdings" panose="05000000000000000000" pitchFamily="2" charset="2"/>
-                <a:hlinkClick r:id="rId4"/>
-              </a:rPr>
-              <a:t>)</a:t>
-            </a:r>
-            <a:endParaRPr lang="ko-KR" altLang="en-US" sz="1600" dirty="0"/>
-          </a:p>
-        </p:txBody>
-      </p:sp>
-      <p:sp>
-        <p:nvSpPr>
-          <p:cNvPr id="2" name="TextBox 1">
-            <a:extLst>
-              <a:ext uri="{FF2B5EF4-FFF2-40B4-BE49-F238E27FC236}">
-                <a16:creationId xmlns:a16="http://schemas.microsoft.com/office/drawing/2014/main" id="{EC80D5E0-C6FF-6BBF-600F-FAA66AF19197}"/>
-              </a:ext>
-            </a:extLst>
-          </p:cNvPr>
-          <p:cNvSpPr txBox="1"/>
-          <p:nvPr/>
-        </p:nvSpPr>
-        <p:spPr>
-          <a:xfrm>
-            <a:off x="582095" y="1400175"/>
-            <a:ext cx="11143180" cy="880819"/>
-          </a:xfrm>
-          <a:prstGeom prst="rect">
-            <a:avLst/>
-          </a:prstGeom>
-          <a:noFill/>
-        </p:spPr>
-        <p:txBody>
-          <a:bodyPr wrap="square" rtlCol="0">
-            <a:spAutoFit/>
-          </a:bodyPr>
-          <a:lstStyle/>
-          <a:p>
-            <a:pPr>
-              <a:lnSpc>
-                <a:spcPct val="150000"/>
-              </a:lnSpc>
-            </a:pPr>
-            <a:r>
-              <a:rPr lang="en-US" altLang="ko-KR" dirty="0">
-                <a:latin typeface="D2Coding" panose="020B0609020101020101" pitchFamily="49" charset="-127"/>
-                <a:ea typeface="D2Coding" panose="020B0609020101020101" pitchFamily="49" charset="-127"/>
-              </a:rPr>
-              <a:t>LLM</a:t>
-            </a:r>
-            <a:r>
-              <a:rPr lang="ko-KR" altLang="en-US" dirty="0">
-                <a:latin typeface="D2Coding" panose="020B0609020101020101" pitchFamily="49" charset="-127"/>
-                <a:ea typeface="D2Coding" panose="020B0609020101020101" pitchFamily="49" charset="-127"/>
-              </a:rPr>
-              <a:t>에게 </a:t>
-            </a:r>
-            <a:r>
-              <a:rPr lang="en-US" altLang="ko-KR" dirty="0">
-                <a:latin typeface="D2Coding" panose="020B0609020101020101" pitchFamily="49" charset="-127"/>
-                <a:ea typeface="D2Coding" panose="020B0609020101020101" pitchFamily="49" charset="-127"/>
-              </a:rPr>
-              <a:t>n8n </a:t>
-            </a:r>
-            <a:r>
-              <a:rPr lang="ko-KR" altLang="en-US" dirty="0">
-                <a:latin typeface="D2Coding" panose="020B0609020101020101" pitchFamily="49" charset="-127"/>
-                <a:ea typeface="D2Coding" panose="020B0609020101020101" pitchFamily="49" charset="-127"/>
-              </a:rPr>
-              <a:t>코드를 부탁해서 복사하고 </a:t>
-            </a:r>
-            <a:r>
-              <a:rPr lang="en-US" altLang="ko-KR" dirty="0">
-                <a:latin typeface="D2Coding" panose="020B0609020101020101" pitchFamily="49" charset="-127"/>
-                <a:ea typeface="D2Coding" panose="020B0609020101020101" pitchFamily="49" charset="-127"/>
-              </a:rPr>
-              <a:t>n8n</a:t>
-            </a:r>
-            <a:r>
-              <a:rPr lang="ko-KR" altLang="en-US" dirty="0">
-                <a:latin typeface="D2Coding" panose="020B0609020101020101" pitchFamily="49" charset="-127"/>
-                <a:ea typeface="D2Coding" panose="020B0609020101020101" pitchFamily="49" charset="-127"/>
-              </a:rPr>
-              <a:t>에 붙여넣기 </a:t>
-            </a:r>
-            <a:r>
-              <a:rPr lang="en-US" altLang="ko-KR" dirty="0">
-                <a:latin typeface="D2Coding" panose="020B0609020101020101" pitchFamily="49" charset="-127"/>
-                <a:ea typeface="D2Coding" panose="020B0609020101020101" pitchFamily="49" charset="-127"/>
-                <a:sym typeface="Wingdings" panose="05000000000000000000" pitchFamily="2" charset="2"/>
-              </a:rPr>
-              <a:t> LLM</a:t>
-            </a:r>
-            <a:r>
-              <a:rPr lang="ko-KR" altLang="en-US" dirty="0">
-                <a:latin typeface="D2Coding" panose="020B0609020101020101" pitchFamily="49" charset="-127"/>
-                <a:ea typeface="D2Coding" panose="020B0609020101020101" pitchFamily="49" charset="-127"/>
-                <a:sym typeface="Wingdings" panose="05000000000000000000" pitchFamily="2" charset="2"/>
-              </a:rPr>
-              <a:t>에게 </a:t>
-            </a:r>
-            <a:r>
-              <a:rPr lang="en-US" altLang="ko-KR" dirty="0">
-                <a:latin typeface="D2Coding" panose="020B0609020101020101" pitchFamily="49" charset="-127"/>
-                <a:ea typeface="D2Coding" panose="020B0609020101020101" pitchFamily="49" charset="-127"/>
-                <a:sym typeface="Wingdings" panose="05000000000000000000" pitchFamily="2" charset="2"/>
-              </a:rPr>
-              <a:t>MCP serve</a:t>
-            </a:r>
-            <a:r>
-              <a:rPr lang="ko-KR" altLang="en-US" dirty="0">
-                <a:latin typeface="D2Coding" panose="020B0609020101020101" pitchFamily="49" charset="-127"/>
-                <a:ea typeface="D2Coding" panose="020B0609020101020101" pitchFamily="49" charset="-127"/>
-                <a:sym typeface="Wingdings" panose="05000000000000000000" pitchFamily="2" charset="2"/>
-              </a:rPr>
-              <a:t>를 붙여 </a:t>
-            </a:r>
-            <a:r>
-              <a:rPr lang="en-US" altLang="ko-KR" dirty="0">
-                <a:latin typeface="D2Coding" panose="020B0609020101020101" pitchFamily="49" charset="-127"/>
-                <a:ea typeface="D2Coding" panose="020B0609020101020101" pitchFamily="49" charset="-127"/>
-                <a:sym typeface="Wingdings" panose="05000000000000000000" pitchFamily="2" charset="2"/>
-              </a:rPr>
-              <a:t>n8n </a:t>
-            </a:r>
-            <a:r>
-              <a:rPr lang="ko-KR" altLang="en-US" dirty="0">
-                <a:latin typeface="D2Coding" panose="020B0609020101020101" pitchFamily="49" charset="-127"/>
-                <a:ea typeface="D2Coding" panose="020B0609020101020101" pitchFamily="49" charset="-127"/>
-                <a:sym typeface="Wingdings" panose="05000000000000000000" pitchFamily="2" charset="2"/>
-              </a:rPr>
-              <a:t>코드를 부탁하면 </a:t>
-            </a:r>
-            <a:r>
-              <a:rPr lang="en-US" altLang="ko-KR" dirty="0">
-                <a:latin typeface="D2Coding" panose="020B0609020101020101" pitchFamily="49" charset="-127"/>
-                <a:ea typeface="D2Coding" panose="020B0609020101020101" pitchFamily="49" charset="-127"/>
-                <a:sym typeface="Wingdings" panose="05000000000000000000" pitchFamily="2" charset="2"/>
-              </a:rPr>
-              <a:t>(</a:t>
-            </a:r>
-            <a:r>
-              <a:rPr lang="en-US" altLang="ko-KR" dirty="0" err="1">
-                <a:latin typeface="D2Coding" panose="020B0609020101020101" pitchFamily="49" charset="-127"/>
-                <a:ea typeface="D2Coding" panose="020B0609020101020101" pitchFamily="49" charset="-127"/>
-                <a:sym typeface="Wingdings" panose="05000000000000000000" pitchFamily="2" charset="2"/>
-              </a:rPr>
-              <a:t>json</a:t>
-            </a:r>
-            <a:r>
-              <a:rPr lang="ko-KR" altLang="en-US" dirty="0">
-                <a:latin typeface="D2Coding" panose="020B0609020101020101" pitchFamily="49" charset="-127"/>
-                <a:ea typeface="D2Coding" panose="020B0609020101020101" pitchFamily="49" charset="-127"/>
-                <a:sym typeface="Wingdings" panose="05000000000000000000" pitchFamily="2" charset="2"/>
-              </a:rPr>
-              <a:t>으로 소통</a:t>
-            </a:r>
-            <a:r>
-              <a:rPr lang="en-US" altLang="ko-KR" dirty="0">
-                <a:latin typeface="D2Coding" panose="020B0609020101020101" pitchFamily="49" charset="-127"/>
-                <a:ea typeface="D2Coding" panose="020B0609020101020101" pitchFamily="49" charset="-127"/>
-                <a:sym typeface="Wingdings" panose="05000000000000000000" pitchFamily="2" charset="2"/>
-              </a:rPr>
-              <a:t>)</a:t>
-            </a:r>
-            <a:endParaRPr lang="ko-KR" altLang="en-US" dirty="0">
-              <a:latin typeface="D2Coding" panose="020B0609020101020101" pitchFamily="49" charset="-127"/>
-              <a:ea typeface="D2Coding" panose="020B0609020101020101" pitchFamily="49" charset="-127"/>
-            </a:endParaRPr>
-          </a:p>
-        </p:txBody>
-      </p:sp>
-    </p:spTree>
-    <p:extLst>
-      <p:ext uri="{BB962C8B-B14F-4D97-AF65-F5344CB8AC3E}">
-        <p14:creationId xmlns:p14="http://schemas.microsoft.com/office/powerpoint/2010/main" val="635947809"/>
       </p:ext>
     </p:extLst>
   </p:cSld>

--- a/PPTs/04_AI Workflow_n8n.pptx
+++ b/PPTs/04_AI Workflow_n8n.pptx
@@ -5,10 +5,10 @@
     <p:sldMasterId id="2147483660" r:id="rId1"/>
   </p:sldMasterIdLst>
   <p:notesMasterIdLst>
-    <p:notesMasterId r:id="rId37"/>
+    <p:notesMasterId r:id="rId44"/>
   </p:notesMasterIdLst>
   <p:handoutMasterIdLst>
-    <p:handoutMasterId r:id="rId38"/>
+    <p:handoutMasterId r:id="rId45"/>
   </p:handoutMasterIdLst>
   <p:sldIdLst>
     <p:sldId id="256" r:id="rId2"/>
@@ -41,11 +41,18 @@
     <p:sldId id="1247" r:id="rId29"/>
     <p:sldId id="1248" r:id="rId30"/>
     <p:sldId id="1249" r:id="rId31"/>
-    <p:sldId id="1240" r:id="rId32"/>
-    <p:sldId id="1145" r:id="rId33"/>
-    <p:sldId id="1138" r:id="rId34"/>
-    <p:sldId id="1143" r:id="rId35"/>
-    <p:sldId id="1139" r:id="rId36"/>
+    <p:sldId id="1250" r:id="rId32"/>
+    <p:sldId id="1240" r:id="rId33"/>
+    <p:sldId id="1145" r:id="rId34"/>
+    <p:sldId id="1252" r:id="rId35"/>
+    <p:sldId id="1253" r:id="rId36"/>
+    <p:sldId id="1254" r:id="rId37"/>
+    <p:sldId id="1255" r:id="rId38"/>
+    <p:sldId id="1256" r:id="rId39"/>
+    <p:sldId id="1251" r:id="rId40"/>
+    <p:sldId id="1138" r:id="rId41"/>
+    <p:sldId id="1143" r:id="rId42"/>
+    <p:sldId id="1139" r:id="rId43"/>
   </p:sldIdLst>
   <p:sldSz cx="12192000" cy="6858000"/>
   <p:notesSz cx="6858000" cy="9144000"/>
@@ -183,8 +190,15 @@
             <p14:sldId id="1247"/>
             <p14:sldId id="1248"/>
             <p14:sldId id="1249"/>
+            <p14:sldId id="1250"/>
             <p14:sldId id="1240"/>
             <p14:sldId id="1145"/>
+            <p14:sldId id="1252"/>
+            <p14:sldId id="1253"/>
+            <p14:sldId id="1254"/>
+            <p14:sldId id="1255"/>
+            <p14:sldId id="1256"/>
+            <p14:sldId id="1251"/>
             <p14:sldId id="1138"/>
             <p14:sldId id="1143"/>
             <p14:sldId id="1139"/>
@@ -1117,6 +1131,378 @@
     <p:extLst>
       <p:ext uri="{BB962C8B-B14F-4D97-AF65-F5344CB8AC3E}">
         <p14:creationId xmlns:p14="http://schemas.microsoft.com/office/powerpoint/2010/main" val="1331595286"/>
+      </p:ext>
+    </p:extLst>
+  </p:cSld>
+  <p:clrMapOvr>
+    <a:masterClrMapping/>
+  </p:clrMapOvr>
+</p:notes>
+</file>
+
+<file path=ppt/notesSlides/notesSlide4.xml><?xml version="1.0" encoding="utf-8"?>
+<p:notes xmlns:a="http://schemas.openxmlformats.org/drawingml/2006/main" xmlns:r="http://schemas.openxmlformats.org/officeDocument/2006/relationships" xmlns:p="http://schemas.openxmlformats.org/presentationml/2006/main">
+  <p:cSld>
+    <p:spTree>
+      <p:nvGrpSpPr>
+        <p:cNvPr id="1" name="">
+          <a:extLst>
+            <a:ext uri="{FF2B5EF4-FFF2-40B4-BE49-F238E27FC236}">
+              <a16:creationId xmlns:a16="http://schemas.microsoft.com/office/drawing/2014/main" id="{7CC03469-8505-A8C7-DE1E-E799C4D39A5B}"/>
+            </a:ext>
+          </a:extLst>
+        </p:cNvPr>
+        <p:cNvGrpSpPr/>
+        <p:nvPr/>
+      </p:nvGrpSpPr>
+      <p:grpSpPr>
+        <a:xfrm>
+          <a:off x="0" y="0"/>
+          <a:ext cx="0" cy="0"/>
+          <a:chOff x="0" y="0"/>
+          <a:chExt cx="0" cy="0"/>
+        </a:xfrm>
+      </p:grpSpPr>
+      <p:sp>
+        <p:nvSpPr>
+          <p:cNvPr id="2" name="슬라이드 이미지 개체 틀 1">
+            <a:extLst>
+              <a:ext uri="{FF2B5EF4-FFF2-40B4-BE49-F238E27FC236}">
+                <a16:creationId xmlns:a16="http://schemas.microsoft.com/office/drawing/2014/main" id="{83503321-1896-368F-A2B7-23146F270B2C}"/>
+              </a:ext>
+            </a:extLst>
+          </p:cNvPr>
+          <p:cNvSpPr>
+            <a:spLocks noGrp="1" noRot="1" noChangeAspect="1"/>
+          </p:cNvSpPr>
+          <p:nvPr>
+            <p:ph type="sldImg"/>
+          </p:nvPr>
+        </p:nvSpPr>
+        <p:spPr>
+          <a:xfrm>
+            <a:off x="685800" y="1143000"/>
+            <a:ext cx="5486400" cy="3086100"/>
+          </a:xfrm>
+        </p:spPr>
+      </p:sp>
+      <p:sp>
+        <p:nvSpPr>
+          <p:cNvPr id="3" name="슬라이드 노트 개체 틀 2">
+            <a:extLst>
+              <a:ext uri="{FF2B5EF4-FFF2-40B4-BE49-F238E27FC236}">
+                <a16:creationId xmlns:a16="http://schemas.microsoft.com/office/drawing/2014/main" id="{2EB2A939-EFB1-F250-F544-963340760DA5}"/>
+              </a:ext>
+            </a:extLst>
+          </p:cNvPr>
+          <p:cNvSpPr>
+            <a:spLocks noGrp="1"/>
+          </p:cNvSpPr>
+          <p:nvPr>
+            <p:ph type="body" idx="1"/>
+          </p:nvPr>
+        </p:nvSpPr>
+        <p:spPr/>
+        <p:txBody>
+          <a:bodyPr rtlCol="0"/>
+          <a:lstStyle/>
+          <a:p>
+            <a:pPr rtl="0"/>
+            <a:endParaRPr lang="ko-KR" altLang="en-US">
+              <a:latin typeface="맑은 고딕" panose="020B0503020000020004" pitchFamily="50" charset="-127"/>
+              <a:ea typeface="맑은 고딕" panose="020B0503020000020004" pitchFamily="50" charset="-127"/>
+            </a:endParaRPr>
+          </a:p>
+        </p:txBody>
+      </p:sp>
+      <p:sp>
+        <p:nvSpPr>
+          <p:cNvPr id="4" name="슬라이드 번호 개체 틀 3">
+            <a:extLst>
+              <a:ext uri="{FF2B5EF4-FFF2-40B4-BE49-F238E27FC236}">
+                <a16:creationId xmlns:a16="http://schemas.microsoft.com/office/drawing/2014/main" id="{14A80065-A4D5-E320-0B63-8E58B43411AD}"/>
+              </a:ext>
+            </a:extLst>
+          </p:cNvPr>
+          <p:cNvSpPr>
+            <a:spLocks noGrp="1"/>
+          </p:cNvSpPr>
+          <p:nvPr>
+            <p:ph type="sldNum" sz="quarter" idx="10"/>
+          </p:nvPr>
+        </p:nvSpPr>
+        <p:spPr/>
+        <p:txBody>
+          <a:bodyPr rtlCol="0"/>
+          <a:lstStyle/>
+          <a:p>
+            <a:pPr rtl="0"/>
+            <a:fld id="{DF61EA0F-A667-4B49-8422-0062BC55E249}" type="slidenum">
+              <a:rPr lang="en-US" altLang="ko-KR" smtClean="0">
+                <a:latin typeface="맑은 고딕" panose="020B0503020000020004" pitchFamily="50" charset="-127"/>
+                <a:ea typeface="맑은 고딕" panose="020B0503020000020004" pitchFamily="50" charset="-127"/>
+              </a:rPr>
+              <a:t>31</a:t>
+            </a:fld>
+            <a:endParaRPr lang="ko-KR" altLang="en-US">
+              <a:latin typeface="맑은 고딕" panose="020B0503020000020004" pitchFamily="50" charset="-127"/>
+              <a:ea typeface="맑은 고딕" panose="020B0503020000020004" pitchFamily="50" charset="-127"/>
+            </a:endParaRPr>
+          </a:p>
+        </p:txBody>
+      </p:sp>
+    </p:spTree>
+    <p:extLst>
+      <p:ext uri="{BB962C8B-B14F-4D97-AF65-F5344CB8AC3E}">
+        <p14:creationId xmlns:p14="http://schemas.microsoft.com/office/powerpoint/2010/main" val="797907582"/>
+      </p:ext>
+    </p:extLst>
+  </p:cSld>
+  <p:clrMapOvr>
+    <a:masterClrMapping/>
+  </p:clrMapOvr>
+</p:notes>
+</file>
+
+<file path=ppt/notesSlides/notesSlide5.xml><?xml version="1.0" encoding="utf-8"?>
+<p:notes xmlns:a="http://schemas.openxmlformats.org/drawingml/2006/main" xmlns:r="http://schemas.openxmlformats.org/officeDocument/2006/relationships" xmlns:p="http://schemas.openxmlformats.org/presentationml/2006/main">
+  <p:cSld>
+    <p:spTree>
+      <p:nvGrpSpPr>
+        <p:cNvPr id="1" name="">
+          <a:extLst>
+            <a:ext uri="{FF2B5EF4-FFF2-40B4-BE49-F238E27FC236}">
+              <a16:creationId xmlns:a16="http://schemas.microsoft.com/office/drawing/2014/main" id="{13936E23-77FB-B28A-C76F-C9F9BB8819CD}"/>
+            </a:ext>
+          </a:extLst>
+        </p:cNvPr>
+        <p:cNvGrpSpPr/>
+        <p:nvPr/>
+      </p:nvGrpSpPr>
+      <p:grpSpPr>
+        <a:xfrm>
+          <a:off x="0" y="0"/>
+          <a:ext cx="0" cy="0"/>
+          <a:chOff x="0" y="0"/>
+          <a:chExt cx="0" cy="0"/>
+        </a:xfrm>
+      </p:grpSpPr>
+      <p:sp>
+        <p:nvSpPr>
+          <p:cNvPr id="2" name="슬라이드 이미지 개체 틀 1">
+            <a:extLst>
+              <a:ext uri="{FF2B5EF4-FFF2-40B4-BE49-F238E27FC236}">
+                <a16:creationId xmlns:a16="http://schemas.microsoft.com/office/drawing/2014/main" id="{9E19DE97-F164-58D9-0153-46A4A29EC043}"/>
+              </a:ext>
+            </a:extLst>
+          </p:cNvPr>
+          <p:cNvSpPr>
+            <a:spLocks noGrp="1" noRot="1" noChangeAspect="1"/>
+          </p:cNvSpPr>
+          <p:nvPr>
+            <p:ph type="sldImg"/>
+          </p:nvPr>
+        </p:nvSpPr>
+        <p:spPr>
+          <a:xfrm>
+            <a:off x="685800" y="1143000"/>
+            <a:ext cx="5486400" cy="3086100"/>
+          </a:xfrm>
+        </p:spPr>
+      </p:sp>
+      <p:sp>
+        <p:nvSpPr>
+          <p:cNvPr id="3" name="슬라이드 노트 개체 틀 2">
+            <a:extLst>
+              <a:ext uri="{FF2B5EF4-FFF2-40B4-BE49-F238E27FC236}">
+                <a16:creationId xmlns:a16="http://schemas.microsoft.com/office/drawing/2014/main" id="{922C0ABA-CA65-8C81-AC13-6133E555FF5A}"/>
+              </a:ext>
+            </a:extLst>
+          </p:cNvPr>
+          <p:cNvSpPr>
+            <a:spLocks noGrp="1"/>
+          </p:cNvSpPr>
+          <p:nvPr>
+            <p:ph type="body" idx="1"/>
+          </p:nvPr>
+        </p:nvSpPr>
+        <p:spPr/>
+        <p:txBody>
+          <a:bodyPr rtlCol="0"/>
+          <a:lstStyle/>
+          <a:p>
+            <a:pPr rtl="0"/>
+            <a:endParaRPr lang="ko-KR" altLang="en-US">
+              <a:latin typeface="맑은 고딕" panose="020B0503020000020004" pitchFamily="50" charset="-127"/>
+              <a:ea typeface="맑은 고딕" panose="020B0503020000020004" pitchFamily="50" charset="-127"/>
+            </a:endParaRPr>
+          </a:p>
+        </p:txBody>
+      </p:sp>
+      <p:sp>
+        <p:nvSpPr>
+          <p:cNvPr id="4" name="슬라이드 번호 개체 틀 3">
+            <a:extLst>
+              <a:ext uri="{FF2B5EF4-FFF2-40B4-BE49-F238E27FC236}">
+                <a16:creationId xmlns:a16="http://schemas.microsoft.com/office/drawing/2014/main" id="{5726CAFC-0696-B712-7E1F-DFC13860FA25}"/>
+              </a:ext>
+            </a:extLst>
+          </p:cNvPr>
+          <p:cNvSpPr>
+            <a:spLocks noGrp="1"/>
+          </p:cNvSpPr>
+          <p:nvPr>
+            <p:ph type="sldNum" sz="quarter" idx="10"/>
+          </p:nvPr>
+        </p:nvSpPr>
+        <p:spPr/>
+        <p:txBody>
+          <a:bodyPr rtlCol="0"/>
+          <a:lstStyle/>
+          <a:p>
+            <a:pPr rtl="0"/>
+            <a:fld id="{DF61EA0F-A667-4B49-8422-0062BC55E249}" type="slidenum">
+              <a:rPr lang="en-US" altLang="ko-KR" smtClean="0">
+                <a:latin typeface="맑은 고딕" panose="020B0503020000020004" pitchFamily="50" charset="-127"/>
+                <a:ea typeface="맑은 고딕" panose="020B0503020000020004" pitchFamily="50" charset="-127"/>
+              </a:rPr>
+              <a:t>34</a:t>
+            </a:fld>
+            <a:endParaRPr lang="ko-KR" altLang="en-US">
+              <a:latin typeface="맑은 고딕" panose="020B0503020000020004" pitchFamily="50" charset="-127"/>
+              <a:ea typeface="맑은 고딕" panose="020B0503020000020004" pitchFamily="50" charset="-127"/>
+            </a:endParaRPr>
+          </a:p>
+        </p:txBody>
+      </p:sp>
+    </p:spTree>
+    <p:extLst>
+      <p:ext uri="{BB962C8B-B14F-4D97-AF65-F5344CB8AC3E}">
+        <p14:creationId xmlns:p14="http://schemas.microsoft.com/office/powerpoint/2010/main" val="3236907464"/>
+      </p:ext>
+    </p:extLst>
+  </p:cSld>
+  <p:clrMapOvr>
+    <a:masterClrMapping/>
+  </p:clrMapOvr>
+</p:notes>
+</file>
+
+<file path=ppt/notesSlides/notesSlide6.xml><?xml version="1.0" encoding="utf-8"?>
+<p:notes xmlns:a="http://schemas.openxmlformats.org/drawingml/2006/main" xmlns:r="http://schemas.openxmlformats.org/officeDocument/2006/relationships" xmlns:p="http://schemas.openxmlformats.org/presentationml/2006/main">
+  <p:cSld>
+    <p:spTree>
+      <p:nvGrpSpPr>
+        <p:cNvPr id="1" name="">
+          <a:extLst>
+            <a:ext uri="{FF2B5EF4-FFF2-40B4-BE49-F238E27FC236}">
+              <a16:creationId xmlns:a16="http://schemas.microsoft.com/office/drawing/2014/main" id="{BA0DE744-D0AA-F1FD-5C23-F8D6B792602B}"/>
+            </a:ext>
+          </a:extLst>
+        </p:cNvPr>
+        <p:cNvGrpSpPr/>
+        <p:nvPr/>
+      </p:nvGrpSpPr>
+      <p:grpSpPr>
+        <a:xfrm>
+          <a:off x="0" y="0"/>
+          <a:ext cx="0" cy="0"/>
+          <a:chOff x="0" y="0"/>
+          <a:chExt cx="0" cy="0"/>
+        </a:xfrm>
+      </p:grpSpPr>
+      <p:sp>
+        <p:nvSpPr>
+          <p:cNvPr id="2" name="슬라이드 이미지 개체 틀 1">
+            <a:extLst>
+              <a:ext uri="{FF2B5EF4-FFF2-40B4-BE49-F238E27FC236}">
+                <a16:creationId xmlns:a16="http://schemas.microsoft.com/office/drawing/2014/main" id="{19D5C429-95E6-9B82-3F10-A0FD2EC1B7A4}"/>
+              </a:ext>
+            </a:extLst>
+          </p:cNvPr>
+          <p:cNvSpPr>
+            <a:spLocks noGrp="1" noRot="1" noChangeAspect="1"/>
+          </p:cNvSpPr>
+          <p:nvPr>
+            <p:ph type="sldImg"/>
+          </p:nvPr>
+        </p:nvSpPr>
+        <p:spPr>
+          <a:xfrm>
+            <a:off x="685800" y="1143000"/>
+            <a:ext cx="5486400" cy="3086100"/>
+          </a:xfrm>
+        </p:spPr>
+      </p:sp>
+      <p:sp>
+        <p:nvSpPr>
+          <p:cNvPr id="3" name="슬라이드 노트 개체 틀 2">
+            <a:extLst>
+              <a:ext uri="{FF2B5EF4-FFF2-40B4-BE49-F238E27FC236}">
+                <a16:creationId xmlns:a16="http://schemas.microsoft.com/office/drawing/2014/main" id="{6BCB7D59-E6AC-3201-8F0B-C3130C2D3008}"/>
+              </a:ext>
+            </a:extLst>
+          </p:cNvPr>
+          <p:cNvSpPr>
+            <a:spLocks noGrp="1"/>
+          </p:cNvSpPr>
+          <p:nvPr>
+            <p:ph type="body" idx="1"/>
+          </p:nvPr>
+        </p:nvSpPr>
+        <p:spPr/>
+        <p:txBody>
+          <a:bodyPr rtlCol="0"/>
+          <a:lstStyle/>
+          <a:p>
+            <a:pPr rtl="0"/>
+            <a:endParaRPr lang="ko-KR" altLang="en-US">
+              <a:latin typeface="맑은 고딕" panose="020B0503020000020004" pitchFamily="50" charset="-127"/>
+              <a:ea typeface="맑은 고딕" panose="020B0503020000020004" pitchFamily="50" charset="-127"/>
+            </a:endParaRPr>
+          </a:p>
+        </p:txBody>
+      </p:sp>
+      <p:sp>
+        <p:nvSpPr>
+          <p:cNvPr id="4" name="슬라이드 번호 개체 틀 3">
+            <a:extLst>
+              <a:ext uri="{FF2B5EF4-FFF2-40B4-BE49-F238E27FC236}">
+                <a16:creationId xmlns:a16="http://schemas.microsoft.com/office/drawing/2014/main" id="{1B99B407-B524-4067-58BA-A146DB318395}"/>
+              </a:ext>
+            </a:extLst>
+          </p:cNvPr>
+          <p:cNvSpPr>
+            <a:spLocks noGrp="1"/>
+          </p:cNvSpPr>
+          <p:nvPr>
+            <p:ph type="sldNum" sz="quarter" idx="10"/>
+          </p:nvPr>
+        </p:nvSpPr>
+        <p:spPr/>
+        <p:txBody>
+          <a:bodyPr rtlCol="0"/>
+          <a:lstStyle/>
+          <a:p>
+            <a:pPr rtl="0"/>
+            <a:fld id="{DF61EA0F-A667-4B49-8422-0062BC55E249}" type="slidenum">
+              <a:rPr lang="en-US" altLang="ko-KR" smtClean="0">
+                <a:latin typeface="맑은 고딕" panose="020B0503020000020004" pitchFamily="50" charset="-127"/>
+                <a:ea typeface="맑은 고딕" panose="020B0503020000020004" pitchFamily="50" charset="-127"/>
+              </a:rPr>
+              <a:t>39</a:t>
+            </a:fld>
+            <a:endParaRPr lang="ko-KR" altLang="en-US">
+              <a:latin typeface="맑은 고딕" panose="020B0503020000020004" pitchFamily="50" charset="-127"/>
+              <a:ea typeface="맑은 고딕" panose="020B0503020000020004" pitchFamily="50" charset="-127"/>
+            </a:endParaRPr>
+          </a:p>
+        </p:txBody>
+      </p:sp>
+    </p:spTree>
+    <p:extLst>
+      <p:ext uri="{BB962C8B-B14F-4D97-AF65-F5344CB8AC3E}">
+        <p14:creationId xmlns:p14="http://schemas.microsoft.com/office/powerpoint/2010/main" val="2715891680"/>
       </p:ext>
     </p:extLst>
   </p:cSld>
@@ -6736,7 +7122,7 @@
                 <a:latin typeface="D2Coding" panose="020B0609020101020101" pitchFamily="49" charset="-127"/>
                 <a:ea typeface="D2Coding" panose="020B0609020101020101" pitchFamily="49" charset="-127"/>
               </a:rPr>
-              <a:t>Homework</a:t>
+              <a:t>Beginner Tutorials</a:t>
             </a:r>
             <a:endParaRPr lang="ko-KR" altLang="en-US" sz="4400" dirty="0">
               <a:solidFill>
@@ -12832,6 +13218,357 @@
         <p:cNvPr id="1" name="">
           <a:extLst>
             <a:ext uri="{FF2B5EF4-FFF2-40B4-BE49-F238E27FC236}">
+              <a16:creationId xmlns:a16="http://schemas.microsoft.com/office/drawing/2014/main" id="{7FC8F6CF-1580-AA40-EFE8-EE6DE86D3B79}"/>
+            </a:ext>
+          </a:extLst>
+        </p:cNvPr>
+        <p:cNvGrpSpPr/>
+        <p:nvPr/>
+      </p:nvGrpSpPr>
+      <p:grpSpPr>
+        <a:xfrm>
+          <a:off x="0" y="0"/>
+          <a:ext cx="0" cy="0"/>
+          <a:chOff x="0" y="0"/>
+          <a:chExt cx="0" cy="0"/>
+        </a:xfrm>
+      </p:grpSpPr>
+      <p:sp>
+        <p:nvSpPr>
+          <p:cNvPr id="2" name="제목 1">
+            <a:extLst>
+              <a:ext uri="{FF2B5EF4-FFF2-40B4-BE49-F238E27FC236}">
+                <a16:creationId xmlns:a16="http://schemas.microsoft.com/office/drawing/2014/main" id="{771E9547-7D2E-602A-BCAE-CB5904A932D6}"/>
+              </a:ext>
+            </a:extLst>
+          </p:cNvPr>
+          <p:cNvSpPr>
+            <a:spLocks noGrp="1"/>
+          </p:cNvSpPr>
+          <p:nvPr>
+            <p:ph type="ctrTitle"/>
+          </p:nvPr>
+        </p:nvSpPr>
+        <p:spPr>
+          <a:xfrm>
+            <a:off x="838199" y="1164324"/>
+            <a:ext cx="10934701" cy="2387600"/>
+          </a:xfrm>
+        </p:spPr>
+        <p:txBody>
+          <a:bodyPr rtlCol="0" anchor="ctr" anchorCtr="0">
+            <a:normAutofit/>
+          </a:bodyPr>
+          <a:lstStyle/>
+          <a:p>
+            <a:r>
+              <a:rPr lang="en-US" altLang="ko-KR" sz="5400" dirty="0">
+                <a:solidFill>
+                  <a:schemeClr val="bg1"/>
+                </a:solidFill>
+                <a:latin typeface="D2Coding" panose="020B0609020101020101" pitchFamily="49" charset="-127"/>
+                <a:ea typeface="D2Coding" panose="020B0609020101020101" pitchFamily="49" charset="-127"/>
+              </a:rPr>
+              <a:t>n8n</a:t>
+            </a:r>
+            <a:br>
+              <a:rPr lang="en-US" altLang="ko-KR" sz="4400" dirty="0">
+                <a:solidFill>
+                  <a:schemeClr val="bg1"/>
+                </a:solidFill>
+                <a:latin typeface="D2Coding" panose="020B0609020101020101" pitchFamily="49" charset="-127"/>
+                <a:ea typeface="D2Coding" panose="020B0609020101020101" pitchFamily="49" charset="-127"/>
+              </a:rPr>
+            </a:br>
+            <a:r>
+              <a:rPr lang="en-US" altLang="ko-KR" sz="4000" dirty="0">
+                <a:solidFill>
+                  <a:schemeClr val="bg1"/>
+                </a:solidFill>
+                <a:latin typeface="D2Coding" panose="020B0609020101020101" pitchFamily="49" charset="-127"/>
+                <a:ea typeface="D2Coding" panose="020B0609020101020101" pitchFamily="49" charset="-127"/>
+              </a:rPr>
+              <a:t>Homework</a:t>
+            </a:r>
+            <a:endParaRPr lang="ko-KR" altLang="en-US" sz="4400" dirty="0">
+              <a:solidFill>
+                <a:schemeClr val="bg1"/>
+              </a:solidFill>
+              <a:latin typeface="D2Coding" panose="020B0609020101020101" pitchFamily="49" charset="-127"/>
+              <a:ea typeface="D2Coding" panose="020B0609020101020101" pitchFamily="49" charset="-127"/>
+            </a:endParaRPr>
+          </a:p>
+        </p:txBody>
+      </p:sp>
+      <p:sp>
+        <p:nvSpPr>
+          <p:cNvPr id="5" name="부제목 2">
+            <a:extLst>
+              <a:ext uri="{FF2B5EF4-FFF2-40B4-BE49-F238E27FC236}">
+                <a16:creationId xmlns:a16="http://schemas.microsoft.com/office/drawing/2014/main" id="{D715101B-F95F-F5D9-8C37-423458301BAB}"/>
+              </a:ext>
+            </a:extLst>
+          </p:cNvPr>
+          <p:cNvSpPr txBox="1">
+            <a:spLocks/>
+          </p:cNvSpPr>
+          <p:nvPr/>
+        </p:nvSpPr>
+        <p:spPr>
+          <a:xfrm>
+            <a:off x="855620" y="4555883"/>
+            <a:ext cx="9582736" cy="1137793"/>
+          </a:xfrm>
+          <a:prstGeom prst="rect">
+            <a:avLst/>
+          </a:prstGeom>
+        </p:spPr>
+        <p:txBody>
+          <a:bodyPr vert="horz" lIns="91440" tIns="45720" rIns="91440" bIns="45720" rtlCol="0">
+            <a:normAutofit fontScale="85000" lnSpcReduction="20000"/>
+          </a:bodyPr>
+          <a:lstStyle>
+            <a:lvl1pPr marL="0" indent="0" algn="l" defTabSz="914400" rtl="0" eaLnBrk="1" latinLnBrk="1" hangingPunct="1">
+              <a:lnSpc>
+                <a:spcPct val="150000"/>
+              </a:lnSpc>
+              <a:spcBef>
+                <a:spcPts val="1000"/>
+              </a:spcBef>
+              <a:spcAft>
+                <a:spcPts val="1200"/>
+              </a:spcAft>
+              <a:buFontTx/>
+              <a:buNone/>
+              <a:defRPr lang="en-US" sz="1200" kern="1200" dirty="0">
+                <a:solidFill>
+                  <a:schemeClr val="tx1"/>
+                </a:solidFill>
+                <a:latin typeface="맑은 고딕" panose="020B0503020000020004" pitchFamily="50" charset="-127"/>
+                <a:ea typeface="맑은 고딕" panose="020B0503020000020004" pitchFamily="50" charset="-127"/>
+                <a:cs typeface="+mn-cs"/>
+              </a:defRPr>
+            </a:lvl1pPr>
+            <a:lvl2pPr marL="228600" indent="-228600" algn="l" defTabSz="914400" rtl="0" eaLnBrk="1" latinLnBrk="1" hangingPunct="1">
+              <a:lnSpc>
+                <a:spcPct val="150000"/>
+              </a:lnSpc>
+              <a:spcBef>
+                <a:spcPts val="1000"/>
+              </a:spcBef>
+              <a:spcAft>
+                <a:spcPts val="1200"/>
+              </a:spcAft>
+              <a:buFont typeface="Arial" panose="020B0604020202020204" pitchFamily="34" charset="0"/>
+              <a:buChar char="•"/>
+              <a:defRPr lang="en-US" sz="1200" kern="1200" dirty="0">
+                <a:solidFill>
+                  <a:schemeClr val="tx1"/>
+                </a:solidFill>
+                <a:latin typeface="맑은 고딕" panose="020B0503020000020004" pitchFamily="50" charset="-127"/>
+                <a:ea typeface="맑은 고딕" panose="020B0503020000020004" pitchFamily="50" charset="-127"/>
+                <a:cs typeface="+mn-cs"/>
+              </a:defRPr>
+            </a:lvl2pPr>
+            <a:lvl3pPr marL="685800" indent="-228600" algn="l" defTabSz="914400" rtl="0" eaLnBrk="1" latinLnBrk="1" hangingPunct="1">
+              <a:lnSpc>
+                <a:spcPct val="150000"/>
+              </a:lnSpc>
+              <a:spcBef>
+                <a:spcPts val="1000"/>
+              </a:spcBef>
+              <a:spcAft>
+                <a:spcPts val="1200"/>
+              </a:spcAft>
+              <a:buFont typeface="Arial" panose="020B0604020202020204" pitchFamily="34" charset="0"/>
+              <a:buChar char="•"/>
+              <a:defRPr lang="en-US" sz="1200" kern="1200" dirty="0">
+                <a:solidFill>
+                  <a:schemeClr val="tx1"/>
+                </a:solidFill>
+                <a:latin typeface="맑은 고딕" panose="020B0503020000020004" pitchFamily="50" charset="-127"/>
+                <a:ea typeface="맑은 고딕" panose="020B0503020000020004" pitchFamily="50" charset="-127"/>
+                <a:cs typeface="+mn-cs"/>
+              </a:defRPr>
+            </a:lvl3pPr>
+            <a:lvl4pPr marL="1143000" indent="-228600" algn="l" defTabSz="914400" rtl="0" eaLnBrk="1" latinLnBrk="1" hangingPunct="1">
+              <a:lnSpc>
+                <a:spcPct val="150000"/>
+              </a:lnSpc>
+              <a:spcBef>
+                <a:spcPts val="1000"/>
+              </a:spcBef>
+              <a:spcAft>
+                <a:spcPts val="1200"/>
+              </a:spcAft>
+              <a:buFont typeface="Arial" panose="020B0604020202020204" pitchFamily="34" charset="0"/>
+              <a:buChar char="•"/>
+              <a:defRPr lang="en-US" sz="1200" kern="1200" dirty="0" smtClean="0">
+                <a:solidFill>
+                  <a:schemeClr val="tx1"/>
+                </a:solidFill>
+                <a:latin typeface="맑은 고딕" panose="020B0503020000020004" pitchFamily="50" charset="-127"/>
+                <a:ea typeface="맑은 고딕" panose="020B0503020000020004" pitchFamily="50" charset="-127"/>
+                <a:cs typeface="+mn-cs"/>
+              </a:defRPr>
+            </a:lvl4pPr>
+            <a:lvl5pPr marL="1600200" indent="-228600" algn="l" defTabSz="914400" rtl="0" eaLnBrk="1" latinLnBrk="1" hangingPunct="1">
+              <a:lnSpc>
+                <a:spcPct val="150000"/>
+              </a:lnSpc>
+              <a:spcBef>
+                <a:spcPts val="1000"/>
+              </a:spcBef>
+              <a:spcAft>
+                <a:spcPts val="1200"/>
+              </a:spcAft>
+              <a:buFont typeface="Arial" panose="020B0604020202020204" pitchFamily="34" charset="0"/>
+              <a:buChar char="•"/>
+              <a:defRPr lang="en-US" sz="1200" kern="1200" dirty="0" smtClean="0">
+                <a:solidFill>
+                  <a:schemeClr val="tx1"/>
+                </a:solidFill>
+                <a:latin typeface="맑은 고딕" panose="020B0503020000020004" pitchFamily="50" charset="-127"/>
+                <a:ea typeface="맑은 고딕" panose="020B0503020000020004" pitchFamily="50" charset="-127"/>
+                <a:cs typeface="+mn-cs"/>
+              </a:defRPr>
+            </a:lvl5pPr>
+            <a:lvl6pPr marL="2057400" indent="-228600" algn="l" defTabSz="914400" rtl="0" eaLnBrk="1" latinLnBrk="1" hangingPunct="1">
+              <a:lnSpc>
+                <a:spcPct val="150000"/>
+              </a:lnSpc>
+              <a:spcBef>
+                <a:spcPts val="1000"/>
+              </a:spcBef>
+              <a:spcAft>
+                <a:spcPts val="1200"/>
+              </a:spcAft>
+              <a:buFont typeface="Arial" panose="020B0604020202020204" pitchFamily="34" charset="0"/>
+              <a:buChar char="•"/>
+              <a:defRPr lang="en-US" sz="1200" kern="1200" dirty="0" smtClean="0">
+                <a:solidFill>
+                  <a:schemeClr val="tx1"/>
+                </a:solidFill>
+                <a:latin typeface="+mn-lt"/>
+                <a:ea typeface="+mn-ea"/>
+                <a:cs typeface="+mn-cs"/>
+              </a:defRPr>
+            </a:lvl6pPr>
+            <a:lvl7pPr marL="2514600" indent="-228600" algn="l" defTabSz="914400" rtl="0" eaLnBrk="1" latinLnBrk="1" hangingPunct="1">
+              <a:lnSpc>
+                <a:spcPct val="150000"/>
+              </a:lnSpc>
+              <a:spcBef>
+                <a:spcPts val="1000"/>
+              </a:spcBef>
+              <a:spcAft>
+                <a:spcPts val="1200"/>
+              </a:spcAft>
+              <a:buFont typeface="Arial" panose="020B0604020202020204" pitchFamily="34" charset="0"/>
+              <a:buChar char="•"/>
+              <a:defRPr lang="en-US" sz="1200" kern="1200" dirty="0" smtClean="0">
+                <a:solidFill>
+                  <a:schemeClr val="tx1"/>
+                </a:solidFill>
+                <a:latin typeface="+mn-lt"/>
+                <a:ea typeface="+mn-ea"/>
+                <a:cs typeface="+mn-cs"/>
+              </a:defRPr>
+            </a:lvl7pPr>
+            <a:lvl8pPr marL="2971800" indent="-228600" algn="l" defTabSz="914400" rtl="0" eaLnBrk="1" latinLnBrk="1" hangingPunct="1">
+              <a:lnSpc>
+                <a:spcPct val="150000"/>
+              </a:lnSpc>
+              <a:spcBef>
+                <a:spcPts val="1000"/>
+              </a:spcBef>
+              <a:spcAft>
+                <a:spcPts val="1200"/>
+              </a:spcAft>
+              <a:buFont typeface="Arial" panose="020B0604020202020204" pitchFamily="34" charset="0"/>
+              <a:buChar char="•"/>
+              <a:defRPr lang="en-US" sz="1200" kern="1200" dirty="0" smtClean="0">
+                <a:solidFill>
+                  <a:schemeClr val="tx1"/>
+                </a:solidFill>
+                <a:latin typeface="+mn-lt"/>
+                <a:ea typeface="+mn-ea"/>
+                <a:cs typeface="+mn-cs"/>
+              </a:defRPr>
+            </a:lvl8pPr>
+            <a:lvl9pPr marL="3429000" indent="-228600" algn="l" defTabSz="914400" rtl="0" eaLnBrk="1" latinLnBrk="1" hangingPunct="1">
+              <a:lnSpc>
+                <a:spcPct val="90000"/>
+              </a:lnSpc>
+              <a:spcBef>
+                <a:spcPct val="30000"/>
+              </a:spcBef>
+              <a:buFont typeface="Arial" panose="020B0604020202020204" pitchFamily="34" charset="0"/>
+              <a:buNone/>
+              <a:defRPr sz="1200" kern="1200">
+                <a:solidFill>
+                  <a:schemeClr val="tx1"/>
+                </a:solidFill>
+                <a:latin typeface="+mn-lt"/>
+                <a:ea typeface="+mn-ea"/>
+                <a:cs typeface="+mn-cs"/>
+              </a:defRPr>
+            </a:lvl9pPr>
+          </a:lstStyle>
+          <a:p>
+            <a:r>
+              <a:rPr lang="en-US" altLang="ko-KR" sz="2400" dirty="0">
+                <a:solidFill>
+                  <a:schemeClr val="bg1"/>
+                </a:solidFill>
+                <a:latin typeface="D2Coding" panose="020B0609020101020101" pitchFamily="49" charset="-127"/>
+                <a:ea typeface="D2Coding" panose="020B0609020101020101" pitchFamily="49" charset="-127"/>
+              </a:rPr>
+              <a:t>2026 Fall</a:t>
+            </a:r>
+          </a:p>
+          <a:p>
+            <a:r>
+              <a:rPr lang="ko-KR" altLang="en-US" sz="2400" dirty="0" err="1">
+                <a:solidFill>
+                  <a:schemeClr val="bg1"/>
+                </a:solidFill>
+                <a:latin typeface="D2Coding" panose="020B0609020101020101" pitchFamily="49" charset="-127"/>
+                <a:ea typeface="D2Coding" panose="020B0609020101020101" pitchFamily="49" charset="-127"/>
+              </a:rPr>
+              <a:t>조상구교수</a:t>
+            </a:r>
+            <a:endParaRPr lang="en-US" altLang="ko-KR" sz="2400" dirty="0">
+              <a:solidFill>
+                <a:schemeClr val="bg1"/>
+              </a:solidFill>
+              <a:latin typeface="D2Coding" panose="020B0609020101020101" pitchFamily="49" charset="-127"/>
+              <a:ea typeface="D2Coding" panose="020B0609020101020101" pitchFamily="49" charset="-127"/>
+            </a:endParaRPr>
+          </a:p>
+        </p:txBody>
+      </p:sp>
+    </p:spTree>
+    <p:extLst>
+      <p:ext uri="{BB962C8B-B14F-4D97-AF65-F5344CB8AC3E}">
+        <p14:creationId xmlns:p14="http://schemas.microsoft.com/office/powerpoint/2010/main" val="3939102056"/>
+      </p:ext>
+    </p:extLst>
+  </p:cSld>
+  <p:clrMapOvr>
+    <a:masterClrMapping/>
+  </p:clrMapOvr>
+</p:sld>
+</file>
+
+<file path=ppt/slides/slide32.xml><?xml version="1.0" encoding="utf-8"?>
+<p:sld xmlns:a="http://schemas.openxmlformats.org/drawingml/2006/main" xmlns:r="http://schemas.openxmlformats.org/officeDocument/2006/relationships" xmlns:p="http://schemas.openxmlformats.org/presentationml/2006/main">
+  <p:cSld>
+    <p:spTree>
+      <p:nvGrpSpPr>
+        <p:cNvPr id="1" name="">
+          <a:extLst>
+            <a:ext uri="{FF2B5EF4-FFF2-40B4-BE49-F238E27FC236}">
               <a16:creationId xmlns:a16="http://schemas.microsoft.com/office/drawing/2014/main" id="{6A1CBD6D-BF4A-65C2-992E-99A556BBC3F5}"/>
             </a:ext>
           </a:extLst>
@@ -13322,7 +14059,7 @@
                 <a:ea typeface="Segoe UI Emoji" panose="020B0502040204020203" pitchFamily="34" charset="0"/>
               </a:rPr>
               <a:pPr/>
-              <a:t>31</a:t>
+              <a:t>32</a:t>
             </a:fld>
             <a:endParaRPr lang="en-US" b="1" dirty="0">
               <a:latin typeface="Segoe UI Emoji" panose="020B0502040204020203" pitchFamily="34" charset="0"/>
@@ -13344,7 +14081,7 @@
 </p:sld>
 </file>
 
-<file path=ppt/slides/slide32.xml><?xml version="1.0" encoding="utf-8"?>
+<file path=ppt/slides/slide33.xml><?xml version="1.0" encoding="utf-8"?>
 <p:sld xmlns:a="http://schemas.openxmlformats.org/drawingml/2006/main" xmlns:r="http://schemas.openxmlformats.org/officeDocument/2006/relationships" xmlns:p="http://schemas.openxmlformats.org/presentationml/2006/main">
   <p:cSld>
     <p:spTree>
@@ -13669,7 +14406,7 @@
                 <a:ea typeface="Segoe UI Emoji" panose="020B0502040204020203" pitchFamily="34" charset="0"/>
               </a:rPr>
               <a:pPr/>
-              <a:t>32</a:t>
+              <a:t>33</a:t>
             </a:fld>
             <a:endParaRPr lang="en-US" b="1" dirty="0">
               <a:latin typeface="Segoe UI Emoji" panose="020B0502040204020203" pitchFamily="34" charset="0"/>
@@ -13691,7 +14428,3631 @@
 </p:sld>
 </file>
 
-<file path=ppt/slides/slide33.xml><?xml version="1.0" encoding="utf-8"?>
+<file path=ppt/slides/slide34.xml><?xml version="1.0" encoding="utf-8"?>
+<p:sld xmlns:a="http://schemas.openxmlformats.org/drawingml/2006/main" xmlns:r="http://schemas.openxmlformats.org/officeDocument/2006/relationships" xmlns:p="http://schemas.openxmlformats.org/presentationml/2006/main">
+  <p:cSld>
+    <p:spTree>
+      <p:nvGrpSpPr>
+        <p:cNvPr id="1" name="">
+          <a:extLst>
+            <a:ext uri="{FF2B5EF4-FFF2-40B4-BE49-F238E27FC236}">
+              <a16:creationId xmlns:a16="http://schemas.microsoft.com/office/drawing/2014/main" id="{75A5B53E-9D55-3CF4-4E1B-ED8FFC4293FA}"/>
+            </a:ext>
+          </a:extLst>
+        </p:cNvPr>
+        <p:cNvGrpSpPr/>
+        <p:nvPr/>
+      </p:nvGrpSpPr>
+      <p:grpSpPr>
+        <a:xfrm>
+          <a:off x="0" y="0"/>
+          <a:ext cx="0" cy="0"/>
+          <a:chOff x="0" y="0"/>
+          <a:chExt cx="0" cy="0"/>
+        </a:xfrm>
+      </p:grpSpPr>
+      <p:sp>
+        <p:nvSpPr>
+          <p:cNvPr id="2" name="제목 1">
+            <a:extLst>
+              <a:ext uri="{FF2B5EF4-FFF2-40B4-BE49-F238E27FC236}">
+                <a16:creationId xmlns:a16="http://schemas.microsoft.com/office/drawing/2014/main" id="{D96B7A2C-8A54-FBB6-A0C3-771CD8941281}"/>
+              </a:ext>
+            </a:extLst>
+          </p:cNvPr>
+          <p:cNvSpPr>
+            <a:spLocks noGrp="1"/>
+          </p:cNvSpPr>
+          <p:nvPr>
+            <p:ph type="ctrTitle"/>
+          </p:nvPr>
+        </p:nvSpPr>
+        <p:spPr>
+          <a:xfrm>
+            <a:off x="838199" y="1164324"/>
+            <a:ext cx="10934701" cy="2387600"/>
+          </a:xfrm>
+        </p:spPr>
+        <p:txBody>
+          <a:bodyPr rtlCol="0" anchor="ctr" anchorCtr="0">
+            <a:normAutofit/>
+          </a:bodyPr>
+          <a:lstStyle/>
+          <a:p>
+            <a:r>
+              <a:rPr lang="en-US" altLang="ko-KR" sz="5400" dirty="0">
+                <a:solidFill>
+                  <a:schemeClr val="bg1"/>
+                </a:solidFill>
+                <a:latin typeface="D2Coding" panose="020B0609020101020101" pitchFamily="49" charset="-127"/>
+                <a:ea typeface="D2Coding" panose="020B0609020101020101" pitchFamily="49" charset="-127"/>
+              </a:rPr>
+              <a:t>n8n</a:t>
+            </a:r>
+            <a:br>
+              <a:rPr lang="en-US" altLang="ko-KR" sz="4400" dirty="0">
+                <a:solidFill>
+                  <a:schemeClr val="bg1"/>
+                </a:solidFill>
+                <a:latin typeface="D2Coding" panose="020B0609020101020101" pitchFamily="49" charset="-127"/>
+                <a:ea typeface="D2Coding" panose="020B0609020101020101" pitchFamily="49" charset="-127"/>
+              </a:rPr>
+            </a:br>
+            <a:r>
+              <a:rPr lang="en-US" altLang="ko-KR" sz="4000" dirty="0">
+                <a:solidFill>
+                  <a:schemeClr val="bg1"/>
+                </a:solidFill>
+                <a:latin typeface="D2Coding" panose="020B0609020101020101" pitchFamily="49" charset="-127"/>
+                <a:ea typeface="D2Coding" panose="020B0609020101020101" pitchFamily="49" charset="-127"/>
+              </a:rPr>
+              <a:t>Homework</a:t>
+            </a:r>
+            <a:endParaRPr lang="ko-KR" altLang="en-US" sz="4400" dirty="0">
+              <a:solidFill>
+                <a:schemeClr val="bg1"/>
+              </a:solidFill>
+              <a:latin typeface="D2Coding" panose="020B0609020101020101" pitchFamily="49" charset="-127"/>
+              <a:ea typeface="D2Coding" panose="020B0609020101020101" pitchFamily="49" charset="-127"/>
+            </a:endParaRPr>
+          </a:p>
+        </p:txBody>
+      </p:sp>
+      <p:sp>
+        <p:nvSpPr>
+          <p:cNvPr id="5" name="부제목 2">
+            <a:extLst>
+              <a:ext uri="{FF2B5EF4-FFF2-40B4-BE49-F238E27FC236}">
+                <a16:creationId xmlns:a16="http://schemas.microsoft.com/office/drawing/2014/main" id="{E16AB047-CE98-D525-7654-BD21D1B0C6A0}"/>
+              </a:ext>
+            </a:extLst>
+          </p:cNvPr>
+          <p:cNvSpPr txBox="1">
+            <a:spLocks/>
+          </p:cNvSpPr>
+          <p:nvPr/>
+        </p:nvSpPr>
+        <p:spPr>
+          <a:xfrm>
+            <a:off x="855620" y="4555883"/>
+            <a:ext cx="9582736" cy="1137793"/>
+          </a:xfrm>
+          <a:prstGeom prst="rect">
+            <a:avLst/>
+          </a:prstGeom>
+        </p:spPr>
+        <p:txBody>
+          <a:bodyPr vert="horz" lIns="91440" tIns="45720" rIns="91440" bIns="45720" rtlCol="0">
+            <a:normAutofit fontScale="85000" lnSpcReduction="20000"/>
+          </a:bodyPr>
+          <a:lstStyle>
+            <a:lvl1pPr marL="0" indent="0" algn="l" defTabSz="914400" rtl="0" eaLnBrk="1" latinLnBrk="1" hangingPunct="1">
+              <a:lnSpc>
+                <a:spcPct val="150000"/>
+              </a:lnSpc>
+              <a:spcBef>
+                <a:spcPts val="1000"/>
+              </a:spcBef>
+              <a:spcAft>
+                <a:spcPts val="1200"/>
+              </a:spcAft>
+              <a:buFontTx/>
+              <a:buNone/>
+              <a:defRPr lang="en-US" sz="1200" kern="1200" dirty="0">
+                <a:solidFill>
+                  <a:schemeClr val="tx1"/>
+                </a:solidFill>
+                <a:latin typeface="맑은 고딕" panose="020B0503020000020004" pitchFamily="50" charset="-127"/>
+                <a:ea typeface="맑은 고딕" panose="020B0503020000020004" pitchFamily="50" charset="-127"/>
+                <a:cs typeface="+mn-cs"/>
+              </a:defRPr>
+            </a:lvl1pPr>
+            <a:lvl2pPr marL="228600" indent="-228600" algn="l" defTabSz="914400" rtl="0" eaLnBrk="1" latinLnBrk="1" hangingPunct="1">
+              <a:lnSpc>
+                <a:spcPct val="150000"/>
+              </a:lnSpc>
+              <a:spcBef>
+                <a:spcPts val="1000"/>
+              </a:spcBef>
+              <a:spcAft>
+                <a:spcPts val="1200"/>
+              </a:spcAft>
+              <a:buFont typeface="Arial" panose="020B0604020202020204" pitchFamily="34" charset="0"/>
+              <a:buChar char="•"/>
+              <a:defRPr lang="en-US" sz="1200" kern="1200" dirty="0">
+                <a:solidFill>
+                  <a:schemeClr val="tx1"/>
+                </a:solidFill>
+                <a:latin typeface="맑은 고딕" panose="020B0503020000020004" pitchFamily="50" charset="-127"/>
+                <a:ea typeface="맑은 고딕" panose="020B0503020000020004" pitchFamily="50" charset="-127"/>
+                <a:cs typeface="+mn-cs"/>
+              </a:defRPr>
+            </a:lvl2pPr>
+            <a:lvl3pPr marL="685800" indent="-228600" algn="l" defTabSz="914400" rtl="0" eaLnBrk="1" latinLnBrk="1" hangingPunct="1">
+              <a:lnSpc>
+                <a:spcPct val="150000"/>
+              </a:lnSpc>
+              <a:spcBef>
+                <a:spcPts val="1000"/>
+              </a:spcBef>
+              <a:spcAft>
+                <a:spcPts val="1200"/>
+              </a:spcAft>
+              <a:buFont typeface="Arial" panose="020B0604020202020204" pitchFamily="34" charset="0"/>
+              <a:buChar char="•"/>
+              <a:defRPr lang="en-US" sz="1200" kern="1200" dirty="0">
+                <a:solidFill>
+                  <a:schemeClr val="tx1"/>
+                </a:solidFill>
+                <a:latin typeface="맑은 고딕" panose="020B0503020000020004" pitchFamily="50" charset="-127"/>
+                <a:ea typeface="맑은 고딕" panose="020B0503020000020004" pitchFamily="50" charset="-127"/>
+                <a:cs typeface="+mn-cs"/>
+              </a:defRPr>
+            </a:lvl3pPr>
+            <a:lvl4pPr marL="1143000" indent="-228600" algn="l" defTabSz="914400" rtl="0" eaLnBrk="1" latinLnBrk="1" hangingPunct="1">
+              <a:lnSpc>
+                <a:spcPct val="150000"/>
+              </a:lnSpc>
+              <a:spcBef>
+                <a:spcPts val="1000"/>
+              </a:spcBef>
+              <a:spcAft>
+                <a:spcPts val="1200"/>
+              </a:spcAft>
+              <a:buFont typeface="Arial" panose="020B0604020202020204" pitchFamily="34" charset="0"/>
+              <a:buChar char="•"/>
+              <a:defRPr lang="en-US" sz="1200" kern="1200" dirty="0" smtClean="0">
+                <a:solidFill>
+                  <a:schemeClr val="tx1"/>
+                </a:solidFill>
+                <a:latin typeface="맑은 고딕" panose="020B0503020000020004" pitchFamily="50" charset="-127"/>
+                <a:ea typeface="맑은 고딕" panose="020B0503020000020004" pitchFamily="50" charset="-127"/>
+                <a:cs typeface="+mn-cs"/>
+              </a:defRPr>
+            </a:lvl4pPr>
+            <a:lvl5pPr marL="1600200" indent="-228600" algn="l" defTabSz="914400" rtl="0" eaLnBrk="1" latinLnBrk="1" hangingPunct="1">
+              <a:lnSpc>
+                <a:spcPct val="150000"/>
+              </a:lnSpc>
+              <a:spcBef>
+                <a:spcPts val="1000"/>
+              </a:spcBef>
+              <a:spcAft>
+                <a:spcPts val="1200"/>
+              </a:spcAft>
+              <a:buFont typeface="Arial" panose="020B0604020202020204" pitchFamily="34" charset="0"/>
+              <a:buChar char="•"/>
+              <a:defRPr lang="en-US" sz="1200" kern="1200" dirty="0" smtClean="0">
+                <a:solidFill>
+                  <a:schemeClr val="tx1"/>
+                </a:solidFill>
+                <a:latin typeface="맑은 고딕" panose="020B0503020000020004" pitchFamily="50" charset="-127"/>
+                <a:ea typeface="맑은 고딕" panose="020B0503020000020004" pitchFamily="50" charset="-127"/>
+                <a:cs typeface="+mn-cs"/>
+              </a:defRPr>
+            </a:lvl5pPr>
+            <a:lvl6pPr marL="2057400" indent="-228600" algn="l" defTabSz="914400" rtl="0" eaLnBrk="1" latinLnBrk="1" hangingPunct="1">
+              <a:lnSpc>
+                <a:spcPct val="150000"/>
+              </a:lnSpc>
+              <a:spcBef>
+                <a:spcPts val="1000"/>
+              </a:spcBef>
+              <a:spcAft>
+                <a:spcPts val="1200"/>
+              </a:spcAft>
+              <a:buFont typeface="Arial" panose="020B0604020202020204" pitchFamily="34" charset="0"/>
+              <a:buChar char="•"/>
+              <a:defRPr lang="en-US" sz="1200" kern="1200" dirty="0" smtClean="0">
+                <a:solidFill>
+                  <a:schemeClr val="tx1"/>
+                </a:solidFill>
+                <a:latin typeface="+mn-lt"/>
+                <a:ea typeface="+mn-ea"/>
+                <a:cs typeface="+mn-cs"/>
+              </a:defRPr>
+            </a:lvl6pPr>
+            <a:lvl7pPr marL="2514600" indent="-228600" algn="l" defTabSz="914400" rtl="0" eaLnBrk="1" latinLnBrk="1" hangingPunct="1">
+              <a:lnSpc>
+                <a:spcPct val="150000"/>
+              </a:lnSpc>
+              <a:spcBef>
+                <a:spcPts val="1000"/>
+              </a:spcBef>
+              <a:spcAft>
+                <a:spcPts val="1200"/>
+              </a:spcAft>
+              <a:buFont typeface="Arial" panose="020B0604020202020204" pitchFamily="34" charset="0"/>
+              <a:buChar char="•"/>
+              <a:defRPr lang="en-US" sz="1200" kern="1200" dirty="0" smtClean="0">
+                <a:solidFill>
+                  <a:schemeClr val="tx1"/>
+                </a:solidFill>
+                <a:latin typeface="+mn-lt"/>
+                <a:ea typeface="+mn-ea"/>
+                <a:cs typeface="+mn-cs"/>
+              </a:defRPr>
+            </a:lvl7pPr>
+            <a:lvl8pPr marL="2971800" indent="-228600" algn="l" defTabSz="914400" rtl="0" eaLnBrk="1" latinLnBrk="1" hangingPunct="1">
+              <a:lnSpc>
+                <a:spcPct val="150000"/>
+              </a:lnSpc>
+              <a:spcBef>
+                <a:spcPts val="1000"/>
+              </a:spcBef>
+              <a:spcAft>
+                <a:spcPts val="1200"/>
+              </a:spcAft>
+              <a:buFont typeface="Arial" panose="020B0604020202020204" pitchFamily="34" charset="0"/>
+              <a:buChar char="•"/>
+              <a:defRPr lang="en-US" sz="1200" kern="1200" dirty="0" smtClean="0">
+                <a:solidFill>
+                  <a:schemeClr val="tx1"/>
+                </a:solidFill>
+                <a:latin typeface="+mn-lt"/>
+                <a:ea typeface="+mn-ea"/>
+                <a:cs typeface="+mn-cs"/>
+              </a:defRPr>
+            </a:lvl8pPr>
+            <a:lvl9pPr marL="3429000" indent="-228600" algn="l" defTabSz="914400" rtl="0" eaLnBrk="1" latinLnBrk="1" hangingPunct="1">
+              <a:lnSpc>
+                <a:spcPct val="90000"/>
+              </a:lnSpc>
+              <a:spcBef>
+                <a:spcPct val="30000"/>
+              </a:spcBef>
+              <a:buFont typeface="Arial" panose="020B0604020202020204" pitchFamily="34" charset="0"/>
+              <a:buNone/>
+              <a:defRPr sz="1200" kern="1200">
+                <a:solidFill>
+                  <a:schemeClr val="tx1"/>
+                </a:solidFill>
+                <a:latin typeface="+mn-lt"/>
+                <a:ea typeface="+mn-ea"/>
+                <a:cs typeface="+mn-cs"/>
+              </a:defRPr>
+            </a:lvl9pPr>
+          </a:lstStyle>
+          <a:p>
+            <a:r>
+              <a:rPr lang="en-US" altLang="ko-KR" sz="2400" dirty="0">
+                <a:solidFill>
+                  <a:schemeClr val="bg1"/>
+                </a:solidFill>
+                <a:latin typeface="D2Coding" panose="020B0609020101020101" pitchFamily="49" charset="-127"/>
+                <a:ea typeface="D2Coding" panose="020B0609020101020101" pitchFamily="49" charset="-127"/>
+              </a:rPr>
+              <a:t>2026 Fall</a:t>
+            </a:r>
+          </a:p>
+          <a:p>
+            <a:r>
+              <a:rPr lang="ko-KR" altLang="en-US" sz="2400" dirty="0" err="1">
+                <a:solidFill>
+                  <a:schemeClr val="bg1"/>
+                </a:solidFill>
+                <a:latin typeface="D2Coding" panose="020B0609020101020101" pitchFamily="49" charset="-127"/>
+                <a:ea typeface="D2Coding" panose="020B0609020101020101" pitchFamily="49" charset="-127"/>
+              </a:rPr>
+              <a:t>조상구교수</a:t>
+            </a:r>
+            <a:endParaRPr lang="en-US" altLang="ko-KR" sz="2400" dirty="0">
+              <a:solidFill>
+                <a:schemeClr val="bg1"/>
+              </a:solidFill>
+              <a:latin typeface="D2Coding" panose="020B0609020101020101" pitchFamily="49" charset="-127"/>
+              <a:ea typeface="D2Coding" panose="020B0609020101020101" pitchFamily="49" charset="-127"/>
+            </a:endParaRPr>
+          </a:p>
+        </p:txBody>
+      </p:sp>
+    </p:spTree>
+    <p:extLst>
+      <p:ext uri="{BB962C8B-B14F-4D97-AF65-F5344CB8AC3E}">
+        <p14:creationId xmlns:p14="http://schemas.microsoft.com/office/powerpoint/2010/main" val="3919397975"/>
+      </p:ext>
+    </p:extLst>
+  </p:cSld>
+  <p:clrMapOvr>
+    <a:masterClrMapping/>
+  </p:clrMapOvr>
+</p:sld>
+</file>
+
+<file path=ppt/slides/slide35.xml><?xml version="1.0" encoding="utf-8"?>
+<p:sld xmlns:a="http://schemas.openxmlformats.org/drawingml/2006/main" xmlns:r="http://schemas.openxmlformats.org/officeDocument/2006/relationships" xmlns:p="http://schemas.openxmlformats.org/presentationml/2006/main">
+  <p:cSld>
+    <p:spTree>
+      <p:nvGrpSpPr>
+        <p:cNvPr id="1" name="">
+          <a:extLst>
+            <a:ext uri="{FF2B5EF4-FFF2-40B4-BE49-F238E27FC236}">
+              <a16:creationId xmlns:a16="http://schemas.microsoft.com/office/drawing/2014/main" id="{EFAC3D9D-ED45-4A43-F676-077B497D1F36}"/>
+            </a:ext>
+          </a:extLst>
+        </p:cNvPr>
+        <p:cNvGrpSpPr/>
+        <p:nvPr/>
+      </p:nvGrpSpPr>
+      <p:grpSpPr>
+        <a:xfrm>
+          <a:off x="0" y="0"/>
+          <a:ext cx="0" cy="0"/>
+          <a:chOff x="0" y="0"/>
+          <a:chExt cx="0" cy="0"/>
+        </a:xfrm>
+      </p:grpSpPr>
+      <p:sp>
+        <p:nvSpPr>
+          <p:cNvPr id="3" name="제목 1">
+            <a:extLst>
+              <a:ext uri="{FF2B5EF4-FFF2-40B4-BE49-F238E27FC236}">
+                <a16:creationId xmlns:a16="http://schemas.microsoft.com/office/drawing/2014/main" id="{846CA17B-88CB-A9F6-4F1A-51E8BEF6D42C}"/>
+              </a:ext>
+            </a:extLst>
+          </p:cNvPr>
+          <p:cNvSpPr txBox="1">
+            <a:spLocks/>
+          </p:cNvSpPr>
+          <p:nvPr/>
+        </p:nvSpPr>
+        <p:spPr>
+          <a:xfrm>
+            <a:off x="475645" y="481983"/>
+            <a:ext cx="10353762" cy="766439"/>
+          </a:xfrm>
+          <a:prstGeom prst="rect">
+            <a:avLst/>
+          </a:prstGeom>
+        </p:spPr>
+        <p:txBody>
+          <a:bodyPr vert="horz" lIns="91440" tIns="45720" rIns="91440" bIns="45720" rtlCol="0" anchor="ctr">
+            <a:normAutofit/>
+          </a:bodyPr>
+          <a:lstStyle>
+            <a:lvl1pPr algn="ctr" defTabSz="914400" rtl="0" eaLnBrk="1" latinLnBrk="1" hangingPunct="1">
+              <a:lnSpc>
+                <a:spcPct val="90000"/>
+              </a:lnSpc>
+              <a:spcBef>
+                <a:spcPct val="0"/>
+              </a:spcBef>
+              <a:buNone/>
+              <a:defRPr sz="3200" kern="1200" cap="all" baseline="0">
+                <a:solidFill>
+                  <a:schemeClr val="tx1"/>
+                </a:solidFill>
+                <a:effectLst/>
+                <a:latin typeface="Batang" panose="02030600000101010101" pitchFamily="18" charset="-127"/>
+                <a:ea typeface="Batang" panose="02030600000101010101" pitchFamily="18" charset="-127"/>
+                <a:cs typeface="+mj-cs"/>
+              </a:defRPr>
+            </a:lvl1pPr>
+          </a:lstStyle>
+          <a:p>
+            <a:pPr algn="l"/>
+            <a:r>
+              <a:rPr lang="en-US" altLang="ko-KR" sz="2800" cap="none" dirty="0">
+                <a:solidFill>
+                  <a:schemeClr val="bg2">
+                    <a:lumMod val="25000"/>
+                  </a:schemeClr>
+                </a:solidFill>
+                <a:latin typeface="D2Coding" panose="020B0609020101020101" pitchFamily="49" charset="-127"/>
+                <a:ea typeface="D2Coding" panose="020B0609020101020101" pitchFamily="49" charset="-127"/>
+                <a:cs typeface="Segoe UI Light" panose="020B0502040204020203" pitchFamily="34" charset="0"/>
+              </a:rPr>
+              <a:t>AI Agent : Vector DB</a:t>
+            </a:r>
+            <a:endParaRPr lang="ko-KR" altLang="en-US" sz="2800" cap="none" dirty="0">
+              <a:solidFill>
+                <a:schemeClr val="bg2">
+                  <a:lumMod val="25000"/>
+                </a:schemeClr>
+              </a:solidFill>
+              <a:latin typeface="D2Coding" panose="020B0609020101020101" pitchFamily="49" charset="-127"/>
+              <a:ea typeface="D2Coding" panose="020B0609020101020101" pitchFamily="49" charset="-127"/>
+              <a:cs typeface="Segoe UI Light" panose="020B0502040204020203" pitchFamily="34" charset="0"/>
+            </a:endParaRPr>
+          </a:p>
+        </p:txBody>
+      </p:sp>
+      <p:sp>
+        <p:nvSpPr>
+          <p:cNvPr id="8" name="TextBox 7">
+            <a:extLst>
+              <a:ext uri="{FF2B5EF4-FFF2-40B4-BE49-F238E27FC236}">
+                <a16:creationId xmlns:a16="http://schemas.microsoft.com/office/drawing/2014/main" id="{A6541130-FC1D-4B28-64D8-712C1F853D56}"/>
+              </a:ext>
+            </a:extLst>
+          </p:cNvPr>
+          <p:cNvSpPr txBox="1"/>
+          <p:nvPr/>
+        </p:nvSpPr>
+        <p:spPr>
+          <a:xfrm>
+            <a:off x="744020" y="3244334"/>
+            <a:ext cx="184731" cy="369332"/>
+          </a:xfrm>
+          <a:prstGeom prst="rect">
+            <a:avLst/>
+          </a:prstGeom>
+          <a:noFill/>
+        </p:spPr>
+        <p:txBody>
+          <a:bodyPr wrap="none" rtlCol="0">
+            <a:spAutoFit/>
+          </a:bodyPr>
+          <a:lstStyle/>
+          <a:p>
+            <a:endParaRPr lang="ko-KR" altLang="en-US" dirty="0">
+              <a:solidFill>
+                <a:schemeClr val="accent5"/>
+              </a:solidFill>
+              <a:latin typeface="D2Coding" panose="020B0609020101020101" pitchFamily="49" charset="-127"/>
+              <a:ea typeface="D2Coding" panose="020B0609020101020101" pitchFamily="49" charset="-127"/>
+            </a:endParaRPr>
+          </a:p>
+        </p:txBody>
+      </p:sp>
+      <p:sp>
+        <p:nvSpPr>
+          <p:cNvPr id="2" name="슬라이드 번호 개체 틀 3">
+            <a:extLst>
+              <a:ext uri="{FF2B5EF4-FFF2-40B4-BE49-F238E27FC236}">
+                <a16:creationId xmlns:a16="http://schemas.microsoft.com/office/drawing/2014/main" id="{79B5D769-8FF5-3395-7346-8ABE69512EC9}"/>
+              </a:ext>
+            </a:extLst>
+          </p:cNvPr>
+          <p:cNvSpPr txBox="1">
+            <a:spLocks/>
+          </p:cNvSpPr>
+          <p:nvPr/>
+        </p:nvSpPr>
+        <p:spPr>
+          <a:xfrm>
+            <a:off x="11180761" y="299420"/>
+            <a:ext cx="753545" cy="365125"/>
+          </a:xfrm>
+          <a:prstGeom prst="rect">
+            <a:avLst/>
+          </a:prstGeom>
+        </p:spPr>
+        <p:txBody>
+          <a:bodyPr vert="horz" lIns="91440" tIns="45720" rIns="91440" bIns="45720" rtlCol="0" anchor="ctr"/>
+          <a:lstStyle>
+            <a:defPPr rtl="0">
+              <a:defRPr lang="ko-KR"/>
+            </a:defPPr>
+            <a:lvl1pPr marL="0" algn="r" defTabSz="914400" rtl="0" eaLnBrk="1" latinLnBrk="0" hangingPunct="1">
+              <a:defRPr sz="1200" kern="1200" baseline="0">
+                <a:solidFill>
+                  <a:schemeClr val="tx1">
+                    <a:lumMod val="65000"/>
+                    <a:lumOff val="35000"/>
+                  </a:schemeClr>
+                </a:solidFill>
+                <a:latin typeface="맑은 고딕" panose="020B0503020000020004" pitchFamily="50" charset="-127"/>
+                <a:ea typeface="맑은 고딕" panose="020B0503020000020004" pitchFamily="50" charset="-127"/>
+                <a:cs typeface="+mn-cs"/>
+              </a:defRPr>
+            </a:lvl1pPr>
+            <a:lvl2pPr marL="457200" algn="l" defTabSz="914400" rtl="0" eaLnBrk="1" latinLnBrk="0" hangingPunct="1">
+              <a:defRPr sz="1800" kern="1200">
+                <a:solidFill>
+                  <a:schemeClr val="tx1"/>
+                </a:solidFill>
+                <a:latin typeface="+mn-lt"/>
+                <a:ea typeface="+mn-ea"/>
+                <a:cs typeface="+mn-cs"/>
+              </a:defRPr>
+            </a:lvl2pPr>
+            <a:lvl3pPr marL="914400" algn="l" defTabSz="914400" rtl="0" eaLnBrk="1" latinLnBrk="0" hangingPunct="1">
+              <a:defRPr sz="1800" kern="1200">
+                <a:solidFill>
+                  <a:schemeClr val="tx1"/>
+                </a:solidFill>
+                <a:latin typeface="+mn-lt"/>
+                <a:ea typeface="+mn-ea"/>
+                <a:cs typeface="+mn-cs"/>
+              </a:defRPr>
+            </a:lvl3pPr>
+            <a:lvl4pPr marL="1371600" algn="l" defTabSz="914400" rtl="0" eaLnBrk="1" latinLnBrk="0" hangingPunct="1">
+              <a:defRPr sz="1800" kern="1200">
+                <a:solidFill>
+                  <a:schemeClr val="tx1"/>
+                </a:solidFill>
+                <a:latin typeface="+mn-lt"/>
+                <a:ea typeface="+mn-ea"/>
+                <a:cs typeface="+mn-cs"/>
+              </a:defRPr>
+            </a:lvl4pPr>
+            <a:lvl5pPr marL="1828800" algn="l" defTabSz="914400" rtl="0" eaLnBrk="1" latinLnBrk="0" hangingPunct="1">
+              <a:defRPr sz="1800" kern="1200">
+                <a:solidFill>
+                  <a:schemeClr val="tx1"/>
+                </a:solidFill>
+                <a:latin typeface="+mn-lt"/>
+                <a:ea typeface="+mn-ea"/>
+                <a:cs typeface="+mn-cs"/>
+              </a:defRPr>
+            </a:lvl5pPr>
+            <a:lvl6pPr marL="2286000" algn="l" defTabSz="914400" rtl="0" eaLnBrk="1" latinLnBrk="0" hangingPunct="1">
+              <a:defRPr sz="1800" kern="1200">
+                <a:solidFill>
+                  <a:schemeClr val="tx1"/>
+                </a:solidFill>
+                <a:latin typeface="+mn-lt"/>
+                <a:ea typeface="+mn-ea"/>
+                <a:cs typeface="+mn-cs"/>
+              </a:defRPr>
+            </a:lvl6pPr>
+            <a:lvl7pPr marL="2743200" algn="l" defTabSz="914400" rtl="0" eaLnBrk="1" latinLnBrk="0" hangingPunct="1">
+              <a:defRPr sz="1800" kern="1200">
+                <a:solidFill>
+                  <a:schemeClr val="tx1"/>
+                </a:solidFill>
+                <a:latin typeface="+mn-lt"/>
+                <a:ea typeface="+mn-ea"/>
+                <a:cs typeface="+mn-cs"/>
+              </a:defRPr>
+            </a:lvl7pPr>
+            <a:lvl8pPr marL="3200400" algn="l" defTabSz="914400" rtl="0" eaLnBrk="1" latinLnBrk="0" hangingPunct="1">
+              <a:defRPr sz="1800" kern="1200">
+                <a:solidFill>
+                  <a:schemeClr val="tx1"/>
+                </a:solidFill>
+                <a:latin typeface="+mn-lt"/>
+                <a:ea typeface="+mn-ea"/>
+                <a:cs typeface="+mn-cs"/>
+              </a:defRPr>
+            </a:lvl8pPr>
+            <a:lvl9pPr marL="3657600" algn="l" defTabSz="914400" rtl="0" eaLnBrk="1" latinLnBrk="0" hangingPunct="1">
+              <a:defRPr sz="1800" kern="1200">
+                <a:solidFill>
+                  <a:schemeClr val="tx1"/>
+                </a:solidFill>
+                <a:latin typeface="+mn-lt"/>
+                <a:ea typeface="+mn-ea"/>
+                <a:cs typeface="+mn-cs"/>
+              </a:defRPr>
+            </a:lvl9pPr>
+          </a:lstStyle>
+          <a:p>
+            <a:fld id="{D57F1E4F-1CFF-5643-939E-217C01CDF565}" type="slidenum">
+              <a:rPr lang="en-US" b="1" smtClean="0">
+                <a:latin typeface="Segoe UI Emoji" panose="020B0502040204020203" pitchFamily="34" charset="0"/>
+                <a:ea typeface="Segoe UI Emoji" panose="020B0502040204020203" pitchFamily="34" charset="0"/>
+              </a:rPr>
+              <a:pPr/>
+              <a:t>35</a:t>
+            </a:fld>
+            <a:endParaRPr lang="en-US" b="1" dirty="0">
+              <a:latin typeface="Segoe UI Emoji" panose="020B0502040204020203" pitchFamily="34" charset="0"/>
+              <a:ea typeface="Segoe UI Emoji" panose="020B0502040204020203" pitchFamily="34" charset="0"/>
+            </a:endParaRPr>
+          </a:p>
+        </p:txBody>
+      </p:sp>
+      <p:sp>
+        <p:nvSpPr>
+          <p:cNvPr id="4" name="TextBox 3">
+            <a:extLst>
+              <a:ext uri="{FF2B5EF4-FFF2-40B4-BE49-F238E27FC236}">
+                <a16:creationId xmlns:a16="http://schemas.microsoft.com/office/drawing/2014/main" id="{D5B2F529-CE7E-B1FB-E0F8-01C804C3C722}"/>
+              </a:ext>
+            </a:extLst>
+          </p:cNvPr>
+          <p:cNvSpPr txBox="1"/>
+          <p:nvPr/>
+        </p:nvSpPr>
+        <p:spPr>
+          <a:xfrm>
+            <a:off x="591620" y="1248422"/>
+            <a:ext cx="11047930" cy="793166"/>
+          </a:xfrm>
+          <a:prstGeom prst="rect">
+            <a:avLst/>
+          </a:prstGeom>
+          <a:noFill/>
+        </p:spPr>
+        <p:txBody>
+          <a:bodyPr wrap="square" rtlCol="0">
+            <a:spAutoFit/>
+          </a:bodyPr>
+          <a:lstStyle/>
+          <a:p>
+            <a:pPr marL="285750" indent="-285750">
+              <a:lnSpc>
+                <a:spcPct val="150000"/>
+              </a:lnSpc>
+              <a:buFont typeface="Wingdings" panose="05000000000000000000" pitchFamily="2" charset="2"/>
+              <a:buChar char="v"/>
+            </a:pPr>
+            <a:r>
+              <a:rPr lang="ko-KR" altLang="en-US" sz="1600" dirty="0">
+                <a:latin typeface="D2Coding" panose="020B0609020101020101" pitchFamily="49" charset="-127"/>
+                <a:ea typeface="D2Coding" panose="020B0609020101020101" pitchFamily="49" charset="-127"/>
+              </a:rPr>
+              <a:t>구글 드라이브의 문서 변경을 감지하여 </a:t>
+            </a:r>
+            <a:r>
+              <a:rPr lang="en-US" altLang="ko-KR" sz="1600" dirty="0">
+                <a:latin typeface="D2Coding" panose="020B0609020101020101" pitchFamily="49" charset="-127"/>
+                <a:ea typeface="D2Coding" panose="020B0609020101020101" pitchFamily="49" charset="-127"/>
+              </a:rPr>
+              <a:t>AI</a:t>
+            </a:r>
+            <a:r>
+              <a:rPr lang="ko-KR" altLang="en-US" sz="1600" dirty="0">
+                <a:latin typeface="D2Coding" panose="020B0609020101020101" pitchFamily="49" charset="-127"/>
+                <a:ea typeface="D2Coding" panose="020B0609020101020101" pitchFamily="49" charset="-127"/>
+              </a:rPr>
+              <a:t>가 검색할 수 있는 형태로 변환한 뒤</a:t>
+            </a:r>
+            <a:r>
+              <a:rPr lang="en-US" altLang="ko-KR" sz="1600" dirty="0">
+                <a:latin typeface="D2Coding" panose="020B0609020101020101" pitchFamily="49" charset="-127"/>
+                <a:ea typeface="D2Coding" panose="020B0609020101020101" pitchFamily="49" charset="-127"/>
+              </a:rPr>
+              <a:t>, </a:t>
+            </a:r>
+            <a:r>
+              <a:rPr lang="en-US" altLang="ko-KR" sz="1600" dirty="0" err="1">
+                <a:latin typeface="D2Coding" panose="020B0609020101020101" pitchFamily="49" charset="-127"/>
+                <a:ea typeface="D2Coding" panose="020B0609020101020101" pitchFamily="49" charset="-127"/>
+              </a:rPr>
+              <a:t>Supabase</a:t>
+            </a:r>
+            <a:r>
+              <a:rPr lang="en-US" altLang="ko-KR" sz="1600" dirty="0">
+                <a:latin typeface="D2Coding" panose="020B0609020101020101" pitchFamily="49" charset="-127"/>
+                <a:ea typeface="D2Coding" panose="020B0609020101020101" pitchFamily="49" charset="-127"/>
+              </a:rPr>
+              <a:t> </a:t>
+            </a:r>
+            <a:r>
+              <a:rPr lang="ko-KR" altLang="en-US" sz="1600" dirty="0">
+                <a:latin typeface="D2Coding" panose="020B0609020101020101" pitchFamily="49" charset="-127"/>
+                <a:ea typeface="D2Coding" panose="020B0609020101020101" pitchFamily="49" charset="-127"/>
+              </a:rPr>
+              <a:t>벡터 데이터베이스에 자동 저장하는 </a:t>
+            </a:r>
+            <a:r>
+              <a:rPr lang="en-US" altLang="ko-KR" sz="1600" dirty="0">
+                <a:latin typeface="D2Coding" panose="020B0609020101020101" pitchFamily="49" charset="-127"/>
+                <a:ea typeface="D2Coding" panose="020B0609020101020101" pitchFamily="49" charset="-127"/>
+              </a:rPr>
+              <a:t>RAG(</a:t>
+            </a:r>
+            <a:r>
+              <a:rPr lang="ko-KR" altLang="en-US" sz="1600" dirty="0">
+                <a:latin typeface="D2Coding" panose="020B0609020101020101" pitchFamily="49" charset="-127"/>
+                <a:ea typeface="D2Coding" panose="020B0609020101020101" pitchFamily="49" charset="-127"/>
+              </a:rPr>
+              <a:t>검색 증강 생성</a:t>
+            </a:r>
+            <a:r>
+              <a:rPr lang="en-US" altLang="ko-KR" sz="1600" dirty="0">
+                <a:latin typeface="D2Coding" panose="020B0609020101020101" pitchFamily="49" charset="-127"/>
+                <a:ea typeface="D2Coding" panose="020B0609020101020101" pitchFamily="49" charset="-127"/>
+              </a:rPr>
+              <a:t>) </a:t>
+            </a:r>
+            <a:r>
+              <a:rPr lang="ko-KR" altLang="en-US" sz="1600" dirty="0">
+                <a:latin typeface="D2Coding" panose="020B0609020101020101" pitchFamily="49" charset="-127"/>
+                <a:ea typeface="D2Coding" panose="020B0609020101020101" pitchFamily="49" charset="-127"/>
+              </a:rPr>
+              <a:t>파일 변환 </a:t>
+            </a:r>
+            <a:r>
+              <a:rPr lang="en-US" altLang="ko-KR" sz="1600" dirty="0">
+                <a:latin typeface="D2Coding" panose="020B0609020101020101" pitchFamily="49" charset="-127"/>
+                <a:ea typeface="D2Coding" panose="020B0609020101020101" pitchFamily="49" charset="-127"/>
+              </a:rPr>
+              <a:t>n8n</a:t>
+            </a:r>
+            <a:r>
+              <a:rPr lang="ko-KR" altLang="en-US" sz="1600" dirty="0">
+                <a:latin typeface="D2Coding" panose="020B0609020101020101" pitchFamily="49" charset="-127"/>
+                <a:ea typeface="D2Coding" panose="020B0609020101020101" pitchFamily="49" charset="-127"/>
+              </a:rPr>
+              <a:t> 파이프라인</a:t>
+            </a:r>
+          </a:p>
+        </p:txBody>
+      </p:sp>
+      <p:pic>
+        <p:nvPicPr>
+          <p:cNvPr id="11" name="그림 10">
+            <a:extLst>
+              <a:ext uri="{FF2B5EF4-FFF2-40B4-BE49-F238E27FC236}">
+                <a16:creationId xmlns:a16="http://schemas.microsoft.com/office/drawing/2014/main" id="{F7B55537-878D-02BB-B9D9-1FD63322A66A}"/>
+              </a:ext>
+            </a:extLst>
+          </p:cNvPr>
+          <p:cNvPicPr>
+            <a:picLocks noChangeAspect="1"/>
+          </p:cNvPicPr>
+          <p:nvPr/>
+        </p:nvPicPr>
+        <p:blipFill>
+          <a:blip r:embed="rId2"/>
+          <a:stretch>
+            <a:fillRect/>
+          </a:stretch>
+        </p:blipFill>
+        <p:spPr>
+          <a:xfrm>
+            <a:off x="1573277" y="2533272"/>
+            <a:ext cx="7284009" cy="3842745"/>
+          </a:xfrm>
+          <a:prstGeom prst="rect">
+            <a:avLst/>
+          </a:prstGeom>
+        </p:spPr>
+      </p:pic>
+      <p:sp>
+        <p:nvSpPr>
+          <p:cNvPr id="15" name="TextBox 14">
+            <a:extLst>
+              <a:ext uri="{FF2B5EF4-FFF2-40B4-BE49-F238E27FC236}">
+                <a16:creationId xmlns:a16="http://schemas.microsoft.com/office/drawing/2014/main" id="{5B2EA8AB-50F2-8B4B-4C5E-E9E594379078}"/>
+              </a:ext>
+            </a:extLst>
+          </p:cNvPr>
+          <p:cNvSpPr txBox="1"/>
+          <p:nvPr/>
+        </p:nvSpPr>
+        <p:spPr>
+          <a:xfrm>
+            <a:off x="8134901" y="5940590"/>
+            <a:ext cx="3799405" cy="617990"/>
+          </a:xfrm>
+          <a:prstGeom prst="rect">
+            <a:avLst/>
+          </a:prstGeom>
+          <a:noFill/>
+        </p:spPr>
+        <p:txBody>
+          <a:bodyPr wrap="square">
+            <a:spAutoFit/>
+          </a:bodyPr>
+          <a:lstStyle/>
+          <a:p>
+            <a:pPr marL="285750" indent="-285750">
+              <a:lnSpc>
+                <a:spcPct val="150000"/>
+              </a:lnSpc>
+              <a:buFont typeface="Wingdings" panose="05000000000000000000" pitchFamily="2" charset="2"/>
+              <a:buChar char="v"/>
+            </a:pPr>
+            <a:r>
+              <a:rPr lang="en-US" altLang="ko-KR" sz="1200" dirty="0">
+                <a:latin typeface="D2Coding" panose="020B0609020101020101" pitchFamily="49" charset="-127"/>
+                <a:ea typeface="D2Coding" panose="020B0609020101020101" pitchFamily="49" charset="-127"/>
+                <a:hlinkClick r:id="rId3">
+                  <a:extLst>
+                    <a:ext uri="{A12FA001-AC4F-418D-AE19-62706E023703}">
+                      <ahyp:hlinkClr xmlns:ahyp="http://schemas.microsoft.com/office/drawing/2018/hyperlinkcolor" val="tx"/>
+                    </a:ext>
+                  </a:extLst>
+                </a:hlinkClick>
+              </a:rPr>
+              <a:t>AI Agent with RAG</a:t>
+            </a:r>
+            <a:r>
+              <a:rPr lang="en-US" altLang="ko-KR" sz="1200" dirty="0">
+                <a:latin typeface="D2Coding" panose="020B0609020101020101" pitchFamily="49" charset="-127"/>
+                <a:ea typeface="D2Coding" panose="020B0609020101020101" pitchFamily="49" charset="-127"/>
+              </a:rPr>
+              <a:t> </a:t>
+            </a:r>
+            <a:r>
+              <a:rPr lang="ko-KR" altLang="en-US" sz="1200" dirty="0">
+                <a:latin typeface="D2Coding" panose="020B0609020101020101" pitchFamily="49" charset="-127"/>
+                <a:ea typeface="D2Coding" panose="020B0609020101020101" pitchFamily="49" charset="-127"/>
+              </a:rPr>
+              <a:t>유튜브 동영상 </a:t>
+            </a:r>
+            <a:r>
+              <a:rPr lang="en-US" altLang="ko-KR" sz="1200" dirty="0">
+                <a:latin typeface="D2Coding" panose="020B0609020101020101" pitchFamily="49" charset="-127"/>
+                <a:ea typeface="D2Coding" panose="020B0609020101020101" pitchFamily="49" charset="-127"/>
+              </a:rPr>
+              <a:t>(</a:t>
+            </a:r>
+            <a:r>
+              <a:rPr lang="ko-KR" altLang="en-US" sz="1200" dirty="0">
+                <a:latin typeface="D2Coding" panose="020B0609020101020101" pitchFamily="49" charset="-127"/>
+                <a:ea typeface="D2Coding" panose="020B0609020101020101" pitchFamily="49" charset="-127"/>
+              </a:rPr>
+              <a:t>구글</a:t>
+            </a:r>
+            <a:r>
+              <a:rPr lang="en-US" altLang="ko-KR" sz="1200" dirty="0">
+                <a:latin typeface="D2Coding" panose="020B0609020101020101" pitchFamily="49" charset="-127"/>
+                <a:ea typeface="D2Coding" panose="020B0609020101020101" pitchFamily="49" charset="-127"/>
+              </a:rPr>
+              <a:t> </a:t>
+            </a:r>
+            <a:r>
+              <a:rPr lang="ko-KR" altLang="en-US" sz="1200" dirty="0">
+                <a:latin typeface="D2Coding" panose="020B0609020101020101" pitchFamily="49" charset="-127"/>
+                <a:ea typeface="D2Coding" panose="020B0609020101020101" pitchFamily="49" charset="-127"/>
+              </a:rPr>
+              <a:t>드라이브에</a:t>
+            </a:r>
+            <a:r>
+              <a:rPr lang="en-US" altLang="ko-KR" sz="1200" dirty="0">
+                <a:latin typeface="D2Coding" panose="020B0609020101020101" pitchFamily="49" charset="-127"/>
+                <a:ea typeface="D2Coding" panose="020B0609020101020101" pitchFamily="49" charset="-127"/>
+              </a:rPr>
+              <a:t> </a:t>
+            </a:r>
+            <a:r>
+              <a:rPr lang="ko-KR" altLang="en-US" sz="1200" dirty="0">
+                <a:latin typeface="D2Coding" panose="020B0609020101020101" pitchFamily="49" charset="-127"/>
+                <a:ea typeface="D2Coding" panose="020B0609020101020101" pitchFamily="49" charset="-127"/>
+              </a:rPr>
+              <a:t>새로운 파일을 </a:t>
+            </a:r>
+            <a:r>
+              <a:rPr lang="en-US" altLang="ko-KR" sz="1200" dirty="0">
+                <a:latin typeface="D2Coding" panose="020B0609020101020101" pitchFamily="49" charset="-127"/>
+                <a:ea typeface="D2Coding" panose="020B0609020101020101" pitchFamily="49" charset="-127"/>
+              </a:rPr>
+              <a:t>update</a:t>
+            </a:r>
+            <a:r>
+              <a:rPr lang="ko-KR" altLang="en-US" sz="1200" dirty="0">
+                <a:latin typeface="D2Coding" panose="020B0609020101020101" pitchFamily="49" charset="-127"/>
+                <a:ea typeface="D2Coding" panose="020B0609020101020101" pitchFamily="49" charset="-127"/>
+              </a:rPr>
+              <a:t>를 하고 실습</a:t>
+            </a:r>
+            <a:r>
+              <a:rPr lang="en-US" altLang="ko-KR" sz="1200" dirty="0">
+                <a:latin typeface="D2Coding" panose="020B0609020101020101" pitchFamily="49" charset="-127"/>
+                <a:ea typeface="D2Coding" panose="020B0609020101020101" pitchFamily="49" charset="-127"/>
+              </a:rPr>
+              <a:t>)</a:t>
+            </a:r>
+          </a:p>
+        </p:txBody>
+      </p:sp>
+    </p:spTree>
+    <p:extLst>
+      <p:ext uri="{BB962C8B-B14F-4D97-AF65-F5344CB8AC3E}">
+        <p14:creationId xmlns:p14="http://schemas.microsoft.com/office/powerpoint/2010/main" val="1868506906"/>
+      </p:ext>
+    </p:extLst>
+  </p:cSld>
+  <p:clrMapOvr>
+    <a:masterClrMapping/>
+  </p:clrMapOvr>
+</p:sld>
+</file>
+
+<file path=ppt/slides/slide36.xml><?xml version="1.0" encoding="utf-8"?>
+<p:sld xmlns:a="http://schemas.openxmlformats.org/drawingml/2006/main" xmlns:r="http://schemas.openxmlformats.org/officeDocument/2006/relationships" xmlns:p="http://schemas.openxmlformats.org/presentationml/2006/main">
+  <p:cSld>
+    <p:spTree>
+      <p:nvGrpSpPr>
+        <p:cNvPr id="1" name="">
+          <a:extLst>
+            <a:ext uri="{FF2B5EF4-FFF2-40B4-BE49-F238E27FC236}">
+              <a16:creationId xmlns:a16="http://schemas.microsoft.com/office/drawing/2014/main" id="{43774DE0-5AE2-C7D2-DA90-13130142DE6F}"/>
+            </a:ext>
+          </a:extLst>
+        </p:cNvPr>
+        <p:cNvGrpSpPr/>
+        <p:nvPr/>
+      </p:nvGrpSpPr>
+      <p:grpSpPr>
+        <a:xfrm>
+          <a:off x="0" y="0"/>
+          <a:ext cx="0" cy="0"/>
+          <a:chOff x="0" y="0"/>
+          <a:chExt cx="0" cy="0"/>
+        </a:xfrm>
+      </p:grpSpPr>
+      <p:sp>
+        <p:nvSpPr>
+          <p:cNvPr id="3" name="제목 1">
+            <a:extLst>
+              <a:ext uri="{FF2B5EF4-FFF2-40B4-BE49-F238E27FC236}">
+                <a16:creationId xmlns:a16="http://schemas.microsoft.com/office/drawing/2014/main" id="{A5A4BAA1-80DE-772A-5E24-1BCA04AC9E1C}"/>
+              </a:ext>
+            </a:extLst>
+          </p:cNvPr>
+          <p:cNvSpPr txBox="1">
+            <a:spLocks/>
+          </p:cNvSpPr>
+          <p:nvPr/>
+        </p:nvSpPr>
+        <p:spPr>
+          <a:xfrm>
+            <a:off x="475645" y="481983"/>
+            <a:ext cx="10353762" cy="766439"/>
+          </a:xfrm>
+          <a:prstGeom prst="rect">
+            <a:avLst/>
+          </a:prstGeom>
+        </p:spPr>
+        <p:txBody>
+          <a:bodyPr vert="horz" lIns="91440" tIns="45720" rIns="91440" bIns="45720" rtlCol="0" anchor="ctr">
+            <a:normAutofit/>
+          </a:bodyPr>
+          <a:lstStyle>
+            <a:lvl1pPr algn="ctr" defTabSz="914400" rtl="0" eaLnBrk="1" latinLnBrk="1" hangingPunct="1">
+              <a:lnSpc>
+                <a:spcPct val="90000"/>
+              </a:lnSpc>
+              <a:spcBef>
+                <a:spcPct val="0"/>
+              </a:spcBef>
+              <a:buNone/>
+              <a:defRPr sz="3200" kern="1200" cap="all" baseline="0">
+                <a:solidFill>
+                  <a:schemeClr val="tx1"/>
+                </a:solidFill>
+                <a:effectLst/>
+                <a:latin typeface="Batang" panose="02030600000101010101" pitchFamily="18" charset="-127"/>
+                <a:ea typeface="Batang" panose="02030600000101010101" pitchFamily="18" charset="-127"/>
+                <a:cs typeface="+mj-cs"/>
+              </a:defRPr>
+            </a:lvl1pPr>
+          </a:lstStyle>
+          <a:p>
+            <a:pPr algn="l"/>
+            <a:r>
+              <a:rPr lang="en-US" altLang="ko-KR" sz="2800" cap="none" dirty="0">
+                <a:solidFill>
+                  <a:schemeClr val="bg2">
+                    <a:lumMod val="25000"/>
+                  </a:schemeClr>
+                </a:solidFill>
+                <a:latin typeface="D2Coding" panose="020B0609020101020101" pitchFamily="49" charset="-127"/>
+                <a:ea typeface="D2Coding" panose="020B0609020101020101" pitchFamily="49" charset="-127"/>
+                <a:cs typeface="Segoe UI Light" panose="020B0502040204020203" pitchFamily="34" charset="0"/>
+              </a:rPr>
+              <a:t>AI Agent Vector DB Workflow </a:t>
+            </a:r>
+            <a:endParaRPr lang="ko-KR" altLang="en-US" sz="2800" cap="none" dirty="0">
+              <a:solidFill>
+                <a:schemeClr val="bg2">
+                  <a:lumMod val="25000"/>
+                </a:schemeClr>
+              </a:solidFill>
+              <a:latin typeface="D2Coding" panose="020B0609020101020101" pitchFamily="49" charset="-127"/>
+              <a:ea typeface="D2Coding" panose="020B0609020101020101" pitchFamily="49" charset="-127"/>
+              <a:cs typeface="Segoe UI Light" panose="020B0502040204020203" pitchFamily="34" charset="0"/>
+            </a:endParaRPr>
+          </a:p>
+        </p:txBody>
+      </p:sp>
+      <p:sp>
+        <p:nvSpPr>
+          <p:cNvPr id="8" name="TextBox 7">
+            <a:extLst>
+              <a:ext uri="{FF2B5EF4-FFF2-40B4-BE49-F238E27FC236}">
+                <a16:creationId xmlns:a16="http://schemas.microsoft.com/office/drawing/2014/main" id="{E5C2F1F0-02D3-D963-8609-179340A9C17D}"/>
+              </a:ext>
+            </a:extLst>
+          </p:cNvPr>
+          <p:cNvSpPr txBox="1"/>
+          <p:nvPr/>
+        </p:nvSpPr>
+        <p:spPr>
+          <a:xfrm>
+            <a:off x="744020" y="3244334"/>
+            <a:ext cx="184731" cy="369332"/>
+          </a:xfrm>
+          <a:prstGeom prst="rect">
+            <a:avLst/>
+          </a:prstGeom>
+          <a:noFill/>
+        </p:spPr>
+        <p:txBody>
+          <a:bodyPr wrap="none" rtlCol="0">
+            <a:spAutoFit/>
+          </a:bodyPr>
+          <a:lstStyle/>
+          <a:p>
+            <a:endParaRPr lang="ko-KR" altLang="en-US" dirty="0">
+              <a:solidFill>
+                <a:schemeClr val="accent5"/>
+              </a:solidFill>
+              <a:latin typeface="D2Coding" panose="020B0609020101020101" pitchFamily="49" charset="-127"/>
+              <a:ea typeface="D2Coding" panose="020B0609020101020101" pitchFamily="49" charset="-127"/>
+            </a:endParaRPr>
+          </a:p>
+        </p:txBody>
+      </p:sp>
+      <p:sp>
+        <p:nvSpPr>
+          <p:cNvPr id="2" name="슬라이드 번호 개체 틀 3">
+            <a:extLst>
+              <a:ext uri="{FF2B5EF4-FFF2-40B4-BE49-F238E27FC236}">
+                <a16:creationId xmlns:a16="http://schemas.microsoft.com/office/drawing/2014/main" id="{12430B21-2557-10AD-3750-0990B8354A5B}"/>
+              </a:ext>
+            </a:extLst>
+          </p:cNvPr>
+          <p:cNvSpPr txBox="1">
+            <a:spLocks/>
+          </p:cNvSpPr>
+          <p:nvPr/>
+        </p:nvSpPr>
+        <p:spPr>
+          <a:xfrm>
+            <a:off x="11180761" y="299420"/>
+            <a:ext cx="753545" cy="365125"/>
+          </a:xfrm>
+          <a:prstGeom prst="rect">
+            <a:avLst/>
+          </a:prstGeom>
+        </p:spPr>
+        <p:txBody>
+          <a:bodyPr vert="horz" lIns="91440" tIns="45720" rIns="91440" bIns="45720" rtlCol="0" anchor="ctr"/>
+          <a:lstStyle>
+            <a:defPPr rtl="0">
+              <a:defRPr lang="ko-KR"/>
+            </a:defPPr>
+            <a:lvl1pPr marL="0" algn="r" defTabSz="914400" rtl="0" eaLnBrk="1" latinLnBrk="0" hangingPunct="1">
+              <a:defRPr sz="1200" kern="1200" baseline="0">
+                <a:solidFill>
+                  <a:schemeClr val="tx1">
+                    <a:lumMod val="65000"/>
+                    <a:lumOff val="35000"/>
+                  </a:schemeClr>
+                </a:solidFill>
+                <a:latin typeface="맑은 고딕" panose="020B0503020000020004" pitchFamily="50" charset="-127"/>
+                <a:ea typeface="맑은 고딕" panose="020B0503020000020004" pitchFamily="50" charset="-127"/>
+                <a:cs typeface="+mn-cs"/>
+              </a:defRPr>
+            </a:lvl1pPr>
+            <a:lvl2pPr marL="457200" algn="l" defTabSz="914400" rtl="0" eaLnBrk="1" latinLnBrk="0" hangingPunct="1">
+              <a:defRPr sz="1800" kern="1200">
+                <a:solidFill>
+                  <a:schemeClr val="tx1"/>
+                </a:solidFill>
+                <a:latin typeface="+mn-lt"/>
+                <a:ea typeface="+mn-ea"/>
+                <a:cs typeface="+mn-cs"/>
+              </a:defRPr>
+            </a:lvl2pPr>
+            <a:lvl3pPr marL="914400" algn="l" defTabSz="914400" rtl="0" eaLnBrk="1" latinLnBrk="0" hangingPunct="1">
+              <a:defRPr sz="1800" kern="1200">
+                <a:solidFill>
+                  <a:schemeClr val="tx1"/>
+                </a:solidFill>
+                <a:latin typeface="+mn-lt"/>
+                <a:ea typeface="+mn-ea"/>
+                <a:cs typeface="+mn-cs"/>
+              </a:defRPr>
+            </a:lvl3pPr>
+            <a:lvl4pPr marL="1371600" algn="l" defTabSz="914400" rtl="0" eaLnBrk="1" latinLnBrk="0" hangingPunct="1">
+              <a:defRPr sz="1800" kern="1200">
+                <a:solidFill>
+                  <a:schemeClr val="tx1"/>
+                </a:solidFill>
+                <a:latin typeface="+mn-lt"/>
+                <a:ea typeface="+mn-ea"/>
+                <a:cs typeface="+mn-cs"/>
+              </a:defRPr>
+            </a:lvl4pPr>
+            <a:lvl5pPr marL="1828800" algn="l" defTabSz="914400" rtl="0" eaLnBrk="1" latinLnBrk="0" hangingPunct="1">
+              <a:defRPr sz="1800" kern="1200">
+                <a:solidFill>
+                  <a:schemeClr val="tx1"/>
+                </a:solidFill>
+                <a:latin typeface="+mn-lt"/>
+                <a:ea typeface="+mn-ea"/>
+                <a:cs typeface="+mn-cs"/>
+              </a:defRPr>
+            </a:lvl5pPr>
+            <a:lvl6pPr marL="2286000" algn="l" defTabSz="914400" rtl="0" eaLnBrk="1" latinLnBrk="0" hangingPunct="1">
+              <a:defRPr sz="1800" kern="1200">
+                <a:solidFill>
+                  <a:schemeClr val="tx1"/>
+                </a:solidFill>
+                <a:latin typeface="+mn-lt"/>
+                <a:ea typeface="+mn-ea"/>
+                <a:cs typeface="+mn-cs"/>
+              </a:defRPr>
+            </a:lvl6pPr>
+            <a:lvl7pPr marL="2743200" algn="l" defTabSz="914400" rtl="0" eaLnBrk="1" latinLnBrk="0" hangingPunct="1">
+              <a:defRPr sz="1800" kern="1200">
+                <a:solidFill>
+                  <a:schemeClr val="tx1"/>
+                </a:solidFill>
+                <a:latin typeface="+mn-lt"/>
+                <a:ea typeface="+mn-ea"/>
+                <a:cs typeface="+mn-cs"/>
+              </a:defRPr>
+            </a:lvl7pPr>
+            <a:lvl8pPr marL="3200400" algn="l" defTabSz="914400" rtl="0" eaLnBrk="1" latinLnBrk="0" hangingPunct="1">
+              <a:defRPr sz="1800" kern="1200">
+                <a:solidFill>
+                  <a:schemeClr val="tx1"/>
+                </a:solidFill>
+                <a:latin typeface="+mn-lt"/>
+                <a:ea typeface="+mn-ea"/>
+                <a:cs typeface="+mn-cs"/>
+              </a:defRPr>
+            </a:lvl8pPr>
+            <a:lvl9pPr marL="3657600" algn="l" defTabSz="914400" rtl="0" eaLnBrk="1" latinLnBrk="0" hangingPunct="1">
+              <a:defRPr sz="1800" kern="1200">
+                <a:solidFill>
+                  <a:schemeClr val="tx1"/>
+                </a:solidFill>
+                <a:latin typeface="+mn-lt"/>
+                <a:ea typeface="+mn-ea"/>
+                <a:cs typeface="+mn-cs"/>
+              </a:defRPr>
+            </a:lvl9pPr>
+          </a:lstStyle>
+          <a:p>
+            <a:fld id="{D57F1E4F-1CFF-5643-939E-217C01CDF565}" type="slidenum">
+              <a:rPr lang="en-US" b="1" smtClean="0">
+                <a:latin typeface="Segoe UI Emoji" panose="020B0502040204020203" pitchFamily="34" charset="0"/>
+                <a:ea typeface="Segoe UI Emoji" panose="020B0502040204020203" pitchFamily="34" charset="0"/>
+              </a:rPr>
+              <a:pPr/>
+              <a:t>36</a:t>
+            </a:fld>
+            <a:endParaRPr lang="en-US" b="1" dirty="0">
+              <a:latin typeface="Segoe UI Emoji" panose="020B0502040204020203" pitchFamily="34" charset="0"/>
+              <a:ea typeface="Segoe UI Emoji" panose="020B0502040204020203" pitchFamily="34" charset="0"/>
+            </a:endParaRPr>
+          </a:p>
+        </p:txBody>
+      </p:sp>
+      <p:sp>
+        <p:nvSpPr>
+          <p:cNvPr id="7" name="TextBox 6">
+            <a:extLst>
+              <a:ext uri="{FF2B5EF4-FFF2-40B4-BE49-F238E27FC236}">
+                <a16:creationId xmlns:a16="http://schemas.microsoft.com/office/drawing/2014/main" id="{604F2C78-D453-32DB-20A9-29FA0B387519}"/>
+              </a:ext>
+            </a:extLst>
+          </p:cNvPr>
+          <p:cNvSpPr txBox="1"/>
+          <p:nvPr/>
+        </p:nvSpPr>
+        <p:spPr>
+          <a:xfrm>
+            <a:off x="576262" y="1404784"/>
+            <a:ext cx="11039476" cy="4971233"/>
+          </a:xfrm>
+          <a:prstGeom prst="rect">
+            <a:avLst/>
+          </a:prstGeom>
+          <a:noFill/>
+        </p:spPr>
+        <p:txBody>
+          <a:bodyPr wrap="square">
+            <a:spAutoFit/>
+          </a:bodyPr>
+          <a:lstStyle/>
+          <a:p>
+            <a:pPr marL="342900" indent="-342900">
+              <a:lnSpc>
+                <a:spcPct val="150000"/>
+              </a:lnSpc>
+              <a:buFont typeface="+mj-lt"/>
+              <a:buAutoNum type="arabicPeriod"/>
+            </a:pPr>
+            <a:r>
+              <a:rPr lang="ko-KR" altLang="en-US" sz="1600" dirty="0">
+                <a:latin typeface="D2Coding" panose="020B0609020101020101" pitchFamily="49" charset="-127"/>
+                <a:ea typeface="D2Coding" panose="020B0609020101020101" pitchFamily="49" charset="-127"/>
+              </a:rPr>
+              <a:t>문서 감지 및 다운로드 (Google </a:t>
+            </a:r>
+            <a:r>
+              <a:rPr lang="ko-KR" altLang="en-US" sz="1600" dirty="0" err="1">
+                <a:latin typeface="D2Coding" panose="020B0609020101020101" pitchFamily="49" charset="-127"/>
+                <a:ea typeface="D2Coding" panose="020B0609020101020101" pitchFamily="49" charset="-127"/>
+              </a:rPr>
+              <a:t>Drive</a:t>
+            </a:r>
+            <a:r>
+              <a:rPr lang="ko-KR" altLang="en-US" sz="1600" dirty="0">
+                <a:latin typeface="D2Coding" panose="020B0609020101020101" pitchFamily="49" charset="-127"/>
+                <a:ea typeface="D2Coding" panose="020B0609020101020101" pitchFamily="49" charset="-127"/>
+              </a:rPr>
+              <a:t> </a:t>
+            </a:r>
+            <a:r>
+              <a:rPr lang="ko-KR" altLang="en-US" sz="1600" dirty="0" err="1">
+                <a:latin typeface="D2Coding" panose="020B0609020101020101" pitchFamily="49" charset="-127"/>
+                <a:ea typeface="D2Coding" panose="020B0609020101020101" pitchFamily="49" charset="-127"/>
+              </a:rPr>
+              <a:t>Trigger</a:t>
+            </a:r>
+            <a:r>
+              <a:rPr lang="ko-KR" altLang="en-US" sz="1600" dirty="0">
+                <a:latin typeface="D2Coding" panose="020B0609020101020101" pitchFamily="49" charset="-127"/>
+                <a:ea typeface="D2Coding" panose="020B0609020101020101" pitchFamily="49" charset="-127"/>
+              </a:rPr>
+              <a:t> ➔ </a:t>
+            </a:r>
+            <a:r>
+              <a:rPr lang="ko-KR" altLang="en-US" sz="1600" dirty="0" err="1">
+                <a:latin typeface="D2Coding" panose="020B0609020101020101" pitchFamily="49" charset="-127"/>
+                <a:ea typeface="D2Coding" panose="020B0609020101020101" pitchFamily="49" charset="-127"/>
+              </a:rPr>
+              <a:t>Download</a:t>
+            </a:r>
+            <a:r>
+              <a:rPr lang="ko-KR" altLang="en-US" sz="1600" dirty="0">
+                <a:latin typeface="D2Coding" panose="020B0609020101020101" pitchFamily="49" charset="-127"/>
+                <a:ea typeface="D2Coding" panose="020B0609020101020101" pitchFamily="49" charset="-127"/>
+              </a:rPr>
+              <a:t> </a:t>
+            </a:r>
+            <a:r>
+              <a:rPr lang="ko-KR" altLang="en-US" sz="1600" dirty="0" err="1">
+                <a:latin typeface="D2Coding" panose="020B0609020101020101" pitchFamily="49" charset="-127"/>
+                <a:ea typeface="D2Coding" panose="020B0609020101020101" pitchFamily="49" charset="-127"/>
+              </a:rPr>
+              <a:t>file</a:t>
+            </a:r>
+            <a:r>
+              <a:rPr lang="ko-KR" altLang="en-US" sz="1600" dirty="0">
+                <a:latin typeface="D2Coding" panose="020B0609020101020101" pitchFamily="49" charset="-127"/>
+                <a:ea typeface="D2Coding" panose="020B0609020101020101" pitchFamily="49" charset="-127"/>
+              </a:rPr>
+              <a:t>)</a:t>
+            </a:r>
+          </a:p>
+          <a:p>
+            <a:pPr marL="742950" lvl="1" indent="-285750">
+              <a:lnSpc>
+                <a:spcPct val="150000"/>
+              </a:lnSpc>
+              <a:buFont typeface="Wingdings" panose="05000000000000000000" pitchFamily="2" charset="2"/>
+              <a:buChar char="§"/>
+            </a:pPr>
+            <a:r>
+              <a:rPr lang="ko-KR" altLang="en-US" sz="1400" dirty="0">
+                <a:latin typeface="D2Coding" panose="020B0609020101020101" pitchFamily="49" charset="-127"/>
+                <a:ea typeface="D2Coding" panose="020B0609020101020101" pitchFamily="49" charset="-127"/>
+              </a:rPr>
+              <a:t>구글 드라이브에서 대상 파일(PDF 등)이 추가되거나 수정되면 트리거가 동작</a:t>
+            </a:r>
+          </a:p>
+          <a:p>
+            <a:pPr marL="742950" lvl="1" indent="-285750">
+              <a:lnSpc>
+                <a:spcPct val="150000"/>
+              </a:lnSpc>
+              <a:buFont typeface="Wingdings" panose="05000000000000000000" pitchFamily="2" charset="2"/>
+              <a:buChar char="§"/>
+            </a:pPr>
+            <a:r>
+              <a:rPr lang="ko-KR" altLang="en-US" sz="1400" dirty="0" err="1">
+                <a:latin typeface="D2Coding" panose="020B0609020101020101" pitchFamily="49" charset="-127"/>
+                <a:ea typeface="D2Coding" panose="020B0609020101020101" pitchFamily="49" charset="-127"/>
+              </a:rPr>
+              <a:t>Download</a:t>
+            </a:r>
+            <a:r>
+              <a:rPr lang="ko-KR" altLang="en-US" sz="1400" dirty="0">
+                <a:latin typeface="D2Coding" panose="020B0609020101020101" pitchFamily="49" charset="-127"/>
+                <a:ea typeface="D2Coding" panose="020B0609020101020101" pitchFamily="49" charset="-127"/>
+              </a:rPr>
+              <a:t> </a:t>
+            </a:r>
+            <a:r>
+              <a:rPr lang="ko-KR" altLang="en-US" sz="1400" dirty="0" err="1">
+                <a:latin typeface="D2Coding" panose="020B0609020101020101" pitchFamily="49" charset="-127"/>
+                <a:ea typeface="D2Coding" panose="020B0609020101020101" pitchFamily="49" charset="-127"/>
+              </a:rPr>
+              <a:t>file</a:t>
+            </a:r>
+            <a:r>
+              <a:rPr lang="ko-KR" altLang="en-US" sz="1400" dirty="0">
+                <a:latin typeface="D2Coding" panose="020B0609020101020101" pitchFamily="49" charset="-127"/>
+                <a:ea typeface="D2Coding" panose="020B0609020101020101" pitchFamily="49" charset="-127"/>
+              </a:rPr>
+              <a:t> 노드가 감지된 파일의 실제 원본 바이너리 데이터를 받아오기</a:t>
+            </a:r>
+          </a:p>
+          <a:p>
+            <a:pPr marL="342900" indent="-342900">
+              <a:lnSpc>
+                <a:spcPct val="150000"/>
+              </a:lnSpc>
+              <a:buFont typeface="+mj-lt"/>
+              <a:buAutoNum type="arabicPeriod"/>
+            </a:pPr>
+            <a:endParaRPr lang="ko-KR" altLang="en-US" sz="700" dirty="0">
+              <a:latin typeface="D2Coding" panose="020B0609020101020101" pitchFamily="49" charset="-127"/>
+              <a:ea typeface="D2Coding" panose="020B0609020101020101" pitchFamily="49" charset="-127"/>
+            </a:endParaRPr>
+          </a:p>
+          <a:p>
+            <a:pPr marL="342900" indent="-342900">
+              <a:lnSpc>
+                <a:spcPct val="150000"/>
+              </a:lnSpc>
+              <a:buFont typeface="+mj-lt"/>
+              <a:buAutoNum type="arabicPeriod"/>
+            </a:pPr>
+            <a:r>
+              <a:rPr lang="ko-KR" altLang="en-US" sz="1600" dirty="0">
+                <a:latin typeface="D2Coding" panose="020B0609020101020101" pitchFamily="49" charset="-127"/>
+                <a:ea typeface="D2Coding" panose="020B0609020101020101" pitchFamily="49" charset="-127"/>
+              </a:rPr>
+              <a:t>텍스트 추출 및 </a:t>
+            </a:r>
+            <a:r>
+              <a:rPr lang="ko-KR" altLang="en-US" sz="1600" dirty="0" err="1">
+                <a:latin typeface="D2Coding" panose="020B0609020101020101" pitchFamily="49" charset="-127"/>
+                <a:ea typeface="D2Coding" panose="020B0609020101020101" pitchFamily="49" charset="-127"/>
+              </a:rPr>
+              <a:t>청킹</a:t>
+            </a:r>
+            <a:r>
+              <a:rPr lang="ko-KR" altLang="en-US" sz="1600" dirty="0">
+                <a:latin typeface="D2Coding" panose="020B0609020101020101" pitchFamily="49" charset="-127"/>
+                <a:ea typeface="D2Coding" panose="020B0609020101020101" pitchFamily="49" charset="-127"/>
+              </a:rPr>
+              <a:t> (</a:t>
+            </a:r>
+            <a:r>
+              <a:rPr lang="ko-KR" altLang="en-US" sz="1600" dirty="0" err="1">
+                <a:latin typeface="D2Coding" panose="020B0609020101020101" pitchFamily="49" charset="-127"/>
+                <a:ea typeface="D2Coding" panose="020B0609020101020101" pitchFamily="49" charset="-127"/>
+              </a:rPr>
+              <a:t>Default</a:t>
+            </a:r>
+            <a:r>
+              <a:rPr lang="ko-KR" altLang="en-US" sz="1600" dirty="0">
+                <a:latin typeface="D2Coding" panose="020B0609020101020101" pitchFamily="49" charset="-127"/>
+                <a:ea typeface="D2Coding" panose="020B0609020101020101" pitchFamily="49" charset="-127"/>
+              </a:rPr>
+              <a:t> Data </a:t>
+            </a:r>
+            <a:r>
+              <a:rPr lang="ko-KR" altLang="en-US" sz="1600" dirty="0" err="1">
+                <a:latin typeface="D2Coding" panose="020B0609020101020101" pitchFamily="49" charset="-127"/>
+                <a:ea typeface="D2Coding" panose="020B0609020101020101" pitchFamily="49" charset="-127"/>
+              </a:rPr>
+              <a:t>Loader</a:t>
+            </a:r>
+            <a:r>
+              <a:rPr lang="ko-KR" altLang="en-US" sz="1600" dirty="0">
+                <a:latin typeface="D2Coding" panose="020B0609020101020101" pitchFamily="49" charset="-127"/>
+                <a:ea typeface="D2Coding" panose="020B0609020101020101" pitchFamily="49" charset="-127"/>
+              </a:rPr>
+              <a:t> ➔ </a:t>
+            </a:r>
+            <a:r>
+              <a:rPr lang="ko-KR" altLang="en-US" sz="1600" dirty="0" err="1">
+                <a:latin typeface="D2Coding" panose="020B0609020101020101" pitchFamily="49" charset="-127"/>
+                <a:ea typeface="D2Coding" panose="020B0609020101020101" pitchFamily="49" charset="-127"/>
+              </a:rPr>
+              <a:t>Recursive</a:t>
+            </a:r>
+            <a:r>
+              <a:rPr lang="ko-KR" altLang="en-US" sz="1600" dirty="0">
+                <a:latin typeface="D2Coding" panose="020B0609020101020101" pitchFamily="49" charset="-127"/>
+                <a:ea typeface="D2Coding" panose="020B0609020101020101" pitchFamily="49" charset="-127"/>
+              </a:rPr>
+              <a:t> </a:t>
+            </a:r>
+            <a:r>
+              <a:rPr lang="ko-KR" altLang="en-US" sz="1600" dirty="0" err="1">
+                <a:latin typeface="D2Coding" panose="020B0609020101020101" pitchFamily="49" charset="-127"/>
+                <a:ea typeface="D2Coding" panose="020B0609020101020101" pitchFamily="49" charset="-127"/>
+              </a:rPr>
+              <a:t>Character</a:t>
+            </a:r>
+            <a:r>
+              <a:rPr lang="ko-KR" altLang="en-US" sz="1600" dirty="0">
+                <a:latin typeface="D2Coding" panose="020B0609020101020101" pitchFamily="49" charset="-127"/>
+                <a:ea typeface="D2Coding" panose="020B0609020101020101" pitchFamily="49" charset="-127"/>
+              </a:rPr>
+              <a:t> </a:t>
+            </a:r>
+            <a:r>
+              <a:rPr lang="ko-KR" altLang="en-US" sz="1600" dirty="0" err="1">
+                <a:latin typeface="D2Coding" panose="020B0609020101020101" pitchFamily="49" charset="-127"/>
+                <a:ea typeface="D2Coding" panose="020B0609020101020101" pitchFamily="49" charset="-127"/>
+              </a:rPr>
+              <a:t>Text</a:t>
+            </a:r>
+            <a:r>
+              <a:rPr lang="ko-KR" altLang="en-US" sz="1600" dirty="0">
+                <a:latin typeface="D2Coding" panose="020B0609020101020101" pitchFamily="49" charset="-127"/>
+                <a:ea typeface="D2Coding" panose="020B0609020101020101" pitchFamily="49" charset="-127"/>
+              </a:rPr>
+              <a:t> </a:t>
+            </a:r>
+            <a:r>
+              <a:rPr lang="ko-KR" altLang="en-US" sz="1600" dirty="0" err="1">
+                <a:latin typeface="D2Coding" panose="020B0609020101020101" pitchFamily="49" charset="-127"/>
+                <a:ea typeface="D2Coding" panose="020B0609020101020101" pitchFamily="49" charset="-127"/>
+              </a:rPr>
+              <a:t>Splitter</a:t>
+            </a:r>
+            <a:r>
+              <a:rPr lang="ko-KR" altLang="en-US" sz="1600" dirty="0">
+                <a:latin typeface="D2Coding" panose="020B0609020101020101" pitchFamily="49" charset="-127"/>
+                <a:ea typeface="D2Coding" panose="020B0609020101020101" pitchFamily="49" charset="-127"/>
+              </a:rPr>
+              <a:t>)</a:t>
+            </a:r>
+          </a:p>
+          <a:p>
+            <a:pPr marL="742950" lvl="1" indent="-285750">
+              <a:lnSpc>
+                <a:spcPct val="150000"/>
+              </a:lnSpc>
+              <a:buFont typeface="Wingdings" panose="05000000000000000000" pitchFamily="2" charset="2"/>
+              <a:buChar char="§"/>
+            </a:pPr>
+            <a:r>
+              <a:rPr lang="ko-KR" altLang="en-US" sz="1400" dirty="0">
+                <a:latin typeface="D2Coding" panose="020B0609020101020101" pitchFamily="49" charset="-127"/>
+                <a:ea typeface="D2Coding" panose="020B0609020101020101" pitchFamily="49" charset="-127"/>
+              </a:rPr>
+              <a:t>Data </a:t>
+            </a:r>
+            <a:r>
+              <a:rPr lang="ko-KR" altLang="en-US" sz="1400" dirty="0" err="1">
+                <a:latin typeface="D2Coding" panose="020B0609020101020101" pitchFamily="49" charset="-127"/>
+                <a:ea typeface="D2Coding" panose="020B0609020101020101" pitchFamily="49" charset="-127"/>
+              </a:rPr>
+              <a:t>Loader</a:t>
+            </a:r>
+            <a:r>
+              <a:rPr lang="ko-KR" altLang="en-US" sz="1400" dirty="0">
+                <a:latin typeface="D2Coding" panose="020B0609020101020101" pitchFamily="49" charset="-127"/>
+                <a:ea typeface="D2Coding" panose="020B0609020101020101" pitchFamily="49" charset="-127"/>
+              </a:rPr>
+              <a:t>: 다운로드한 파일 바이너리에서 문맥(텍스트)을 읽기</a:t>
+            </a:r>
+          </a:p>
+          <a:p>
+            <a:pPr marL="742950" lvl="1" indent="-285750">
+              <a:lnSpc>
+                <a:spcPct val="150000"/>
+              </a:lnSpc>
+              <a:buFont typeface="Wingdings" panose="05000000000000000000" pitchFamily="2" charset="2"/>
+              <a:buChar char="§"/>
+            </a:pPr>
+            <a:r>
+              <a:rPr lang="ko-KR" altLang="en-US" sz="1400" dirty="0" err="1">
+                <a:latin typeface="D2Coding" panose="020B0609020101020101" pitchFamily="49" charset="-127"/>
+                <a:ea typeface="D2Coding" panose="020B0609020101020101" pitchFamily="49" charset="-127"/>
+              </a:rPr>
+              <a:t>Text</a:t>
+            </a:r>
+            <a:r>
+              <a:rPr lang="ko-KR" altLang="en-US" sz="1400" dirty="0">
+                <a:latin typeface="D2Coding" panose="020B0609020101020101" pitchFamily="49" charset="-127"/>
+                <a:ea typeface="D2Coding" panose="020B0609020101020101" pitchFamily="49" charset="-127"/>
+              </a:rPr>
+              <a:t> </a:t>
+            </a:r>
+            <a:r>
+              <a:rPr lang="ko-KR" altLang="en-US" sz="1400" dirty="0" err="1">
+                <a:latin typeface="D2Coding" panose="020B0609020101020101" pitchFamily="49" charset="-127"/>
+                <a:ea typeface="D2Coding" panose="020B0609020101020101" pitchFamily="49" charset="-127"/>
+              </a:rPr>
+              <a:t>Splitter</a:t>
+            </a:r>
+            <a:r>
+              <a:rPr lang="ko-KR" altLang="en-US" sz="1400" dirty="0">
+                <a:latin typeface="D2Coding" panose="020B0609020101020101" pitchFamily="49" charset="-127"/>
+                <a:ea typeface="D2Coding" panose="020B0609020101020101" pitchFamily="49" charset="-127"/>
+              </a:rPr>
+              <a:t>: 읽어온 긴 텍스트를 </a:t>
+            </a:r>
+            <a:r>
+              <a:rPr lang="ko-KR" altLang="en-US" sz="1400" dirty="0" err="1">
+                <a:latin typeface="D2Coding" panose="020B0609020101020101" pitchFamily="49" charset="-127"/>
+                <a:ea typeface="D2Coding" panose="020B0609020101020101" pitchFamily="49" charset="-127"/>
+              </a:rPr>
+              <a:t>LLM이</a:t>
+            </a:r>
+            <a:r>
+              <a:rPr lang="ko-KR" altLang="en-US" sz="1400" dirty="0">
+                <a:latin typeface="D2Coding" panose="020B0609020101020101" pitchFamily="49" charset="-127"/>
+                <a:ea typeface="D2Coding" panose="020B0609020101020101" pitchFamily="49" charset="-127"/>
+              </a:rPr>
+              <a:t> 검색하기 적합한 크기의 조각(</a:t>
+            </a:r>
+            <a:r>
+              <a:rPr lang="ko-KR" altLang="en-US" sz="1400" dirty="0" err="1">
+                <a:latin typeface="D2Coding" panose="020B0609020101020101" pitchFamily="49" charset="-127"/>
+                <a:ea typeface="D2Coding" panose="020B0609020101020101" pitchFamily="49" charset="-127"/>
+              </a:rPr>
+              <a:t>Chunk</a:t>
+            </a:r>
+            <a:r>
+              <a:rPr lang="ko-KR" altLang="en-US" sz="1400" dirty="0">
+                <a:latin typeface="D2Coding" panose="020B0609020101020101" pitchFamily="49" charset="-127"/>
+                <a:ea typeface="D2Coding" panose="020B0609020101020101" pitchFamily="49" charset="-127"/>
+              </a:rPr>
+              <a:t>)</a:t>
+            </a:r>
+            <a:r>
+              <a:rPr lang="ko-KR" altLang="en-US" sz="1400" dirty="0" err="1">
+                <a:latin typeface="D2Coding" panose="020B0609020101020101" pitchFamily="49" charset="-127"/>
+                <a:ea typeface="D2Coding" panose="020B0609020101020101" pitchFamily="49" charset="-127"/>
+              </a:rPr>
+              <a:t>으로</a:t>
+            </a:r>
+            <a:r>
+              <a:rPr lang="ko-KR" altLang="en-US" sz="1400" dirty="0">
+                <a:latin typeface="D2Coding" panose="020B0609020101020101" pitchFamily="49" charset="-127"/>
+                <a:ea typeface="D2Coding" panose="020B0609020101020101" pitchFamily="49" charset="-127"/>
+              </a:rPr>
+              <a:t> 잘라내기(문서가 총 11개의 조각으로 분할)</a:t>
+            </a:r>
+          </a:p>
+          <a:p>
+            <a:pPr marL="342900" indent="-342900">
+              <a:lnSpc>
+                <a:spcPct val="150000"/>
+              </a:lnSpc>
+              <a:buFont typeface="+mj-lt"/>
+              <a:buAutoNum type="arabicPeriod"/>
+            </a:pPr>
+            <a:endParaRPr lang="ko-KR" altLang="en-US" sz="600" dirty="0">
+              <a:latin typeface="D2Coding" panose="020B0609020101020101" pitchFamily="49" charset="-127"/>
+              <a:ea typeface="D2Coding" panose="020B0609020101020101" pitchFamily="49" charset="-127"/>
+            </a:endParaRPr>
+          </a:p>
+          <a:p>
+            <a:pPr marL="342900" indent="-342900">
+              <a:lnSpc>
+                <a:spcPct val="150000"/>
+              </a:lnSpc>
+              <a:buFont typeface="+mj-lt"/>
+              <a:buAutoNum type="arabicPeriod"/>
+            </a:pPr>
+            <a:r>
+              <a:rPr lang="ko-KR" altLang="en-US" sz="1600" dirty="0">
+                <a:latin typeface="D2Coding" panose="020B0609020101020101" pitchFamily="49" charset="-127"/>
+                <a:ea typeface="D2Coding" panose="020B0609020101020101" pitchFamily="49" charset="-127"/>
+              </a:rPr>
+              <a:t>벡터 </a:t>
+            </a:r>
+            <a:r>
+              <a:rPr lang="ko-KR" altLang="en-US" sz="1600" dirty="0" err="1">
+                <a:latin typeface="D2Coding" panose="020B0609020101020101" pitchFamily="49" charset="-127"/>
+                <a:ea typeface="D2Coding" panose="020B0609020101020101" pitchFamily="49" charset="-127"/>
+              </a:rPr>
+              <a:t>임베딩</a:t>
+            </a:r>
+            <a:r>
+              <a:rPr lang="ko-KR" altLang="en-US" sz="1600" dirty="0">
+                <a:latin typeface="D2Coding" panose="020B0609020101020101" pitchFamily="49" charset="-127"/>
+                <a:ea typeface="D2Coding" panose="020B0609020101020101" pitchFamily="49" charset="-127"/>
+              </a:rPr>
+              <a:t> 변환 (</a:t>
+            </a:r>
+            <a:r>
+              <a:rPr lang="ko-KR" altLang="en-US" sz="1600" dirty="0" err="1">
+                <a:latin typeface="D2Coding" panose="020B0609020101020101" pitchFamily="49" charset="-127"/>
+                <a:ea typeface="D2Coding" panose="020B0609020101020101" pitchFamily="49" charset="-127"/>
+              </a:rPr>
+              <a:t>Embeddings</a:t>
+            </a:r>
+            <a:r>
+              <a:rPr lang="ko-KR" altLang="en-US" sz="1600" dirty="0">
+                <a:latin typeface="D2Coding" panose="020B0609020101020101" pitchFamily="49" charset="-127"/>
+                <a:ea typeface="D2Coding" panose="020B0609020101020101" pitchFamily="49" charset="-127"/>
+              </a:rPr>
+              <a:t> Google </a:t>
+            </a:r>
+            <a:r>
+              <a:rPr lang="ko-KR" altLang="en-US" sz="1600" dirty="0" err="1">
+                <a:latin typeface="D2Coding" panose="020B0609020101020101" pitchFamily="49" charset="-127"/>
+                <a:ea typeface="D2Coding" panose="020B0609020101020101" pitchFamily="49" charset="-127"/>
+              </a:rPr>
+              <a:t>Gemini</a:t>
+            </a:r>
+            <a:r>
+              <a:rPr lang="ko-KR" altLang="en-US" sz="1600" dirty="0">
+                <a:latin typeface="D2Coding" panose="020B0609020101020101" pitchFamily="49" charset="-127"/>
+                <a:ea typeface="D2Coding" panose="020B0609020101020101" pitchFamily="49" charset="-127"/>
+              </a:rPr>
+              <a:t>)</a:t>
+            </a:r>
+          </a:p>
+          <a:p>
+            <a:pPr marL="742950" lvl="1" indent="-285750">
+              <a:lnSpc>
+                <a:spcPct val="150000"/>
+              </a:lnSpc>
+              <a:buFont typeface="Wingdings" panose="05000000000000000000" pitchFamily="2" charset="2"/>
+              <a:buChar char="§"/>
+            </a:pPr>
+            <a:r>
+              <a:rPr lang="ko-KR" altLang="en-US" sz="1400" dirty="0">
+                <a:latin typeface="D2Coding" panose="020B0609020101020101" pitchFamily="49" charset="-127"/>
+                <a:ea typeface="D2Coding" panose="020B0609020101020101" pitchFamily="49" charset="-127"/>
+              </a:rPr>
+              <a:t>잘라낸 11개의 텍스트 조각을 구글 </a:t>
+            </a:r>
+            <a:r>
+              <a:rPr lang="ko-KR" altLang="en-US" sz="1400" dirty="0" err="1">
+                <a:latin typeface="D2Coding" panose="020B0609020101020101" pitchFamily="49" charset="-127"/>
+                <a:ea typeface="D2Coding" panose="020B0609020101020101" pitchFamily="49" charset="-127"/>
+              </a:rPr>
+              <a:t>Gemini</a:t>
+            </a:r>
+            <a:r>
+              <a:rPr lang="ko-KR" altLang="en-US" sz="1400" dirty="0">
+                <a:latin typeface="D2Coding" panose="020B0609020101020101" pitchFamily="49" charset="-127"/>
+                <a:ea typeface="D2Coding" panose="020B0609020101020101" pitchFamily="49" charset="-127"/>
+              </a:rPr>
+              <a:t> </a:t>
+            </a:r>
+            <a:r>
+              <a:rPr lang="ko-KR" altLang="en-US" sz="1400" dirty="0" err="1">
+                <a:latin typeface="D2Coding" panose="020B0609020101020101" pitchFamily="49" charset="-127"/>
+                <a:ea typeface="D2Coding" panose="020B0609020101020101" pitchFamily="49" charset="-127"/>
+              </a:rPr>
+              <a:t>임베딩</a:t>
+            </a:r>
+            <a:r>
+              <a:rPr lang="ko-KR" altLang="en-US" sz="1400" dirty="0">
+                <a:latin typeface="D2Coding" panose="020B0609020101020101" pitchFamily="49" charset="-127"/>
+                <a:ea typeface="D2Coding" panose="020B0609020101020101" pitchFamily="49" charset="-127"/>
+              </a:rPr>
+              <a:t> 모델로 보내기</a:t>
+            </a:r>
+          </a:p>
+          <a:p>
+            <a:pPr marL="742950" lvl="1" indent="-285750">
+              <a:lnSpc>
+                <a:spcPct val="150000"/>
+              </a:lnSpc>
+              <a:buFont typeface="Wingdings" panose="05000000000000000000" pitchFamily="2" charset="2"/>
+              <a:buChar char="§"/>
+            </a:pPr>
+            <a:r>
+              <a:rPr lang="ko-KR" altLang="en-US" sz="1400" dirty="0" err="1">
+                <a:latin typeface="D2Coding" panose="020B0609020101020101" pitchFamily="49" charset="-127"/>
+                <a:ea typeface="D2Coding" panose="020B0609020101020101" pitchFamily="49" charset="-127"/>
+              </a:rPr>
+              <a:t>AI가</a:t>
+            </a:r>
+            <a:r>
+              <a:rPr lang="ko-KR" altLang="en-US" sz="1400" dirty="0">
+                <a:latin typeface="D2Coding" panose="020B0609020101020101" pitchFamily="49" charset="-127"/>
+                <a:ea typeface="D2Coding" panose="020B0609020101020101" pitchFamily="49" charset="-127"/>
+              </a:rPr>
+              <a:t> 의미를 계산할 수 있도록 각 텍스트를 3,072차원의 수치 데이터(</a:t>
+            </a:r>
+            <a:r>
+              <a:rPr lang="ko-KR" altLang="en-US" sz="1400" dirty="0" err="1">
+                <a:latin typeface="D2Coding" panose="020B0609020101020101" pitchFamily="49" charset="-127"/>
+                <a:ea typeface="D2Coding" panose="020B0609020101020101" pitchFamily="49" charset="-127"/>
+              </a:rPr>
+              <a:t>Vector</a:t>
+            </a:r>
+            <a:r>
+              <a:rPr lang="ko-KR" altLang="en-US" sz="1400" dirty="0">
+                <a:latin typeface="D2Coding" panose="020B0609020101020101" pitchFamily="49" charset="-127"/>
+                <a:ea typeface="D2Coding" panose="020B0609020101020101" pitchFamily="49" charset="-127"/>
+              </a:rPr>
+              <a:t>)로 변환</a:t>
+            </a:r>
+            <a:r>
+              <a:rPr lang="en-US" altLang="ko-KR" sz="1400" dirty="0">
+                <a:latin typeface="D2Coding" panose="020B0609020101020101" pitchFamily="49" charset="-127"/>
+                <a:ea typeface="D2Coding" panose="020B0609020101020101" pitchFamily="49" charset="-127"/>
+              </a:rPr>
+              <a:t>(</a:t>
+            </a:r>
+            <a:r>
+              <a:rPr lang="en-US" altLang="ko-KR" sz="1400" dirty="0" err="1">
+                <a:latin typeface="D2Coding" panose="020B0609020101020101" pitchFamily="49" charset="-127"/>
+                <a:ea typeface="D2Coding" panose="020B0609020101020101" pitchFamily="49" charset="-127"/>
+              </a:rPr>
+              <a:t>WordEmbedding</a:t>
+            </a:r>
+            <a:r>
+              <a:rPr lang="en-US" altLang="ko-KR" sz="1400" dirty="0">
+                <a:latin typeface="D2Coding" panose="020B0609020101020101" pitchFamily="49" charset="-127"/>
+                <a:ea typeface="D2Coding" panose="020B0609020101020101" pitchFamily="49" charset="-127"/>
+              </a:rPr>
+              <a:t>)</a:t>
+            </a:r>
+            <a:endParaRPr lang="ko-KR" altLang="en-US" sz="1400" dirty="0">
+              <a:latin typeface="D2Coding" panose="020B0609020101020101" pitchFamily="49" charset="-127"/>
+              <a:ea typeface="D2Coding" panose="020B0609020101020101" pitchFamily="49" charset="-127"/>
+            </a:endParaRPr>
+          </a:p>
+          <a:p>
+            <a:pPr marL="342900" indent="-342900">
+              <a:lnSpc>
+                <a:spcPct val="150000"/>
+              </a:lnSpc>
+              <a:buFont typeface="+mj-lt"/>
+              <a:buAutoNum type="arabicPeriod"/>
+            </a:pPr>
+            <a:endParaRPr lang="ko-KR" altLang="en-US" sz="600" dirty="0">
+              <a:latin typeface="D2Coding" panose="020B0609020101020101" pitchFamily="49" charset="-127"/>
+              <a:ea typeface="D2Coding" panose="020B0609020101020101" pitchFamily="49" charset="-127"/>
+            </a:endParaRPr>
+          </a:p>
+          <a:p>
+            <a:pPr marL="342900" indent="-342900">
+              <a:lnSpc>
+                <a:spcPct val="150000"/>
+              </a:lnSpc>
+              <a:buFont typeface="+mj-lt"/>
+              <a:buAutoNum type="arabicPeriod"/>
+            </a:pPr>
+            <a:r>
+              <a:rPr lang="ko-KR" altLang="en-US" sz="1600" dirty="0">
+                <a:latin typeface="D2Coding" panose="020B0609020101020101" pitchFamily="49" charset="-127"/>
+                <a:ea typeface="D2Coding" panose="020B0609020101020101" pitchFamily="49" charset="-127"/>
+              </a:rPr>
+              <a:t>벡터 데이터베이스 저장 (</a:t>
+            </a:r>
+            <a:r>
+              <a:rPr lang="ko-KR" altLang="en-US" sz="1600" dirty="0" err="1">
+                <a:latin typeface="D2Coding" panose="020B0609020101020101" pitchFamily="49" charset="-127"/>
+                <a:ea typeface="D2Coding" panose="020B0609020101020101" pitchFamily="49" charset="-127"/>
+              </a:rPr>
+              <a:t>Supabase</a:t>
+            </a:r>
+            <a:r>
+              <a:rPr lang="ko-KR" altLang="en-US" sz="1600" dirty="0">
+                <a:latin typeface="D2Coding" panose="020B0609020101020101" pitchFamily="49" charset="-127"/>
+                <a:ea typeface="D2Coding" panose="020B0609020101020101" pitchFamily="49" charset="-127"/>
+              </a:rPr>
+              <a:t> </a:t>
+            </a:r>
+            <a:r>
+              <a:rPr lang="ko-KR" altLang="en-US" sz="1600" dirty="0" err="1">
+                <a:latin typeface="D2Coding" panose="020B0609020101020101" pitchFamily="49" charset="-127"/>
+                <a:ea typeface="D2Coding" panose="020B0609020101020101" pitchFamily="49" charset="-127"/>
+              </a:rPr>
+              <a:t>Vector</a:t>
+            </a:r>
+            <a:r>
+              <a:rPr lang="ko-KR" altLang="en-US" sz="1600" dirty="0">
+                <a:latin typeface="D2Coding" panose="020B0609020101020101" pitchFamily="49" charset="-127"/>
+                <a:ea typeface="D2Coding" panose="020B0609020101020101" pitchFamily="49" charset="-127"/>
+              </a:rPr>
+              <a:t> </a:t>
+            </a:r>
+            <a:r>
+              <a:rPr lang="ko-KR" altLang="en-US" sz="1600" dirty="0" err="1">
+                <a:latin typeface="D2Coding" panose="020B0609020101020101" pitchFamily="49" charset="-127"/>
+                <a:ea typeface="D2Coding" panose="020B0609020101020101" pitchFamily="49" charset="-127"/>
+              </a:rPr>
+              <a:t>Store</a:t>
+            </a:r>
+            <a:r>
+              <a:rPr lang="ko-KR" altLang="en-US" sz="1600" dirty="0">
+                <a:latin typeface="D2Coding" panose="020B0609020101020101" pitchFamily="49" charset="-127"/>
+                <a:ea typeface="D2Coding" panose="020B0609020101020101" pitchFamily="49" charset="-127"/>
+              </a:rPr>
+              <a:t>)</a:t>
+            </a:r>
+          </a:p>
+          <a:p>
+            <a:pPr marL="742950" lvl="1" indent="-285750">
+              <a:lnSpc>
+                <a:spcPct val="150000"/>
+              </a:lnSpc>
+              <a:buFont typeface="Wingdings" panose="05000000000000000000" pitchFamily="2" charset="2"/>
+              <a:buChar char="§"/>
+            </a:pPr>
+            <a:r>
+              <a:rPr lang="ko-KR" altLang="en-US" sz="1400" dirty="0">
+                <a:latin typeface="D2Coding" panose="020B0609020101020101" pitchFamily="49" charset="-127"/>
+                <a:ea typeface="D2Coding" panose="020B0609020101020101" pitchFamily="49" charset="-127"/>
+              </a:rPr>
+              <a:t>생성된 벡터 데이터와 원본 텍스트 조각을 </a:t>
+            </a:r>
+            <a:r>
+              <a:rPr lang="ko-KR" altLang="en-US" sz="1400" dirty="0" err="1">
+                <a:latin typeface="D2Coding" panose="020B0609020101020101" pitchFamily="49" charset="-127"/>
+                <a:ea typeface="D2Coding" panose="020B0609020101020101" pitchFamily="49" charset="-127"/>
+              </a:rPr>
+              <a:t>Supabase</a:t>
+            </a:r>
+            <a:r>
+              <a:rPr lang="ko-KR" altLang="en-US" sz="1400" dirty="0">
+                <a:latin typeface="D2Coding" panose="020B0609020101020101" pitchFamily="49" charset="-127"/>
+                <a:ea typeface="D2Coding" panose="020B0609020101020101" pitchFamily="49" charset="-127"/>
+              </a:rPr>
+              <a:t> </a:t>
+            </a:r>
+            <a:r>
+              <a:rPr lang="ko-KR" altLang="en-US" sz="1400" dirty="0" err="1">
+                <a:latin typeface="D2Coding" panose="020B0609020101020101" pitchFamily="49" charset="-127"/>
+                <a:ea typeface="D2Coding" panose="020B0609020101020101" pitchFamily="49" charset="-127"/>
+              </a:rPr>
+              <a:t>DB의</a:t>
+            </a:r>
+            <a:r>
+              <a:rPr lang="ko-KR" altLang="en-US" sz="1400" dirty="0">
+                <a:latin typeface="D2Coding" panose="020B0609020101020101" pitchFamily="49" charset="-127"/>
+                <a:ea typeface="D2Coding" panose="020B0609020101020101" pitchFamily="49" charset="-127"/>
+              </a:rPr>
+              <a:t> </a:t>
+            </a:r>
+            <a:r>
+              <a:rPr lang="ko-KR" altLang="en-US" sz="1400" dirty="0" err="1">
+                <a:latin typeface="D2Coding" panose="020B0609020101020101" pitchFamily="49" charset="-127"/>
+                <a:ea typeface="D2Coding" panose="020B0609020101020101" pitchFamily="49" charset="-127"/>
+              </a:rPr>
+              <a:t>documents</a:t>
+            </a:r>
+            <a:r>
+              <a:rPr lang="ko-KR" altLang="en-US" sz="1400" dirty="0">
+                <a:latin typeface="D2Coding" panose="020B0609020101020101" pitchFamily="49" charset="-127"/>
+                <a:ea typeface="D2Coding" panose="020B0609020101020101" pitchFamily="49" charset="-127"/>
+              </a:rPr>
+              <a:t> 테이블에 최종 저장</a:t>
+            </a:r>
+          </a:p>
+          <a:p>
+            <a:pPr marL="742950" lvl="1" indent="-285750">
+              <a:lnSpc>
+                <a:spcPct val="150000"/>
+              </a:lnSpc>
+              <a:buFont typeface="Wingdings" panose="05000000000000000000" pitchFamily="2" charset="2"/>
+              <a:buChar char="§"/>
+            </a:pPr>
+            <a:r>
+              <a:rPr lang="ko-KR" altLang="en-US" sz="1400" dirty="0">
+                <a:latin typeface="D2Coding" panose="020B0609020101020101" pitchFamily="49" charset="-127"/>
+                <a:ea typeface="D2Coding" panose="020B0609020101020101" pitchFamily="49" charset="-127"/>
+              </a:rPr>
+              <a:t>작업이 완료되면 AI </a:t>
+            </a:r>
+            <a:r>
+              <a:rPr lang="ko-KR" altLang="en-US" sz="1400" dirty="0" err="1">
+                <a:latin typeface="D2Coding" panose="020B0609020101020101" pitchFamily="49" charset="-127"/>
+                <a:ea typeface="D2Coding" panose="020B0609020101020101" pitchFamily="49" charset="-127"/>
+              </a:rPr>
+              <a:t>챗봇이</a:t>
+            </a:r>
+            <a:r>
+              <a:rPr lang="ko-KR" altLang="en-US" sz="1400" dirty="0">
+                <a:latin typeface="D2Coding" panose="020B0609020101020101" pitchFamily="49" charset="-127"/>
+                <a:ea typeface="D2Coding" panose="020B0609020101020101" pitchFamily="49" charset="-127"/>
+              </a:rPr>
+              <a:t> 이 PDF 내용을 기반으로 질문에 답변을 제공</a:t>
+            </a:r>
+          </a:p>
+        </p:txBody>
+      </p:sp>
+    </p:spTree>
+    <p:extLst>
+      <p:ext uri="{BB962C8B-B14F-4D97-AF65-F5344CB8AC3E}">
+        <p14:creationId xmlns:p14="http://schemas.microsoft.com/office/powerpoint/2010/main" val="3858374881"/>
+      </p:ext>
+    </p:extLst>
+  </p:cSld>
+  <p:clrMapOvr>
+    <a:masterClrMapping/>
+  </p:clrMapOvr>
+</p:sld>
+</file>
+
+<file path=ppt/slides/slide37.xml><?xml version="1.0" encoding="utf-8"?>
+<p:sld xmlns:a="http://schemas.openxmlformats.org/drawingml/2006/main" xmlns:r="http://schemas.openxmlformats.org/officeDocument/2006/relationships" xmlns:p="http://schemas.openxmlformats.org/presentationml/2006/main">
+  <p:cSld>
+    <p:spTree>
+      <p:nvGrpSpPr>
+        <p:cNvPr id="1" name="">
+          <a:extLst>
+            <a:ext uri="{FF2B5EF4-FFF2-40B4-BE49-F238E27FC236}">
+              <a16:creationId xmlns:a16="http://schemas.microsoft.com/office/drawing/2014/main" id="{45EB6EF5-03ED-9F77-ADCA-C54D1A3E05E3}"/>
+            </a:ext>
+          </a:extLst>
+        </p:cNvPr>
+        <p:cNvGrpSpPr/>
+        <p:nvPr/>
+      </p:nvGrpSpPr>
+      <p:grpSpPr>
+        <a:xfrm>
+          <a:off x="0" y="0"/>
+          <a:ext cx="0" cy="0"/>
+          <a:chOff x="0" y="0"/>
+          <a:chExt cx="0" cy="0"/>
+        </a:xfrm>
+      </p:grpSpPr>
+      <p:sp>
+        <p:nvSpPr>
+          <p:cNvPr id="3" name="제목 1">
+            <a:extLst>
+              <a:ext uri="{FF2B5EF4-FFF2-40B4-BE49-F238E27FC236}">
+                <a16:creationId xmlns:a16="http://schemas.microsoft.com/office/drawing/2014/main" id="{792704C1-4B64-A764-6B61-98D2A05105DD}"/>
+              </a:ext>
+            </a:extLst>
+          </p:cNvPr>
+          <p:cNvSpPr txBox="1">
+            <a:spLocks/>
+          </p:cNvSpPr>
+          <p:nvPr/>
+        </p:nvSpPr>
+        <p:spPr>
+          <a:xfrm>
+            <a:off x="475645" y="481983"/>
+            <a:ext cx="10353762" cy="766439"/>
+          </a:xfrm>
+          <a:prstGeom prst="rect">
+            <a:avLst/>
+          </a:prstGeom>
+        </p:spPr>
+        <p:txBody>
+          <a:bodyPr vert="horz" lIns="91440" tIns="45720" rIns="91440" bIns="45720" rtlCol="0" anchor="ctr">
+            <a:normAutofit/>
+          </a:bodyPr>
+          <a:lstStyle>
+            <a:lvl1pPr algn="ctr" defTabSz="914400" rtl="0" eaLnBrk="1" latinLnBrk="1" hangingPunct="1">
+              <a:lnSpc>
+                <a:spcPct val="90000"/>
+              </a:lnSpc>
+              <a:spcBef>
+                <a:spcPct val="0"/>
+              </a:spcBef>
+              <a:buNone/>
+              <a:defRPr sz="3200" kern="1200" cap="all" baseline="0">
+                <a:solidFill>
+                  <a:schemeClr val="tx1"/>
+                </a:solidFill>
+                <a:effectLst/>
+                <a:latin typeface="Batang" panose="02030600000101010101" pitchFamily="18" charset="-127"/>
+                <a:ea typeface="Batang" panose="02030600000101010101" pitchFamily="18" charset="-127"/>
+                <a:cs typeface="+mj-cs"/>
+              </a:defRPr>
+            </a:lvl1pPr>
+          </a:lstStyle>
+          <a:p>
+            <a:pPr algn="l"/>
+            <a:r>
+              <a:rPr lang="en-US" altLang="ko-KR" sz="2800" cap="none" dirty="0">
+                <a:solidFill>
+                  <a:schemeClr val="bg2">
+                    <a:lumMod val="25000"/>
+                  </a:schemeClr>
+                </a:solidFill>
+                <a:latin typeface="D2Coding" panose="020B0609020101020101" pitchFamily="49" charset="-127"/>
+                <a:ea typeface="D2Coding" panose="020B0609020101020101" pitchFamily="49" charset="-127"/>
+                <a:cs typeface="Segoe UI Light" panose="020B0502040204020203" pitchFamily="34" charset="0"/>
+              </a:rPr>
+              <a:t>AI Agent RAG Workflow</a:t>
+            </a:r>
+            <a:endParaRPr lang="ko-KR" altLang="en-US" sz="2800" cap="none" dirty="0">
+              <a:solidFill>
+                <a:schemeClr val="bg2">
+                  <a:lumMod val="25000"/>
+                </a:schemeClr>
+              </a:solidFill>
+              <a:latin typeface="D2Coding" panose="020B0609020101020101" pitchFamily="49" charset="-127"/>
+              <a:ea typeface="D2Coding" panose="020B0609020101020101" pitchFamily="49" charset="-127"/>
+              <a:cs typeface="Segoe UI Light" panose="020B0502040204020203" pitchFamily="34" charset="0"/>
+            </a:endParaRPr>
+          </a:p>
+        </p:txBody>
+      </p:sp>
+      <p:sp>
+        <p:nvSpPr>
+          <p:cNvPr id="8" name="TextBox 7">
+            <a:extLst>
+              <a:ext uri="{FF2B5EF4-FFF2-40B4-BE49-F238E27FC236}">
+                <a16:creationId xmlns:a16="http://schemas.microsoft.com/office/drawing/2014/main" id="{BCA5A31B-7B04-C85B-D89A-7227056A9971}"/>
+              </a:ext>
+            </a:extLst>
+          </p:cNvPr>
+          <p:cNvSpPr txBox="1"/>
+          <p:nvPr/>
+        </p:nvSpPr>
+        <p:spPr>
+          <a:xfrm>
+            <a:off x="744020" y="3244334"/>
+            <a:ext cx="184731" cy="369332"/>
+          </a:xfrm>
+          <a:prstGeom prst="rect">
+            <a:avLst/>
+          </a:prstGeom>
+          <a:noFill/>
+        </p:spPr>
+        <p:txBody>
+          <a:bodyPr wrap="none" rtlCol="0">
+            <a:spAutoFit/>
+          </a:bodyPr>
+          <a:lstStyle/>
+          <a:p>
+            <a:endParaRPr lang="ko-KR" altLang="en-US" dirty="0">
+              <a:solidFill>
+                <a:schemeClr val="accent5"/>
+              </a:solidFill>
+              <a:latin typeface="D2Coding" panose="020B0609020101020101" pitchFamily="49" charset="-127"/>
+              <a:ea typeface="D2Coding" panose="020B0609020101020101" pitchFamily="49" charset="-127"/>
+            </a:endParaRPr>
+          </a:p>
+        </p:txBody>
+      </p:sp>
+      <p:sp>
+        <p:nvSpPr>
+          <p:cNvPr id="2" name="슬라이드 번호 개체 틀 3">
+            <a:extLst>
+              <a:ext uri="{FF2B5EF4-FFF2-40B4-BE49-F238E27FC236}">
+                <a16:creationId xmlns:a16="http://schemas.microsoft.com/office/drawing/2014/main" id="{2AE4F0D1-013B-4AC7-73AA-93C18678FC54}"/>
+              </a:ext>
+            </a:extLst>
+          </p:cNvPr>
+          <p:cNvSpPr txBox="1">
+            <a:spLocks/>
+          </p:cNvSpPr>
+          <p:nvPr/>
+        </p:nvSpPr>
+        <p:spPr>
+          <a:xfrm>
+            <a:off x="11180761" y="299420"/>
+            <a:ext cx="753545" cy="365125"/>
+          </a:xfrm>
+          <a:prstGeom prst="rect">
+            <a:avLst/>
+          </a:prstGeom>
+        </p:spPr>
+        <p:txBody>
+          <a:bodyPr vert="horz" lIns="91440" tIns="45720" rIns="91440" bIns="45720" rtlCol="0" anchor="ctr"/>
+          <a:lstStyle>
+            <a:defPPr rtl="0">
+              <a:defRPr lang="ko-KR"/>
+            </a:defPPr>
+            <a:lvl1pPr marL="0" algn="r" defTabSz="914400" rtl="0" eaLnBrk="1" latinLnBrk="0" hangingPunct="1">
+              <a:defRPr sz="1200" kern="1200" baseline="0">
+                <a:solidFill>
+                  <a:schemeClr val="tx1">
+                    <a:lumMod val="65000"/>
+                    <a:lumOff val="35000"/>
+                  </a:schemeClr>
+                </a:solidFill>
+                <a:latin typeface="맑은 고딕" panose="020B0503020000020004" pitchFamily="50" charset="-127"/>
+                <a:ea typeface="맑은 고딕" panose="020B0503020000020004" pitchFamily="50" charset="-127"/>
+                <a:cs typeface="+mn-cs"/>
+              </a:defRPr>
+            </a:lvl1pPr>
+            <a:lvl2pPr marL="457200" algn="l" defTabSz="914400" rtl="0" eaLnBrk="1" latinLnBrk="0" hangingPunct="1">
+              <a:defRPr sz="1800" kern="1200">
+                <a:solidFill>
+                  <a:schemeClr val="tx1"/>
+                </a:solidFill>
+                <a:latin typeface="+mn-lt"/>
+                <a:ea typeface="+mn-ea"/>
+                <a:cs typeface="+mn-cs"/>
+              </a:defRPr>
+            </a:lvl2pPr>
+            <a:lvl3pPr marL="914400" algn="l" defTabSz="914400" rtl="0" eaLnBrk="1" latinLnBrk="0" hangingPunct="1">
+              <a:defRPr sz="1800" kern="1200">
+                <a:solidFill>
+                  <a:schemeClr val="tx1"/>
+                </a:solidFill>
+                <a:latin typeface="+mn-lt"/>
+                <a:ea typeface="+mn-ea"/>
+                <a:cs typeface="+mn-cs"/>
+              </a:defRPr>
+            </a:lvl3pPr>
+            <a:lvl4pPr marL="1371600" algn="l" defTabSz="914400" rtl="0" eaLnBrk="1" latinLnBrk="0" hangingPunct="1">
+              <a:defRPr sz="1800" kern="1200">
+                <a:solidFill>
+                  <a:schemeClr val="tx1"/>
+                </a:solidFill>
+                <a:latin typeface="+mn-lt"/>
+                <a:ea typeface="+mn-ea"/>
+                <a:cs typeface="+mn-cs"/>
+              </a:defRPr>
+            </a:lvl4pPr>
+            <a:lvl5pPr marL="1828800" algn="l" defTabSz="914400" rtl="0" eaLnBrk="1" latinLnBrk="0" hangingPunct="1">
+              <a:defRPr sz="1800" kern="1200">
+                <a:solidFill>
+                  <a:schemeClr val="tx1"/>
+                </a:solidFill>
+                <a:latin typeface="+mn-lt"/>
+                <a:ea typeface="+mn-ea"/>
+                <a:cs typeface="+mn-cs"/>
+              </a:defRPr>
+            </a:lvl5pPr>
+            <a:lvl6pPr marL="2286000" algn="l" defTabSz="914400" rtl="0" eaLnBrk="1" latinLnBrk="0" hangingPunct="1">
+              <a:defRPr sz="1800" kern="1200">
+                <a:solidFill>
+                  <a:schemeClr val="tx1"/>
+                </a:solidFill>
+                <a:latin typeface="+mn-lt"/>
+                <a:ea typeface="+mn-ea"/>
+                <a:cs typeface="+mn-cs"/>
+              </a:defRPr>
+            </a:lvl6pPr>
+            <a:lvl7pPr marL="2743200" algn="l" defTabSz="914400" rtl="0" eaLnBrk="1" latinLnBrk="0" hangingPunct="1">
+              <a:defRPr sz="1800" kern="1200">
+                <a:solidFill>
+                  <a:schemeClr val="tx1"/>
+                </a:solidFill>
+                <a:latin typeface="+mn-lt"/>
+                <a:ea typeface="+mn-ea"/>
+                <a:cs typeface="+mn-cs"/>
+              </a:defRPr>
+            </a:lvl7pPr>
+            <a:lvl8pPr marL="3200400" algn="l" defTabSz="914400" rtl="0" eaLnBrk="1" latinLnBrk="0" hangingPunct="1">
+              <a:defRPr sz="1800" kern="1200">
+                <a:solidFill>
+                  <a:schemeClr val="tx1"/>
+                </a:solidFill>
+                <a:latin typeface="+mn-lt"/>
+                <a:ea typeface="+mn-ea"/>
+                <a:cs typeface="+mn-cs"/>
+              </a:defRPr>
+            </a:lvl8pPr>
+            <a:lvl9pPr marL="3657600" algn="l" defTabSz="914400" rtl="0" eaLnBrk="1" latinLnBrk="0" hangingPunct="1">
+              <a:defRPr sz="1800" kern="1200">
+                <a:solidFill>
+                  <a:schemeClr val="tx1"/>
+                </a:solidFill>
+                <a:latin typeface="+mn-lt"/>
+                <a:ea typeface="+mn-ea"/>
+                <a:cs typeface="+mn-cs"/>
+              </a:defRPr>
+            </a:lvl9pPr>
+          </a:lstStyle>
+          <a:p>
+            <a:fld id="{D57F1E4F-1CFF-5643-939E-217C01CDF565}" type="slidenum">
+              <a:rPr lang="en-US" b="1" smtClean="0">
+                <a:latin typeface="Segoe UI Emoji" panose="020B0502040204020203" pitchFamily="34" charset="0"/>
+                <a:ea typeface="Segoe UI Emoji" panose="020B0502040204020203" pitchFamily="34" charset="0"/>
+              </a:rPr>
+              <a:pPr/>
+              <a:t>37</a:t>
+            </a:fld>
+            <a:endParaRPr lang="en-US" b="1" dirty="0">
+              <a:latin typeface="Segoe UI Emoji" panose="020B0502040204020203" pitchFamily="34" charset="0"/>
+              <a:ea typeface="Segoe UI Emoji" panose="020B0502040204020203" pitchFamily="34" charset="0"/>
+            </a:endParaRPr>
+          </a:p>
+        </p:txBody>
+      </p:sp>
+      <p:sp>
+        <p:nvSpPr>
+          <p:cNvPr id="4" name="TextBox 3">
+            <a:extLst>
+              <a:ext uri="{FF2B5EF4-FFF2-40B4-BE49-F238E27FC236}">
+                <a16:creationId xmlns:a16="http://schemas.microsoft.com/office/drawing/2014/main" id="{1BA035BF-DEB8-5698-AF31-1E4C029C0F42}"/>
+              </a:ext>
+            </a:extLst>
+          </p:cNvPr>
+          <p:cNvSpPr txBox="1"/>
+          <p:nvPr/>
+        </p:nvSpPr>
+        <p:spPr>
+          <a:xfrm>
+            <a:off x="591620" y="1248422"/>
+            <a:ext cx="11047930" cy="793166"/>
+          </a:xfrm>
+          <a:prstGeom prst="rect">
+            <a:avLst/>
+          </a:prstGeom>
+          <a:noFill/>
+        </p:spPr>
+        <p:txBody>
+          <a:bodyPr wrap="square" rtlCol="0">
+            <a:spAutoFit/>
+          </a:bodyPr>
+          <a:lstStyle/>
+          <a:p>
+            <a:pPr marL="285750" indent="-285750">
+              <a:lnSpc>
+                <a:spcPct val="150000"/>
+              </a:lnSpc>
+              <a:buFont typeface="Wingdings" panose="05000000000000000000" pitchFamily="2" charset="2"/>
+              <a:buChar char="v"/>
+            </a:pPr>
+            <a:r>
+              <a:rPr lang="ko-KR" altLang="en-US" sz="1600" dirty="0">
+                <a:latin typeface="D2Coding" panose="020B0609020101020101" pitchFamily="49" charset="-127"/>
+                <a:ea typeface="D2Coding" panose="020B0609020101020101" pitchFamily="49" charset="-127"/>
+              </a:rPr>
+              <a:t>구글 드라이브의 문서 변경을 감지하여 </a:t>
+            </a:r>
+            <a:r>
+              <a:rPr lang="en-US" altLang="ko-KR" sz="1600" dirty="0">
+                <a:latin typeface="D2Coding" panose="020B0609020101020101" pitchFamily="49" charset="-127"/>
+                <a:ea typeface="D2Coding" panose="020B0609020101020101" pitchFamily="49" charset="-127"/>
+              </a:rPr>
+              <a:t>AI</a:t>
+            </a:r>
+            <a:r>
+              <a:rPr lang="ko-KR" altLang="en-US" sz="1600" dirty="0">
+                <a:latin typeface="D2Coding" panose="020B0609020101020101" pitchFamily="49" charset="-127"/>
+                <a:ea typeface="D2Coding" panose="020B0609020101020101" pitchFamily="49" charset="-127"/>
+              </a:rPr>
+              <a:t>가 검색할 수 있는 형태로 변환한 뒤</a:t>
+            </a:r>
+            <a:r>
+              <a:rPr lang="en-US" altLang="ko-KR" sz="1600" dirty="0">
+                <a:latin typeface="D2Coding" panose="020B0609020101020101" pitchFamily="49" charset="-127"/>
+                <a:ea typeface="D2Coding" panose="020B0609020101020101" pitchFamily="49" charset="-127"/>
+              </a:rPr>
+              <a:t>, </a:t>
+            </a:r>
+            <a:r>
+              <a:rPr lang="en-US" altLang="ko-KR" sz="1600" dirty="0" err="1">
+                <a:latin typeface="D2Coding" panose="020B0609020101020101" pitchFamily="49" charset="-127"/>
+                <a:ea typeface="D2Coding" panose="020B0609020101020101" pitchFamily="49" charset="-127"/>
+              </a:rPr>
+              <a:t>Supabase</a:t>
+            </a:r>
+            <a:r>
+              <a:rPr lang="en-US" altLang="ko-KR" sz="1600" dirty="0">
+                <a:latin typeface="D2Coding" panose="020B0609020101020101" pitchFamily="49" charset="-127"/>
+                <a:ea typeface="D2Coding" panose="020B0609020101020101" pitchFamily="49" charset="-127"/>
+              </a:rPr>
+              <a:t> </a:t>
+            </a:r>
+            <a:r>
+              <a:rPr lang="ko-KR" altLang="en-US" sz="1600" dirty="0">
+                <a:latin typeface="D2Coding" panose="020B0609020101020101" pitchFamily="49" charset="-127"/>
+                <a:ea typeface="D2Coding" panose="020B0609020101020101" pitchFamily="49" charset="-127"/>
+              </a:rPr>
+              <a:t>벡터 데이터베이스에 자동 저장하는 </a:t>
+            </a:r>
+            <a:r>
+              <a:rPr lang="en-US" altLang="ko-KR" sz="1600" dirty="0">
+                <a:latin typeface="D2Coding" panose="020B0609020101020101" pitchFamily="49" charset="-127"/>
+                <a:ea typeface="D2Coding" panose="020B0609020101020101" pitchFamily="49" charset="-127"/>
+              </a:rPr>
+              <a:t>RAG(</a:t>
+            </a:r>
+            <a:r>
+              <a:rPr lang="ko-KR" altLang="en-US" sz="1600" dirty="0">
+                <a:latin typeface="D2Coding" panose="020B0609020101020101" pitchFamily="49" charset="-127"/>
+                <a:ea typeface="D2Coding" panose="020B0609020101020101" pitchFamily="49" charset="-127"/>
+              </a:rPr>
+              <a:t>검색 증강 생성</a:t>
+            </a:r>
+            <a:r>
+              <a:rPr lang="en-US" altLang="ko-KR" sz="1600" dirty="0">
+                <a:latin typeface="D2Coding" panose="020B0609020101020101" pitchFamily="49" charset="-127"/>
+                <a:ea typeface="D2Coding" panose="020B0609020101020101" pitchFamily="49" charset="-127"/>
+              </a:rPr>
+              <a:t>) </a:t>
+            </a:r>
+            <a:r>
+              <a:rPr lang="ko-KR" altLang="en-US" sz="1600" dirty="0">
+                <a:latin typeface="D2Coding" panose="020B0609020101020101" pitchFamily="49" charset="-127"/>
+                <a:ea typeface="D2Coding" panose="020B0609020101020101" pitchFamily="49" charset="-127"/>
+              </a:rPr>
+              <a:t>파일 변환 </a:t>
+            </a:r>
+            <a:r>
+              <a:rPr lang="en-US" altLang="ko-KR" sz="1600" dirty="0">
+                <a:latin typeface="D2Coding" panose="020B0609020101020101" pitchFamily="49" charset="-127"/>
+                <a:ea typeface="D2Coding" panose="020B0609020101020101" pitchFamily="49" charset="-127"/>
+              </a:rPr>
+              <a:t>n8n</a:t>
+            </a:r>
+            <a:r>
+              <a:rPr lang="ko-KR" altLang="en-US" sz="1600" dirty="0">
+                <a:latin typeface="D2Coding" panose="020B0609020101020101" pitchFamily="49" charset="-127"/>
+                <a:ea typeface="D2Coding" panose="020B0609020101020101" pitchFamily="49" charset="-127"/>
+              </a:rPr>
+              <a:t> 파이프라인</a:t>
+            </a:r>
+          </a:p>
+        </p:txBody>
+      </p:sp>
+    </p:spTree>
+    <p:extLst>
+      <p:ext uri="{BB962C8B-B14F-4D97-AF65-F5344CB8AC3E}">
+        <p14:creationId xmlns:p14="http://schemas.microsoft.com/office/powerpoint/2010/main" val="771058584"/>
+      </p:ext>
+    </p:extLst>
+  </p:cSld>
+  <p:clrMapOvr>
+    <a:masterClrMapping/>
+  </p:clrMapOvr>
+</p:sld>
+</file>
+
+<file path=ppt/slides/slide38.xml><?xml version="1.0" encoding="utf-8"?>
+<p:sld xmlns:a="http://schemas.openxmlformats.org/drawingml/2006/main" xmlns:r="http://schemas.openxmlformats.org/officeDocument/2006/relationships" xmlns:p="http://schemas.openxmlformats.org/presentationml/2006/main">
+  <p:cSld>
+    <p:spTree>
+      <p:nvGrpSpPr>
+        <p:cNvPr id="1" name="">
+          <a:extLst>
+            <a:ext uri="{FF2B5EF4-FFF2-40B4-BE49-F238E27FC236}">
+              <a16:creationId xmlns:a16="http://schemas.microsoft.com/office/drawing/2014/main" id="{1B4DF2AF-F63C-9014-C256-E0B1E85737E1}"/>
+            </a:ext>
+          </a:extLst>
+        </p:cNvPr>
+        <p:cNvGrpSpPr/>
+        <p:nvPr/>
+      </p:nvGrpSpPr>
+      <p:grpSpPr>
+        <a:xfrm>
+          <a:off x="0" y="0"/>
+          <a:ext cx="0" cy="0"/>
+          <a:chOff x="0" y="0"/>
+          <a:chExt cx="0" cy="0"/>
+        </a:xfrm>
+      </p:grpSpPr>
+      <p:sp>
+        <p:nvSpPr>
+          <p:cNvPr id="3" name="제목 1">
+            <a:extLst>
+              <a:ext uri="{FF2B5EF4-FFF2-40B4-BE49-F238E27FC236}">
+                <a16:creationId xmlns:a16="http://schemas.microsoft.com/office/drawing/2014/main" id="{73C722C3-A681-42C5-1727-0EC1D6A355DC}"/>
+              </a:ext>
+            </a:extLst>
+          </p:cNvPr>
+          <p:cNvSpPr txBox="1">
+            <a:spLocks/>
+          </p:cNvSpPr>
+          <p:nvPr/>
+        </p:nvSpPr>
+        <p:spPr>
+          <a:xfrm>
+            <a:off x="475645" y="481983"/>
+            <a:ext cx="10353762" cy="766439"/>
+          </a:xfrm>
+          <a:prstGeom prst="rect">
+            <a:avLst/>
+          </a:prstGeom>
+        </p:spPr>
+        <p:txBody>
+          <a:bodyPr vert="horz" lIns="91440" tIns="45720" rIns="91440" bIns="45720" rtlCol="0" anchor="ctr">
+            <a:normAutofit/>
+          </a:bodyPr>
+          <a:lstStyle>
+            <a:lvl1pPr algn="ctr" defTabSz="914400" rtl="0" eaLnBrk="1" latinLnBrk="1" hangingPunct="1">
+              <a:lnSpc>
+                <a:spcPct val="90000"/>
+              </a:lnSpc>
+              <a:spcBef>
+                <a:spcPct val="0"/>
+              </a:spcBef>
+              <a:buNone/>
+              <a:defRPr sz="3200" kern="1200" cap="all" baseline="0">
+                <a:solidFill>
+                  <a:schemeClr val="tx1"/>
+                </a:solidFill>
+                <a:effectLst/>
+                <a:latin typeface="Batang" panose="02030600000101010101" pitchFamily="18" charset="-127"/>
+                <a:ea typeface="Batang" panose="02030600000101010101" pitchFamily="18" charset="-127"/>
+                <a:cs typeface="+mj-cs"/>
+              </a:defRPr>
+            </a:lvl1pPr>
+          </a:lstStyle>
+          <a:p>
+            <a:pPr algn="l"/>
+            <a:r>
+              <a:rPr lang="en-US" altLang="ko-KR" sz="2800" cap="none" dirty="0">
+                <a:solidFill>
+                  <a:schemeClr val="bg2">
+                    <a:lumMod val="25000"/>
+                  </a:schemeClr>
+                </a:solidFill>
+                <a:latin typeface="D2Coding" panose="020B0609020101020101" pitchFamily="49" charset="-127"/>
+                <a:ea typeface="D2Coding" panose="020B0609020101020101" pitchFamily="49" charset="-127"/>
+                <a:cs typeface="Segoe UI Light" panose="020B0502040204020203" pitchFamily="34" charset="0"/>
+              </a:rPr>
+              <a:t>AI Agent RAG Workflow </a:t>
+            </a:r>
+            <a:endParaRPr lang="ko-KR" altLang="en-US" sz="2800" cap="none" dirty="0">
+              <a:solidFill>
+                <a:schemeClr val="bg2">
+                  <a:lumMod val="25000"/>
+                </a:schemeClr>
+              </a:solidFill>
+              <a:latin typeface="D2Coding" panose="020B0609020101020101" pitchFamily="49" charset="-127"/>
+              <a:ea typeface="D2Coding" panose="020B0609020101020101" pitchFamily="49" charset="-127"/>
+              <a:cs typeface="Segoe UI Light" panose="020B0502040204020203" pitchFamily="34" charset="0"/>
+            </a:endParaRPr>
+          </a:p>
+        </p:txBody>
+      </p:sp>
+      <p:sp>
+        <p:nvSpPr>
+          <p:cNvPr id="8" name="TextBox 7">
+            <a:extLst>
+              <a:ext uri="{FF2B5EF4-FFF2-40B4-BE49-F238E27FC236}">
+                <a16:creationId xmlns:a16="http://schemas.microsoft.com/office/drawing/2014/main" id="{E0DFF02E-9E6D-5478-8A71-D7BFFE7FE873}"/>
+              </a:ext>
+            </a:extLst>
+          </p:cNvPr>
+          <p:cNvSpPr txBox="1"/>
+          <p:nvPr/>
+        </p:nvSpPr>
+        <p:spPr>
+          <a:xfrm>
+            <a:off x="744020" y="3244334"/>
+            <a:ext cx="184731" cy="369332"/>
+          </a:xfrm>
+          <a:prstGeom prst="rect">
+            <a:avLst/>
+          </a:prstGeom>
+          <a:noFill/>
+        </p:spPr>
+        <p:txBody>
+          <a:bodyPr wrap="none" rtlCol="0">
+            <a:spAutoFit/>
+          </a:bodyPr>
+          <a:lstStyle/>
+          <a:p>
+            <a:endParaRPr lang="ko-KR" altLang="en-US" dirty="0">
+              <a:solidFill>
+                <a:schemeClr val="accent5"/>
+              </a:solidFill>
+              <a:latin typeface="D2Coding" panose="020B0609020101020101" pitchFamily="49" charset="-127"/>
+              <a:ea typeface="D2Coding" panose="020B0609020101020101" pitchFamily="49" charset="-127"/>
+            </a:endParaRPr>
+          </a:p>
+        </p:txBody>
+      </p:sp>
+      <p:sp>
+        <p:nvSpPr>
+          <p:cNvPr id="2" name="슬라이드 번호 개체 틀 3">
+            <a:extLst>
+              <a:ext uri="{FF2B5EF4-FFF2-40B4-BE49-F238E27FC236}">
+                <a16:creationId xmlns:a16="http://schemas.microsoft.com/office/drawing/2014/main" id="{B08F3617-13F4-36A0-1AD9-CDE57732614E}"/>
+              </a:ext>
+            </a:extLst>
+          </p:cNvPr>
+          <p:cNvSpPr txBox="1">
+            <a:spLocks/>
+          </p:cNvSpPr>
+          <p:nvPr/>
+        </p:nvSpPr>
+        <p:spPr>
+          <a:xfrm>
+            <a:off x="11180761" y="299420"/>
+            <a:ext cx="753545" cy="365125"/>
+          </a:xfrm>
+          <a:prstGeom prst="rect">
+            <a:avLst/>
+          </a:prstGeom>
+        </p:spPr>
+        <p:txBody>
+          <a:bodyPr vert="horz" lIns="91440" tIns="45720" rIns="91440" bIns="45720" rtlCol="0" anchor="ctr"/>
+          <a:lstStyle>
+            <a:defPPr rtl="0">
+              <a:defRPr lang="ko-KR"/>
+            </a:defPPr>
+            <a:lvl1pPr marL="0" algn="r" defTabSz="914400" rtl="0" eaLnBrk="1" latinLnBrk="0" hangingPunct="1">
+              <a:defRPr sz="1200" kern="1200" baseline="0">
+                <a:solidFill>
+                  <a:schemeClr val="tx1">
+                    <a:lumMod val="65000"/>
+                    <a:lumOff val="35000"/>
+                  </a:schemeClr>
+                </a:solidFill>
+                <a:latin typeface="맑은 고딕" panose="020B0503020000020004" pitchFamily="50" charset="-127"/>
+                <a:ea typeface="맑은 고딕" panose="020B0503020000020004" pitchFamily="50" charset="-127"/>
+                <a:cs typeface="+mn-cs"/>
+              </a:defRPr>
+            </a:lvl1pPr>
+            <a:lvl2pPr marL="457200" algn="l" defTabSz="914400" rtl="0" eaLnBrk="1" latinLnBrk="0" hangingPunct="1">
+              <a:defRPr sz="1800" kern="1200">
+                <a:solidFill>
+                  <a:schemeClr val="tx1"/>
+                </a:solidFill>
+                <a:latin typeface="+mn-lt"/>
+                <a:ea typeface="+mn-ea"/>
+                <a:cs typeface="+mn-cs"/>
+              </a:defRPr>
+            </a:lvl2pPr>
+            <a:lvl3pPr marL="914400" algn="l" defTabSz="914400" rtl="0" eaLnBrk="1" latinLnBrk="0" hangingPunct="1">
+              <a:defRPr sz="1800" kern="1200">
+                <a:solidFill>
+                  <a:schemeClr val="tx1"/>
+                </a:solidFill>
+                <a:latin typeface="+mn-lt"/>
+                <a:ea typeface="+mn-ea"/>
+                <a:cs typeface="+mn-cs"/>
+              </a:defRPr>
+            </a:lvl3pPr>
+            <a:lvl4pPr marL="1371600" algn="l" defTabSz="914400" rtl="0" eaLnBrk="1" latinLnBrk="0" hangingPunct="1">
+              <a:defRPr sz="1800" kern="1200">
+                <a:solidFill>
+                  <a:schemeClr val="tx1"/>
+                </a:solidFill>
+                <a:latin typeface="+mn-lt"/>
+                <a:ea typeface="+mn-ea"/>
+                <a:cs typeface="+mn-cs"/>
+              </a:defRPr>
+            </a:lvl4pPr>
+            <a:lvl5pPr marL="1828800" algn="l" defTabSz="914400" rtl="0" eaLnBrk="1" latinLnBrk="0" hangingPunct="1">
+              <a:defRPr sz="1800" kern="1200">
+                <a:solidFill>
+                  <a:schemeClr val="tx1"/>
+                </a:solidFill>
+                <a:latin typeface="+mn-lt"/>
+                <a:ea typeface="+mn-ea"/>
+                <a:cs typeface="+mn-cs"/>
+              </a:defRPr>
+            </a:lvl5pPr>
+            <a:lvl6pPr marL="2286000" algn="l" defTabSz="914400" rtl="0" eaLnBrk="1" latinLnBrk="0" hangingPunct="1">
+              <a:defRPr sz="1800" kern="1200">
+                <a:solidFill>
+                  <a:schemeClr val="tx1"/>
+                </a:solidFill>
+                <a:latin typeface="+mn-lt"/>
+                <a:ea typeface="+mn-ea"/>
+                <a:cs typeface="+mn-cs"/>
+              </a:defRPr>
+            </a:lvl6pPr>
+            <a:lvl7pPr marL="2743200" algn="l" defTabSz="914400" rtl="0" eaLnBrk="1" latinLnBrk="0" hangingPunct="1">
+              <a:defRPr sz="1800" kern="1200">
+                <a:solidFill>
+                  <a:schemeClr val="tx1"/>
+                </a:solidFill>
+                <a:latin typeface="+mn-lt"/>
+                <a:ea typeface="+mn-ea"/>
+                <a:cs typeface="+mn-cs"/>
+              </a:defRPr>
+            </a:lvl7pPr>
+            <a:lvl8pPr marL="3200400" algn="l" defTabSz="914400" rtl="0" eaLnBrk="1" latinLnBrk="0" hangingPunct="1">
+              <a:defRPr sz="1800" kern="1200">
+                <a:solidFill>
+                  <a:schemeClr val="tx1"/>
+                </a:solidFill>
+                <a:latin typeface="+mn-lt"/>
+                <a:ea typeface="+mn-ea"/>
+                <a:cs typeface="+mn-cs"/>
+              </a:defRPr>
+            </a:lvl8pPr>
+            <a:lvl9pPr marL="3657600" algn="l" defTabSz="914400" rtl="0" eaLnBrk="1" latinLnBrk="0" hangingPunct="1">
+              <a:defRPr sz="1800" kern="1200">
+                <a:solidFill>
+                  <a:schemeClr val="tx1"/>
+                </a:solidFill>
+                <a:latin typeface="+mn-lt"/>
+                <a:ea typeface="+mn-ea"/>
+                <a:cs typeface="+mn-cs"/>
+              </a:defRPr>
+            </a:lvl9pPr>
+          </a:lstStyle>
+          <a:p>
+            <a:fld id="{D57F1E4F-1CFF-5643-939E-217C01CDF565}" type="slidenum">
+              <a:rPr lang="en-US" b="1" smtClean="0">
+                <a:latin typeface="Segoe UI Emoji" panose="020B0502040204020203" pitchFamily="34" charset="0"/>
+                <a:ea typeface="Segoe UI Emoji" panose="020B0502040204020203" pitchFamily="34" charset="0"/>
+              </a:rPr>
+              <a:pPr/>
+              <a:t>38</a:t>
+            </a:fld>
+            <a:endParaRPr lang="en-US" b="1" dirty="0">
+              <a:latin typeface="Segoe UI Emoji" panose="020B0502040204020203" pitchFamily="34" charset="0"/>
+              <a:ea typeface="Segoe UI Emoji" panose="020B0502040204020203" pitchFamily="34" charset="0"/>
+            </a:endParaRPr>
+          </a:p>
+        </p:txBody>
+      </p:sp>
+      <p:sp>
+        <p:nvSpPr>
+          <p:cNvPr id="7" name="TextBox 6">
+            <a:extLst>
+              <a:ext uri="{FF2B5EF4-FFF2-40B4-BE49-F238E27FC236}">
+                <a16:creationId xmlns:a16="http://schemas.microsoft.com/office/drawing/2014/main" id="{516DE965-C7A9-E5C4-A92D-66F97CECB247}"/>
+              </a:ext>
+            </a:extLst>
+          </p:cNvPr>
+          <p:cNvSpPr txBox="1"/>
+          <p:nvPr/>
+        </p:nvSpPr>
+        <p:spPr>
+          <a:xfrm>
+            <a:off x="576262" y="1404784"/>
+            <a:ext cx="11039476" cy="1074974"/>
+          </a:xfrm>
+          <a:prstGeom prst="rect">
+            <a:avLst/>
+          </a:prstGeom>
+          <a:noFill/>
+        </p:spPr>
+        <p:txBody>
+          <a:bodyPr wrap="square">
+            <a:spAutoFit/>
+          </a:bodyPr>
+          <a:lstStyle/>
+          <a:p>
+            <a:pPr marL="342900" indent="-342900">
+              <a:lnSpc>
+                <a:spcPct val="150000"/>
+              </a:lnSpc>
+              <a:buFont typeface="+mj-lt"/>
+              <a:buAutoNum type="arabicPeriod"/>
+            </a:pPr>
+            <a:r>
+              <a:rPr lang="ko-KR" altLang="en-US" sz="1600" dirty="0">
+                <a:latin typeface="D2Coding" panose="020B0609020101020101" pitchFamily="49" charset="-127"/>
+                <a:ea typeface="D2Coding" panose="020B0609020101020101" pitchFamily="49" charset="-127"/>
+              </a:rPr>
+              <a:t>문서 감지 및 다운로드 (Google </a:t>
+            </a:r>
+            <a:r>
+              <a:rPr lang="ko-KR" altLang="en-US" sz="1600" dirty="0" err="1">
+                <a:latin typeface="D2Coding" panose="020B0609020101020101" pitchFamily="49" charset="-127"/>
+                <a:ea typeface="D2Coding" panose="020B0609020101020101" pitchFamily="49" charset="-127"/>
+              </a:rPr>
+              <a:t>Drive</a:t>
+            </a:r>
+            <a:r>
+              <a:rPr lang="ko-KR" altLang="en-US" sz="1600" dirty="0">
+                <a:latin typeface="D2Coding" panose="020B0609020101020101" pitchFamily="49" charset="-127"/>
+                <a:ea typeface="D2Coding" panose="020B0609020101020101" pitchFamily="49" charset="-127"/>
+              </a:rPr>
+              <a:t> </a:t>
+            </a:r>
+            <a:r>
+              <a:rPr lang="ko-KR" altLang="en-US" sz="1600" dirty="0" err="1">
+                <a:latin typeface="D2Coding" panose="020B0609020101020101" pitchFamily="49" charset="-127"/>
+                <a:ea typeface="D2Coding" panose="020B0609020101020101" pitchFamily="49" charset="-127"/>
+              </a:rPr>
+              <a:t>Trigger</a:t>
+            </a:r>
+            <a:r>
+              <a:rPr lang="ko-KR" altLang="en-US" sz="1600" dirty="0">
+                <a:latin typeface="D2Coding" panose="020B0609020101020101" pitchFamily="49" charset="-127"/>
+                <a:ea typeface="D2Coding" panose="020B0609020101020101" pitchFamily="49" charset="-127"/>
+              </a:rPr>
+              <a:t> ➔ </a:t>
+            </a:r>
+            <a:r>
+              <a:rPr lang="ko-KR" altLang="en-US" sz="1600" dirty="0" err="1">
+                <a:latin typeface="D2Coding" panose="020B0609020101020101" pitchFamily="49" charset="-127"/>
+                <a:ea typeface="D2Coding" panose="020B0609020101020101" pitchFamily="49" charset="-127"/>
+              </a:rPr>
+              <a:t>Download</a:t>
+            </a:r>
+            <a:r>
+              <a:rPr lang="ko-KR" altLang="en-US" sz="1600" dirty="0">
+                <a:latin typeface="D2Coding" panose="020B0609020101020101" pitchFamily="49" charset="-127"/>
+                <a:ea typeface="D2Coding" panose="020B0609020101020101" pitchFamily="49" charset="-127"/>
+              </a:rPr>
+              <a:t> </a:t>
+            </a:r>
+            <a:r>
+              <a:rPr lang="ko-KR" altLang="en-US" sz="1600" dirty="0" err="1">
+                <a:latin typeface="D2Coding" panose="020B0609020101020101" pitchFamily="49" charset="-127"/>
+                <a:ea typeface="D2Coding" panose="020B0609020101020101" pitchFamily="49" charset="-127"/>
+              </a:rPr>
+              <a:t>file</a:t>
+            </a:r>
+            <a:r>
+              <a:rPr lang="ko-KR" altLang="en-US" sz="1600" dirty="0">
+                <a:latin typeface="D2Coding" panose="020B0609020101020101" pitchFamily="49" charset="-127"/>
+                <a:ea typeface="D2Coding" panose="020B0609020101020101" pitchFamily="49" charset="-127"/>
+              </a:rPr>
+              <a:t>)</a:t>
+            </a:r>
+          </a:p>
+          <a:p>
+            <a:pPr marL="742950" lvl="1" indent="-285750">
+              <a:lnSpc>
+                <a:spcPct val="150000"/>
+              </a:lnSpc>
+              <a:buFont typeface="Wingdings" panose="05000000000000000000" pitchFamily="2" charset="2"/>
+              <a:buChar char="§"/>
+            </a:pPr>
+            <a:r>
+              <a:rPr lang="ko-KR" altLang="en-US" sz="1400" dirty="0">
+                <a:latin typeface="D2Coding" panose="020B0609020101020101" pitchFamily="49" charset="-127"/>
+                <a:ea typeface="D2Coding" panose="020B0609020101020101" pitchFamily="49" charset="-127"/>
+              </a:rPr>
+              <a:t>구글 드라이브에서 대상 파일(PDF 등)이 추가되거나 수정되면 트리거가 동작</a:t>
+            </a:r>
+          </a:p>
+          <a:p>
+            <a:pPr marL="742950" lvl="1" indent="-285750">
+              <a:lnSpc>
+                <a:spcPct val="150000"/>
+              </a:lnSpc>
+              <a:buFont typeface="Wingdings" panose="05000000000000000000" pitchFamily="2" charset="2"/>
+              <a:buChar char="§"/>
+            </a:pPr>
+            <a:r>
+              <a:rPr lang="ko-KR" altLang="en-US" sz="1400" dirty="0" err="1">
+                <a:latin typeface="D2Coding" panose="020B0609020101020101" pitchFamily="49" charset="-127"/>
+                <a:ea typeface="D2Coding" panose="020B0609020101020101" pitchFamily="49" charset="-127"/>
+              </a:rPr>
+              <a:t>Download</a:t>
+            </a:r>
+            <a:r>
+              <a:rPr lang="ko-KR" altLang="en-US" sz="1400" dirty="0">
+                <a:latin typeface="D2Coding" panose="020B0609020101020101" pitchFamily="49" charset="-127"/>
+                <a:ea typeface="D2Coding" panose="020B0609020101020101" pitchFamily="49" charset="-127"/>
+              </a:rPr>
+              <a:t> </a:t>
+            </a:r>
+            <a:r>
+              <a:rPr lang="ko-KR" altLang="en-US" sz="1400" dirty="0" err="1">
+                <a:latin typeface="D2Coding" panose="020B0609020101020101" pitchFamily="49" charset="-127"/>
+                <a:ea typeface="D2Coding" panose="020B0609020101020101" pitchFamily="49" charset="-127"/>
+              </a:rPr>
+              <a:t>file</a:t>
+            </a:r>
+            <a:r>
+              <a:rPr lang="ko-KR" altLang="en-US" sz="1400" dirty="0">
+                <a:latin typeface="D2Coding" panose="020B0609020101020101" pitchFamily="49" charset="-127"/>
+                <a:ea typeface="D2Coding" panose="020B0609020101020101" pitchFamily="49" charset="-127"/>
+              </a:rPr>
+              <a:t> 노드가 감지된 파일의 실제 원본 바이너리 데이터를 받아오기</a:t>
+            </a:r>
+          </a:p>
+        </p:txBody>
+      </p:sp>
+    </p:spTree>
+    <p:extLst>
+      <p:ext uri="{BB962C8B-B14F-4D97-AF65-F5344CB8AC3E}">
+        <p14:creationId xmlns:p14="http://schemas.microsoft.com/office/powerpoint/2010/main" val="134223672"/>
+      </p:ext>
+    </p:extLst>
+  </p:cSld>
+  <p:clrMapOvr>
+    <a:masterClrMapping/>
+  </p:clrMapOvr>
+</p:sld>
+</file>
+
+<file path=ppt/slides/slide39.xml><?xml version="1.0" encoding="utf-8"?>
+<p:sld xmlns:a="http://schemas.openxmlformats.org/drawingml/2006/main" xmlns:r="http://schemas.openxmlformats.org/officeDocument/2006/relationships" xmlns:p="http://schemas.openxmlformats.org/presentationml/2006/main">
+  <p:cSld>
+    <p:spTree>
+      <p:nvGrpSpPr>
+        <p:cNvPr id="1" name="">
+          <a:extLst>
+            <a:ext uri="{FF2B5EF4-FFF2-40B4-BE49-F238E27FC236}">
+              <a16:creationId xmlns:a16="http://schemas.microsoft.com/office/drawing/2014/main" id="{4D329B48-DF83-6993-3705-1D9B3C17751C}"/>
+            </a:ext>
+          </a:extLst>
+        </p:cNvPr>
+        <p:cNvGrpSpPr/>
+        <p:nvPr/>
+      </p:nvGrpSpPr>
+      <p:grpSpPr>
+        <a:xfrm>
+          <a:off x="0" y="0"/>
+          <a:ext cx="0" cy="0"/>
+          <a:chOff x="0" y="0"/>
+          <a:chExt cx="0" cy="0"/>
+        </a:xfrm>
+      </p:grpSpPr>
+      <p:sp>
+        <p:nvSpPr>
+          <p:cNvPr id="2" name="제목 1">
+            <a:extLst>
+              <a:ext uri="{FF2B5EF4-FFF2-40B4-BE49-F238E27FC236}">
+                <a16:creationId xmlns:a16="http://schemas.microsoft.com/office/drawing/2014/main" id="{39CCD212-3BE7-85E9-2C6F-7925BADC30A7}"/>
+              </a:ext>
+            </a:extLst>
+          </p:cNvPr>
+          <p:cNvSpPr>
+            <a:spLocks noGrp="1"/>
+          </p:cNvSpPr>
+          <p:nvPr>
+            <p:ph type="ctrTitle"/>
+          </p:nvPr>
+        </p:nvSpPr>
+        <p:spPr>
+          <a:xfrm>
+            <a:off x="838199" y="1164324"/>
+            <a:ext cx="10934701" cy="2387600"/>
+          </a:xfrm>
+        </p:spPr>
+        <p:txBody>
+          <a:bodyPr rtlCol="0" anchor="ctr" anchorCtr="0">
+            <a:normAutofit/>
+          </a:bodyPr>
+          <a:lstStyle/>
+          <a:p>
+            <a:r>
+              <a:rPr lang="en-US" altLang="ko-KR" sz="5400" dirty="0">
+                <a:solidFill>
+                  <a:schemeClr val="bg1"/>
+                </a:solidFill>
+                <a:latin typeface="D2Coding" panose="020B0609020101020101" pitchFamily="49" charset="-127"/>
+                <a:ea typeface="D2Coding" panose="020B0609020101020101" pitchFamily="49" charset="-127"/>
+              </a:rPr>
+              <a:t>n8n</a:t>
+            </a:r>
+            <a:br>
+              <a:rPr lang="en-US" altLang="ko-KR" sz="4400" dirty="0">
+                <a:solidFill>
+                  <a:schemeClr val="bg1"/>
+                </a:solidFill>
+                <a:latin typeface="D2Coding" panose="020B0609020101020101" pitchFamily="49" charset="-127"/>
+                <a:ea typeface="D2Coding" panose="020B0609020101020101" pitchFamily="49" charset="-127"/>
+              </a:rPr>
+            </a:br>
+            <a:r>
+              <a:rPr lang="en-US" altLang="ko-KR" sz="4000" dirty="0">
+                <a:solidFill>
+                  <a:schemeClr val="bg1"/>
+                </a:solidFill>
+                <a:latin typeface="D2Coding" panose="020B0609020101020101" pitchFamily="49" charset="-127"/>
+                <a:ea typeface="D2Coding" panose="020B0609020101020101" pitchFamily="49" charset="-127"/>
+              </a:rPr>
+              <a:t>Homework</a:t>
+            </a:r>
+            <a:endParaRPr lang="ko-KR" altLang="en-US" sz="4400" dirty="0">
+              <a:solidFill>
+                <a:schemeClr val="bg1"/>
+              </a:solidFill>
+              <a:latin typeface="D2Coding" panose="020B0609020101020101" pitchFamily="49" charset="-127"/>
+              <a:ea typeface="D2Coding" panose="020B0609020101020101" pitchFamily="49" charset="-127"/>
+            </a:endParaRPr>
+          </a:p>
+        </p:txBody>
+      </p:sp>
+      <p:sp>
+        <p:nvSpPr>
+          <p:cNvPr id="5" name="부제목 2">
+            <a:extLst>
+              <a:ext uri="{FF2B5EF4-FFF2-40B4-BE49-F238E27FC236}">
+                <a16:creationId xmlns:a16="http://schemas.microsoft.com/office/drawing/2014/main" id="{B5CF0B80-F916-532F-D25B-79DB2A66CED9}"/>
+              </a:ext>
+            </a:extLst>
+          </p:cNvPr>
+          <p:cNvSpPr txBox="1">
+            <a:spLocks/>
+          </p:cNvSpPr>
+          <p:nvPr/>
+        </p:nvSpPr>
+        <p:spPr>
+          <a:xfrm>
+            <a:off x="855620" y="4555883"/>
+            <a:ext cx="9582736" cy="1137793"/>
+          </a:xfrm>
+          <a:prstGeom prst="rect">
+            <a:avLst/>
+          </a:prstGeom>
+        </p:spPr>
+        <p:txBody>
+          <a:bodyPr vert="horz" lIns="91440" tIns="45720" rIns="91440" bIns="45720" rtlCol="0">
+            <a:normAutofit fontScale="85000" lnSpcReduction="20000"/>
+          </a:bodyPr>
+          <a:lstStyle>
+            <a:lvl1pPr marL="0" indent="0" algn="l" defTabSz="914400" rtl="0" eaLnBrk="1" latinLnBrk="1" hangingPunct="1">
+              <a:lnSpc>
+                <a:spcPct val="150000"/>
+              </a:lnSpc>
+              <a:spcBef>
+                <a:spcPts val="1000"/>
+              </a:spcBef>
+              <a:spcAft>
+                <a:spcPts val="1200"/>
+              </a:spcAft>
+              <a:buFontTx/>
+              <a:buNone/>
+              <a:defRPr lang="en-US" sz="1200" kern="1200" dirty="0">
+                <a:solidFill>
+                  <a:schemeClr val="tx1"/>
+                </a:solidFill>
+                <a:latin typeface="맑은 고딕" panose="020B0503020000020004" pitchFamily="50" charset="-127"/>
+                <a:ea typeface="맑은 고딕" panose="020B0503020000020004" pitchFamily="50" charset="-127"/>
+                <a:cs typeface="+mn-cs"/>
+              </a:defRPr>
+            </a:lvl1pPr>
+            <a:lvl2pPr marL="228600" indent="-228600" algn="l" defTabSz="914400" rtl="0" eaLnBrk="1" latinLnBrk="1" hangingPunct="1">
+              <a:lnSpc>
+                <a:spcPct val="150000"/>
+              </a:lnSpc>
+              <a:spcBef>
+                <a:spcPts val="1000"/>
+              </a:spcBef>
+              <a:spcAft>
+                <a:spcPts val="1200"/>
+              </a:spcAft>
+              <a:buFont typeface="Arial" panose="020B0604020202020204" pitchFamily="34" charset="0"/>
+              <a:buChar char="•"/>
+              <a:defRPr lang="en-US" sz="1200" kern="1200" dirty="0">
+                <a:solidFill>
+                  <a:schemeClr val="tx1"/>
+                </a:solidFill>
+                <a:latin typeface="맑은 고딕" panose="020B0503020000020004" pitchFamily="50" charset="-127"/>
+                <a:ea typeface="맑은 고딕" panose="020B0503020000020004" pitchFamily="50" charset="-127"/>
+                <a:cs typeface="+mn-cs"/>
+              </a:defRPr>
+            </a:lvl2pPr>
+            <a:lvl3pPr marL="685800" indent="-228600" algn="l" defTabSz="914400" rtl="0" eaLnBrk="1" latinLnBrk="1" hangingPunct="1">
+              <a:lnSpc>
+                <a:spcPct val="150000"/>
+              </a:lnSpc>
+              <a:spcBef>
+                <a:spcPts val="1000"/>
+              </a:spcBef>
+              <a:spcAft>
+                <a:spcPts val="1200"/>
+              </a:spcAft>
+              <a:buFont typeface="Arial" panose="020B0604020202020204" pitchFamily="34" charset="0"/>
+              <a:buChar char="•"/>
+              <a:defRPr lang="en-US" sz="1200" kern="1200" dirty="0">
+                <a:solidFill>
+                  <a:schemeClr val="tx1"/>
+                </a:solidFill>
+                <a:latin typeface="맑은 고딕" panose="020B0503020000020004" pitchFamily="50" charset="-127"/>
+                <a:ea typeface="맑은 고딕" panose="020B0503020000020004" pitchFamily="50" charset="-127"/>
+                <a:cs typeface="+mn-cs"/>
+              </a:defRPr>
+            </a:lvl3pPr>
+            <a:lvl4pPr marL="1143000" indent="-228600" algn="l" defTabSz="914400" rtl="0" eaLnBrk="1" latinLnBrk="1" hangingPunct="1">
+              <a:lnSpc>
+                <a:spcPct val="150000"/>
+              </a:lnSpc>
+              <a:spcBef>
+                <a:spcPts val="1000"/>
+              </a:spcBef>
+              <a:spcAft>
+                <a:spcPts val="1200"/>
+              </a:spcAft>
+              <a:buFont typeface="Arial" panose="020B0604020202020204" pitchFamily="34" charset="0"/>
+              <a:buChar char="•"/>
+              <a:defRPr lang="en-US" sz="1200" kern="1200" dirty="0" smtClean="0">
+                <a:solidFill>
+                  <a:schemeClr val="tx1"/>
+                </a:solidFill>
+                <a:latin typeface="맑은 고딕" panose="020B0503020000020004" pitchFamily="50" charset="-127"/>
+                <a:ea typeface="맑은 고딕" panose="020B0503020000020004" pitchFamily="50" charset="-127"/>
+                <a:cs typeface="+mn-cs"/>
+              </a:defRPr>
+            </a:lvl4pPr>
+            <a:lvl5pPr marL="1600200" indent="-228600" algn="l" defTabSz="914400" rtl="0" eaLnBrk="1" latinLnBrk="1" hangingPunct="1">
+              <a:lnSpc>
+                <a:spcPct val="150000"/>
+              </a:lnSpc>
+              <a:spcBef>
+                <a:spcPts val="1000"/>
+              </a:spcBef>
+              <a:spcAft>
+                <a:spcPts val="1200"/>
+              </a:spcAft>
+              <a:buFont typeface="Arial" panose="020B0604020202020204" pitchFamily="34" charset="0"/>
+              <a:buChar char="•"/>
+              <a:defRPr lang="en-US" sz="1200" kern="1200" dirty="0" smtClean="0">
+                <a:solidFill>
+                  <a:schemeClr val="tx1"/>
+                </a:solidFill>
+                <a:latin typeface="맑은 고딕" panose="020B0503020000020004" pitchFamily="50" charset="-127"/>
+                <a:ea typeface="맑은 고딕" panose="020B0503020000020004" pitchFamily="50" charset="-127"/>
+                <a:cs typeface="+mn-cs"/>
+              </a:defRPr>
+            </a:lvl5pPr>
+            <a:lvl6pPr marL="2057400" indent="-228600" algn="l" defTabSz="914400" rtl="0" eaLnBrk="1" latinLnBrk="1" hangingPunct="1">
+              <a:lnSpc>
+                <a:spcPct val="150000"/>
+              </a:lnSpc>
+              <a:spcBef>
+                <a:spcPts val="1000"/>
+              </a:spcBef>
+              <a:spcAft>
+                <a:spcPts val="1200"/>
+              </a:spcAft>
+              <a:buFont typeface="Arial" panose="020B0604020202020204" pitchFamily="34" charset="0"/>
+              <a:buChar char="•"/>
+              <a:defRPr lang="en-US" sz="1200" kern="1200" dirty="0" smtClean="0">
+                <a:solidFill>
+                  <a:schemeClr val="tx1"/>
+                </a:solidFill>
+                <a:latin typeface="+mn-lt"/>
+                <a:ea typeface="+mn-ea"/>
+                <a:cs typeface="+mn-cs"/>
+              </a:defRPr>
+            </a:lvl6pPr>
+            <a:lvl7pPr marL="2514600" indent="-228600" algn="l" defTabSz="914400" rtl="0" eaLnBrk="1" latinLnBrk="1" hangingPunct="1">
+              <a:lnSpc>
+                <a:spcPct val="150000"/>
+              </a:lnSpc>
+              <a:spcBef>
+                <a:spcPts val="1000"/>
+              </a:spcBef>
+              <a:spcAft>
+                <a:spcPts val="1200"/>
+              </a:spcAft>
+              <a:buFont typeface="Arial" panose="020B0604020202020204" pitchFamily="34" charset="0"/>
+              <a:buChar char="•"/>
+              <a:defRPr lang="en-US" sz="1200" kern="1200" dirty="0" smtClean="0">
+                <a:solidFill>
+                  <a:schemeClr val="tx1"/>
+                </a:solidFill>
+                <a:latin typeface="+mn-lt"/>
+                <a:ea typeface="+mn-ea"/>
+                <a:cs typeface="+mn-cs"/>
+              </a:defRPr>
+            </a:lvl7pPr>
+            <a:lvl8pPr marL="2971800" indent="-228600" algn="l" defTabSz="914400" rtl="0" eaLnBrk="1" latinLnBrk="1" hangingPunct="1">
+              <a:lnSpc>
+                <a:spcPct val="150000"/>
+              </a:lnSpc>
+              <a:spcBef>
+                <a:spcPts val="1000"/>
+              </a:spcBef>
+              <a:spcAft>
+                <a:spcPts val="1200"/>
+              </a:spcAft>
+              <a:buFont typeface="Arial" panose="020B0604020202020204" pitchFamily="34" charset="0"/>
+              <a:buChar char="•"/>
+              <a:defRPr lang="en-US" sz="1200" kern="1200" dirty="0" smtClean="0">
+                <a:solidFill>
+                  <a:schemeClr val="tx1"/>
+                </a:solidFill>
+                <a:latin typeface="+mn-lt"/>
+                <a:ea typeface="+mn-ea"/>
+                <a:cs typeface="+mn-cs"/>
+              </a:defRPr>
+            </a:lvl8pPr>
+            <a:lvl9pPr marL="3429000" indent="-228600" algn="l" defTabSz="914400" rtl="0" eaLnBrk="1" latinLnBrk="1" hangingPunct="1">
+              <a:lnSpc>
+                <a:spcPct val="90000"/>
+              </a:lnSpc>
+              <a:spcBef>
+                <a:spcPct val="30000"/>
+              </a:spcBef>
+              <a:buFont typeface="Arial" panose="020B0604020202020204" pitchFamily="34" charset="0"/>
+              <a:buNone/>
+              <a:defRPr sz="1200" kern="1200">
+                <a:solidFill>
+                  <a:schemeClr val="tx1"/>
+                </a:solidFill>
+                <a:latin typeface="+mn-lt"/>
+                <a:ea typeface="+mn-ea"/>
+                <a:cs typeface="+mn-cs"/>
+              </a:defRPr>
+            </a:lvl9pPr>
+          </a:lstStyle>
+          <a:p>
+            <a:r>
+              <a:rPr lang="en-US" altLang="ko-KR" sz="2400" dirty="0">
+                <a:solidFill>
+                  <a:schemeClr val="bg1"/>
+                </a:solidFill>
+                <a:latin typeface="D2Coding" panose="020B0609020101020101" pitchFamily="49" charset="-127"/>
+                <a:ea typeface="D2Coding" panose="020B0609020101020101" pitchFamily="49" charset="-127"/>
+              </a:rPr>
+              <a:t>2026 Fall</a:t>
+            </a:r>
+          </a:p>
+          <a:p>
+            <a:r>
+              <a:rPr lang="ko-KR" altLang="en-US" sz="2400" dirty="0" err="1">
+                <a:solidFill>
+                  <a:schemeClr val="bg1"/>
+                </a:solidFill>
+                <a:latin typeface="D2Coding" panose="020B0609020101020101" pitchFamily="49" charset="-127"/>
+                <a:ea typeface="D2Coding" panose="020B0609020101020101" pitchFamily="49" charset="-127"/>
+              </a:rPr>
+              <a:t>조상구교수</a:t>
+            </a:r>
+            <a:endParaRPr lang="en-US" altLang="ko-KR" sz="2400" dirty="0">
+              <a:solidFill>
+                <a:schemeClr val="bg1"/>
+              </a:solidFill>
+              <a:latin typeface="D2Coding" panose="020B0609020101020101" pitchFamily="49" charset="-127"/>
+              <a:ea typeface="D2Coding" panose="020B0609020101020101" pitchFamily="49" charset="-127"/>
+            </a:endParaRPr>
+          </a:p>
+        </p:txBody>
+      </p:sp>
+    </p:spTree>
+    <p:extLst>
+      <p:ext uri="{BB962C8B-B14F-4D97-AF65-F5344CB8AC3E}">
+        <p14:creationId xmlns:p14="http://schemas.microsoft.com/office/powerpoint/2010/main" val="121836422"/>
+      </p:ext>
+    </p:extLst>
+  </p:cSld>
+  <p:clrMapOvr>
+    <a:masterClrMapping/>
+  </p:clrMapOvr>
+</p:sld>
+</file>
+
+<file path=ppt/slides/slide4.xml><?xml version="1.0" encoding="utf-8"?>
+<p:sld xmlns:a="http://schemas.openxmlformats.org/drawingml/2006/main" xmlns:r="http://schemas.openxmlformats.org/officeDocument/2006/relationships" xmlns:p="http://schemas.openxmlformats.org/presentationml/2006/main">
+  <p:cSld>
+    <p:spTree>
+      <p:nvGrpSpPr>
+        <p:cNvPr id="1" name="">
+          <a:extLst>
+            <a:ext uri="{FF2B5EF4-FFF2-40B4-BE49-F238E27FC236}">
+              <a16:creationId xmlns:a16="http://schemas.microsoft.com/office/drawing/2014/main" id="{B9201801-38E9-1C82-2118-6D80106739EC}"/>
+            </a:ext>
+          </a:extLst>
+        </p:cNvPr>
+        <p:cNvGrpSpPr/>
+        <p:nvPr/>
+      </p:nvGrpSpPr>
+      <p:grpSpPr>
+        <a:xfrm>
+          <a:off x="0" y="0"/>
+          <a:ext cx="0" cy="0"/>
+          <a:chOff x="0" y="0"/>
+          <a:chExt cx="0" cy="0"/>
+        </a:xfrm>
+      </p:grpSpPr>
+      <p:sp>
+        <p:nvSpPr>
+          <p:cNvPr id="4" name="슬라이드 번호 개체 틀 3">
+            <a:extLst>
+              <a:ext uri="{FF2B5EF4-FFF2-40B4-BE49-F238E27FC236}">
+                <a16:creationId xmlns:a16="http://schemas.microsoft.com/office/drawing/2014/main" id="{30EBE383-5F3B-1B62-8A0E-1EA54A3F7764}"/>
+              </a:ext>
+            </a:extLst>
+          </p:cNvPr>
+          <p:cNvSpPr>
+            <a:spLocks noGrp="1"/>
+          </p:cNvSpPr>
+          <p:nvPr>
+            <p:ph type="sldNum" sz="quarter" idx="12"/>
+          </p:nvPr>
+        </p:nvSpPr>
+        <p:spPr>
+          <a:xfrm>
+            <a:off x="10514011" y="6036261"/>
+            <a:ext cx="753545" cy="365125"/>
+          </a:xfrm>
+        </p:spPr>
+        <p:txBody>
+          <a:bodyPr/>
+          <a:lstStyle/>
+          <a:p>
+            <a:fld id="{D57F1E4F-1CFF-5643-939E-217C01CDF565}" type="slidenum">
+              <a:rPr lang="en-US" smtClean="0"/>
+              <a:pPr/>
+              <a:t>4</a:t>
+            </a:fld>
+            <a:endParaRPr lang="en-US" dirty="0"/>
+          </a:p>
+        </p:txBody>
+      </p:sp>
+      <p:sp>
+        <p:nvSpPr>
+          <p:cNvPr id="3" name="제목 1">
+            <a:extLst>
+              <a:ext uri="{FF2B5EF4-FFF2-40B4-BE49-F238E27FC236}">
+                <a16:creationId xmlns:a16="http://schemas.microsoft.com/office/drawing/2014/main" id="{CD27D49A-48A1-ABDE-6217-723B707453A1}"/>
+              </a:ext>
+            </a:extLst>
+          </p:cNvPr>
+          <p:cNvSpPr txBox="1">
+            <a:spLocks/>
+          </p:cNvSpPr>
+          <p:nvPr/>
+        </p:nvSpPr>
+        <p:spPr>
+          <a:xfrm>
+            <a:off x="475645" y="481983"/>
+            <a:ext cx="10353762" cy="766439"/>
+          </a:xfrm>
+          <a:prstGeom prst="rect">
+            <a:avLst/>
+          </a:prstGeom>
+        </p:spPr>
+        <p:txBody>
+          <a:bodyPr vert="horz" lIns="91440" tIns="45720" rIns="91440" bIns="45720" rtlCol="0" anchor="ctr">
+            <a:normAutofit/>
+          </a:bodyPr>
+          <a:lstStyle>
+            <a:lvl1pPr algn="ctr" defTabSz="914400" rtl="0" eaLnBrk="1" latinLnBrk="1" hangingPunct="1">
+              <a:lnSpc>
+                <a:spcPct val="90000"/>
+              </a:lnSpc>
+              <a:spcBef>
+                <a:spcPct val="0"/>
+              </a:spcBef>
+              <a:buNone/>
+              <a:defRPr sz="3200" kern="1200" cap="all" baseline="0">
+                <a:solidFill>
+                  <a:schemeClr val="tx1"/>
+                </a:solidFill>
+                <a:effectLst/>
+                <a:latin typeface="Batang" panose="02030600000101010101" pitchFamily="18" charset="-127"/>
+                <a:ea typeface="Batang" panose="02030600000101010101" pitchFamily="18" charset="-127"/>
+                <a:cs typeface="+mj-cs"/>
+              </a:defRPr>
+            </a:lvl1pPr>
+          </a:lstStyle>
+          <a:p>
+            <a:pPr algn="l"/>
+            <a:r>
+              <a:rPr lang="en-US" altLang="ko-KR" sz="2800" cap="none" dirty="0">
+                <a:solidFill>
+                  <a:schemeClr val="bg2">
+                    <a:lumMod val="25000"/>
+                  </a:schemeClr>
+                </a:solidFill>
+                <a:latin typeface="D2Coding" panose="020B0609020101020101" pitchFamily="49" charset="-127"/>
+                <a:ea typeface="D2Coding" panose="020B0609020101020101" pitchFamily="49" charset="-127"/>
+                <a:cs typeface="Segoe UI Light" panose="020B0502040204020203" pitchFamily="34" charset="0"/>
+              </a:rPr>
+              <a:t>n8n</a:t>
+            </a:r>
+            <a:r>
+              <a:rPr lang="ko-KR" altLang="en-US" sz="2800" cap="none" dirty="0">
+                <a:solidFill>
+                  <a:schemeClr val="bg2">
+                    <a:lumMod val="25000"/>
+                  </a:schemeClr>
+                </a:solidFill>
+                <a:latin typeface="D2Coding" panose="020B0609020101020101" pitchFamily="49" charset="-127"/>
+                <a:ea typeface="D2Coding" panose="020B0609020101020101" pitchFamily="49" charset="-127"/>
+                <a:cs typeface="Segoe UI Light" panose="020B0502040204020203" pitchFamily="34" charset="0"/>
+              </a:rPr>
+              <a:t> </a:t>
+            </a:r>
+            <a:r>
+              <a:rPr lang="en-US" altLang="ko-KR" sz="2800" cap="none" dirty="0">
+                <a:solidFill>
+                  <a:schemeClr val="bg2">
+                    <a:lumMod val="25000"/>
+                  </a:schemeClr>
+                </a:solidFill>
+                <a:latin typeface="D2Coding" panose="020B0609020101020101" pitchFamily="49" charset="-127"/>
+                <a:ea typeface="D2Coding" panose="020B0609020101020101" pitchFamily="49" charset="-127"/>
+                <a:cs typeface="Segoe UI Light" panose="020B0502040204020203" pitchFamily="34" charset="0"/>
+              </a:rPr>
+              <a:t>Local</a:t>
+            </a:r>
+            <a:r>
+              <a:rPr lang="ko-KR" altLang="en-US" sz="2800" cap="none" dirty="0">
+                <a:solidFill>
+                  <a:schemeClr val="bg2">
+                    <a:lumMod val="25000"/>
+                  </a:schemeClr>
+                </a:solidFill>
+                <a:latin typeface="D2Coding" panose="020B0609020101020101" pitchFamily="49" charset="-127"/>
+                <a:ea typeface="D2Coding" panose="020B0609020101020101" pitchFamily="49" charset="-127"/>
+                <a:cs typeface="Segoe UI Light" panose="020B0502040204020203" pitchFamily="34" charset="0"/>
+              </a:rPr>
+              <a:t> </a:t>
+            </a:r>
+            <a:r>
+              <a:rPr lang="en-US" altLang="ko-KR" sz="2800" cap="none" dirty="0">
+                <a:solidFill>
+                  <a:schemeClr val="bg2">
+                    <a:lumMod val="25000"/>
+                  </a:schemeClr>
+                </a:solidFill>
+                <a:latin typeface="D2Coding" panose="020B0609020101020101" pitchFamily="49" charset="-127"/>
+                <a:ea typeface="D2Coding" panose="020B0609020101020101" pitchFamily="49" charset="-127"/>
+                <a:cs typeface="Segoe UI Light" panose="020B0502040204020203" pitchFamily="34" charset="0"/>
+              </a:rPr>
+              <a:t>Server</a:t>
+            </a:r>
+            <a:endParaRPr lang="ko-KR" altLang="en-US" sz="2800" cap="none" dirty="0">
+              <a:solidFill>
+                <a:schemeClr val="bg2">
+                  <a:lumMod val="25000"/>
+                </a:schemeClr>
+              </a:solidFill>
+              <a:latin typeface="D2Coding" panose="020B0609020101020101" pitchFamily="49" charset="-127"/>
+              <a:ea typeface="D2Coding" panose="020B0609020101020101" pitchFamily="49" charset="-127"/>
+              <a:cs typeface="Segoe UI Light" panose="020B0502040204020203" pitchFamily="34" charset="0"/>
+            </a:endParaRPr>
+          </a:p>
+        </p:txBody>
+      </p:sp>
+      <p:sp>
+        <p:nvSpPr>
+          <p:cNvPr id="6" name="TextBox 5">
+            <a:extLst>
+              <a:ext uri="{FF2B5EF4-FFF2-40B4-BE49-F238E27FC236}">
+                <a16:creationId xmlns:a16="http://schemas.microsoft.com/office/drawing/2014/main" id="{947ED8AC-21BD-6160-8144-D8DAB7FB4395}"/>
+              </a:ext>
+            </a:extLst>
+          </p:cNvPr>
+          <p:cNvSpPr txBox="1"/>
+          <p:nvPr/>
+        </p:nvSpPr>
+        <p:spPr>
+          <a:xfrm>
+            <a:off x="663576" y="1789759"/>
+            <a:ext cx="10680699" cy="2846741"/>
+          </a:xfrm>
+          <a:prstGeom prst="rect">
+            <a:avLst/>
+          </a:prstGeom>
+          <a:noFill/>
+        </p:spPr>
+        <p:txBody>
+          <a:bodyPr wrap="square">
+            <a:spAutoFit/>
+          </a:bodyPr>
+          <a:lstStyle/>
+          <a:p>
+            <a:pPr>
+              <a:lnSpc>
+                <a:spcPct val="200000"/>
+              </a:lnSpc>
+            </a:pPr>
+            <a:r>
+              <a:rPr lang="en-US" altLang="ko-KR" sz="2000" dirty="0">
+                <a:latin typeface="D2Coding" panose="020B0609020101020101" pitchFamily="49" charset="-127"/>
+                <a:ea typeface="D2Coding" panose="020B0609020101020101" pitchFamily="49" charset="-127"/>
+              </a:rPr>
+              <a:t>n8n </a:t>
+            </a:r>
+            <a:r>
+              <a:rPr lang="ko-KR" altLang="en-US" sz="2000" dirty="0">
+                <a:latin typeface="D2Coding" panose="020B0609020101020101" pitchFamily="49" charset="-127"/>
+                <a:ea typeface="D2Coding" panose="020B0609020101020101" pitchFamily="49" charset="-127"/>
+              </a:rPr>
+              <a:t>설치 방법</a:t>
+            </a:r>
+            <a:endParaRPr lang="en-US" altLang="ko-KR" sz="2000" dirty="0">
+              <a:latin typeface="D2Coding" panose="020B0609020101020101" pitchFamily="49" charset="-127"/>
+              <a:ea typeface="D2Coding" panose="020B0609020101020101" pitchFamily="49" charset="-127"/>
+            </a:endParaRPr>
+          </a:p>
+          <a:p>
+            <a:pPr marL="285750" indent="-285750">
+              <a:lnSpc>
+                <a:spcPct val="200000"/>
+              </a:lnSpc>
+              <a:buFont typeface="Wingdings" panose="05000000000000000000" pitchFamily="2" charset="2"/>
+              <a:buChar char="v"/>
+            </a:pPr>
+            <a:r>
+              <a:rPr lang="en-US" altLang="ko-KR" dirty="0">
+                <a:latin typeface="D2Coding" panose="020B0609020101020101" pitchFamily="49" charset="-127"/>
+                <a:ea typeface="D2Coding" panose="020B0609020101020101" pitchFamily="49" charset="-127"/>
+                <a:hlinkClick r:id="rId2"/>
+              </a:rPr>
+              <a:t>WSL</a:t>
+            </a:r>
+            <a:r>
+              <a:rPr lang="ko-KR" altLang="en-US" dirty="0">
+                <a:latin typeface="D2Coding" panose="020B0609020101020101" pitchFamily="49" charset="-127"/>
+                <a:ea typeface="D2Coding" panose="020B0609020101020101" pitchFamily="49" charset="-127"/>
+              </a:rPr>
+              <a:t> 설치하고 </a:t>
+            </a:r>
+            <a:r>
+              <a:rPr lang="en-US" altLang="ko-KR" dirty="0" err="1">
+                <a:latin typeface="D2Coding" panose="020B0609020101020101" pitchFamily="49" charset="-127"/>
+                <a:ea typeface="D2Coding" panose="020B0609020101020101" pitchFamily="49" charset="-127"/>
+              </a:rPr>
+              <a:t>Ubutu</a:t>
+            </a:r>
+            <a:r>
+              <a:rPr lang="en-US" altLang="ko-KR" dirty="0">
+                <a:latin typeface="D2Coding" panose="020B0609020101020101" pitchFamily="49" charset="-127"/>
+                <a:ea typeface="D2Coding" panose="020B0609020101020101" pitchFamily="49" charset="-127"/>
+              </a:rPr>
+              <a:t> </a:t>
+            </a:r>
+            <a:r>
+              <a:rPr lang="ko-KR" altLang="en-US" dirty="0">
+                <a:latin typeface="D2Coding" panose="020B0609020101020101" pitchFamily="49" charset="-127"/>
+                <a:ea typeface="D2Coding" panose="020B0609020101020101" pitchFamily="49" charset="-127"/>
+              </a:rPr>
+              <a:t>올리시고</a:t>
+            </a:r>
+            <a:endParaRPr lang="en-US" altLang="ko-KR" dirty="0">
+              <a:latin typeface="D2Coding" panose="020B0609020101020101" pitchFamily="49" charset="-127"/>
+              <a:ea typeface="D2Coding" panose="020B0609020101020101" pitchFamily="49" charset="-127"/>
+            </a:endParaRPr>
+          </a:p>
+          <a:p>
+            <a:pPr marL="285750" indent="-285750">
+              <a:lnSpc>
+                <a:spcPct val="200000"/>
+              </a:lnSpc>
+              <a:buFont typeface="Wingdings" panose="05000000000000000000" pitchFamily="2" charset="2"/>
+              <a:buChar char="v"/>
+            </a:pPr>
+            <a:r>
+              <a:rPr lang="en-US" altLang="ko-KR" dirty="0">
+                <a:latin typeface="D2Coding" panose="020B0609020101020101" pitchFamily="49" charset="-127"/>
+                <a:ea typeface="D2Coding" panose="020B0609020101020101" pitchFamily="49" charset="-127"/>
+                <a:hlinkClick r:id="rId3"/>
+              </a:rPr>
+              <a:t>docker </a:t>
+            </a:r>
+            <a:r>
+              <a:rPr lang="en-US" altLang="ko-KR" dirty="0" err="1">
+                <a:latin typeface="D2Coding" panose="020B0609020101020101" pitchFamily="49" charset="-127"/>
+                <a:ea typeface="D2Coding" panose="020B0609020101020101" pitchFamily="49" charset="-127"/>
+                <a:hlinkClick r:id="rId3"/>
+              </a:rPr>
+              <a:t>desltop</a:t>
+            </a:r>
+            <a:r>
+              <a:rPr lang="ko-KR" altLang="en-US" dirty="0">
+                <a:latin typeface="D2Coding" panose="020B0609020101020101" pitchFamily="49" charset="-127"/>
+                <a:ea typeface="D2Coding" panose="020B0609020101020101" pitchFamily="49" charset="-127"/>
+              </a:rPr>
+              <a:t> 으로 </a:t>
+            </a:r>
+            <a:r>
+              <a:rPr lang="en-US" altLang="ko-KR" dirty="0">
+                <a:latin typeface="D2Coding" panose="020B0609020101020101" pitchFamily="49" charset="-127"/>
+                <a:ea typeface="D2Coding" panose="020B0609020101020101" pitchFamily="49" charset="-127"/>
+              </a:rPr>
+              <a:t>Docker </a:t>
+            </a:r>
+            <a:r>
+              <a:rPr lang="ko-KR" altLang="en-US" dirty="0">
+                <a:latin typeface="D2Coding" panose="020B0609020101020101" pitchFamily="49" charset="-127"/>
+                <a:ea typeface="D2Coding" panose="020B0609020101020101" pitchFamily="49" charset="-127"/>
+              </a:rPr>
+              <a:t>묻고</a:t>
+            </a:r>
+            <a:endParaRPr lang="en-US" altLang="ko-KR" dirty="0">
+              <a:latin typeface="D2Coding" panose="020B0609020101020101" pitchFamily="49" charset="-127"/>
+              <a:ea typeface="D2Coding" panose="020B0609020101020101" pitchFamily="49" charset="-127"/>
+            </a:endParaRPr>
+          </a:p>
+          <a:p>
+            <a:pPr marL="285750" indent="-285750">
+              <a:lnSpc>
+                <a:spcPct val="200000"/>
+              </a:lnSpc>
+              <a:buFont typeface="Wingdings" panose="05000000000000000000" pitchFamily="2" charset="2"/>
+              <a:buChar char="v"/>
+            </a:pPr>
+            <a:r>
+              <a:rPr lang="ko-KR" altLang="en-US" dirty="0">
+                <a:latin typeface="D2Coding" panose="020B0609020101020101" pitchFamily="49" charset="-127"/>
+                <a:ea typeface="D2Coding" panose="020B0609020101020101" pitchFamily="49" charset="-127"/>
+                <a:hlinkClick r:id="rId4"/>
+              </a:rPr>
+              <a:t>자동화 </a:t>
+            </a:r>
+            <a:r>
+              <a:rPr lang="ko-KR" altLang="en-US" dirty="0" err="1">
+                <a:latin typeface="D2Coding" panose="020B0609020101020101" pitchFamily="49" charset="-127"/>
+                <a:ea typeface="D2Coding" panose="020B0609020101020101" pitchFamily="49" charset="-127"/>
+                <a:hlinkClick r:id="rId4"/>
+              </a:rPr>
+              <a:t>끝판왕</a:t>
+            </a:r>
+            <a:r>
+              <a:rPr lang="ko-KR" altLang="en-US" dirty="0">
+                <a:latin typeface="D2Coding" panose="020B0609020101020101" pitchFamily="49" charset="-127"/>
+                <a:ea typeface="D2Coding" panose="020B0609020101020101" pitchFamily="49" charset="-127"/>
+                <a:hlinkClick r:id="rId4"/>
+              </a:rPr>
+              <a:t> </a:t>
+            </a:r>
+            <a:r>
+              <a:rPr lang="en-US" altLang="ko-KR" dirty="0">
+                <a:latin typeface="D2Coding" panose="020B0609020101020101" pitchFamily="49" charset="-127"/>
+                <a:ea typeface="D2Coding" panose="020B0609020101020101" pitchFamily="49" charset="-127"/>
+                <a:hlinkClick r:id="rId4"/>
+              </a:rPr>
+              <a:t>n8n, </a:t>
+            </a:r>
+            <a:r>
+              <a:rPr lang="ko-KR" altLang="en-US" dirty="0">
+                <a:latin typeface="D2Coding" panose="020B0609020101020101" pitchFamily="49" charset="-127"/>
+                <a:ea typeface="D2Coding" panose="020B0609020101020101" pitchFamily="49" charset="-127"/>
+                <a:hlinkClick r:id="rId4"/>
+              </a:rPr>
+              <a:t>이렇게 설치하면 평생 무료입니다</a:t>
+            </a:r>
+            <a:r>
+              <a:rPr lang="en-US" altLang="ko-KR" dirty="0">
+                <a:latin typeface="D2Coding" panose="020B0609020101020101" pitchFamily="49" charset="-127"/>
+                <a:ea typeface="D2Coding" panose="020B0609020101020101" pitchFamily="49" charset="-127"/>
+                <a:hlinkClick r:id="rId4"/>
+              </a:rPr>
+              <a:t>! (</a:t>
+            </a:r>
+            <a:r>
+              <a:rPr lang="ko-KR" altLang="en-US" dirty="0" err="1">
+                <a:latin typeface="D2Coding" panose="020B0609020101020101" pitchFamily="49" charset="-127"/>
+                <a:ea typeface="D2Coding" panose="020B0609020101020101" pitchFamily="49" charset="-127"/>
+                <a:hlinkClick r:id="rId4"/>
+              </a:rPr>
+              <a:t>웹훅</a:t>
+            </a:r>
+            <a:r>
+              <a:rPr lang="ko-KR" altLang="en-US" dirty="0">
+                <a:latin typeface="D2Coding" panose="020B0609020101020101" pitchFamily="49" charset="-127"/>
+                <a:ea typeface="D2Coding" panose="020B0609020101020101" pitchFamily="49" charset="-127"/>
+                <a:hlinkClick r:id="rId4"/>
+              </a:rPr>
+              <a:t> 설정</a:t>
+            </a:r>
+            <a:r>
+              <a:rPr lang="en-US" altLang="ko-KR" dirty="0">
+                <a:latin typeface="D2Coding" panose="020B0609020101020101" pitchFamily="49" charset="-127"/>
+                <a:ea typeface="D2Coding" panose="020B0609020101020101" pitchFamily="49" charset="-127"/>
+                <a:hlinkClick r:id="rId4"/>
+              </a:rPr>
+              <a:t>, </a:t>
+            </a:r>
+            <a:r>
+              <a:rPr lang="ko-KR" altLang="en-US" dirty="0">
+                <a:latin typeface="D2Coding" panose="020B0609020101020101" pitchFamily="49" charset="-127"/>
+                <a:ea typeface="D2Coding" panose="020B0609020101020101" pitchFamily="49" charset="-127"/>
+                <a:hlinkClick r:id="rId4"/>
+              </a:rPr>
+              <a:t>버전 업데이트 포함</a:t>
+            </a:r>
+            <a:r>
+              <a:rPr lang="en-US" altLang="ko-KR" dirty="0">
+                <a:latin typeface="D2Coding" panose="020B0609020101020101" pitchFamily="49" charset="-127"/>
+                <a:ea typeface="D2Coding" panose="020B0609020101020101" pitchFamily="49" charset="-127"/>
+                <a:hlinkClick r:id="rId4"/>
+              </a:rPr>
+              <a:t>)</a:t>
+            </a:r>
+            <a:r>
+              <a:rPr lang="ko-KR" altLang="en-US" dirty="0">
+                <a:latin typeface="D2Coding" panose="020B0609020101020101" pitchFamily="49" charset="-127"/>
+                <a:ea typeface="D2Coding" panose="020B0609020101020101" pitchFamily="49" charset="-127"/>
+              </a:rPr>
+              <a:t> 보시고 따라해서 </a:t>
+            </a:r>
+            <a:r>
+              <a:rPr lang="en-US" altLang="ko-KR" dirty="0">
+                <a:latin typeface="D2Coding" panose="020B0609020101020101" pitchFamily="49" charset="-127"/>
+                <a:ea typeface="D2Coding" panose="020B0609020101020101" pitchFamily="49" charset="-127"/>
+              </a:rPr>
+              <a:t>n8n </a:t>
+            </a:r>
+            <a:r>
+              <a:rPr lang="ko-KR" altLang="en-US" dirty="0">
+                <a:latin typeface="D2Coding" panose="020B0609020101020101" pitchFamily="49" charset="-127"/>
+                <a:ea typeface="D2Coding" panose="020B0609020101020101" pitchFamily="49" charset="-127"/>
+              </a:rPr>
+              <a:t>로컬에 설치</a:t>
+            </a:r>
+            <a:endParaRPr lang="en-US" altLang="ko-KR" dirty="0">
+              <a:latin typeface="D2Coding" panose="020B0609020101020101" pitchFamily="49" charset="-127"/>
+              <a:ea typeface="D2Coding" panose="020B0609020101020101" pitchFamily="49" charset="-127"/>
+            </a:endParaRPr>
+          </a:p>
+        </p:txBody>
+      </p:sp>
+    </p:spTree>
+    <p:extLst>
+      <p:ext uri="{BB962C8B-B14F-4D97-AF65-F5344CB8AC3E}">
+        <p14:creationId xmlns:p14="http://schemas.microsoft.com/office/powerpoint/2010/main" val="457506288"/>
+      </p:ext>
+    </p:extLst>
+  </p:cSld>
+  <p:clrMapOvr>
+    <a:masterClrMapping/>
+  </p:clrMapOvr>
+</p:sld>
+</file>
+
+<file path=ppt/slides/slide40.xml><?xml version="1.0" encoding="utf-8"?>
 <p:sld xmlns:a="http://schemas.openxmlformats.org/drawingml/2006/main" xmlns:r="http://schemas.openxmlformats.org/officeDocument/2006/relationships" xmlns:p="http://schemas.openxmlformats.org/presentationml/2006/main">
   <p:cSld>
     <p:spTree>
@@ -14836,7 +19197,7 @@
                 <a:ea typeface="Segoe UI Emoji" panose="020B0502040204020203" pitchFamily="34" charset="0"/>
               </a:rPr>
               <a:pPr/>
-              <a:t>33</a:t>
+              <a:t>40</a:t>
             </a:fld>
             <a:endParaRPr lang="en-US" b="1" dirty="0">
               <a:latin typeface="Segoe UI Emoji" panose="020B0502040204020203" pitchFamily="34" charset="0"/>
@@ -14858,7 +19219,7 @@
 </p:sld>
 </file>
 
-<file path=ppt/slides/slide34.xml><?xml version="1.0" encoding="utf-8"?>
+<file path=ppt/slides/slide41.xml><?xml version="1.0" encoding="utf-8"?>
 <p:sld xmlns:a="http://schemas.openxmlformats.org/drawingml/2006/main" xmlns:r="http://schemas.openxmlformats.org/officeDocument/2006/relationships" xmlns:p="http://schemas.openxmlformats.org/presentationml/2006/main">
   <p:cSld>
     <p:spTree>
@@ -15640,7 +20001,7 @@
                 <a:ea typeface="Segoe UI Emoji" panose="020B0502040204020203" pitchFamily="34" charset="0"/>
               </a:rPr>
               <a:pPr/>
-              <a:t>34</a:t>
+              <a:t>41</a:t>
             </a:fld>
             <a:endParaRPr lang="en-US" b="1" dirty="0">
               <a:latin typeface="Segoe UI Emoji" panose="020B0502040204020203" pitchFamily="34" charset="0"/>
@@ -15662,7 +20023,7 @@
 </p:sld>
 </file>
 
-<file path=ppt/slides/slide35.xml><?xml version="1.0" encoding="utf-8"?>
+<file path=ppt/slides/slide42.xml><?xml version="1.0" encoding="utf-8"?>
 <p:sld xmlns:a="http://schemas.openxmlformats.org/drawingml/2006/main" xmlns:r="http://schemas.openxmlformats.org/officeDocument/2006/relationships" xmlns:p="http://schemas.openxmlformats.org/presentationml/2006/main">
   <p:cSld>
     <p:spTree>
@@ -15950,7 +20311,7 @@
                 <a:ea typeface="Segoe UI Emoji" panose="020B0502040204020203" pitchFamily="34" charset="0"/>
               </a:rPr>
               <a:pPr/>
-              <a:t>35</a:t>
+              <a:t>42</a:t>
             </a:fld>
             <a:endParaRPr lang="en-US" b="1" dirty="0">
               <a:latin typeface="Segoe UI Emoji" panose="020B0502040204020203" pitchFamily="34" charset="0"/>
@@ -16272,479 +20633,6 @@
     <p:extLst>
       <p:ext uri="{BB962C8B-B14F-4D97-AF65-F5344CB8AC3E}">
         <p14:creationId xmlns:p14="http://schemas.microsoft.com/office/powerpoint/2010/main" val="2376038903"/>
-      </p:ext>
-    </p:extLst>
-  </p:cSld>
-  <p:clrMapOvr>
-    <a:masterClrMapping/>
-  </p:clrMapOvr>
-</p:sld>
-</file>
-
-<file path=ppt/slides/slide4.xml><?xml version="1.0" encoding="utf-8"?>
-<p:sld xmlns:a="http://schemas.openxmlformats.org/drawingml/2006/main" xmlns:r="http://schemas.openxmlformats.org/officeDocument/2006/relationships" xmlns:p="http://schemas.openxmlformats.org/presentationml/2006/main">
-  <p:cSld>
-    <p:spTree>
-      <p:nvGrpSpPr>
-        <p:cNvPr id="1" name="">
-          <a:extLst>
-            <a:ext uri="{FF2B5EF4-FFF2-40B4-BE49-F238E27FC236}">
-              <a16:creationId xmlns:a16="http://schemas.microsoft.com/office/drawing/2014/main" id="{B9201801-38E9-1C82-2118-6D80106739EC}"/>
-            </a:ext>
-          </a:extLst>
-        </p:cNvPr>
-        <p:cNvGrpSpPr/>
-        <p:nvPr/>
-      </p:nvGrpSpPr>
-      <p:grpSpPr>
-        <a:xfrm>
-          <a:off x="0" y="0"/>
-          <a:ext cx="0" cy="0"/>
-          <a:chOff x="0" y="0"/>
-          <a:chExt cx="0" cy="0"/>
-        </a:xfrm>
-      </p:grpSpPr>
-      <p:sp>
-        <p:nvSpPr>
-          <p:cNvPr id="4" name="슬라이드 번호 개체 틀 3">
-            <a:extLst>
-              <a:ext uri="{FF2B5EF4-FFF2-40B4-BE49-F238E27FC236}">
-                <a16:creationId xmlns:a16="http://schemas.microsoft.com/office/drawing/2014/main" id="{30EBE383-5F3B-1B62-8A0E-1EA54A3F7764}"/>
-              </a:ext>
-            </a:extLst>
-          </p:cNvPr>
-          <p:cNvSpPr>
-            <a:spLocks noGrp="1"/>
-          </p:cNvSpPr>
-          <p:nvPr>
-            <p:ph type="sldNum" sz="quarter" idx="12"/>
-          </p:nvPr>
-        </p:nvSpPr>
-        <p:spPr>
-          <a:xfrm>
-            <a:off x="10514011" y="6036261"/>
-            <a:ext cx="753545" cy="365125"/>
-          </a:xfrm>
-        </p:spPr>
-        <p:txBody>
-          <a:bodyPr/>
-          <a:lstStyle/>
-          <a:p>
-            <a:fld id="{D57F1E4F-1CFF-5643-939E-217C01CDF565}" type="slidenum">
-              <a:rPr lang="en-US" smtClean="0"/>
-              <a:pPr/>
-              <a:t>4</a:t>
-            </a:fld>
-            <a:endParaRPr lang="en-US" dirty="0"/>
-          </a:p>
-        </p:txBody>
-      </p:sp>
-      <p:sp>
-        <p:nvSpPr>
-          <p:cNvPr id="3" name="제목 1">
-            <a:extLst>
-              <a:ext uri="{FF2B5EF4-FFF2-40B4-BE49-F238E27FC236}">
-                <a16:creationId xmlns:a16="http://schemas.microsoft.com/office/drawing/2014/main" id="{CD27D49A-48A1-ABDE-6217-723B707453A1}"/>
-              </a:ext>
-            </a:extLst>
-          </p:cNvPr>
-          <p:cNvSpPr txBox="1">
-            <a:spLocks/>
-          </p:cNvSpPr>
-          <p:nvPr/>
-        </p:nvSpPr>
-        <p:spPr>
-          <a:xfrm>
-            <a:off x="475645" y="481983"/>
-            <a:ext cx="10353762" cy="766439"/>
-          </a:xfrm>
-          <a:prstGeom prst="rect">
-            <a:avLst/>
-          </a:prstGeom>
-        </p:spPr>
-        <p:txBody>
-          <a:bodyPr vert="horz" lIns="91440" tIns="45720" rIns="91440" bIns="45720" rtlCol="0" anchor="ctr">
-            <a:normAutofit/>
-          </a:bodyPr>
-          <a:lstStyle>
-            <a:lvl1pPr algn="ctr" defTabSz="914400" rtl="0" eaLnBrk="1" latinLnBrk="1" hangingPunct="1">
-              <a:lnSpc>
-                <a:spcPct val="90000"/>
-              </a:lnSpc>
-              <a:spcBef>
-                <a:spcPct val="0"/>
-              </a:spcBef>
-              <a:buNone/>
-              <a:defRPr sz="3200" kern="1200" cap="all" baseline="0">
-                <a:solidFill>
-                  <a:schemeClr val="tx1"/>
-                </a:solidFill>
-                <a:effectLst/>
-                <a:latin typeface="Batang" panose="02030600000101010101" pitchFamily="18" charset="-127"/>
-                <a:ea typeface="Batang" panose="02030600000101010101" pitchFamily="18" charset="-127"/>
-                <a:cs typeface="+mj-cs"/>
-              </a:defRPr>
-            </a:lvl1pPr>
-          </a:lstStyle>
-          <a:p>
-            <a:pPr algn="l"/>
-            <a:r>
-              <a:rPr lang="en-US" altLang="ko-KR" sz="2800" cap="none" dirty="0">
-                <a:solidFill>
-                  <a:schemeClr val="bg2">
-                    <a:lumMod val="25000"/>
-                  </a:schemeClr>
-                </a:solidFill>
-                <a:latin typeface="D2Coding" panose="020B0609020101020101" pitchFamily="49" charset="-127"/>
-                <a:ea typeface="D2Coding" panose="020B0609020101020101" pitchFamily="49" charset="-127"/>
-                <a:cs typeface="Segoe UI Light" panose="020B0502040204020203" pitchFamily="34" charset="0"/>
-              </a:rPr>
-              <a:t>n8n</a:t>
-            </a:r>
-            <a:r>
-              <a:rPr lang="ko-KR" altLang="en-US" sz="2800" cap="none" dirty="0">
-                <a:solidFill>
-                  <a:schemeClr val="bg2">
-                    <a:lumMod val="25000"/>
-                  </a:schemeClr>
-                </a:solidFill>
-                <a:latin typeface="D2Coding" panose="020B0609020101020101" pitchFamily="49" charset="-127"/>
-                <a:ea typeface="D2Coding" panose="020B0609020101020101" pitchFamily="49" charset="-127"/>
-                <a:cs typeface="Segoe UI Light" panose="020B0502040204020203" pitchFamily="34" charset="0"/>
-              </a:rPr>
-              <a:t> </a:t>
-            </a:r>
-            <a:r>
-              <a:rPr lang="en-US" altLang="ko-KR" sz="2800" cap="none" dirty="0">
-                <a:solidFill>
-                  <a:schemeClr val="bg2">
-                    <a:lumMod val="25000"/>
-                  </a:schemeClr>
-                </a:solidFill>
-                <a:latin typeface="D2Coding" panose="020B0609020101020101" pitchFamily="49" charset="-127"/>
-                <a:ea typeface="D2Coding" panose="020B0609020101020101" pitchFamily="49" charset="-127"/>
-                <a:cs typeface="Segoe UI Light" panose="020B0502040204020203" pitchFamily="34" charset="0"/>
-              </a:rPr>
-              <a:t>Local</a:t>
-            </a:r>
-            <a:r>
-              <a:rPr lang="ko-KR" altLang="en-US" sz="2800" cap="none" dirty="0">
-                <a:solidFill>
-                  <a:schemeClr val="bg2">
-                    <a:lumMod val="25000"/>
-                  </a:schemeClr>
-                </a:solidFill>
-                <a:latin typeface="D2Coding" panose="020B0609020101020101" pitchFamily="49" charset="-127"/>
-                <a:ea typeface="D2Coding" panose="020B0609020101020101" pitchFamily="49" charset="-127"/>
-                <a:cs typeface="Segoe UI Light" panose="020B0502040204020203" pitchFamily="34" charset="0"/>
-              </a:rPr>
-              <a:t> </a:t>
-            </a:r>
-            <a:r>
-              <a:rPr lang="en-US" altLang="ko-KR" sz="2800" cap="none" dirty="0">
-                <a:solidFill>
-                  <a:schemeClr val="bg2">
-                    <a:lumMod val="25000"/>
-                  </a:schemeClr>
-                </a:solidFill>
-                <a:latin typeface="D2Coding" panose="020B0609020101020101" pitchFamily="49" charset="-127"/>
-                <a:ea typeface="D2Coding" panose="020B0609020101020101" pitchFamily="49" charset="-127"/>
-                <a:cs typeface="Segoe UI Light" panose="020B0502040204020203" pitchFamily="34" charset="0"/>
-              </a:rPr>
-              <a:t>Server</a:t>
-            </a:r>
-            <a:endParaRPr lang="ko-KR" altLang="en-US" sz="2800" cap="none" dirty="0">
-              <a:solidFill>
-                <a:schemeClr val="bg2">
-                  <a:lumMod val="25000"/>
-                </a:schemeClr>
-              </a:solidFill>
-              <a:latin typeface="D2Coding" panose="020B0609020101020101" pitchFamily="49" charset="-127"/>
-              <a:ea typeface="D2Coding" panose="020B0609020101020101" pitchFamily="49" charset="-127"/>
-              <a:cs typeface="Segoe UI Light" panose="020B0502040204020203" pitchFamily="34" charset="0"/>
-            </a:endParaRPr>
-          </a:p>
-        </p:txBody>
-      </p:sp>
-      <p:sp>
-        <p:nvSpPr>
-          <p:cNvPr id="6" name="TextBox 5">
-            <a:extLst>
-              <a:ext uri="{FF2B5EF4-FFF2-40B4-BE49-F238E27FC236}">
-                <a16:creationId xmlns:a16="http://schemas.microsoft.com/office/drawing/2014/main" id="{947ED8AC-21BD-6160-8144-D8DAB7FB4395}"/>
-              </a:ext>
-            </a:extLst>
-          </p:cNvPr>
-          <p:cNvSpPr txBox="1"/>
-          <p:nvPr/>
-        </p:nvSpPr>
-        <p:spPr>
-          <a:xfrm>
-            <a:off x="663576" y="1789759"/>
-            <a:ext cx="10680699" cy="2846741"/>
-          </a:xfrm>
-          <a:prstGeom prst="rect">
-            <a:avLst/>
-          </a:prstGeom>
-          <a:noFill/>
-        </p:spPr>
-        <p:txBody>
-          <a:bodyPr wrap="square">
-            <a:spAutoFit/>
-          </a:bodyPr>
-          <a:lstStyle/>
-          <a:p>
-            <a:pPr>
-              <a:lnSpc>
-                <a:spcPct val="200000"/>
-              </a:lnSpc>
-            </a:pPr>
-            <a:r>
-              <a:rPr lang="en-US" altLang="ko-KR" sz="2000" dirty="0">
-                <a:latin typeface="D2Coding" panose="020B0609020101020101" pitchFamily="49" charset="-127"/>
-                <a:ea typeface="D2Coding" panose="020B0609020101020101" pitchFamily="49" charset="-127"/>
-              </a:rPr>
-              <a:t>n8n </a:t>
-            </a:r>
-            <a:r>
-              <a:rPr lang="ko-KR" altLang="en-US" sz="2000" dirty="0">
-                <a:latin typeface="D2Coding" panose="020B0609020101020101" pitchFamily="49" charset="-127"/>
-                <a:ea typeface="D2Coding" panose="020B0609020101020101" pitchFamily="49" charset="-127"/>
-              </a:rPr>
-              <a:t>설치 방법</a:t>
-            </a:r>
-            <a:endParaRPr lang="en-US" altLang="ko-KR" sz="2000" dirty="0">
-              <a:latin typeface="D2Coding" panose="020B0609020101020101" pitchFamily="49" charset="-127"/>
-              <a:ea typeface="D2Coding" panose="020B0609020101020101" pitchFamily="49" charset="-127"/>
-            </a:endParaRPr>
-          </a:p>
-          <a:p>
-            <a:pPr marL="285750" indent="-285750">
-              <a:lnSpc>
-                <a:spcPct val="200000"/>
-              </a:lnSpc>
-              <a:buFont typeface="Wingdings" panose="05000000000000000000" pitchFamily="2" charset="2"/>
-              <a:buChar char="v"/>
-            </a:pPr>
-            <a:r>
-              <a:rPr lang="en-US" altLang="ko-KR" dirty="0">
-                <a:latin typeface="D2Coding" panose="020B0609020101020101" pitchFamily="49" charset="-127"/>
-                <a:ea typeface="D2Coding" panose="020B0609020101020101" pitchFamily="49" charset="-127"/>
-                <a:hlinkClick r:id="rId2"/>
-              </a:rPr>
-              <a:t>WSL</a:t>
-            </a:r>
-            <a:r>
-              <a:rPr lang="ko-KR" altLang="en-US" dirty="0">
-                <a:latin typeface="D2Coding" panose="020B0609020101020101" pitchFamily="49" charset="-127"/>
-                <a:ea typeface="D2Coding" panose="020B0609020101020101" pitchFamily="49" charset="-127"/>
-              </a:rPr>
-              <a:t> 설치하고 </a:t>
-            </a:r>
-            <a:r>
-              <a:rPr lang="en-US" altLang="ko-KR" dirty="0" err="1">
-                <a:latin typeface="D2Coding" panose="020B0609020101020101" pitchFamily="49" charset="-127"/>
-                <a:ea typeface="D2Coding" panose="020B0609020101020101" pitchFamily="49" charset="-127"/>
-              </a:rPr>
-              <a:t>Ubutu</a:t>
-            </a:r>
-            <a:r>
-              <a:rPr lang="en-US" altLang="ko-KR" dirty="0">
-                <a:latin typeface="D2Coding" panose="020B0609020101020101" pitchFamily="49" charset="-127"/>
-                <a:ea typeface="D2Coding" panose="020B0609020101020101" pitchFamily="49" charset="-127"/>
-              </a:rPr>
-              <a:t> </a:t>
-            </a:r>
-            <a:r>
-              <a:rPr lang="ko-KR" altLang="en-US" dirty="0">
-                <a:latin typeface="D2Coding" panose="020B0609020101020101" pitchFamily="49" charset="-127"/>
-                <a:ea typeface="D2Coding" panose="020B0609020101020101" pitchFamily="49" charset="-127"/>
-              </a:rPr>
-              <a:t>올리시고</a:t>
-            </a:r>
-            <a:endParaRPr lang="en-US" altLang="ko-KR" dirty="0">
-              <a:latin typeface="D2Coding" panose="020B0609020101020101" pitchFamily="49" charset="-127"/>
-              <a:ea typeface="D2Coding" panose="020B0609020101020101" pitchFamily="49" charset="-127"/>
-            </a:endParaRPr>
-          </a:p>
-          <a:p>
-            <a:pPr marL="285750" indent="-285750">
-              <a:lnSpc>
-                <a:spcPct val="200000"/>
-              </a:lnSpc>
-              <a:buFont typeface="Wingdings" panose="05000000000000000000" pitchFamily="2" charset="2"/>
-              <a:buChar char="v"/>
-            </a:pPr>
-            <a:r>
-              <a:rPr lang="en-US" altLang="ko-KR" dirty="0">
-                <a:latin typeface="D2Coding" panose="020B0609020101020101" pitchFamily="49" charset="-127"/>
-                <a:ea typeface="D2Coding" panose="020B0609020101020101" pitchFamily="49" charset="-127"/>
-                <a:hlinkClick r:id="rId3"/>
-              </a:rPr>
-              <a:t>docker </a:t>
-            </a:r>
-            <a:r>
-              <a:rPr lang="en-US" altLang="ko-KR" dirty="0" err="1">
-                <a:latin typeface="D2Coding" panose="020B0609020101020101" pitchFamily="49" charset="-127"/>
-                <a:ea typeface="D2Coding" panose="020B0609020101020101" pitchFamily="49" charset="-127"/>
-                <a:hlinkClick r:id="rId3"/>
-              </a:rPr>
-              <a:t>desltop</a:t>
-            </a:r>
-            <a:r>
-              <a:rPr lang="ko-KR" altLang="en-US" dirty="0">
-                <a:latin typeface="D2Coding" panose="020B0609020101020101" pitchFamily="49" charset="-127"/>
-                <a:ea typeface="D2Coding" panose="020B0609020101020101" pitchFamily="49" charset="-127"/>
-              </a:rPr>
-              <a:t> 으로 </a:t>
-            </a:r>
-            <a:r>
-              <a:rPr lang="en-US" altLang="ko-KR" dirty="0">
-                <a:latin typeface="D2Coding" panose="020B0609020101020101" pitchFamily="49" charset="-127"/>
-                <a:ea typeface="D2Coding" panose="020B0609020101020101" pitchFamily="49" charset="-127"/>
-              </a:rPr>
-              <a:t>Docker </a:t>
-            </a:r>
-            <a:r>
-              <a:rPr lang="ko-KR" altLang="en-US" dirty="0">
-                <a:latin typeface="D2Coding" panose="020B0609020101020101" pitchFamily="49" charset="-127"/>
-                <a:ea typeface="D2Coding" panose="020B0609020101020101" pitchFamily="49" charset="-127"/>
-              </a:rPr>
-              <a:t>묻고</a:t>
-            </a:r>
-            <a:endParaRPr lang="en-US" altLang="ko-KR" dirty="0">
-              <a:latin typeface="D2Coding" panose="020B0609020101020101" pitchFamily="49" charset="-127"/>
-              <a:ea typeface="D2Coding" panose="020B0609020101020101" pitchFamily="49" charset="-127"/>
-            </a:endParaRPr>
-          </a:p>
-          <a:p>
-            <a:pPr marL="285750" indent="-285750">
-              <a:lnSpc>
-                <a:spcPct val="200000"/>
-              </a:lnSpc>
-              <a:buFont typeface="Wingdings" panose="05000000000000000000" pitchFamily="2" charset="2"/>
-              <a:buChar char="v"/>
-            </a:pPr>
-            <a:r>
-              <a:rPr lang="ko-KR" altLang="en-US" dirty="0">
-                <a:latin typeface="D2Coding" panose="020B0609020101020101" pitchFamily="49" charset="-127"/>
-                <a:ea typeface="D2Coding" panose="020B0609020101020101" pitchFamily="49" charset="-127"/>
-                <a:hlinkClick r:id="rId4"/>
-              </a:rPr>
-              <a:t>자동화 </a:t>
-            </a:r>
-            <a:r>
-              <a:rPr lang="ko-KR" altLang="en-US" dirty="0" err="1">
-                <a:latin typeface="D2Coding" panose="020B0609020101020101" pitchFamily="49" charset="-127"/>
-                <a:ea typeface="D2Coding" panose="020B0609020101020101" pitchFamily="49" charset="-127"/>
-                <a:hlinkClick r:id="rId4"/>
-              </a:rPr>
-              <a:t>끝판왕</a:t>
-            </a:r>
-            <a:r>
-              <a:rPr lang="ko-KR" altLang="en-US" dirty="0">
-                <a:latin typeface="D2Coding" panose="020B0609020101020101" pitchFamily="49" charset="-127"/>
-                <a:ea typeface="D2Coding" panose="020B0609020101020101" pitchFamily="49" charset="-127"/>
-                <a:hlinkClick r:id="rId4"/>
-              </a:rPr>
-              <a:t> </a:t>
-            </a:r>
-            <a:r>
-              <a:rPr lang="en-US" altLang="ko-KR" dirty="0">
-                <a:latin typeface="D2Coding" panose="020B0609020101020101" pitchFamily="49" charset="-127"/>
-                <a:ea typeface="D2Coding" panose="020B0609020101020101" pitchFamily="49" charset="-127"/>
-                <a:hlinkClick r:id="rId4"/>
-              </a:rPr>
-              <a:t>n8n, </a:t>
-            </a:r>
-            <a:r>
-              <a:rPr lang="ko-KR" altLang="en-US" dirty="0">
-                <a:latin typeface="D2Coding" panose="020B0609020101020101" pitchFamily="49" charset="-127"/>
-                <a:ea typeface="D2Coding" panose="020B0609020101020101" pitchFamily="49" charset="-127"/>
-                <a:hlinkClick r:id="rId4"/>
-              </a:rPr>
-              <a:t>이렇게 설치하면 평생 무료입니다</a:t>
-            </a:r>
-            <a:r>
-              <a:rPr lang="en-US" altLang="ko-KR" dirty="0">
-                <a:latin typeface="D2Coding" panose="020B0609020101020101" pitchFamily="49" charset="-127"/>
-                <a:ea typeface="D2Coding" panose="020B0609020101020101" pitchFamily="49" charset="-127"/>
-                <a:hlinkClick r:id="rId4"/>
-              </a:rPr>
-              <a:t>! (</a:t>
-            </a:r>
-            <a:r>
-              <a:rPr lang="ko-KR" altLang="en-US" dirty="0" err="1">
-                <a:latin typeface="D2Coding" panose="020B0609020101020101" pitchFamily="49" charset="-127"/>
-                <a:ea typeface="D2Coding" panose="020B0609020101020101" pitchFamily="49" charset="-127"/>
-                <a:hlinkClick r:id="rId4"/>
-              </a:rPr>
-              <a:t>웹훅</a:t>
-            </a:r>
-            <a:r>
-              <a:rPr lang="ko-KR" altLang="en-US" dirty="0">
-                <a:latin typeface="D2Coding" panose="020B0609020101020101" pitchFamily="49" charset="-127"/>
-                <a:ea typeface="D2Coding" panose="020B0609020101020101" pitchFamily="49" charset="-127"/>
-                <a:hlinkClick r:id="rId4"/>
-              </a:rPr>
-              <a:t> 설정</a:t>
-            </a:r>
-            <a:r>
-              <a:rPr lang="en-US" altLang="ko-KR" dirty="0">
-                <a:latin typeface="D2Coding" panose="020B0609020101020101" pitchFamily="49" charset="-127"/>
-                <a:ea typeface="D2Coding" panose="020B0609020101020101" pitchFamily="49" charset="-127"/>
-                <a:hlinkClick r:id="rId4"/>
-              </a:rPr>
-              <a:t>, </a:t>
-            </a:r>
-            <a:r>
-              <a:rPr lang="ko-KR" altLang="en-US" dirty="0">
-                <a:latin typeface="D2Coding" panose="020B0609020101020101" pitchFamily="49" charset="-127"/>
-                <a:ea typeface="D2Coding" panose="020B0609020101020101" pitchFamily="49" charset="-127"/>
-                <a:hlinkClick r:id="rId4"/>
-              </a:rPr>
-              <a:t>버전 업데이트 포함</a:t>
-            </a:r>
-            <a:r>
-              <a:rPr lang="en-US" altLang="ko-KR" dirty="0">
-                <a:latin typeface="D2Coding" panose="020B0609020101020101" pitchFamily="49" charset="-127"/>
-                <a:ea typeface="D2Coding" panose="020B0609020101020101" pitchFamily="49" charset="-127"/>
-                <a:hlinkClick r:id="rId4"/>
-              </a:rPr>
-              <a:t>)</a:t>
-            </a:r>
-            <a:r>
-              <a:rPr lang="ko-KR" altLang="en-US" dirty="0">
-                <a:latin typeface="D2Coding" panose="020B0609020101020101" pitchFamily="49" charset="-127"/>
-                <a:ea typeface="D2Coding" panose="020B0609020101020101" pitchFamily="49" charset="-127"/>
-              </a:rPr>
-              <a:t> 보시고 따라해서 </a:t>
-            </a:r>
-            <a:r>
-              <a:rPr lang="en-US" altLang="ko-KR" dirty="0">
-                <a:latin typeface="D2Coding" panose="020B0609020101020101" pitchFamily="49" charset="-127"/>
-                <a:ea typeface="D2Coding" panose="020B0609020101020101" pitchFamily="49" charset="-127"/>
-              </a:rPr>
-              <a:t>n8n </a:t>
-            </a:r>
-            <a:r>
-              <a:rPr lang="ko-KR" altLang="en-US" dirty="0">
-                <a:latin typeface="D2Coding" panose="020B0609020101020101" pitchFamily="49" charset="-127"/>
-                <a:ea typeface="D2Coding" panose="020B0609020101020101" pitchFamily="49" charset="-127"/>
-              </a:rPr>
-              <a:t>로컬에 설치</a:t>
-            </a:r>
-            <a:endParaRPr lang="en-US" altLang="ko-KR" dirty="0">
-              <a:latin typeface="D2Coding" panose="020B0609020101020101" pitchFamily="49" charset="-127"/>
-              <a:ea typeface="D2Coding" panose="020B0609020101020101" pitchFamily="49" charset="-127"/>
-            </a:endParaRPr>
-          </a:p>
-        </p:txBody>
-      </p:sp>
-    </p:spTree>
-    <p:extLst>
-      <p:ext uri="{BB962C8B-B14F-4D97-AF65-F5344CB8AC3E}">
-        <p14:creationId xmlns:p14="http://schemas.microsoft.com/office/powerpoint/2010/main" val="457506288"/>
       </p:ext>
     </p:extLst>
   </p:cSld>

--- a/PPTs/04_AI Workflow_n8n.pptx
+++ b/PPTs/04_AI Workflow_n8n.pptx
@@ -5,10 +5,10 @@
     <p:sldMasterId id="2147483660" r:id="rId1"/>
   </p:sldMasterIdLst>
   <p:notesMasterIdLst>
-    <p:notesMasterId r:id="rId44"/>
+    <p:notesMasterId r:id="rId49"/>
   </p:notesMasterIdLst>
   <p:handoutMasterIdLst>
-    <p:handoutMasterId r:id="rId45"/>
+    <p:handoutMasterId r:id="rId50"/>
   </p:handoutMasterIdLst>
   <p:sldIdLst>
     <p:sldId id="256" r:id="rId2"/>
@@ -48,11 +48,16 @@
     <p:sldId id="1253" r:id="rId36"/>
     <p:sldId id="1254" r:id="rId37"/>
     <p:sldId id="1255" r:id="rId38"/>
-    <p:sldId id="1256" r:id="rId39"/>
-    <p:sldId id="1251" r:id="rId40"/>
-    <p:sldId id="1138" r:id="rId41"/>
-    <p:sldId id="1143" r:id="rId42"/>
-    <p:sldId id="1139" r:id="rId43"/>
+    <p:sldId id="1261" r:id="rId39"/>
+    <p:sldId id="1257" r:id="rId40"/>
+    <p:sldId id="1259" r:id="rId41"/>
+    <p:sldId id="1258" r:id="rId42"/>
+    <p:sldId id="1260" r:id="rId43"/>
+    <p:sldId id="1256" r:id="rId44"/>
+    <p:sldId id="1251" r:id="rId45"/>
+    <p:sldId id="1138" r:id="rId46"/>
+    <p:sldId id="1143" r:id="rId47"/>
+    <p:sldId id="1139" r:id="rId48"/>
   </p:sldIdLst>
   <p:sldSz cx="12192000" cy="6858000"/>
   <p:notesSz cx="6858000" cy="9144000"/>
@@ -197,6 +202,11 @@
             <p14:sldId id="1253"/>
             <p14:sldId id="1254"/>
             <p14:sldId id="1255"/>
+            <p14:sldId id="1261"/>
+            <p14:sldId id="1257"/>
+            <p14:sldId id="1259"/>
+            <p14:sldId id="1258"/>
+            <p14:sldId id="1260"/>
             <p14:sldId id="1256"/>
             <p14:sldId id="1251"/>
             <p14:sldId id="1138"/>
@@ -1490,7 +1500,7 @@
                 <a:latin typeface="맑은 고딕" panose="020B0503020000020004" pitchFamily="50" charset="-127"/>
                 <a:ea typeface="맑은 고딕" panose="020B0503020000020004" pitchFamily="50" charset="-127"/>
               </a:rPr>
-              <a:t>39</a:t>
+              <a:t>44</a:t>
             </a:fld>
             <a:endParaRPr lang="ko-KR" altLang="en-US">
               <a:latin typeface="맑은 고딕" panose="020B0503020000020004" pitchFamily="50" charset="-127"/>
@@ -16659,7 +16669,7 @@
         <p:spPr>
           <a:xfrm>
             <a:off x="591620" y="1248422"/>
-            <a:ext cx="11047930" cy="793166"/>
+            <a:ext cx="11047930" cy="791050"/>
           </a:xfrm>
           <a:prstGeom prst="rect">
             <a:avLst/>
@@ -16684,49 +16694,56 @@
                 <a:latin typeface="D2Coding" panose="020B0609020101020101" pitchFamily="49" charset="-127"/>
                 <a:ea typeface="D2Coding" panose="020B0609020101020101" pitchFamily="49" charset="-127"/>
               </a:rPr>
-              <a:t>구글 드라이브의 문서 변경을 감지하여 </a:t>
+              <a:t>사용자 질문을 받으면 대화 맥락과 </a:t>
+            </a:r>
+            <a:r>
+              <a:rPr lang="en-US" altLang="ko-KR" sz="1600" dirty="0" err="1">
+                <a:latin typeface="D2Coding" panose="020B0609020101020101" pitchFamily="49" charset="-127"/>
+                <a:ea typeface="D2Coding" panose="020B0609020101020101" pitchFamily="49" charset="-127"/>
+              </a:rPr>
+              <a:t>Supabase</a:t>
             </a:r>
             <a:r>
               <a:rPr lang="en-US" altLang="ko-KR" sz="1600" dirty="0">
                 <a:latin typeface="D2Coding" panose="020B0609020101020101" pitchFamily="49" charset="-127"/>
                 <a:ea typeface="D2Coding" panose="020B0609020101020101" pitchFamily="49" charset="-127"/>
               </a:rPr>
-              <a:t>AI</a:t>
+              <a:t> </a:t>
             </a:r>
             <a:r>
               <a:rPr lang="ko-KR" altLang="en-US" sz="1600" dirty="0">
                 <a:latin typeface="D2Coding" panose="020B0609020101020101" pitchFamily="49" charset="-127"/>
                 <a:ea typeface="D2Coding" panose="020B0609020101020101" pitchFamily="49" charset="-127"/>
               </a:rPr>
-              <a:t>가 검색할 수 있는 형태로 변환한 뒤</a:t>
+              <a:t>내 지식베이스</a:t>
             </a:r>
             <a:r>
               <a:rPr lang="en-US" altLang="ko-KR" sz="1600" dirty="0">
                 <a:latin typeface="D2Coding" panose="020B0609020101020101" pitchFamily="49" charset="-127"/>
                 <a:ea typeface="D2Coding" panose="020B0609020101020101" pitchFamily="49" charset="-127"/>
               </a:rPr>
-              <a:t>, </a:t>
-            </a:r>
-            <a:r>
-              <a:rPr lang="en-US" altLang="ko-KR" sz="1600" dirty="0" err="1">
-                <a:latin typeface="D2Coding" panose="020B0609020101020101" pitchFamily="49" charset="-127"/>
-                <a:ea typeface="D2Coding" panose="020B0609020101020101" pitchFamily="49" charset="-127"/>
-              </a:rPr>
-              <a:t>Supabase</a:t>
+              <a:t>(</a:t>
+            </a:r>
+            <a:r>
+              <a:rPr lang="ko-KR" altLang="en-US" sz="1600" dirty="0">
+                <a:latin typeface="D2Coding" panose="020B0609020101020101" pitchFamily="49" charset="-127"/>
+                <a:ea typeface="D2Coding" panose="020B0609020101020101" pitchFamily="49" charset="-127"/>
+              </a:rPr>
+              <a:t>문서</a:t>
             </a:r>
             <a:r>
               <a:rPr lang="en-US" altLang="ko-KR" sz="1600" dirty="0">
                 <a:latin typeface="D2Coding" panose="020B0609020101020101" pitchFamily="49" charset="-127"/>
                 <a:ea typeface="D2Coding" panose="020B0609020101020101" pitchFamily="49" charset="-127"/>
               </a:rPr>
-              <a:t> </a:t>
+              <a:t>)</a:t>
             </a:r>
             <a:r>
               <a:rPr lang="ko-KR" altLang="en-US" sz="1600" dirty="0">
                 <a:latin typeface="D2Coding" panose="020B0609020101020101" pitchFamily="49" charset="-127"/>
                 <a:ea typeface="D2Coding" panose="020B0609020101020101" pitchFamily="49" charset="-127"/>
               </a:rPr>
-              <a:t>벡터 데이터베이스에 자동 저장하는 </a:t>
+              <a:t>를 함께 참조하여 정확하게 답변하는 </a:t>
             </a:r>
             <a:r>
               <a:rPr lang="en-US" altLang="ko-KR" sz="1600" dirty="0">
@@ -16754,25 +16771,55 @@
                 <a:latin typeface="D2Coding" panose="020B0609020101020101" pitchFamily="49" charset="-127"/>
                 <a:ea typeface="D2Coding" panose="020B0609020101020101" pitchFamily="49" charset="-127"/>
               </a:rPr>
-              <a:t>파일 변환 </a:t>
+              <a:t>기반 </a:t>
             </a:r>
             <a:r>
               <a:rPr lang="en-US" altLang="ko-KR" sz="1600" dirty="0">
                 <a:latin typeface="D2Coding" panose="020B0609020101020101" pitchFamily="49" charset="-127"/>
                 <a:ea typeface="D2Coding" panose="020B0609020101020101" pitchFamily="49" charset="-127"/>
               </a:rPr>
-              <a:t>n8n</a:t>
+              <a:t>AI </a:t>
             </a:r>
             <a:r>
               <a:rPr lang="ko-KR" altLang="en-US" sz="1600" dirty="0">
                 <a:latin typeface="D2Coding" panose="020B0609020101020101" pitchFamily="49" charset="-127"/>
                 <a:ea typeface="D2Coding" panose="020B0609020101020101" pitchFamily="49" charset="-127"/>
               </a:rPr>
-              <a:t> 파이프라인</a:t>
+              <a:t>대화 에이전트 워크플로우</a:t>
             </a:r>
           </a:p>
         </p:txBody>
       </p:sp>
+      <p:pic>
+        <p:nvPicPr>
+          <p:cNvPr id="6" name="그림 5">
+            <a:extLst>
+              <a:ext uri="{FF2B5EF4-FFF2-40B4-BE49-F238E27FC236}">
+                <a16:creationId xmlns:a16="http://schemas.microsoft.com/office/drawing/2014/main" id="{FFF301A2-EBB8-CBF8-1D3B-5533F3951C98}"/>
+              </a:ext>
+            </a:extLst>
+          </p:cNvPr>
+          <p:cNvPicPr>
+            <a:picLocks noChangeAspect="1"/>
+          </p:cNvPicPr>
+          <p:nvPr/>
+        </p:nvPicPr>
+        <p:blipFill>
+          <a:blip r:embed="rId2"/>
+          <a:stretch>
+            <a:fillRect/>
+          </a:stretch>
+        </p:blipFill>
+        <p:spPr>
+          <a:xfrm>
+            <a:off x="1857763" y="2214308"/>
+            <a:ext cx="6463277" cy="4282895"/>
+          </a:xfrm>
+          <a:prstGeom prst="rect">
+            <a:avLst/>
+          </a:prstGeom>
+        </p:spPr>
+      </p:pic>
     </p:spTree>
     <p:extLst>
       <p:ext uri="{BB962C8B-B14F-4D97-AF65-F5344CB8AC3E}">
@@ -16787,6 +16834,3333 @@
 </file>
 
 <file path=ppt/slides/slide38.xml><?xml version="1.0" encoding="utf-8"?>
+<p:sld xmlns:a="http://schemas.openxmlformats.org/drawingml/2006/main" xmlns:r="http://schemas.openxmlformats.org/officeDocument/2006/relationships" xmlns:p="http://schemas.openxmlformats.org/presentationml/2006/main">
+  <p:cSld>
+    <p:spTree>
+      <p:nvGrpSpPr>
+        <p:cNvPr id="1" name="">
+          <a:extLst>
+            <a:ext uri="{FF2B5EF4-FFF2-40B4-BE49-F238E27FC236}">
+              <a16:creationId xmlns:a16="http://schemas.microsoft.com/office/drawing/2014/main" id="{B4C6561E-A4F5-DCE5-D371-2920F5D81D1B}"/>
+            </a:ext>
+          </a:extLst>
+        </p:cNvPr>
+        <p:cNvGrpSpPr/>
+        <p:nvPr/>
+      </p:nvGrpSpPr>
+      <p:grpSpPr>
+        <a:xfrm>
+          <a:off x="0" y="0"/>
+          <a:ext cx="0" cy="0"/>
+          <a:chOff x="0" y="0"/>
+          <a:chExt cx="0" cy="0"/>
+        </a:xfrm>
+      </p:grpSpPr>
+      <p:sp>
+        <p:nvSpPr>
+          <p:cNvPr id="3" name="제목 1">
+            <a:extLst>
+              <a:ext uri="{FF2B5EF4-FFF2-40B4-BE49-F238E27FC236}">
+                <a16:creationId xmlns:a16="http://schemas.microsoft.com/office/drawing/2014/main" id="{320AAD03-9A68-CE1F-6EF0-23AD7A420C78}"/>
+              </a:ext>
+            </a:extLst>
+          </p:cNvPr>
+          <p:cNvSpPr txBox="1">
+            <a:spLocks/>
+          </p:cNvSpPr>
+          <p:nvPr/>
+        </p:nvSpPr>
+        <p:spPr>
+          <a:xfrm>
+            <a:off x="475645" y="481983"/>
+            <a:ext cx="10353762" cy="766439"/>
+          </a:xfrm>
+          <a:prstGeom prst="rect">
+            <a:avLst/>
+          </a:prstGeom>
+        </p:spPr>
+        <p:txBody>
+          <a:bodyPr vert="horz" lIns="91440" tIns="45720" rIns="91440" bIns="45720" rtlCol="0" anchor="ctr">
+            <a:normAutofit/>
+          </a:bodyPr>
+          <a:lstStyle>
+            <a:lvl1pPr algn="ctr" defTabSz="914400" rtl="0" eaLnBrk="1" latinLnBrk="1" hangingPunct="1">
+              <a:lnSpc>
+                <a:spcPct val="90000"/>
+              </a:lnSpc>
+              <a:spcBef>
+                <a:spcPct val="0"/>
+              </a:spcBef>
+              <a:buNone/>
+              <a:defRPr sz="3200" kern="1200" cap="all" baseline="0">
+                <a:solidFill>
+                  <a:schemeClr val="tx1"/>
+                </a:solidFill>
+                <a:effectLst/>
+                <a:latin typeface="Batang" panose="02030600000101010101" pitchFamily="18" charset="-127"/>
+                <a:ea typeface="Batang" panose="02030600000101010101" pitchFamily="18" charset="-127"/>
+                <a:cs typeface="+mj-cs"/>
+              </a:defRPr>
+            </a:lvl1pPr>
+          </a:lstStyle>
+          <a:p>
+            <a:pPr algn="l"/>
+            <a:r>
+              <a:rPr lang="en-US" altLang="ko-KR" sz="2800" cap="none" dirty="0">
+                <a:solidFill>
+                  <a:schemeClr val="bg2">
+                    <a:lumMod val="25000"/>
+                  </a:schemeClr>
+                </a:solidFill>
+                <a:latin typeface="D2Coding" panose="020B0609020101020101" pitchFamily="49" charset="-127"/>
+                <a:ea typeface="D2Coding" panose="020B0609020101020101" pitchFamily="49" charset="-127"/>
+                <a:cs typeface="Segoe UI Light" panose="020B0502040204020203" pitchFamily="34" charset="0"/>
+              </a:rPr>
+              <a:t>AI Agent RAG Workflow </a:t>
+            </a:r>
+            <a:endParaRPr lang="ko-KR" altLang="en-US" sz="2800" cap="none" dirty="0">
+              <a:solidFill>
+                <a:schemeClr val="bg2">
+                  <a:lumMod val="25000"/>
+                </a:schemeClr>
+              </a:solidFill>
+              <a:latin typeface="D2Coding" panose="020B0609020101020101" pitchFamily="49" charset="-127"/>
+              <a:ea typeface="D2Coding" panose="020B0609020101020101" pitchFamily="49" charset="-127"/>
+              <a:cs typeface="Segoe UI Light" panose="020B0502040204020203" pitchFamily="34" charset="0"/>
+            </a:endParaRPr>
+          </a:p>
+        </p:txBody>
+      </p:sp>
+      <p:sp>
+        <p:nvSpPr>
+          <p:cNvPr id="8" name="TextBox 7">
+            <a:extLst>
+              <a:ext uri="{FF2B5EF4-FFF2-40B4-BE49-F238E27FC236}">
+                <a16:creationId xmlns:a16="http://schemas.microsoft.com/office/drawing/2014/main" id="{E92FC08B-9E6A-8817-4D7A-A47549386AC3}"/>
+              </a:ext>
+            </a:extLst>
+          </p:cNvPr>
+          <p:cNvSpPr txBox="1"/>
+          <p:nvPr/>
+        </p:nvSpPr>
+        <p:spPr>
+          <a:xfrm>
+            <a:off x="744020" y="3244334"/>
+            <a:ext cx="184731" cy="369332"/>
+          </a:xfrm>
+          <a:prstGeom prst="rect">
+            <a:avLst/>
+          </a:prstGeom>
+          <a:noFill/>
+        </p:spPr>
+        <p:txBody>
+          <a:bodyPr wrap="none" rtlCol="0">
+            <a:spAutoFit/>
+          </a:bodyPr>
+          <a:lstStyle/>
+          <a:p>
+            <a:endParaRPr lang="ko-KR" altLang="en-US" dirty="0">
+              <a:solidFill>
+                <a:schemeClr val="accent5"/>
+              </a:solidFill>
+              <a:latin typeface="D2Coding" panose="020B0609020101020101" pitchFamily="49" charset="-127"/>
+              <a:ea typeface="D2Coding" panose="020B0609020101020101" pitchFamily="49" charset="-127"/>
+            </a:endParaRPr>
+          </a:p>
+        </p:txBody>
+      </p:sp>
+      <p:sp>
+        <p:nvSpPr>
+          <p:cNvPr id="2" name="슬라이드 번호 개체 틀 3">
+            <a:extLst>
+              <a:ext uri="{FF2B5EF4-FFF2-40B4-BE49-F238E27FC236}">
+                <a16:creationId xmlns:a16="http://schemas.microsoft.com/office/drawing/2014/main" id="{94D8A310-A54D-1E82-A4BB-2E4E9A9E4462}"/>
+              </a:ext>
+            </a:extLst>
+          </p:cNvPr>
+          <p:cNvSpPr txBox="1">
+            <a:spLocks/>
+          </p:cNvSpPr>
+          <p:nvPr/>
+        </p:nvSpPr>
+        <p:spPr>
+          <a:xfrm>
+            <a:off x="11180761" y="299420"/>
+            <a:ext cx="753545" cy="365125"/>
+          </a:xfrm>
+          <a:prstGeom prst="rect">
+            <a:avLst/>
+          </a:prstGeom>
+        </p:spPr>
+        <p:txBody>
+          <a:bodyPr vert="horz" lIns="91440" tIns="45720" rIns="91440" bIns="45720" rtlCol="0" anchor="ctr"/>
+          <a:lstStyle>
+            <a:defPPr rtl="0">
+              <a:defRPr lang="ko-KR"/>
+            </a:defPPr>
+            <a:lvl1pPr marL="0" algn="r" defTabSz="914400" rtl="0" eaLnBrk="1" latinLnBrk="0" hangingPunct="1">
+              <a:defRPr sz="1200" kern="1200" baseline="0">
+                <a:solidFill>
+                  <a:schemeClr val="tx1">
+                    <a:lumMod val="65000"/>
+                    <a:lumOff val="35000"/>
+                  </a:schemeClr>
+                </a:solidFill>
+                <a:latin typeface="맑은 고딕" panose="020B0503020000020004" pitchFamily="50" charset="-127"/>
+                <a:ea typeface="맑은 고딕" panose="020B0503020000020004" pitchFamily="50" charset="-127"/>
+                <a:cs typeface="+mn-cs"/>
+              </a:defRPr>
+            </a:lvl1pPr>
+            <a:lvl2pPr marL="457200" algn="l" defTabSz="914400" rtl="0" eaLnBrk="1" latinLnBrk="0" hangingPunct="1">
+              <a:defRPr sz="1800" kern="1200">
+                <a:solidFill>
+                  <a:schemeClr val="tx1"/>
+                </a:solidFill>
+                <a:latin typeface="+mn-lt"/>
+                <a:ea typeface="+mn-ea"/>
+                <a:cs typeface="+mn-cs"/>
+              </a:defRPr>
+            </a:lvl2pPr>
+            <a:lvl3pPr marL="914400" algn="l" defTabSz="914400" rtl="0" eaLnBrk="1" latinLnBrk="0" hangingPunct="1">
+              <a:defRPr sz="1800" kern="1200">
+                <a:solidFill>
+                  <a:schemeClr val="tx1"/>
+                </a:solidFill>
+                <a:latin typeface="+mn-lt"/>
+                <a:ea typeface="+mn-ea"/>
+                <a:cs typeface="+mn-cs"/>
+              </a:defRPr>
+            </a:lvl3pPr>
+            <a:lvl4pPr marL="1371600" algn="l" defTabSz="914400" rtl="0" eaLnBrk="1" latinLnBrk="0" hangingPunct="1">
+              <a:defRPr sz="1800" kern="1200">
+                <a:solidFill>
+                  <a:schemeClr val="tx1"/>
+                </a:solidFill>
+                <a:latin typeface="+mn-lt"/>
+                <a:ea typeface="+mn-ea"/>
+                <a:cs typeface="+mn-cs"/>
+              </a:defRPr>
+            </a:lvl4pPr>
+            <a:lvl5pPr marL="1828800" algn="l" defTabSz="914400" rtl="0" eaLnBrk="1" latinLnBrk="0" hangingPunct="1">
+              <a:defRPr sz="1800" kern="1200">
+                <a:solidFill>
+                  <a:schemeClr val="tx1"/>
+                </a:solidFill>
+                <a:latin typeface="+mn-lt"/>
+                <a:ea typeface="+mn-ea"/>
+                <a:cs typeface="+mn-cs"/>
+              </a:defRPr>
+            </a:lvl5pPr>
+            <a:lvl6pPr marL="2286000" algn="l" defTabSz="914400" rtl="0" eaLnBrk="1" latinLnBrk="0" hangingPunct="1">
+              <a:defRPr sz="1800" kern="1200">
+                <a:solidFill>
+                  <a:schemeClr val="tx1"/>
+                </a:solidFill>
+                <a:latin typeface="+mn-lt"/>
+                <a:ea typeface="+mn-ea"/>
+                <a:cs typeface="+mn-cs"/>
+              </a:defRPr>
+            </a:lvl6pPr>
+            <a:lvl7pPr marL="2743200" algn="l" defTabSz="914400" rtl="0" eaLnBrk="1" latinLnBrk="0" hangingPunct="1">
+              <a:defRPr sz="1800" kern="1200">
+                <a:solidFill>
+                  <a:schemeClr val="tx1"/>
+                </a:solidFill>
+                <a:latin typeface="+mn-lt"/>
+                <a:ea typeface="+mn-ea"/>
+                <a:cs typeface="+mn-cs"/>
+              </a:defRPr>
+            </a:lvl7pPr>
+            <a:lvl8pPr marL="3200400" algn="l" defTabSz="914400" rtl="0" eaLnBrk="1" latinLnBrk="0" hangingPunct="1">
+              <a:defRPr sz="1800" kern="1200">
+                <a:solidFill>
+                  <a:schemeClr val="tx1"/>
+                </a:solidFill>
+                <a:latin typeface="+mn-lt"/>
+                <a:ea typeface="+mn-ea"/>
+                <a:cs typeface="+mn-cs"/>
+              </a:defRPr>
+            </a:lvl8pPr>
+            <a:lvl9pPr marL="3657600" algn="l" defTabSz="914400" rtl="0" eaLnBrk="1" latinLnBrk="0" hangingPunct="1">
+              <a:defRPr sz="1800" kern="1200">
+                <a:solidFill>
+                  <a:schemeClr val="tx1"/>
+                </a:solidFill>
+                <a:latin typeface="+mn-lt"/>
+                <a:ea typeface="+mn-ea"/>
+                <a:cs typeface="+mn-cs"/>
+              </a:defRPr>
+            </a:lvl9pPr>
+          </a:lstStyle>
+          <a:p>
+            <a:fld id="{D57F1E4F-1CFF-5643-939E-217C01CDF565}" type="slidenum">
+              <a:rPr lang="en-US" b="1" smtClean="0">
+                <a:latin typeface="Segoe UI Emoji" panose="020B0502040204020203" pitchFamily="34" charset="0"/>
+                <a:ea typeface="Segoe UI Emoji" panose="020B0502040204020203" pitchFamily="34" charset="0"/>
+              </a:rPr>
+              <a:pPr/>
+              <a:t>38</a:t>
+            </a:fld>
+            <a:endParaRPr lang="en-US" b="1" dirty="0">
+              <a:latin typeface="Segoe UI Emoji" panose="020B0502040204020203" pitchFamily="34" charset="0"/>
+              <a:ea typeface="Segoe UI Emoji" panose="020B0502040204020203" pitchFamily="34" charset="0"/>
+            </a:endParaRPr>
+          </a:p>
+        </p:txBody>
+      </p:sp>
+      <p:sp>
+        <p:nvSpPr>
+          <p:cNvPr id="7" name="TextBox 6">
+            <a:extLst>
+              <a:ext uri="{FF2B5EF4-FFF2-40B4-BE49-F238E27FC236}">
+                <a16:creationId xmlns:a16="http://schemas.microsoft.com/office/drawing/2014/main" id="{870F05E5-FF67-99FC-304A-9872DE54355B}"/>
+              </a:ext>
+            </a:extLst>
+          </p:cNvPr>
+          <p:cNvSpPr txBox="1"/>
+          <p:nvPr/>
+        </p:nvSpPr>
+        <p:spPr>
+          <a:xfrm>
+            <a:off x="576262" y="1404784"/>
+            <a:ext cx="11039476" cy="3614131"/>
+          </a:xfrm>
+          <a:prstGeom prst="rect">
+            <a:avLst/>
+          </a:prstGeom>
+          <a:noFill/>
+        </p:spPr>
+        <p:txBody>
+          <a:bodyPr wrap="square">
+            <a:spAutoFit/>
+          </a:bodyPr>
+          <a:lstStyle/>
+          <a:p>
+            <a:pPr marL="342900" indent="-342900">
+              <a:lnSpc>
+                <a:spcPct val="150000"/>
+              </a:lnSpc>
+              <a:buFont typeface="+mj-lt"/>
+              <a:buAutoNum type="arabicPeriod"/>
+            </a:pPr>
+            <a:r>
+              <a:rPr lang="en-US" altLang="ko-KR" sz="1400" dirty="0">
+                <a:latin typeface="D2Coding" panose="020B0609020101020101" pitchFamily="49" charset="-127"/>
+                <a:ea typeface="D2Coding" panose="020B0609020101020101" pitchFamily="49" charset="-127"/>
+              </a:rPr>
+              <a:t>When chat message received (</a:t>
+            </a:r>
+            <a:r>
+              <a:rPr lang="ko-KR" altLang="en-US" sz="1400" dirty="0">
+                <a:latin typeface="D2Coding" panose="020B0609020101020101" pitchFamily="49" charset="-127"/>
+                <a:ea typeface="D2Coding" panose="020B0609020101020101" pitchFamily="49" charset="-127"/>
+              </a:rPr>
+              <a:t>입력</a:t>
+            </a:r>
+            <a:r>
+              <a:rPr lang="en-US" altLang="ko-KR" sz="1400" dirty="0">
+                <a:latin typeface="D2Coding" panose="020B0609020101020101" pitchFamily="49" charset="-127"/>
+                <a:ea typeface="D2Coding" panose="020B0609020101020101" pitchFamily="49" charset="-127"/>
+              </a:rPr>
+              <a:t>): </a:t>
+            </a:r>
+            <a:r>
+              <a:rPr lang="ko-KR" altLang="en-US" sz="1400" dirty="0">
+                <a:latin typeface="D2Coding" panose="020B0609020101020101" pitchFamily="49" charset="-127"/>
+                <a:ea typeface="D2Coding" panose="020B0609020101020101" pitchFamily="49" charset="-127"/>
+              </a:rPr>
+              <a:t>사용자가 </a:t>
+            </a:r>
+            <a:r>
+              <a:rPr lang="ko-KR" altLang="en-US" sz="1400" dirty="0" err="1">
+                <a:latin typeface="D2Coding" panose="020B0609020101020101" pitchFamily="49" charset="-127"/>
+                <a:ea typeface="D2Coding" panose="020B0609020101020101" pitchFamily="49" charset="-127"/>
+              </a:rPr>
+              <a:t>챗봇</a:t>
+            </a:r>
+            <a:r>
+              <a:rPr lang="ko-KR" altLang="en-US" sz="1400" dirty="0">
+                <a:latin typeface="D2Coding" panose="020B0609020101020101" pitchFamily="49" charset="-127"/>
+                <a:ea typeface="D2Coding" panose="020B0609020101020101" pitchFamily="49" charset="-127"/>
+              </a:rPr>
+              <a:t> 창에 메시지를 전송하면 작동을 시작</a:t>
+            </a:r>
+            <a:endParaRPr lang="en-US" altLang="ko-KR" sz="1400" dirty="0">
+              <a:latin typeface="D2Coding" panose="020B0609020101020101" pitchFamily="49" charset="-127"/>
+              <a:ea typeface="D2Coding" panose="020B0609020101020101" pitchFamily="49" charset="-127"/>
+            </a:endParaRPr>
+          </a:p>
+          <a:p>
+            <a:pPr marL="342900" indent="-342900">
+              <a:lnSpc>
+                <a:spcPct val="150000"/>
+              </a:lnSpc>
+              <a:buFont typeface="+mj-lt"/>
+              <a:buAutoNum type="arabicPeriod"/>
+            </a:pPr>
+            <a:endParaRPr lang="en-US" altLang="ko-KR" sz="1400" dirty="0">
+              <a:latin typeface="D2Coding" panose="020B0609020101020101" pitchFamily="49" charset="-127"/>
+              <a:ea typeface="D2Coding" panose="020B0609020101020101" pitchFamily="49" charset="-127"/>
+            </a:endParaRPr>
+          </a:p>
+          <a:p>
+            <a:pPr marL="342900" indent="-342900">
+              <a:lnSpc>
+                <a:spcPct val="150000"/>
+              </a:lnSpc>
+              <a:buFont typeface="+mj-lt"/>
+              <a:buAutoNum type="arabicPeriod"/>
+            </a:pPr>
+            <a:r>
+              <a:rPr lang="en-US" altLang="ko-KR" sz="1400" dirty="0">
+                <a:latin typeface="D2Coding" panose="020B0609020101020101" pitchFamily="49" charset="-127"/>
+                <a:ea typeface="D2Coding" panose="020B0609020101020101" pitchFamily="49" charset="-127"/>
+              </a:rPr>
+              <a:t>AI Agent (</a:t>
+            </a:r>
+            <a:r>
+              <a:rPr lang="ko-KR" altLang="en-US" sz="1400" dirty="0">
+                <a:latin typeface="D2Coding" panose="020B0609020101020101" pitchFamily="49" charset="-127"/>
+                <a:ea typeface="D2Coding" panose="020B0609020101020101" pitchFamily="49" charset="-127"/>
+              </a:rPr>
+              <a:t>두뇌</a:t>
+            </a:r>
+            <a:r>
+              <a:rPr lang="en-US" altLang="ko-KR" sz="1400" dirty="0">
+                <a:latin typeface="D2Coding" panose="020B0609020101020101" pitchFamily="49" charset="-127"/>
+                <a:ea typeface="D2Coding" panose="020B0609020101020101" pitchFamily="49" charset="-127"/>
+              </a:rPr>
+              <a:t>/</a:t>
+            </a:r>
+            <a:r>
+              <a:rPr lang="ko-KR" altLang="en-US" sz="1400" dirty="0">
+                <a:latin typeface="D2Coding" panose="020B0609020101020101" pitchFamily="49" charset="-127"/>
+                <a:ea typeface="D2Coding" panose="020B0609020101020101" pitchFamily="49" charset="-127"/>
+              </a:rPr>
+              <a:t>제어</a:t>
+            </a:r>
+            <a:r>
+              <a:rPr lang="en-US" altLang="ko-KR" sz="1400" dirty="0">
+                <a:latin typeface="D2Coding" panose="020B0609020101020101" pitchFamily="49" charset="-127"/>
+                <a:ea typeface="D2Coding" panose="020B0609020101020101" pitchFamily="49" charset="-127"/>
+              </a:rPr>
+              <a:t>): </a:t>
+            </a:r>
+            <a:r>
+              <a:rPr lang="ko-KR" altLang="en-US" sz="1400" dirty="0" err="1">
+                <a:latin typeface="D2Coding" panose="020B0609020101020101" pitchFamily="49" charset="-127"/>
+                <a:ea typeface="D2Coding" panose="020B0609020101020101" pitchFamily="49" charset="-127"/>
+              </a:rPr>
+              <a:t>입력받은</a:t>
+            </a:r>
+            <a:r>
+              <a:rPr lang="ko-KR" altLang="en-US" sz="1400" dirty="0">
+                <a:latin typeface="D2Coding" panose="020B0609020101020101" pitchFamily="49" charset="-127"/>
+                <a:ea typeface="D2Coding" panose="020B0609020101020101" pitchFamily="49" charset="-127"/>
+              </a:rPr>
+              <a:t> 질문을 분석하고</a:t>
+            </a:r>
+            <a:r>
+              <a:rPr lang="en-US" altLang="ko-KR" sz="1400" dirty="0">
+                <a:latin typeface="D2Coding" panose="020B0609020101020101" pitchFamily="49" charset="-127"/>
+                <a:ea typeface="D2Coding" panose="020B0609020101020101" pitchFamily="49" charset="-127"/>
+              </a:rPr>
+              <a:t>, </a:t>
+            </a:r>
+            <a:r>
+              <a:rPr lang="ko-KR" altLang="en-US" sz="1400" dirty="0">
+                <a:latin typeface="D2Coding" panose="020B0609020101020101" pitchFamily="49" charset="-127"/>
+                <a:ea typeface="D2Coding" panose="020B0609020101020101" pitchFamily="49" charset="-127"/>
+              </a:rPr>
+              <a:t>대화 기억과 지식 검색 도구를 활용하여 최종 답변 생성을 총괄</a:t>
+            </a:r>
+            <a:endParaRPr lang="en-US" altLang="ko-KR" sz="1400" dirty="0">
+              <a:latin typeface="D2Coding" panose="020B0609020101020101" pitchFamily="49" charset="-127"/>
+              <a:ea typeface="D2Coding" panose="020B0609020101020101" pitchFamily="49" charset="-127"/>
+            </a:endParaRPr>
+          </a:p>
+          <a:p>
+            <a:pPr marL="800100" lvl="1" indent="-342900">
+              <a:lnSpc>
+                <a:spcPct val="150000"/>
+              </a:lnSpc>
+              <a:buFont typeface="+mj-lt"/>
+              <a:buAutoNum type="arabicPeriod"/>
+            </a:pPr>
+            <a:r>
+              <a:rPr lang="en-US" altLang="ko-KR" sz="1400" dirty="0" err="1">
+                <a:latin typeface="D2Coding" panose="020B0609020101020101" pitchFamily="49" charset="-127"/>
+                <a:ea typeface="D2Coding" panose="020B0609020101020101" pitchFamily="49" charset="-127"/>
+              </a:rPr>
+              <a:t>Groq</a:t>
+            </a:r>
+            <a:r>
+              <a:rPr lang="en-US" altLang="ko-KR" sz="1400" dirty="0">
+                <a:latin typeface="D2Coding" panose="020B0609020101020101" pitchFamily="49" charset="-127"/>
+                <a:ea typeface="D2Coding" panose="020B0609020101020101" pitchFamily="49" charset="-127"/>
+              </a:rPr>
+              <a:t> Chat Model (</a:t>
+            </a:r>
+            <a:r>
+              <a:rPr lang="ko-KR" altLang="en-US" sz="1400" dirty="0">
+                <a:latin typeface="D2Coding" panose="020B0609020101020101" pitchFamily="49" charset="-127"/>
+                <a:ea typeface="D2Coding" panose="020B0609020101020101" pitchFamily="49" charset="-127"/>
+              </a:rPr>
+              <a:t>추론 모델</a:t>
+            </a:r>
+            <a:r>
+              <a:rPr lang="en-US" altLang="ko-KR" sz="1400" dirty="0">
+                <a:latin typeface="D2Coding" panose="020B0609020101020101" pitchFamily="49" charset="-127"/>
+                <a:ea typeface="D2Coding" panose="020B0609020101020101" pitchFamily="49" charset="-127"/>
+              </a:rPr>
+              <a:t>): AI Agent</a:t>
+            </a:r>
+            <a:r>
+              <a:rPr lang="ko-KR" altLang="en-US" sz="1400" dirty="0">
+                <a:latin typeface="D2Coding" panose="020B0609020101020101" pitchFamily="49" charset="-127"/>
+                <a:ea typeface="D2Coding" panose="020B0609020101020101" pitchFamily="49" charset="-127"/>
+              </a:rPr>
+              <a:t>가 빠르게 문맥을 이해하고 자연스러운 답변 언어를 생성하도록 초고속 </a:t>
+            </a:r>
+            <a:r>
+              <a:rPr lang="en-US" altLang="ko-KR" sz="1400" dirty="0">
+                <a:latin typeface="D2Coding" panose="020B0609020101020101" pitchFamily="49" charset="-127"/>
+                <a:ea typeface="D2Coding" panose="020B0609020101020101" pitchFamily="49" charset="-127"/>
+              </a:rPr>
+              <a:t>LLM</a:t>
+            </a:r>
+            <a:r>
+              <a:rPr lang="ko-KR" altLang="en-US" sz="1400" dirty="0">
+                <a:latin typeface="D2Coding" panose="020B0609020101020101" pitchFamily="49" charset="-127"/>
+                <a:ea typeface="D2Coding" panose="020B0609020101020101" pitchFamily="49" charset="-127"/>
+              </a:rPr>
+              <a:t>을 제공</a:t>
+            </a:r>
+            <a:endParaRPr lang="en-US" altLang="ko-KR" sz="1400" dirty="0">
+              <a:latin typeface="D2Coding" panose="020B0609020101020101" pitchFamily="49" charset="-127"/>
+              <a:ea typeface="D2Coding" panose="020B0609020101020101" pitchFamily="49" charset="-127"/>
+            </a:endParaRPr>
+          </a:p>
+          <a:p>
+            <a:pPr marL="800100" lvl="1" indent="-342900">
+              <a:lnSpc>
+                <a:spcPct val="150000"/>
+              </a:lnSpc>
+              <a:buFont typeface="+mj-lt"/>
+              <a:buAutoNum type="arabicPeriod"/>
+            </a:pPr>
+            <a:r>
+              <a:rPr lang="en-US" altLang="ko-KR" sz="1400" dirty="0">
+                <a:latin typeface="D2Coding" panose="020B0609020101020101" pitchFamily="49" charset="-127"/>
+                <a:ea typeface="D2Coding" panose="020B0609020101020101" pitchFamily="49" charset="-127"/>
+              </a:rPr>
+              <a:t>Postgres Chat Memory (</a:t>
+            </a:r>
+            <a:r>
+              <a:rPr lang="ko-KR" altLang="en-US" sz="1400" dirty="0">
+                <a:latin typeface="D2Coding" panose="020B0609020101020101" pitchFamily="49" charset="-127"/>
+                <a:ea typeface="D2Coding" panose="020B0609020101020101" pitchFamily="49" charset="-127"/>
+              </a:rPr>
+              <a:t>대화 기억</a:t>
+            </a:r>
+            <a:r>
+              <a:rPr lang="en-US" altLang="ko-KR" sz="1400" dirty="0">
+                <a:latin typeface="D2Coding" panose="020B0609020101020101" pitchFamily="49" charset="-127"/>
+                <a:ea typeface="D2Coding" panose="020B0609020101020101" pitchFamily="49" charset="-127"/>
+              </a:rPr>
+              <a:t>): </a:t>
+            </a:r>
+            <a:r>
+              <a:rPr lang="en-US" altLang="ko-KR" sz="1400" dirty="0" err="1">
+                <a:latin typeface="D2Coding" panose="020B0609020101020101" pitchFamily="49" charset="-127"/>
+                <a:ea typeface="D2Coding" panose="020B0609020101020101" pitchFamily="49" charset="-127"/>
+              </a:rPr>
+              <a:t>Supabase</a:t>
+            </a:r>
+            <a:r>
+              <a:rPr lang="en-US" altLang="ko-KR" sz="1400" dirty="0">
+                <a:latin typeface="D2Coding" panose="020B0609020101020101" pitchFamily="49" charset="-127"/>
+                <a:ea typeface="D2Coding" panose="020B0609020101020101" pitchFamily="49" charset="-127"/>
+              </a:rPr>
+              <a:t> DB</a:t>
+            </a:r>
+            <a:r>
+              <a:rPr lang="ko-KR" altLang="en-US" sz="1400" dirty="0">
+                <a:latin typeface="D2Coding" panose="020B0609020101020101" pitchFamily="49" charset="-127"/>
+                <a:ea typeface="D2Coding" panose="020B0609020101020101" pitchFamily="49" charset="-127"/>
+              </a:rPr>
+              <a:t>에 이전 대화 내역을 저장하고 읽어와</a:t>
+            </a:r>
+            <a:r>
+              <a:rPr lang="en-US" altLang="ko-KR" sz="1400" dirty="0">
+                <a:latin typeface="D2Coding" panose="020B0609020101020101" pitchFamily="49" charset="-127"/>
+                <a:ea typeface="D2Coding" panose="020B0609020101020101" pitchFamily="49" charset="-127"/>
+              </a:rPr>
+              <a:t>, </a:t>
+            </a:r>
+            <a:r>
+              <a:rPr lang="ko-KR" altLang="en-US" sz="1400" dirty="0">
+                <a:latin typeface="D2Coding" panose="020B0609020101020101" pitchFamily="49" charset="-127"/>
+                <a:ea typeface="D2Coding" panose="020B0609020101020101" pitchFamily="49" charset="-127"/>
+              </a:rPr>
+              <a:t>연속적인 질의응답 시 이전 문맥을 유지</a:t>
+            </a:r>
+            <a:endParaRPr lang="en-US" altLang="ko-KR" sz="1400" dirty="0">
+              <a:latin typeface="D2Coding" panose="020B0609020101020101" pitchFamily="49" charset="-127"/>
+              <a:ea typeface="D2Coding" panose="020B0609020101020101" pitchFamily="49" charset="-127"/>
+            </a:endParaRPr>
+          </a:p>
+          <a:p>
+            <a:pPr marL="800100" lvl="1" indent="-342900">
+              <a:lnSpc>
+                <a:spcPct val="150000"/>
+              </a:lnSpc>
+              <a:buFont typeface="+mj-lt"/>
+              <a:buAutoNum type="arabicPeriod"/>
+            </a:pPr>
+            <a:r>
+              <a:rPr lang="en-US" altLang="ko-KR" sz="1400" dirty="0" err="1">
+                <a:latin typeface="D2Coding" panose="020B0609020101020101" pitchFamily="49" charset="-127"/>
+                <a:ea typeface="D2Coding" panose="020B0609020101020101" pitchFamily="49" charset="-127"/>
+              </a:rPr>
+              <a:t>Supabase</a:t>
+            </a:r>
+            <a:r>
+              <a:rPr lang="en-US" altLang="ko-KR" sz="1400" dirty="0">
+                <a:latin typeface="D2Coding" panose="020B0609020101020101" pitchFamily="49" charset="-127"/>
+                <a:ea typeface="D2Coding" panose="020B0609020101020101" pitchFamily="49" charset="-127"/>
+              </a:rPr>
+              <a:t> Vector Store1 (</a:t>
+            </a:r>
+            <a:r>
+              <a:rPr lang="ko-KR" altLang="en-US" sz="1400" dirty="0">
+                <a:latin typeface="D2Coding" panose="020B0609020101020101" pitchFamily="49" charset="-127"/>
+                <a:ea typeface="D2Coding" panose="020B0609020101020101" pitchFamily="49" charset="-127"/>
+              </a:rPr>
+              <a:t>지식 검색 도구</a:t>
+            </a:r>
+            <a:r>
+              <a:rPr lang="en-US" altLang="ko-KR" sz="1400" dirty="0">
+                <a:latin typeface="D2Coding" panose="020B0609020101020101" pitchFamily="49" charset="-127"/>
+                <a:ea typeface="D2Coding" panose="020B0609020101020101" pitchFamily="49" charset="-127"/>
+              </a:rPr>
+              <a:t>): </a:t>
+            </a:r>
+            <a:r>
+              <a:rPr lang="ko-KR" altLang="en-US" sz="1400" dirty="0">
+                <a:latin typeface="D2Coding" panose="020B0609020101020101" pitchFamily="49" charset="-127"/>
+                <a:ea typeface="D2Coding" panose="020B0609020101020101" pitchFamily="49" charset="-127"/>
+              </a:rPr>
+              <a:t>외부 문서</a:t>
+            </a:r>
+            <a:r>
+              <a:rPr lang="en-US" altLang="ko-KR" sz="1400" dirty="0">
+                <a:latin typeface="D2Coding" panose="020B0609020101020101" pitchFamily="49" charset="-127"/>
+                <a:ea typeface="D2Coding" panose="020B0609020101020101" pitchFamily="49" charset="-127"/>
+              </a:rPr>
+              <a:t>(PDF </a:t>
+            </a:r>
+            <a:r>
+              <a:rPr lang="ko-KR" altLang="en-US" sz="1400" dirty="0">
+                <a:latin typeface="D2Coding" panose="020B0609020101020101" pitchFamily="49" charset="-127"/>
+                <a:ea typeface="D2Coding" panose="020B0609020101020101" pitchFamily="49" charset="-127"/>
+              </a:rPr>
+              <a:t>등</a:t>
+            </a:r>
+            <a:r>
+              <a:rPr lang="en-US" altLang="ko-KR" sz="1400" dirty="0">
+                <a:latin typeface="D2Coding" panose="020B0609020101020101" pitchFamily="49" charset="-127"/>
+                <a:ea typeface="D2Coding" panose="020B0609020101020101" pitchFamily="49" charset="-127"/>
+              </a:rPr>
+              <a:t>) </a:t>
+            </a:r>
+            <a:r>
+              <a:rPr lang="ko-KR" altLang="en-US" sz="1400" dirty="0">
+                <a:latin typeface="D2Coding" panose="020B0609020101020101" pitchFamily="49" charset="-127"/>
+                <a:ea typeface="D2Coding" panose="020B0609020101020101" pitchFamily="49" charset="-127"/>
+              </a:rPr>
+              <a:t>데이터가 저장되어 있는 벡터 </a:t>
+            </a:r>
+            <a:r>
+              <a:rPr lang="en-US" altLang="ko-KR" sz="1400" dirty="0">
+                <a:latin typeface="D2Coding" panose="020B0609020101020101" pitchFamily="49" charset="-127"/>
+                <a:ea typeface="D2Coding" panose="020B0609020101020101" pitchFamily="49" charset="-127"/>
+              </a:rPr>
+              <a:t>DB</a:t>
+            </a:r>
+            <a:r>
+              <a:rPr lang="ko-KR" altLang="en-US" sz="1400" dirty="0">
+                <a:latin typeface="D2Coding" panose="020B0609020101020101" pitchFamily="49" charset="-127"/>
+                <a:ea typeface="D2Coding" panose="020B0609020101020101" pitchFamily="49" charset="-127"/>
+              </a:rPr>
+              <a:t>로</a:t>
+            </a:r>
+            <a:r>
+              <a:rPr lang="en-US" altLang="ko-KR" sz="1400" dirty="0">
+                <a:latin typeface="D2Coding" panose="020B0609020101020101" pitchFamily="49" charset="-127"/>
+                <a:ea typeface="D2Coding" panose="020B0609020101020101" pitchFamily="49" charset="-127"/>
+              </a:rPr>
+              <a:t>, AI Agent</a:t>
+            </a:r>
+            <a:r>
+              <a:rPr lang="ko-KR" altLang="en-US" sz="1400" dirty="0">
+                <a:latin typeface="D2Coding" panose="020B0609020101020101" pitchFamily="49" charset="-127"/>
+                <a:ea typeface="D2Coding" panose="020B0609020101020101" pitchFamily="49" charset="-127"/>
+              </a:rPr>
+              <a:t>가 답변에 필요한 자료를 직접 찾아볼 수 있는 도구 역할</a:t>
+            </a:r>
+            <a:endParaRPr lang="en-US" altLang="ko-KR" sz="1400" dirty="0">
+              <a:latin typeface="D2Coding" panose="020B0609020101020101" pitchFamily="49" charset="-127"/>
+              <a:ea typeface="D2Coding" panose="020B0609020101020101" pitchFamily="49" charset="-127"/>
+            </a:endParaRPr>
+          </a:p>
+          <a:p>
+            <a:pPr marL="800100" lvl="1" indent="-342900">
+              <a:lnSpc>
+                <a:spcPct val="150000"/>
+              </a:lnSpc>
+              <a:buFont typeface="+mj-lt"/>
+              <a:buAutoNum type="arabicPeriod"/>
+            </a:pPr>
+            <a:r>
+              <a:rPr lang="en-US" altLang="ko-KR" sz="1400" dirty="0">
+                <a:latin typeface="D2Coding" panose="020B0609020101020101" pitchFamily="49" charset="-127"/>
+                <a:ea typeface="D2Coding" panose="020B0609020101020101" pitchFamily="49" charset="-127"/>
+              </a:rPr>
+              <a:t>Embeddings Google Gemini1 (</a:t>
+            </a:r>
+            <a:r>
+              <a:rPr lang="ko-KR" altLang="en-US" sz="1400" dirty="0">
+                <a:latin typeface="D2Coding" panose="020B0609020101020101" pitchFamily="49" charset="-127"/>
+                <a:ea typeface="D2Coding" panose="020B0609020101020101" pitchFamily="49" charset="-127"/>
+              </a:rPr>
+              <a:t>벡터 변환기</a:t>
+            </a:r>
+            <a:r>
+              <a:rPr lang="en-US" altLang="ko-KR" sz="1400" dirty="0">
+                <a:latin typeface="D2Coding" panose="020B0609020101020101" pitchFamily="49" charset="-127"/>
+                <a:ea typeface="D2Coding" panose="020B0609020101020101" pitchFamily="49" charset="-127"/>
+              </a:rPr>
+              <a:t>): </a:t>
+            </a:r>
+            <a:r>
+              <a:rPr lang="ko-KR" altLang="en-US" sz="1400" dirty="0">
+                <a:latin typeface="D2Coding" panose="020B0609020101020101" pitchFamily="49" charset="-127"/>
+                <a:ea typeface="D2Coding" panose="020B0609020101020101" pitchFamily="49" charset="-127"/>
+              </a:rPr>
+              <a:t>사용자의 질문을 </a:t>
+            </a:r>
+            <a:r>
+              <a:rPr lang="en-US" altLang="ko-KR" sz="1400" dirty="0">
+                <a:latin typeface="D2Coding" panose="020B0609020101020101" pitchFamily="49" charset="-127"/>
+                <a:ea typeface="D2Coding" panose="020B0609020101020101" pitchFamily="49" charset="-127"/>
+              </a:rPr>
+              <a:t>3,072</a:t>
+            </a:r>
+            <a:r>
+              <a:rPr lang="ko-KR" altLang="en-US" sz="1400" dirty="0">
+                <a:latin typeface="D2Coding" panose="020B0609020101020101" pitchFamily="49" charset="-127"/>
+                <a:ea typeface="D2Coding" panose="020B0609020101020101" pitchFamily="49" charset="-127"/>
+              </a:rPr>
+              <a:t>차원의 벡터 수치로 변환하여</a:t>
+            </a:r>
+            <a:r>
+              <a:rPr lang="en-US" altLang="ko-KR" sz="1400" dirty="0">
+                <a:latin typeface="D2Coding" panose="020B0609020101020101" pitchFamily="49" charset="-127"/>
+                <a:ea typeface="D2Coding" panose="020B0609020101020101" pitchFamily="49" charset="-127"/>
+              </a:rPr>
+              <a:t>, </a:t>
+            </a:r>
+            <a:r>
+              <a:rPr lang="en-US" altLang="ko-KR" sz="1400" dirty="0" err="1">
+                <a:latin typeface="D2Coding" panose="020B0609020101020101" pitchFamily="49" charset="-127"/>
+                <a:ea typeface="D2Coding" panose="020B0609020101020101" pitchFamily="49" charset="-127"/>
+              </a:rPr>
+              <a:t>Supabase</a:t>
+            </a:r>
+            <a:r>
+              <a:rPr lang="en-US" altLang="ko-KR" sz="1400" dirty="0">
+                <a:latin typeface="D2Coding" panose="020B0609020101020101" pitchFamily="49" charset="-127"/>
+                <a:ea typeface="D2Coding" panose="020B0609020101020101" pitchFamily="49" charset="-127"/>
+              </a:rPr>
+              <a:t> DB</a:t>
+            </a:r>
+            <a:r>
+              <a:rPr lang="ko-KR" altLang="en-US" sz="1400" dirty="0">
+                <a:latin typeface="D2Coding" panose="020B0609020101020101" pitchFamily="49" charset="-127"/>
+                <a:ea typeface="D2Coding" panose="020B0609020101020101" pitchFamily="49" charset="-127"/>
+              </a:rPr>
+              <a:t>에서 수치적으로 가장 연관성이 높은 문서 조각을 찾기</a:t>
+            </a:r>
+          </a:p>
+        </p:txBody>
+      </p:sp>
+    </p:spTree>
+    <p:extLst>
+      <p:ext uri="{BB962C8B-B14F-4D97-AF65-F5344CB8AC3E}">
+        <p14:creationId xmlns:p14="http://schemas.microsoft.com/office/powerpoint/2010/main" val="161137076"/>
+      </p:ext>
+    </p:extLst>
+  </p:cSld>
+  <p:clrMapOvr>
+    <a:masterClrMapping/>
+  </p:clrMapOvr>
+</p:sld>
+</file>
+
+<file path=ppt/slides/slide39.xml><?xml version="1.0" encoding="utf-8"?>
+<p:sld xmlns:a="http://schemas.openxmlformats.org/drawingml/2006/main" xmlns:r="http://schemas.openxmlformats.org/officeDocument/2006/relationships" xmlns:p="http://schemas.openxmlformats.org/presentationml/2006/main">
+  <p:cSld>
+    <p:spTree>
+      <p:nvGrpSpPr>
+        <p:cNvPr id="1" name="">
+          <a:extLst>
+            <a:ext uri="{FF2B5EF4-FFF2-40B4-BE49-F238E27FC236}">
+              <a16:creationId xmlns:a16="http://schemas.microsoft.com/office/drawing/2014/main" id="{78D764E0-0A98-1FD6-4FFA-A2E641574633}"/>
+            </a:ext>
+          </a:extLst>
+        </p:cNvPr>
+        <p:cNvGrpSpPr/>
+        <p:nvPr/>
+      </p:nvGrpSpPr>
+      <p:grpSpPr>
+        <a:xfrm>
+          <a:off x="0" y="0"/>
+          <a:ext cx="0" cy="0"/>
+          <a:chOff x="0" y="0"/>
+          <a:chExt cx="0" cy="0"/>
+        </a:xfrm>
+      </p:grpSpPr>
+      <p:sp>
+        <p:nvSpPr>
+          <p:cNvPr id="3" name="제목 1">
+            <a:extLst>
+              <a:ext uri="{FF2B5EF4-FFF2-40B4-BE49-F238E27FC236}">
+                <a16:creationId xmlns:a16="http://schemas.microsoft.com/office/drawing/2014/main" id="{9C5E85E1-5F8A-624F-1AAE-B2E60D4777D0}"/>
+              </a:ext>
+            </a:extLst>
+          </p:cNvPr>
+          <p:cNvSpPr txBox="1">
+            <a:spLocks/>
+          </p:cNvSpPr>
+          <p:nvPr/>
+        </p:nvSpPr>
+        <p:spPr>
+          <a:xfrm>
+            <a:off x="475645" y="481983"/>
+            <a:ext cx="10353762" cy="766439"/>
+          </a:xfrm>
+          <a:prstGeom prst="rect">
+            <a:avLst/>
+          </a:prstGeom>
+        </p:spPr>
+        <p:txBody>
+          <a:bodyPr vert="horz" lIns="91440" tIns="45720" rIns="91440" bIns="45720" rtlCol="0" anchor="ctr">
+            <a:normAutofit/>
+          </a:bodyPr>
+          <a:lstStyle>
+            <a:lvl1pPr algn="ctr" defTabSz="914400" rtl="0" eaLnBrk="1" latinLnBrk="1" hangingPunct="1">
+              <a:lnSpc>
+                <a:spcPct val="90000"/>
+              </a:lnSpc>
+              <a:spcBef>
+                <a:spcPct val="0"/>
+              </a:spcBef>
+              <a:buNone/>
+              <a:defRPr sz="3200" kern="1200" cap="all" baseline="0">
+                <a:solidFill>
+                  <a:schemeClr val="tx1"/>
+                </a:solidFill>
+                <a:effectLst/>
+                <a:latin typeface="Batang" panose="02030600000101010101" pitchFamily="18" charset="-127"/>
+                <a:ea typeface="Batang" panose="02030600000101010101" pitchFamily="18" charset="-127"/>
+                <a:cs typeface="+mj-cs"/>
+              </a:defRPr>
+            </a:lvl1pPr>
+          </a:lstStyle>
+          <a:p>
+            <a:pPr algn="l"/>
+            <a:r>
+              <a:rPr lang="en-US" altLang="ko-KR" sz="2800" cap="none" dirty="0">
+                <a:solidFill>
+                  <a:schemeClr val="bg2">
+                    <a:lumMod val="25000"/>
+                  </a:schemeClr>
+                </a:solidFill>
+                <a:latin typeface="D2Coding" panose="020B0609020101020101" pitchFamily="49" charset="-127"/>
+                <a:ea typeface="D2Coding" panose="020B0609020101020101" pitchFamily="49" charset="-127"/>
+                <a:cs typeface="Segoe UI Light" panose="020B0502040204020203" pitchFamily="34" charset="0"/>
+              </a:rPr>
+              <a:t>Vector DB </a:t>
+            </a:r>
+            <a:endParaRPr lang="ko-KR" altLang="en-US" sz="2800" cap="none" dirty="0">
+              <a:solidFill>
+                <a:schemeClr val="bg2">
+                  <a:lumMod val="25000"/>
+                </a:schemeClr>
+              </a:solidFill>
+              <a:latin typeface="D2Coding" panose="020B0609020101020101" pitchFamily="49" charset="-127"/>
+              <a:ea typeface="D2Coding" panose="020B0609020101020101" pitchFamily="49" charset="-127"/>
+              <a:cs typeface="Segoe UI Light" panose="020B0502040204020203" pitchFamily="34" charset="0"/>
+            </a:endParaRPr>
+          </a:p>
+        </p:txBody>
+      </p:sp>
+      <p:sp>
+        <p:nvSpPr>
+          <p:cNvPr id="8" name="TextBox 7">
+            <a:extLst>
+              <a:ext uri="{FF2B5EF4-FFF2-40B4-BE49-F238E27FC236}">
+                <a16:creationId xmlns:a16="http://schemas.microsoft.com/office/drawing/2014/main" id="{ECDC2FF6-79C0-151A-2F03-225A7F606191}"/>
+              </a:ext>
+            </a:extLst>
+          </p:cNvPr>
+          <p:cNvSpPr txBox="1"/>
+          <p:nvPr/>
+        </p:nvSpPr>
+        <p:spPr>
+          <a:xfrm>
+            <a:off x="744020" y="3244334"/>
+            <a:ext cx="184731" cy="369332"/>
+          </a:xfrm>
+          <a:prstGeom prst="rect">
+            <a:avLst/>
+          </a:prstGeom>
+          <a:noFill/>
+        </p:spPr>
+        <p:txBody>
+          <a:bodyPr wrap="none" rtlCol="0">
+            <a:spAutoFit/>
+          </a:bodyPr>
+          <a:lstStyle/>
+          <a:p>
+            <a:endParaRPr lang="ko-KR" altLang="en-US" dirty="0">
+              <a:solidFill>
+                <a:schemeClr val="accent5"/>
+              </a:solidFill>
+              <a:latin typeface="D2Coding" panose="020B0609020101020101" pitchFamily="49" charset="-127"/>
+              <a:ea typeface="D2Coding" panose="020B0609020101020101" pitchFamily="49" charset="-127"/>
+            </a:endParaRPr>
+          </a:p>
+        </p:txBody>
+      </p:sp>
+      <p:sp>
+        <p:nvSpPr>
+          <p:cNvPr id="2" name="슬라이드 번호 개체 틀 3">
+            <a:extLst>
+              <a:ext uri="{FF2B5EF4-FFF2-40B4-BE49-F238E27FC236}">
+                <a16:creationId xmlns:a16="http://schemas.microsoft.com/office/drawing/2014/main" id="{D1BB9700-3DCE-925A-A93A-E72A36E9A05A}"/>
+              </a:ext>
+            </a:extLst>
+          </p:cNvPr>
+          <p:cNvSpPr txBox="1">
+            <a:spLocks/>
+          </p:cNvSpPr>
+          <p:nvPr/>
+        </p:nvSpPr>
+        <p:spPr>
+          <a:xfrm>
+            <a:off x="11180761" y="299420"/>
+            <a:ext cx="753545" cy="365125"/>
+          </a:xfrm>
+          <a:prstGeom prst="rect">
+            <a:avLst/>
+          </a:prstGeom>
+        </p:spPr>
+        <p:txBody>
+          <a:bodyPr vert="horz" lIns="91440" tIns="45720" rIns="91440" bIns="45720" rtlCol="0" anchor="ctr"/>
+          <a:lstStyle>
+            <a:defPPr rtl="0">
+              <a:defRPr lang="ko-KR"/>
+            </a:defPPr>
+            <a:lvl1pPr marL="0" algn="r" defTabSz="914400" rtl="0" eaLnBrk="1" latinLnBrk="0" hangingPunct="1">
+              <a:defRPr sz="1200" kern="1200" baseline="0">
+                <a:solidFill>
+                  <a:schemeClr val="tx1">
+                    <a:lumMod val="65000"/>
+                    <a:lumOff val="35000"/>
+                  </a:schemeClr>
+                </a:solidFill>
+                <a:latin typeface="맑은 고딕" panose="020B0503020000020004" pitchFamily="50" charset="-127"/>
+                <a:ea typeface="맑은 고딕" panose="020B0503020000020004" pitchFamily="50" charset="-127"/>
+                <a:cs typeface="+mn-cs"/>
+              </a:defRPr>
+            </a:lvl1pPr>
+            <a:lvl2pPr marL="457200" algn="l" defTabSz="914400" rtl="0" eaLnBrk="1" latinLnBrk="0" hangingPunct="1">
+              <a:defRPr sz="1800" kern="1200">
+                <a:solidFill>
+                  <a:schemeClr val="tx1"/>
+                </a:solidFill>
+                <a:latin typeface="+mn-lt"/>
+                <a:ea typeface="+mn-ea"/>
+                <a:cs typeface="+mn-cs"/>
+              </a:defRPr>
+            </a:lvl2pPr>
+            <a:lvl3pPr marL="914400" algn="l" defTabSz="914400" rtl="0" eaLnBrk="1" latinLnBrk="0" hangingPunct="1">
+              <a:defRPr sz="1800" kern="1200">
+                <a:solidFill>
+                  <a:schemeClr val="tx1"/>
+                </a:solidFill>
+                <a:latin typeface="+mn-lt"/>
+                <a:ea typeface="+mn-ea"/>
+                <a:cs typeface="+mn-cs"/>
+              </a:defRPr>
+            </a:lvl3pPr>
+            <a:lvl4pPr marL="1371600" algn="l" defTabSz="914400" rtl="0" eaLnBrk="1" latinLnBrk="0" hangingPunct="1">
+              <a:defRPr sz="1800" kern="1200">
+                <a:solidFill>
+                  <a:schemeClr val="tx1"/>
+                </a:solidFill>
+                <a:latin typeface="+mn-lt"/>
+                <a:ea typeface="+mn-ea"/>
+                <a:cs typeface="+mn-cs"/>
+              </a:defRPr>
+            </a:lvl4pPr>
+            <a:lvl5pPr marL="1828800" algn="l" defTabSz="914400" rtl="0" eaLnBrk="1" latinLnBrk="0" hangingPunct="1">
+              <a:defRPr sz="1800" kern="1200">
+                <a:solidFill>
+                  <a:schemeClr val="tx1"/>
+                </a:solidFill>
+                <a:latin typeface="+mn-lt"/>
+                <a:ea typeface="+mn-ea"/>
+                <a:cs typeface="+mn-cs"/>
+              </a:defRPr>
+            </a:lvl5pPr>
+            <a:lvl6pPr marL="2286000" algn="l" defTabSz="914400" rtl="0" eaLnBrk="1" latinLnBrk="0" hangingPunct="1">
+              <a:defRPr sz="1800" kern="1200">
+                <a:solidFill>
+                  <a:schemeClr val="tx1"/>
+                </a:solidFill>
+                <a:latin typeface="+mn-lt"/>
+                <a:ea typeface="+mn-ea"/>
+                <a:cs typeface="+mn-cs"/>
+              </a:defRPr>
+            </a:lvl6pPr>
+            <a:lvl7pPr marL="2743200" algn="l" defTabSz="914400" rtl="0" eaLnBrk="1" latinLnBrk="0" hangingPunct="1">
+              <a:defRPr sz="1800" kern="1200">
+                <a:solidFill>
+                  <a:schemeClr val="tx1"/>
+                </a:solidFill>
+                <a:latin typeface="+mn-lt"/>
+                <a:ea typeface="+mn-ea"/>
+                <a:cs typeface="+mn-cs"/>
+              </a:defRPr>
+            </a:lvl7pPr>
+            <a:lvl8pPr marL="3200400" algn="l" defTabSz="914400" rtl="0" eaLnBrk="1" latinLnBrk="0" hangingPunct="1">
+              <a:defRPr sz="1800" kern="1200">
+                <a:solidFill>
+                  <a:schemeClr val="tx1"/>
+                </a:solidFill>
+                <a:latin typeface="+mn-lt"/>
+                <a:ea typeface="+mn-ea"/>
+                <a:cs typeface="+mn-cs"/>
+              </a:defRPr>
+            </a:lvl8pPr>
+            <a:lvl9pPr marL="3657600" algn="l" defTabSz="914400" rtl="0" eaLnBrk="1" latinLnBrk="0" hangingPunct="1">
+              <a:defRPr sz="1800" kern="1200">
+                <a:solidFill>
+                  <a:schemeClr val="tx1"/>
+                </a:solidFill>
+                <a:latin typeface="+mn-lt"/>
+                <a:ea typeface="+mn-ea"/>
+                <a:cs typeface="+mn-cs"/>
+              </a:defRPr>
+            </a:lvl9pPr>
+          </a:lstStyle>
+          <a:p>
+            <a:fld id="{D57F1E4F-1CFF-5643-939E-217C01CDF565}" type="slidenum">
+              <a:rPr lang="en-US" b="1" smtClean="0">
+                <a:latin typeface="Segoe UI Emoji" panose="020B0502040204020203" pitchFamily="34" charset="0"/>
+                <a:ea typeface="Segoe UI Emoji" panose="020B0502040204020203" pitchFamily="34" charset="0"/>
+              </a:rPr>
+              <a:pPr/>
+              <a:t>39</a:t>
+            </a:fld>
+            <a:endParaRPr lang="en-US" b="1" dirty="0">
+              <a:latin typeface="Segoe UI Emoji" panose="020B0502040204020203" pitchFamily="34" charset="0"/>
+              <a:ea typeface="Segoe UI Emoji" panose="020B0502040204020203" pitchFamily="34" charset="0"/>
+            </a:endParaRPr>
+          </a:p>
+        </p:txBody>
+      </p:sp>
+      <p:pic>
+        <p:nvPicPr>
+          <p:cNvPr id="12" name="그림 11">
+            <a:extLst>
+              <a:ext uri="{FF2B5EF4-FFF2-40B4-BE49-F238E27FC236}">
+                <a16:creationId xmlns:a16="http://schemas.microsoft.com/office/drawing/2014/main" id="{23AEF7BB-2CBD-5358-053C-7C8C4A18D863}"/>
+              </a:ext>
+            </a:extLst>
+          </p:cNvPr>
+          <p:cNvPicPr>
+            <a:picLocks noChangeAspect="1"/>
+          </p:cNvPicPr>
+          <p:nvPr/>
+        </p:nvPicPr>
+        <p:blipFill>
+          <a:blip r:embed="rId2"/>
+          <a:stretch>
+            <a:fillRect/>
+          </a:stretch>
+        </p:blipFill>
+        <p:spPr>
+          <a:xfrm>
+            <a:off x="648769" y="1761954"/>
+            <a:ext cx="7761149" cy="3876846"/>
+          </a:xfrm>
+          <a:prstGeom prst="rect">
+            <a:avLst/>
+          </a:prstGeom>
+        </p:spPr>
+      </p:pic>
+    </p:spTree>
+    <p:extLst>
+      <p:ext uri="{BB962C8B-B14F-4D97-AF65-F5344CB8AC3E}">
+        <p14:creationId xmlns:p14="http://schemas.microsoft.com/office/powerpoint/2010/main" val="1115212204"/>
+      </p:ext>
+    </p:extLst>
+  </p:cSld>
+  <p:clrMapOvr>
+    <a:masterClrMapping/>
+  </p:clrMapOvr>
+</p:sld>
+</file>
+
+<file path=ppt/slides/slide4.xml><?xml version="1.0" encoding="utf-8"?>
+<p:sld xmlns:a="http://schemas.openxmlformats.org/drawingml/2006/main" xmlns:r="http://schemas.openxmlformats.org/officeDocument/2006/relationships" xmlns:p="http://schemas.openxmlformats.org/presentationml/2006/main">
+  <p:cSld>
+    <p:spTree>
+      <p:nvGrpSpPr>
+        <p:cNvPr id="1" name="">
+          <a:extLst>
+            <a:ext uri="{FF2B5EF4-FFF2-40B4-BE49-F238E27FC236}">
+              <a16:creationId xmlns:a16="http://schemas.microsoft.com/office/drawing/2014/main" id="{B9201801-38E9-1C82-2118-6D80106739EC}"/>
+            </a:ext>
+          </a:extLst>
+        </p:cNvPr>
+        <p:cNvGrpSpPr/>
+        <p:nvPr/>
+      </p:nvGrpSpPr>
+      <p:grpSpPr>
+        <a:xfrm>
+          <a:off x="0" y="0"/>
+          <a:ext cx="0" cy="0"/>
+          <a:chOff x="0" y="0"/>
+          <a:chExt cx="0" cy="0"/>
+        </a:xfrm>
+      </p:grpSpPr>
+      <p:sp>
+        <p:nvSpPr>
+          <p:cNvPr id="4" name="슬라이드 번호 개체 틀 3">
+            <a:extLst>
+              <a:ext uri="{FF2B5EF4-FFF2-40B4-BE49-F238E27FC236}">
+                <a16:creationId xmlns:a16="http://schemas.microsoft.com/office/drawing/2014/main" id="{30EBE383-5F3B-1B62-8A0E-1EA54A3F7764}"/>
+              </a:ext>
+            </a:extLst>
+          </p:cNvPr>
+          <p:cNvSpPr>
+            <a:spLocks noGrp="1"/>
+          </p:cNvSpPr>
+          <p:nvPr>
+            <p:ph type="sldNum" sz="quarter" idx="12"/>
+          </p:nvPr>
+        </p:nvSpPr>
+        <p:spPr>
+          <a:xfrm>
+            <a:off x="10514011" y="6036261"/>
+            <a:ext cx="753545" cy="365125"/>
+          </a:xfrm>
+        </p:spPr>
+        <p:txBody>
+          <a:bodyPr/>
+          <a:lstStyle/>
+          <a:p>
+            <a:fld id="{D57F1E4F-1CFF-5643-939E-217C01CDF565}" type="slidenum">
+              <a:rPr lang="en-US" smtClean="0"/>
+              <a:pPr/>
+              <a:t>4</a:t>
+            </a:fld>
+            <a:endParaRPr lang="en-US" dirty="0"/>
+          </a:p>
+        </p:txBody>
+      </p:sp>
+      <p:sp>
+        <p:nvSpPr>
+          <p:cNvPr id="3" name="제목 1">
+            <a:extLst>
+              <a:ext uri="{FF2B5EF4-FFF2-40B4-BE49-F238E27FC236}">
+                <a16:creationId xmlns:a16="http://schemas.microsoft.com/office/drawing/2014/main" id="{CD27D49A-48A1-ABDE-6217-723B707453A1}"/>
+              </a:ext>
+            </a:extLst>
+          </p:cNvPr>
+          <p:cNvSpPr txBox="1">
+            <a:spLocks/>
+          </p:cNvSpPr>
+          <p:nvPr/>
+        </p:nvSpPr>
+        <p:spPr>
+          <a:xfrm>
+            <a:off x="475645" y="481983"/>
+            <a:ext cx="10353762" cy="766439"/>
+          </a:xfrm>
+          <a:prstGeom prst="rect">
+            <a:avLst/>
+          </a:prstGeom>
+        </p:spPr>
+        <p:txBody>
+          <a:bodyPr vert="horz" lIns="91440" tIns="45720" rIns="91440" bIns="45720" rtlCol="0" anchor="ctr">
+            <a:normAutofit/>
+          </a:bodyPr>
+          <a:lstStyle>
+            <a:lvl1pPr algn="ctr" defTabSz="914400" rtl="0" eaLnBrk="1" latinLnBrk="1" hangingPunct="1">
+              <a:lnSpc>
+                <a:spcPct val="90000"/>
+              </a:lnSpc>
+              <a:spcBef>
+                <a:spcPct val="0"/>
+              </a:spcBef>
+              <a:buNone/>
+              <a:defRPr sz="3200" kern="1200" cap="all" baseline="0">
+                <a:solidFill>
+                  <a:schemeClr val="tx1"/>
+                </a:solidFill>
+                <a:effectLst/>
+                <a:latin typeface="Batang" panose="02030600000101010101" pitchFamily="18" charset="-127"/>
+                <a:ea typeface="Batang" panose="02030600000101010101" pitchFamily="18" charset="-127"/>
+                <a:cs typeface="+mj-cs"/>
+              </a:defRPr>
+            </a:lvl1pPr>
+          </a:lstStyle>
+          <a:p>
+            <a:pPr algn="l"/>
+            <a:r>
+              <a:rPr lang="en-US" altLang="ko-KR" sz="2800" cap="none" dirty="0">
+                <a:solidFill>
+                  <a:schemeClr val="bg2">
+                    <a:lumMod val="25000"/>
+                  </a:schemeClr>
+                </a:solidFill>
+                <a:latin typeface="D2Coding" panose="020B0609020101020101" pitchFamily="49" charset="-127"/>
+                <a:ea typeface="D2Coding" panose="020B0609020101020101" pitchFamily="49" charset="-127"/>
+                <a:cs typeface="Segoe UI Light" panose="020B0502040204020203" pitchFamily="34" charset="0"/>
+              </a:rPr>
+              <a:t>n8n</a:t>
+            </a:r>
+            <a:r>
+              <a:rPr lang="ko-KR" altLang="en-US" sz="2800" cap="none" dirty="0">
+                <a:solidFill>
+                  <a:schemeClr val="bg2">
+                    <a:lumMod val="25000"/>
+                  </a:schemeClr>
+                </a:solidFill>
+                <a:latin typeface="D2Coding" panose="020B0609020101020101" pitchFamily="49" charset="-127"/>
+                <a:ea typeface="D2Coding" panose="020B0609020101020101" pitchFamily="49" charset="-127"/>
+                <a:cs typeface="Segoe UI Light" panose="020B0502040204020203" pitchFamily="34" charset="0"/>
+              </a:rPr>
+              <a:t> </a:t>
+            </a:r>
+            <a:r>
+              <a:rPr lang="en-US" altLang="ko-KR" sz="2800" cap="none" dirty="0">
+                <a:solidFill>
+                  <a:schemeClr val="bg2">
+                    <a:lumMod val="25000"/>
+                  </a:schemeClr>
+                </a:solidFill>
+                <a:latin typeface="D2Coding" panose="020B0609020101020101" pitchFamily="49" charset="-127"/>
+                <a:ea typeface="D2Coding" panose="020B0609020101020101" pitchFamily="49" charset="-127"/>
+                <a:cs typeface="Segoe UI Light" panose="020B0502040204020203" pitchFamily="34" charset="0"/>
+              </a:rPr>
+              <a:t>Local</a:t>
+            </a:r>
+            <a:r>
+              <a:rPr lang="ko-KR" altLang="en-US" sz="2800" cap="none" dirty="0">
+                <a:solidFill>
+                  <a:schemeClr val="bg2">
+                    <a:lumMod val="25000"/>
+                  </a:schemeClr>
+                </a:solidFill>
+                <a:latin typeface="D2Coding" panose="020B0609020101020101" pitchFamily="49" charset="-127"/>
+                <a:ea typeface="D2Coding" panose="020B0609020101020101" pitchFamily="49" charset="-127"/>
+                <a:cs typeface="Segoe UI Light" panose="020B0502040204020203" pitchFamily="34" charset="0"/>
+              </a:rPr>
+              <a:t> </a:t>
+            </a:r>
+            <a:r>
+              <a:rPr lang="en-US" altLang="ko-KR" sz="2800" cap="none" dirty="0">
+                <a:solidFill>
+                  <a:schemeClr val="bg2">
+                    <a:lumMod val="25000"/>
+                  </a:schemeClr>
+                </a:solidFill>
+                <a:latin typeface="D2Coding" panose="020B0609020101020101" pitchFamily="49" charset="-127"/>
+                <a:ea typeface="D2Coding" panose="020B0609020101020101" pitchFamily="49" charset="-127"/>
+                <a:cs typeface="Segoe UI Light" panose="020B0502040204020203" pitchFamily="34" charset="0"/>
+              </a:rPr>
+              <a:t>Server</a:t>
+            </a:r>
+            <a:endParaRPr lang="ko-KR" altLang="en-US" sz="2800" cap="none" dirty="0">
+              <a:solidFill>
+                <a:schemeClr val="bg2">
+                  <a:lumMod val="25000"/>
+                </a:schemeClr>
+              </a:solidFill>
+              <a:latin typeface="D2Coding" panose="020B0609020101020101" pitchFamily="49" charset="-127"/>
+              <a:ea typeface="D2Coding" panose="020B0609020101020101" pitchFamily="49" charset="-127"/>
+              <a:cs typeface="Segoe UI Light" panose="020B0502040204020203" pitchFamily="34" charset="0"/>
+            </a:endParaRPr>
+          </a:p>
+        </p:txBody>
+      </p:sp>
+      <p:sp>
+        <p:nvSpPr>
+          <p:cNvPr id="6" name="TextBox 5">
+            <a:extLst>
+              <a:ext uri="{FF2B5EF4-FFF2-40B4-BE49-F238E27FC236}">
+                <a16:creationId xmlns:a16="http://schemas.microsoft.com/office/drawing/2014/main" id="{947ED8AC-21BD-6160-8144-D8DAB7FB4395}"/>
+              </a:ext>
+            </a:extLst>
+          </p:cNvPr>
+          <p:cNvSpPr txBox="1"/>
+          <p:nvPr/>
+        </p:nvSpPr>
+        <p:spPr>
+          <a:xfrm>
+            <a:off x="663576" y="1789759"/>
+            <a:ext cx="10680699" cy="2846741"/>
+          </a:xfrm>
+          <a:prstGeom prst="rect">
+            <a:avLst/>
+          </a:prstGeom>
+          <a:noFill/>
+        </p:spPr>
+        <p:txBody>
+          <a:bodyPr wrap="square">
+            <a:spAutoFit/>
+          </a:bodyPr>
+          <a:lstStyle/>
+          <a:p>
+            <a:pPr>
+              <a:lnSpc>
+                <a:spcPct val="200000"/>
+              </a:lnSpc>
+            </a:pPr>
+            <a:r>
+              <a:rPr lang="en-US" altLang="ko-KR" sz="2000" dirty="0">
+                <a:latin typeface="D2Coding" panose="020B0609020101020101" pitchFamily="49" charset="-127"/>
+                <a:ea typeface="D2Coding" panose="020B0609020101020101" pitchFamily="49" charset="-127"/>
+              </a:rPr>
+              <a:t>n8n </a:t>
+            </a:r>
+            <a:r>
+              <a:rPr lang="ko-KR" altLang="en-US" sz="2000" dirty="0">
+                <a:latin typeface="D2Coding" panose="020B0609020101020101" pitchFamily="49" charset="-127"/>
+                <a:ea typeface="D2Coding" panose="020B0609020101020101" pitchFamily="49" charset="-127"/>
+              </a:rPr>
+              <a:t>설치 방법</a:t>
+            </a:r>
+            <a:endParaRPr lang="en-US" altLang="ko-KR" sz="2000" dirty="0">
+              <a:latin typeface="D2Coding" panose="020B0609020101020101" pitchFamily="49" charset="-127"/>
+              <a:ea typeface="D2Coding" panose="020B0609020101020101" pitchFamily="49" charset="-127"/>
+            </a:endParaRPr>
+          </a:p>
+          <a:p>
+            <a:pPr marL="285750" indent="-285750">
+              <a:lnSpc>
+                <a:spcPct val="200000"/>
+              </a:lnSpc>
+              <a:buFont typeface="Wingdings" panose="05000000000000000000" pitchFamily="2" charset="2"/>
+              <a:buChar char="v"/>
+            </a:pPr>
+            <a:r>
+              <a:rPr lang="en-US" altLang="ko-KR" dirty="0">
+                <a:latin typeface="D2Coding" panose="020B0609020101020101" pitchFamily="49" charset="-127"/>
+                <a:ea typeface="D2Coding" panose="020B0609020101020101" pitchFamily="49" charset="-127"/>
+                <a:hlinkClick r:id="rId2"/>
+              </a:rPr>
+              <a:t>WSL</a:t>
+            </a:r>
+            <a:r>
+              <a:rPr lang="ko-KR" altLang="en-US" dirty="0">
+                <a:latin typeface="D2Coding" panose="020B0609020101020101" pitchFamily="49" charset="-127"/>
+                <a:ea typeface="D2Coding" panose="020B0609020101020101" pitchFamily="49" charset="-127"/>
+              </a:rPr>
+              <a:t> 설치하고 </a:t>
+            </a:r>
+            <a:r>
+              <a:rPr lang="en-US" altLang="ko-KR" dirty="0" err="1">
+                <a:latin typeface="D2Coding" panose="020B0609020101020101" pitchFamily="49" charset="-127"/>
+                <a:ea typeface="D2Coding" panose="020B0609020101020101" pitchFamily="49" charset="-127"/>
+              </a:rPr>
+              <a:t>Ubutu</a:t>
+            </a:r>
+            <a:r>
+              <a:rPr lang="en-US" altLang="ko-KR" dirty="0">
+                <a:latin typeface="D2Coding" panose="020B0609020101020101" pitchFamily="49" charset="-127"/>
+                <a:ea typeface="D2Coding" panose="020B0609020101020101" pitchFamily="49" charset="-127"/>
+              </a:rPr>
+              <a:t> </a:t>
+            </a:r>
+            <a:r>
+              <a:rPr lang="ko-KR" altLang="en-US" dirty="0">
+                <a:latin typeface="D2Coding" panose="020B0609020101020101" pitchFamily="49" charset="-127"/>
+                <a:ea typeface="D2Coding" panose="020B0609020101020101" pitchFamily="49" charset="-127"/>
+              </a:rPr>
+              <a:t>올리시고</a:t>
+            </a:r>
+            <a:endParaRPr lang="en-US" altLang="ko-KR" dirty="0">
+              <a:latin typeface="D2Coding" panose="020B0609020101020101" pitchFamily="49" charset="-127"/>
+              <a:ea typeface="D2Coding" panose="020B0609020101020101" pitchFamily="49" charset="-127"/>
+            </a:endParaRPr>
+          </a:p>
+          <a:p>
+            <a:pPr marL="285750" indent="-285750">
+              <a:lnSpc>
+                <a:spcPct val="200000"/>
+              </a:lnSpc>
+              <a:buFont typeface="Wingdings" panose="05000000000000000000" pitchFamily="2" charset="2"/>
+              <a:buChar char="v"/>
+            </a:pPr>
+            <a:r>
+              <a:rPr lang="en-US" altLang="ko-KR" dirty="0">
+                <a:latin typeface="D2Coding" panose="020B0609020101020101" pitchFamily="49" charset="-127"/>
+                <a:ea typeface="D2Coding" panose="020B0609020101020101" pitchFamily="49" charset="-127"/>
+                <a:hlinkClick r:id="rId3"/>
+              </a:rPr>
+              <a:t>docker </a:t>
+            </a:r>
+            <a:r>
+              <a:rPr lang="en-US" altLang="ko-KR" dirty="0" err="1">
+                <a:latin typeface="D2Coding" panose="020B0609020101020101" pitchFamily="49" charset="-127"/>
+                <a:ea typeface="D2Coding" panose="020B0609020101020101" pitchFamily="49" charset="-127"/>
+                <a:hlinkClick r:id="rId3"/>
+              </a:rPr>
+              <a:t>desltop</a:t>
+            </a:r>
+            <a:r>
+              <a:rPr lang="ko-KR" altLang="en-US" dirty="0">
+                <a:latin typeface="D2Coding" panose="020B0609020101020101" pitchFamily="49" charset="-127"/>
+                <a:ea typeface="D2Coding" panose="020B0609020101020101" pitchFamily="49" charset="-127"/>
+              </a:rPr>
+              <a:t> 으로 </a:t>
+            </a:r>
+            <a:r>
+              <a:rPr lang="en-US" altLang="ko-KR" dirty="0">
+                <a:latin typeface="D2Coding" panose="020B0609020101020101" pitchFamily="49" charset="-127"/>
+                <a:ea typeface="D2Coding" panose="020B0609020101020101" pitchFamily="49" charset="-127"/>
+              </a:rPr>
+              <a:t>Docker </a:t>
+            </a:r>
+            <a:r>
+              <a:rPr lang="ko-KR" altLang="en-US" dirty="0">
+                <a:latin typeface="D2Coding" panose="020B0609020101020101" pitchFamily="49" charset="-127"/>
+                <a:ea typeface="D2Coding" panose="020B0609020101020101" pitchFamily="49" charset="-127"/>
+              </a:rPr>
+              <a:t>묻고</a:t>
+            </a:r>
+            <a:endParaRPr lang="en-US" altLang="ko-KR" dirty="0">
+              <a:latin typeface="D2Coding" panose="020B0609020101020101" pitchFamily="49" charset="-127"/>
+              <a:ea typeface="D2Coding" panose="020B0609020101020101" pitchFamily="49" charset="-127"/>
+            </a:endParaRPr>
+          </a:p>
+          <a:p>
+            <a:pPr marL="285750" indent="-285750">
+              <a:lnSpc>
+                <a:spcPct val="200000"/>
+              </a:lnSpc>
+              <a:buFont typeface="Wingdings" panose="05000000000000000000" pitchFamily="2" charset="2"/>
+              <a:buChar char="v"/>
+            </a:pPr>
+            <a:r>
+              <a:rPr lang="ko-KR" altLang="en-US" dirty="0">
+                <a:latin typeface="D2Coding" panose="020B0609020101020101" pitchFamily="49" charset="-127"/>
+                <a:ea typeface="D2Coding" panose="020B0609020101020101" pitchFamily="49" charset="-127"/>
+                <a:hlinkClick r:id="rId4"/>
+              </a:rPr>
+              <a:t>자동화 </a:t>
+            </a:r>
+            <a:r>
+              <a:rPr lang="ko-KR" altLang="en-US" dirty="0" err="1">
+                <a:latin typeface="D2Coding" panose="020B0609020101020101" pitchFamily="49" charset="-127"/>
+                <a:ea typeface="D2Coding" panose="020B0609020101020101" pitchFamily="49" charset="-127"/>
+                <a:hlinkClick r:id="rId4"/>
+              </a:rPr>
+              <a:t>끝판왕</a:t>
+            </a:r>
+            <a:r>
+              <a:rPr lang="ko-KR" altLang="en-US" dirty="0">
+                <a:latin typeface="D2Coding" panose="020B0609020101020101" pitchFamily="49" charset="-127"/>
+                <a:ea typeface="D2Coding" panose="020B0609020101020101" pitchFamily="49" charset="-127"/>
+                <a:hlinkClick r:id="rId4"/>
+              </a:rPr>
+              <a:t> </a:t>
+            </a:r>
+            <a:r>
+              <a:rPr lang="en-US" altLang="ko-KR" dirty="0">
+                <a:latin typeface="D2Coding" panose="020B0609020101020101" pitchFamily="49" charset="-127"/>
+                <a:ea typeface="D2Coding" panose="020B0609020101020101" pitchFamily="49" charset="-127"/>
+                <a:hlinkClick r:id="rId4"/>
+              </a:rPr>
+              <a:t>n8n, </a:t>
+            </a:r>
+            <a:r>
+              <a:rPr lang="ko-KR" altLang="en-US" dirty="0">
+                <a:latin typeface="D2Coding" panose="020B0609020101020101" pitchFamily="49" charset="-127"/>
+                <a:ea typeface="D2Coding" panose="020B0609020101020101" pitchFamily="49" charset="-127"/>
+                <a:hlinkClick r:id="rId4"/>
+              </a:rPr>
+              <a:t>이렇게 설치하면 평생 무료입니다</a:t>
+            </a:r>
+            <a:r>
+              <a:rPr lang="en-US" altLang="ko-KR" dirty="0">
+                <a:latin typeface="D2Coding" panose="020B0609020101020101" pitchFamily="49" charset="-127"/>
+                <a:ea typeface="D2Coding" panose="020B0609020101020101" pitchFamily="49" charset="-127"/>
+                <a:hlinkClick r:id="rId4"/>
+              </a:rPr>
+              <a:t>! (</a:t>
+            </a:r>
+            <a:r>
+              <a:rPr lang="ko-KR" altLang="en-US" dirty="0" err="1">
+                <a:latin typeface="D2Coding" panose="020B0609020101020101" pitchFamily="49" charset="-127"/>
+                <a:ea typeface="D2Coding" panose="020B0609020101020101" pitchFamily="49" charset="-127"/>
+                <a:hlinkClick r:id="rId4"/>
+              </a:rPr>
+              <a:t>웹훅</a:t>
+            </a:r>
+            <a:r>
+              <a:rPr lang="ko-KR" altLang="en-US" dirty="0">
+                <a:latin typeface="D2Coding" panose="020B0609020101020101" pitchFamily="49" charset="-127"/>
+                <a:ea typeface="D2Coding" panose="020B0609020101020101" pitchFamily="49" charset="-127"/>
+                <a:hlinkClick r:id="rId4"/>
+              </a:rPr>
+              <a:t> 설정</a:t>
+            </a:r>
+            <a:r>
+              <a:rPr lang="en-US" altLang="ko-KR" dirty="0">
+                <a:latin typeface="D2Coding" panose="020B0609020101020101" pitchFamily="49" charset="-127"/>
+                <a:ea typeface="D2Coding" panose="020B0609020101020101" pitchFamily="49" charset="-127"/>
+                <a:hlinkClick r:id="rId4"/>
+              </a:rPr>
+              <a:t>, </a:t>
+            </a:r>
+            <a:r>
+              <a:rPr lang="ko-KR" altLang="en-US" dirty="0">
+                <a:latin typeface="D2Coding" panose="020B0609020101020101" pitchFamily="49" charset="-127"/>
+                <a:ea typeface="D2Coding" panose="020B0609020101020101" pitchFamily="49" charset="-127"/>
+                <a:hlinkClick r:id="rId4"/>
+              </a:rPr>
+              <a:t>버전 업데이트 포함</a:t>
+            </a:r>
+            <a:r>
+              <a:rPr lang="en-US" altLang="ko-KR" dirty="0">
+                <a:latin typeface="D2Coding" panose="020B0609020101020101" pitchFamily="49" charset="-127"/>
+                <a:ea typeface="D2Coding" panose="020B0609020101020101" pitchFamily="49" charset="-127"/>
+                <a:hlinkClick r:id="rId4"/>
+              </a:rPr>
+              <a:t>)</a:t>
+            </a:r>
+            <a:r>
+              <a:rPr lang="ko-KR" altLang="en-US" dirty="0">
+                <a:latin typeface="D2Coding" panose="020B0609020101020101" pitchFamily="49" charset="-127"/>
+                <a:ea typeface="D2Coding" panose="020B0609020101020101" pitchFamily="49" charset="-127"/>
+              </a:rPr>
+              <a:t> 보시고 따라해서 </a:t>
+            </a:r>
+            <a:r>
+              <a:rPr lang="en-US" altLang="ko-KR" dirty="0">
+                <a:latin typeface="D2Coding" panose="020B0609020101020101" pitchFamily="49" charset="-127"/>
+                <a:ea typeface="D2Coding" panose="020B0609020101020101" pitchFamily="49" charset="-127"/>
+              </a:rPr>
+              <a:t>n8n </a:t>
+            </a:r>
+            <a:r>
+              <a:rPr lang="ko-KR" altLang="en-US" dirty="0">
+                <a:latin typeface="D2Coding" panose="020B0609020101020101" pitchFamily="49" charset="-127"/>
+                <a:ea typeface="D2Coding" panose="020B0609020101020101" pitchFamily="49" charset="-127"/>
+              </a:rPr>
+              <a:t>로컬에 설치</a:t>
+            </a:r>
+            <a:endParaRPr lang="en-US" altLang="ko-KR" dirty="0">
+              <a:latin typeface="D2Coding" panose="020B0609020101020101" pitchFamily="49" charset="-127"/>
+              <a:ea typeface="D2Coding" panose="020B0609020101020101" pitchFamily="49" charset="-127"/>
+            </a:endParaRPr>
+          </a:p>
+        </p:txBody>
+      </p:sp>
+    </p:spTree>
+    <p:extLst>
+      <p:ext uri="{BB962C8B-B14F-4D97-AF65-F5344CB8AC3E}">
+        <p14:creationId xmlns:p14="http://schemas.microsoft.com/office/powerpoint/2010/main" val="457506288"/>
+      </p:ext>
+    </p:extLst>
+  </p:cSld>
+  <p:clrMapOvr>
+    <a:masterClrMapping/>
+  </p:clrMapOvr>
+</p:sld>
+</file>
+
+<file path=ppt/slides/slide40.xml><?xml version="1.0" encoding="utf-8"?>
+<p:sld xmlns:a="http://schemas.openxmlformats.org/drawingml/2006/main" xmlns:r="http://schemas.openxmlformats.org/officeDocument/2006/relationships" xmlns:p="http://schemas.openxmlformats.org/presentationml/2006/main">
+  <p:cSld>
+    <p:spTree>
+      <p:nvGrpSpPr>
+        <p:cNvPr id="1" name="">
+          <a:extLst>
+            <a:ext uri="{FF2B5EF4-FFF2-40B4-BE49-F238E27FC236}">
+              <a16:creationId xmlns:a16="http://schemas.microsoft.com/office/drawing/2014/main" id="{8AE9D34D-0A21-41AD-064D-27658C9D7FF3}"/>
+            </a:ext>
+          </a:extLst>
+        </p:cNvPr>
+        <p:cNvGrpSpPr/>
+        <p:nvPr/>
+      </p:nvGrpSpPr>
+      <p:grpSpPr>
+        <a:xfrm>
+          <a:off x="0" y="0"/>
+          <a:ext cx="0" cy="0"/>
+          <a:chOff x="0" y="0"/>
+          <a:chExt cx="0" cy="0"/>
+        </a:xfrm>
+      </p:grpSpPr>
+      <p:sp>
+        <p:nvSpPr>
+          <p:cNvPr id="3" name="제목 1">
+            <a:extLst>
+              <a:ext uri="{FF2B5EF4-FFF2-40B4-BE49-F238E27FC236}">
+                <a16:creationId xmlns:a16="http://schemas.microsoft.com/office/drawing/2014/main" id="{97A04655-F73F-C692-DA20-228FBED4E099}"/>
+              </a:ext>
+            </a:extLst>
+          </p:cNvPr>
+          <p:cNvSpPr txBox="1">
+            <a:spLocks/>
+          </p:cNvSpPr>
+          <p:nvPr/>
+        </p:nvSpPr>
+        <p:spPr>
+          <a:xfrm>
+            <a:off x="475645" y="481983"/>
+            <a:ext cx="10353762" cy="766439"/>
+          </a:xfrm>
+          <a:prstGeom prst="rect">
+            <a:avLst/>
+          </a:prstGeom>
+        </p:spPr>
+        <p:txBody>
+          <a:bodyPr vert="horz" lIns="91440" tIns="45720" rIns="91440" bIns="45720" rtlCol="0" anchor="ctr">
+            <a:normAutofit/>
+          </a:bodyPr>
+          <a:lstStyle>
+            <a:lvl1pPr algn="ctr" defTabSz="914400" rtl="0" eaLnBrk="1" latinLnBrk="1" hangingPunct="1">
+              <a:lnSpc>
+                <a:spcPct val="90000"/>
+              </a:lnSpc>
+              <a:spcBef>
+                <a:spcPct val="0"/>
+              </a:spcBef>
+              <a:buNone/>
+              <a:defRPr sz="3200" kern="1200" cap="all" baseline="0">
+                <a:solidFill>
+                  <a:schemeClr val="tx1"/>
+                </a:solidFill>
+                <a:effectLst/>
+                <a:latin typeface="Batang" panose="02030600000101010101" pitchFamily="18" charset="-127"/>
+                <a:ea typeface="Batang" panose="02030600000101010101" pitchFamily="18" charset="-127"/>
+                <a:cs typeface="+mj-cs"/>
+              </a:defRPr>
+            </a:lvl1pPr>
+          </a:lstStyle>
+          <a:p>
+            <a:pPr algn="l"/>
+            <a:r>
+              <a:rPr lang="en-US" altLang="ko-KR" sz="2800" cap="none" dirty="0">
+                <a:solidFill>
+                  <a:schemeClr val="bg2">
+                    <a:lumMod val="25000"/>
+                  </a:schemeClr>
+                </a:solidFill>
+                <a:latin typeface="D2Coding" panose="020B0609020101020101" pitchFamily="49" charset="-127"/>
+                <a:ea typeface="D2Coding" panose="020B0609020101020101" pitchFamily="49" charset="-127"/>
+                <a:cs typeface="Segoe UI Light" panose="020B0502040204020203" pitchFamily="34" charset="0"/>
+              </a:rPr>
+              <a:t>Vector DB </a:t>
+            </a:r>
+            <a:endParaRPr lang="ko-KR" altLang="en-US" sz="2800" cap="none" dirty="0">
+              <a:solidFill>
+                <a:schemeClr val="bg2">
+                  <a:lumMod val="25000"/>
+                </a:schemeClr>
+              </a:solidFill>
+              <a:latin typeface="D2Coding" panose="020B0609020101020101" pitchFamily="49" charset="-127"/>
+              <a:ea typeface="D2Coding" panose="020B0609020101020101" pitchFamily="49" charset="-127"/>
+              <a:cs typeface="Segoe UI Light" panose="020B0502040204020203" pitchFamily="34" charset="0"/>
+            </a:endParaRPr>
+          </a:p>
+        </p:txBody>
+      </p:sp>
+      <p:sp>
+        <p:nvSpPr>
+          <p:cNvPr id="8" name="TextBox 7">
+            <a:extLst>
+              <a:ext uri="{FF2B5EF4-FFF2-40B4-BE49-F238E27FC236}">
+                <a16:creationId xmlns:a16="http://schemas.microsoft.com/office/drawing/2014/main" id="{240758F3-0A33-C8BA-EB4E-5FC35B12E3FF}"/>
+              </a:ext>
+            </a:extLst>
+          </p:cNvPr>
+          <p:cNvSpPr txBox="1"/>
+          <p:nvPr/>
+        </p:nvSpPr>
+        <p:spPr>
+          <a:xfrm>
+            <a:off x="744020" y="3244334"/>
+            <a:ext cx="184731" cy="369332"/>
+          </a:xfrm>
+          <a:prstGeom prst="rect">
+            <a:avLst/>
+          </a:prstGeom>
+          <a:noFill/>
+        </p:spPr>
+        <p:txBody>
+          <a:bodyPr wrap="none" rtlCol="0">
+            <a:spAutoFit/>
+          </a:bodyPr>
+          <a:lstStyle/>
+          <a:p>
+            <a:endParaRPr lang="ko-KR" altLang="en-US" dirty="0">
+              <a:solidFill>
+                <a:schemeClr val="accent5"/>
+              </a:solidFill>
+              <a:latin typeface="D2Coding" panose="020B0609020101020101" pitchFamily="49" charset="-127"/>
+              <a:ea typeface="D2Coding" panose="020B0609020101020101" pitchFamily="49" charset="-127"/>
+            </a:endParaRPr>
+          </a:p>
+        </p:txBody>
+      </p:sp>
+      <p:sp>
+        <p:nvSpPr>
+          <p:cNvPr id="2" name="슬라이드 번호 개체 틀 3">
+            <a:extLst>
+              <a:ext uri="{FF2B5EF4-FFF2-40B4-BE49-F238E27FC236}">
+                <a16:creationId xmlns:a16="http://schemas.microsoft.com/office/drawing/2014/main" id="{CDC0102E-1733-08D1-7FD2-1BC3C9FEAB0A}"/>
+              </a:ext>
+            </a:extLst>
+          </p:cNvPr>
+          <p:cNvSpPr txBox="1">
+            <a:spLocks/>
+          </p:cNvSpPr>
+          <p:nvPr/>
+        </p:nvSpPr>
+        <p:spPr>
+          <a:xfrm>
+            <a:off x="11180761" y="299420"/>
+            <a:ext cx="753545" cy="365125"/>
+          </a:xfrm>
+          <a:prstGeom prst="rect">
+            <a:avLst/>
+          </a:prstGeom>
+        </p:spPr>
+        <p:txBody>
+          <a:bodyPr vert="horz" lIns="91440" tIns="45720" rIns="91440" bIns="45720" rtlCol="0" anchor="ctr"/>
+          <a:lstStyle>
+            <a:defPPr rtl="0">
+              <a:defRPr lang="ko-KR"/>
+            </a:defPPr>
+            <a:lvl1pPr marL="0" algn="r" defTabSz="914400" rtl="0" eaLnBrk="1" latinLnBrk="0" hangingPunct="1">
+              <a:defRPr sz="1200" kern="1200" baseline="0">
+                <a:solidFill>
+                  <a:schemeClr val="tx1">
+                    <a:lumMod val="65000"/>
+                    <a:lumOff val="35000"/>
+                  </a:schemeClr>
+                </a:solidFill>
+                <a:latin typeface="맑은 고딕" panose="020B0503020000020004" pitchFamily="50" charset="-127"/>
+                <a:ea typeface="맑은 고딕" panose="020B0503020000020004" pitchFamily="50" charset="-127"/>
+                <a:cs typeface="+mn-cs"/>
+              </a:defRPr>
+            </a:lvl1pPr>
+            <a:lvl2pPr marL="457200" algn="l" defTabSz="914400" rtl="0" eaLnBrk="1" latinLnBrk="0" hangingPunct="1">
+              <a:defRPr sz="1800" kern="1200">
+                <a:solidFill>
+                  <a:schemeClr val="tx1"/>
+                </a:solidFill>
+                <a:latin typeface="+mn-lt"/>
+                <a:ea typeface="+mn-ea"/>
+                <a:cs typeface="+mn-cs"/>
+              </a:defRPr>
+            </a:lvl2pPr>
+            <a:lvl3pPr marL="914400" algn="l" defTabSz="914400" rtl="0" eaLnBrk="1" latinLnBrk="0" hangingPunct="1">
+              <a:defRPr sz="1800" kern="1200">
+                <a:solidFill>
+                  <a:schemeClr val="tx1"/>
+                </a:solidFill>
+                <a:latin typeface="+mn-lt"/>
+                <a:ea typeface="+mn-ea"/>
+                <a:cs typeface="+mn-cs"/>
+              </a:defRPr>
+            </a:lvl3pPr>
+            <a:lvl4pPr marL="1371600" algn="l" defTabSz="914400" rtl="0" eaLnBrk="1" latinLnBrk="0" hangingPunct="1">
+              <a:defRPr sz="1800" kern="1200">
+                <a:solidFill>
+                  <a:schemeClr val="tx1"/>
+                </a:solidFill>
+                <a:latin typeface="+mn-lt"/>
+                <a:ea typeface="+mn-ea"/>
+                <a:cs typeface="+mn-cs"/>
+              </a:defRPr>
+            </a:lvl4pPr>
+            <a:lvl5pPr marL="1828800" algn="l" defTabSz="914400" rtl="0" eaLnBrk="1" latinLnBrk="0" hangingPunct="1">
+              <a:defRPr sz="1800" kern="1200">
+                <a:solidFill>
+                  <a:schemeClr val="tx1"/>
+                </a:solidFill>
+                <a:latin typeface="+mn-lt"/>
+                <a:ea typeface="+mn-ea"/>
+                <a:cs typeface="+mn-cs"/>
+              </a:defRPr>
+            </a:lvl5pPr>
+            <a:lvl6pPr marL="2286000" algn="l" defTabSz="914400" rtl="0" eaLnBrk="1" latinLnBrk="0" hangingPunct="1">
+              <a:defRPr sz="1800" kern="1200">
+                <a:solidFill>
+                  <a:schemeClr val="tx1"/>
+                </a:solidFill>
+                <a:latin typeface="+mn-lt"/>
+                <a:ea typeface="+mn-ea"/>
+                <a:cs typeface="+mn-cs"/>
+              </a:defRPr>
+            </a:lvl6pPr>
+            <a:lvl7pPr marL="2743200" algn="l" defTabSz="914400" rtl="0" eaLnBrk="1" latinLnBrk="0" hangingPunct="1">
+              <a:defRPr sz="1800" kern="1200">
+                <a:solidFill>
+                  <a:schemeClr val="tx1"/>
+                </a:solidFill>
+                <a:latin typeface="+mn-lt"/>
+                <a:ea typeface="+mn-ea"/>
+                <a:cs typeface="+mn-cs"/>
+              </a:defRPr>
+            </a:lvl7pPr>
+            <a:lvl8pPr marL="3200400" algn="l" defTabSz="914400" rtl="0" eaLnBrk="1" latinLnBrk="0" hangingPunct="1">
+              <a:defRPr sz="1800" kern="1200">
+                <a:solidFill>
+                  <a:schemeClr val="tx1"/>
+                </a:solidFill>
+                <a:latin typeface="+mn-lt"/>
+                <a:ea typeface="+mn-ea"/>
+                <a:cs typeface="+mn-cs"/>
+              </a:defRPr>
+            </a:lvl8pPr>
+            <a:lvl9pPr marL="3657600" algn="l" defTabSz="914400" rtl="0" eaLnBrk="1" latinLnBrk="0" hangingPunct="1">
+              <a:defRPr sz="1800" kern="1200">
+                <a:solidFill>
+                  <a:schemeClr val="tx1"/>
+                </a:solidFill>
+                <a:latin typeface="+mn-lt"/>
+                <a:ea typeface="+mn-ea"/>
+                <a:cs typeface="+mn-cs"/>
+              </a:defRPr>
+            </a:lvl9pPr>
+          </a:lstStyle>
+          <a:p>
+            <a:fld id="{D57F1E4F-1CFF-5643-939E-217C01CDF565}" type="slidenum">
+              <a:rPr lang="en-US" b="1" smtClean="0">
+                <a:latin typeface="Segoe UI Emoji" panose="020B0502040204020203" pitchFamily="34" charset="0"/>
+                <a:ea typeface="Segoe UI Emoji" panose="020B0502040204020203" pitchFamily="34" charset="0"/>
+              </a:rPr>
+              <a:pPr/>
+              <a:t>40</a:t>
+            </a:fld>
+            <a:endParaRPr lang="en-US" b="1" dirty="0">
+              <a:latin typeface="Segoe UI Emoji" panose="020B0502040204020203" pitchFamily="34" charset="0"/>
+              <a:ea typeface="Segoe UI Emoji" panose="020B0502040204020203" pitchFamily="34" charset="0"/>
+            </a:endParaRPr>
+          </a:p>
+        </p:txBody>
+      </p:sp>
+      <p:pic>
+        <p:nvPicPr>
+          <p:cNvPr id="5" name="그림 4">
+            <a:extLst>
+              <a:ext uri="{FF2B5EF4-FFF2-40B4-BE49-F238E27FC236}">
+                <a16:creationId xmlns:a16="http://schemas.microsoft.com/office/drawing/2014/main" id="{151A40CA-E54E-3283-851B-7CE4FFFAD540}"/>
+              </a:ext>
+            </a:extLst>
+          </p:cNvPr>
+          <p:cNvPicPr>
+            <a:picLocks noChangeAspect="1"/>
+          </p:cNvPicPr>
+          <p:nvPr/>
+        </p:nvPicPr>
+        <p:blipFill>
+          <a:blip r:embed="rId2"/>
+          <a:stretch>
+            <a:fillRect/>
+          </a:stretch>
+        </p:blipFill>
+        <p:spPr>
+          <a:xfrm>
+            <a:off x="604276" y="1865788"/>
+            <a:ext cx="11062340" cy="3830161"/>
+          </a:xfrm>
+          <a:prstGeom prst="rect">
+            <a:avLst/>
+          </a:prstGeom>
+        </p:spPr>
+      </p:pic>
+      <p:sp>
+        <p:nvSpPr>
+          <p:cNvPr id="6" name="직사각형 5">
+            <a:extLst>
+              <a:ext uri="{FF2B5EF4-FFF2-40B4-BE49-F238E27FC236}">
+                <a16:creationId xmlns:a16="http://schemas.microsoft.com/office/drawing/2014/main" id="{AFD99DCE-8C94-5492-6201-6B001FC473BA}"/>
+              </a:ext>
+            </a:extLst>
+          </p:cNvPr>
+          <p:cNvSpPr/>
+          <p:nvPr/>
+        </p:nvSpPr>
+        <p:spPr>
+          <a:xfrm>
+            <a:off x="629720" y="3164444"/>
+            <a:ext cx="408505" cy="369332"/>
+          </a:xfrm>
+          <a:prstGeom prst="rect">
+            <a:avLst/>
+          </a:prstGeom>
+          <a:noFill/>
+          <a:ln w="19050">
+            <a:solidFill>
+              <a:schemeClr val="bg1"/>
+            </a:solidFill>
+          </a:ln>
+        </p:spPr>
+        <p:style>
+          <a:lnRef idx="2">
+            <a:schemeClr val="accent1">
+              <a:shade val="15000"/>
+            </a:schemeClr>
+          </a:lnRef>
+          <a:fillRef idx="1">
+            <a:schemeClr val="accent1"/>
+          </a:fillRef>
+          <a:effectRef idx="0">
+            <a:schemeClr val="accent1"/>
+          </a:effectRef>
+          <a:fontRef idx="minor">
+            <a:schemeClr val="lt1"/>
+          </a:fontRef>
+        </p:style>
+        <p:txBody>
+          <a:bodyPr rtlCol="0" anchor="ctr"/>
+          <a:lstStyle/>
+          <a:p>
+            <a:pPr algn="ctr"/>
+            <a:endParaRPr lang="ko-KR" altLang="en-US" dirty="0"/>
+          </a:p>
+        </p:txBody>
+      </p:sp>
+    </p:spTree>
+    <p:extLst>
+      <p:ext uri="{BB962C8B-B14F-4D97-AF65-F5344CB8AC3E}">
+        <p14:creationId xmlns:p14="http://schemas.microsoft.com/office/powerpoint/2010/main" val="3145419576"/>
+      </p:ext>
+    </p:extLst>
+  </p:cSld>
+  <p:clrMapOvr>
+    <a:masterClrMapping/>
+  </p:clrMapOvr>
+</p:sld>
+</file>
+
+<file path=ppt/slides/slide41.xml><?xml version="1.0" encoding="utf-8"?>
+<p:sld xmlns:a="http://schemas.openxmlformats.org/drawingml/2006/main" xmlns:r="http://schemas.openxmlformats.org/officeDocument/2006/relationships" xmlns:p="http://schemas.openxmlformats.org/presentationml/2006/main">
+  <p:cSld>
+    <p:spTree>
+      <p:nvGrpSpPr>
+        <p:cNvPr id="1" name="">
+          <a:extLst>
+            <a:ext uri="{FF2B5EF4-FFF2-40B4-BE49-F238E27FC236}">
+              <a16:creationId xmlns:a16="http://schemas.microsoft.com/office/drawing/2014/main" id="{376A2EE0-7B72-4636-10DC-B8C3D1A3C2BF}"/>
+            </a:ext>
+          </a:extLst>
+        </p:cNvPr>
+        <p:cNvGrpSpPr/>
+        <p:nvPr/>
+      </p:nvGrpSpPr>
+      <p:grpSpPr>
+        <a:xfrm>
+          <a:off x="0" y="0"/>
+          <a:ext cx="0" cy="0"/>
+          <a:chOff x="0" y="0"/>
+          <a:chExt cx="0" cy="0"/>
+        </a:xfrm>
+      </p:grpSpPr>
+      <p:sp>
+        <p:nvSpPr>
+          <p:cNvPr id="3" name="제목 1">
+            <a:extLst>
+              <a:ext uri="{FF2B5EF4-FFF2-40B4-BE49-F238E27FC236}">
+                <a16:creationId xmlns:a16="http://schemas.microsoft.com/office/drawing/2014/main" id="{0D182C5E-A618-FBDF-99A3-BB6BFA0BF99F}"/>
+              </a:ext>
+            </a:extLst>
+          </p:cNvPr>
+          <p:cNvSpPr txBox="1">
+            <a:spLocks/>
+          </p:cNvSpPr>
+          <p:nvPr/>
+        </p:nvSpPr>
+        <p:spPr>
+          <a:xfrm>
+            <a:off x="475645" y="481983"/>
+            <a:ext cx="10353762" cy="766439"/>
+          </a:xfrm>
+          <a:prstGeom prst="rect">
+            <a:avLst/>
+          </a:prstGeom>
+        </p:spPr>
+        <p:txBody>
+          <a:bodyPr vert="horz" lIns="91440" tIns="45720" rIns="91440" bIns="45720" rtlCol="0" anchor="ctr">
+            <a:normAutofit/>
+          </a:bodyPr>
+          <a:lstStyle>
+            <a:lvl1pPr algn="ctr" defTabSz="914400" rtl="0" eaLnBrk="1" latinLnBrk="1" hangingPunct="1">
+              <a:lnSpc>
+                <a:spcPct val="90000"/>
+              </a:lnSpc>
+              <a:spcBef>
+                <a:spcPct val="0"/>
+              </a:spcBef>
+              <a:buNone/>
+              <a:defRPr sz="3200" kern="1200" cap="all" baseline="0">
+                <a:solidFill>
+                  <a:schemeClr val="tx1"/>
+                </a:solidFill>
+                <a:effectLst/>
+                <a:latin typeface="Batang" panose="02030600000101010101" pitchFamily="18" charset="-127"/>
+                <a:ea typeface="Batang" panose="02030600000101010101" pitchFamily="18" charset="-127"/>
+                <a:cs typeface="+mj-cs"/>
+              </a:defRPr>
+            </a:lvl1pPr>
+          </a:lstStyle>
+          <a:p>
+            <a:pPr algn="l"/>
+            <a:r>
+              <a:rPr lang="en-US" altLang="ko-KR" sz="2800" cap="none" dirty="0">
+                <a:solidFill>
+                  <a:schemeClr val="bg2">
+                    <a:lumMod val="25000"/>
+                  </a:schemeClr>
+                </a:solidFill>
+                <a:latin typeface="D2Coding" panose="020B0609020101020101" pitchFamily="49" charset="-127"/>
+                <a:ea typeface="D2Coding" panose="020B0609020101020101" pitchFamily="49" charset="-127"/>
+                <a:cs typeface="Segoe UI Light" panose="020B0502040204020203" pitchFamily="34" charset="0"/>
+              </a:rPr>
+              <a:t>Vector DB </a:t>
+            </a:r>
+            <a:endParaRPr lang="ko-KR" altLang="en-US" sz="2800" cap="none" dirty="0">
+              <a:solidFill>
+                <a:schemeClr val="bg2">
+                  <a:lumMod val="25000"/>
+                </a:schemeClr>
+              </a:solidFill>
+              <a:latin typeface="D2Coding" panose="020B0609020101020101" pitchFamily="49" charset="-127"/>
+              <a:ea typeface="D2Coding" panose="020B0609020101020101" pitchFamily="49" charset="-127"/>
+              <a:cs typeface="Segoe UI Light" panose="020B0502040204020203" pitchFamily="34" charset="0"/>
+            </a:endParaRPr>
+          </a:p>
+        </p:txBody>
+      </p:sp>
+      <p:sp>
+        <p:nvSpPr>
+          <p:cNvPr id="8" name="TextBox 7">
+            <a:extLst>
+              <a:ext uri="{FF2B5EF4-FFF2-40B4-BE49-F238E27FC236}">
+                <a16:creationId xmlns:a16="http://schemas.microsoft.com/office/drawing/2014/main" id="{F5D3D47D-BCDE-46D7-2CB8-47AE6F48570E}"/>
+              </a:ext>
+            </a:extLst>
+          </p:cNvPr>
+          <p:cNvSpPr txBox="1"/>
+          <p:nvPr/>
+        </p:nvSpPr>
+        <p:spPr>
+          <a:xfrm>
+            <a:off x="744020" y="3244334"/>
+            <a:ext cx="184731" cy="369332"/>
+          </a:xfrm>
+          <a:prstGeom prst="rect">
+            <a:avLst/>
+          </a:prstGeom>
+          <a:noFill/>
+        </p:spPr>
+        <p:txBody>
+          <a:bodyPr wrap="none" rtlCol="0">
+            <a:spAutoFit/>
+          </a:bodyPr>
+          <a:lstStyle/>
+          <a:p>
+            <a:endParaRPr lang="ko-KR" altLang="en-US" dirty="0">
+              <a:solidFill>
+                <a:schemeClr val="accent5"/>
+              </a:solidFill>
+              <a:latin typeface="D2Coding" panose="020B0609020101020101" pitchFamily="49" charset="-127"/>
+              <a:ea typeface="D2Coding" panose="020B0609020101020101" pitchFamily="49" charset="-127"/>
+            </a:endParaRPr>
+          </a:p>
+        </p:txBody>
+      </p:sp>
+      <p:sp>
+        <p:nvSpPr>
+          <p:cNvPr id="2" name="슬라이드 번호 개체 틀 3">
+            <a:extLst>
+              <a:ext uri="{FF2B5EF4-FFF2-40B4-BE49-F238E27FC236}">
+                <a16:creationId xmlns:a16="http://schemas.microsoft.com/office/drawing/2014/main" id="{9126CBDC-323D-F49A-AF4C-D176A51EA622}"/>
+              </a:ext>
+            </a:extLst>
+          </p:cNvPr>
+          <p:cNvSpPr txBox="1">
+            <a:spLocks/>
+          </p:cNvSpPr>
+          <p:nvPr/>
+        </p:nvSpPr>
+        <p:spPr>
+          <a:xfrm>
+            <a:off x="11180761" y="299420"/>
+            <a:ext cx="753545" cy="365125"/>
+          </a:xfrm>
+          <a:prstGeom prst="rect">
+            <a:avLst/>
+          </a:prstGeom>
+        </p:spPr>
+        <p:txBody>
+          <a:bodyPr vert="horz" lIns="91440" tIns="45720" rIns="91440" bIns="45720" rtlCol="0" anchor="ctr"/>
+          <a:lstStyle>
+            <a:defPPr rtl="0">
+              <a:defRPr lang="ko-KR"/>
+            </a:defPPr>
+            <a:lvl1pPr marL="0" algn="r" defTabSz="914400" rtl="0" eaLnBrk="1" latinLnBrk="0" hangingPunct="1">
+              <a:defRPr sz="1200" kern="1200" baseline="0">
+                <a:solidFill>
+                  <a:schemeClr val="tx1">
+                    <a:lumMod val="65000"/>
+                    <a:lumOff val="35000"/>
+                  </a:schemeClr>
+                </a:solidFill>
+                <a:latin typeface="맑은 고딕" panose="020B0503020000020004" pitchFamily="50" charset="-127"/>
+                <a:ea typeface="맑은 고딕" panose="020B0503020000020004" pitchFamily="50" charset="-127"/>
+                <a:cs typeface="+mn-cs"/>
+              </a:defRPr>
+            </a:lvl1pPr>
+            <a:lvl2pPr marL="457200" algn="l" defTabSz="914400" rtl="0" eaLnBrk="1" latinLnBrk="0" hangingPunct="1">
+              <a:defRPr sz="1800" kern="1200">
+                <a:solidFill>
+                  <a:schemeClr val="tx1"/>
+                </a:solidFill>
+                <a:latin typeface="+mn-lt"/>
+                <a:ea typeface="+mn-ea"/>
+                <a:cs typeface="+mn-cs"/>
+              </a:defRPr>
+            </a:lvl2pPr>
+            <a:lvl3pPr marL="914400" algn="l" defTabSz="914400" rtl="0" eaLnBrk="1" latinLnBrk="0" hangingPunct="1">
+              <a:defRPr sz="1800" kern="1200">
+                <a:solidFill>
+                  <a:schemeClr val="tx1"/>
+                </a:solidFill>
+                <a:latin typeface="+mn-lt"/>
+                <a:ea typeface="+mn-ea"/>
+                <a:cs typeface="+mn-cs"/>
+              </a:defRPr>
+            </a:lvl3pPr>
+            <a:lvl4pPr marL="1371600" algn="l" defTabSz="914400" rtl="0" eaLnBrk="1" latinLnBrk="0" hangingPunct="1">
+              <a:defRPr sz="1800" kern="1200">
+                <a:solidFill>
+                  <a:schemeClr val="tx1"/>
+                </a:solidFill>
+                <a:latin typeface="+mn-lt"/>
+                <a:ea typeface="+mn-ea"/>
+                <a:cs typeface="+mn-cs"/>
+              </a:defRPr>
+            </a:lvl4pPr>
+            <a:lvl5pPr marL="1828800" algn="l" defTabSz="914400" rtl="0" eaLnBrk="1" latinLnBrk="0" hangingPunct="1">
+              <a:defRPr sz="1800" kern="1200">
+                <a:solidFill>
+                  <a:schemeClr val="tx1"/>
+                </a:solidFill>
+                <a:latin typeface="+mn-lt"/>
+                <a:ea typeface="+mn-ea"/>
+                <a:cs typeface="+mn-cs"/>
+              </a:defRPr>
+            </a:lvl5pPr>
+            <a:lvl6pPr marL="2286000" algn="l" defTabSz="914400" rtl="0" eaLnBrk="1" latinLnBrk="0" hangingPunct="1">
+              <a:defRPr sz="1800" kern="1200">
+                <a:solidFill>
+                  <a:schemeClr val="tx1"/>
+                </a:solidFill>
+                <a:latin typeface="+mn-lt"/>
+                <a:ea typeface="+mn-ea"/>
+                <a:cs typeface="+mn-cs"/>
+              </a:defRPr>
+            </a:lvl6pPr>
+            <a:lvl7pPr marL="2743200" algn="l" defTabSz="914400" rtl="0" eaLnBrk="1" latinLnBrk="0" hangingPunct="1">
+              <a:defRPr sz="1800" kern="1200">
+                <a:solidFill>
+                  <a:schemeClr val="tx1"/>
+                </a:solidFill>
+                <a:latin typeface="+mn-lt"/>
+                <a:ea typeface="+mn-ea"/>
+                <a:cs typeface="+mn-cs"/>
+              </a:defRPr>
+            </a:lvl7pPr>
+            <a:lvl8pPr marL="3200400" algn="l" defTabSz="914400" rtl="0" eaLnBrk="1" latinLnBrk="0" hangingPunct="1">
+              <a:defRPr sz="1800" kern="1200">
+                <a:solidFill>
+                  <a:schemeClr val="tx1"/>
+                </a:solidFill>
+                <a:latin typeface="+mn-lt"/>
+                <a:ea typeface="+mn-ea"/>
+                <a:cs typeface="+mn-cs"/>
+              </a:defRPr>
+            </a:lvl8pPr>
+            <a:lvl9pPr marL="3657600" algn="l" defTabSz="914400" rtl="0" eaLnBrk="1" latinLnBrk="0" hangingPunct="1">
+              <a:defRPr sz="1800" kern="1200">
+                <a:solidFill>
+                  <a:schemeClr val="tx1"/>
+                </a:solidFill>
+                <a:latin typeface="+mn-lt"/>
+                <a:ea typeface="+mn-ea"/>
+                <a:cs typeface="+mn-cs"/>
+              </a:defRPr>
+            </a:lvl9pPr>
+          </a:lstStyle>
+          <a:p>
+            <a:fld id="{D57F1E4F-1CFF-5643-939E-217C01CDF565}" type="slidenum">
+              <a:rPr lang="en-US" b="1" smtClean="0">
+                <a:latin typeface="Segoe UI Emoji" panose="020B0502040204020203" pitchFamily="34" charset="0"/>
+                <a:ea typeface="Segoe UI Emoji" panose="020B0502040204020203" pitchFamily="34" charset="0"/>
+              </a:rPr>
+              <a:pPr/>
+              <a:t>41</a:t>
+            </a:fld>
+            <a:endParaRPr lang="en-US" b="1" dirty="0">
+              <a:latin typeface="Segoe UI Emoji" panose="020B0502040204020203" pitchFamily="34" charset="0"/>
+              <a:ea typeface="Segoe UI Emoji" panose="020B0502040204020203" pitchFamily="34" charset="0"/>
+            </a:endParaRPr>
+          </a:p>
+        </p:txBody>
+      </p:sp>
+      <p:pic>
+        <p:nvPicPr>
+          <p:cNvPr id="5" name="그림 4">
+            <a:extLst>
+              <a:ext uri="{FF2B5EF4-FFF2-40B4-BE49-F238E27FC236}">
+                <a16:creationId xmlns:a16="http://schemas.microsoft.com/office/drawing/2014/main" id="{DD29E0AA-A989-EAB0-2C5E-63DBFB9679E0}"/>
+              </a:ext>
+            </a:extLst>
+          </p:cNvPr>
+          <p:cNvPicPr>
+            <a:picLocks noChangeAspect="1"/>
+          </p:cNvPicPr>
+          <p:nvPr/>
+        </p:nvPicPr>
+        <p:blipFill>
+          <a:blip r:embed="rId2"/>
+          <a:stretch>
+            <a:fillRect/>
+          </a:stretch>
+        </p:blipFill>
+        <p:spPr>
+          <a:xfrm>
+            <a:off x="629720" y="1374854"/>
+            <a:ext cx="10437746" cy="5197396"/>
+          </a:xfrm>
+          <a:prstGeom prst="rect">
+            <a:avLst/>
+          </a:prstGeom>
+        </p:spPr>
+      </p:pic>
+      <p:sp>
+        <p:nvSpPr>
+          <p:cNvPr id="9" name="설명선: 굽은 선 8">
+            <a:extLst>
+              <a:ext uri="{FF2B5EF4-FFF2-40B4-BE49-F238E27FC236}">
+                <a16:creationId xmlns:a16="http://schemas.microsoft.com/office/drawing/2014/main" id="{01F6310F-BB0B-1EFC-0B01-18AC25CE8631}"/>
+              </a:ext>
+            </a:extLst>
+          </p:cNvPr>
+          <p:cNvSpPr/>
+          <p:nvPr/>
+        </p:nvSpPr>
+        <p:spPr>
+          <a:xfrm>
+            <a:off x="7038976" y="1489154"/>
+            <a:ext cx="4904856" cy="1010835"/>
+          </a:xfrm>
+          <a:prstGeom prst="borderCallout2">
+            <a:avLst>
+              <a:gd name="adj1" fmla="val 68691"/>
+              <a:gd name="adj2" fmla="val -3909"/>
+              <a:gd name="adj3" fmla="val 92249"/>
+              <a:gd name="adj4" fmla="val -18142"/>
+              <a:gd name="adj5" fmla="val 157915"/>
+              <a:gd name="adj6" fmla="val -24298"/>
+            </a:avLst>
+          </a:prstGeom>
+          <a:solidFill>
+            <a:schemeClr val="accent4">
+              <a:lumMod val="20000"/>
+              <a:lumOff val="80000"/>
+            </a:schemeClr>
+          </a:solidFill>
+          <a:ln>
+            <a:solidFill>
+              <a:schemeClr val="bg1"/>
+            </a:solidFill>
+          </a:ln>
+        </p:spPr>
+        <p:style>
+          <a:lnRef idx="2">
+            <a:schemeClr val="accent1">
+              <a:shade val="15000"/>
+            </a:schemeClr>
+          </a:lnRef>
+          <a:fillRef idx="1">
+            <a:schemeClr val="accent1"/>
+          </a:fillRef>
+          <a:effectRef idx="0">
+            <a:schemeClr val="accent1"/>
+          </a:effectRef>
+          <a:fontRef idx="minor">
+            <a:schemeClr val="lt1"/>
+          </a:fontRef>
+        </p:style>
+        <p:txBody>
+          <a:bodyPr rtlCol="0" anchor="ctr"/>
+          <a:lstStyle/>
+          <a:p>
+            <a:pPr marL="171450" indent="-171450">
+              <a:buFont typeface="Wingdings" panose="05000000000000000000" pitchFamily="2" charset="2"/>
+              <a:buChar char="Ø"/>
+            </a:pPr>
+            <a:r>
+              <a:rPr lang="en-US" altLang="ko-KR" sz="1100" dirty="0">
+                <a:solidFill>
+                  <a:schemeClr val="tx1"/>
+                </a:solidFill>
+                <a:latin typeface="D2Coding" panose="020B0609020101020101" pitchFamily="49" charset="-127"/>
+                <a:ea typeface="D2Coding" panose="020B0609020101020101" pitchFamily="49" charset="-127"/>
+              </a:rPr>
+              <a:t>"from": 1, "to": 92: </a:t>
+            </a:r>
+            <a:r>
+              <a:rPr lang="ko-KR" altLang="en-US" sz="1100" dirty="0">
+                <a:solidFill>
+                  <a:schemeClr val="tx1"/>
+                </a:solidFill>
+                <a:latin typeface="D2Coding" panose="020B0609020101020101" pitchFamily="49" charset="-127"/>
+                <a:ea typeface="D2Coding" panose="020B0609020101020101" pitchFamily="49" charset="-127"/>
+              </a:rPr>
+              <a:t>원본 문서의 </a:t>
+            </a:r>
+            <a:r>
+              <a:rPr lang="en-US" altLang="ko-KR" sz="1100" dirty="0">
+                <a:solidFill>
+                  <a:schemeClr val="tx1"/>
+                </a:solidFill>
+                <a:latin typeface="D2Coding" panose="020B0609020101020101" pitchFamily="49" charset="-127"/>
+                <a:ea typeface="D2Coding" panose="020B0609020101020101" pitchFamily="49" charset="-127"/>
+              </a:rPr>
+              <a:t>1</a:t>
+            </a:r>
+            <a:r>
+              <a:rPr lang="ko-KR" altLang="en-US" sz="1100" dirty="0">
+                <a:solidFill>
+                  <a:schemeClr val="tx1"/>
+                </a:solidFill>
+                <a:latin typeface="D2Coding" panose="020B0609020101020101" pitchFamily="49" charset="-127"/>
+                <a:ea typeface="D2Coding" panose="020B0609020101020101" pitchFamily="49" charset="-127"/>
+              </a:rPr>
+              <a:t>번째 줄부터 </a:t>
+            </a:r>
+            <a:r>
+              <a:rPr lang="en-US" altLang="ko-KR" sz="1100" dirty="0">
+                <a:solidFill>
+                  <a:schemeClr val="tx1"/>
+                </a:solidFill>
+                <a:latin typeface="D2Coding" panose="020B0609020101020101" pitchFamily="49" charset="-127"/>
+                <a:ea typeface="D2Coding" panose="020B0609020101020101" pitchFamily="49" charset="-127"/>
+              </a:rPr>
+              <a:t>92</a:t>
+            </a:r>
+            <a:r>
+              <a:rPr lang="ko-KR" altLang="en-US" sz="1100" dirty="0">
+                <a:solidFill>
+                  <a:schemeClr val="tx1"/>
+                </a:solidFill>
+                <a:latin typeface="D2Coding" panose="020B0609020101020101" pitchFamily="49" charset="-127"/>
+                <a:ea typeface="D2Coding" panose="020B0609020101020101" pitchFamily="49" charset="-127"/>
+              </a:rPr>
+              <a:t>번째 줄까지의 내용을 잘라 만든 첫 번째 조각의　</a:t>
+            </a:r>
+            <a:r>
+              <a:rPr lang="en-US" altLang="ko-KR" sz="1100" dirty="0">
+                <a:solidFill>
+                  <a:schemeClr val="tx1"/>
+                </a:solidFill>
+                <a:latin typeface="D2Coding" panose="020B0609020101020101" pitchFamily="49" charset="-127"/>
+                <a:ea typeface="D2Coding" panose="020B0609020101020101" pitchFamily="49" charset="-127"/>
+              </a:rPr>
+              <a:t>Embedding Vector</a:t>
+            </a:r>
+          </a:p>
+          <a:p>
+            <a:pPr marL="171450" indent="-171450">
+              <a:buFont typeface="Wingdings" panose="05000000000000000000" pitchFamily="2" charset="2"/>
+              <a:buChar char="Ø"/>
+            </a:pPr>
+            <a:endParaRPr lang="en-US" altLang="ko-KR" sz="1100" dirty="0">
+              <a:solidFill>
+                <a:schemeClr val="tx1"/>
+              </a:solidFill>
+              <a:latin typeface="D2Coding" panose="020B0609020101020101" pitchFamily="49" charset="-127"/>
+              <a:ea typeface="D2Coding" panose="020B0609020101020101" pitchFamily="49" charset="-127"/>
+            </a:endParaRPr>
+          </a:p>
+          <a:p>
+            <a:pPr marL="171450" indent="-171450">
+              <a:buFont typeface="Wingdings" panose="05000000000000000000" pitchFamily="2" charset="2"/>
+              <a:buChar char="Ø"/>
+            </a:pPr>
+            <a:r>
+              <a:rPr lang="en-US" altLang="ko-KR" sz="1100" dirty="0">
+                <a:solidFill>
+                  <a:schemeClr val="tx1"/>
+                </a:solidFill>
+                <a:latin typeface="D2Coding" panose="020B0609020101020101" pitchFamily="49" charset="-127"/>
+                <a:ea typeface="D2Coding" panose="020B0609020101020101" pitchFamily="49" charset="-127"/>
+              </a:rPr>
+              <a:t>"from": 94, "to": 136: </a:t>
+            </a:r>
+            <a:r>
+              <a:rPr lang="ko-KR" altLang="en-US" sz="1100" dirty="0">
+                <a:solidFill>
+                  <a:schemeClr val="tx1"/>
+                </a:solidFill>
+                <a:latin typeface="D2Coding" panose="020B0609020101020101" pitchFamily="49" charset="-127"/>
+                <a:ea typeface="D2Coding" panose="020B0609020101020101" pitchFamily="49" charset="-127"/>
+              </a:rPr>
+              <a:t>두 번째 조각으로</a:t>
+            </a:r>
+            <a:r>
+              <a:rPr lang="en-US" altLang="ko-KR" sz="1100" dirty="0">
+                <a:solidFill>
+                  <a:schemeClr val="tx1"/>
+                </a:solidFill>
+                <a:latin typeface="D2Coding" panose="020B0609020101020101" pitchFamily="49" charset="-127"/>
+                <a:ea typeface="D2Coding" panose="020B0609020101020101" pitchFamily="49" charset="-127"/>
+              </a:rPr>
+              <a:t>, </a:t>
+            </a:r>
+            <a:r>
+              <a:rPr lang="ko-KR" altLang="en-US" sz="1100" dirty="0">
+                <a:solidFill>
+                  <a:schemeClr val="tx1"/>
+                </a:solidFill>
+                <a:latin typeface="D2Coding" panose="020B0609020101020101" pitchFamily="49" charset="-127"/>
+                <a:ea typeface="D2Coding" panose="020B0609020101020101" pitchFamily="49" charset="-127"/>
+              </a:rPr>
+              <a:t>원본의 </a:t>
+            </a:r>
+            <a:r>
+              <a:rPr lang="en-US" altLang="ko-KR" sz="1100" dirty="0">
+                <a:solidFill>
+                  <a:schemeClr val="tx1"/>
+                </a:solidFill>
+                <a:latin typeface="D2Coding" panose="020B0609020101020101" pitchFamily="49" charset="-127"/>
+                <a:ea typeface="D2Coding" panose="020B0609020101020101" pitchFamily="49" charset="-127"/>
+              </a:rPr>
+              <a:t>94</a:t>
+            </a:r>
+            <a:r>
+              <a:rPr lang="ko-KR" altLang="en-US" sz="1100" dirty="0">
+                <a:solidFill>
+                  <a:schemeClr val="tx1"/>
+                </a:solidFill>
+                <a:latin typeface="D2Coding" panose="020B0609020101020101" pitchFamily="49" charset="-127"/>
+                <a:ea typeface="D2Coding" panose="020B0609020101020101" pitchFamily="49" charset="-127"/>
+              </a:rPr>
+              <a:t>번째 줄부터 </a:t>
+            </a:r>
+            <a:r>
+              <a:rPr lang="en-US" altLang="ko-KR" sz="1100" dirty="0">
+                <a:solidFill>
+                  <a:schemeClr val="tx1"/>
+                </a:solidFill>
+                <a:latin typeface="D2Coding" panose="020B0609020101020101" pitchFamily="49" charset="-127"/>
+                <a:ea typeface="D2Coding" panose="020B0609020101020101" pitchFamily="49" charset="-127"/>
+              </a:rPr>
+              <a:t>136</a:t>
+            </a:r>
+            <a:r>
+              <a:rPr lang="ko-KR" altLang="en-US" sz="1100" dirty="0">
+                <a:solidFill>
+                  <a:schemeClr val="tx1"/>
+                </a:solidFill>
+                <a:latin typeface="D2Coding" panose="020B0609020101020101" pitchFamily="49" charset="-127"/>
+                <a:ea typeface="D2Coding" panose="020B0609020101020101" pitchFamily="49" charset="-127"/>
+              </a:rPr>
+              <a:t>번째 줄까지의 내용　</a:t>
+            </a:r>
+            <a:r>
+              <a:rPr lang="en-US" altLang="ko-KR" sz="1100" dirty="0">
+                <a:solidFill>
+                  <a:schemeClr val="tx1"/>
+                </a:solidFill>
+                <a:latin typeface="D2Coding" panose="020B0609020101020101" pitchFamily="49" charset="-127"/>
+                <a:ea typeface="D2Coding" panose="020B0609020101020101" pitchFamily="49" charset="-127"/>
+              </a:rPr>
+              <a:t>Embedding Vector</a:t>
+            </a:r>
+            <a:endParaRPr lang="ko-KR" altLang="en-US" sz="1100" dirty="0">
+              <a:solidFill>
+                <a:schemeClr val="tx1"/>
+              </a:solidFill>
+              <a:latin typeface="D2Coding" panose="020B0609020101020101" pitchFamily="49" charset="-127"/>
+              <a:ea typeface="D2Coding" panose="020B0609020101020101" pitchFamily="49" charset="-127"/>
+            </a:endParaRPr>
+          </a:p>
+        </p:txBody>
+      </p:sp>
+      <p:sp>
+        <p:nvSpPr>
+          <p:cNvPr id="10" name="직사각형 9">
+            <a:extLst>
+              <a:ext uri="{FF2B5EF4-FFF2-40B4-BE49-F238E27FC236}">
+                <a16:creationId xmlns:a16="http://schemas.microsoft.com/office/drawing/2014/main" id="{2AB68D60-EE25-462B-3992-8FB006ACC1FB}"/>
+              </a:ext>
+            </a:extLst>
+          </p:cNvPr>
+          <p:cNvSpPr/>
+          <p:nvPr/>
+        </p:nvSpPr>
+        <p:spPr>
+          <a:xfrm>
+            <a:off x="3409950" y="3095625"/>
+            <a:ext cx="7343775" cy="581025"/>
+          </a:xfrm>
+          <a:prstGeom prst="rect">
+            <a:avLst/>
+          </a:prstGeom>
+          <a:noFill/>
+          <a:ln w="19050">
+            <a:solidFill>
+              <a:schemeClr val="bg1"/>
+            </a:solidFill>
+          </a:ln>
+        </p:spPr>
+        <p:style>
+          <a:lnRef idx="2">
+            <a:schemeClr val="accent1">
+              <a:shade val="15000"/>
+            </a:schemeClr>
+          </a:lnRef>
+          <a:fillRef idx="1">
+            <a:schemeClr val="accent1"/>
+          </a:fillRef>
+          <a:effectRef idx="0">
+            <a:schemeClr val="accent1"/>
+          </a:effectRef>
+          <a:fontRef idx="minor">
+            <a:schemeClr val="lt1"/>
+          </a:fontRef>
+        </p:style>
+        <p:txBody>
+          <a:bodyPr rtlCol="0" anchor="ctr"/>
+          <a:lstStyle/>
+          <a:p>
+            <a:pPr algn="ctr"/>
+            <a:endParaRPr lang="ko-KR" altLang="en-US" dirty="0"/>
+          </a:p>
+        </p:txBody>
+      </p:sp>
+      <p:sp>
+        <p:nvSpPr>
+          <p:cNvPr id="4" name="직사각형 3">
+            <a:extLst>
+              <a:ext uri="{FF2B5EF4-FFF2-40B4-BE49-F238E27FC236}">
+                <a16:creationId xmlns:a16="http://schemas.microsoft.com/office/drawing/2014/main" id="{AE293A09-3E6F-2D86-64AE-21C28F4A5DF4}"/>
+              </a:ext>
+            </a:extLst>
+          </p:cNvPr>
+          <p:cNvSpPr/>
+          <p:nvPr/>
+        </p:nvSpPr>
+        <p:spPr>
+          <a:xfrm>
+            <a:off x="658295" y="2364344"/>
+            <a:ext cx="408505" cy="369332"/>
+          </a:xfrm>
+          <a:prstGeom prst="rect">
+            <a:avLst/>
+          </a:prstGeom>
+          <a:noFill/>
+          <a:ln w="19050">
+            <a:solidFill>
+              <a:schemeClr val="bg1"/>
+            </a:solidFill>
+          </a:ln>
+        </p:spPr>
+        <p:style>
+          <a:lnRef idx="2">
+            <a:schemeClr val="accent1">
+              <a:shade val="15000"/>
+            </a:schemeClr>
+          </a:lnRef>
+          <a:fillRef idx="1">
+            <a:schemeClr val="accent1"/>
+          </a:fillRef>
+          <a:effectRef idx="0">
+            <a:schemeClr val="accent1"/>
+          </a:effectRef>
+          <a:fontRef idx="minor">
+            <a:schemeClr val="lt1"/>
+          </a:fontRef>
+        </p:style>
+        <p:txBody>
+          <a:bodyPr rtlCol="0" anchor="ctr"/>
+          <a:lstStyle/>
+          <a:p>
+            <a:pPr algn="ctr"/>
+            <a:endParaRPr lang="ko-KR" altLang="en-US" dirty="0"/>
+          </a:p>
+        </p:txBody>
+      </p:sp>
+    </p:spTree>
+    <p:extLst>
+      <p:ext uri="{BB962C8B-B14F-4D97-AF65-F5344CB8AC3E}">
+        <p14:creationId xmlns:p14="http://schemas.microsoft.com/office/powerpoint/2010/main" val="237647308"/>
+      </p:ext>
+    </p:extLst>
+  </p:cSld>
+  <p:clrMapOvr>
+    <a:masterClrMapping/>
+  </p:clrMapOvr>
+</p:sld>
+</file>
+
+<file path=ppt/slides/slide42.xml><?xml version="1.0" encoding="utf-8"?>
+<p:sld xmlns:a="http://schemas.openxmlformats.org/drawingml/2006/main" xmlns:r="http://schemas.openxmlformats.org/officeDocument/2006/relationships" xmlns:p="http://schemas.openxmlformats.org/presentationml/2006/main">
+  <p:cSld>
+    <p:spTree>
+      <p:nvGrpSpPr>
+        <p:cNvPr id="1" name="">
+          <a:extLst>
+            <a:ext uri="{FF2B5EF4-FFF2-40B4-BE49-F238E27FC236}">
+              <a16:creationId xmlns:a16="http://schemas.microsoft.com/office/drawing/2014/main" id="{0DC76B9F-574C-EE14-73F7-02933FAB3ED5}"/>
+            </a:ext>
+          </a:extLst>
+        </p:cNvPr>
+        <p:cNvGrpSpPr/>
+        <p:nvPr/>
+      </p:nvGrpSpPr>
+      <p:grpSpPr>
+        <a:xfrm>
+          <a:off x="0" y="0"/>
+          <a:ext cx="0" cy="0"/>
+          <a:chOff x="0" y="0"/>
+          <a:chExt cx="0" cy="0"/>
+        </a:xfrm>
+      </p:grpSpPr>
+      <p:sp>
+        <p:nvSpPr>
+          <p:cNvPr id="8" name="TextBox 7">
+            <a:extLst>
+              <a:ext uri="{FF2B5EF4-FFF2-40B4-BE49-F238E27FC236}">
+                <a16:creationId xmlns:a16="http://schemas.microsoft.com/office/drawing/2014/main" id="{5009BBE8-1146-6EFB-21CB-012CF33E8684}"/>
+              </a:ext>
+            </a:extLst>
+          </p:cNvPr>
+          <p:cNvSpPr txBox="1"/>
+          <p:nvPr/>
+        </p:nvSpPr>
+        <p:spPr>
+          <a:xfrm>
+            <a:off x="744020" y="3244334"/>
+            <a:ext cx="184731" cy="369332"/>
+          </a:xfrm>
+          <a:prstGeom prst="rect">
+            <a:avLst/>
+          </a:prstGeom>
+          <a:noFill/>
+        </p:spPr>
+        <p:txBody>
+          <a:bodyPr wrap="none" rtlCol="0">
+            <a:spAutoFit/>
+          </a:bodyPr>
+          <a:lstStyle/>
+          <a:p>
+            <a:endParaRPr lang="ko-KR" altLang="en-US" dirty="0">
+              <a:solidFill>
+                <a:schemeClr val="accent5"/>
+              </a:solidFill>
+              <a:latin typeface="D2Coding" panose="020B0609020101020101" pitchFamily="49" charset="-127"/>
+              <a:ea typeface="D2Coding" panose="020B0609020101020101" pitchFamily="49" charset="-127"/>
+            </a:endParaRPr>
+          </a:p>
+        </p:txBody>
+      </p:sp>
+      <p:sp>
+        <p:nvSpPr>
+          <p:cNvPr id="2" name="슬라이드 번호 개체 틀 3">
+            <a:extLst>
+              <a:ext uri="{FF2B5EF4-FFF2-40B4-BE49-F238E27FC236}">
+                <a16:creationId xmlns:a16="http://schemas.microsoft.com/office/drawing/2014/main" id="{BFF41F08-EE80-0F5D-6FFF-1F166729CBE0}"/>
+              </a:ext>
+            </a:extLst>
+          </p:cNvPr>
+          <p:cNvSpPr txBox="1">
+            <a:spLocks/>
+          </p:cNvSpPr>
+          <p:nvPr/>
+        </p:nvSpPr>
+        <p:spPr>
+          <a:xfrm>
+            <a:off x="11180761" y="299420"/>
+            <a:ext cx="753545" cy="365125"/>
+          </a:xfrm>
+          <a:prstGeom prst="rect">
+            <a:avLst/>
+          </a:prstGeom>
+        </p:spPr>
+        <p:txBody>
+          <a:bodyPr vert="horz" lIns="91440" tIns="45720" rIns="91440" bIns="45720" rtlCol="0" anchor="ctr"/>
+          <a:lstStyle>
+            <a:defPPr rtl="0">
+              <a:defRPr lang="ko-KR"/>
+            </a:defPPr>
+            <a:lvl1pPr marL="0" algn="r" defTabSz="914400" rtl="0" eaLnBrk="1" latinLnBrk="0" hangingPunct="1">
+              <a:defRPr sz="1200" kern="1200" baseline="0">
+                <a:solidFill>
+                  <a:schemeClr val="tx1">
+                    <a:lumMod val="65000"/>
+                    <a:lumOff val="35000"/>
+                  </a:schemeClr>
+                </a:solidFill>
+                <a:latin typeface="맑은 고딕" panose="020B0503020000020004" pitchFamily="50" charset="-127"/>
+                <a:ea typeface="맑은 고딕" panose="020B0503020000020004" pitchFamily="50" charset="-127"/>
+                <a:cs typeface="+mn-cs"/>
+              </a:defRPr>
+            </a:lvl1pPr>
+            <a:lvl2pPr marL="457200" algn="l" defTabSz="914400" rtl="0" eaLnBrk="1" latinLnBrk="0" hangingPunct="1">
+              <a:defRPr sz="1800" kern="1200">
+                <a:solidFill>
+                  <a:schemeClr val="tx1"/>
+                </a:solidFill>
+                <a:latin typeface="+mn-lt"/>
+                <a:ea typeface="+mn-ea"/>
+                <a:cs typeface="+mn-cs"/>
+              </a:defRPr>
+            </a:lvl2pPr>
+            <a:lvl3pPr marL="914400" algn="l" defTabSz="914400" rtl="0" eaLnBrk="1" latinLnBrk="0" hangingPunct="1">
+              <a:defRPr sz="1800" kern="1200">
+                <a:solidFill>
+                  <a:schemeClr val="tx1"/>
+                </a:solidFill>
+                <a:latin typeface="+mn-lt"/>
+                <a:ea typeface="+mn-ea"/>
+                <a:cs typeface="+mn-cs"/>
+              </a:defRPr>
+            </a:lvl3pPr>
+            <a:lvl4pPr marL="1371600" algn="l" defTabSz="914400" rtl="0" eaLnBrk="1" latinLnBrk="0" hangingPunct="1">
+              <a:defRPr sz="1800" kern="1200">
+                <a:solidFill>
+                  <a:schemeClr val="tx1"/>
+                </a:solidFill>
+                <a:latin typeface="+mn-lt"/>
+                <a:ea typeface="+mn-ea"/>
+                <a:cs typeface="+mn-cs"/>
+              </a:defRPr>
+            </a:lvl4pPr>
+            <a:lvl5pPr marL="1828800" algn="l" defTabSz="914400" rtl="0" eaLnBrk="1" latinLnBrk="0" hangingPunct="1">
+              <a:defRPr sz="1800" kern="1200">
+                <a:solidFill>
+                  <a:schemeClr val="tx1"/>
+                </a:solidFill>
+                <a:latin typeface="+mn-lt"/>
+                <a:ea typeface="+mn-ea"/>
+                <a:cs typeface="+mn-cs"/>
+              </a:defRPr>
+            </a:lvl5pPr>
+            <a:lvl6pPr marL="2286000" algn="l" defTabSz="914400" rtl="0" eaLnBrk="1" latinLnBrk="0" hangingPunct="1">
+              <a:defRPr sz="1800" kern="1200">
+                <a:solidFill>
+                  <a:schemeClr val="tx1"/>
+                </a:solidFill>
+                <a:latin typeface="+mn-lt"/>
+                <a:ea typeface="+mn-ea"/>
+                <a:cs typeface="+mn-cs"/>
+              </a:defRPr>
+            </a:lvl6pPr>
+            <a:lvl7pPr marL="2743200" algn="l" defTabSz="914400" rtl="0" eaLnBrk="1" latinLnBrk="0" hangingPunct="1">
+              <a:defRPr sz="1800" kern="1200">
+                <a:solidFill>
+                  <a:schemeClr val="tx1"/>
+                </a:solidFill>
+                <a:latin typeface="+mn-lt"/>
+                <a:ea typeface="+mn-ea"/>
+                <a:cs typeface="+mn-cs"/>
+              </a:defRPr>
+            </a:lvl7pPr>
+            <a:lvl8pPr marL="3200400" algn="l" defTabSz="914400" rtl="0" eaLnBrk="1" latinLnBrk="0" hangingPunct="1">
+              <a:defRPr sz="1800" kern="1200">
+                <a:solidFill>
+                  <a:schemeClr val="tx1"/>
+                </a:solidFill>
+                <a:latin typeface="+mn-lt"/>
+                <a:ea typeface="+mn-ea"/>
+                <a:cs typeface="+mn-cs"/>
+              </a:defRPr>
+            </a:lvl8pPr>
+            <a:lvl9pPr marL="3657600" algn="l" defTabSz="914400" rtl="0" eaLnBrk="1" latinLnBrk="0" hangingPunct="1">
+              <a:defRPr sz="1800" kern="1200">
+                <a:solidFill>
+                  <a:schemeClr val="tx1"/>
+                </a:solidFill>
+                <a:latin typeface="+mn-lt"/>
+                <a:ea typeface="+mn-ea"/>
+                <a:cs typeface="+mn-cs"/>
+              </a:defRPr>
+            </a:lvl9pPr>
+          </a:lstStyle>
+          <a:p>
+            <a:fld id="{D57F1E4F-1CFF-5643-939E-217C01CDF565}" type="slidenum">
+              <a:rPr lang="en-US" b="1" smtClean="0">
+                <a:latin typeface="Segoe UI Emoji" panose="020B0502040204020203" pitchFamily="34" charset="0"/>
+                <a:ea typeface="Segoe UI Emoji" panose="020B0502040204020203" pitchFamily="34" charset="0"/>
+              </a:rPr>
+              <a:pPr/>
+              <a:t>42</a:t>
+            </a:fld>
+            <a:endParaRPr lang="en-US" b="1" dirty="0">
+              <a:latin typeface="Segoe UI Emoji" panose="020B0502040204020203" pitchFamily="34" charset="0"/>
+              <a:ea typeface="Segoe UI Emoji" panose="020B0502040204020203" pitchFamily="34" charset="0"/>
+            </a:endParaRPr>
+          </a:p>
+        </p:txBody>
+      </p:sp>
+      <p:sp>
+        <p:nvSpPr>
+          <p:cNvPr id="4" name="직사각형 3">
+            <a:extLst>
+              <a:ext uri="{FF2B5EF4-FFF2-40B4-BE49-F238E27FC236}">
+                <a16:creationId xmlns:a16="http://schemas.microsoft.com/office/drawing/2014/main" id="{296D8616-7EAD-BC0D-27E6-864312F395AA}"/>
+              </a:ext>
+            </a:extLst>
+          </p:cNvPr>
+          <p:cNvSpPr/>
+          <p:nvPr/>
+        </p:nvSpPr>
+        <p:spPr>
+          <a:xfrm>
+            <a:off x="658295" y="2364344"/>
+            <a:ext cx="408505" cy="369332"/>
+          </a:xfrm>
+          <a:prstGeom prst="rect">
+            <a:avLst/>
+          </a:prstGeom>
+          <a:noFill/>
+          <a:ln w="19050">
+            <a:solidFill>
+              <a:schemeClr val="bg1"/>
+            </a:solidFill>
+          </a:ln>
+        </p:spPr>
+        <p:style>
+          <a:lnRef idx="2">
+            <a:schemeClr val="accent1">
+              <a:shade val="15000"/>
+            </a:schemeClr>
+          </a:lnRef>
+          <a:fillRef idx="1">
+            <a:schemeClr val="accent1"/>
+          </a:fillRef>
+          <a:effectRef idx="0">
+            <a:schemeClr val="accent1"/>
+          </a:effectRef>
+          <a:fontRef idx="minor">
+            <a:schemeClr val="lt1"/>
+          </a:fontRef>
+        </p:style>
+        <p:txBody>
+          <a:bodyPr rtlCol="0" anchor="ctr"/>
+          <a:lstStyle/>
+          <a:p>
+            <a:pPr algn="ctr"/>
+            <a:endParaRPr lang="ko-KR" altLang="en-US" dirty="0"/>
+          </a:p>
+        </p:txBody>
+      </p:sp>
+      <p:pic>
+        <p:nvPicPr>
+          <p:cNvPr id="11" name="그림 10">
+            <a:extLst>
+              <a:ext uri="{FF2B5EF4-FFF2-40B4-BE49-F238E27FC236}">
+                <a16:creationId xmlns:a16="http://schemas.microsoft.com/office/drawing/2014/main" id="{6B1D54BD-0A9D-544E-9DF7-186759537312}"/>
+              </a:ext>
+            </a:extLst>
+          </p:cNvPr>
+          <p:cNvPicPr>
+            <a:picLocks noChangeAspect="1"/>
+          </p:cNvPicPr>
+          <p:nvPr/>
+        </p:nvPicPr>
+        <p:blipFill>
+          <a:blip r:embed="rId2"/>
+          <a:stretch>
+            <a:fillRect/>
+          </a:stretch>
+        </p:blipFill>
+        <p:spPr>
+          <a:xfrm>
+            <a:off x="482901" y="1749597"/>
+            <a:ext cx="1109784" cy="366114"/>
+          </a:xfrm>
+          <a:prstGeom prst="rect">
+            <a:avLst/>
+          </a:prstGeom>
+        </p:spPr>
+      </p:pic>
+      <p:sp>
+        <p:nvSpPr>
+          <p:cNvPr id="12" name="TextBox 11">
+            <a:extLst>
+              <a:ext uri="{FF2B5EF4-FFF2-40B4-BE49-F238E27FC236}">
+                <a16:creationId xmlns:a16="http://schemas.microsoft.com/office/drawing/2014/main" id="{24E176A6-D1F5-72F5-8582-E8DD20496E9F}"/>
+              </a:ext>
+            </a:extLst>
+          </p:cNvPr>
+          <p:cNvSpPr txBox="1"/>
+          <p:nvPr/>
+        </p:nvSpPr>
+        <p:spPr>
+          <a:xfrm>
+            <a:off x="436492" y="2089487"/>
+            <a:ext cx="1156193" cy="793166"/>
+          </a:xfrm>
+          <a:prstGeom prst="rect">
+            <a:avLst/>
+          </a:prstGeom>
+          <a:noFill/>
+        </p:spPr>
+        <p:txBody>
+          <a:bodyPr wrap="square" rtlCol="0">
+            <a:spAutoFit/>
+          </a:bodyPr>
+          <a:lstStyle/>
+          <a:p>
+            <a:pPr>
+              <a:lnSpc>
+                <a:spcPct val="150000"/>
+              </a:lnSpc>
+            </a:pPr>
+            <a:r>
+              <a:rPr lang="ko-KR" altLang="en-US" sz="1600" dirty="0" err="1">
+                <a:latin typeface="D2Coding" panose="020B0609020101020101" pitchFamily="49" charset="-127"/>
+                <a:ea typeface="D2Coding" panose="020B0609020101020101" pitchFamily="49" charset="-127"/>
+              </a:rPr>
+              <a:t>를</a:t>
+            </a:r>
+            <a:r>
+              <a:rPr lang="en-US" altLang="ko-KR" sz="1600" dirty="0">
+                <a:latin typeface="D2Coding" panose="020B0609020101020101" pitchFamily="49" charset="-127"/>
+                <a:ea typeface="D2Coding" panose="020B0609020101020101" pitchFamily="49" charset="-127"/>
+              </a:rPr>
+              <a:t> click</a:t>
+            </a:r>
+            <a:r>
+              <a:rPr lang="ko-KR" altLang="en-US" sz="1600" dirty="0">
+                <a:latin typeface="D2Coding" panose="020B0609020101020101" pitchFamily="49" charset="-127"/>
+                <a:ea typeface="D2Coding" panose="020B0609020101020101" pitchFamily="49" charset="-127"/>
+              </a:rPr>
+              <a:t> 한 후 </a:t>
+            </a:r>
+          </a:p>
+        </p:txBody>
+      </p:sp>
+      <p:pic>
+        <p:nvPicPr>
+          <p:cNvPr id="16" name="그림 15">
+            <a:extLst>
+              <a:ext uri="{FF2B5EF4-FFF2-40B4-BE49-F238E27FC236}">
+                <a16:creationId xmlns:a16="http://schemas.microsoft.com/office/drawing/2014/main" id="{3860CF18-5253-FD30-11F6-AE7761E5E308}"/>
+              </a:ext>
+            </a:extLst>
+          </p:cNvPr>
+          <p:cNvPicPr>
+            <a:picLocks noChangeAspect="1"/>
+          </p:cNvPicPr>
+          <p:nvPr/>
+        </p:nvPicPr>
+        <p:blipFill>
+          <a:blip r:embed="rId3"/>
+          <a:stretch>
+            <a:fillRect/>
+          </a:stretch>
+        </p:blipFill>
+        <p:spPr>
+          <a:xfrm>
+            <a:off x="6676602" y="133350"/>
+            <a:ext cx="4433216" cy="3912274"/>
+          </a:xfrm>
+          <a:prstGeom prst="rect">
+            <a:avLst/>
+          </a:prstGeom>
+        </p:spPr>
+      </p:pic>
+      <p:pic>
+        <p:nvPicPr>
+          <p:cNvPr id="18" name="그림 17">
+            <a:extLst>
+              <a:ext uri="{FF2B5EF4-FFF2-40B4-BE49-F238E27FC236}">
+                <a16:creationId xmlns:a16="http://schemas.microsoft.com/office/drawing/2014/main" id="{DD2A207C-F724-7A34-02CF-2C66B8624B7A}"/>
+              </a:ext>
+            </a:extLst>
+          </p:cNvPr>
+          <p:cNvPicPr>
+            <a:picLocks noChangeAspect="1"/>
+          </p:cNvPicPr>
+          <p:nvPr/>
+        </p:nvPicPr>
+        <p:blipFill>
+          <a:blip r:embed="rId4"/>
+          <a:stretch>
+            <a:fillRect/>
+          </a:stretch>
+        </p:blipFill>
+        <p:spPr>
+          <a:xfrm>
+            <a:off x="6676600" y="4000501"/>
+            <a:ext cx="4433217" cy="2724149"/>
+          </a:xfrm>
+          <a:prstGeom prst="rect">
+            <a:avLst/>
+          </a:prstGeom>
+        </p:spPr>
+      </p:pic>
+      <p:pic>
+        <p:nvPicPr>
+          <p:cNvPr id="20" name="그림 19">
+            <a:extLst>
+              <a:ext uri="{FF2B5EF4-FFF2-40B4-BE49-F238E27FC236}">
+                <a16:creationId xmlns:a16="http://schemas.microsoft.com/office/drawing/2014/main" id="{581A2DBE-5A3B-09ED-4948-8D1FBB96B5B5}"/>
+              </a:ext>
+            </a:extLst>
+          </p:cNvPr>
+          <p:cNvPicPr>
+            <a:picLocks noChangeAspect="1"/>
+          </p:cNvPicPr>
+          <p:nvPr/>
+        </p:nvPicPr>
+        <p:blipFill>
+          <a:blip r:embed="rId5"/>
+          <a:stretch>
+            <a:fillRect/>
+          </a:stretch>
+        </p:blipFill>
+        <p:spPr>
+          <a:xfrm>
+            <a:off x="1770941" y="254670"/>
+            <a:ext cx="4841326" cy="3104515"/>
+          </a:xfrm>
+          <a:prstGeom prst="rect">
+            <a:avLst/>
+          </a:prstGeom>
+        </p:spPr>
+      </p:pic>
+      <p:pic>
+        <p:nvPicPr>
+          <p:cNvPr id="22" name="그림 21">
+            <a:extLst>
+              <a:ext uri="{FF2B5EF4-FFF2-40B4-BE49-F238E27FC236}">
+                <a16:creationId xmlns:a16="http://schemas.microsoft.com/office/drawing/2014/main" id="{75F4F371-1475-2E5F-27D6-2812D0B8620D}"/>
+              </a:ext>
+            </a:extLst>
+          </p:cNvPr>
+          <p:cNvPicPr>
+            <a:picLocks noChangeAspect="1"/>
+          </p:cNvPicPr>
+          <p:nvPr/>
+        </p:nvPicPr>
+        <p:blipFill>
+          <a:blip r:embed="rId6"/>
+          <a:stretch>
+            <a:fillRect/>
+          </a:stretch>
+        </p:blipFill>
+        <p:spPr>
+          <a:xfrm>
+            <a:off x="1776813" y="3387907"/>
+            <a:ext cx="4828844" cy="3067354"/>
+          </a:xfrm>
+          <a:prstGeom prst="rect">
+            <a:avLst/>
+          </a:prstGeom>
+        </p:spPr>
+      </p:pic>
+      <p:sp>
+        <p:nvSpPr>
+          <p:cNvPr id="23" name="직사각형 22">
+            <a:extLst>
+              <a:ext uri="{FF2B5EF4-FFF2-40B4-BE49-F238E27FC236}">
+                <a16:creationId xmlns:a16="http://schemas.microsoft.com/office/drawing/2014/main" id="{2FD1F0CE-1F2C-8EDA-083A-BC36C8D703E7}"/>
+              </a:ext>
+            </a:extLst>
+          </p:cNvPr>
+          <p:cNvSpPr/>
+          <p:nvPr/>
+        </p:nvSpPr>
+        <p:spPr>
+          <a:xfrm>
+            <a:off x="8432800" y="5462905"/>
+            <a:ext cx="2636377" cy="1151255"/>
+          </a:xfrm>
+          <a:prstGeom prst="rect">
+            <a:avLst/>
+          </a:prstGeom>
+          <a:noFill/>
+          <a:ln w="28575">
+            <a:solidFill>
+              <a:srgbClr val="FFFF00"/>
+            </a:solidFill>
+          </a:ln>
+        </p:spPr>
+        <p:style>
+          <a:lnRef idx="2">
+            <a:schemeClr val="accent1">
+              <a:shade val="15000"/>
+            </a:schemeClr>
+          </a:lnRef>
+          <a:fillRef idx="1">
+            <a:schemeClr val="accent1"/>
+          </a:fillRef>
+          <a:effectRef idx="0">
+            <a:schemeClr val="accent1"/>
+          </a:effectRef>
+          <a:fontRef idx="minor">
+            <a:schemeClr val="lt1"/>
+          </a:fontRef>
+        </p:style>
+        <p:txBody>
+          <a:bodyPr rtlCol="0" anchor="ctr"/>
+          <a:lstStyle/>
+          <a:p>
+            <a:pPr algn="ctr"/>
+            <a:endParaRPr lang="ko-KR" altLang="en-US" dirty="0"/>
+          </a:p>
+        </p:txBody>
+      </p:sp>
+      <p:sp>
+        <p:nvSpPr>
+          <p:cNvPr id="24" name="직사각형 23">
+            <a:extLst>
+              <a:ext uri="{FF2B5EF4-FFF2-40B4-BE49-F238E27FC236}">
+                <a16:creationId xmlns:a16="http://schemas.microsoft.com/office/drawing/2014/main" id="{D5EC47B9-B087-66DE-71FB-5CE86CFEA2CA}"/>
+              </a:ext>
+            </a:extLst>
+          </p:cNvPr>
+          <p:cNvSpPr/>
+          <p:nvPr/>
+        </p:nvSpPr>
+        <p:spPr>
+          <a:xfrm>
+            <a:off x="2873046" y="1646664"/>
+            <a:ext cx="3517594" cy="2579896"/>
+          </a:xfrm>
+          <a:prstGeom prst="rect">
+            <a:avLst/>
+          </a:prstGeom>
+          <a:noFill/>
+          <a:ln w="28575">
+            <a:solidFill>
+              <a:srgbClr val="FF0000"/>
+            </a:solidFill>
+          </a:ln>
+        </p:spPr>
+        <p:style>
+          <a:lnRef idx="2">
+            <a:schemeClr val="accent1">
+              <a:shade val="15000"/>
+            </a:schemeClr>
+          </a:lnRef>
+          <a:fillRef idx="1">
+            <a:schemeClr val="accent1"/>
+          </a:fillRef>
+          <a:effectRef idx="0">
+            <a:schemeClr val="accent1"/>
+          </a:effectRef>
+          <a:fontRef idx="minor">
+            <a:schemeClr val="lt1"/>
+          </a:fontRef>
+        </p:style>
+        <p:txBody>
+          <a:bodyPr rtlCol="0" anchor="ctr"/>
+          <a:lstStyle/>
+          <a:p>
+            <a:pPr algn="ctr"/>
+            <a:endParaRPr lang="ko-KR" altLang="en-US" dirty="0"/>
+          </a:p>
+        </p:txBody>
+      </p:sp>
+      <p:sp>
+        <p:nvSpPr>
+          <p:cNvPr id="25" name="직사각형 24">
+            <a:extLst>
+              <a:ext uri="{FF2B5EF4-FFF2-40B4-BE49-F238E27FC236}">
+                <a16:creationId xmlns:a16="http://schemas.microsoft.com/office/drawing/2014/main" id="{40AB69AF-71F2-2B2B-8356-365E649610DC}"/>
+              </a:ext>
+            </a:extLst>
+          </p:cNvPr>
+          <p:cNvSpPr/>
+          <p:nvPr/>
+        </p:nvSpPr>
+        <p:spPr>
+          <a:xfrm>
+            <a:off x="2873046" y="4471144"/>
+            <a:ext cx="3517594" cy="1147410"/>
+          </a:xfrm>
+          <a:prstGeom prst="rect">
+            <a:avLst/>
+          </a:prstGeom>
+          <a:noFill/>
+          <a:ln w="28575">
+            <a:solidFill>
+              <a:srgbClr val="00B050"/>
+            </a:solidFill>
+          </a:ln>
+        </p:spPr>
+        <p:style>
+          <a:lnRef idx="2">
+            <a:schemeClr val="accent1">
+              <a:shade val="15000"/>
+            </a:schemeClr>
+          </a:lnRef>
+          <a:fillRef idx="1">
+            <a:schemeClr val="accent1"/>
+          </a:fillRef>
+          <a:effectRef idx="0">
+            <a:schemeClr val="accent1"/>
+          </a:effectRef>
+          <a:fontRef idx="minor">
+            <a:schemeClr val="lt1"/>
+          </a:fontRef>
+        </p:style>
+        <p:txBody>
+          <a:bodyPr rtlCol="0" anchor="ctr"/>
+          <a:lstStyle/>
+          <a:p>
+            <a:pPr algn="ctr"/>
+            <a:endParaRPr lang="ko-KR" altLang="en-US" dirty="0"/>
+          </a:p>
+        </p:txBody>
+      </p:sp>
+      <p:sp>
+        <p:nvSpPr>
+          <p:cNvPr id="27" name="TextBox 26">
+            <a:extLst>
+              <a:ext uri="{FF2B5EF4-FFF2-40B4-BE49-F238E27FC236}">
+                <a16:creationId xmlns:a16="http://schemas.microsoft.com/office/drawing/2014/main" id="{D05B8230-0240-DC71-7076-638318D4D2F2}"/>
+              </a:ext>
+            </a:extLst>
+          </p:cNvPr>
+          <p:cNvSpPr txBox="1"/>
+          <p:nvPr/>
+        </p:nvSpPr>
+        <p:spPr>
+          <a:xfrm>
+            <a:off x="9318954" y="1272543"/>
+            <a:ext cx="2517446" cy="954107"/>
+          </a:xfrm>
+          <a:prstGeom prst="rect">
+            <a:avLst/>
+          </a:prstGeom>
+          <a:solidFill>
+            <a:schemeClr val="bg1"/>
+          </a:solidFill>
+        </p:spPr>
+        <p:txBody>
+          <a:bodyPr wrap="square">
+            <a:spAutoFit/>
+          </a:bodyPr>
+          <a:lstStyle/>
+          <a:p>
+            <a:r>
+              <a:rPr lang="en-US" altLang="ko-KR" sz="1400" dirty="0">
+                <a:latin typeface="D2Coding" panose="020B0609020101020101" pitchFamily="49" charset="-127"/>
+                <a:ea typeface="D2Coding" panose="020B0609020101020101" pitchFamily="49" charset="-127"/>
+              </a:rPr>
+              <a:t>Direct Connection (IPv6) </a:t>
+            </a:r>
+            <a:r>
+              <a:rPr lang="ko-KR" altLang="en-US" sz="1400" dirty="0">
+                <a:latin typeface="D2Coding" panose="020B0609020101020101" pitchFamily="49" charset="-127"/>
+                <a:ea typeface="D2Coding" panose="020B0609020101020101" pitchFamily="49" charset="-127"/>
+              </a:rPr>
+              <a:t>사용</a:t>
+            </a:r>
+            <a:r>
+              <a:rPr lang="en-US" altLang="ko-KR" sz="1400" dirty="0">
+                <a:latin typeface="D2Coding" panose="020B0609020101020101" pitchFamily="49" charset="-127"/>
+                <a:ea typeface="D2Coding" panose="020B0609020101020101" pitchFamily="49" charset="-127"/>
+              </a:rPr>
+              <a:t>: Session pooler </a:t>
+            </a:r>
+            <a:r>
+              <a:rPr lang="ko-KR" altLang="en-US" sz="1400" dirty="0">
+                <a:latin typeface="D2Coding" panose="020B0609020101020101" pitchFamily="49" charset="-127"/>
+                <a:ea typeface="D2Coding" panose="020B0609020101020101" pitchFamily="49" charset="-127"/>
+              </a:rPr>
+              <a:t>이는 </a:t>
+            </a:r>
+            <a:r>
+              <a:rPr lang="en-US" altLang="ko-KR" sz="1400" dirty="0">
+                <a:latin typeface="D2Coding" panose="020B0609020101020101" pitchFamily="49" charset="-127"/>
+                <a:ea typeface="D2Coding" panose="020B0609020101020101" pitchFamily="49" charset="-127"/>
+              </a:rPr>
+              <a:t>IPv4 </a:t>
+            </a:r>
+            <a:r>
+              <a:rPr lang="ko-KR" altLang="en-US" sz="1400" dirty="0">
+                <a:latin typeface="D2Coding" panose="020B0609020101020101" pitchFamily="49" charset="-127"/>
+                <a:ea typeface="D2Coding" panose="020B0609020101020101" pitchFamily="49" charset="-127"/>
+              </a:rPr>
+              <a:t>전용 주소라 </a:t>
+            </a:r>
+            <a:r>
+              <a:rPr lang="en-US" altLang="ko-KR" sz="1400" dirty="0">
+                <a:latin typeface="D2Coding" panose="020B0609020101020101" pitchFamily="49" charset="-127"/>
+                <a:ea typeface="D2Coding" panose="020B0609020101020101" pitchFamily="49" charset="-127"/>
+              </a:rPr>
+              <a:t>n8n</a:t>
+            </a:r>
+            <a:r>
+              <a:rPr lang="ko-KR" altLang="en-US" sz="1400" dirty="0">
+                <a:latin typeface="D2Coding" panose="020B0609020101020101" pitchFamily="49" charset="-127"/>
+                <a:ea typeface="D2Coding" panose="020B0609020101020101" pitchFamily="49" charset="-127"/>
+              </a:rPr>
+              <a:t>에서 연결이 가능</a:t>
+            </a:r>
+          </a:p>
+        </p:txBody>
+      </p:sp>
+    </p:spTree>
+    <p:extLst>
+      <p:ext uri="{BB962C8B-B14F-4D97-AF65-F5344CB8AC3E}">
+        <p14:creationId xmlns:p14="http://schemas.microsoft.com/office/powerpoint/2010/main" val="375656346"/>
+      </p:ext>
+    </p:extLst>
+  </p:cSld>
+  <p:clrMapOvr>
+    <a:masterClrMapping/>
+  </p:clrMapOvr>
+</p:sld>
+</file>
+
+<file path=ppt/slides/slide43.xml><?xml version="1.0" encoding="utf-8"?>
 <p:sld xmlns:a="http://schemas.openxmlformats.org/drawingml/2006/main" xmlns:r="http://schemas.openxmlformats.org/officeDocument/2006/relationships" xmlns:p="http://schemas.openxmlformats.org/presentationml/2006/main">
   <p:cSld>
     <p:spTree>
@@ -17052,7 +20426,7 @@
                 <a:ea typeface="Segoe UI Emoji" panose="020B0502040204020203" pitchFamily="34" charset="0"/>
               </a:rPr>
               <a:pPr/>
-              <a:t>38</a:t>
+              <a:t>43</a:t>
             </a:fld>
             <a:endParaRPr lang="en-US" b="1" dirty="0">
               <a:latin typeface="Segoe UI Emoji" panose="020B0502040204020203" pitchFamily="34" charset="0"/>
@@ -17061,12 +20435,42 @@
           </a:p>
         </p:txBody>
       </p:sp>
+      <p:pic>
+        <p:nvPicPr>
+          <p:cNvPr id="5" name="그림 4">
+            <a:extLst>
+              <a:ext uri="{FF2B5EF4-FFF2-40B4-BE49-F238E27FC236}">
+                <a16:creationId xmlns:a16="http://schemas.microsoft.com/office/drawing/2014/main" id="{DA44C99D-E3F4-C9EF-E472-66EAF5F3817F}"/>
+              </a:ext>
+            </a:extLst>
+          </p:cNvPr>
+          <p:cNvPicPr>
+            <a:picLocks noChangeAspect="1"/>
+          </p:cNvPicPr>
+          <p:nvPr/>
+        </p:nvPicPr>
+        <p:blipFill>
+          <a:blip r:embed="rId2"/>
+          <a:stretch>
+            <a:fillRect/>
+          </a:stretch>
+        </p:blipFill>
+        <p:spPr>
+          <a:xfrm>
+            <a:off x="928751" y="1832299"/>
+            <a:ext cx="10085387" cy="4817929"/>
+          </a:xfrm>
+          <a:prstGeom prst="rect">
+            <a:avLst/>
+          </a:prstGeom>
+        </p:spPr>
+      </p:pic>
       <p:sp>
         <p:nvSpPr>
-          <p:cNvPr id="7" name="TextBox 6">
+          <p:cNvPr id="6" name="TextBox 5">
             <a:extLst>
               <a:ext uri="{FF2B5EF4-FFF2-40B4-BE49-F238E27FC236}">
-                <a16:creationId xmlns:a16="http://schemas.microsoft.com/office/drawing/2014/main" id="{516DE965-C7A9-E5C4-A92D-66F97CECB247}"/>
+                <a16:creationId xmlns:a16="http://schemas.microsoft.com/office/drawing/2014/main" id="{736EB8FE-A25E-0173-6E47-BEE4A975E663}"/>
               </a:ext>
             </a:extLst>
           </p:cNvPr>
@@ -17075,8 +20479,8 @@
         </p:nvSpPr>
         <p:spPr>
           <a:xfrm>
-            <a:off x="576262" y="1404784"/>
-            <a:ext cx="11039476" cy="1074974"/>
+            <a:off x="591620" y="1248422"/>
+            <a:ext cx="11342686" cy="423834"/>
           </a:xfrm>
           <a:prstGeom prst="rect">
             <a:avLst/>
@@ -17084,133 +20488,94 @@
           <a:noFill/>
         </p:spPr>
         <p:txBody>
-          <a:bodyPr wrap="square">
+          <a:bodyPr wrap="square" rtlCol="0">
             <a:spAutoFit/>
           </a:bodyPr>
           <a:lstStyle/>
           <a:p>
-            <a:pPr marL="342900" indent="-342900">
-              <a:lnSpc>
-                <a:spcPct val="150000"/>
-              </a:lnSpc>
-              <a:buFont typeface="+mj-lt"/>
-              <a:buAutoNum type="arabicPeriod"/>
-            </a:pPr>
-            <a:r>
-              <a:rPr lang="ko-KR" altLang="en-US" sz="1600" dirty="0">
-                <a:latin typeface="D2Coding" panose="020B0609020101020101" pitchFamily="49" charset="-127"/>
-                <a:ea typeface="D2Coding" panose="020B0609020101020101" pitchFamily="49" charset="-127"/>
-              </a:rPr>
-              <a:t>문서 감지 및 다운로드 (Google </a:t>
-            </a:r>
-            <a:r>
-              <a:rPr lang="ko-KR" altLang="en-US" sz="1600" dirty="0" err="1">
-                <a:latin typeface="D2Coding" panose="020B0609020101020101" pitchFamily="49" charset="-127"/>
-                <a:ea typeface="D2Coding" panose="020B0609020101020101" pitchFamily="49" charset="-127"/>
-              </a:rPr>
-              <a:t>Drive</a:t>
-            </a:r>
-            <a:r>
-              <a:rPr lang="ko-KR" altLang="en-US" sz="1600" dirty="0">
-                <a:latin typeface="D2Coding" panose="020B0609020101020101" pitchFamily="49" charset="-127"/>
-                <a:ea typeface="D2Coding" panose="020B0609020101020101" pitchFamily="49" charset="-127"/>
-              </a:rPr>
-              <a:t> </a:t>
-            </a:r>
-            <a:r>
-              <a:rPr lang="ko-KR" altLang="en-US" sz="1600" dirty="0" err="1">
-                <a:latin typeface="D2Coding" panose="020B0609020101020101" pitchFamily="49" charset="-127"/>
-                <a:ea typeface="D2Coding" panose="020B0609020101020101" pitchFamily="49" charset="-127"/>
-              </a:rPr>
-              <a:t>Trigger</a:t>
-            </a:r>
-            <a:r>
-              <a:rPr lang="ko-KR" altLang="en-US" sz="1600" dirty="0">
-                <a:latin typeface="D2Coding" panose="020B0609020101020101" pitchFamily="49" charset="-127"/>
-                <a:ea typeface="D2Coding" panose="020B0609020101020101" pitchFamily="49" charset="-127"/>
-              </a:rPr>
-              <a:t> ➔ </a:t>
-            </a:r>
-            <a:r>
-              <a:rPr lang="ko-KR" altLang="en-US" sz="1600" dirty="0" err="1">
-                <a:latin typeface="D2Coding" panose="020B0609020101020101" pitchFamily="49" charset="-127"/>
-                <a:ea typeface="D2Coding" panose="020B0609020101020101" pitchFamily="49" charset="-127"/>
-              </a:rPr>
-              <a:t>Download</a:t>
-            </a:r>
-            <a:r>
-              <a:rPr lang="ko-KR" altLang="en-US" sz="1600" dirty="0">
-                <a:latin typeface="D2Coding" panose="020B0609020101020101" pitchFamily="49" charset="-127"/>
-                <a:ea typeface="D2Coding" panose="020B0609020101020101" pitchFamily="49" charset="-127"/>
-              </a:rPr>
-              <a:t> </a:t>
-            </a:r>
-            <a:r>
-              <a:rPr lang="ko-KR" altLang="en-US" sz="1600" dirty="0" err="1">
-                <a:latin typeface="D2Coding" panose="020B0609020101020101" pitchFamily="49" charset="-127"/>
-                <a:ea typeface="D2Coding" panose="020B0609020101020101" pitchFamily="49" charset="-127"/>
-              </a:rPr>
-              <a:t>file</a:t>
-            </a:r>
-            <a:r>
-              <a:rPr lang="ko-KR" altLang="en-US" sz="1600" dirty="0">
-                <a:latin typeface="D2Coding" panose="020B0609020101020101" pitchFamily="49" charset="-127"/>
-                <a:ea typeface="D2Coding" panose="020B0609020101020101" pitchFamily="49" charset="-127"/>
-              </a:rPr>
-              <a:t>)</a:t>
-            </a:r>
-          </a:p>
-          <a:p>
-            <a:pPr marL="742950" lvl="1" indent="-285750">
+            <a:pPr marL="285750" indent="-285750">
               <a:lnSpc>
                 <a:spcPct val="150000"/>
               </a:lnSpc>
               <a:buFont typeface="Wingdings" panose="05000000000000000000" pitchFamily="2" charset="2"/>
-              <a:buChar char="§"/>
+              <a:buChar char="v"/>
             </a:pPr>
             <a:r>
-              <a:rPr lang="ko-KR" altLang="en-US" sz="1400" dirty="0">
-                <a:latin typeface="D2Coding" panose="020B0609020101020101" pitchFamily="49" charset="-127"/>
-                <a:ea typeface="D2Coding" panose="020B0609020101020101" pitchFamily="49" charset="-127"/>
-              </a:rPr>
-              <a:t>구글 드라이브에서 대상 파일(PDF 등)이 추가되거나 수정되면 트리거가 동작</a:t>
-            </a:r>
-          </a:p>
-          <a:p>
-            <a:pPr marL="742950" lvl="1" indent="-285750">
-              <a:lnSpc>
-                <a:spcPct val="150000"/>
-              </a:lnSpc>
-              <a:buFont typeface="Wingdings" panose="05000000000000000000" pitchFamily="2" charset="2"/>
-              <a:buChar char="§"/>
-            </a:pPr>
-            <a:r>
-              <a:rPr lang="ko-KR" altLang="en-US" sz="1400" dirty="0" err="1">
-                <a:latin typeface="D2Coding" panose="020B0609020101020101" pitchFamily="49" charset="-127"/>
-                <a:ea typeface="D2Coding" panose="020B0609020101020101" pitchFamily="49" charset="-127"/>
-              </a:rPr>
-              <a:t>Download</a:t>
-            </a:r>
-            <a:r>
-              <a:rPr lang="ko-KR" altLang="en-US" sz="1400" dirty="0">
+              <a:rPr lang="ko-KR" altLang="en-US" sz="1600" dirty="0">
+                <a:latin typeface="D2Coding" panose="020B0609020101020101" pitchFamily="49" charset="-127"/>
+                <a:ea typeface="D2Coding" panose="020B0609020101020101" pitchFamily="49" charset="-127"/>
+              </a:rPr>
+              <a:t>강의 자료</a:t>
+            </a:r>
+            <a:r>
+              <a:rPr lang="en-US" altLang="ko-KR" sz="1600" dirty="0">
+                <a:latin typeface="D2Coding" panose="020B0609020101020101" pitchFamily="49" charset="-127"/>
+                <a:ea typeface="D2Coding" panose="020B0609020101020101" pitchFamily="49" charset="-127"/>
+              </a:rPr>
+              <a:t>(pdf)</a:t>
+            </a:r>
+            <a:r>
+              <a:rPr lang="ko-KR" altLang="en-US" sz="1600" dirty="0">
+                <a:latin typeface="D2Coding" panose="020B0609020101020101" pitchFamily="49" charset="-127"/>
+                <a:ea typeface="D2Coding" panose="020B0609020101020101" pitchFamily="49" charset="-127"/>
+              </a:rPr>
+              <a:t>를 </a:t>
+            </a:r>
+            <a:r>
+              <a:rPr lang="en-US" altLang="ko-KR" sz="1600" dirty="0">
+                <a:latin typeface="D2Coding" panose="020B0609020101020101" pitchFamily="49" charset="-127"/>
+                <a:ea typeface="D2Coding" panose="020B0609020101020101" pitchFamily="49" charset="-127"/>
+              </a:rPr>
+              <a:t>Vector DB</a:t>
+            </a:r>
+            <a:r>
+              <a:rPr lang="ko-KR" altLang="en-US" sz="1600" dirty="0">
+                <a:latin typeface="D2Coding" panose="020B0609020101020101" pitchFamily="49" charset="-127"/>
+                <a:ea typeface="D2Coding" panose="020B0609020101020101" pitchFamily="49" charset="-127"/>
+              </a:rPr>
+              <a:t>에 저장하고 조상구에 대해 질문하면 </a:t>
+            </a:r>
+            <a:r>
+              <a:rPr lang="en-US" altLang="ko-KR" sz="1600" dirty="0">
+                <a:latin typeface="D2Coding" panose="020B0609020101020101" pitchFamily="49" charset="-127"/>
+                <a:ea typeface="D2Coding" panose="020B0609020101020101" pitchFamily="49" charset="-127"/>
+              </a:rPr>
+              <a:t>DB</a:t>
+            </a:r>
+            <a:r>
+              <a:rPr lang="ko-KR" altLang="en-US" sz="1600" dirty="0">
+                <a:latin typeface="D2Coding" panose="020B0609020101020101" pitchFamily="49" charset="-127"/>
+                <a:ea typeface="D2Coding" panose="020B0609020101020101" pitchFamily="49" charset="-127"/>
+              </a:rPr>
+              <a:t>를 검색하여 답변 </a:t>
+            </a:r>
+            <a:r>
+              <a:rPr lang="en-US" altLang="ko-KR" sz="1600" b="1" dirty="0">
+                <a:latin typeface="D2Coding" panose="020B0609020101020101" pitchFamily="49" charset="-127"/>
+                <a:ea typeface="D2Coding" panose="020B0609020101020101" pitchFamily="49" charset="-127"/>
+              </a:rPr>
+              <a:t>(Vetor DB + </a:t>
+            </a:r>
+            <a:r>
+              <a:rPr lang="ko-KR" altLang="en-US" sz="1600" b="1" dirty="0">
+                <a:latin typeface="D2Coding" panose="020B0609020101020101" pitchFamily="49" charset="-127"/>
+                <a:ea typeface="D2Coding" panose="020B0609020101020101" pitchFamily="49" charset="-127"/>
+              </a:rPr>
+              <a:t>질문 </a:t>
+            </a:r>
+            <a:r>
+              <a:rPr lang="en-US" altLang="ko-KR" sz="1600" b="1" dirty="0">
+                <a:latin typeface="D2Coding" panose="020B0609020101020101" pitchFamily="49" charset="-127"/>
+                <a:ea typeface="D2Coding" panose="020B0609020101020101" pitchFamily="49" charset="-127"/>
+              </a:rPr>
+              <a:t>= Prompt)</a:t>
+            </a:r>
+            <a:r>
+              <a:rPr lang="ko-KR" altLang="en-US" sz="1600" b="1" dirty="0">
                 <a:latin typeface="D2Coding" panose="020B0609020101020101" pitchFamily="49" charset="-127"/>
                 <a:ea typeface="D2Coding" panose="020B0609020101020101" pitchFamily="49" charset="-127"/>
               </a:rPr>
               <a:t> </a:t>
-            </a:r>
-            <a:r>
-              <a:rPr lang="ko-KR" altLang="en-US" sz="1400" dirty="0" err="1">
-                <a:latin typeface="D2Coding" panose="020B0609020101020101" pitchFamily="49" charset="-127"/>
-                <a:ea typeface="D2Coding" panose="020B0609020101020101" pitchFamily="49" charset="-127"/>
-              </a:rPr>
-              <a:t>file</a:t>
-            </a:r>
-            <a:r>
-              <a:rPr lang="ko-KR" altLang="en-US" sz="1400" dirty="0">
-                <a:latin typeface="D2Coding" panose="020B0609020101020101" pitchFamily="49" charset="-127"/>
-                <a:ea typeface="D2Coding" panose="020B0609020101020101" pitchFamily="49" charset="-127"/>
-              </a:rPr>
-              <a:t> 노드가 감지된 파일의 실제 원본 바이너리 데이터를 받아오기</a:t>
             </a:r>
           </a:p>
         </p:txBody>
@@ -17228,7 +20593,7 @@
 </p:sld>
 </file>
 
-<file path=ppt/slides/slide39.xml><?xml version="1.0" encoding="utf-8"?>
+<file path=ppt/slides/slide44.xml><?xml version="1.0" encoding="utf-8"?>
 <p:sld xmlns:a="http://schemas.openxmlformats.org/drawingml/2006/main" xmlns:r="http://schemas.openxmlformats.org/officeDocument/2006/relationships" xmlns:p="http://schemas.openxmlformats.org/presentationml/2006/main">
   <p:cSld>
     <p:spTree>
@@ -17579,480 +20944,7 @@
 </p:sld>
 </file>
 
-<file path=ppt/slides/slide4.xml><?xml version="1.0" encoding="utf-8"?>
-<p:sld xmlns:a="http://schemas.openxmlformats.org/drawingml/2006/main" xmlns:r="http://schemas.openxmlformats.org/officeDocument/2006/relationships" xmlns:p="http://schemas.openxmlformats.org/presentationml/2006/main">
-  <p:cSld>
-    <p:spTree>
-      <p:nvGrpSpPr>
-        <p:cNvPr id="1" name="">
-          <a:extLst>
-            <a:ext uri="{FF2B5EF4-FFF2-40B4-BE49-F238E27FC236}">
-              <a16:creationId xmlns:a16="http://schemas.microsoft.com/office/drawing/2014/main" id="{B9201801-38E9-1C82-2118-6D80106739EC}"/>
-            </a:ext>
-          </a:extLst>
-        </p:cNvPr>
-        <p:cNvGrpSpPr/>
-        <p:nvPr/>
-      </p:nvGrpSpPr>
-      <p:grpSpPr>
-        <a:xfrm>
-          <a:off x="0" y="0"/>
-          <a:ext cx="0" cy="0"/>
-          <a:chOff x="0" y="0"/>
-          <a:chExt cx="0" cy="0"/>
-        </a:xfrm>
-      </p:grpSpPr>
-      <p:sp>
-        <p:nvSpPr>
-          <p:cNvPr id="4" name="슬라이드 번호 개체 틀 3">
-            <a:extLst>
-              <a:ext uri="{FF2B5EF4-FFF2-40B4-BE49-F238E27FC236}">
-                <a16:creationId xmlns:a16="http://schemas.microsoft.com/office/drawing/2014/main" id="{30EBE383-5F3B-1B62-8A0E-1EA54A3F7764}"/>
-              </a:ext>
-            </a:extLst>
-          </p:cNvPr>
-          <p:cNvSpPr>
-            <a:spLocks noGrp="1"/>
-          </p:cNvSpPr>
-          <p:nvPr>
-            <p:ph type="sldNum" sz="quarter" idx="12"/>
-          </p:nvPr>
-        </p:nvSpPr>
-        <p:spPr>
-          <a:xfrm>
-            <a:off x="10514011" y="6036261"/>
-            <a:ext cx="753545" cy="365125"/>
-          </a:xfrm>
-        </p:spPr>
-        <p:txBody>
-          <a:bodyPr/>
-          <a:lstStyle/>
-          <a:p>
-            <a:fld id="{D57F1E4F-1CFF-5643-939E-217C01CDF565}" type="slidenum">
-              <a:rPr lang="en-US" smtClean="0"/>
-              <a:pPr/>
-              <a:t>4</a:t>
-            </a:fld>
-            <a:endParaRPr lang="en-US" dirty="0"/>
-          </a:p>
-        </p:txBody>
-      </p:sp>
-      <p:sp>
-        <p:nvSpPr>
-          <p:cNvPr id="3" name="제목 1">
-            <a:extLst>
-              <a:ext uri="{FF2B5EF4-FFF2-40B4-BE49-F238E27FC236}">
-                <a16:creationId xmlns:a16="http://schemas.microsoft.com/office/drawing/2014/main" id="{CD27D49A-48A1-ABDE-6217-723B707453A1}"/>
-              </a:ext>
-            </a:extLst>
-          </p:cNvPr>
-          <p:cNvSpPr txBox="1">
-            <a:spLocks/>
-          </p:cNvSpPr>
-          <p:nvPr/>
-        </p:nvSpPr>
-        <p:spPr>
-          <a:xfrm>
-            <a:off x="475645" y="481983"/>
-            <a:ext cx="10353762" cy="766439"/>
-          </a:xfrm>
-          <a:prstGeom prst="rect">
-            <a:avLst/>
-          </a:prstGeom>
-        </p:spPr>
-        <p:txBody>
-          <a:bodyPr vert="horz" lIns="91440" tIns="45720" rIns="91440" bIns="45720" rtlCol="0" anchor="ctr">
-            <a:normAutofit/>
-          </a:bodyPr>
-          <a:lstStyle>
-            <a:lvl1pPr algn="ctr" defTabSz="914400" rtl="0" eaLnBrk="1" latinLnBrk="1" hangingPunct="1">
-              <a:lnSpc>
-                <a:spcPct val="90000"/>
-              </a:lnSpc>
-              <a:spcBef>
-                <a:spcPct val="0"/>
-              </a:spcBef>
-              <a:buNone/>
-              <a:defRPr sz="3200" kern="1200" cap="all" baseline="0">
-                <a:solidFill>
-                  <a:schemeClr val="tx1"/>
-                </a:solidFill>
-                <a:effectLst/>
-                <a:latin typeface="Batang" panose="02030600000101010101" pitchFamily="18" charset="-127"/>
-                <a:ea typeface="Batang" panose="02030600000101010101" pitchFamily="18" charset="-127"/>
-                <a:cs typeface="+mj-cs"/>
-              </a:defRPr>
-            </a:lvl1pPr>
-          </a:lstStyle>
-          <a:p>
-            <a:pPr algn="l"/>
-            <a:r>
-              <a:rPr lang="en-US" altLang="ko-KR" sz="2800" cap="none" dirty="0">
-                <a:solidFill>
-                  <a:schemeClr val="bg2">
-                    <a:lumMod val="25000"/>
-                  </a:schemeClr>
-                </a:solidFill>
-                <a:latin typeface="D2Coding" panose="020B0609020101020101" pitchFamily="49" charset="-127"/>
-                <a:ea typeface="D2Coding" panose="020B0609020101020101" pitchFamily="49" charset="-127"/>
-                <a:cs typeface="Segoe UI Light" panose="020B0502040204020203" pitchFamily="34" charset="0"/>
-              </a:rPr>
-              <a:t>n8n</a:t>
-            </a:r>
-            <a:r>
-              <a:rPr lang="ko-KR" altLang="en-US" sz="2800" cap="none" dirty="0">
-                <a:solidFill>
-                  <a:schemeClr val="bg2">
-                    <a:lumMod val="25000"/>
-                  </a:schemeClr>
-                </a:solidFill>
-                <a:latin typeface="D2Coding" panose="020B0609020101020101" pitchFamily="49" charset="-127"/>
-                <a:ea typeface="D2Coding" panose="020B0609020101020101" pitchFamily="49" charset="-127"/>
-                <a:cs typeface="Segoe UI Light" panose="020B0502040204020203" pitchFamily="34" charset="0"/>
-              </a:rPr>
-              <a:t> </a:t>
-            </a:r>
-            <a:r>
-              <a:rPr lang="en-US" altLang="ko-KR" sz="2800" cap="none" dirty="0">
-                <a:solidFill>
-                  <a:schemeClr val="bg2">
-                    <a:lumMod val="25000"/>
-                  </a:schemeClr>
-                </a:solidFill>
-                <a:latin typeface="D2Coding" panose="020B0609020101020101" pitchFamily="49" charset="-127"/>
-                <a:ea typeface="D2Coding" panose="020B0609020101020101" pitchFamily="49" charset="-127"/>
-                <a:cs typeface="Segoe UI Light" panose="020B0502040204020203" pitchFamily="34" charset="0"/>
-              </a:rPr>
-              <a:t>Local</a:t>
-            </a:r>
-            <a:r>
-              <a:rPr lang="ko-KR" altLang="en-US" sz="2800" cap="none" dirty="0">
-                <a:solidFill>
-                  <a:schemeClr val="bg2">
-                    <a:lumMod val="25000"/>
-                  </a:schemeClr>
-                </a:solidFill>
-                <a:latin typeface="D2Coding" panose="020B0609020101020101" pitchFamily="49" charset="-127"/>
-                <a:ea typeface="D2Coding" panose="020B0609020101020101" pitchFamily="49" charset="-127"/>
-                <a:cs typeface="Segoe UI Light" panose="020B0502040204020203" pitchFamily="34" charset="0"/>
-              </a:rPr>
-              <a:t> </a:t>
-            </a:r>
-            <a:r>
-              <a:rPr lang="en-US" altLang="ko-KR" sz="2800" cap="none" dirty="0">
-                <a:solidFill>
-                  <a:schemeClr val="bg2">
-                    <a:lumMod val="25000"/>
-                  </a:schemeClr>
-                </a:solidFill>
-                <a:latin typeface="D2Coding" panose="020B0609020101020101" pitchFamily="49" charset="-127"/>
-                <a:ea typeface="D2Coding" panose="020B0609020101020101" pitchFamily="49" charset="-127"/>
-                <a:cs typeface="Segoe UI Light" panose="020B0502040204020203" pitchFamily="34" charset="0"/>
-              </a:rPr>
-              <a:t>Server</a:t>
-            </a:r>
-            <a:endParaRPr lang="ko-KR" altLang="en-US" sz="2800" cap="none" dirty="0">
-              <a:solidFill>
-                <a:schemeClr val="bg2">
-                  <a:lumMod val="25000"/>
-                </a:schemeClr>
-              </a:solidFill>
-              <a:latin typeface="D2Coding" panose="020B0609020101020101" pitchFamily="49" charset="-127"/>
-              <a:ea typeface="D2Coding" panose="020B0609020101020101" pitchFamily="49" charset="-127"/>
-              <a:cs typeface="Segoe UI Light" panose="020B0502040204020203" pitchFamily="34" charset="0"/>
-            </a:endParaRPr>
-          </a:p>
-        </p:txBody>
-      </p:sp>
-      <p:sp>
-        <p:nvSpPr>
-          <p:cNvPr id="6" name="TextBox 5">
-            <a:extLst>
-              <a:ext uri="{FF2B5EF4-FFF2-40B4-BE49-F238E27FC236}">
-                <a16:creationId xmlns:a16="http://schemas.microsoft.com/office/drawing/2014/main" id="{947ED8AC-21BD-6160-8144-D8DAB7FB4395}"/>
-              </a:ext>
-            </a:extLst>
-          </p:cNvPr>
-          <p:cNvSpPr txBox="1"/>
-          <p:nvPr/>
-        </p:nvSpPr>
-        <p:spPr>
-          <a:xfrm>
-            <a:off x="663576" y="1789759"/>
-            <a:ext cx="10680699" cy="2846741"/>
-          </a:xfrm>
-          <a:prstGeom prst="rect">
-            <a:avLst/>
-          </a:prstGeom>
-          <a:noFill/>
-        </p:spPr>
-        <p:txBody>
-          <a:bodyPr wrap="square">
-            <a:spAutoFit/>
-          </a:bodyPr>
-          <a:lstStyle/>
-          <a:p>
-            <a:pPr>
-              <a:lnSpc>
-                <a:spcPct val="200000"/>
-              </a:lnSpc>
-            </a:pPr>
-            <a:r>
-              <a:rPr lang="en-US" altLang="ko-KR" sz="2000" dirty="0">
-                <a:latin typeface="D2Coding" panose="020B0609020101020101" pitchFamily="49" charset="-127"/>
-                <a:ea typeface="D2Coding" panose="020B0609020101020101" pitchFamily="49" charset="-127"/>
-              </a:rPr>
-              <a:t>n8n </a:t>
-            </a:r>
-            <a:r>
-              <a:rPr lang="ko-KR" altLang="en-US" sz="2000" dirty="0">
-                <a:latin typeface="D2Coding" panose="020B0609020101020101" pitchFamily="49" charset="-127"/>
-                <a:ea typeface="D2Coding" panose="020B0609020101020101" pitchFamily="49" charset="-127"/>
-              </a:rPr>
-              <a:t>설치 방법</a:t>
-            </a:r>
-            <a:endParaRPr lang="en-US" altLang="ko-KR" sz="2000" dirty="0">
-              <a:latin typeface="D2Coding" panose="020B0609020101020101" pitchFamily="49" charset="-127"/>
-              <a:ea typeface="D2Coding" panose="020B0609020101020101" pitchFamily="49" charset="-127"/>
-            </a:endParaRPr>
-          </a:p>
-          <a:p>
-            <a:pPr marL="285750" indent="-285750">
-              <a:lnSpc>
-                <a:spcPct val="200000"/>
-              </a:lnSpc>
-              <a:buFont typeface="Wingdings" panose="05000000000000000000" pitchFamily="2" charset="2"/>
-              <a:buChar char="v"/>
-            </a:pPr>
-            <a:r>
-              <a:rPr lang="en-US" altLang="ko-KR" dirty="0">
-                <a:latin typeface="D2Coding" panose="020B0609020101020101" pitchFamily="49" charset="-127"/>
-                <a:ea typeface="D2Coding" panose="020B0609020101020101" pitchFamily="49" charset="-127"/>
-                <a:hlinkClick r:id="rId2"/>
-              </a:rPr>
-              <a:t>WSL</a:t>
-            </a:r>
-            <a:r>
-              <a:rPr lang="ko-KR" altLang="en-US" dirty="0">
-                <a:latin typeface="D2Coding" panose="020B0609020101020101" pitchFamily="49" charset="-127"/>
-                <a:ea typeface="D2Coding" panose="020B0609020101020101" pitchFamily="49" charset="-127"/>
-              </a:rPr>
-              <a:t> 설치하고 </a:t>
-            </a:r>
-            <a:r>
-              <a:rPr lang="en-US" altLang="ko-KR" dirty="0" err="1">
-                <a:latin typeface="D2Coding" panose="020B0609020101020101" pitchFamily="49" charset="-127"/>
-                <a:ea typeface="D2Coding" panose="020B0609020101020101" pitchFamily="49" charset="-127"/>
-              </a:rPr>
-              <a:t>Ubutu</a:t>
-            </a:r>
-            <a:r>
-              <a:rPr lang="en-US" altLang="ko-KR" dirty="0">
-                <a:latin typeface="D2Coding" panose="020B0609020101020101" pitchFamily="49" charset="-127"/>
-                <a:ea typeface="D2Coding" panose="020B0609020101020101" pitchFamily="49" charset="-127"/>
-              </a:rPr>
-              <a:t> </a:t>
-            </a:r>
-            <a:r>
-              <a:rPr lang="ko-KR" altLang="en-US" dirty="0">
-                <a:latin typeface="D2Coding" panose="020B0609020101020101" pitchFamily="49" charset="-127"/>
-                <a:ea typeface="D2Coding" panose="020B0609020101020101" pitchFamily="49" charset="-127"/>
-              </a:rPr>
-              <a:t>올리시고</a:t>
-            </a:r>
-            <a:endParaRPr lang="en-US" altLang="ko-KR" dirty="0">
-              <a:latin typeface="D2Coding" panose="020B0609020101020101" pitchFamily="49" charset="-127"/>
-              <a:ea typeface="D2Coding" panose="020B0609020101020101" pitchFamily="49" charset="-127"/>
-            </a:endParaRPr>
-          </a:p>
-          <a:p>
-            <a:pPr marL="285750" indent="-285750">
-              <a:lnSpc>
-                <a:spcPct val="200000"/>
-              </a:lnSpc>
-              <a:buFont typeface="Wingdings" panose="05000000000000000000" pitchFamily="2" charset="2"/>
-              <a:buChar char="v"/>
-            </a:pPr>
-            <a:r>
-              <a:rPr lang="en-US" altLang="ko-KR" dirty="0">
-                <a:latin typeface="D2Coding" panose="020B0609020101020101" pitchFamily="49" charset="-127"/>
-                <a:ea typeface="D2Coding" panose="020B0609020101020101" pitchFamily="49" charset="-127"/>
-                <a:hlinkClick r:id="rId3"/>
-              </a:rPr>
-              <a:t>docker </a:t>
-            </a:r>
-            <a:r>
-              <a:rPr lang="en-US" altLang="ko-KR" dirty="0" err="1">
-                <a:latin typeface="D2Coding" panose="020B0609020101020101" pitchFamily="49" charset="-127"/>
-                <a:ea typeface="D2Coding" panose="020B0609020101020101" pitchFamily="49" charset="-127"/>
-                <a:hlinkClick r:id="rId3"/>
-              </a:rPr>
-              <a:t>desltop</a:t>
-            </a:r>
-            <a:r>
-              <a:rPr lang="ko-KR" altLang="en-US" dirty="0">
-                <a:latin typeface="D2Coding" panose="020B0609020101020101" pitchFamily="49" charset="-127"/>
-                <a:ea typeface="D2Coding" panose="020B0609020101020101" pitchFamily="49" charset="-127"/>
-              </a:rPr>
-              <a:t> 으로 </a:t>
-            </a:r>
-            <a:r>
-              <a:rPr lang="en-US" altLang="ko-KR" dirty="0">
-                <a:latin typeface="D2Coding" panose="020B0609020101020101" pitchFamily="49" charset="-127"/>
-                <a:ea typeface="D2Coding" panose="020B0609020101020101" pitchFamily="49" charset="-127"/>
-              </a:rPr>
-              <a:t>Docker </a:t>
-            </a:r>
-            <a:r>
-              <a:rPr lang="ko-KR" altLang="en-US" dirty="0">
-                <a:latin typeface="D2Coding" panose="020B0609020101020101" pitchFamily="49" charset="-127"/>
-                <a:ea typeface="D2Coding" panose="020B0609020101020101" pitchFamily="49" charset="-127"/>
-              </a:rPr>
-              <a:t>묻고</a:t>
-            </a:r>
-            <a:endParaRPr lang="en-US" altLang="ko-KR" dirty="0">
-              <a:latin typeface="D2Coding" panose="020B0609020101020101" pitchFamily="49" charset="-127"/>
-              <a:ea typeface="D2Coding" panose="020B0609020101020101" pitchFamily="49" charset="-127"/>
-            </a:endParaRPr>
-          </a:p>
-          <a:p>
-            <a:pPr marL="285750" indent="-285750">
-              <a:lnSpc>
-                <a:spcPct val="200000"/>
-              </a:lnSpc>
-              <a:buFont typeface="Wingdings" panose="05000000000000000000" pitchFamily="2" charset="2"/>
-              <a:buChar char="v"/>
-            </a:pPr>
-            <a:r>
-              <a:rPr lang="ko-KR" altLang="en-US" dirty="0">
-                <a:latin typeface="D2Coding" panose="020B0609020101020101" pitchFamily="49" charset="-127"/>
-                <a:ea typeface="D2Coding" panose="020B0609020101020101" pitchFamily="49" charset="-127"/>
-                <a:hlinkClick r:id="rId4"/>
-              </a:rPr>
-              <a:t>자동화 </a:t>
-            </a:r>
-            <a:r>
-              <a:rPr lang="ko-KR" altLang="en-US" dirty="0" err="1">
-                <a:latin typeface="D2Coding" panose="020B0609020101020101" pitchFamily="49" charset="-127"/>
-                <a:ea typeface="D2Coding" panose="020B0609020101020101" pitchFamily="49" charset="-127"/>
-                <a:hlinkClick r:id="rId4"/>
-              </a:rPr>
-              <a:t>끝판왕</a:t>
-            </a:r>
-            <a:r>
-              <a:rPr lang="ko-KR" altLang="en-US" dirty="0">
-                <a:latin typeface="D2Coding" panose="020B0609020101020101" pitchFamily="49" charset="-127"/>
-                <a:ea typeface="D2Coding" panose="020B0609020101020101" pitchFamily="49" charset="-127"/>
-                <a:hlinkClick r:id="rId4"/>
-              </a:rPr>
-              <a:t> </a:t>
-            </a:r>
-            <a:r>
-              <a:rPr lang="en-US" altLang="ko-KR" dirty="0">
-                <a:latin typeface="D2Coding" panose="020B0609020101020101" pitchFamily="49" charset="-127"/>
-                <a:ea typeface="D2Coding" panose="020B0609020101020101" pitchFamily="49" charset="-127"/>
-                <a:hlinkClick r:id="rId4"/>
-              </a:rPr>
-              <a:t>n8n, </a:t>
-            </a:r>
-            <a:r>
-              <a:rPr lang="ko-KR" altLang="en-US" dirty="0">
-                <a:latin typeface="D2Coding" panose="020B0609020101020101" pitchFamily="49" charset="-127"/>
-                <a:ea typeface="D2Coding" panose="020B0609020101020101" pitchFamily="49" charset="-127"/>
-                <a:hlinkClick r:id="rId4"/>
-              </a:rPr>
-              <a:t>이렇게 설치하면 평생 무료입니다</a:t>
-            </a:r>
-            <a:r>
-              <a:rPr lang="en-US" altLang="ko-KR" dirty="0">
-                <a:latin typeface="D2Coding" panose="020B0609020101020101" pitchFamily="49" charset="-127"/>
-                <a:ea typeface="D2Coding" panose="020B0609020101020101" pitchFamily="49" charset="-127"/>
-                <a:hlinkClick r:id="rId4"/>
-              </a:rPr>
-              <a:t>! (</a:t>
-            </a:r>
-            <a:r>
-              <a:rPr lang="ko-KR" altLang="en-US" dirty="0" err="1">
-                <a:latin typeface="D2Coding" panose="020B0609020101020101" pitchFamily="49" charset="-127"/>
-                <a:ea typeface="D2Coding" panose="020B0609020101020101" pitchFamily="49" charset="-127"/>
-                <a:hlinkClick r:id="rId4"/>
-              </a:rPr>
-              <a:t>웹훅</a:t>
-            </a:r>
-            <a:r>
-              <a:rPr lang="ko-KR" altLang="en-US" dirty="0">
-                <a:latin typeface="D2Coding" panose="020B0609020101020101" pitchFamily="49" charset="-127"/>
-                <a:ea typeface="D2Coding" panose="020B0609020101020101" pitchFamily="49" charset="-127"/>
-                <a:hlinkClick r:id="rId4"/>
-              </a:rPr>
-              <a:t> 설정</a:t>
-            </a:r>
-            <a:r>
-              <a:rPr lang="en-US" altLang="ko-KR" dirty="0">
-                <a:latin typeface="D2Coding" panose="020B0609020101020101" pitchFamily="49" charset="-127"/>
-                <a:ea typeface="D2Coding" panose="020B0609020101020101" pitchFamily="49" charset="-127"/>
-                <a:hlinkClick r:id="rId4"/>
-              </a:rPr>
-              <a:t>, </a:t>
-            </a:r>
-            <a:r>
-              <a:rPr lang="ko-KR" altLang="en-US" dirty="0">
-                <a:latin typeface="D2Coding" panose="020B0609020101020101" pitchFamily="49" charset="-127"/>
-                <a:ea typeface="D2Coding" panose="020B0609020101020101" pitchFamily="49" charset="-127"/>
-                <a:hlinkClick r:id="rId4"/>
-              </a:rPr>
-              <a:t>버전 업데이트 포함</a:t>
-            </a:r>
-            <a:r>
-              <a:rPr lang="en-US" altLang="ko-KR" dirty="0">
-                <a:latin typeface="D2Coding" panose="020B0609020101020101" pitchFamily="49" charset="-127"/>
-                <a:ea typeface="D2Coding" panose="020B0609020101020101" pitchFamily="49" charset="-127"/>
-                <a:hlinkClick r:id="rId4"/>
-              </a:rPr>
-              <a:t>)</a:t>
-            </a:r>
-            <a:r>
-              <a:rPr lang="ko-KR" altLang="en-US" dirty="0">
-                <a:latin typeface="D2Coding" panose="020B0609020101020101" pitchFamily="49" charset="-127"/>
-                <a:ea typeface="D2Coding" panose="020B0609020101020101" pitchFamily="49" charset="-127"/>
-              </a:rPr>
-              <a:t> 보시고 따라해서 </a:t>
-            </a:r>
-            <a:r>
-              <a:rPr lang="en-US" altLang="ko-KR" dirty="0">
-                <a:latin typeface="D2Coding" panose="020B0609020101020101" pitchFamily="49" charset="-127"/>
-                <a:ea typeface="D2Coding" panose="020B0609020101020101" pitchFamily="49" charset="-127"/>
-              </a:rPr>
-              <a:t>n8n </a:t>
-            </a:r>
-            <a:r>
-              <a:rPr lang="ko-KR" altLang="en-US" dirty="0">
-                <a:latin typeface="D2Coding" panose="020B0609020101020101" pitchFamily="49" charset="-127"/>
-                <a:ea typeface="D2Coding" panose="020B0609020101020101" pitchFamily="49" charset="-127"/>
-              </a:rPr>
-              <a:t>로컬에 설치</a:t>
-            </a:r>
-            <a:endParaRPr lang="en-US" altLang="ko-KR" dirty="0">
-              <a:latin typeface="D2Coding" panose="020B0609020101020101" pitchFamily="49" charset="-127"/>
-              <a:ea typeface="D2Coding" panose="020B0609020101020101" pitchFamily="49" charset="-127"/>
-            </a:endParaRPr>
-          </a:p>
-        </p:txBody>
-      </p:sp>
-    </p:spTree>
-    <p:extLst>
-      <p:ext uri="{BB962C8B-B14F-4D97-AF65-F5344CB8AC3E}">
-        <p14:creationId xmlns:p14="http://schemas.microsoft.com/office/powerpoint/2010/main" val="457506288"/>
-      </p:ext>
-    </p:extLst>
-  </p:cSld>
-  <p:clrMapOvr>
-    <a:masterClrMapping/>
-  </p:clrMapOvr>
-</p:sld>
-</file>
-
-<file path=ppt/slides/slide40.xml><?xml version="1.0" encoding="utf-8"?>
+<file path=ppt/slides/slide45.xml><?xml version="1.0" encoding="utf-8"?>
 <p:sld xmlns:a="http://schemas.openxmlformats.org/drawingml/2006/main" xmlns:r="http://schemas.openxmlformats.org/officeDocument/2006/relationships" xmlns:p="http://schemas.openxmlformats.org/presentationml/2006/main">
   <p:cSld>
     <p:spTree>
@@ -19197,7 +22089,7 @@
                 <a:ea typeface="Segoe UI Emoji" panose="020B0502040204020203" pitchFamily="34" charset="0"/>
               </a:rPr>
               <a:pPr/>
-              <a:t>40</a:t>
+              <a:t>45</a:t>
             </a:fld>
             <a:endParaRPr lang="en-US" b="1" dirty="0">
               <a:latin typeface="Segoe UI Emoji" panose="020B0502040204020203" pitchFamily="34" charset="0"/>
@@ -19219,7 +22111,7 @@
 </p:sld>
 </file>
 
-<file path=ppt/slides/slide41.xml><?xml version="1.0" encoding="utf-8"?>
+<file path=ppt/slides/slide46.xml><?xml version="1.0" encoding="utf-8"?>
 <p:sld xmlns:a="http://schemas.openxmlformats.org/drawingml/2006/main" xmlns:r="http://schemas.openxmlformats.org/officeDocument/2006/relationships" xmlns:p="http://schemas.openxmlformats.org/presentationml/2006/main">
   <p:cSld>
     <p:spTree>
@@ -20001,7 +22893,7 @@
                 <a:ea typeface="Segoe UI Emoji" panose="020B0502040204020203" pitchFamily="34" charset="0"/>
               </a:rPr>
               <a:pPr/>
-              <a:t>41</a:t>
+              <a:t>46</a:t>
             </a:fld>
             <a:endParaRPr lang="en-US" b="1" dirty="0">
               <a:latin typeface="Segoe UI Emoji" panose="020B0502040204020203" pitchFamily="34" charset="0"/>
@@ -20023,7 +22915,7 @@
 </p:sld>
 </file>
 
-<file path=ppt/slides/slide42.xml><?xml version="1.0" encoding="utf-8"?>
+<file path=ppt/slides/slide47.xml><?xml version="1.0" encoding="utf-8"?>
 <p:sld xmlns:a="http://schemas.openxmlformats.org/drawingml/2006/main" xmlns:r="http://schemas.openxmlformats.org/officeDocument/2006/relationships" xmlns:p="http://schemas.openxmlformats.org/presentationml/2006/main">
   <p:cSld>
     <p:spTree>
@@ -20311,7 +23203,7 @@
                 <a:ea typeface="Segoe UI Emoji" panose="020B0502040204020203" pitchFamily="34" charset="0"/>
               </a:rPr>
               <a:pPr/>
-              <a:t>42</a:t>
+              <a:t>47</a:t>
             </a:fld>
             <a:endParaRPr lang="en-US" b="1" dirty="0">
               <a:latin typeface="Segoe UI Emoji" panose="020B0502040204020203" pitchFamily="34" charset="0"/>
